--- a/presentations/project2_presentation.pptx
+++ b/presentations/project2_presentation.pptx
@@ -1,34 +1,134 @@
 
 <file path=ppt/presentation.xml><?xml version="1.0" encoding="utf-8"?>
-<p:presentation xmlns:a="http://schemas.openxmlformats.org/drawingml/2006/main" xmlns:p="http://schemas.openxmlformats.org/presentationml/2006/main" xmlns:r="http://schemas.openxmlformats.org/officeDocument/2006/relationships" xmlns:p14="http://schemas.microsoft.com/office/powerpoint/2010/main" xmlns:p15="http://schemas.microsoft.com/office/powerpoint/2012/main" xmlns:mc="http://schemas.openxmlformats.org/markup-compatibility/2006">
+<p:presentation xmlns:a="http://schemas.openxmlformats.org/drawingml/2006/main" xmlns:r="http://schemas.openxmlformats.org/officeDocument/2006/relationships" xmlns:p="http://schemas.openxmlformats.org/presentationml/2006/main">
   <p:sldMasterIdLst>
-    <p:sldMasterId id="2147483648" r:id="rId2"/>
+    <p:sldMasterId id="2147483648" r:id="rId1"/>
   </p:sldMasterIdLst>
   <p:sldIdLst>
-    <p:sldId id="256" r:id="rId3"/>
-    <p:sldId id="257" r:id="rId4"/>
-    <p:sldId id="258" r:id="rId5"/>
-    <p:sldId id="259" r:id="rId6"/>
-    <p:sldId id="260" r:id="rId7"/>
-    <p:sldId id="261" r:id="rId8"/>
-    <p:sldId id="262" r:id="rId9"/>
-    <p:sldId id="263" r:id="rId10"/>
-    <p:sldId id="264" r:id="rId11"/>
-    <p:sldId id="265" r:id="rId12"/>
-    <p:sldId id="266" r:id="rId13"/>
-    <p:sldId id="267" r:id="rId14"/>
-    <p:sldId id="268" r:id="rId15"/>
-    <p:sldId id="269" r:id="rId16"/>
-    <p:sldId id="270" r:id="rId17"/>
-    <p:sldId id="271" r:id="rId18"/>
+    <p:sldId id="256" r:id="rId2"/>
+    <p:sldId id="257" r:id="rId3"/>
+    <p:sldId id="258" r:id="rId4"/>
+    <p:sldId id="259" r:id="rId5"/>
+    <p:sldId id="260" r:id="rId6"/>
+    <p:sldId id="261" r:id="rId7"/>
+    <p:sldId id="262" r:id="rId8"/>
+    <p:sldId id="263" r:id="rId9"/>
+    <p:sldId id="264" r:id="rId10"/>
+    <p:sldId id="265" r:id="rId11"/>
+    <p:sldId id="266" r:id="rId12"/>
+    <p:sldId id="267" r:id="rId13"/>
+    <p:sldId id="268" r:id="rId14"/>
+    <p:sldId id="269" r:id="rId15"/>
+    <p:sldId id="270" r:id="rId16"/>
+    <p:sldId id="271" r:id="rId17"/>
   </p:sldIdLst>
   <p:sldSz cx="10080625" cy="5670550"/>
   <p:notesSz cx="7772400" cy="10058400"/>
+  <p:defaultTextStyle>
+    <a:defPPr>
+      <a:defRPr lang="en-US"/>
+    </a:defPPr>
+    <a:lvl1pPr marL="0" algn="l" defTabSz="914400" rtl="0" eaLnBrk="1" latinLnBrk="0" hangingPunct="1">
+      <a:defRPr sz="1800" kern="1200">
+        <a:solidFill>
+          <a:schemeClr val="tx1"/>
+        </a:solidFill>
+        <a:latin typeface="+mn-lt"/>
+        <a:ea typeface="+mn-ea"/>
+        <a:cs typeface="+mn-cs"/>
+      </a:defRPr>
+    </a:lvl1pPr>
+    <a:lvl2pPr marL="457200" algn="l" defTabSz="914400" rtl="0" eaLnBrk="1" latinLnBrk="0" hangingPunct="1">
+      <a:defRPr sz="1800" kern="1200">
+        <a:solidFill>
+          <a:schemeClr val="tx1"/>
+        </a:solidFill>
+        <a:latin typeface="+mn-lt"/>
+        <a:ea typeface="+mn-ea"/>
+        <a:cs typeface="+mn-cs"/>
+      </a:defRPr>
+    </a:lvl2pPr>
+    <a:lvl3pPr marL="914400" algn="l" defTabSz="914400" rtl="0" eaLnBrk="1" latinLnBrk="0" hangingPunct="1">
+      <a:defRPr sz="1800" kern="1200">
+        <a:solidFill>
+          <a:schemeClr val="tx1"/>
+        </a:solidFill>
+        <a:latin typeface="+mn-lt"/>
+        <a:ea typeface="+mn-ea"/>
+        <a:cs typeface="+mn-cs"/>
+      </a:defRPr>
+    </a:lvl3pPr>
+    <a:lvl4pPr marL="1371600" algn="l" defTabSz="914400" rtl="0" eaLnBrk="1" latinLnBrk="0" hangingPunct="1">
+      <a:defRPr sz="1800" kern="1200">
+        <a:solidFill>
+          <a:schemeClr val="tx1"/>
+        </a:solidFill>
+        <a:latin typeface="+mn-lt"/>
+        <a:ea typeface="+mn-ea"/>
+        <a:cs typeface="+mn-cs"/>
+      </a:defRPr>
+    </a:lvl4pPr>
+    <a:lvl5pPr marL="1828800" algn="l" defTabSz="914400" rtl="0" eaLnBrk="1" latinLnBrk="0" hangingPunct="1">
+      <a:defRPr sz="1800" kern="1200">
+        <a:solidFill>
+          <a:schemeClr val="tx1"/>
+        </a:solidFill>
+        <a:latin typeface="+mn-lt"/>
+        <a:ea typeface="+mn-ea"/>
+        <a:cs typeface="+mn-cs"/>
+      </a:defRPr>
+    </a:lvl5pPr>
+    <a:lvl6pPr marL="2286000" algn="l" defTabSz="914400" rtl="0" eaLnBrk="1" latinLnBrk="0" hangingPunct="1">
+      <a:defRPr sz="1800" kern="1200">
+        <a:solidFill>
+          <a:schemeClr val="tx1"/>
+        </a:solidFill>
+        <a:latin typeface="+mn-lt"/>
+        <a:ea typeface="+mn-ea"/>
+        <a:cs typeface="+mn-cs"/>
+      </a:defRPr>
+    </a:lvl6pPr>
+    <a:lvl7pPr marL="2743200" algn="l" defTabSz="914400" rtl="0" eaLnBrk="1" latinLnBrk="0" hangingPunct="1">
+      <a:defRPr sz="1800" kern="1200">
+        <a:solidFill>
+          <a:schemeClr val="tx1"/>
+        </a:solidFill>
+        <a:latin typeface="+mn-lt"/>
+        <a:ea typeface="+mn-ea"/>
+        <a:cs typeface="+mn-cs"/>
+      </a:defRPr>
+    </a:lvl7pPr>
+    <a:lvl8pPr marL="3200400" algn="l" defTabSz="914400" rtl="0" eaLnBrk="1" latinLnBrk="0" hangingPunct="1">
+      <a:defRPr sz="1800" kern="1200">
+        <a:solidFill>
+          <a:schemeClr val="tx1"/>
+        </a:solidFill>
+        <a:latin typeface="+mn-lt"/>
+        <a:ea typeface="+mn-ea"/>
+        <a:cs typeface="+mn-cs"/>
+      </a:defRPr>
+    </a:lvl8pPr>
+    <a:lvl9pPr marL="3657600" algn="l" defTabSz="914400" rtl="0" eaLnBrk="1" latinLnBrk="0" hangingPunct="1">
+      <a:defRPr sz="1800" kern="1200">
+        <a:solidFill>
+          <a:schemeClr val="tx1"/>
+        </a:solidFill>
+        <a:latin typeface="+mn-lt"/>
+        <a:ea typeface="+mn-ea"/>
+        <a:cs typeface="+mn-cs"/>
+      </a:defRPr>
+    </a:lvl9pPr>
+  </p:defaultTextStyle>
+  <p:extLst>
+    <p:ext uri="{EFAFB233-063F-42B5-8137-9DF3F51BA10A}">
+      <p15:sldGuideLst xmlns:p15="http://schemas.microsoft.com/office/powerpoint/2012/main"/>
+    </p:ext>
+  </p:extLst>
 </p:presentation>
 </file>
 
 <file path=ppt/slideLayouts/slideLayout1.xml><?xml version="1.0" encoding="utf-8"?>
-<p:sldLayout xmlns:a="http://schemas.openxmlformats.org/drawingml/2006/main" xmlns:p="http://schemas.openxmlformats.org/presentationml/2006/main" xmlns:r="http://schemas.openxmlformats.org/officeDocument/2006/relationships" xmlns:p14="http://schemas.microsoft.com/office/powerpoint/2010/main" xmlns:p15="http://schemas.microsoft.com/office/powerpoint/2012/main" xmlns:mc="http://schemas.openxmlformats.org/markup-compatibility/2006" type="tx" preserve="1">
+<p:sldLayout xmlns:a="http://schemas.openxmlformats.org/drawingml/2006/main" xmlns:r="http://schemas.openxmlformats.org/officeDocument/2006/relationships" xmlns:p="http://schemas.openxmlformats.org/presentationml/2006/main" type="tx" preserve="1">
   <p:cSld name="Blueprint Plans">
     <p:spTree>
       <p:nvGrpSpPr>
@@ -46,15 +146,15 @@
       </p:grpSpPr>
       <p:pic>
         <p:nvPicPr>
-          <p:cNvPr id="2" name=""/>
+          <p:cNvPr id="2" name="Graphic 1"/>
           <p:cNvPicPr/>
           <p:nvPr/>
         </p:nvPicPr>
         <p:blipFill>
-          <a:blip r:embed="rId2">
+          <a:blip>
             <a:extLst>
               <a:ext uri="{96DAC541-7B7A-43D3-8B79-37D633B846F1}">
-                <asvg:svgBlip xmlns:asvg="http://schemas.microsoft.com/office/drawing/2016/SVG/main" r:embed="rId3"/>
+                <asvg:svgBlip xmlns:asvg="http://schemas.microsoft.com/office/drawing/2016/SVG/main" r:embed="rId2"/>
               </a:ext>
             </a:extLst>
           </a:blip>
@@ -129,14 +229,6 @@
               </a:rPr>
               <a:t>Click to edit the title text format</a:t>
             </a:r>
-            <a:endParaRPr lang="en-US" sz="4400" b="0" u="none" strike="noStrike">
-              <a:solidFill>
-                <a:srgbClr val="FFFFFF"/>
-              </a:solidFill>
-              <a:effectLst/>
-              <a:uFillTx/>
-              <a:latin typeface="Arial"/>
-            </a:endParaRPr>
           </a:p>
         </p:txBody>
       </p:sp>
@@ -325,14 +417,6 @@
               </a:rPr>
               <a:t>Click to edit the outline text format</a:t>
             </a:r>
-            <a:endParaRPr lang="en-US" sz="3200" b="0" u="none" strike="noStrike">
-              <a:solidFill>
-                <a:srgbClr val="FFFFFF"/>
-              </a:solidFill>
-              <a:effectLst/>
-              <a:uFillTx/>
-              <a:latin typeface="Arial"/>
-            </a:endParaRPr>
           </a:p>
           <a:p>
             <a:pPr marL="864000" lvl="1" indent="-324000" algn="l">
@@ -357,14 +441,6 @@
               </a:rPr>
               <a:t>Second Outline Level</a:t>
             </a:r>
-            <a:endParaRPr lang="en-US" sz="2400" b="0" u="none" strike="noStrike">
-              <a:solidFill>
-                <a:srgbClr val="FFFFFF"/>
-              </a:solidFill>
-              <a:effectLst/>
-              <a:uFillTx/>
-              <a:latin typeface="Arial"/>
-            </a:endParaRPr>
           </a:p>
           <a:p>
             <a:pPr marL="1296000" lvl="2" indent="-288000" algn="l">
@@ -389,14 +465,6 @@
               </a:rPr>
               <a:t>Third Outline Level</a:t>
             </a:r>
-            <a:endParaRPr lang="en-US" sz="1800" b="0" u="none" strike="noStrike">
-              <a:solidFill>
-                <a:srgbClr val="FFFFFF"/>
-              </a:solidFill>
-              <a:effectLst/>
-              <a:uFillTx/>
-              <a:latin typeface="Arial"/>
-            </a:endParaRPr>
           </a:p>
           <a:p>
             <a:pPr marL="1728000" lvl="3" indent="-216000" algn="l">
@@ -421,14 +489,6 @@
               </a:rPr>
               <a:t>Fourth Outline Level</a:t>
             </a:r>
-            <a:endParaRPr lang="en-US" sz="1500" b="0" u="none" strike="noStrike">
-              <a:solidFill>
-                <a:srgbClr val="FFFFFF"/>
-              </a:solidFill>
-              <a:effectLst/>
-              <a:uFillTx/>
-              <a:latin typeface="Arial"/>
-            </a:endParaRPr>
           </a:p>
           <a:p>
             <a:pPr marL="2160000" lvl="4" indent="-216000" algn="l">
@@ -453,14 +513,6 @@
               </a:rPr>
               <a:t>Fifth Outline Level</a:t>
             </a:r>
-            <a:endParaRPr lang="en-US" sz="1500" b="0" u="none" strike="noStrike">
-              <a:solidFill>
-                <a:srgbClr val="FFFFFF"/>
-              </a:solidFill>
-              <a:effectLst/>
-              <a:uFillTx/>
-              <a:latin typeface="Arial"/>
-            </a:endParaRPr>
           </a:p>
           <a:p>
             <a:pPr marL="2592000" lvl="5" indent="-216000" algn="l">
@@ -485,14 +537,6 @@
               </a:rPr>
               <a:t>Sixth Outline Level</a:t>
             </a:r>
-            <a:endParaRPr lang="en-US" sz="1500" b="0" u="none" strike="noStrike">
-              <a:solidFill>
-                <a:srgbClr val="FFFFFF"/>
-              </a:solidFill>
-              <a:effectLst/>
-              <a:uFillTx/>
-              <a:latin typeface="Arial"/>
-            </a:endParaRPr>
           </a:p>
           <a:p>
             <a:pPr marL="3024000" lvl="6" indent="-216000" algn="l">
@@ -517,14 +561,6 @@
               </a:rPr>
               <a:t>Seventh Outline Level</a:t>
             </a:r>
-            <a:endParaRPr lang="en-US" sz="1500" b="0" u="none" strike="noStrike">
-              <a:solidFill>
-                <a:srgbClr val="FFFFFF"/>
-              </a:solidFill>
-              <a:effectLst/>
-              <a:uFillTx/>
-              <a:latin typeface="Arial"/>
-            </a:endParaRPr>
           </a:p>
         </p:txBody>
       </p:sp>
@@ -583,14 +619,6 @@
               </a:rPr>
               <a:t>&lt;date/time&gt;</a:t>
             </a:r>
-            <a:endParaRPr lang="en-US" sz="1400" b="0" u="none" strike="noStrike">
-              <a:solidFill>
-                <a:srgbClr val="FFFFFF"/>
-              </a:solidFill>
-              <a:effectLst/>
-              <a:uFillTx/>
-              <a:latin typeface="Arial"/>
-            </a:endParaRPr>
           </a:p>
         </p:txBody>
       </p:sp>
@@ -649,14 +677,6 @@
               </a:rPr>
               <a:t>&lt;footer&gt;</a:t>
             </a:r>
-            <a:endParaRPr lang="en-US" sz="1400" b="0" u="none" strike="noStrike">
-              <a:solidFill>
-                <a:srgbClr val="FFFFFF"/>
-              </a:solidFill>
-              <a:effectLst/>
-              <a:uFillTx/>
-              <a:latin typeface="Arial"/>
-            </a:endParaRPr>
           </a:p>
         </p:txBody>
       </p:sp>
@@ -713,7 +733,7 @@
                 <a:uFillTx/>
                 <a:latin typeface="Arial"/>
               </a:rPr>
-              <a:t>&lt;number&gt;</a:t>
+              <a:t>‹#›</a:t>
             </a:fld>
             <a:endParaRPr lang="en-US" sz="1400" b="0" u="none" strike="noStrike">
               <a:solidFill>
@@ -728,11 +748,14 @@
       </p:sp>
     </p:spTree>
   </p:cSld>
+  <p:clrMapOvr>
+    <a:masterClrMapping/>
+  </p:clrMapOvr>
 </p:sldLayout>
 </file>
 
 <file path=ppt/slideLayouts/slideLayout2.xml><?xml version="1.0" encoding="utf-8"?>
-<p:sldLayout xmlns:a="http://schemas.openxmlformats.org/drawingml/2006/main" xmlns:p="http://schemas.openxmlformats.org/presentationml/2006/main" xmlns:r="http://schemas.openxmlformats.org/officeDocument/2006/relationships" xmlns:p14="http://schemas.microsoft.com/office/powerpoint/2010/main" xmlns:p15="http://schemas.microsoft.com/office/powerpoint/2012/main" xmlns:mc="http://schemas.openxmlformats.org/markup-compatibility/2006" type="title" preserve="1">
+<p:sldLayout xmlns:a="http://schemas.openxmlformats.org/drawingml/2006/main" xmlns:r="http://schemas.openxmlformats.org/officeDocument/2006/relationships" xmlns:p="http://schemas.openxmlformats.org/presentationml/2006/main" type="title" preserve="1">
   <p:cSld name="Blueprint Plans">
     <p:spTree>
       <p:nvGrpSpPr>
@@ -750,15 +773,15 @@
       </p:grpSpPr>
       <p:pic>
         <p:nvPicPr>
-          <p:cNvPr id="8" name=""/>
+          <p:cNvPr id="8" name="Graphic 7"/>
           <p:cNvPicPr/>
           <p:nvPr/>
         </p:nvPicPr>
         <p:blipFill>
-          <a:blip r:embed="rId2">
+          <a:blip>
             <a:extLst>
               <a:ext uri="{96DAC541-7B7A-43D3-8B79-37D633B846F1}">
-                <asvg:svgBlip xmlns:asvg="http://schemas.microsoft.com/office/drawing/2016/SVG/main" r:embed="rId3"/>
+                <asvg:svgBlip xmlns:asvg="http://schemas.microsoft.com/office/drawing/2016/SVG/main" r:embed="rId2"/>
               </a:ext>
             </a:extLst>
           </a:blip>
@@ -833,14 +856,6 @@
               </a:rPr>
               <a:t>Click to edit the title text format</a:t>
             </a:r>
-            <a:endParaRPr lang="en-US" sz="4400" b="0" u="none" strike="noStrike">
-              <a:solidFill>
-                <a:srgbClr val="FFFFFF"/>
-              </a:solidFill>
-              <a:effectLst/>
-              <a:uFillTx/>
-              <a:latin typeface="Arial"/>
-            </a:endParaRPr>
           </a:p>
         </p:txBody>
       </p:sp>
@@ -1029,14 +1044,6 @@
               </a:rPr>
               <a:t>Click to edit the outline text format</a:t>
             </a:r>
-            <a:endParaRPr lang="en-US" sz="3200" b="0" u="none" strike="noStrike">
-              <a:solidFill>
-                <a:srgbClr val="FFFFFF"/>
-              </a:solidFill>
-              <a:effectLst/>
-              <a:uFillTx/>
-              <a:latin typeface="Arial"/>
-            </a:endParaRPr>
           </a:p>
           <a:p>
             <a:pPr marL="864000" lvl="1" indent="-324000" algn="l">
@@ -1061,14 +1068,6 @@
               </a:rPr>
               <a:t>Second Outline Level</a:t>
             </a:r>
-            <a:endParaRPr lang="en-US" sz="2400" b="0" u="none" strike="noStrike">
-              <a:solidFill>
-                <a:srgbClr val="FFFFFF"/>
-              </a:solidFill>
-              <a:effectLst/>
-              <a:uFillTx/>
-              <a:latin typeface="Arial"/>
-            </a:endParaRPr>
           </a:p>
           <a:p>
             <a:pPr marL="1296000" lvl="2" indent="-288000" algn="l">
@@ -1093,14 +1092,6 @@
               </a:rPr>
               <a:t>Third Outline Level</a:t>
             </a:r>
-            <a:endParaRPr lang="en-US" sz="1800" b="0" u="none" strike="noStrike">
-              <a:solidFill>
-                <a:srgbClr val="FFFFFF"/>
-              </a:solidFill>
-              <a:effectLst/>
-              <a:uFillTx/>
-              <a:latin typeface="Arial"/>
-            </a:endParaRPr>
           </a:p>
           <a:p>
             <a:pPr marL="1728000" lvl="3" indent="-216000" algn="l">
@@ -1125,14 +1116,6 @@
               </a:rPr>
               <a:t>Fourth Outline Level</a:t>
             </a:r>
-            <a:endParaRPr lang="en-US" sz="1500" b="0" u="none" strike="noStrike">
-              <a:solidFill>
-                <a:srgbClr val="FFFFFF"/>
-              </a:solidFill>
-              <a:effectLst/>
-              <a:uFillTx/>
-              <a:latin typeface="Arial"/>
-            </a:endParaRPr>
           </a:p>
           <a:p>
             <a:pPr marL="2160000" lvl="4" indent="-216000" algn="l">
@@ -1157,14 +1140,6 @@
               </a:rPr>
               <a:t>Fifth Outline Level</a:t>
             </a:r>
-            <a:endParaRPr lang="en-US" sz="1500" b="0" u="none" strike="noStrike">
-              <a:solidFill>
-                <a:srgbClr val="FFFFFF"/>
-              </a:solidFill>
-              <a:effectLst/>
-              <a:uFillTx/>
-              <a:latin typeface="Arial"/>
-            </a:endParaRPr>
           </a:p>
           <a:p>
             <a:pPr marL="2592000" lvl="5" indent="-216000" algn="l">
@@ -1189,14 +1164,6 @@
               </a:rPr>
               <a:t>Sixth Outline Level</a:t>
             </a:r>
-            <a:endParaRPr lang="en-US" sz="1500" b="0" u="none" strike="noStrike">
-              <a:solidFill>
-                <a:srgbClr val="FFFFFF"/>
-              </a:solidFill>
-              <a:effectLst/>
-              <a:uFillTx/>
-              <a:latin typeface="Arial"/>
-            </a:endParaRPr>
           </a:p>
           <a:p>
             <a:pPr marL="3024000" lvl="6" indent="-216000" algn="l">
@@ -1221,14 +1188,6 @@
               </a:rPr>
               <a:t>Seventh Outline Level</a:t>
             </a:r>
-            <a:endParaRPr lang="en-US" sz="1500" b="0" u="none" strike="noStrike">
-              <a:solidFill>
-                <a:srgbClr val="FFFFFF"/>
-              </a:solidFill>
-              <a:effectLst/>
-              <a:uFillTx/>
-              <a:latin typeface="Arial"/>
-            </a:endParaRPr>
           </a:p>
         </p:txBody>
       </p:sp>
@@ -1287,14 +1246,6 @@
               </a:rPr>
               <a:t>&lt;date/time&gt;</a:t>
             </a:r>
-            <a:endParaRPr lang="en-US" sz="1400" b="0" u="none" strike="noStrike">
-              <a:solidFill>
-                <a:srgbClr val="FFFFFF"/>
-              </a:solidFill>
-              <a:effectLst/>
-              <a:uFillTx/>
-              <a:latin typeface="Arial"/>
-            </a:endParaRPr>
           </a:p>
         </p:txBody>
       </p:sp>
@@ -1353,14 +1304,6 @@
               </a:rPr>
               <a:t>&lt;footer&gt;</a:t>
             </a:r>
-            <a:endParaRPr lang="en-US" sz="1400" b="0" u="none" strike="noStrike">
-              <a:solidFill>
-                <a:srgbClr val="FFFFFF"/>
-              </a:solidFill>
-              <a:effectLst/>
-              <a:uFillTx/>
-              <a:latin typeface="Arial"/>
-            </a:endParaRPr>
           </a:p>
         </p:txBody>
       </p:sp>
@@ -1417,7 +1360,7 @@
                 <a:uFillTx/>
                 <a:latin typeface="Arial"/>
               </a:rPr>
-              <a:t>&lt;number&gt;</a:t>
+              <a:t>‹#›</a:t>
             </a:fld>
             <a:endParaRPr lang="en-US" sz="1400" b="0" u="none" strike="noStrike">
               <a:solidFill>
@@ -1432,11 +1375,14 @@
       </p:sp>
     </p:spTree>
   </p:cSld>
+  <p:clrMapOvr>
+    <a:masterClrMapping/>
+  </p:clrMapOvr>
 </p:sldLayout>
 </file>
 
 <file path=ppt/slideLayouts/slideLayout3.xml><?xml version="1.0" encoding="utf-8"?>
-<p:sldLayout xmlns:a="http://schemas.openxmlformats.org/drawingml/2006/main" xmlns:p="http://schemas.openxmlformats.org/presentationml/2006/main" xmlns:r="http://schemas.openxmlformats.org/officeDocument/2006/relationships" xmlns:p14="http://schemas.microsoft.com/office/powerpoint/2010/main" xmlns:p15="http://schemas.microsoft.com/office/powerpoint/2012/main" xmlns:mc="http://schemas.openxmlformats.org/markup-compatibility/2006" type="tx" preserve="1">
+<p:sldLayout xmlns:a="http://schemas.openxmlformats.org/drawingml/2006/main" xmlns:r="http://schemas.openxmlformats.org/officeDocument/2006/relationships" xmlns:p="http://schemas.openxmlformats.org/presentationml/2006/main" type="tx" preserve="1">
   <p:cSld name="Standard">
     <p:spTree>
       <p:nvGrpSpPr>
@@ -1454,15 +1400,15 @@
       </p:grpSpPr>
       <p:pic>
         <p:nvPicPr>
-          <p:cNvPr id="14" name=""/>
+          <p:cNvPr id="14" name="Graphic 13"/>
           <p:cNvPicPr/>
           <p:nvPr/>
         </p:nvPicPr>
         <p:blipFill>
-          <a:blip r:embed="rId2">
+          <a:blip>
             <a:extLst>
               <a:ext uri="{96DAC541-7B7A-43D3-8B79-37D633B846F1}">
-                <asvg:svgBlip xmlns:asvg="http://schemas.microsoft.com/office/drawing/2016/SVG/main" r:embed="rId3"/>
+                <asvg:svgBlip xmlns:asvg="http://schemas.microsoft.com/office/drawing/2016/SVG/main" r:embed="rId2"/>
               </a:ext>
             </a:extLst>
           </a:blip>
@@ -1537,14 +1483,6 @@
               </a:rPr>
               <a:t>Click to edit the title text format</a:t>
             </a:r>
-            <a:endParaRPr lang="en-US" sz="3300" b="0" u="none" strike="noStrike">
-              <a:solidFill>
-                <a:srgbClr val="000000"/>
-              </a:solidFill>
-              <a:effectLst/>
-              <a:uFillTx/>
-              <a:latin typeface="Arial"/>
-            </a:endParaRPr>
           </a:p>
         </p:txBody>
       </p:sp>
@@ -1733,14 +1671,6 @@
               </a:rPr>
               <a:t>Click to edit the outline text format</a:t>
             </a:r>
-            <a:endParaRPr lang="en-US" sz="2400" b="0" u="none" strike="noStrike">
-              <a:solidFill>
-                <a:srgbClr val="000000"/>
-              </a:solidFill>
-              <a:effectLst/>
-              <a:uFillTx/>
-              <a:latin typeface="Arial"/>
-            </a:endParaRPr>
           </a:p>
           <a:p>
             <a:pPr marL="864000" lvl="1" indent="-324000" algn="l">
@@ -1765,14 +1695,6 @@
               </a:rPr>
               <a:t>Second Outline Level</a:t>
             </a:r>
-            <a:endParaRPr lang="en-US" sz="2100" b="0" u="none" strike="noStrike">
-              <a:solidFill>
-                <a:srgbClr val="000000"/>
-              </a:solidFill>
-              <a:effectLst/>
-              <a:uFillTx/>
-              <a:latin typeface="Arial"/>
-            </a:endParaRPr>
           </a:p>
           <a:p>
             <a:pPr marL="1296000" lvl="2" indent="-288000" algn="l">
@@ -1797,14 +1719,6 @@
               </a:rPr>
               <a:t>Third Outline Level</a:t>
             </a:r>
-            <a:endParaRPr lang="en-US" sz="1800" b="0" u="none" strike="noStrike">
-              <a:solidFill>
-                <a:srgbClr val="000000"/>
-              </a:solidFill>
-              <a:effectLst/>
-              <a:uFillTx/>
-              <a:latin typeface="Arial"/>
-            </a:endParaRPr>
           </a:p>
           <a:p>
             <a:pPr marL="1728000" lvl="3" indent="-216000" algn="l">
@@ -1829,14 +1743,6 @@
               </a:rPr>
               <a:t>Fourth Outline Level</a:t>
             </a:r>
-            <a:endParaRPr lang="en-US" sz="1500" b="0" u="none" strike="noStrike">
-              <a:solidFill>
-                <a:srgbClr val="000000"/>
-              </a:solidFill>
-              <a:effectLst/>
-              <a:uFillTx/>
-              <a:latin typeface="Arial"/>
-            </a:endParaRPr>
           </a:p>
           <a:p>
             <a:pPr marL="2160000" lvl="4" indent="-216000" algn="l">
@@ -1861,14 +1767,6 @@
               </a:rPr>
               <a:t>Fifth Outline Level</a:t>
             </a:r>
-            <a:endParaRPr lang="en-US" sz="1500" b="0" u="none" strike="noStrike">
-              <a:solidFill>
-                <a:srgbClr val="000000"/>
-              </a:solidFill>
-              <a:effectLst/>
-              <a:uFillTx/>
-              <a:latin typeface="Arial"/>
-            </a:endParaRPr>
           </a:p>
           <a:p>
             <a:pPr marL="2592000" lvl="5" indent="-216000" algn="l">
@@ -1893,14 +1791,6 @@
               </a:rPr>
               <a:t>Sixth Outline Level</a:t>
             </a:r>
-            <a:endParaRPr lang="en-US" sz="1500" b="0" u="none" strike="noStrike">
-              <a:solidFill>
-                <a:srgbClr val="000000"/>
-              </a:solidFill>
-              <a:effectLst/>
-              <a:uFillTx/>
-              <a:latin typeface="Arial"/>
-            </a:endParaRPr>
           </a:p>
           <a:p>
             <a:pPr marL="3024000" lvl="6" indent="-216000" algn="l">
@@ -1925,14 +1815,6 @@
               </a:rPr>
               <a:t>Seventh Outline Level</a:t>
             </a:r>
-            <a:endParaRPr lang="en-US" sz="1500" b="0" u="none" strike="noStrike">
-              <a:solidFill>
-                <a:srgbClr val="000000"/>
-              </a:solidFill>
-              <a:effectLst/>
-              <a:uFillTx/>
-              <a:latin typeface="Arial"/>
-            </a:endParaRPr>
           </a:p>
         </p:txBody>
       </p:sp>
@@ -1991,14 +1873,6 @@
               </a:rPr>
               <a:t>&lt;date/time&gt;</a:t>
             </a:r>
-            <a:endParaRPr lang="en-US" sz="1400" b="0" u="none" strike="noStrike">
-              <a:solidFill>
-                <a:srgbClr val="000000"/>
-              </a:solidFill>
-              <a:effectLst/>
-              <a:uFillTx/>
-              <a:latin typeface="Arial"/>
-            </a:endParaRPr>
           </a:p>
         </p:txBody>
       </p:sp>
@@ -2057,14 +1931,6 @@
               </a:rPr>
               <a:t>&lt;footer&gt;</a:t>
             </a:r>
-            <a:endParaRPr lang="en-US" sz="1400" b="0" u="none" strike="noStrike">
-              <a:solidFill>
-                <a:srgbClr val="000000"/>
-              </a:solidFill>
-              <a:effectLst/>
-              <a:uFillTx/>
-              <a:latin typeface="Arial"/>
-            </a:endParaRPr>
           </a:p>
         </p:txBody>
       </p:sp>
@@ -2121,7 +1987,7 @@
                 <a:uFillTx/>
                 <a:latin typeface="Arial"/>
               </a:rPr>
-              <a:t>&lt;number&gt;</a:t>
+              <a:t>‹#›</a:t>
             </a:fld>
             <a:endParaRPr lang="en-US" sz="1400" b="0" u="none" strike="noStrike">
               <a:solidFill>
@@ -2136,12 +2002,20 @@
       </p:sp>
     </p:spTree>
   </p:cSld>
+  <p:clrMapOvr>
+    <a:masterClrMapping/>
+  </p:clrMapOvr>
 </p:sldLayout>
 </file>
 
 <file path=ppt/slideMasters/slideMaster1.xml><?xml version="1.0" encoding="utf-8"?>
-<p:sldMaster xmlns:a="http://schemas.openxmlformats.org/drawingml/2006/main" xmlns:p="http://schemas.openxmlformats.org/presentationml/2006/main" xmlns:r="http://schemas.openxmlformats.org/officeDocument/2006/relationships" xmlns:p14="http://schemas.microsoft.com/office/powerpoint/2010/main" xmlns:p15="http://schemas.microsoft.com/office/powerpoint/2012/main" xmlns:mc="http://schemas.openxmlformats.org/markup-compatibility/2006">
+<p:sldMaster xmlns:a="http://schemas.openxmlformats.org/drawingml/2006/main" xmlns:r="http://schemas.openxmlformats.org/officeDocument/2006/relationships" xmlns:p="http://schemas.openxmlformats.org/presentationml/2006/main">
   <p:cSld>
+    <p:bg>
+      <p:bgRef idx="1001">
+        <a:schemeClr val="bg1"/>
+      </p:bgRef>
+    </p:bg>
     <p:spTree>
       <p:nvGrpSpPr>
         <p:cNvPr id="1" name=""/>
@@ -2160,15 +2034,295 @@
   </p:cSld>
   <p:clrMap bg1="lt1" tx1="dk1" bg2="lt2" tx2="dk2" accent1="accent1" accent2="accent2" accent3="accent3" accent4="accent4" accent5="accent5" accent6="accent6" hlink="hlink" folHlink="folHlink"/>
   <p:sldLayoutIdLst>
-    <p:sldLayoutId id="2147483649" r:id="rId2"/>
-    <p:sldLayoutId id="2147483650" r:id="rId3"/>
-    <p:sldLayoutId id="2147483651" r:id="rId4"/>
+    <p:sldLayoutId id="2147483649" r:id="rId1"/>
+    <p:sldLayoutId id="2147483650" r:id="rId2"/>
+    <p:sldLayoutId id="2147483651" r:id="rId3"/>
   </p:sldLayoutIdLst>
+  <p:txStyles>
+    <p:titleStyle>
+      <a:lvl1pPr algn="l" defTabSz="914400" rtl="0" eaLnBrk="1" latinLnBrk="0" hangingPunct="1">
+        <a:lnSpc>
+          <a:spcPct val="90000"/>
+        </a:lnSpc>
+        <a:spcBef>
+          <a:spcPct val="0"/>
+        </a:spcBef>
+        <a:buNone/>
+        <a:defRPr sz="4400" kern="1200">
+          <a:solidFill>
+            <a:schemeClr val="tx1"/>
+          </a:solidFill>
+          <a:latin typeface="+mj-lt"/>
+          <a:ea typeface="+mj-ea"/>
+          <a:cs typeface="+mj-cs"/>
+        </a:defRPr>
+      </a:lvl1pPr>
+    </p:titleStyle>
+    <p:bodyStyle>
+      <a:lvl1pPr marL="228600" indent="-228600" algn="l" defTabSz="914400" rtl="0" eaLnBrk="1" latinLnBrk="0" hangingPunct="1">
+        <a:lnSpc>
+          <a:spcPct val="90000"/>
+        </a:lnSpc>
+        <a:spcBef>
+          <a:spcPts val="1000"/>
+        </a:spcBef>
+        <a:buFont typeface="Arial" panose="020B0604020202020204" pitchFamily="34" charset="0"/>
+        <a:buChar char="•"/>
+        <a:defRPr sz="2800" kern="1200">
+          <a:solidFill>
+            <a:schemeClr val="tx1"/>
+          </a:solidFill>
+          <a:latin typeface="+mn-lt"/>
+          <a:ea typeface="+mn-ea"/>
+          <a:cs typeface="+mn-cs"/>
+        </a:defRPr>
+      </a:lvl1pPr>
+      <a:lvl2pPr marL="685800" indent="-228600" algn="l" defTabSz="914400" rtl="0" eaLnBrk="1" latinLnBrk="0" hangingPunct="1">
+        <a:lnSpc>
+          <a:spcPct val="90000"/>
+        </a:lnSpc>
+        <a:spcBef>
+          <a:spcPts val="500"/>
+        </a:spcBef>
+        <a:buFont typeface="Arial" panose="020B0604020202020204" pitchFamily="34" charset="0"/>
+        <a:buChar char="•"/>
+        <a:defRPr sz="2400" kern="1200">
+          <a:solidFill>
+            <a:schemeClr val="tx1"/>
+          </a:solidFill>
+          <a:latin typeface="+mn-lt"/>
+          <a:ea typeface="+mn-ea"/>
+          <a:cs typeface="+mn-cs"/>
+        </a:defRPr>
+      </a:lvl2pPr>
+      <a:lvl3pPr marL="1143000" indent="-228600" algn="l" defTabSz="914400" rtl="0" eaLnBrk="1" latinLnBrk="0" hangingPunct="1">
+        <a:lnSpc>
+          <a:spcPct val="90000"/>
+        </a:lnSpc>
+        <a:spcBef>
+          <a:spcPts val="500"/>
+        </a:spcBef>
+        <a:buFont typeface="Arial" panose="020B0604020202020204" pitchFamily="34" charset="0"/>
+        <a:buChar char="•"/>
+        <a:defRPr sz="2000" kern="1200">
+          <a:solidFill>
+            <a:schemeClr val="tx1"/>
+          </a:solidFill>
+          <a:latin typeface="+mn-lt"/>
+          <a:ea typeface="+mn-ea"/>
+          <a:cs typeface="+mn-cs"/>
+        </a:defRPr>
+      </a:lvl3pPr>
+      <a:lvl4pPr marL="1600200" indent="-228600" algn="l" defTabSz="914400" rtl="0" eaLnBrk="1" latinLnBrk="0" hangingPunct="1">
+        <a:lnSpc>
+          <a:spcPct val="90000"/>
+        </a:lnSpc>
+        <a:spcBef>
+          <a:spcPts val="500"/>
+        </a:spcBef>
+        <a:buFont typeface="Arial" panose="020B0604020202020204" pitchFamily="34" charset="0"/>
+        <a:buChar char="•"/>
+        <a:defRPr sz="1800" kern="1200">
+          <a:solidFill>
+            <a:schemeClr val="tx1"/>
+          </a:solidFill>
+          <a:latin typeface="+mn-lt"/>
+          <a:ea typeface="+mn-ea"/>
+          <a:cs typeface="+mn-cs"/>
+        </a:defRPr>
+      </a:lvl4pPr>
+      <a:lvl5pPr marL="2057400" indent="-228600" algn="l" defTabSz="914400" rtl="0" eaLnBrk="1" latinLnBrk="0" hangingPunct="1">
+        <a:lnSpc>
+          <a:spcPct val="90000"/>
+        </a:lnSpc>
+        <a:spcBef>
+          <a:spcPts val="500"/>
+        </a:spcBef>
+        <a:buFont typeface="Arial" panose="020B0604020202020204" pitchFamily="34" charset="0"/>
+        <a:buChar char="•"/>
+        <a:defRPr sz="1800" kern="1200">
+          <a:solidFill>
+            <a:schemeClr val="tx1"/>
+          </a:solidFill>
+          <a:latin typeface="+mn-lt"/>
+          <a:ea typeface="+mn-ea"/>
+          <a:cs typeface="+mn-cs"/>
+        </a:defRPr>
+      </a:lvl5pPr>
+      <a:lvl6pPr marL="2514600" indent="-228600" algn="l" defTabSz="914400" rtl="0" eaLnBrk="1" latinLnBrk="0" hangingPunct="1">
+        <a:lnSpc>
+          <a:spcPct val="90000"/>
+        </a:lnSpc>
+        <a:spcBef>
+          <a:spcPts val="500"/>
+        </a:spcBef>
+        <a:buFont typeface="Arial" panose="020B0604020202020204" pitchFamily="34" charset="0"/>
+        <a:buChar char="•"/>
+        <a:defRPr sz="1800" kern="1200">
+          <a:solidFill>
+            <a:schemeClr val="tx1"/>
+          </a:solidFill>
+          <a:latin typeface="+mn-lt"/>
+          <a:ea typeface="+mn-ea"/>
+          <a:cs typeface="+mn-cs"/>
+        </a:defRPr>
+      </a:lvl6pPr>
+      <a:lvl7pPr marL="2971800" indent="-228600" algn="l" defTabSz="914400" rtl="0" eaLnBrk="1" latinLnBrk="0" hangingPunct="1">
+        <a:lnSpc>
+          <a:spcPct val="90000"/>
+        </a:lnSpc>
+        <a:spcBef>
+          <a:spcPts val="500"/>
+        </a:spcBef>
+        <a:buFont typeface="Arial" panose="020B0604020202020204" pitchFamily="34" charset="0"/>
+        <a:buChar char="•"/>
+        <a:defRPr sz="1800" kern="1200">
+          <a:solidFill>
+            <a:schemeClr val="tx1"/>
+          </a:solidFill>
+          <a:latin typeface="+mn-lt"/>
+          <a:ea typeface="+mn-ea"/>
+          <a:cs typeface="+mn-cs"/>
+        </a:defRPr>
+      </a:lvl7pPr>
+      <a:lvl8pPr marL="3429000" indent="-228600" algn="l" defTabSz="914400" rtl="0" eaLnBrk="1" latinLnBrk="0" hangingPunct="1">
+        <a:lnSpc>
+          <a:spcPct val="90000"/>
+        </a:lnSpc>
+        <a:spcBef>
+          <a:spcPts val="500"/>
+        </a:spcBef>
+        <a:buFont typeface="Arial" panose="020B0604020202020204" pitchFamily="34" charset="0"/>
+        <a:buChar char="•"/>
+        <a:defRPr sz="1800" kern="1200">
+          <a:solidFill>
+            <a:schemeClr val="tx1"/>
+          </a:solidFill>
+          <a:latin typeface="+mn-lt"/>
+          <a:ea typeface="+mn-ea"/>
+          <a:cs typeface="+mn-cs"/>
+        </a:defRPr>
+      </a:lvl8pPr>
+      <a:lvl9pPr marL="3886200" indent="-228600" algn="l" defTabSz="914400" rtl="0" eaLnBrk="1" latinLnBrk="0" hangingPunct="1">
+        <a:lnSpc>
+          <a:spcPct val="90000"/>
+        </a:lnSpc>
+        <a:spcBef>
+          <a:spcPts val="500"/>
+        </a:spcBef>
+        <a:buFont typeface="Arial" panose="020B0604020202020204" pitchFamily="34" charset="0"/>
+        <a:buChar char="•"/>
+        <a:defRPr sz="1800" kern="1200">
+          <a:solidFill>
+            <a:schemeClr val="tx1"/>
+          </a:solidFill>
+          <a:latin typeface="+mn-lt"/>
+          <a:ea typeface="+mn-ea"/>
+          <a:cs typeface="+mn-cs"/>
+        </a:defRPr>
+      </a:lvl9pPr>
+    </p:bodyStyle>
+    <p:otherStyle>
+      <a:defPPr>
+        <a:defRPr lang="en-US"/>
+      </a:defPPr>
+      <a:lvl1pPr marL="0" algn="l" defTabSz="914400" rtl="0" eaLnBrk="1" latinLnBrk="0" hangingPunct="1">
+        <a:defRPr sz="1800" kern="1200">
+          <a:solidFill>
+            <a:schemeClr val="tx1"/>
+          </a:solidFill>
+          <a:latin typeface="+mn-lt"/>
+          <a:ea typeface="+mn-ea"/>
+          <a:cs typeface="+mn-cs"/>
+        </a:defRPr>
+      </a:lvl1pPr>
+      <a:lvl2pPr marL="457200" algn="l" defTabSz="914400" rtl="0" eaLnBrk="1" latinLnBrk="0" hangingPunct="1">
+        <a:defRPr sz="1800" kern="1200">
+          <a:solidFill>
+            <a:schemeClr val="tx1"/>
+          </a:solidFill>
+          <a:latin typeface="+mn-lt"/>
+          <a:ea typeface="+mn-ea"/>
+          <a:cs typeface="+mn-cs"/>
+        </a:defRPr>
+      </a:lvl2pPr>
+      <a:lvl3pPr marL="914400" algn="l" defTabSz="914400" rtl="0" eaLnBrk="1" latinLnBrk="0" hangingPunct="1">
+        <a:defRPr sz="1800" kern="1200">
+          <a:solidFill>
+            <a:schemeClr val="tx1"/>
+          </a:solidFill>
+          <a:latin typeface="+mn-lt"/>
+          <a:ea typeface="+mn-ea"/>
+          <a:cs typeface="+mn-cs"/>
+        </a:defRPr>
+      </a:lvl3pPr>
+      <a:lvl4pPr marL="1371600" algn="l" defTabSz="914400" rtl="0" eaLnBrk="1" latinLnBrk="0" hangingPunct="1">
+        <a:defRPr sz="1800" kern="1200">
+          <a:solidFill>
+            <a:schemeClr val="tx1"/>
+          </a:solidFill>
+          <a:latin typeface="+mn-lt"/>
+          <a:ea typeface="+mn-ea"/>
+          <a:cs typeface="+mn-cs"/>
+        </a:defRPr>
+      </a:lvl4pPr>
+      <a:lvl5pPr marL="1828800" algn="l" defTabSz="914400" rtl="0" eaLnBrk="1" latinLnBrk="0" hangingPunct="1">
+        <a:defRPr sz="1800" kern="1200">
+          <a:solidFill>
+            <a:schemeClr val="tx1"/>
+          </a:solidFill>
+          <a:latin typeface="+mn-lt"/>
+          <a:ea typeface="+mn-ea"/>
+          <a:cs typeface="+mn-cs"/>
+        </a:defRPr>
+      </a:lvl5pPr>
+      <a:lvl6pPr marL="2286000" algn="l" defTabSz="914400" rtl="0" eaLnBrk="1" latinLnBrk="0" hangingPunct="1">
+        <a:defRPr sz="1800" kern="1200">
+          <a:solidFill>
+            <a:schemeClr val="tx1"/>
+          </a:solidFill>
+          <a:latin typeface="+mn-lt"/>
+          <a:ea typeface="+mn-ea"/>
+          <a:cs typeface="+mn-cs"/>
+        </a:defRPr>
+      </a:lvl6pPr>
+      <a:lvl7pPr marL="2743200" algn="l" defTabSz="914400" rtl="0" eaLnBrk="1" latinLnBrk="0" hangingPunct="1">
+        <a:defRPr sz="1800" kern="1200">
+          <a:solidFill>
+            <a:schemeClr val="tx1"/>
+          </a:solidFill>
+          <a:latin typeface="+mn-lt"/>
+          <a:ea typeface="+mn-ea"/>
+          <a:cs typeface="+mn-cs"/>
+        </a:defRPr>
+      </a:lvl7pPr>
+      <a:lvl8pPr marL="3200400" algn="l" defTabSz="914400" rtl="0" eaLnBrk="1" latinLnBrk="0" hangingPunct="1">
+        <a:defRPr sz="1800" kern="1200">
+          <a:solidFill>
+            <a:schemeClr val="tx1"/>
+          </a:solidFill>
+          <a:latin typeface="+mn-lt"/>
+          <a:ea typeface="+mn-ea"/>
+          <a:cs typeface="+mn-cs"/>
+        </a:defRPr>
+      </a:lvl8pPr>
+      <a:lvl9pPr marL="3657600" algn="l" defTabSz="914400" rtl="0" eaLnBrk="1" latinLnBrk="0" hangingPunct="1">
+        <a:defRPr sz="1800" kern="1200">
+          <a:solidFill>
+            <a:schemeClr val="tx1"/>
+          </a:solidFill>
+          <a:latin typeface="+mn-lt"/>
+          <a:ea typeface="+mn-ea"/>
+          <a:cs typeface="+mn-cs"/>
+        </a:defRPr>
+      </a:lvl9pPr>
+    </p:otherStyle>
+  </p:txStyles>
 </p:sldMaster>
 </file>
 
 <file path=ppt/slides/slide1.xml><?xml version="1.0" encoding="utf-8"?>
-<p:sld xmlns:a="http://schemas.openxmlformats.org/drawingml/2006/main" xmlns:p="http://schemas.openxmlformats.org/presentationml/2006/main" xmlns:r="http://schemas.openxmlformats.org/officeDocument/2006/relationships" xmlns:p14="http://schemas.microsoft.com/office/powerpoint/2010/main" xmlns:p15="http://schemas.microsoft.com/office/powerpoint/2012/main" xmlns:mc="http://schemas.openxmlformats.org/markup-compatibility/2006">
+<p:sld xmlns:a="http://schemas.openxmlformats.org/drawingml/2006/main" xmlns:r="http://schemas.openxmlformats.org/officeDocument/2006/relationships" xmlns:p="http://schemas.openxmlformats.org/presentationml/2006/main">
   <p:cSld>
     <p:spTree>
       <p:nvGrpSpPr>
@@ -2211,6 +2365,7 @@
           <a:bodyPr lIns="0" tIns="0" rIns="0" bIns="0" anchor="ctr">
             <a:spAutoFit/>
           </a:bodyPr>
+          <a:lstStyle/>
           <a:p>
             <a:pPr indent="0" algn="ctr">
               <a:buNone/>
@@ -2240,14 +2395,6 @@
               </a:rPr>
               <a:t>A report on Attrition</a:t>
             </a:r>
-            <a:endParaRPr lang="en-US" sz="4400" b="0" u="none" strike="noStrike">
-              <a:solidFill>
-                <a:srgbClr val="FFFFFF"/>
-              </a:solidFill>
-              <a:effectLst/>
-              <a:uFillTx/>
-              <a:latin typeface="Arial"/>
-            </a:endParaRPr>
           </a:p>
         </p:txBody>
       </p:sp>
@@ -2278,6 +2425,7 @@
           <a:bodyPr lIns="0" tIns="0" rIns="0" bIns="0" anchor="ctr">
             <a:spAutoFit/>
           </a:bodyPr>
+          <a:lstStyle/>
           <a:p>
             <a:pPr indent="0" algn="ctr">
               <a:buNone/>
@@ -2293,14 +2441,6 @@
               </a:rPr>
               <a:t>By: </a:t>
             </a:r>
-            <a:endParaRPr lang="en-US" sz="3200" b="0" u="none" strike="noStrike">
-              <a:solidFill>
-                <a:srgbClr val="FFFFFF"/>
-              </a:solidFill>
-              <a:effectLst/>
-              <a:uFillTx/>
-              <a:latin typeface="Arial"/>
-            </a:endParaRPr>
           </a:p>
           <a:p>
             <a:pPr indent="0" algn="ctr">
@@ -2317,14 +2457,6 @@
               </a:rPr>
               <a:t>Stacy Bowler</a:t>
             </a:r>
-            <a:endParaRPr lang="en-US" sz="3200" b="0" u="none" strike="noStrike">
-              <a:solidFill>
-                <a:srgbClr val="FFFFFF"/>
-              </a:solidFill>
-              <a:effectLst/>
-              <a:uFillTx/>
-              <a:latin typeface="Arial"/>
-            </a:endParaRPr>
           </a:p>
           <a:p>
             <a:pPr indent="0" algn="ctr">
@@ -2341,14 +2473,6 @@
               </a:rPr>
               <a:t>and</a:t>
             </a:r>
-            <a:endParaRPr lang="en-US" sz="3200" b="0" u="none" strike="noStrike">
-              <a:solidFill>
-                <a:srgbClr val="FFFFFF"/>
-              </a:solidFill>
-              <a:effectLst/>
-              <a:uFillTx/>
-              <a:latin typeface="Arial"/>
-            </a:endParaRPr>
           </a:p>
           <a:p>
             <a:pPr indent="0" algn="ctr">
@@ -2365,32 +2489,19 @@
               </a:rPr>
               <a:t>Derrik Miller</a:t>
             </a:r>
-            <a:endParaRPr lang="en-US" sz="3200" b="0" u="none" strike="noStrike">
-              <a:solidFill>
-                <a:srgbClr val="FFFFFF"/>
-              </a:solidFill>
-              <a:effectLst/>
-              <a:uFillTx/>
-              <a:latin typeface="Arial"/>
-            </a:endParaRPr>
           </a:p>
         </p:txBody>
       </p:sp>
     </p:spTree>
   </p:cSld>
-  <mc:AlternateContent>
-    <mc:Choice Requires="p14">
-      <p:transition spd="slow" p14:dur="2000"/>
-    </mc:Choice>
-    <mc:Fallback>
-      <p:transition spd="slow"/>
-    </mc:Fallback>
-  </mc:AlternateContent>
+  <p:clrMapOvr>
+    <a:masterClrMapping/>
+  </p:clrMapOvr>
 </p:sld>
 </file>
 
 <file path=ppt/slides/slide10.xml><?xml version="1.0" encoding="utf-8"?>
-<p:sld xmlns:a="http://schemas.openxmlformats.org/drawingml/2006/main" xmlns:p="http://schemas.openxmlformats.org/presentationml/2006/main" xmlns:r="http://schemas.openxmlformats.org/officeDocument/2006/relationships" xmlns:p14="http://schemas.microsoft.com/office/powerpoint/2010/main" xmlns:p15="http://schemas.microsoft.com/office/powerpoint/2012/main" xmlns:mc="http://schemas.openxmlformats.org/markup-compatibility/2006">
+<p:sld xmlns:a="http://schemas.openxmlformats.org/drawingml/2006/main" xmlns:r="http://schemas.openxmlformats.org/officeDocument/2006/relationships" xmlns:p="http://schemas.openxmlformats.org/presentationml/2006/main">
   <p:cSld>
     <p:spTree>
       <p:nvGrpSpPr>
@@ -2433,6 +2544,7 @@
           <a:bodyPr lIns="0" tIns="0" rIns="0" bIns="0" anchor="ctr">
             <a:spAutoFit/>
           </a:bodyPr>
+          <a:lstStyle/>
           <a:p>
             <a:pPr indent="0" algn="ctr">
               <a:buNone/>
@@ -2448,14 +2560,6 @@
               </a:rPr>
               <a:t>Age vs Total Working Years</a:t>
             </a:r>
-            <a:endParaRPr lang="en-US" sz="3300" b="0" u="none" strike="noStrike">
-              <a:solidFill>
-                <a:srgbClr val="000000"/>
-              </a:solidFill>
-              <a:effectLst/>
-              <a:uFillTx/>
-              <a:latin typeface="Arial"/>
-            </a:endParaRPr>
           </a:p>
         </p:txBody>
       </p:sp>
@@ -2486,6 +2590,7 @@
           <a:bodyPr lIns="0" tIns="0" rIns="0" bIns="0" anchor="t">
             <a:normAutofit lnSpcReduction="9999"/>
           </a:bodyPr>
+          <a:lstStyle/>
           <a:p>
             <a:pPr marL="432000" indent="-324000" algn="l">
               <a:spcBef>
@@ -2499,35 +2604,27 @@
               <a:buChar char=""/>
             </a:pPr>
             <a:r>
-              <a:rPr lang="en-US" sz="2400" b="0" u="none" strike="noStrike">
-                <a:solidFill>
-                  <a:srgbClr val="000000"/>
-                </a:solidFill>
-                <a:effectLst/>
-                <a:uFillTx/>
-                <a:latin typeface="Arial"/>
-              </a:rPr>
-              <a:t>We thought we would see a strong relationship in the data that would cause issues between employee age and total working years. It looks like there is a relationship, but the correlations is not nearly as strong as we though.</a:t>
-            </a:r>
-            <a:endParaRPr lang="en-US" sz="2400" b="0" u="none" strike="noStrike">
-              <a:solidFill>
-                <a:srgbClr val="000000"/>
-              </a:solidFill>
-              <a:effectLst/>
-              <a:uFillTx/>
-              <a:latin typeface="Arial"/>
-            </a:endParaRPr>
+              <a:rPr lang="en-US" sz="2400" b="0" u="none" strike="noStrike" dirty="0">
+                <a:solidFill>
+                  <a:srgbClr val="000000"/>
+                </a:solidFill>
+                <a:effectLst/>
+                <a:uFillTx/>
+                <a:latin typeface="Arial"/>
+              </a:rPr>
+              <a:t>We thought we would see a strong relationship in the data that would cause issues between employee age and total working years. It looks like there is a relationship, but the correlations is not nearly as strong as we thought.</a:t>
+            </a:r>
           </a:p>
         </p:txBody>
       </p:sp>
       <p:pic>
         <p:nvPicPr>
-          <p:cNvPr id="47" name=""/>
+          <p:cNvPr id="47" name="Picture 46"/>
           <p:cNvPicPr/>
           <p:nvPr/>
         </p:nvPicPr>
         <p:blipFill>
-          <a:blip r:embed="rId1"/>
+          <a:blip r:embed="rId2"/>
           <a:stretch/>
         </p:blipFill>
         <p:spPr>
@@ -2546,19 +2643,14 @@
       </p:pic>
     </p:spTree>
   </p:cSld>
-  <mc:AlternateContent>
-    <mc:Choice Requires="p14">
-      <p:transition spd="slow" p14:dur="2000"/>
-    </mc:Choice>
-    <mc:Fallback>
-      <p:transition spd="slow"/>
-    </mc:Fallback>
-  </mc:AlternateContent>
+  <p:clrMapOvr>
+    <a:masterClrMapping/>
+  </p:clrMapOvr>
 </p:sld>
 </file>
 
 <file path=ppt/slides/slide11.xml><?xml version="1.0" encoding="utf-8"?>
-<p:sld xmlns:a="http://schemas.openxmlformats.org/drawingml/2006/main" xmlns:p="http://schemas.openxmlformats.org/presentationml/2006/main" xmlns:r="http://schemas.openxmlformats.org/officeDocument/2006/relationships" xmlns:p14="http://schemas.microsoft.com/office/powerpoint/2010/main" xmlns:p15="http://schemas.microsoft.com/office/powerpoint/2012/main" xmlns:mc="http://schemas.openxmlformats.org/markup-compatibility/2006">
+<p:sld xmlns:a="http://schemas.openxmlformats.org/drawingml/2006/main" xmlns:r="http://schemas.openxmlformats.org/officeDocument/2006/relationships" xmlns:p="http://schemas.openxmlformats.org/presentationml/2006/main" show="0">
   <p:cSld>
     <p:spTree>
       <p:nvGrpSpPr>
@@ -2601,6 +2693,7 @@
           <a:bodyPr lIns="0" tIns="0" rIns="0" bIns="0" anchor="ctr">
             <a:spAutoFit/>
           </a:bodyPr>
+          <a:lstStyle/>
           <a:p>
             <a:pPr indent="0" algn="ctr">
               <a:buNone/>
@@ -2616,14 +2709,6 @@
               </a:rPr>
               <a:t>Years at Company vs Total Working Years</a:t>
             </a:r>
-            <a:endParaRPr lang="en-US" sz="3300" b="0" u="none" strike="noStrike">
-              <a:solidFill>
-                <a:srgbClr val="000000"/>
-              </a:solidFill>
-              <a:effectLst/>
-              <a:uFillTx/>
-              <a:latin typeface="Arial"/>
-            </a:endParaRPr>
           </a:p>
         </p:txBody>
       </p:sp>
@@ -2654,6 +2739,7 @@
           <a:bodyPr lIns="0" tIns="0" rIns="0" bIns="0" anchor="t">
             <a:normAutofit/>
           </a:bodyPr>
+          <a:lstStyle/>
           <a:p>
             <a:pPr marL="432000" indent="-324000" algn="l">
               <a:spcBef>
@@ -2677,25 +2763,17 @@
               </a:rPr>
               <a:t>It looks like there is a relationship between years at the company and working years, but not a very strong one.</a:t>
             </a:r>
-            <a:endParaRPr lang="en-US" sz="2400" b="0" u="none" strike="noStrike">
-              <a:solidFill>
-                <a:srgbClr val="000000"/>
-              </a:solidFill>
-              <a:effectLst/>
-              <a:uFillTx/>
-              <a:latin typeface="Arial"/>
-            </a:endParaRPr>
           </a:p>
         </p:txBody>
       </p:sp>
       <p:pic>
         <p:nvPicPr>
-          <p:cNvPr id="50" name=""/>
+          <p:cNvPr id="50" name="Picture 49"/>
           <p:cNvPicPr/>
           <p:nvPr/>
         </p:nvPicPr>
         <p:blipFill>
-          <a:blip r:embed="rId1"/>
+          <a:blip r:embed="rId2"/>
           <a:stretch/>
         </p:blipFill>
         <p:spPr>
@@ -2714,19 +2792,14 @@
       </p:pic>
     </p:spTree>
   </p:cSld>
-  <mc:AlternateContent>
-    <mc:Choice Requires="p14">
-      <p:transition spd="slow" p14:dur="2000"/>
-    </mc:Choice>
-    <mc:Fallback>
-      <p:transition spd="slow"/>
-    </mc:Fallback>
-  </mc:AlternateContent>
+  <p:clrMapOvr>
+    <a:masterClrMapping/>
+  </p:clrMapOvr>
 </p:sld>
 </file>
 
 <file path=ppt/slides/slide12.xml><?xml version="1.0" encoding="utf-8"?>
-<p:sld xmlns:a="http://schemas.openxmlformats.org/drawingml/2006/main" xmlns:p="http://schemas.openxmlformats.org/presentationml/2006/main" xmlns:r="http://schemas.openxmlformats.org/officeDocument/2006/relationships" xmlns:p14="http://schemas.microsoft.com/office/powerpoint/2010/main" xmlns:p15="http://schemas.microsoft.com/office/powerpoint/2012/main" xmlns:mc="http://schemas.openxmlformats.org/markup-compatibility/2006">
+<p:sld xmlns:a="http://schemas.openxmlformats.org/drawingml/2006/main" xmlns:r="http://schemas.openxmlformats.org/officeDocument/2006/relationships" xmlns:p="http://schemas.openxmlformats.org/presentationml/2006/main" show="0">
   <p:cSld>
     <p:spTree>
       <p:nvGrpSpPr>
@@ -2769,6 +2842,7 @@
           <a:bodyPr lIns="0" tIns="0" rIns="0" bIns="0" anchor="ctr">
             <a:spAutoFit/>
           </a:bodyPr>
+          <a:lstStyle/>
           <a:p>
             <a:pPr indent="0" algn="ctr">
               <a:buNone/>
@@ -2784,14 +2858,6 @@
               </a:rPr>
               <a:t>Education Field vs Job Role</a:t>
             </a:r>
-            <a:endParaRPr lang="en-US" sz="3300" b="0" u="none" strike="noStrike">
-              <a:solidFill>
-                <a:srgbClr val="000000"/>
-              </a:solidFill>
-              <a:effectLst/>
-              <a:uFillTx/>
-              <a:latin typeface="Arial"/>
-            </a:endParaRPr>
           </a:p>
         </p:txBody>
       </p:sp>
@@ -2822,6 +2888,7 @@
           <a:bodyPr lIns="0" tIns="0" rIns="0" bIns="0" anchor="t">
             <a:normAutofit fontScale="85000" lnSpcReduction="9999"/>
           </a:bodyPr>
+          <a:lstStyle/>
           <a:p>
             <a:pPr marL="432000" indent="-324000" algn="l">
               <a:spcBef>
@@ -2848,14 +2915,6 @@
               </a:rPr>
               <a:t>The heatmap reveals a strong structural relationship between education field and job role, indicating that employees are not randomly distributed across roles. Instead, specific education backgrounds concentrate within particular job families. This dependency explains multicollinearity we later observed in the initial logistic regression model.</a:t>
             </a:r>
-            <a:endParaRPr lang="en-US" sz="2000" b="0" u="none" strike="noStrike">
-              <a:solidFill>
-                <a:srgbClr val="000000"/>
-              </a:solidFill>
-              <a:effectLst/>
-              <a:uFillTx/>
-              <a:latin typeface="Arial"/>
-            </a:endParaRPr>
           </a:p>
           <a:p>
             <a:pPr marL="432000" indent="-324000" algn="l">
@@ -2883,25 +2942,17 @@
               </a:rPr>
               <a:t>Attrition varies more meaningfully across job roles than across education fields, suggesting that occupational role is a stronger predictor of turnover than educational background.</a:t>
             </a:r>
-            <a:endParaRPr lang="en-US" sz="2000" b="0" u="none" strike="noStrike">
-              <a:solidFill>
-                <a:srgbClr val="000000"/>
-              </a:solidFill>
-              <a:effectLst/>
-              <a:uFillTx/>
-              <a:latin typeface="Arial"/>
-            </a:endParaRPr>
           </a:p>
         </p:txBody>
       </p:sp>
       <p:pic>
         <p:nvPicPr>
-          <p:cNvPr id="53" name=""/>
+          <p:cNvPr id="53" name="Picture 52"/>
           <p:cNvPicPr/>
           <p:nvPr/>
         </p:nvPicPr>
         <p:blipFill>
-          <a:blip r:embed="rId1"/>
+          <a:blip r:embed="rId2"/>
           <a:stretch/>
         </p:blipFill>
         <p:spPr>
@@ -2920,19 +2971,14 @@
       </p:pic>
     </p:spTree>
   </p:cSld>
-  <mc:AlternateContent>
-    <mc:Choice Requires="p14">
-      <p:transition spd="slow" p14:dur="2000"/>
-    </mc:Choice>
-    <mc:Fallback>
-      <p:transition spd="slow"/>
-    </mc:Fallback>
-  </mc:AlternateContent>
+  <p:clrMapOvr>
+    <a:masterClrMapping/>
+  </p:clrMapOvr>
 </p:sld>
 </file>
 
 <file path=ppt/slides/slide13.xml><?xml version="1.0" encoding="utf-8"?>
-<p:sld xmlns:a="http://schemas.openxmlformats.org/drawingml/2006/main" xmlns:p="http://schemas.openxmlformats.org/presentationml/2006/main" xmlns:r="http://schemas.openxmlformats.org/officeDocument/2006/relationships" xmlns:p14="http://schemas.microsoft.com/office/powerpoint/2010/main" xmlns:p15="http://schemas.microsoft.com/office/powerpoint/2012/main" xmlns:mc="http://schemas.openxmlformats.org/markup-compatibility/2006">
+<p:sld xmlns:a="http://schemas.openxmlformats.org/drawingml/2006/main" xmlns:r="http://schemas.openxmlformats.org/officeDocument/2006/relationships" xmlns:p="http://schemas.openxmlformats.org/presentationml/2006/main">
   <p:cSld>
     <p:spTree>
       <p:nvGrpSpPr>
@@ -2975,6 +3021,7 @@
           <a:bodyPr lIns="0" tIns="0" rIns="0" bIns="0" anchor="ctr">
             <a:spAutoFit/>
           </a:bodyPr>
+          <a:lstStyle/>
           <a:p>
             <a:pPr indent="0" algn="ctr">
               <a:buNone/>
@@ -2990,14 +3037,6 @@
               </a:rPr>
               <a:t>Number of Companies and Attrition</a:t>
             </a:r>
-            <a:endParaRPr lang="en-US" sz="3300" b="0" u="none" strike="noStrike">
-              <a:solidFill>
-                <a:srgbClr val="000000"/>
-              </a:solidFill>
-              <a:effectLst/>
-              <a:uFillTx/>
-              <a:latin typeface="Arial"/>
-            </a:endParaRPr>
           </a:p>
         </p:txBody>
       </p:sp>
@@ -3028,6 +3067,7 @@
           <a:bodyPr lIns="0" tIns="0" rIns="0" bIns="0" anchor="t">
             <a:normAutofit/>
           </a:bodyPr>
+          <a:lstStyle/>
           <a:p>
             <a:pPr marL="432000" indent="-324000" algn="l">
               <a:spcBef>
@@ -3044,35 +3084,27 @@
               <a:buChar char=""/>
             </a:pPr>
             <a:r>
-              <a:rPr lang="en-US" sz="2000" b="0" u="none" strike="noStrike">
-                <a:solidFill>
-                  <a:srgbClr val="000000"/>
-                </a:solidFill>
-                <a:effectLst/>
-                <a:uFillTx/>
-                <a:latin typeface="Arial"/>
-              </a:rPr>
-              <a:t>This shows that employees that have worked at more companies are more likely to leave. This could be explained by the fact that employees that have worked at more companies are more likely to be looking for new opportunities, or be closer to retirement. </a:t>
-            </a:r>
-            <a:endParaRPr lang="en-US" sz="2000" b="0" u="none" strike="noStrike">
-              <a:solidFill>
-                <a:srgbClr val="000000"/>
-              </a:solidFill>
-              <a:effectLst/>
-              <a:uFillTx/>
-              <a:latin typeface="Arial"/>
-            </a:endParaRPr>
+              <a:rPr lang="en-US" sz="2000" b="0" u="none" strike="noStrike" dirty="0">
+                <a:solidFill>
+                  <a:srgbClr val="000000"/>
+                </a:solidFill>
+                <a:effectLst/>
+                <a:uFillTx/>
+                <a:latin typeface="Arial"/>
+              </a:rPr>
+              <a:t>This shows that employees that have worked at more companies are more likely to leave. This could be explained by the fact that employees that have worked at more companies are more likely to be looking for new opportunities or be closer to retirement. </a:t>
+            </a:r>
           </a:p>
         </p:txBody>
       </p:sp>
       <p:pic>
         <p:nvPicPr>
-          <p:cNvPr id="56" name=""/>
+          <p:cNvPr id="56" name="Picture 55"/>
           <p:cNvPicPr/>
           <p:nvPr/>
         </p:nvPicPr>
         <p:blipFill>
-          <a:blip r:embed="rId1"/>
+          <a:blip r:embed="rId2"/>
           <a:stretch/>
         </p:blipFill>
         <p:spPr>
@@ -3091,19 +3123,14 @@
       </p:pic>
     </p:spTree>
   </p:cSld>
-  <mc:AlternateContent>
-    <mc:Choice Requires="p14">
-      <p:transition spd="slow" p14:dur="2000"/>
-    </mc:Choice>
-    <mc:Fallback>
-      <p:transition spd="slow"/>
-    </mc:Fallback>
-  </mc:AlternateContent>
+  <p:clrMapOvr>
+    <a:masterClrMapping/>
+  </p:clrMapOvr>
 </p:sld>
 </file>
 
 <file path=ppt/slides/slide14.xml><?xml version="1.0" encoding="utf-8"?>
-<p:sld xmlns:a="http://schemas.openxmlformats.org/drawingml/2006/main" xmlns:p="http://schemas.openxmlformats.org/presentationml/2006/main" xmlns:r="http://schemas.openxmlformats.org/officeDocument/2006/relationships" xmlns:p14="http://schemas.microsoft.com/office/powerpoint/2010/main" xmlns:p15="http://schemas.microsoft.com/office/powerpoint/2012/main" xmlns:mc="http://schemas.openxmlformats.org/markup-compatibility/2006">
+<p:sld xmlns:a="http://schemas.openxmlformats.org/drawingml/2006/main" xmlns:r="http://schemas.openxmlformats.org/officeDocument/2006/relationships" xmlns:p="http://schemas.openxmlformats.org/presentationml/2006/main">
   <p:cSld>
     <p:spTree>
       <p:nvGrpSpPr>
@@ -3146,6 +3173,7 @@
           <a:bodyPr lIns="0" tIns="0" rIns="0" bIns="0" anchor="ctr">
             <a:spAutoFit/>
           </a:bodyPr>
+          <a:lstStyle/>
           <a:p>
             <a:pPr indent="0" algn="ctr">
               <a:buNone/>
@@ -3161,14 +3189,6 @@
               </a:rPr>
               <a:t>Model Analysis</a:t>
             </a:r>
-            <a:endParaRPr lang="en-US" sz="3300" b="0" u="none" strike="noStrike">
-              <a:solidFill>
-                <a:srgbClr val="000000"/>
-              </a:solidFill>
-              <a:effectLst/>
-              <a:uFillTx/>
-              <a:latin typeface="Arial"/>
-            </a:endParaRPr>
           </a:p>
         </p:txBody>
       </p:sp>
@@ -3199,6 +3219,7 @@
           <a:bodyPr lIns="0" tIns="0" rIns="0" bIns="0" anchor="t">
             <a:normAutofit fontScale="85000" lnSpcReduction="9999"/>
           </a:bodyPr>
+          <a:lstStyle/>
           <a:p>
             <a:pPr marL="432000" indent="-324000" algn="l">
               <a:spcBef>
@@ -3215,7 +3236,7 @@
               <a:buChar char=""/>
             </a:pPr>
             <a:r>
-              <a:rPr lang="en-US" sz="2400" b="0" u="none" strike="noStrike">
+              <a:rPr lang="en-US" sz="2400" b="0" u="none" strike="noStrike" dirty="0">
                 <a:solidFill>
                   <a:srgbClr val="000000"/>
                 </a:solidFill>
@@ -3225,14 +3246,6 @@
               </a:rPr>
               <a:t>Elastic Net achieved the highest cross-validated business utility (tied with Ridge), the highest overall accuracy, and the highest precision while maintaining an AUC comparable to the other models. Although Ridge produced slightly higher recall, the difference was small. Therefore, Elastic Net was selected as the final model because it provided the best overall balance of predictive performance and business value.</a:t>
             </a:r>
-            <a:endParaRPr lang="en-US" sz="2400" b="0" u="none" strike="noStrike">
-              <a:solidFill>
-                <a:srgbClr val="000000"/>
-              </a:solidFill>
-              <a:effectLst/>
-              <a:uFillTx/>
-              <a:latin typeface="Arial"/>
-            </a:endParaRPr>
           </a:p>
           <a:p>
             <a:pPr marL="432000" indent="-324000" algn="l">
@@ -3250,7 +3263,7 @@
               <a:buChar char=""/>
             </a:pPr>
             <a:r>
-              <a:rPr lang="en-US" sz="2400" b="0" u="none" strike="noStrike">
+              <a:rPr lang="en-US" sz="2400" b="0" u="none" strike="noStrike" dirty="0">
                 <a:solidFill>
                   <a:srgbClr val="000000"/>
                 </a:solidFill>
@@ -3260,32 +3273,19 @@
               </a:rPr>
               <a:t>The similarity in performance suggests that the employee attrition dataset contains a relatively stable set of predictors with limited multi-collinearity. Consequently, the choice of regularization method had only a modest impact on predictive performance. Our removal from the data of some predictors where we saw or predicted multicollinearity may have also contributed.</a:t>
             </a:r>
-            <a:endParaRPr lang="en-US" sz="2400" b="0" u="none" strike="noStrike">
-              <a:solidFill>
-                <a:srgbClr val="000000"/>
-              </a:solidFill>
-              <a:effectLst/>
-              <a:uFillTx/>
-              <a:latin typeface="Arial"/>
-            </a:endParaRPr>
           </a:p>
         </p:txBody>
       </p:sp>
     </p:spTree>
   </p:cSld>
-  <mc:AlternateContent>
-    <mc:Choice Requires="p14">
-      <p:transition spd="slow" p14:dur="2000"/>
-    </mc:Choice>
-    <mc:Fallback>
-      <p:transition spd="slow"/>
-    </mc:Fallback>
-  </mc:AlternateContent>
+  <p:clrMapOvr>
+    <a:masterClrMapping/>
+  </p:clrMapOvr>
 </p:sld>
 </file>
 
 <file path=ppt/slides/slide15.xml><?xml version="1.0" encoding="utf-8"?>
-<p:sld xmlns:a="http://schemas.openxmlformats.org/drawingml/2006/main" xmlns:p="http://schemas.openxmlformats.org/presentationml/2006/main" xmlns:r="http://schemas.openxmlformats.org/officeDocument/2006/relationships" xmlns:p14="http://schemas.microsoft.com/office/powerpoint/2010/main" xmlns:p15="http://schemas.microsoft.com/office/powerpoint/2012/main" xmlns:mc="http://schemas.openxmlformats.org/markup-compatibility/2006">
+<p:sld xmlns:a="http://schemas.openxmlformats.org/drawingml/2006/main" xmlns:r="http://schemas.openxmlformats.org/officeDocument/2006/relationships" xmlns:p="http://schemas.openxmlformats.org/presentationml/2006/main">
   <p:cSld>
     <p:spTree>
       <p:nvGrpSpPr>
@@ -3328,6 +3328,7 @@
           <a:bodyPr lIns="0" tIns="0" rIns="0" bIns="0" anchor="ctr">
             <a:spAutoFit/>
           </a:bodyPr>
+          <a:lstStyle/>
           <a:p>
             <a:pPr indent="0" algn="ctr">
               <a:buNone/>
@@ -3343,14 +3344,6 @@
               </a:rPr>
               <a:t>Important Continuous Predictors</a:t>
             </a:r>
-            <a:endParaRPr lang="en-US" sz="3300" b="0" u="none" strike="noStrike">
-              <a:solidFill>
-                <a:srgbClr val="000000"/>
-              </a:solidFill>
-              <a:effectLst/>
-              <a:uFillTx/>
-              <a:latin typeface="Arial"/>
-            </a:endParaRPr>
           </a:p>
         </p:txBody>
       </p:sp>
@@ -3379,8 +3372,9 @@
         </p:spPr>
         <p:txBody>
           <a:bodyPr lIns="0" tIns="0" rIns="0" bIns="0" anchor="t">
-            <a:normAutofit fontScale="77500" lnSpcReduction="19999"/>
+            <a:normAutofit fontScale="55000" lnSpcReduction="20000"/>
           </a:bodyPr>
+          <a:lstStyle/>
           <a:p>
             <a:pPr marL="432000" indent="-324000" algn="l">
               <a:spcBef>
@@ -3394,7 +3388,7 @@
               <a:buChar char=""/>
             </a:pPr>
             <a:r>
-              <a:rPr lang="en-US" sz="2400" b="0" u="none" strike="noStrike">
+              <a:rPr lang="en-US" sz="2400" b="0" u="none" strike="noStrike" dirty="0">
                 <a:solidFill>
                   <a:srgbClr val="000000"/>
                 </a:solidFill>
@@ -3404,14 +3398,6 @@
               </a:rPr>
               <a:t>Overtime</a:t>
             </a:r>
-            <a:endParaRPr lang="en-US" sz="2400" b="0" u="none" strike="noStrike">
-              <a:solidFill>
-                <a:srgbClr val="000000"/>
-              </a:solidFill>
-              <a:effectLst/>
-              <a:uFillTx/>
-              <a:latin typeface="Arial"/>
-            </a:endParaRPr>
           </a:p>
           <a:p>
             <a:pPr marL="864000" lvl="1" indent="-324000" algn="l">
@@ -3426,7 +3412,7 @@
               <a:buChar char=""/>
             </a:pPr>
             <a:r>
-              <a:rPr lang="en-US" sz="2100" b="0" u="none" strike="noStrike">
+              <a:rPr lang="en-US" sz="2100" b="0" u="none" strike="noStrike" dirty="0">
                 <a:solidFill>
                   <a:srgbClr val="000000"/>
                 </a:solidFill>
@@ -3436,14 +3422,6 @@
               </a:rPr>
               <a:t>Employees working overtime have roughly 8 times the odds of attrition compared with employees who do not, holding the other variables constant:</a:t>
             </a:r>
-            <a:endParaRPr lang="en-US" sz="2100" b="0" u="none" strike="noStrike">
-              <a:solidFill>
-                <a:srgbClr val="000000"/>
-              </a:solidFill>
-              <a:effectLst/>
-              <a:uFillTx/>
-              <a:latin typeface="Arial"/>
-            </a:endParaRPr>
           </a:p>
           <a:p>
             <a:pPr marL="1296000" lvl="2" indent="-288000" algn="l">
@@ -3461,7 +3439,7 @@
               <a:buChar char=""/>
             </a:pPr>
             <a:r>
-              <a:rPr lang="en-US" sz="1800" b="0" u="none" strike="noStrike">
+              <a:rPr lang="en-US" sz="1800" b="0" u="none" strike="noStrike" dirty="0">
                 <a:solidFill>
                   <a:srgbClr val="000000"/>
                 </a:solidFill>
@@ -3471,14 +3449,6 @@
               </a:rPr>
               <a:t>E^2.07 ≈ 7.95</a:t>
             </a:r>
-            <a:endParaRPr lang="en-US" sz="1800" b="0" u="none" strike="noStrike">
-              <a:solidFill>
-                <a:srgbClr val="000000"/>
-              </a:solidFill>
-              <a:effectLst/>
-              <a:uFillTx/>
-              <a:latin typeface="Arial"/>
-            </a:endParaRPr>
           </a:p>
           <a:p>
             <a:pPr marL="432000" indent="-324000" algn="l">
@@ -3493,7 +3463,7 @@
               <a:buChar char=""/>
             </a:pPr>
             <a:r>
-              <a:rPr lang="en-US" sz="2400" b="0" u="none" strike="noStrike">
+              <a:rPr lang="en-US" sz="2400" b="0" u="none" strike="noStrike" dirty="0">
                 <a:solidFill>
                   <a:srgbClr val="000000"/>
                 </a:solidFill>
@@ -3503,14 +3473,6 @@
               </a:rPr>
               <a:t>Business Travel</a:t>
             </a:r>
-            <a:endParaRPr lang="en-US" sz="2400" b="0" u="none" strike="noStrike">
-              <a:solidFill>
-                <a:srgbClr val="000000"/>
-              </a:solidFill>
-              <a:effectLst/>
-              <a:uFillTx/>
-              <a:latin typeface="Arial"/>
-            </a:endParaRPr>
           </a:p>
           <a:p>
             <a:pPr marL="864000" lvl="1" indent="-324000" algn="l">
@@ -3525,7 +3487,7 @@
               <a:buChar char=""/>
             </a:pPr>
             <a:r>
-              <a:rPr lang="en-US" sz="2100" b="0" u="none" strike="noStrike">
+              <a:rPr lang="en-US" sz="2100" b="0" u="none" strike="noStrike" dirty="0">
                 <a:solidFill>
                   <a:srgbClr val="000000"/>
                 </a:solidFill>
@@ -3535,14 +3497,6 @@
               </a:rPr>
               <a:t>Employees traveling frequently have roughly 7.5 times the odds of attrition compared to employees who do not travel, holding the other variables constant:</a:t>
             </a:r>
-            <a:endParaRPr lang="en-US" sz="2100" b="0" u="none" strike="noStrike">
-              <a:solidFill>
-                <a:srgbClr val="000000"/>
-              </a:solidFill>
-              <a:effectLst/>
-              <a:uFillTx/>
-              <a:latin typeface="Arial"/>
-            </a:endParaRPr>
           </a:p>
           <a:p>
             <a:pPr marL="1296000" lvl="2" indent="-288000" algn="l">
@@ -3560,7 +3514,7 @@
               <a:buChar char=""/>
             </a:pPr>
             <a:r>
-              <a:rPr lang="en-US" sz="1800" b="0" u="none" strike="noStrike">
+              <a:rPr lang="en-US" sz="1800" b="0" u="none" strike="noStrike" dirty="0">
                 <a:solidFill>
                   <a:srgbClr val="000000"/>
                 </a:solidFill>
@@ -3570,14 +3524,6 @@
               </a:rPr>
               <a:t>E^2.02 ≈ 7.5</a:t>
             </a:r>
-            <a:endParaRPr lang="en-US" sz="1800" b="0" u="none" strike="noStrike">
-              <a:solidFill>
-                <a:srgbClr val="000000"/>
-              </a:solidFill>
-              <a:effectLst/>
-              <a:uFillTx/>
-              <a:latin typeface="Arial"/>
-            </a:endParaRPr>
           </a:p>
           <a:p>
             <a:pPr marL="864000" lvl="1" indent="-324000" algn="l">
@@ -3592,7 +3538,7 @@
               <a:buChar char=""/>
             </a:pPr>
             <a:r>
-              <a:rPr lang="en-US" sz="1800" b="0" u="none" strike="noStrike">
+              <a:rPr lang="en-US" sz="1800" b="0" u="none" strike="noStrike" dirty="0">
                 <a:solidFill>
                   <a:srgbClr val="000000"/>
                 </a:solidFill>
@@ -3602,14 +3548,6 @@
               </a:rPr>
               <a:t>Employees traveling rarely also have roughly 2.9 times the odds of attrition compared to employees who do not travel, holding the other variables constant:</a:t>
             </a:r>
-            <a:endParaRPr lang="en-US" sz="1800" b="0" u="none" strike="noStrike">
-              <a:solidFill>
-                <a:srgbClr val="000000"/>
-              </a:solidFill>
-              <a:effectLst/>
-              <a:uFillTx/>
-              <a:latin typeface="Arial"/>
-            </a:endParaRPr>
           </a:p>
           <a:p>
             <a:pPr marL="1296000" lvl="2" indent="-288000" algn="l">
@@ -3627,7 +3565,7 @@
               <a:buChar char=""/>
             </a:pPr>
             <a:r>
-              <a:rPr lang="en-US" sz="1800" b="0" u="none" strike="noStrike">
+              <a:rPr lang="en-US" sz="1800" b="0" u="none" strike="noStrike" dirty="0">
                 <a:solidFill>
                   <a:srgbClr val="000000"/>
                 </a:solidFill>
@@ -3637,14 +3575,6 @@
               </a:rPr>
               <a:t>E^1.05 ≈ 2.9</a:t>
             </a:r>
-            <a:endParaRPr lang="en-US" sz="1800" b="0" u="none" strike="noStrike">
-              <a:solidFill>
-                <a:srgbClr val="000000"/>
-              </a:solidFill>
-              <a:effectLst/>
-              <a:uFillTx/>
-              <a:latin typeface="Arial"/>
-            </a:endParaRPr>
           </a:p>
           <a:p>
             <a:pPr marL="432000" indent="-324000" algn="l">
@@ -3659,7 +3589,7 @@
               <a:buChar char=""/>
             </a:pPr>
             <a:r>
-              <a:rPr lang="en-US" sz="2400" b="0" u="none" strike="noStrike">
+              <a:rPr lang="en-US" sz="2400" b="0" u="none" strike="noStrike" dirty="0">
                 <a:solidFill>
                   <a:srgbClr val="000000"/>
                 </a:solidFill>
@@ -3669,14 +3599,6 @@
               </a:rPr>
               <a:t>Marital Status</a:t>
             </a:r>
-            <a:endParaRPr lang="en-US" sz="2400" b="0" u="none" strike="noStrike">
-              <a:solidFill>
-                <a:srgbClr val="000000"/>
-              </a:solidFill>
-              <a:effectLst/>
-              <a:uFillTx/>
-              <a:latin typeface="Arial"/>
-            </a:endParaRPr>
           </a:p>
           <a:p>
             <a:pPr marL="864000" lvl="1" indent="-324000" algn="l">
@@ -3691,7 +3613,7 @@
               <a:buChar char=""/>
             </a:pPr>
             <a:r>
-              <a:rPr lang="en-US" sz="2100" b="0" u="none" strike="noStrike">
+              <a:rPr lang="en-US" sz="2100" b="0" u="none" strike="noStrike" dirty="0">
                 <a:solidFill>
                   <a:srgbClr val="000000"/>
                 </a:solidFill>
@@ -3701,14 +3623,6 @@
               </a:rPr>
               <a:t>Single employees have roughly 5 times the odds of attrition compared to divorced employees, holding the over variables constant:</a:t>
             </a:r>
-            <a:endParaRPr lang="en-US" sz="2100" b="0" u="none" strike="noStrike">
-              <a:solidFill>
-                <a:srgbClr val="000000"/>
-              </a:solidFill>
-              <a:effectLst/>
-              <a:uFillTx/>
-              <a:latin typeface="Arial"/>
-            </a:endParaRPr>
           </a:p>
           <a:p>
             <a:pPr marL="1296000" lvl="2" indent="-288000" algn="l">
@@ -3726,7 +3640,7 @@
               <a:buChar char=""/>
             </a:pPr>
             <a:r>
-              <a:rPr lang="en-US" sz="1800" b="0" u="none" strike="noStrike">
+              <a:rPr lang="en-US" sz="1800" b="0" u="none" strike="noStrike" dirty="0">
                 <a:solidFill>
                   <a:srgbClr val="000000"/>
                 </a:solidFill>
@@ -3736,32 +3650,19 @@
               </a:rPr>
               <a:t>E^1.60 ≈ 5</a:t>
             </a:r>
-            <a:endParaRPr lang="en-US" sz="1800" b="0" u="none" strike="noStrike">
-              <a:solidFill>
-                <a:srgbClr val="000000"/>
-              </a:solidFill>
-              <a:effectLst/>
-              <a:uFillTx/>
-              <a:latin typeface="Arial"/>
-            </a:endParaRPr>
           </a:p>
         </p:txBody>
       </p:sp>
     </p:spTree>
   </p:cSld>
-  <mc:AlternateContent>
-    <mc:Choice Requires="p14">
-      <p:transition spd="slow" p14:dur="2000"/>
-    </mc:Choice>
-    <mc:Fallback>
-      <p:transition spd="slow"/>
-    </mc:Fallback>
-  </mc:AlternateContent>
+  <p:clrMapOvr>
+    <a:masterClrMapping/>
+  </p:clrMapOvr>
 </p:sld>
 </file>
 
 <file path=ppt/slides/slide16.xml><?xml version="1.0" encoding="utf-8"?>
-<p:sld xmlns:a="http://schemas.openxmlformats.org/drawingml/2006/main" xmlns:p="http://schemas.openxmlformats.org/presentationml/2006/main" xmlns:r="http://schemas.openxmlformats.org/officeDocument/2006/relationships" xmlns:p14="http://schemas.microsoft.com/office/powerpoint/2010/main" xmlns:p15="http://schemas.microsoft.com/office/powerpoint/2012/main" xmlns:mc="http://schemas.openxmlformats.org/markup-compatibility/2006">
+<p:sld xmlns:a="http://schemas.openxmlformats.org/drawingml/2006/main" xmlns:r="http://schemas.openxmlformats.org/officeDocument/2006/relationships" xmlns:p="http://schemas.openxmlformats.org/presentationml/2006/main">
   <p:cSld>
     <p:spTree>
       <p:nvGrpSpPr>
@@ -3804,12 +3705,13 @@
           <a:bodyPr lIns="0" tIns="0" rIns="0" bIns="0" anchor="ctr">
             <a:spAutoFit/>
           </a:bodyPr>
+          <a:lstStyle/>
           <a:p>
             <a:pPr indent="0" algn="ctr">
               <a:buNone/>
             </a:pPr>
             <a:r>
-              <a:rPr lang="en-US" sz="3300" b="0" u="none" strike="noStrike">
+              <a:rPr lang="en-US" sz="3300" b="0" u="none" strike="noStrike" dirty="0">
                 <a:solidFill>
                   <a:srgbClr val="000000"/>
                 </a:solidFill>
@@ -3819,14 +3721,6 @@
               </a:rPr>
               <a:t>Conclusion</a:t>
             </a:r>
-            <a:endParaRPr lang="en-US" sz="3300" b="0" u="none" strike="noStrike">
-              <a:solidFill>
-                <a:srgbClr val="000000"/>
-              </a:solidFill>
-              <a:effectLst/>
-              <a:uFillTx/>
-              <a:latin typeface="Arial"/>
-            </a:endParaRPr>
           </a:p>
         </p:txBody>
       </p:sp>
@@ -3843,7 +3737,7 @@
         <p:spPr>
           <a:xfrm>
             <a:off x="504000" y="1326600"/>
-            <a:ext cx="9072000" cy="3288240"/>
+            <a:ext cx="4536000" cy="3288240"/>
           </a:xfrm>
           <a:prstGeom prst="rect">
             <a:avLst/>
@@ -3855,16 +3749,193 @@
         </p:spPr>
         <p:txBody>
           <a:bodyPr lIns="0" tIns="0" rIns="0" bIns="0" anchor="t">
-            <a:normAutofit/>
+            <a:normAutofit fontScale="77500" lnSpcReduction="20000"/>
           </a:bodyPr>
-          <a:p>
-            <a:pPr indent="0" algn="l">
+          <a:lstStyle/>
+          <a:p>
+            <a:pPr marL="342900" indent="-342900" algn="l">
               <a:spcBef>
                 <a:spcPts val="1060"/>
               </a:spcBef>
-              <a:buNone/>
-            </a:pPr>
-            <a:endParaRPr lang="en-US" sz="2400" b="0" u="none" strike="noStrike">
+              <a:buFont typeface="Arial" panose="020B0604020202020204" pitchFamily="34" charset="0"/>
+              <a:buChar char="•"/>
+            </a:pPr>
+            <a:r>
+              <a:rPr lang="en-US" dirty="0"/>
+              <a:t>Years Since Last Promotion</a:t>
+            </a:r>
+          </a:p>
+          <a:p>
+            <a:pPr marL="342900" indent="-342900" algn="l">
+              <a:spcBef>
+                <a:spcPts val="1060"/>
+              </a:spcBef>
+              <a:buFont typeface="Arial" panose="020B0604020202020204" pitchFamily="34" charset="0"/>
+              <a:buChar char="•"/>
+            </a:pPr>
+            <a:r>
+              <a:rPr lang="en-US" dirty="0"/>
+              <a:t>Num Companies Worked</a:t>
+            </a:r>
+          </a:p>
+          <a:p>
+            <a:pPr marL="342900" indent="-342900" algn="l">
+              <a:spcBef>
+                <a:spcPts val="1060"/>
+              </a:spcBef>
+              <a:buFont typeface="Arial" panose="020B0604020202020204" pitchFamily="34" charset="0"/>
+              <a:buChar char="•"/>
+            </a:pPr>
+            <a:r>
+              <a:rPr lang="en-US" dirty="0" err="1"/>
+              <a:t>OverTime</a:t>
+            </a:r>
+            <a:endParaRPr lang="en-US" dirty="0"/>
+          </a:p>
+          <a:p>
+            <a:pPr marL="342900" indent="-342900" algn="l">
+              <a:spcBef>
+                <a:spcPts val="1060"/>
+              </a:spcBef>
+              <a:buFont typeface="Arial" panose="020B0604020202020204" pitchFamily="34" charset="0"/>
+              <a:buChar char="•"/>
+            </a:pPr>
+            <a:r>
+              <a:rPr lang="en-US" dirty="0"/>
+              <a:t>Business Travel (Frequent)</a:t>
+            </a:r>
+          </a:p>
+          <a:p>
+            <a:pPr marL="342900" indent="-342900" algn="l">
+              <a:spcBef>
+                <a:spcPts val="1060"/>
+              </a:spcBef>
+              <a:buFont typeface="Arial" panose="020B0604020202020204" pitchFamily="34" charset="0"/>
+              <a:buChar char="•"/>
+            </a:pPr>
+            <a:r>
+              <a:rPr lang="en-US" dirty="0"/>
+              <a:t>Distance From Home</a:t>
+            </a:r>
+          </a:p>
+          <a:p>
+            <a:pPr marL="342900" indent="-342900" algn="l">
+              <a:spcBef>
+                <a:spcPts val="1060"/>
+              </a:spcBef>
+              <a:buFont typeface="Arial" panose="020B0604020202020204" pitchFamily="34" charset="0"/>
+              <a:buChar char="•"/>
+            </a:pPr>
+            <a:r>
+              <a:rPr lang="en-US" dirty="0"/>
+              <a:t>Environment Satisfaction</a:t>
+            </a:r>
+          </a:p>
+          <a:p>
+            <a:pPr marL="342900" indent="-342900" algn="l">
+              <a:spcBef>
+                <a:spcPts val="1060"/>
+              </a:spcBef>
+              <a:buFont typeface="Arial" panose="020B0604020202020204" pitchFamily="34" charset="0"/>
+              <a:buChar char="•"/>
+            </a:pPr>
+            <a:r>
+              <a:rPr lang="en-US" dirty="0"/>
+              <a:t>Job Satisfaction</a:t>
+            </a:r>
+          </a:p>
+          <a:p>
+            <a:pPr marL="342900" indent="-342900" algn="l">
+              <a:spcBef>
+                <a:spcPts val="1060"/>
+              </a:spcBef>
+              <a:buFont typeface="Arial" panose="020B0604020202020204" pitchFamily="34" charset="0"/>
+              <a:buChar char="•"/>
+            </a:pPr>
+            <a:r>
+              <a:rPr lang="en-US" dirty="0"/>
+              <a:t>Total Working Years</a:t>
+            </a:r>
+          </a:p>
+          <a:p>
+            <a:pPr marL="342900" indent="-342900" algn="l">
+              <a:spcBef>
+                <a:spcPts val="1060"/>
+              </a:spcBef>
+              <a:buFont typeface="Arial" panose="020B0604020202020204" pitchFamily="34" charset="0"/>
+              <a:buChar char="•"/>
+            </a:pPr>
+            <a:endParaRPr lang="en-US" dirty="0"/>
+          </a:p>
+          <a:p>
+            <a:pPr marL="342900" indent="-342900" algn="l">
+              <a:spcBef>
+                <a:spcPts val="1060"/>
+              </a:spcBef>
+              <a:buFont typeface="Arial" panose="020B0604020202020204" pitchFamily="34" charset="0"/>
+              <a:buChar char="•"/>
+            </a:pPr>
+            <a:endParaRPr lang="en-US" dirty="0"/>
+          </a:p>
+          <a:p>
+            <a:pPr marL="342900" indent="-342900" algn="l">
+              <a:spcBef>
+                <a:spcPts val="1060"/>
+              </a:spcBef>
+              <a:buFont typeface="Arial" panose="020B0604020202020204" pitchFamily="34" charset="0"/>
+              <a:buChar char="•"/>
+            </a:pPr>
+            <a:endParaRPr lang="en-US" dirty="0"/>
+          </a:p>
+          <a:p>
+            <a:pPr marL="342900" indent="-342900" algn="l">
+              <a:spcBef>
+                <a:spcPts val="1060"/>
+              </a:spcBef>
+              <a:buFont typeface="Arial" panose="020B0604020202020204" pitchFamily="34" charset="0"/>
+              <a:buChar char="•"/>
+            </a:pPr>
+            <a:endParaRPr lang="en-US" dirty="0"/>
+          </a:p>
+          <a:p>
+            <a:pPr marL="342900" indent="-342900" algn="l">
+              <a:spcBef>
+                <a:spcPts val="1060"/>
+              </a:spcBef>
+              <a:buFont typeface="Arial" panose="020B0604020202020204" pitchFamily="34" charset="0"/>
+              <a:buChar char="•"/>
+            </a:pPr>
+            <a:endParaRPr lang="en-US" dirty="0"/>
+          </a:p>
+          <a:p>
+            <a:pPr marL="342900" indent="-342900" algn="l">
+              <a:spcBef>
+                <a:spcPts val="1060"/>
+              </a:spcBef>
+              <a:buFont typeface="Arial" panose="020B0604020202020204" pitchFamily="34" charset="0"/>
+              <a:buChar char="•"/>
+            </a:pPr>
+            <a:endParaRPr lang="en-US" dirty="0"/>
+          </a:p>
+          <a:p>
+            <a:pPr marL="342900" indent="-342900" algn="l">
+              <a:spcBef>
+                <a:spcPts val="1060"/>
+              </a:spcBef>
+              <a:buFont typeface="Arial" panose="020B0604020202020204" pitchFamily="34" charset="0"/>
+              <a:buChar char="•"/>
+            </a:pPr>
+            <a:endParaRPr lang="en-US" dirty="0"/>
+          </a:p>
+          <a:p>
+            <a:pPr marL="342900" indent="-342900" algn="l">
+              <a:spcBef>
+                <a:spcPts val="1060"/>
+              </a:spcBef>
+              <a:buFont typeface="Arial" panose="020B0604020202020204" pitchFamily="34" charset="0"/>
+              <a:buChar char="•"/>
+            </a:pPr>
+            <a:endParaRPr lang="en-US" sz="2400" b="0" u="none" strike="noStrike" dirty="0">
               <a:solidFill>
                 <a:srgbClr val="000000"/>
               </a:solidFill>
@@ -3875,21 +3946,231 @@
           </a:p>
         </p:txBody>
       </p:sp>
+      <p:sp>
+        <p:nvSpPr>
+          <p:cNvPr id="2" name="PlaceHolder 2">
+            <a:extLst>
+              <a:ext uri="{FF2B5EF4-FFF2-40B4-BE49-F238E27FC236}">
+                <a16:creationId xmlns:a16="http://schemas.microsoft.com/office/drawing/2014/main" id="{D9304C24-5F67-2937-74D1-DF1553F93A91}"/>
+              </a:ext>
+            </a:extLst>
+          </p:cNvPr>
+          <p:cNvSpPr txBox="1">
+            <a:spLocks/>
+          </p:cNvSpPr>
+          <p:nvPr/>
+        </p:nvSpPr>
+        <p:spPr>
+          <a:xfrm>
+            <a:off x="5040000" y="1326600"/>
+            <a:ext cx="4536000" cy="3288240"/>
+          </a:xfrm>
+          <a:prstGeom prst="rect">
+            <a:avLst/>
+          </a:prstGeom>
+          <a:noFill/>
+          <a:ln w="0">
+            <a:noFill/>
+          </a:ln>
+        </p:spPr>
+        <p:txBody>
+          <a:bodyPr lIns="0" tIns="0" rIns="0" bIns="0" anchor="t">
+            <a:normAutofit fontScale="85000" lnSpcReduction="10000"/>
+          </a:bodyPr>
+          <a:lstStyle>
+            <a:lvl1pPr indent="0" algn="ctr" defTabSz="914400" rtl="0" eaLnBrk="1" latinLnBrk="0" hangingPunct="1">
+              <a:lnSpc>
+                <a:spcPct val="90000"/>
+              </a:lnSpc>
+              <a:spcBef>
+                <a:spcPct val="0"/>
+              </a:spcBef>
+              <a:buNone/>
+              <a:defRPr lang="en-US" sz="3300" b="0" u="none" strike="noStrike" kern="1200">
+                <a:solidFill>
+                  <a:srgbClr val="000000"/>
+                </a:solidFill>
+                <a:effectLst/>
+                <a:uFillTx/>
+                <a:latin typeface="Arial"/>
+                <a:ea typeface="+mj-ea"/>
+                <a:cs typeface="+mj-cs"/>
+              </a:defRPr>
+            </a:lvl1pPr>
+          </a:lstStyle>
+          <a:p>
+            <a:pPr marL="342900" indent="-342900" algn="l">
+              <a:spcBef>
+                <a:spcPts val="1060"/>
+              </a:spcBef>
+              <a:buFont typeface="Arial" panose="020B0604020202020204" pitchFamily="34" charset="0"/>
+              <a:buChar char="•"/>
+            </a:pPr>
+            <a:r>
+              <a:rPr lang="en-US" dirty="0"/>
+              <a:t>Strongest positive effect</a:t>
+            </a:r>
+          </a:p>
+          <a:p>
+            <a:pPr marL="342900" indent="-342900" algn="l">
+              <a:spcBef>
+                <a:spcPts val="1060"/>
+              </a:spcBef>
+              <a:buFont typeface="Arial" panose="020B0604020202020204" pitchFamily="34" charset="0"/>
+              <a:buChar char="•"/>
+            </a:pPr>
+            <a:r>
+              <a:rPr lang="en-US" dirty="0"/>
+              <a:t>Strong positive effect</a:t>
+            </a:r>
+          </a:p>
+          <a:p>
+            <a:pPr marL="342900" indent="-342900" algn="l">
+              <a:spcBef>
+                <a:spcPts val="1060"/>
+              </a:spcBef>
+              <a:buFont typeface="Arial" panose="020B0604020202020204" pitchFamily="34" charset="0"/>
+              <a:buChar char="•"/>
+            </a:pPr>
+            <a:r>
+              <a:rPr lang="en-US" dirty="0"/>
+              <a:t>Moderate positive effect</a:t>
+            </a:r>
+          </a:p>
+          <a:p>
+            <a:pPr marL="342900" indent="-342900" algn="l">
+              <a:spcBef>
+                <a:spcPts val="1060"/>
+              </a:spcBef>
+              <a:buFont typeface="Arial" panose="020B0604020202020204" pitchFamily="34" charset="0"/>
+              <a:buChar char="•"/>
+            </a:pPr>
+            <a:r>
+              <a:rPr lang="en-US" dirty="0"/>
+              <a:t>Moderate positive effect</a:t>
+            </a:r>
+          </a:p>
+          <a:p>
+            <a:pPr marL="342900" indent="-342900" algn="l">
+              <a:spcBef>
+                <a:spcPts val="1060"/>
+              </a:spcBef>
+              <a:buFont typeface="Arial" panose="020B0604020202020204" pitchFamily="34" charset="0"/>
+              <a:buChar char="•"/>
+            </a:pPr>
+            <a:r>
+              <a:rPr lang="en-US" dirty="0"/>
+              <a:t>strong negative effect</a:t>
+            </a:r>
+          </a:p>
+          <a:p>
+            <a:pPr marL="342900" indent="-342900" algn="l">
+              <a:spcBef>
+                <a:spcPts val="1060"/>
+              </a:spcBef>
+              <a:buFont typeface="Arial" panose="020B0604020202020204" pitchFamily="34" charset="0"/>
+              <a:buChar char="•"/>
+            </a:pPr>
+            <a:r>
+              <a:rPr lang="en-US" dirty="0"/>
+              <a:t>Negative effect</a:t>
+            </a:r>
+          </a:p>
+          <a:p>
+            <a:pPr marL="342900" indent="-342900" algn="l">
+              <a:spcBef>
+                <a:spcPts val="1060"/>
+              </a:spcBef>
+              <a:buFont typeface="Arial" panose="020B0604020202020204" pitchFamily="34" charset="0"/>
+              <a:buChar char="•"/>
+            </a:pPr>
+            <a:r>
+              <a:rPr lang="en-US" dirty="0"/>
+              <a:t>Negative effect</a:t>
+            </a:r>
+          </a:p>
+          <a:p>
+            <a:pPr marL="342900" indent="-342900" algn="l">
+              <a:spcBef>
+                <a:spcPts val="1060"/>
+              </a:spcBef>
+              <a:buFont typeface="Arial" panose="020B0604020202020204" pitchFamily="34" charset="0"/>
+              <a:buChar char="•"/>
+            </a:pPr>
+            <a:endParaRPr lang="en-US" dirty="0"/>
+          </a:p>
+          <a:p>
+            <a:pPr marL="342900" indent="-342900" algn="l">
+              <a:spcBef>
+                <a:spcPts val="1060"/>
+              </a:spcBef>
+              <a:buFont typeface="Arial" panose="020B0604020202020204" pitchFamily="34" charset="0"/>
+              <a:buChar char="•"/>
+            </a:pPr>
+            <a:endParaRPr lang="en-US" dirty="0"/>
+          </a:p>
+          <a:p>
+            <a:pPr marL="342900" indent="-342900" algn="l">
+              <a:spcBef>
+                <a:spcPts val="1060"/>
+              </a:spcBef>
+              <a:buFont typeface="Arial" panose="020B0604020202020204" pitchFamily="34" charset="0"/>
+              <a:buChar char="•"/>
+            </a:pPr>
+            <a:endParaRPr lang="en-US" dirty="0"/>
+          </a:p>
+          <a:p>
+            <a:pPr marL="342900" indent="-342900" algn="l">
+              <a:spcBef>
+                <a:spcPts val="1060"/>
+              </a:spcBef>
+              <a:buFont typeface="Arial" panose="020B0604020202020204" pitchFamily="34" charset="0"/>
+              <a:buChar char="•"/>
+            </a:pPr>
+            <a:endParaRPr lang="en-US" dirty="0"/>
+          </a:p>
+          <a:p>
+            <a:pPr marL="342900" indent="-342900" algn="l">
+              <a:spcBef>
+                <a:spcPts val="1060"/>
+              </a:spcBef>
+              <a:buFont typeface="Arial" panose="020B0604020202020204" pitchFamily="34" charset="0"/>
+              <a:buChar char="•"/>
+            </a:pPr>
+            <a:endParaRPr lang="en-US" dirty="0"/>
+          </a:p>
+          <a:p>
+            <a:pPr marL="342900" indent="-342900" algn="l">
+              <a:spcBef>
+                <a:spcPts val="1060"/>
+              </a:spcBef>
+              <a:buFont typeface="Arial" panose="020B0604020202020204" pitchFamily="34" charset="0"/>
+              <a:buChar char="•"/>
+            </a:pPr>
+            <a:endParaRPr lang="en-US" dirty="0"/>
+          </a:p>
+          <a:p>
+            <a:pPr marL="342900" indent="-342900" algn="l">
+              <a:spcBef>
+                <a:spcPts val="1060"/>
+              </a:spcBef>
+              <a:buFont typeface="Arial" panose="020B0604020202020204" pitchFamily="34" charset="0"/>
+              <a:buChar char="•"/>
+            </a:pPr>
+            <a:endParaRPr lang="en-US" sz="2400" dirty="0"/>
+          </a:p>
+        </p:txBody>
+      </p:sp>
     </p:spTree>
   </p:cSld>
-  <mc:AlternateContent>
-    <mc:Choice Requires="p14">
-      <p:transition spd="slow" p14:dur="2000"/>
-    </mc:Choice>
-    <mc:Fallback>
-      <p:transition spd="slow"/>
-    </mc:Fallback>
-  </mc:AlternateContent>
+  <p:clrMapOvr>
+    <a:masterClrMapping/>
+  </p:clrMapOvr>
 </p:sld>
 </file>
 
 <file path=ppt/slides/slide2.xml><?xml version="1.0" encoding="utf-8"?>
-<p:sld xmlns:a="http://schemas.openxmlformats.org/drawingml/2006/main" xmlns:p="http://schemas.openxmlformats.org/presentationml/2006/main" xmlns:r="http://schemas.openxmlformats.org/officeDocument/2006/relationships" xmlns:p14="http://schemas.microsoft.com/office/powerpoint/2010/main" xmlns:p15="http://schemas.microsoft.com/office/powerpoint/2012/main" xmlns:mc="http://schemas.openxmlformats.org/markup-compatibility/2006">
+<p:sld xmlns:a="http://schemas.openxmlformats.org/drawingml/2006/main" xmlns:r="http://schemas.openxmlformats.org/officeDocument/2006/relationships" xmlns:p="http://schemas.openxmlformats.org/presentationml/2006/main">
   <p:cSld>
     <p:spTree>
       <p:nvGrpSpPr>
@@ -3932,6 +4213,7 @@
           <a:bodyPr lIns="0" tIns="0" rIns="0" bIns="0" anchor="ctr">
             <a:spAutoFit/>
           </a:bodyPr>
+          <a:lstStyle/>
           <a:p>
             <a:pPr indent="0" algn="ctr">
               <a:buNone/>
@@ -3947,14 +4229,6 @@
               </a:rPr>
               <a:t>Business Problem</a:t>
             </a:r>
-            <a:endParaRPr lang="en-US" sz="3300" b="0" u="none" strike="noStrike">
-              <a:solidFill>
-                <a:srgbClr val="000000"/>
-              </a:solidFill>
-              <a:effectLst/>
-              <a:uFillTx/>
-              <a:latin typeface="Arial"/>
-            </a:endParaRPr>
           </a:p>
         </p:txBody>
       </p:sp>
@@ -3985,6 +4259,7 @@
           <a:bodyPr lIns="0" tIns="0" rIns="0" bIns="0" anchor="t">
             <a:normAutofit/>
           </a:bodyPr>
+          <a:lstStyle/>
           <a:p>
             <a:pPr marL="432000" indent="-324000" algn="l">
               <a:spcBef>
@@ -4011,14 +4286,6 @@
               </a:rPr>
               <a:t>How much financial value does using this predictive model create compared with not using one?</a:t>
             </a:r>
-            <a:endParaRPr lang="en-US" sz="1500" b="0" u="none" strike="noStrike">
-              <a:solidFill>
-                <a:srgbClr val="000000"/>
-              </a:solidFill>
-              <a:effectLst/>
-              <a:uFillTx/>
-              <a:latin typeface="Arial"/>
-            </a:endParaRPr>
           </a:p>
           <a:p>
             <a:pPr marL="432000" indent="-324000" algn="l">
@@ -4046,20 +4313,12 @@
               </a:rPr>
               <a:t>The primary objective is to accurately determine which employees are likely to quit before they do.</a:t>
             </a:r>
-            <a:endParaRPr lang="en-US" sz="1500" b="0" u="none" strike="noStrike">
-              <a:solidFill>
-                <a:srgbClr val="000000"/>
-              </a:solidFill>
-              <a:effectLst/>
-              <a:uFillTx/>
-              <a:latin typeface="Arial"/>
-            </a:endParaRPr>
           </a:p>
         </p:txBody>
       </p:sp>
       <p:sp>
         <p:nvSpPr>
-          <p:cNvPr id="24" name=""/>
+          <p:cNvPr id="24" name="TextBox 23"/>
           <p:cNvSpPr txBox="1"/>
           <p:nvPr/>
         </p:nvSpPr>
@@ -4080,6 +4339,7 @@
           <a:bodyPr lIns="90000" tIns="45000" rIns="90000" bIns="45000" anchor="t">
             <a:noAutofit/>
           </a:bodyPr>
+          <a:lstStyle/>
           <a:p>
             <a:pPr algn="ctr">
               <a:spcBef>
@@ -4100,20 +4360,12 @@
               </a:rPr>
               <a:t>How much financial value does using this predictive model create compared with not using one?</a:t>
             </a:r>
-            <a:endParaRPr lang="en-US" sz="1000" b="0" u="none" strike="noStrike">
-              <a:solidFill>
-                <a:srgbClr val="FFFFFF"/>
-              </a:solidFill>
-              <a:effectLst/>
-              <a:uFillTx/>
-              <a:latin typeface="Arial"/>
-            </a:endParaRPr>
           </a:p>
         </p:txBody>
       </p:sp>
       <p:sp>
         <p:nvSpPr>
-          <p:cNvPr id="25" name=""/>
+          <p:cNvPr id="25" name="TextBox 24"/>
           <p:cNvSpPr txBox="1"/>
           <p:nvPr/>
         </p:nvSpPr>
@@ -4134,6 +4386,7 @@
           <a:bodyPr lIns="90000" tIns="45000" rIns="90000" bIns="45000" anchor="t">
             <a:noAutofit/>
           </a:bodyPr>
+          <a:lstStyle/>
           <a:p>
             <a:pPr algn="ctr">
               <a:spcBef>
@@ -4154,32 +4407,19 @@
               </a:rPr>
               <a:t>How much financial value does using this predictive model create compared with not using one?</a:t>
             </a:r>
-            <a:endParaRPr lang="en-US" sz="1000" b="0" u="none" strike="noStrike">
-              <a:solidFill>
-                <a:srgbClr val="FFFFFF"/>
-              </a:solidFill>
-              <a:effectLst/>
-              <a:uFillTx/>
-              <a:latin typeface="Arial"/>
-            </a:endParaRPr>
           </a:p>
         </p:txBody>
       </p:sp>
     </p:spTree>
   </p:cSld>
-  <mc:AlternateContent>
-    <mc:Choice Requires="p14">
-      <p:transition spd="slow" p14:dur="2000"/>
-    </mc:Choice>
-    <mc:Fallback>
-      <p:transition spd="slow"/>
-    </mc:Fallback>
-  </mc:AlternateContent>
+  <p:clrMapOvr>
+    <a:masterClrMapping/>
+  </p:clrMapOvr>
 </p:sld>
 </file>
 
 <file path=ppt/slides/slide3.xml><?xml version="1.0" encoding="utf-8"?>
-<p:sld xmlns:a="http://schemas.openxmlformats.org/drawingml/2006/main" xmlns:p="http://schemas.openxmlformats.org/presentationml/2006/main" xmlns:r="http://schemas.openxmlformats.org/officeDocument/2006/relationships" xmlns:p14="http://schemas.microsoft.com/office/powerpoint/2010/main" xmlns:p15="http://schemas.microsoft.com/office/powerpoint/2012/main" xmlns:mc="http://schemas.openxmlformats.org/markup-compatibility/2006">
+<p:sld xmlns:a="http://schemas.openxmlformats.org/drawingml/2006/main" xmlns:r="http://schemas.openxmlformats.org/officeDocument/2006/relationships" xmlns:p="http://schemas.openxmlformats.org/presentationml/2006/main">
   <p:cSld>
     <p:spTree>
       <p:nvGrpSpPr>
@@ -4222,6 +4462,7 @@
           <a:bodyPr lIns="0" tIns="0" rIns="0" bIns="0" anchor="ctr">
             <a:spAutoFit/>
           </a:bodyPr>
+          <a:lstStyle/>
           <a:p>
             <a:pPr indent="0" algn="ctr">
               <a:buNone/>
@@ -4237,14 +4478,6 @@
               </a:rPr>
               <a:t>Executive Summary</a:t>
             </a:r>
-            <a:endParaRPr lang="en-US" sz="3300" b="0" u="none" strike="noStrike">
-              <a:solidFill>
-                <a:srgbClr val="000000"/>
-              </a:solidFill>
-              <a:effectLst/>
-              <a:uFillTx/>
-              <a:latin typeface="Arial"/>
-            </a:endParaRPr>
           </a:p>
         </p:txBody>
       </p:sp>
@@ -4275,6 +4508,7 @@
           <a:bodyPr lIns="0" tIns="0" rIns="0" bIns="0" anchor="t">
             <a:normAutofit lnSpcReduction="9999"/>
           </a:bodyPr>
+          <a:lstStyle/>
           <a:p>
             <a:pPr indent="0" algn="l">
               <a:spcBef>
@@ -4365,14 +4599,6 @@
               </a:rPr>
               <a:t>The utility function reflects the incremental financial impact of acting on the model's recommendations. A true positive represents the expected net savings from successfully retaining an employee, while a false positive represents the cost of an unnecessary retention intervention. False negatives and true negatives are assigned zero utility because they represent the baseline outcome in which no intervention occurs.</a:t>
             </a:r>
-            <a:endParaRPr lang="en-US" sz="1400" b="0" u="none" strike="noStrike">
-              <a:solidFill>
-                <a:srgbClr val="000000"/>
-              </a:solidFill>
-              <a:effectLst/>
-              <a:uFillTx/>
-              <a:latin typeface="Arial"/>
-            </a:endParaRPr>
           </a:p>
           <a:p>
             <a:pPr marL="432000" indent="-324000" algn="l">
@@ -4400,14 +4626,6 @@
               </a:rPr>
               <a:t>It is based on our assumptions:</a:t>
             </a:r>
-            <a:endParaRPr lang="en-US" sz="1400" b="0" u="none" strike="noStrike">
-              <a:solidFill>
-                <a:srgbClr val="000000"/>
-              </a:solidFill>
-              <a:effectLst/>
-              <a:uFillTx/>
-              <a:latin typeface="Arial"/>
-            </a:endParaRPr>
           </a:p>
           <a:p>
             <a:pPr marL="864000" lvl="1" indent="-324000" algn="l">
@@ -4432,14 +4650,6 @@
               </a:rPr>
               <a:t>Cost of employee turnover: $40,000</a:t>
             </a:r>
-            <a:endParaRPr lang="en-US" sz="1400" b="0" u="none" strike="noStrike">
-              <a:solidFill>
-                <a:srgbClr val="000000"/>
-              </a:solidFill>
-              <a:effectLst/>
-              <a:uFillTx/>
-              <a:latin typeface="Arial"/>
-            </a:endParaRPr>
           </a:p>
           <a:p>
             <a:pPr marL="864000" lvl="1" indent="-324000" algn="l">
@@ -4464,14 +4674,6 @@
               </a:rPr>
               <a:t>Cost of retention intervention: $8,000</a:t>
             </a:r>
-            <a:endParaRPr lang="en-US" sz="1400" b="0" u="none" strike="noStrike">
-              <a:solidFill>
-                <a:srgbClr val="000000"/>
-              </a:solidFill>
-              <a:effectLst/>
-              <a:uFillTx/>
-              <a:latin typeface="Arial"/>
-            </a:endParaRPr>
           </a:p>
           <a:p>
             <a:pPr marL="864000" lvl="1" indent="-324000" algn="l">
@@ -4496,25 +4698,17 @@
               </a:rPr>
               <a:t>Retention intervention success rate: 60%</a:t>
             </a:r>
-            <a:endParaRPr lang="en-US" sz="1400" b="0" u="none" strike="noStrike">
-              <a:solidFill>
-                <a:srgbClr val="000000"/>
-              </a:solidFill>
-              <a:effectLst/>
-              <a:uFillTx/>
-              <a:latin typeface="Arial"/>
-            </a:endParaRPr>
           </a:p>
         </p:txBody>
       </p:sp>
       <p:pic>
         <p:nvPicPr>
-          <p:cNvPr id="28" name=""/>
+          <p:cNvPr id="28" name="Picture 27"/>
           <p:cNvPicPr/>
           <p:nvPr/>
         </p:nvPicPr>
         <p:blipFill>
-          <a:blip r:embed="rId1"/>
+          <a:blip r:embed="rId2"/>
           <a:stretch/>
         </p:blipFill>
         <p:spPr>
@@ -4533,19 +4727,14 @@
       </p:pic>
     </p:spTree>
   </p:cSld>
-  <mc:AlternateContent>
-    <mc:Choice Requires="p14">
-      <p:transition spd="slow" p14:dur="2000"/>
-    </mc:Choice>
-    <mc:Fallback>
-      <p:transition spd="slow"/>
-    </mc:Fallback>
-  </mc:AlternateContent>
+  <p:clrMapOvr>
+    <a:masterClrMapping/>
+  </p:clrMapOvr>
 </p:sld>
 </file>
 
 <file path=ppt/slides/slide4.xml><?xml version="1.0" encoding="utf-8"?>
-<p:sld xmlns:a="http://schemas.openxmlformats.org/drawingml/2006/main" xmlns:p="http://schemas.openxmlformats.org/presentationml/2006/main" xmlns:r="http://schemas.openxmlformats.org/officeDocument/2006/relationships" xmlns:p14="http://schemas.microsoft.com/office/powerpoint/2010/main" xmlns:p15="http://schemas.microsoft.com/office/powerpoint/2012/main" xmlns:mc="http://schemas.openxmlformats.org/markup-compatibility/2006">
+<p:sld xmlns:a="http://schemas.openxmlformats.org/drawingml/2006/main" xmlns:r="http://schemas.openxmlformats.org/officeDocument/2006/relationships" xmlns:p="http://schemas.openxmlformats.org/presentationml/2006/main">
   <p:cSld>
     <p:spTree>
       <p:nvGrpSpPr>
@@ -4588,6 +4777,7 @@
           <a:bodyPr lIns="0" tIns="0" rIns="0" bIns="0" anchor="ctr">
             <a:spAutoFit/>
           </a:bodyPr>
+          <a:lstStyle/>
           <a:p>
             <a:pPr indent="0" algn="ctr">
               <a:buNone/>
@@ -4603,14 +4793,6 @@
               </a:rPr>
               <a:t>Data Summary</a:t>
             </a:r>
-            <a:endParaRPr lang="en-US" sz="3300" b="0" u="none" strike="noStrike">
-              <a:solidFill>
-                <a:srgbClr val="000000"/>
-              </a:solidFill>
-              <a:effectLst/>
-              <a:uFillTx/>
-              <a:latin typeface="Arial"/>
-            </a:endParaRPr>
           </a:p>
         </p:txBody>
       </p:sp>
@@ -4641,6 +4823,7 @@
           <a:bodyPr lIns="0" tIns="0" rIns="0" bIns="0" anchor="t">
             <a:normAutofit/>
           </a:bodyPr>
+          <a:lstStyle/>
           <a:p>
             <a:pPr marL="432000" indent="-324000" algn="l">
               <a:spcBef>
@@ -4664,14 +4847,6 @@
               </a:rPr>
               <a:t>Data source: kaggle.com</a:t>
             </a:r>
-            <a:endParaRPr lang="en-US" sz="2400" b="0" u="none" strike="noStrike">
-              <a:solidFill>
-                <a:srgbClr val="000000"/>
-              </a:solidFill>
-              <a:effectLst/>
-              <a:uFillTx/>
-              <a:latin typeface="Arial"/>
-            </a:endParaRPr>
           </a:p>
           <a:p>
             <a:pPr marL="864000" lvl="1" indent="-324000" algn="l">
@@ -4696,14 +4871,6 @@
               </a:rPr>
               <a:t>The data appears to be a fictional dataset created by IBM data scientists.</a:t>
             </a:r>
-            <a:endParaRPr lang="en-US" sz="2100" b="0" u="none" strike="noStrike">
-              <a:solidFill>
-                <a:srgbClr val="000000"/>
-              </a:solidFill>
-              <a:effectLst/>
-              <a:uFillTx/>
-              <a:latin typeface="Arial"/>
-            </a:endParaRPr>
           </a:p>
           <a:p>
             <a:pPr marL="864000" lvl="1" indent="-324000" algn="l">
@@ -4728,32 +4895,19 @@
               </a:rPr>
               <a:t>The dataset contains 1470 rows of data.</a:t>
             </a:r>
-            <a:endParaRPr lang="en-US" sz="2100" b="0" u="none" strike="noStrike">
-              <a:solidFill>
-                <a:srgbClr val="000000"/>
-              </a:solidFill>
-              <a:effectLst/>
-              <a:uFillTx/>
-              <a:latin typeface="Arial"/>
-            </a:endParaRPr>
           </a:p>
         </p:txBody>
       </p:sp>
     </p:spTree>
   </p:cSld>
-  <mc:AlternateContent>
-    <mc:Choice Requires="p14">
-      <p:transition spd="slow" p14:dur="2000"/>
-    </mc:Choice>
-    <mc:Fallback>
-      <p:transition spd="slow"/>
-    </mc:Fallback>
-  </mc:AlternateContent>
+  <p:clrMapOvr>
+    <a:masterClrMapping/>
+  </p:clrMapOvr>
 </p:sld>
 </file>
 
 <file path=ppt/slides/slide5.xml><?xml version="1.0" encoding="utf-8"?>
-<p:sld xmlns:a="http://schemas.openxmlformats.org/drawingml/2006/main" xmlns:p="http://schemas.openxmlformats.org/presentationml/2006/main" xmlns:r="http://schemas.openxmlformats.org/officeDocument/2006/relationships" xmlns:p14="http://schemas.microsoft.com/office/powerpoint/2010/main" xmlns:p15="http://schemas.microsoft.com/office/powerpoint/2012/main" xmlns:mc="http://schemas.openxmlformats.org/markup-compatibility/2006">
+<p:sld xmlns:a="http://schemas.openxmlformats.org/drawingml/2006/main" xmlns:r="http://schemas.openxmlformats.org/officeDocument/2006/relationships" xmlns:p="http://schemas.openxmlformats.org/presentationml/2006/main">
   <p:cSld>
     <p:spTree>
       <p:nvGrpSpPr>
@@ -4796,6 +4950,7 @@
           <a:bodyPr lIns="0" tIns="0" rIns="0" bIns="0" anchor="ctr">
             <a:spAutoFit/>
           </a:bodyPr>
+          <a:lstStyle/>
           <a:p>
             <a:pPr indent="0" algn="ctr">
               <a:buNone/>
@@ -4811,14 +4966,6 @@
               </a:rPr>
               <a:t>Data Preparation</a:t>
             </a:r>
-            <a:endParaRPr lang="en-US" sz="3300" b="0" u="none" strike="noStrike">
-              <a:solidFill>
-                <a:srgbClr val="000000"/>
-              </a:solidFill>
-              <a:effectLst/>
-              <a:uFillTx/>
-              <a:latin typeface="Arial"/>
-            </a:endParaRPr>
           </a:p>
         </p:txBody>
       </p:sp>
@@ -4849,6 +4996,7 @@
           <a:bodyPr lIns="0" tIns="0" rIns="0" bIns="0" anchor="t">
             <a:normAutofit/>
           </a:bodyPr>
+          <a:lstStyle/>
           <a:p>
             <a:pPr marL="432000" indent="-324000" algn="l">
               <a:spcBef>
@@ -4862,7 +5010,7 @@
               <a:buChar char=""/>
             </a:pPr>
             <a:r>
-              <a:rPr lang="en-US" sz="2400" b="0" u="none" strike="noStrike">
+              <a:rPr lang="en-US" sz="2400" b="0" u="none" strike="noStrike" dirty="0">
                 <a:solidFill>
                   <a:srgbClr val="000000"/>
                 </a:solidFill>
@@ -4872,7 +5020,142 @@
               </a:rPr>
               <a:t>The dataset contains 35 different points and required little cleaning.</a:t>
             </a:r>
-            <a:endParaRPr lang="en-US" sz="2400" b="0" u="none" strike="noStrike">
+          </a:p>
+          <a:p>
+            <a:pPr marL="864000" lvl="1" indent="-324000" algn="l">
+              <a:spcBef>
+                <a:spcPts val="850"/>
+              </a:spcBef>
+              <a:buClr>
+                <a:srgbClr val="000000"/>
+              </a:buClr>
+              <a:buSzPct val="75000"/>
+              <a:buFont typeface="Symbol" charset="2"/>
+              <a:buChar char=""/>
+            </a:pPr>
+            <a:r>
+              <a:rPr lang="en-US" sz="2100" b="0" u="none" strike="noStrike" dirty="0">
+                <a:solidFill>
+                  <a:srgbClr val="000000"/>
+                </a:solidFill>
+                <a:effectLst/>
+                <a:uFillTx/>
+                <a:latin typeface="Arial"/>
+              </a:rPr>
+              <a:t>For this project, we converted ‘Attrition’ to a binary outcome where Yes = 1</a:t>
+            </a:r>
+            <a:r>
+              <a:rPr lang="en-US" sz="2100" dirty="0">
+                <a:solidFill>
+                  <a:srgbClr val="000000"/>
+                </a:solidFill>
+                <a:latin typeface="Arial"/>
+              </a:rPr>
+              <a:t> - meaning the employee left the company</a:t>
+            </a:r>
+          </a:p>
+          <a:p>
+            <a:pPr marL="864000" lvl="3" indent="-324000" algn="l">
+              <a:spcBef>
+                <a:spcPts val="850"/>
+              </a:spcBef>
+              <a:buClr>
+                <a:srgbClr val="000000"/>
+              </a:buClr>
+              <a:buSzPct val="75000"/>
+              <a:buFont typeface="Symbol" charset="2"/>
+              <a:buChar char=""/>
+            </a:pPr>
+            <a:r>
+              <a:rPr lang="en-US" sz="2100" b="0" u="none" strike="noStrike" dirty="0">
+                <a:solidFill>
+                  <a:srgbClr val="000000"/>
+                </a:solidFill>
+                <a:effectLst/>
+                <a:uFillTx/>
+                <a:latin typeface="Arial"/>
+              </a:rPr>
+              <a:t>Removed from data </a:t>
+            </a:r>
+          </a:p>
+          <a:p>
+            <a:pPr marL="864000" lvl="8" indent="-324000" algn="l">
+              <a:spcBef>
+                <a:spcPts val="850"/>
+              </a:spcBef>
+              <a:buClr>
+                <a:srgbClr val="000000"/>
+              </a:buClr>
+              <a:buSzPct val="75000"/>
+              <a:buFont typeface="Symbol" charset="2"/>
+              <a:buChar char=""/>
+            </a:pPr>
+            <a:r>
+              <a:rPr lang="en-US" sz="2400" dirty="0"/>
+              <a:t>'Attrition’, 'Department', '</a:t>
+            </a:r>
+            <a:r>
+              <a:rPr lang="en-US" sz="2400" dirty="0" err="1"/>
+              <a:t>EmployeeNumber</a:t>
+            </a:r>
+            <a:r>
+              <a:rPr lang="en-US" sz="2400" dirty="0"/>
+              <a:t>', '</a:t>
+            </a:r>
+            <a:r>
+              <a:rPr lang="en-US" sz="2400" dirty="0" err="1"/>
+              <a:t>DailyRate</a:t>
+            </a:r>
+            <a:r>
+              <a:rPr lang="en-US" sz="2400" dirty="0"/>
+              <a:t>', '</a:t>
+            </a:r>
+            <a:r>
+              <a:rPr lang="en-US" sz="2400" dirty="0" err="1"/>
+              <a:t>MonthlyIncome</a:t>
+            </a:r>
+            <a:r>
+              <a:rPr lang="en-US" sz="2400" dirty="0"/>
+              <a:t>', '</a:t>
+            </a:r>
+            <a:r>
+              <a:rPr lang="en-US" sz="2400" dirty="0" err="1"/>
+              <a:t>EmployeeCount</a:t>
+            </a:r>
+            <a:r>
+              <a:rPr lang="en-US" sz="2400" dirty="0"/>
+              <a:t>', 'Over18', '</a:t>
+            </a:r>
+            <a:r>
+              <a:rPr lang="en-US" sz="2400" dirty="0" err="1"/>
+              <a:t>PerformanceRating</a:t>
+            </a:r>
+            <a:r>
+              <a:rPr lang="en-US" sz="2400" dirty="0"/>
+              <a:t>', '</a:t>
+            </a:r>
+            <a:r>
+              <a:rPr lang="en-US" sz="2400" dirty="0" err="1"/>
+              <a:t>StandardHours</a:t>
+            </a:r>
+            <a:r>
+              <a:rPr lang="en-US" sz="2400" dirty="0"/>
+              <a:t>'</a:t>
+            </a:r>
+          </a:p>
+          <a:p>
+            <a:pPr marL="864000" lvl="1" indent="-324000" algn="l">
+              <a:spcBef>
+                <a:spcPts val="850"/>
+              </a:spcBef>
+              <a:buClr>
+                <a:srgbClr val="000000"/>
+              </a:buClr>
+              <a:buSzPct val="75000"/>
+              <a:buFont typeface="Symbol" charset="2"/>
+              <a:buChar char=""/>
+            </a:pPr>
+            <a:endParaRPr lang="en-US" sz="2100" b="0" u="none" strike="noStrike" dirty="0">
               <a:solidFill>
                 <a:srgbClr val="000000"/>
               </a:solidFill>
@@ -4881,55 +5164,18 @@
               <a:latin typeface="Arial"/>
             </a:endParaRPr>
           </a:p>
-          <a:p>
-            <a:pPr marL="864000" lvl="1" indent="-324000" algn="l">
-              <a:spcBef>
-                <a:spcPts val="850"/>
-              </a:spcBef>
-              <a:buClr>
-                <a:srgbClr val="000000"/>
-              </a:buClr>
-              <a:buSzPct val="75000"/>
-              <a:buFont typeface="Symbol" charset="2"/>
-              <a:buChar char=""/>
-            </a:pPr>
-            <a:r>
-              <a:rPr lang="en-US" sz="2100" b="0" u="none" strike="noStrike">
-                <a:solidFill>
-                  <a:srgbClr val="000000"/>
-                </a:solidFill>
-                <a:effectLst/>
-                <a:uFillTx/>
-                <a:latin typeface="Arial"/>
-              </a:rPr>
-              <a:t>For this project, we converted ‘Attrition’ to a binary outcome where Yes = 1</a:t>
-            </a:r>
-            <a:endParaRPr lang="en-US" sz="2100" b="0" u="none" strike="noStrike">
-              <a:solidFill>
-                <a:srgbClr val="000000"/>
-              </a:solidFill>
-              <a:effectLst/>
-              <a:uFillTx/>
-              <a:latin typeface="Arial"/>
-            </a:endParaRPr>
-          </a:p>
         </p:txBody>
       </p:sp>
     </p:spTree>
   </p:cSld>
-  <mc:AlternateContent>
-    <mc:Choice Requires="p14">
-      <p:transition spd="slow" p14:dur="2000"/>
-    </mc:Choice>
-    <mc:Fallback>
-      <p:transition spd="slow"/>
-    </mc:Fallback>
-  </mc:AlternateContent>
+  <p:clrMapOvr>
+    <a:masterClrMapping/>
+  </p:clrMapOvr>
 </p:sld>
 </file>
 
 <file path=ppt/slides/slide6.xml><?xml version="1.0" encoding="utf-8"?>
-<p:sld xmlns:a="http://schemas.openxmlformats.org/drawingml/2006/main" xmlns:p="http://schemas.openxmlformats.org/presentationml/2006/main" xmlns:r="http://schemas.openxmlformats.org/officeDocument/2006/relationships" xmlns:p14="http://schemas.microsoft.com/office/powerpoint/2010/main" xmlns:p15="http://schemas.microsoft.com/office/powerpoint/2012/main" xmlns:mc="http://schemas.openxmlformats.org/markup-compatibility/2006">
+<p:sld xmlns:a="http://schemas.openxmlformats.org/drawingml/2006/main" xmlns:r="http://schemas.openxmlformats.org/officeDocument/2006/relationships" xmlns:p="http://schemas.openxmlformats.org/presentationml/2006/main">
   <p:cSld>
     <p:spTree>
       <p:nvGrpSpPr>
@@ -4972,6 +5218,7 @@
           <a:bodyPr lIns="0" tIns="0" rIns="0" bIns="0" anchor="ctr">
             <a:spAutoFit/>
           </a:bodyPr>
+          <a:lstStyle/>
           <a:p>
             <a:pPr indent="0" algn="ctr">
               <a:buNone/>
@@ -4987,14 +5234,6 @@
               </a:rPr>
               <a:t>Overtime vs Attrition</a:t>
             </a:r>
-            <a:endParaRPr lang="en-US" sz="3300" b="0" u="none" strike="noStrike">
-              <a:solidFill>
-                <a:srgbClr val="000000"/>
-              </a:solidFill>
-              <a:effectLst/>
-              <a:uFillTx/>
-              <a:latin typeface="Arial"/>
-            </a:endParaRPr>
           </a:p>
         </p:txBody>
       </p:sp>
@@ -5025,6 +5264,7 @@
           <a:bodyPr lIns="0" tIns="0" rIns="0" bIns="0" anchor="t">
             <a:normAutofit/>
           </a:bodyPr>
+          <a:lstStyle/>
           <a:p>
             <a:pPr marL="432000" indent="-324000" algn="l">
               <a:spcBef>
@@ -5048,25 +5288,17 @@
               </a:rPr>
               <a:t>It appears as though employees who work overtime are more likely to leave.</a:t>
             </a:r>
-            <a:endParaRPr lang="en-US" sz="2400" b="0" u="none" strike="noStrike">
-              <a:solidFill>
-                <a:srgbClr val="000000"/>
-              </a:solidFill>
-              <a:effectLst/>
-              <a:uFillTx/>
-              <a:latin typeface="Arial"/>
-            </a:endParaRPr>
           </a:p>
         </p:txBody>
       </p:sp>
       <p:pic>
         <p:nvPicPr>
-          <p:cNvPr id="35" name=""/>
+          <p:cNvPr id="35" name="Picture 34"/>
           <p:cNvPicPr/>
           <p:nvPr/>
         </p:nvPicPr>
         <p:blipFill>
-          <a:blip r:embed="rId1"/>
+          <a:blip r:embed="rId2"/>
           <a:stretch/>
         </p:blipFill>
         <p:spPr>
@@ -5085,19 +5317,14 @@
       </p:pic>
     </p:spTree>
   </p:cSld>
-  <mc:AlternateContent>
-    <mc:Choice Requires="p14">
-      <p:transition spd="slow" p14:dur="2000"/>
-    </mc:Choice>
-    <mc:Fallback>
-      <p:transition spd="slow"/>
-    </mc:Fallback>
-  </mc:AlternateContent>
+  <p:clrMapOvr>
+    <a:masterClrMapping/>
+  </p:clrMapOvr>
 </p:sld>
 </file>
 
 <file path=ppt/slides/slide7.xml><?xml version="1.0" encoding="utf-8"?>
-<p:sld xmlns:a="http://schemas.openxmlformats.org/drawingml/2006/main" xmlns:p="http://schemas.openxmlformats.org/presentationml/2006/main" xmlns:r="http://schemas.openxmlformats.org/officeDocument/2006/relationships" xmlns:p14="http://schemas.microsoft.com/office/powerpoint/2010/main" xmlns:p15="http://schemas.microsoft.com/office/powerpoint/2012/main" xmlns:mc="http://schemas.openxmlformats.org/markup-compatibility/2006">
+<p:sld xmlns:a="http://schemas.openxmlformats.org/drawingml/2006/main" xmlns:r="http://schemas.openxmlformats.org/officeDocument/2006/relationships" xmlns:p="http://schemas.openxmlformats.org/presentationml/2006/main">
   <p:cSld>
     <p:spTree>
       <p:nvGrpSpPr>
@@ -5140,6 +5367,7 @@
           <a:bodyPr lIns="0" tIns="0" rIns="0" bIns="0" anchor="ctr">
             <a:spAutoFit/>
           </a:bodyPr>
+          <a:lstStyle/>
           <a:p>
             <a:pPr indent="0" algn="ctr">
               <a:buNone/>
@@ -5155,14 +5383,6 @@
               </a:rPr>
               <a:t>Satisfaction vs Attrition</a:t>
             </a:r>
-            <a:endParaRPr lang="en-US" sz="3300" b="0" u="none" strike="noStrike">
-              <a:solidFill>
-                <a:srgbClr val="000000"/>
-              </a:solidFill>
-              <a:effectLst/>
-              <a:uFillTx/>
-              <a:latin typeface="Arial"/>
-            </a:endParaRPr>
           </a:p>
         </p:txBody>
       </p:sp>
@@ -5193,6 +5413,7 @@
           <a:bodyPr lIns="0" tIns="0" rIns="0" bIns="0" anchor="t">
             <a:normAutofit/>
           </a:bodyPr>
+          <a:lstStyle/>
           <a:p>
             <a:pPr marL="432000" indent="-324000" algn="l">
               <a:spcBef>
@@ -5216,14 +5437,6 @@
               </a:rPr>
               <a:t>4 = Very Satisfied, 1 = Not Satisfied.</a:t>
             </a:r>
-            <a:endParaRPr lang="en-US" sz="2400" b="0" u="none" strike="noStrike">
-              <a:solidFill>
-                <a:srgbClr val="000000"/>
-              </a:solidFill>
-              <a:effectLst/>
-              <a:uFillTx/>
-              <a:latin typeface="Arial"/>
-            </a:endParaRPr>
           </a:p>
           <a:p>
             <a:pPr marL="432000" indent="-324000" algn="l">
@@ -5248,25 +5461,17 @@
               </a:rPr>
               <a:t>The more satisfied an employee was, the more likely they would be to stay.</a:t>
             </a:r>
-            <a:endParaRPr lang="en-US" sz="2400" b="0" u="none" strike="noStrike">
-              <a:solidFill>
-                <a:srgbClr val="000000"/>
-              </a:solidFill>
-              <a:effectLst/>
-              <a:uFillTx/>
-              <a:latin typeface="Arial"/>
-            </a:endParaRPr>
           </a:p>
         </p:txBody>
       </p:sp>
       <p:pic>
         <p:nvPicPr>
-          <p:cNvPr id="38" name=""/>
+          <p:cNvPr id="38" name="Picture 37"/>
           <p:cNvPicPr/>
           <p:nvPr/>
         </p:nvPicPr>
         <p:blipFill>
-          <a:blip r:embed="rId1"/>
+          <a:blip r:embed="rId2"/>
           <a:stretch/>
         </p:blipFill>
         <p:spPr>
@@ -5285,19 +5490,14 @@
       </p:pic>
     </p:spTree>
   </p:cSld>
-  <mc:AlternateContent>
-    <mc:Choice Requires="p14">
-      <p:transition spd="slow" p14:dur="2000"/>
-    </mc:Choice>
-    <mc:Fallback>
-      <p:transition spd="slow"/>
-    </mc:Fallback>
-  </mc:AlternateContent>
+  <p:clrMapOvr>
+    <a:masterClrMapping/>
+  </p:clrMapOvr>
 </p:sld>
 </file>
 
 <file path=ppt/slides/slide8.xml><?xml version="1.0" encoding="utf-8"?>
-<p:sld xmlns:a="http://schemas.openxmlformats.org/drawingml/2006/main" xmlns:p="http://schemas.openxmlformats.org/presentationml/2006/main" xmlns:r="http://schemas.openxmlformats.org/officeDocument/2006/relationships" xmlns:p14="http://schemas.microsoft.com/office/powerpoint/2010/main" xmlns:p15="http://schemas.microsoft.com/office/powerpoint/2012/main" xmlns:mc="http://schemas.openxmlformats.org/markup-compatibility/2006">
+<p:sld xmlns:a="http://schemas.openxmlformats.org/drawingml/2006/main" xmlns:r="http://schemas.openxmlformats.org/officeDocument/2006/relationships" xmlns:p="http://schemas.openxmlformats.org/presentationml/2006/main">
   <p:cSld>
     <p:spTree>
       <p:nvGrpSpPr>
@@ -5340,12 +5540,13 @@
           <a:bodyPr lIns="0" tIns="0" rIns="0" bIns="0" anchor="ctr">
             <a:spAutoFit/>
           </a:bodyPr>
+          <a:lstStyle/>
           <a:p>
             <a:pPr indent="0" algn="ctr">
               <a:buNone/>
             </a:pPr>
             <a:r>
-              <a:rPr lang="en-US" sz="3300" b="0" u="none" strike="noStrike">
+              <a:rPr lang="en-US" sz="3300" b="0" u="none" strike="noStrike" dirty="0">
                 <a:solidFill>
                   <a:srgbClr val="000000"/>
                 </a:solidFill>
@@ -5355,14 +5556,6 @@
               </a:rPr>
               <a:t>Age vs Attrition</a:t>
             </a:r>
-            <a:endParaRPr lang="en-US" sz="3300" b="0" u="none" strike="noStrike">
-              <a:solidFill>
-                <a:srgbClr val="000000"/>
-              </a:solidFill>
-              <a:effectLst/>
-              <a:uFillTx/>
-              <a:latin typeface="Arial"/>
-            </a:endParaRPr>
           </a:p>
         </p:txBody>
       </p:sp>
@@ -5391,8 +5584,9 @@
         </p:spPr>
         <p:txBody>
           <a:bodyPr lIns="0" tIns="0" rIns="0" bIns="0" anchor="t">
-            <a:normAutofit fontScale="85000" lnSpcReduction="9999"/>
+            <a:normAutofit fontScale="92500" lnSpcReduction="19999"/>
           </a:bodyPr>
+          <a:lstStyle/>
           <a:p>
             <a:pPr marL="432000" indent="-324000" algn="l">
               <a:spcBef>
@@ -5406,7 +5600,7 @@
               <a:buChar char=""/>
             </a:pPr>
             <a:r>
-              <a:rPr lang="en-US" sz="2400" b="0" u="none" strike="noStrike">
+              <a:rPr lang="en-US" sz="2400" b="0" u="none" strike="noStrike" dirty="0">
                 <a:solidFill>
                   <a:srgbClr val="000000"/>
                 </a:solidFill>
@@ -5416,14 +5610,6 @@
               </a:rPr>
               <a:t>According to the data, we see that younger employees are more likely to leave, but this starts to level off then reverse around age 45.</a:t>
             </a:r>
-            <a:endParaRPr lang="en-US" sz="2400" b="0" u="none" strike="noStrike">
-              <a:solidFill>
-                <a:srgbClr val="000000"/>
-              </a:solidFill>
-              <a:effectLst/>
-              <a:uFillTx/>
-              <a:latin typeface="Arial"/>
-            </a:endParaRPr>
           </a:p>
           <a:p>
             <a:pPr marL="864000" lvl="1" indent="-324000" algn="l">
@@ -5438,7 +5624,7 @@
               <a:buChar char=""/>
             </a:pPr>
             <a:r>
-              <a:rPr lang="en-US" sz="2100" b="0" u="none" strike="noStrike">
+              <a:rPr lang="en-US" sz="2100" b="0" u="none" strike="noStrike" dirty="0">
                 <a:solidFill>
                   <a:srgbClr val="000000"/>
                 </a:solidFill>
@@ -5448,14 +5634,6 @@
               </a:rPr>
               <a:t>Younger employees are more mobile and able to accept jobs elsewhere.</a:t>
             </a:r>
-            <a:endParaRPr lang="en-US" sz="2100" b="0" u="none" strike="noStrike">
-              <a:solidFill>
-                <a:srgbClr val="000000"/>
-              </a:solidFill>
-              <a:effectLst/>
-              <a:uFillTx/>
-              <a:latin typeface="Arial"/>
-            </a:endParaRPr>
           </a:p>
           <a:p>
             <a:pPr marL="864000" lvl="1" indent="-324000" algn="l">
@@ -5470,7 +5648,7 @@
               <a:buChar char=""/>
             </a:pPr>
             <a:r>
-              <a:rPr lang="en-US" sz="2100" b="0" u="none" strike="noStrike">
+              <a:rPr lang="en-US" sz="2100" b="0" u="none" strike="noStrike" dirty="0">
                 <a:solidFill>
                   <a:srgbClr val="000000"/>
                 </a:solidFill>
@@ -5480,14 +5658,6 @@
               </a:rPr>
               <a:t>Middle age workers are more likely to have families, and opt for more stable employment.</a:t>
             </a:r>
-            <a:endParaRPr lang="en-US" sz="2100" b="0" u="none" strike="noStrike">
-              <a:solidFill>
-                <a:srgbClr val="000000"/>
-              </a:solidFill>
-              <a:effectLst/>
-              <a:uFillTx/>
-              <a:latin typeface="Arial"/>
-            </a:endParaRPr>
           </a:p>
           <a:p>
             <a:pPr marL="864000" lvl="1" indent="-324000" algn="l">
@@ -5502,7 +5672,7 @@
               <a:buChar char=""/>
             </a:pPr>
             <a:r>
-              <a:rPr lang="en-US" sz="2100" b="0" u="none" strike="noStrike">
+              <a:rPr lang="en-US" sz="2100" b="0" u="none" strike="noStrike" dirty="0">
                 <a:solidFill>
                   <a:srgbClr val="000000"/>
                 </a:solidFill>
@@ -5512,30 +5682,22 @@
               </a:rPr>
               <a:t>Older employees could be leaving for more senior level positions or retirement.</a:t>
             </a:r>
-            <a:endParaRPr lang="en-US" sz="2100" b="0" u="none" strike="noStrike">
-              <a:solidFill>
-                <a:srgbClr val="000000"/>
-              </a:solidFill>
-              <a:effectLst/>
-              <a:uFillTx/>
-              <a:latin typeface="Arial"/>
-            </a:endParaRPr>
           </a:p>
         </p:txBody>
       </p:sp>
       <p:pic>
         <p:nvPicPr>
-          <p:cNvPr id="41" name=""/>
+          <p:cNvPr id="41" name="Picture 40"/>
           <p:cNvPicPr/>
           <p:nvPr/>
         </p:nvPicPr>
         <p:blipFill>
-          <a:blip r:embed="rId1"/>
+          <a:blip r:embed="rId2"/>
           <a:stretch/>
         </p:blipFill>
         <p:spPr>
           <a:xfrm>
-            <a:off x="4376160" y="1172520"/>
+            <a:off x="4476590" y="1172520"/>
             <a:ext cx="5510520" cy="3990600"/>
           </a:xfrm>
           <a:prstGeom prst="rect">
@@ -5549,19 +5711,14 @@
       </p:pic>
     </p:spTree>
   </p:cSld>
-  <mc:AlternateContent>
-    <mc:Choice Requires="p14">
-      <p:transition spd="slow" p14:dur="2000"/>
-    </mc:Choice>
-    <mc:Fallback>
-      <p:transition spd="slow"/>
-    </mc:Fallback>
-  </mc:AlternateContent>
+  <p:clrMapOvr>
+    <a:masterClrMapping/>
+  </p:clrMapOvr>
 </p:sld>
 </file>
 
 <file path=ppt/slides/slide9.xml><?xml version="1.0" encoding="utf-8"?>
-<p:sld xmlns:a="http://schemas.openxmlformats.org/drawingml/2006/main" xmlns:p="http://schemas.openxmlformats.org/presentationml/2006/main" xmlns:r="http://schemas.openxmlformats.org/officeDocument/2006/relationships" xmlns:p14="http://schemas.microsoft.com/office/powerpoint/2010/main" xmlns:p15="http://schemas.microsoft.com/office/powerpoint/2012/main" xmlns:mc="http://schemas.openxmlformats.org/markup-compatibility/2006">
+<p:sld xmlns:a="http://schemas.openxmlformats.org/drawingml/2006/main" xmlns:r="http://schemas.openxmlformats.org/officeDocument/2006/relationships" xmlns:p="http://schemas.openxmlformats.org/presentationml/2006/main">
   <p:cSld>
     <p:spTree>
       <p:nvGrpSpPr>
@@ -5604,6 +5761,7 @@
           <a:bodyPr lIns="0" tIns="0" rIns="0" bIns="0" anchor="ctr">
             <a:spAutoFit/>
           </a:bodyPr>
+          <a:lstStyle/>
           <a:p>
             <a:pPr indent="0" algn="ctr">
               <a:buNone/>
@@ -5619,14 +5777,6 @@
               </a:rPr>
               <a:t>Commute Vs Attrition</a:t>
             </a:r>
-            <a:endParaRPr lang="en-US" sz="3300" b="0" u="none" strike="noStrike">
-              <a:solidFill>
-                <a:srgbClr val="000000"/>
-              </a:solidFill>
-              <a:effectLst/>
-              <a:uFillTx/>
-              <a:latin typeface="Arial"/>
-            </a:endParaRPr>
           </a:p>
         </p:txBody>
       </p:sp>
@@ -5657,6 +5807,7 @@
           <a:bodyPr lIns="0" tIns="0" rIns="0" bIns="0" anchor="t">
             <a:normAutofit/>
           </a:bodyPr>
+          <a:lstStyle/>
           <a:p>
             <a:pPr marL="432000" indent="-324000" algn="l">
               <a:spcBef>
@@ -5670,35 +5821,27 @@
               <a:buChar char=""/>
             </a:pPr>
             <a:r>
-              <a:rPr lang="en-US" sz="2400" b="0" u="none" strike="noStrike">
-                <a:solidFill>
-                  <a:srgbClr val="000000"/>
-                </a:solidFill>
-                <a:effectLst/>
-                <a:uFillTx/>
-                <a:latin typeface="Arial"/>
-              </a:rPr>
-              <a:t>It appears that commute does have an affect on Attrition, but it seems to level off between 15-20 miles in distance.</a:t>
-            </a:r>
-            <a:endParaRPr lang="en-US" sz="2400" b="0" u="none" strike="noStrike">
-              <a:solidFill>
-                <a:srgbClr val="000000"/>
-              </a:solidFill>
-              <a:effectLst/>
-              <a:uFillTx/>
-              <a:latin typeface="Arial"/>
-            </a:endParaRPr>
+              <a:rPr lang="en-US" sz="2400" b="0" u="none" strike="noStrike" dirty="0">
+                <a:solidFill>
+                  <a:srgbClr val="000000"/>
+                </a:solidFill>
+                <a:effectLst/>
+                <a:uFillTx/>
+                <a:latin typeface="Arial"/>
+              </a:rPr>
+              <a:t>It appears that commute does have an effect on Attrition, but it seems to level off between 15-20 miles in distance.</a:t>
+            </a:r>
           </a:p>
         </p:txBody>
       </p:sp>
       <p:pic>
         <p:nvPicPr>
-          <p:cNvPr id="44" name=""/>
+          <p:cNvPr id="44" name="Picture 43"/>
           <p:cNvPicPr/>
           <p:nvPr/>
         </p:nvPicPr>
         <p:blipFill>
-          <a:blip r:embed="rId1"/>
+          <a:blip r:embed="rId2"/>
           <a:stretch/>
         </p:blipFill>
         <p:spPr>
@@ -5717,19 +5860,14 @@
       </p:pic>
     </p:spTree>
   </p:cSld>
-  <mc:AlternateContent>
-    <mc:Choice Requires="p14">
-      <p:transition spd="slow" p14:dur="2000"/>
-    </mc:Choice>
-    <mc:Fallback>
-      <p:transition spd="slow"/>
-    </mc:Fallback>
-  </mc:AlternateContent>
+  <p:clrMapOvr>
+    <a:masterClrMapping/>
+  </p:clrMapOvr>
 </p:sld>
 </file>
 
 <file path=ppt/theme/theme1.xml><?xml version="1.0" encoding="utf-8"?>
-<a:theme xmlns:a="http://schemas.openxmlformats.org/drawingml/2006/main" xmlns:r="http://schemas.openxmlformats.org/officeDocument/2006/relationships" name="Office">
+<a:theme xmlns:a="http://schemas.openxmlformats.org/drawingml/2006/main" name="Office">
   <a:themeElements>
     <a:clrScheme name="LibreOffice">
       <a:dk1>
@@ -5771,14 +5909,14 @@
     </a:clrScheme>
     <a:fontScheme name="Office">
       <a:majorFont>
-        <a:latin typeface="Arial" pitchFamily="0" charset="1"/>
-        <a:ea typeface="DejaVu Sans" pitchFamily="0" charset="1"/>
-        <a:cs typeface="DejaVu Sans" pitchFamily="0" charset="1"/>
+        <a:latin typeface="Arial"/>
+        <a:ea typeface="DejaVu Sans"/>
+        <a:cs typeface="DejaVu Sans"/>
       </a:majorFont>
       <a:minorFont>
-        <a:latin typeface="Arial" pitchFamily="0" charset="1"/>
-        <a:ea typeface="DejaVu Sans" pitchFamily="0" charset="1"/>
-        <a:cs typeface="DejaVu Sans" pitchFamily="0" charset="1"/>
+        <a:latin typeface="Arial"/>
+        <a:ea typeface="DejaVu Sans"/>
+        <a:cs typeface="DejaVu Sans"/>
       </a:minorFont>
     </a:fontScheme>
     <a:fmtScheme>
@@ -5831,5 +5969,7 @@
       </a:bgFillStyleLst>
     </a:fmtScheme>
   </a:themeElements>
+  <a:objectDefaults/>
+  <a:extraClrSchemeLst/>
 </a:theme>
 </file>
--- a/presentations/project2_presentation.pptx
+++ b/presentations/project2_presentation.pptx
@@ -1,135 +1,44 @@
 
 <file path=ppt/presentation.xml><?xml version="1.0" encoding="utf-8"?>
-<p:presentation xmlns:a="http://schemas.openxmlformats.org/drawingml/2006/main" xmlns:r="http://schemas.openxmlformats.org/officeDocument/2006/relationships" xmlns:p="http://schemas.openxmlformats.org/presentationml/2006/main">
+<p:presentation xmlns:a="http://schemas.openxmlformats.org/drawingml/2006/main" xmlns:p="http://schemas.openxmlformats.org/presentationml/2006/main" xmlns:r="http://schemas.openxmlformats.org/officeDocument/2006/relationships" xmlns:p14="http://schemas.microsoft.com/office/powerpoint/2010/main" xmlns:p15="http://schemas.microsoft.com/office/powerpoint/2012/main" xmlns:mc="http://schemas.openxmlformats.org/markup-compatibility/2006">
   <p:sldMasterIdLst>
-    <p:sldMasterId id="2147483648" r:id="rId1"/>
+    <p:sldMasterId id="2147483648" r:id="rId2"/>
   </p:sldMasterIdLst>
   <p:sldIdLst>
-    <p:sldId id="256" r:id="rId2"/>
-    <p:sldId id="257" r:id="rId3"/>
-    <p:sldId id="258" r:id="rId4"/>
-    <p:sldId id="259" r:id="rId5"/>
-    <p:sldId id="260" r:id="rId6"/>
-    <p:sldId id="261" r:id="rId7"/>
-    <p:sldId id="262" r:id="rId8"/>
-    <p:sldId id="263" r:id="rId9"/>
-    <p:sldId id="264" r:id="rId10"/>
-    <p:sldId id="265" r:id="rId11"/>
-    <p:sldId id="266" r:id="rId12"/>
-    <p:sldId id="267" r:id="rId13"/>
-    <p:sldId id="268" r:id="rId14"/>
-    <p:sldId id="269" r:id="rId15"/>
-    <p:sldId id="270" r:id="rId16"/>
-    <p:sldId id="271" r:id="rId17"/>
+    <p:sldId id="256" r:id="rId3"/>
+    <p:sldId id="257" r:id="rId4"/>
+    <p:sldId id="258" r:id="rId5"/>
+    <p:sldId id="259" r:id="rId6"/>
+    <p:sldId id="260" r:id="rId7"/>
+    <p:sldId id="261" r:id="rId8"/>
+    <p:sldId id="262" r:id="rId9"/>
+    <p:sldId id="263" r:id="rId10"/>
+    <p:sldId id="264" r:id="rId11"/>
+    <p:sldId id="265" r:id="rId12"/>
+    <p:sldId id="266" r:id="rId13"/>
+    <p:sldId id="267" r:id="rId14"/>
+    <p:sldId id="268" r:id="rId15"/>
+    <p:sldId id="269" r:id="rId16"/>
+    <p:sldId id="270" r:id="rId17"/>
+    <p:sldId id="271" r:id="rId18"/>
+    <p:sldId id="272" r:id="rId19"/>
+    <p:sldId id="273" r:id="rId20"/>
   </p:sldIdLst>
   <p:sldSz cx="10080625" cy="5670550"/>
   <p:notesSz cx="7772400" cy="10058400"/>
-  <p:defaultTextStyle>
-    <a:defPPr>
-      <a:defRPr lang="en-US"/>
-    </a:defPPr>
-    <a:lvl1pPr marL="0" algn="l" defTabSz="914400" rtl="0" eaLnBrk="1" latinLnBrk="0" hangingPunct="1">
-      <a:defRPr sz="1800" kern="1200">
-        <a:solidFill>
-          <a:schemeClr val="tx1"/>
-        </a:solidFill>
-        <a:latin typeface="+mn-lt"/>
-        <a:ea typeface="+mn-ea"/>
-        <a:cs typeface="+mn-cs"/>
-      </a:defRPr>
-    </a:lvl1pPr>
-    <a:lvl2pPr marL="457200" algn="l" defTabSz="914400" rtl="0" eaLnBrk="1" latinLnBrk="0" hangingPunct="1">
-      <a:defRPr sz="1800" kern="1200">
-        <a:solidFill>
-          <a:schemeClr val="tx1"/>
-        </a:solidFill>
-        <a:latin typeface="+mn-lt"/>
-        <a:ea typeface="+mn-ea"/>
-        <a:cs typeface="+mn-cs"/>
-      </a:defRPr>
-    </a:lvl2pPr>
-    <a:lvl3pPr marL="914400" algn="l" defTabSz="914400" rtl="0" eaLnBrk="1" latinLnBrk="0" hangingPunct="1">
-      <a:defRPr sz="1800" kern="1200">
-        <a:solidFill>
-          <a:schemeClr val="tx1"/>
-        </a:solidFill>
-        <a:latin typeface="+mn-lt"/>
-        <a:ea typeface="+mn-ea"/>
-        <a:cs typeface="+mn-cs"/>
-      </a:defRPr>
-    </a:lvl3pPr>
-    <a:lvl4pPr marL="1371600" algn="l" defTabSz="914400" rtl="0" eaLnBrk="1" latinLnBrk="0" hangingPunct="1">
-      <a:defRPr sz="1800" kern="1200">
-        <a:solidFill>
-          <a:schemeClr val="tx1"/>
-        </a:solidFill>
-        <a:latin typeface="+mn-lt"/>
-        <a:ea typeface="+mn-ea"/>
-        <a:cs typeface="+mn-cs"/>
-      </a:defRPr>
-    </a:lvl4pPr>
-    <a:lvl5pPr marL="1828800" algn="l" defTabSz="914400" rtl="0" eaLnBrk="1" latinLnBrk="0" hangingPunct="1">
-      <a:defRPr sz="1800" kern="1200">
-        <a:solidFill>
-          <a:schemeClr val="tx1"/>
-        </a:solidFill>
-        <a:latin typeface="+mn-lt"/>
-        <a:ea typeface="+mn-ea"/>
-        <a:cs typeface="+mn-cs"/>
-      </a:defRPr>
-    </a:lvl5pPr>
-    <a:lvl6pPr marL="2286000" algn="l" defTabSz="914400" rtl="0" eaLnBrk="1" latinLnBrk="0" hangingPunct="1">
-      <a:defRPr sz="1800" kern="1200">
-        <a:solidFill>
-          <a:schemeClr val="tx1"/>
-        </a:solidFill>
-        <a:latin typeface="+mn-lt"/>
-        <a:ea typeface="+mn-ea"/>
-        <a:cs typeface="+mn-cs"/>
-      </a:defRPr>
-    </a:lvl6pPr>
-    <a:lvl7pPr marL="2743200" algn="l" defTabSz="914400" rtl="0" eaLnBrk="1" latinLnBrk="0" hangingPunct="1">
-      <a:defRPr sz="1800" kern="1200">
-        <a:solidFill>
-          <a:schemeClr val="tx1"/>
-        </a:solidFill>
-        <a:latin typeface="+mn-lt"/>
-        <a:ea typeface="+mn-ea"/>
-        <a:cs typeface="+mn-cs"/>
-      </a:defRPr>
-    </a:lvl7pPr>
-    <a:lvl8pPr marL="3200400" algn="l" defTabSz="914400" rtl="0" eaLnBrk="1" latinLnBrk="0" hangingPunct="1">
-      <a:defRPr sz="1800" kern="1200">
-        <a:solidFill>
-          <a:schemeClr val="tx1"/>
-        </a:solidFill>
-        <a:latin typeface="+mn-lt"/>
-        <a:ea typeface="+mn-ea"/>
-        <a:cs typeface="+mn-cs"/>
-      </a:defRPr>
-    </a:lvl8pPr>
-    <a:lvl9pPr marL="3657600" algn="l" defTabSz="914400" rtl="0" eaLnBrk="1" latinLnBrk="0" hangingPunct="1">
-      <a:defRPr sz="1800" kern="1200">
-        <a:solidFill>
-          <a:schemeClr val="tx1"/>
-        </a:solidFill>
-        <a:latin typeface="+mn-lt"/>
-        <a:ea typeface="+mn-ea"/>
-        <a:cs typeface="+mn-cs"/>
-      </a:defRPr>
-    </a:lvl9pPr>
-  </p:defaultTextStyle>
-  <p:extLst>
-    <p:ext uri="{EFAFB233-063F-42B5-8137-9DF3F51BA10A}">
-      <p15:sldGuideLst xmlns:p15="http://schemas.microsoft.com/office/powerpoint/2012/main"/>
-    </p:ext>
-  </p:extLst>
 </p:presentation>
 </file>
 
 <file path=ppt/slideLayouts/slideLayout1.xml><?xml version="1.0" encoding="utf-8"?>
-<p:sldLayout xmlns:a="http://schemas.openxmlformats.org/drawingml/2006/main" xmlns:r="http://schemas.openxmlformats.org/officeDocument/2006/relationships" xmlns:p="http://schemas.openxmlformats.org/presentationml/2006/main" type="tx" preserve="1">
+<p:sldLayout xmlns:a="http://schemas.openxmlformats.org/drawingml/2006/main" xmlns:p="http://schemas.openxmlformats.org/presentationml/2006/main" xmlns:r="http://schemas.openxmlformats.org/officeDocument/2006/relationships" xmlns:p14="http://schemas.microsoft.com/office/powerpoint/2010/main" xmlns:p15="http://schemas.microsoft.com/office/powerpoint/2012/main" xmlns:mc="http://schemas.openxmlformats.org/markup-compatibility/2006" type="tx" preserve="1">
   <p:cSld name="Blueprint Plans">
+    <p:bg>
+      <p:bgPr>
+        <a:solidFill>
+          <a:srgbClr val="FFFFFF"/>
+        </a:solidFill>
+      </p:bgPr>
+    </p:bg>
     <p:spTree>
       <p:nvGrpSpPr>
         <p:cNvPr id="1" name=""/>
@@ -151,10 +60,10 @@
           <p:nvPr/>
         </p:nvPicPr>
         <p:blipFill>
-          <a:blip>
+          <a:blip r:embed="rId2">
             <a:extLst>
               <a:ext uri="{96DAC541-7B7A-43D3-8B79-37D633B846F1}">
-                <asvg:svgBlip xmlns:asvg="http://schemas.microsoft.com/office/drawing/2016/SVG/main" r:embed="rId2"/>
+                <asvg:svgBlip xmlns:asvg="http://schemas.microsoft.com/office/drawing/2016/SVG/main" r:embed="rId3"/>
               </a:ext>
             </a:extLst>
           </a:blip>
@@ -163,7 +72,7 @@
         <p:spPr>
           <a:xfrm>
             <a:off x="0" y="0"/>
-            <a:ext cx="10080000" cy="5670000"/>
+            <a:ext cx="10079640" cy="5669640"/>
           </a:xfrm>
           <a:prstGeom prst="rect">
             <a:avLst/>
@@ -187,7 +96,7 @@
         <p:spPr>
           <a:xfrm>
             <a:off x="504000" y="810000"/>
-            <a:ext cx="9072000" cy="1296000"/>
+            <a:ext cx="9071640" cy="1295640"/>
           </a:xfrm>
           <a:prstGeom prst="rect">
             <a:avLst/>
@@ -202,8 +111,14 @@
             <a:noAutofit/>
           </a:bodyPr>
           <a:lstStyle>
-            <a:lvl1pPr indent="0" algn="ctr">
+            <a:lvl1pPr indent="0" algn="ctr" defTabSz="914400">
+              <a:lnSpc>
+                <a:spcPct val="90000"/>
+              </a:lnSpc>
               <a:buNone/>
+              <a:tabLst>
+                <a:tab pos="0" algn="l"/>
+              </a:tabLst>
               <a:defRPr lang="en-US" sz="4400" b="0" u="none" strike="noStrike">
                 <a:solidFill>
                   <a:srgbClr val="FFFFFF"/>
@@ -211,12 +126,19 @@
                 <a:effectLst/>
                 <a:uFillTx/>
                 <a:latin typeface="Arial"/>
+                <a:ea typeface="DejaVu Sans"/>
               </a:defRPr>
             </a:lvl1pPr>
           </a:lstStyle>
           <a:p>
-            <a:pPr indent="0" algn="ctr">
+            <a:pPr indent="0" algn="ctr" defTabSz="914400">
+              <a:lnSpc>
+                <a:spcPct val="90000"/>
+              </a:lnSpc>
               <a:buNone/>
+              <a:tabLst>
+                <a:tab pos="0" algn="l"/>
+              </a:tabLst>
             </a:pPr>
             <a:r>
               <a:rPr lang="en-US" sz="4400" b="0" u="none" strike="noStrike">
@@ -226,9 +148,54 @@
                 <a:effectLst/>
                 <a:uFillTx/>
                 <a:latin typeface="Arial"/>
-              </a:rPr>
-              <a:t>Click to edit the title text format</a:t>
-            </a:r>
+                <a:ea typeface="DejaVu Sans"/>
+              </a:rPr>
+              <a:t>Click to </a:t>
+            </a:r>
+            <a:r>
+              <a:rPr lang="en-US" sz="4400" b="0" u="none" strike="noStrike">
+                <a:solidFill>
+                  <a:srgbClr val="FFFFFF"/>
+                </a:solidFill>
+                <a:effectLst/>
+                <a:uFillTx/>
+                <a:latin typeface="Arial"/>
+                <a:ea typeface="DejaVu Sans"/>
+              </a:rPr>
+              <a:t>edit the </a:t>
+            </a:r>
+            <a:r>
+              <a:rPr lang="en-US" sz="4400" b="0" u="none" strike="noStrike">
+                <a:solidFill>
+                  <a:srgbClr val="FFFFFF"/>
+                </a:solidFill>
+                <a:effectLst/>
+                <a:uFillTx/>
+                <a:latin typeface="Arial"/>
+                <a:ea typeface="DejaVu Sans"/>
+              </a:rPr>
+              <a:t>title text </a:t>
+            </a:r>
+            <a:r>
+              <a:rPr lang="en-US" sz="4400" b="0" u="none" strike="noStrike">
+                <a:solidFill>
+                  <a:srgbClr val="FFFFFF"/>
+                </a:solidFill>
+                <a:effectLst/>
+                <a:uFillTx/>
+                <a:latin typeface="Arial"/>
+                <a:ea typeface="DejaVu Sans"/>
+              </a:rPr>
+              <a:t>format</a:t>
+            </a:r>
+            <a:endParaRPr lang="en-US" sz="4400" b="0" u="none" strike="noStrike">
+              <a:solidFill>
+                <a:srgbClr val="FFFFFF"/>
+              </a:solidFill>
+              <a:effectLst/>
+              <a:uFillTx/>
+              <a:latin typeface="Arial"/>
+            </a:endParaRPr>
           </a:p>
         </p:txBody>
       </p:sp>
@@ -245,7 +212,7 @@
         <p:spPr>
           <a:xfrm>
             <a:off x="504000" y="2376000"/>
-            <a:ext cx="9072000" cy="2754000"/>
+            <a:ext cx="9071640" cy="2753640"/>
           </a:xfrm>
           <a:prstGeom prst="rect">
             <a:avLst/>
@@ -260,7 +227,10 @@
             <a:normAutofit/>
           </a:bodyPr>
           <a:lstStyle>
-            <a:lvl1pPr algn="l">
+            <a:lvl1pPr algn="l" defTabSz="914400">
+              <a:lnSpc>
+                <a:spcPct val="90000"/>
+              </a:lnSpc>
               <a:spcBef>
                 <a:spcPts val="1414"/>
               </a:spcBef>
@@ -277,9 +247,13 @@
                 <a:effectLst/>
                 <a:uFillTx/>
                 <a:latin typeface="Arial"/>
+                <a:ea typeface="DejaVu Sans"/>
               </a:defRPr>
             </a:lvl1pPr>
-            <a:lvl2pPr lvl="1" algn="l">
+            <a:lvl2pPr lvl="1" algn="l" defTabSz="914400">
+              <a:lnSpc>
+                <a:spcPct val="90000"/>
+              </a:lnSpc>
               <a:spcBef>
                 <a:spcPts val="1134"/>
               </a:spcBef>
@@ -296,9 +270,13 @@
                 <a:effectLst/>
                 <a:uFillTx/>
                 <a:latin typeface="Arial"/>
+                <a:ea typeface="DejaVu Sans"/>
               </a:defRPr>
             </a:lvl2pPr>
-            <a:lvl3pPr lvl="2" algn="l">
+            <a:lvl3pPr lvl="2" algn="l" defTabSz="914400">
+              <a:lnSpc>
+                <a:spcPct val="90000"/>
+              </a:lnSpc>
               <a:spcBef>
                 <a:spcPts val="850"/>
               </a:spcBef>
@@ -315,9 +293,13 @@
                 <a:effectLst/>
                 <a:uFillTx/>
                 <a:latin typeface="Arial"/>
+                <a:ea typeface="DejaVu Sans"/>
               </a:defRPr>
             </a:lvl3pPr>
-            <a:lvl4pPr lvl="3" algn="l">
+            <a:lvl4pPr lvl="3" algn="l" defTabSz="914400">
+              <a:lnSpc>
+                <a:spcPct val="90000"/>
+              </a:lnSpc>
               <a:spcBef>
                 <a:spcPts val="567"/>
               </a:spcBef>
@@ -334,9 +316,13 @@
                 <a:effectLst/>
                 <a:uFillTx/>
                 <a:latin typeface="Arial"/>
+                <a:ea typeface="DejaVu Sans"/>
               </a:defRPr>
             </a:lvl4pPr>
-            <a:lvl5pPr lvl="4" algn="l">
+            <a:lvl5pPr lvl="4" algn="l" defTabSz="914400">
+              <a:lnSpc>
+                <a:spcPct val="90000"/>
+              </a:lnSpc>
               <a:spcBef>
                 <a:spcPts val="283"/>
               </a:spcBef>
@@ -353,9 +339,13 @@
                 <a:effectLst/>
                 <a:uFillTx/>
                 <a:latin typeface="Arial"/>
+                <a:ea typeface="DejaVu Sans"/>
               </a:defRPr>
             </a:lvl5pPr>
-            <a:lvl6pPr lvl="5" algn="l">
+            <a:lvl6pPr lvl="5" algn="l" defTabSz="914400">
+              <a:lnSpc>
+                <a:spcPct val="90000"/>
+              </a:lnSpc>
               <a:spcBef>
                 <a:spcPts val="283"/>
               </a:spcBef>
@@ -372,9 +362,13 @@
                 <a:effectLst/>
                 <a:uFillTx/>
                 <a:latin typeface="Arial"/>
+                <a:ea typeface="DejaVu Sans"/>
               </a:defRPr>
             </a:lvl6pPr>
-            <a:lvl7pPr lvl="6" algn="l">
+            <a:lvl7pPr lvl="6" algn="l" defTabSz="914400">
+              <a:lnSpc>
+                <a:spcPct val="90000"/>
+              </a:lnSpc>
               <a:spcBef>
                 <a:spcPts val="283"/>
               </a:spcBef>
@@ -391,11 +385,15 @@
                 <a:effectLst/>
                 <a:uFillTx/>
                 <a:latin typeface="Arial"/>
+                <a:ea typeface="DejaVu Sans"/>
               </a:defRPr>
             </a:lvl7pPr>
           </a:lstStyle>
           <a:p>
-            <a:pPr marL="432000" indent="-324000" algn="l">
+            <a:pPr marL="432000" indent="-324000" algn="l" defTabSz="914400">
+              <a:lnSpc>
+                <a:spcPct val="90000"/>
+              </a:lnSpc>
               <a:spcBef>
                 <a:spcPts val="1414"/>
               </a:spcBef>
@@ -414,12 +412,24 @@
                 <a:effectLst/>
                 <a:uFillTx/>
                 <a:latin typeface="Arial"/>
+                <a:ea typeface="DejaVu Sans"/>
               </a:rPr>
               <a:t>Click to edit the outline text format</a:t>
             </a:r>
-          </a:p>
-          <a:p>
-            <a:pPr marL="864000" lvl="1" indent="-324000" algn="l">
+            <a:endParaRPr lang="en-US" sz="3200" b="0" u="none" strike="noStrike">
+              <a:solidFill>
+                <a:srgbClr val="FFFFFF"/>
+              </a:solidFill>
+              <a:effectLst/>
+              <a:uFillTx/>
+              <a:latin typeface="Arial"/>
+            </a:endParaRPr>
+          </a:p>
+          <a:p>
+            <a:pPr marL="864000" lvl="1" indent="-324000" algn="l" defTabSz="914400">
+              <a:lnSpc>
+                <a:spcPct val="90000"/>
+              </a:lnSpc>
               <a:spcBef>
                 <a:spcPts val="1134"/>
               </a:spcBef>
@@ -438,12 +448,24 @@
                 <a:effectLst/>
                 <a:uFillTx/>
                 <a:latin typeface="Arial"/>
+                <a:ea typeface="DejaVu Sans"/>
               </a:rPr>
               <a:t>Second Outline Level</a:t>
             </a:r>
-          </a:p>
-          <a:p>
-            <a:pPr marL="1296000" lvl="2" indent="-288000" algn="l">
+            <a:endParaRPr lang="en-US" sz="2400" b="0" u="none" strike="noStrike">
+              <a:solidFill>
+                <a:srgbClr val="FFFFFF"/>
+              </a:solidFill>
+              <a:effectLst/>
+              <a:uFillTx/>
+              <a:latin typeface="Arial"/>
+            </a:endParaRPr>
+          </a:p>
+          <a:p>
+            <a:pPr marL="1296000" lvl="2" indent="-288000" algn="l" defTabSz="914400">
+              <a:lnSpc>
+                <a:spcPct val="90000"/>
+              </a:lnSpc>
               <a:spcBef>
                 <a:spcPts val="850"/>
               </a:spcBef>
@@ -462,12 +484,24 @@
                 <a:effectLst/>
                 <a:uFillTx/>
                 <a:latin typeface="Arial"/>
+                <a:ea typeface="DejaVu Sans"/>
               </a:rPr>
               <a:t>Third Outline Level</a:t>
             </a:r>
-          </a:p>
-          <a:p>
-            <a:pPr marL="1728000" lvl="3" indent="-216000" algn="l">
+            <a:endParaRPr lang="en-US" sz="1800" b="0" u="none" strike="noStrike">
+              <a:solidFill>
+                <a:srgbClr val="FFFFFF"/>
+              </a:solidFill>
+              <a:effectLst/>
+              <a:uFillTx/>
+              <a:latin typeface="Arial"/>
+            </a:endParaRPr>
+          </a:p>
+          <a:p>
+            <a:pPr marL="1728000" lvl="3" indent="-216000" algn="l" defTabSz="914400">
+              <a:lnSpc>
+                <a:spcPct val="90000"/>
+              </a:lnSpc>
               <a:spcBef>
                 <a:spcPts val="567"/>
               </a:spcBef>
@@ -486,12 +520,24 @@
                 <a:effectLst/>
                 <a:uFillTx/>
                 <a:latin typeface="Arial"/>
+                <a:ea typeface="DejaVu Sans"/>
               </a:rPr>
               <a:t>Fourth Outline Level</a:t>
             </a:r>
-          </a:p>
-          <a:p>
-            <a:pPr marL="2160000" lvl="4" indent="-216000" algn="l">
+            <a:endParaRPr lang="en-US" sz="1500" b="0" u="none" strike="noStrike">
+              <a:solidFill>
+                <a:srgbClr val="FFFFFF"/>
+              </a:solidFill>
+              <a:effectLst/>
+              <a:uFillTx/>
+              <a:latin typeface="Arial"/>
+            </a:endParaRPr>
+          </a:p>
+          <a:p>
+            <a:pPr marL="2160000" lvl="4" indent="-216000" algn="l" defTabSz="914400">
+              <a:lnSpc>
+                <a:spcPct val="90000"/>
+              </a:lnSpc>
               <a:spcBef>
                 <a:spcPts val="283"/>
               </a:spcBef>
@@ -510,12 +556,24 @@
                 <a:effectLst/>
                 <a:uFillTx/>
                 <a:latin typeface="Arial"/>
+                <a:ea typeface="DejaVu Sans"/>
               </a:rPr>
               <a:t>Fifth Outline Level</a:t>
             </a:r>
-          </a:p>
-          <a:p>
-            <a:pPr marL="2592000" lvl="5" indent="-216000" algn="l">
+            <a:endParaRPr lang="en-US" sz="1500" b="0" u="none" strike="noStrike">
+              <a:solidFill>
+                <a:srgbClr val="FFFFFF"/>
+              </a:solidFill>
+              <a:effectLst/>
+              <a:uFillTx/>
+              <a:latin typeface="Arial"/>
+            </a:endParaRPr>
+          </a:p>
+          <a:p>
+            <a:pPr marL="2592000" lvl="5" indent="-216000" algn="l" defTabSz="914400">
+              <a:lnSpc>
+                <a:spcPct val="90000"/>
+              </a:lnSpc>
               <a:spcBef>
                 <a:spcPts val="283"/>
               </a:spcBef>
@@ -534,12 +592,24 @@
                 <a:effectLst/>
                 <a:uFillTx/>
                 <a:latin typeface="Arial"/>
+                <a:ea typeface="DejaVu Sans"/>
               </a:rPr>
               <a:t>Sixth Outline Level</a:t>
             </a:r>
-          </a:p>
-          <a:p>
-            <a:pPr marL="3024000" lvl="6" indent="-216000" algn="l">
+            <a:endParaRPr lang="en-US" sz="1500" b="0" u="none" strike="noStrike">
+              <a:solidFill>
+                <a:srgbClr val="FFFFFF"/>
+              </a:solidFill>
+              <a:effectLst/>
+              <a:uFillTx/>
+              <a:latin typeface="Arial"/>
+            </a:endParaRPr>
+          </a:p>
+          <a:p>
+            <a:pPr marL="3024000" lvl="6" indent="-216000" algn="l" defTabSz="914400">
+              <a:lnSpc>
+                <a:spcPct val="90000"/>
+              </a:lnSpc>
               <a:spcBef>
                 <a:spcPts val="283"/>
               </a:spcBef>
@@ -558,9 +628,18 @@
                 <a:effectLst/>
                 <a:uFillTx/>
                 <a:latin typeface="Arial"/>
+                <a:ea typeface="DejaVu Sans"/>
               </a:rPr>
               <a:t>Seventh Outline Level</a:t>
             </a:r>
+            <a:endParaRPr lang="en-US" sz="1500" b="0" u="none" strike="noStrike">
+              <a:solidFill>
+                <a:srgbClr val="FFFFFF"/>
+              </a:solidFill>
+              <a:effectLst/>
+              <a:uFillTx/>
+              <a:latin typeface="Arial"/>
+            </a:endParaRPr>
           </a:p>
         </p:txBody>
       </p:sp>
@@ -577,7 +656,7 @@
         <p:spPr>
           <a:xfrm>
             <a:off x="504000" y="5164920"/>
-            <a:ext cx="2348280" cy="390600"/>
+            <a:ext cx="2347920" cy="390240"/>
           </a:xfrm>
           <a:prstGeom prst="rect">
             <a:avLst/>
@@ -592,8 +671,14 @@
             <a:noAutofit/>
           </a:bodyPr>
           <a:lstStyle>
-            <a:lvl1pPr indent="0" algn="l">
+            <a:lvl1pPr indent="0" algn="l" defTabSz="914400">
+              <a:lnSpc>
+                <a:spcPct val="100000"/>
+              </a:lnSpc>
               <a:buNone/>
+              <a:tabLst>
+                <a:tab pos="0" algn="l"/>
+              </a:tabLst>
               <a:defRPr lang="en-US" sz="1400" b="0" u="none" strike="noStrike">
                 <a:solidFill>
                   <a:srgbClr val="FFFFFF"/>
@@ -601,12 +686,19 @@
                 <a:effectLst/>
                 <a:uFillTx/>
                 <a:latin typeface="Arial"/>
+                <a:ea typeface="DejaVu Sans"/>
               </a:defRPr>
             </a:lvl1pPr>
           </a:lstStyle>
           <a:p>
-            <a:pPr indent="0" algn="l">
+            <a:pPr indent="0" algn="l" defTabSz="914400">
+              <a:lnSpc>
+                <a:spcPct val="100000"/>
+              </a:lnSpc>
               <a:buNone/>
+              <a:tabLst>
+                <a:tab pos="0" algn="l"/>
+              </a:tabLst>
             </a:pPr>
             <a:r>
               <a:rPr lang="en-US" sz="1400" b="0" u="none" strike="noStrike">
@@ -616,9 +708,18 @@
                 <a:effectLst/>
                 <a:uFillTx/>
                 <a:latin typeface="Arial"/>
+                <a:ea typeface="DejaVu Sans"/>
               </a:rPr>
               <a:t>&lt;date/time&gt;</a:t>
             </a:r>
+            <a:endParaRPr lang="en-US" sz="1400" b="0" u="none" strike="noStrike">
+              <a:solidFill>
+                <a:srgbClr val="000000"/>
+              </a:solidFill>
+              <a:effectLst/>
+              <a:uFillTx/>
+              <a:latin typeface="Times New Roman"/>
+            </a:endParaRPr>
           </a:p>
         </p:txBody>
       </p:sp>
@@ -635,7 +736,7 @@
         <p:spPr>
           <a:xfrm>
             <a:off x="3447360" y="5164920"/>
-            <a:ext cx="3195000" cy="390600"/>
+            <a:ext cx="3194640" cy="390240"/>
           </a:xfrm>
           <a:prstGeom prst="rect">
             <a:avLst/>
@@ -650,8 +751,14 @@
             <a:noAutofit/>
           </a:bodyPr>
           <a:lstStyle>
-            <a:lvl1pPr indent="0" algn="ctr">
+            <a:lvl1pPr indent="0" algn="ctr" defTabSz="914400">
+              <a:lnSpc>
+                <a:spcPct val="100000"/>
+              </a:lnSpc>
               <a:buNone/>
+              <a:tabLst>
+                <a:tab pos="0" algn="l"/>
+              </a:tabLst>
               <a:defRPr lang="en-US" sz="1400" b="0" u="none" strike="noStrike">
                 <a:solidFill>
                   <a:srgbClr val="FFFFFF"/>
@@ -659,12 +766,19 @@
                 <a:effectLst/>
                 <a:uFillTx/>
                 <a:latin typeface="Arial"/>
+                <a:ea typeface="DejaVu Sans"/>
               </a:defRPr>
             </a:lvl1pPr>
           </a:lstStyle>
           <a:p>
-            <a:pPr indent="0" algn="ctr">
+            <a:pPr indent="0" algn="ctr" defTabSz="914400">
+              <a:lnSpc>
+                <a:spcPct val="100000"/>
+              </a:lnSpc>
               <a:buNone/>
+              <a:tabLst>
+                <a:tab pos="0" algn="l"/>
+              </a:tabLst>
             </a:pPr>
             <a:r>
               <a:rPr lang="en-US" sz="1400" b="0" u="none" strike="noStrike">
@@ -674,9 +788,18 @@
                 <a:effectLst/>
                 <a:uFillTx/>
                 <a:latin typeface="Arial"/>
+                <a:ea typeface="DejaVu Sans"/>
               </a:rPr>
               <a:t>&lt;footer&gt;</a:t>
             </a:r>
+            <a:endParaRPr lang="en-US" sz="1400" b="0" u="none" strike="noStrike">
+              <a:solidFill>
+                <a:srgbClr val="000000"/>
+              </a:solidFill>
+              <a:effectLst/>
+              <a:uFillTx/>
+              <a:latin typeface="Times New Roman"/>
+            </a:endParaRPr>
           </a:p>
         </p:txBody>
       </p:sp>
@@ -693,7 +816,7 @@
         <p:spPr>
           <a:xfrm>
             <a:off x="7227360" y="5164920"/>
-            <a:ext cx="2348280" cy="390600"/>
+            <a:ext cx="2347920" cy="390240"/>
           </a:xfrm>
           <a:prstGeom prst="rect">
             <a:avLst/>
@@ -708,8 +831,14 @@
             <a:noAutofit/>
           </a:bodyPr>
           <a:lstStyle>
-            <a:lvl1pPr indent="0" algn="r">
+            <a:lvl1pPr indent="0" algn="r" defTabSz="914400">
+              <a:lnSpc>
+                <a:spcPct val="100000"/>
+              </a:lnSpc>
               <a:buNone/>
+              <a:tabLst>
+                <a:tab pos="0" algn="l"/>
+              </a:tabLst>
               <a:defRPr lang="en-US" sz="1400" b="0" u="none" strike="noStrike">
                 <a:solidFill>
                   <a:srgbClr val="FFFFFF"/>
@@ -717,14 +846,21 @@
                 <a:effectLst/>
                 <a:uFillTx/>
                 <a:latin typeface="Arial"/>
+                <a:ea typeface="DejaVu Sans"/>
               </a:defRPr>
             </a:lvl1pPr>
           </a:lstStyle>
           <a:p>
-            <a:pPr indent="0" algn="r">
+            <a:pPr indent="0" algn="r" defTabSz="914400">
+              <a:lnSpc>
+                <a:spcPct val="100000"/>
+              </a:lnSpc>
               <a:buNone/>
-            </a:pPr>
-            <a:fld id="{82367243-A4CD-4AEF-8669-EC71E9DCCA5D}" type="slidenum">
+              <a:tabLst>
+                <a:tab pos="0" algn="l"/>
+              </a:tabLst>
+            </a:pPr>
+            <a:fld id="{F3A11C9A-C516-44C5-BF63-3E32968FC90B}" type="slidenum">
               <a:rPr lang="en-US" sz="1400" b="0" u="none" strike="noStrike">
                 <a:solidFill>
                   <a:srgbClr val="FFFFFF"/>
@@ -732,31 +868,36 @@
                 <a:effectLst/>
                 <a:uFillTx/>
                 <a:latin typeface="Arial"/>
-              </a:rPr>
-              <a:t>‹#›</a:t>
+                <a:ea typeface="DejaVu Sans"/>
+              </a:rPr>
+              <a:t>&lt;number&gt;</a:t>
             </a:fld>
             <a:endParaRPr lang="en-US" sz="1400" b="0" u="none" strike="noStrike">
               <a:solidFill>
-                <a:srgbClr val="FFFFFF"/>
-              </a:solidFill>
-              <a:effectLst/>
-              <a:uFillTx/>
-              <a:latin typeface="Arial"/>
+                <a:srgbClr val="000000"/>
+              </a:solidFill>
+              <a:effectLst/>
+              <a:uFillTx/>
+              <a:latin typeface="Times New Roman"/>
             </a:endParaRPr>
           </a:p>
         </p:txBody>
       </p:sp>
     </p:spTree>
   </p:cSld>
-  <p:clrMapOvr>
-    <a:masterClrMapping/>
-  </p:clrMapOvr>
 </p:sldLayout>
 </file>
 
 <file path=ppt/slideLayouts/slideLayout2.xml><?xml version="1.0" encoding="utf-8"?>
-<p:sldLayout xmlns:a="http://schemas.openxmlformats.org/drawingml/2006/main" xmlns:r="http://schemas.openxmlformats.org/officeDocument/2006/relationships" xmlns:p="http://schemas.openxmlformats.org/presentationml/2006/main" type="title" preserve="1">
-  <p:cSld name="Blueprint Plans">
+<p:sldLayout xmlns:a="http://schemas.openxmlformats.org/drawingml/2006/main" xmlns:p="http://schemas.openxmlformats.org/presentationml/2006/main" xmlns:r="http://schemas.openxmlformats.org/officeDocument/2006/relationships" xmlns:p14="http://schemas.microsoft.com/office/powerpoint/2010/main" xmlns:p15="http://schemas.microsoft.com/office/powerpoint/2012/main" xmlns:mc="http://schemas.openxmlformats.org/markup-compatibility/2006" type="title" preserve="1">
+  <p:cSld name="Default">
+    <p:bg>
+      <p:bgPr>
+        <a:solidFill>
+          <a:srgbClr val="FFFFFF"/>
+        </a:solidFill>
+      </p:bgPr>
+    </p:bg>
     <p:spTree>
       <p:nvGrpSpPr>
         <p:cNvPr id="1" name=""/>
@@ -778,10 +919,10 @@
           <p:nvPr/>
         </p:nvPicPr>
         <p:blipFill>
-          <a:blip>
+          <a:blip r:embed="rId2">
             <a:extLst>
               <a:ext uri="{96DAC541-7B7A-43D3-8B79-37D633B846F1}">
-                <asvg:svgBlip xmlns:asvg="http://schemas.microsoft.com/office/drawing/2016/SVG/main" r:embed="rId2"/>
+                <asvg:svgBlip xmlns:asvg="http://schemas.microsoft.com/office/drawing/2016/SVG/main" r:embed="rId3"/>
               </a:ext>
             </a:extLst>
           </a:blip>
@@ -790,7 +931,7 @@
         <p:spPr>
           <a:xfrm>
             <a:off x="0" y="0"/>
-            <a:ext cx="10080000" cy="5670000"/>
+            <a:ext cx="10079640" cy="5669640"/>
           </a:xfrm>
           <a:prstGeom prst="rect">
             <a:avLst/>
@@ -814,7 +955,7 @@
         <p:spPr>
           <a:xfrm>
             <a:off x="504000" y="810000"/>
-            <a:ext cx="9072000" cy="1296000"/>
+            <a:ext cx="9071640" cy="1295640"/>
           </a:xfrm>
           <a:prstGeom prst="rect">
             <a:avLst/>
@@ -829,8 +970,14 @@
             <a:noAutofit/>
           </a:bodyPr>
           <a:lstStyle>
-            <a:lvl1pPr indent="0" algn="ctr">
+            <a:lvl1pPr indent="0" algn="ctr" defTabSz="914400">
+              <a:lnSpc>
+                <a:spcPct val="90000"/>
+              </a:lnSpc>
               <a:buNone/>
+              <a:tabLst>
+                <a:tab pos="0" algn="l"/>
+              </a:tabLst>
               <a:defRPr lang="en-US" sz="4400" b="0" u="none" strike="noStrike">
                 <a:solidFill>
                   <a:srgbClr val="FFFFFF"/>
@@ -838,12 +985,19 @@
                 <a:effectLst/>
                 <a:uFillTx/>
                 <a:latin typeface="Arial"/>
+                <a:ea typeface="DejaVu Sans"/>
               </a:defRPr>
             </a:lvl1pPr>
           </a:lstStyle>
           <a:p>
-            <a:pPr indent="0" algn="ctr">
+            <a:pPr indent="0" algn="ctr" defTabSz="914400">
+              <a:lnSpc>
+                <a:spcPct val="90000"/>
+              </a:lnSpc>
               <a:buNone/>
+              <a:tabLst>
+                <a:tab pos="0" algn="l"/>
+              </a:tabLst>
             </a:pPr>
             <a:r>
               <a:rPr lang="en-US" sz="4400" b="0" u="none" strike="noStrike">
@@ -853,9 +1007,54 @@
                 <a:effectLst/>
                 <a:uFillTx/>
                 <a:latin typeface="Arial"/>
-              </a:rPr>
-              <a:t>Click to edit the title text format</a:t>
-            </a:r>
+                <a:ea typeface="DejaVu Sans"/>
+              </a:rPr>
+              <a:t>Click to </a:t>
+            </a:r>
+            <a:r>
+              <a:rPr lang="en-US" sz="4400" b="0" u="none" strike="noStrike">
+                <a:solidFill>
+                  <a:srgbClr val="FFFFFF"/>
+                </a:solidFill>
+                <a:effectLst/>
+                <a:uFillTx/>
+                <a:latin typeface="Arial"/>
+                <a:ea typeface="DejaVu Sans"/>
+              </a:rPr>
+              <a:t>edit the </a:t>
+            </a:r>
+            <a:r>
+              <a:rPr lang="en-US" sz="4400" b="0" u="none" strike="noStrike">
+                <a:solidFill>
+                  <a:srgbClr val="FFFFFF"/>
+                </a:solidFill>
+                <a:effectLst/>
+                <a:uFillTx/>
+                <a:latin typeface="Arial"/>
+                <a:ea typeface="DejaVu Sans"/>
+              </a:rPr>
+              <a:t>title text </a:t>
+            </a:r>
+            <a:r>
+              <a:rPr lang="en-US" sz="4400" b="0" u="none" strike="noStrike">
+                <a:solidFill>
+                  <a:srgbClr val="FFFFFF"/>
+                </a:solidFill>
+                <a:effectLst/>
+                <a:uFillTx/>
+                <a:latin typeface="Arial"/>
+                <a:ea typeface="DejaVu Sans"/>
+              </a:rPr>
+              <a:t>format</a:t>
+            </a:r>
+            <a:endParaRPr lang="en-US" sz="4400" b="0" u="none" strike="noStrike">
+              <a:solidFill>
+                <a:srgbClr val="FFFFFF"/>
+              </a:solidFill>
+              <a:effectLst/>
+              <a:uFillTx/>
+              <a:latin typeface="Arial"/>
+            </a:endParaRPr>
           </a:p>
         </p:txBody>
       </p:sp>
@@ -872,7 +1071,7 @@
         <p:spPr>
           <a:xfrm>
             <a:off x="504000" y="2376000"/>
-            <a:ext cx="9072000" cy="2754000"/>
+            <a:ext cx="9071640" cy="2753640"/>
           </a:xfrm>
           <a:prstGeom prst="rect">
             <a:avLst/>
@@ -887,7 +1086,10 @@
             <a:normAutofit/>
           </a:bodyPr>
           <a:lstStyle>
-            <a:lvl1pPr algn="l">
+            <a:lvl1pPr algn="l" defTabSz="914400">
+              <a:lnSpc>
+                <a:spcPct val="90000"/>
+              </a:lnSpc>
               <a:spcBef>
                 <a:spcPts val="1414"/>
               </a:spcBef>
@@ -904,9 +1106,13 @@
                 <a:effectLst/>
                 <a:uFillTx/>
                 <a:latin typeface="Arial"/>
+                <a:ea typeface="DejaVu Sans"/>
               </a:defRPr>
             </a:lvl1pPr>
-            <a:lvl2pPr lvl="1" algn="l">
+            <a:lvl2pPr lvl="1" algn="l" defTabSz="914400">
+              <a:lnSpc>
+                <a:spcPct val="90000"/>
+              </a:lnSpc>
               <a:spcBef>
                 <a:spcPts val="1134"/>
               </a:spcBef>
@@ -923,9 +1129,13 @@
                 <a:effectLst/>
                 <a:uFillTx/>
                 <a:latin typeface="Arial"/>
+                <a:ea typeface="DejaVu Sans"/>
               </a:defRPr>
             </a:lvl2pPr>
-            <a:lvl3pPr lvl="2" algn="l">
+            <a:lvl3pPr lvl="2" algn="l" defTabSz="914400">
+              <a:lnSpc>
+                <a:spcPct val="90000"/>
+              </a:lnSpc>
               <a:spcBef>
                 <a:spcPts val="850"/>
               </a:spcBef>
@@ -942,9 +1152,13 @@
                 <a:effectLst/>
                 <a:uFillTx/>
                 <a:latin typeface="Arial"/>
+                <a:ea typeface="DejaVu Sans"/>
               </a:defRPr>
             </a:lvl3pPr>
-            <a:lvl4pPr lvl="3" algn="l">
+            <a:lvl4pPr lvl="3" algn="l" defTabSz="914400">
+              <a:lnSpc>
+                <a:spcPct val="90000"/>
+              </a:lnSpc>
               <a:spcBef>
                 <a:spcPts val="567"/>
               </a:spcBef>
@@ -961,9 +1175,13 @@
                 <a:effectLst/>
                 <a:uFillTx/>
                 <a:latin typeface="Arial"/>
+                <a:ea typeface="DejaVu Sans"/>
               </a:defRPr>
             </a:lvl4pPr>
-            <a:lvl5pPr lvl="4" algn="l">
+            <a:lvl5pPr lvl="4" algn="l" defTabSz="914400">
+              <a:lnSpc>
+                <a:spcPct val="90000"/>
+              </a:lnSpc>
               <a:spcBef>
                 <a:spcPts val="283"/>
               </a:spcBef>
@@ -980,9 +1198,13 @@
                 <a:effectLst/>
                 <a:uFillTx/>
                 <a:latin typeface="Arial"/>
+                <a:ea typeface="DejaVu Sans"/>
               </a:defRPr>
             </a:lvl5pPr>
-            <a:lvl6pPr lvl="5" algn="l">
+            <a:lvl6pPr lvl="5" algn="l" defTabSz="914400">
+              <a:lnSpc>
+                <a:spcPct val="90000"/>
+              </a:lnSpc>
               <a:spcBef>
                 <a:spcPts val="283"/>
               </a:spcBef>
@@ -999,9 +1221,13 @@
                 <a:effectLst/>
                 <a:uFillTx/>
                 <a:latin typeface="Arial"/>
+                <a:ea typeface="DejaVu Sans"/>
               </a:defRPr>
             </a:lvl6pPr>
-            <a:lvl7pPr lvl="6" algn="l">
+            <a:lvl7pPr lvl="6" algn="l" defTabSz="914400">
+              <a:lnSpc>
+                <a:spcPct val="90000"/>
+              </a:lnSpc>
               <a:spcBef>
                 <a:spcPts val="283"/>
               </a:spcBef>
@@ -1018,11 +1244,15 @@
                 <a:effectLst/>
                 <a:uFillTx/>
                 <a:latin typeface="Arial"/>
+                <a:ea typeface="DejaVu Sans"/>
               </a:defRPr>
             </a:lvl7pPr>
           </a:lstStyle>
           <a:p>
-            <a:pPr marL="432000" indent="-324000" algn="l">
+            <a:pPr marL="432000" indent="-324000" algn="l" defTabSz="914400">
+              <a:lnSpc>
+                <a:spcPct val="90000"/>
+              </a:lnSpc>
               <a:spcBef>
                 <a:spcPts val="1414"/>
               </a:spcBef>
@@ -1041,12 +1271,24 @@
                 <a:effectLst/>
                 <a:uFillTx/>
                 <a:latin typeface="Arial"/>
+                <a:ea typeface="DejaVu Sans"/>
               </a:rPr>
               <a:t>Click to edit the outline text format</a:t>
             </a:r>
-          </a:p>
-          <a:p>
-            <a:pPr marL="864000" lvl="1" indent="-324000" algn="l">
+            <a:endParaRPr lang="en-US" sz="3200" b="0" u="none" strike="noStrike">
+              <a:solidFill>
+                <a:srgbClr val="FFFFFF"/>
+              </a:solidFill>
+              <a:effectLst/>
+              <a:uFillTx/>
+              <a:latin typeface="Arial"/>
+            </a:endParaRPr>
+          </a:p>
+          <a:p>
+            <a:pPr marL="864000" lvl="1" indent="-324000" algn="l" defTabSz="914400">
+              <a:lnSpc>
+                <a:spcPct val="90000"/>
+              </a:lnSpc>
               <a:spcBef>
                 <a:spcPts val="1134"/>
               </a:spcBef>
@@ -1065,12 +1307,24 @@
                 <a:effectLst/>
                 <a:uFillTx/>
                 <a:latin typeface="Arial"/>
+                <a:ea typeface="DejaVu Sans"/>
               </a:rPr>
               <a:t>Second Outline Level</a:t>
             </a:r>
-          </a:p>
-          <a:p>
-            <a:pPr marL="1296000" lvl="2" indent="-288000" algn="l">
+            <a:endParaRPr lang="en-US" sz="2400" b="0" u="none" strike="noStrike">
+              <a:solidFill>
+                <a:srgbClr val="FFFFFF"/>
+              </a:solidFill>
+              <a:effectLst/>
+              <a:uFillTx/>
+              <a:latin typeface="Arial"/>
+            </a:endParaRPr>
+          </a:p>
+          <a:p>
+            <a:pPr marL="1296000" lvl="2" indent="-288000" algn="l" defTabSz="914400">
+              <a:lnSpc>
+                <a:spcPct val="90000"/>
+              </a:lnSpc>
               <a:spcBef>
                 <a:spcPts val="850"/>
               </a:spcBef>
@@ -1089,12 +1343,24 @@
                 <a:effectLst/>
                 <a:uFillTx/>
                 <a:latin typeface="Arial"/>
+                <a:ea typeface="DejaVu Sans"/>
               </a:rPr>
               <a:t>Third Outline Level</a:t>
             </a:r>
-          </a:p>
-          <a:p>
-            <a:pPr marL="1728000" lvl="3" indent="-216000" algn="l">
+            <a:endParaRPr lang="en-US" sz="1800" b="0" u="none" strike="noStrike">
+              <a:solidFill>
+                <a:srgbClr val="FFFFFF"/>
+              </a:solidFill>
+              <a:effectLst/>
+              <a:uFillTx/>
+              <a:latin typeface="Arial"/>
+            </a:endParaRPr>
+          </a:p>
+          <a:p>
+            <a:pPr marL="1728000" lvl="3" indent="-216000" algn="l" defTabSz="914400">
+              <a:lnSpc>
+                <a:spcPct val="90000"/>
+              </a:lnSpc>
               <a:spcBef>
                 <a:spcPts val="567"/>
               </a:spcBef>
@@ -1113,12 +1379,24 @@
                 <a:effectLst/>
                 <a:uFillTx/>
                 <a:latin typeface="Arial"/>
+                <a:ea typeface="DejaVu Sans"/>
               </a:rPr>
               <a:t>Fourth Outline Level</a:t>
             </a:r>
-          </a:p>
-          <a:p>
-            <a:pPr marL="2160000" lvl="4" indent="-216000" algn="l">
+            <a:endParaRPr lang="en-US" sz="1500" b="0" u="none" strike="noStrike">
+              <a:solidFill>
+                <a:srgbClr val="FFFFFF"/>
+              </a:solidFill>
+              <a:effectLst/>
+              <a:uFillTx/>
+              <a:latin typeface="Arial"/>
+            </a:endParaRPr>
+          </a:p>
+          <a:p>
+            <a:pPr marL="2160000" lvl="4" indent="-216000" algn="l" defTabSz="914400">
+              <a:lnSpc>
+                <a:spcPct val="90000"/>
+              </a:lnSpc>
               <a:spcBef>
                 <a:spcPts val="283"/>
               </a:spcBef>
@@ -1137,12 +1415,24 @@
                 <a:effectLst/>
                 <a:uFillTx/>
                 <a:latin typeface="Arial"/>
+                <a:ea typeface="DejaVu Sans"/>
               </a:rPr>
               <a:t>Fifth Outline Level</a:t>
             </a:r>
-          </a:p>
-          <a:p>
-            <a:pPr marL="2592000" lvl="5" indent="-216000" algn="l">
+            <a:endParaRPr lang="en-US" sz="1500" b="0" u="none" strike="noStrike">
+              <a:solidFill>
+                <a:srgbClr val="FFFFFF"/>
+              </a:solidFill>
+              <a:effectLst/>
+              <a:uFillTx/>
+              <a:latin typeface="Arial"/>
+            </a:endParaRPr>
+          </a:p>
+          <a:p>
+            <a:pPr marL="2592000" lvl="5" indent="-216000" algn="l" defTabSz="914400">
+              <a:lnSpc>
+                <a:spcPct val="90000"/>
+              </a:lnSpc>
               <a:spcBef>
                 <a:spcPts val="283"/>
               </a:spcBef>
@@ -1161,12 +1451,24 @@
                 <a:effectLst/>
                 <a:uFillTx/>
                 <a:latin typeface="Arial"/>
+                <a:ea typeface="DejaVu Sans"/>
               </a:rPr>
               <a:t>Sixth Outline Level</a:t>
             </a:r>
-          </a:p>
-          <a:p>
-            <a:pPr marL="3024000" lvl="6" indent="-216000" algn="l">
+            <a:endParaRPr lang="en-US" sz="1500" b="0" u="none" strike="noStrike">
+              <a:solidFill>
+                <a:srgbClr val="FFFFFF"/>
+              </a:solidFill>
+              <a:effectLst/>
+              <a:uFillTx/>
+              <a:latin typeface="Arial"/>
+            </a:endParaRPr>
+          </a:p>
+          <a:p>
+            <a:pPr marL="3024000" lvl="6" indent="-216000" algn="l" defTabSz="914400">
+              <a:lnSpc>
+                <a:spcPct val="90000"/>
+              </a:lnSpc>
               <a:spcBef>
                 <a:spcPts val="283"/>
               </a:spcBef>
@@ -1185,9 +1487,18 @@
                 <a:effectLst/>
                 <a:uFillTx/>
                 <a:latin typeface="Arial"/>
+                <a:ea typeface="DejaVu Sans"/>
               </a:rPr>
               <a:t>Seventh Outline Level</a:t>
             </a:r>
+            <a:endParaRPr lang="en-US" sz="1500" b="0" u="none" strike="noStrike">
+              <a:solidFill>
+                <a:srgbClr val="FFFFFF"/>
+              </a:solidFill>
+              <a:effectLst/>
+              <a:uFillTx/>
+              <a:latin typeface="Arial"/>
+            </a:endParaRPr>
           </a:p>
         </p:txBody>
       </p:sp>
@@ -1204,7 +1515,7 @@
         <p:spPr>
           <a:xfrm>
             <a:off x="504000" y="5164920"/>
-            <a:ext cx="2348280" cy="390600"/>
+            <a:ext cx="2347920" cy="390240"/>
           </a:xfrm>
           <a:prstGeom prst="rect">
             <a:avLst/>
@@ -1219,8 +1530,14 @@
             <a:noAutofit/>
           </a:bodyPr>
           <a:lstStyle>
-            <a:lvl1pPr indent="0" algn="l">
+            <a:lvl1pPr indent="0" algn="l" defTabSz="914400">
+              <a:lnSpc>
+                <a:spcPct val="100000"/>
+              </a:lnSpc>
               <a:buNone/>
+              <a:tabLst>
+                <a:tab pos="0" algn="l"/>
+              </a:tabLst>
               <a:defRPr lang="en-US" sz="1400" b="0" u="none" strike="noStrike">
                 <a:solidFill>
                   <a:srgbClr val="FFFFFF"/>
@@ -1228,12 +1545,19 @@
                 <a:effectLst/>
                 <a:uFillTx/>
                 <a:latin typeface="Arial"/>
+                <a:ea typeface="DejaVu Sans"/>
               </a:defRPr>
             </a:lvl1pPr>
           </a:lstStyle>
           <a:p>
-            <a:pPr indent="0" algn="l">
+            <a:pPr indent="0" algn="l" defTabSz="914400">
+              <a:lnSpc>
+                <a:spcPct val="100000"/>
+              </a:lnSpc>
               <a:buNone/>
+              <a:tabLst>
+                <a:tab pos="0" algn="l"/>
+              </a:tabLst>
             </a:pPr>
             <a:r>
               <a:rPr lang="en-US" sz="1400" b="0" u="none" strike="noStrike">
@@ -1243,9 +1567,18 @@
                 <a:effectLst/>
                 <a:uFillTx/>
                 <a:latin typeface="Arial"/>
+                <a:ea typeface="DejaVu Sans"/>
               </a:rPr>
               <a:t>&lt;date/time&gt;</a:t>
             </a:r>
+            <a:endParaRPr lang="en-US" sz="1400" b="0" u="none" strike="noStrike">
+              <a:solidFill>
+                <a:srgbClr val="000000"/>
+              </a:solidFill>
+              <a:effectLst/>
+              <a:uFillTx/>
+              <a:latin typeface="Times New Roman"/>
+            </a:endParaRPr>
           </a:p>
         </p:txBody>
       </p:sp>
@@ -1262,7 +1595,7 @@
         <p:spPr>
           <a:xfrm>
             <a:off x="3447360" y="5164920"/>
-            <a:ext cx="3195000" cy="390600"/>
+            <a:ext cx="3194640" cy="390240"/>
           </a:xfrm>
           <a:prstGeom prst="rect">
             <a:avLst/>
@@ -1277,8 +1610,14 @@
             <a:noAutofit/>
           </a:bodyPr>
           <a:lstStyle>
-            <a:lvl1pPr indent="0" algn="ctr">
+            <a:lvl1pPr indent="0" algn="ctr" defTabSz="914400">
+              <a:lnSpc>
+                <a:spcPct val="100000"/>
+              </a:lnSpc>
               <a:buNone/>
+              <a:tabLst>
+                <a:tab pos="0" algn="l"/>
+              </a:tabLst>
               <a:defRPr lang="en-US" sz="1400" b="0" u="none" strike="noStrike">
                 <a:solidFill>
                   <a:srgbClr val="FFFFFF"/>
@@ -1286,12 +1625,19 @@
                 <a:effectLst/>
                 <a:uFillTx/>
                 <a:latin typeface="Arial"/>
+                <a:ea typeface="DejaVu Sans"/>
               </a:defRPr>
             </a:lvl1pPr>
           </a:lstStyle>
           <a:p>
-            <a:pPr indent="0" algn="ctr">
+            <a:pPr indent="0" algn="ctr" defTabSz="914400">
+              <a:lnSpc>
+                <a:spcPct val="100000"/>
+              </a:lnSpc>
               <a:buNone/>
+              <a:tabLst>
+                <a:tab pos="0" algn="l"/>
+              </a:tabLst>
             </a:pPr>
             <a:r>
               <a:rPr lang="en-US" sz="1400" b="0" u="none" strike="noStrike">
@@ -1301,9 +1647,18 @@
                 <a:effectLst/>
                 <a:uFillTx/>
                 <a:latin typeface="Arial"/>
+                <a:ea typeface="DejaVu Sans"/>
               </a:rPr>
               <a:t>&lt;footer&gt;</a:t>
             </a:r>
+            <a:endParaRPr lang="en-US" sz="1400" b="0" u="none" strike="noStrike">
+              <a:solidFill>
+                <a:srgbClr val="000000"/>
+              </a:solidFill>
+              <a:effectLst/>
+              <a:uFillTx/>
+              <a:latin typeface="Times New Roman"/>
+            </a:endParaRPr>
           </a:p>
         </p:txBody>
       </p:sp>
@@ -1320,7 +1675,7 @@
         <p:spPr>
           <a:xfrm>
             <a:off x="7227360" y="5164920"/>
-            <a:ext cx="2348280" cy="390600"/>
+            <a:ext cx="2347920" cy="390240"/>
           </a:xfrm>
           <a:prstGeom prst="rect">
             <a:avLst/>
@@ -1335,8 +1690,14 @@
             <a:noAutofit/>
           </a:bodyPr>
           <a:lstStyle>
-            <a:lvl1pPr indent="0" algn="r">
+            <a:lvl1pPr indent="0" algn="r" defTabSz="914400">
+              <a:lnSpc>
+                <a:spcPct val="100000"/>
+              </a:lnSpc>
               <a:buNone/>
+              <a:tabLst>
+                <a:tab pos="0" algn="l"/>
+              </a:tabLst>
               <a:defRPr lang="en-US" sz="1400" b="0" u="none" strike="noStrike">
                 <a:solidFill>
                   <a:srgbClr val="FFFFFF"/>
@@ -1344,14 +1705,21 @@
                 <a:effectLst/>
                 <a:uFillTx/>
                 <a:latin typeface="Arial"/>
+                <a:ea typeface="DejaVu Sans"/>
               </a:defRPr>
             </a:lvl1pPr>
           </a:lstStyle>
           <a:p>
-            <a:pPr indent="0" algn="r">
+            <a:pPr indent="0" algn="r" defTabSz="914400">
+              <a:lnSpc>
+                <a:spcPct val="100000"/>
+              </a:lnSpc>
               <a:buNone/>
-            </a:pPr>
-            <a:fld id="{90ED4C0A-2B89-44DF-BD17-3BEC47D2D150}" type="slidenum">
+              <a:tabLst>
+                <a:tab pos="0" algn="l"/>
+              </a:tabLst>
+            </a:pPr>
+            <a:fld id="{84BD4239-435F-4F7B-83BF-05A50DA0C18E}" type="slidenum">
               <a:rPr lang="en-US" sz="1400" b="0" u="none" strike="noStrike">
                 <a:solidFill>
                   <a:srgbClr val="FFFFFF"/>
@@ -1359,31 +1727,36 @@
                 <a:effectLst/>
                 <a:uFillTx/>
                 <a:latin typeface="Arial"/>
-              </a:rPr>
-              <a:t>‹#›</a:t>
+                <a:ea typeface="DejaVu Sans"/>
+              </a:rPr>
+              <a:t>&lt;number&gt;</a:t>
             </a:fld>
             <a:endParaRPr lang="en-US" sz="1400" b="0" u="none" strike="noStrike">
               <a:solidFill>
-                <a:srgbClr val="FFFFFF"/>
-              </a:solidFill>
-              <a:effectLst/>
-              <a:uFillTx/>
-              <a:latin typeface="Arial"/>
+                <a:srgbClr val="000000"/>
+              </a:solidFill>
+              <a:effectLst/>
+              <a:uFillTx/>
+              <a:latin typeface="Times New Roman"/>
             </a:endParaRPr>
           </a:p>
         </p:txBody>
       </p:sp>
     </p:spTree>
   </p:cSld>
-  <p:clrMapOvr>
-    <a:masterClrMapping/>
-  </p:clrMapOvr>
 </p:sldLayout>
 </file>
 
 <file path=ppt/slideLayouts/slideLayout3.xml><?xml version="1.0" encoding="utf-8"?>
-<p:sldLayout xmlns:a="http://schemas.openxmlformats.org/drawingml/2006/main" xmlns:r="http://schemas.openxmlformats.org/officeDocument/2006/relationships" xmlns:p="http://schemas.openxmlformats.org/presentationml/2006/main" type="tx" preserve="1">
+<p:sldLayout xmlns:a="http://schemas.openxmlformats.org/drawingml/2006/main" xmlns:p="http://schemas.openxmlformats.org/presentationml/2006/main" xmlns:r="http://schemas.openxmlformats.org/officeDocument/2006/relationships" xmlns:p14="http://schemas.microsoft.com/office/powerpoint/2010/main" xmlns:p15="http://schemas.microsoft.com/office/powerpoint/2012/main" xmlns:mc="http://schemas.openxmlformats.org/markup-compatibility/2006" type="tx" preserve="1">
   <p:cSld name="Standard">
+    <p:bg>
+      <p:bgPr>
+        <a:solidFill>
+          <a:srgbClr val="FFFFFF"/>
+        </a:solidFill>
+      </p:bgPr>
+    </p:bg>
     <p:spTree>
       <p:nvGrpSpPr>
         <p:cNvPr id="1" name=""/>
@@ -1405,10 +1778,10 @@
           <p:nvPr/>
         </p:nvPicPr>
         <p:blipFill>
-          <a:blip>
+          <a:blip r:embed="rId2">
             <a:extLst>
               <a:ext uri="{96DAC541-7B7A-43D3-8B79-37D633B846F1}">
-                <asvg:svgBlip xmlns:asvg="http://schemas.microsoft.com/office/drawing/2016/SVG/main" r:embed="rId2"/>
+                <asvg:svgBlip xmlns:asvg="http://schemas.microsoft.com/office/drawing/2016/SVG/main" r:embed="rId3"/>
               </a:ext>
             </a:extLst>
           </a:blip>
@@ -1417,7 +1790,7 @@
         <p:spPr>
           <a:xfrm>
             <a:off x="0" y="0"/>
-            <a:ext cx="10080000" cy="5670000"/>
+            <a:ext cx="10079640" cy="5669640"/>
           </a:xfrm>
           <a:prstGeom prst="rect">
             <a:avLst/>
@@ -1441,7 +1814,7 @@
         <p:spPr>
           <a:xfrm>
             <a:off x="504000" y="225720"/>
-            <a:ext cx="9072000" cy="946800"/>
+            <a:ext cx="9071640" cy="946440"/>
           </a:xfrm>
           <a:prstGeom prst="rect">
             <a:avLst/>
@@ -1456,8 +1829,14 @@
             <a:noAutofit/>
           </a:bodyPr>
           <a:lstStyle>
-            <a:lvl1pPr indent="0" algn="ctr">
+            <a:lvl1pPr indent="0" algn="ctr" defTabSz="914400">
+              <a:lnSpc>
+                <a:spcPct val="90000"/>
+              </a:lnSpc>
               <a:buNone/>
+              <a:tabLst>
+                <a:tab pos="0" algn="l"/>
+              </a:tabLst>
               <a:defRPr lang="en-US" sz="3300" b="0" u="none" strike="noStrike">
                 <a:solidFill>
                   <a:srgbClr val="000000"/>
@@ -1465,12 +1844,19 @@
                 <a:effectLst/>
                 <a:uFillTx/>
                 <a:latin typeface="Arial"/>
+                <a:ea typeface="DejaVu Sans"/>
               </a:defRPr>
             </a:lvl1pPr>
           </a:lstStyle>
           <a:p>
-            <a:pPr indent="0" algn="ctr">
+            <a:pPr indent="0" algn="ctr" defTabSz="914400">
+              <a:lnSpc>
+                <a:spcPct val="90000"/>
+              </a:lnSpc>
               <a:buNone/>
+              <a:tabLst>
+                <a:tab pos="0" algn="l"/>
+              </a:tabLst>
             </a:pPr>
             <a:r>
               <a:rPr lang="en-US" sz="3300" b="0" u="none" strike="noStrike">
@@ -1480,9 +1866,42 @@
                 <a:effectLst/>
                 <a:uFillTx/>
                 <a:latin typeface="Arial"/>
-              </a:rPr>
-              <a:t>Click to edit the title text format</a:t>
-            </a:r>
+                <a:ea typeface="DejaVu Sans"/>
+              </a:rPr>
+              <a:t>Click to edit </a:t>
+            </a:r>
+            <a:r>
+              <a:rPr lang="en-US" sz="3300" b="0" u="none" strike="noStrike">
+                <a:solidFill>
+                  <a:srgbClr val="000000"/>
+                </a:solidFill>
+                <a:effectLst/>
+                <a:uFillTx/>
+                <a:latin typeface="Arial"/>
+                <a:ea typeface="DejaVu Sans"/>
+              </a:rPr>
+              <a:t>the title text </a:t>
+            </a:r>
+            <a:r>
+              <a:rPr lang="en-US" sz="3300" b="0" u="none" strike="noStrike">
+                <a:solidFill>
+                  <a:srgbClr val="000000"/>
+                </a:solidFill>
+                <a:effectLst/>
+                <a:uFillTx/>
+                <a:latin typeface="Arial"/>
+                <a:ea typeface="DejaVu Sans"/>
+              </a:rPr>
+              <a:t>format</a:t>
+            </a:r>
+            <a:endParaRPr lang="en-US" sz="3300" b="0" u="none" strike="noStrike">
+              <a:solidFill>
+                <a:srgbClr val="000000"/>
+              </a:solidFill>
+              <a:effectLst/>
+              <a:uFillTx/>
+              <a:latin typeface="Arial"/>
+            </a:endParaRPr>
           </a:p>
         </p:txBody>
       </p:sp>
@@ -1499,7 +1918,7 @@
         <p:spPr>
           <a:xfrm>
             <a:off x="504000" y="1326600"/>
-            <a:ext cx="9072000" cy="3288240"/>
+            <a:ext cx="9071640" cy="3287880"/>
           </a:xfrm>
           <a:prstGeom prst="rect">
             <a:avLst/>
@@ -1514,7 +1933,10 @@
             <a:normAutofit/>
           </a:bodyPr>
           <a:lstStyle>
-            <a:lvl1pPr algn="l">
+            <a:lvl1pPr algn="l" defTabSz="914400">
+              <a:lnSpc>
+                <a:spcPct val="90000"/>
+              </a:lnSpc>
               <a:spcBef>
                 <a:spcPts val="1060"/>
               </a:spcBef>
@@ -1531,9 +1953,13 @@
                 <a:effectLst/>
                 <a:uFillTx/>
                 <a:latin typeface="Arial"/>
+                <a:ea typeface="DejaVu Sans"/>
               </a:defRPr>
             </a:lvl1pPr>
-            <a:lvl2pPr lvl="1" algn="l">
+            <a:lvl2pPr lvl="1" algn="l" defTabSz="914400">
+              <a:lnSpc>
+                <a:spcPct val="90000"/>
+              </a:lnSpc>
               <a:spcBef>
                 <a:spcPts val="850"/>
               </a:spcBef>
@@ -1550,9 +1976,13 @@
                 <a:effectLst/>
                 <a:uFillTx/>
                 <a:latin typeface="Arial"/>
+                <a:ea typeface="DejaVu Sans"/>
               </a:defRPr>
             </a:lvl2pPr>
-            <a:lvl3pPr lvl="2" algn="l">
+            <a:lvl3pPr lvl="2" algn="l" defTabSz="914400">
+              <a:lnSpc>
+                <a:spcPct val="90000"/>
+              </a:lnSpc>
               <a:spcBef>
                 <a:spcPts val="638"/>
               </a:spcBef>
@@ -1569,9 +1999,13 @@
                 <a:effectLst/>
                 <a:uFillTx/>
                 <a:latin typeface="Arial"/>
+                <a:ea typeface="DejaVu Sans"/>
               </a:defRPr>
             </a:lvl3pPr>
-            <a:lvl4pPr lvl="3" algn="l">
+            <a:lvl4pPr lvl="3" algn="l" defTabSz="914400">
+              <a:lnSpc>
+                <a:spcPct val="90000"/>
+              </a:lnSpc>
               <a:spcBef>
                 <a:spcPts val="425"/>
               </a:spcBef>
@@ -1588,9 +2022,13 @@
                 <a:effectLst/>
                 <a:uFillTx/>
                 <a:latin typeface="Arial"/>
+                <a:ea typeface="DejaVu Sans"/>
               </a:defRPr>
             </a:lvl4pPr>
-            <a:lvl5pPr lvl="4" algn="l">
+            <a:lvl5pPr lvl="4" algn="l" defTabSz="914400">
+              <a:lnSpc>
+                <a:spcPct val="90000"/>
+              </a:lnSpc>
               <a:spcBef>
                 <a:spcPts val="213"/>
               </a:spcBef>
@@ -1607,9 +2045,13 @@
                 <a:effectLst/>
                 <a:uFillTx/>
                 <a:latin typeface="Arial"/>
+                <a:ea typeface="DejaVu Sans"/>
               </a:defRPr>
             </a:lvl5pPr>
-            <a:lvl6pPr lvl="5" algn="l">
+            <a:lvl6pPr lvl="5" algn="l" defTabSz="914400">
+              <a:lnSpc>
+                <a:spcPct val="90000"/>
+              </a:lnSpc>
               <a:spcBef>
                 <a:spcPts val="213"/>
               </a:spcBef>
@@ -1626,9 +2068,13 @@
                 <a:effectLst/>
                 <a:uFillTx/>
                 <a:latin typeface="Arial"/>
+                <a:ea typeface="DejaVu Sans"/>
               </a:defRPr>
             </a:lvl6pPr>
-            <a:lvl7pPr lvl="6" algn="l">
+            <a:lvl7pPr lvl="6" algn="l" defTabSz="914400">
+              <a:lnSpc>
+                <a:spcPct val="90000"/>
+              </a:lnSpc>
               <a:spcBef>
                 <a:spcPts val="213"/>
               </a:spcBef>
@@ -1645,11 +2091,15 @@
                 <a:effectLst/>
                 <a:uFillTx/>
                 <a:latin typeface="Arial"/>
+                <a:ea typeface="DejaVu Sans"/>
               </a:defRPr>
             </a:lvl7pPr>
           </a:lstStyle>
           <a:p>
-            <a:pPr marL="432000" indent="-324000" algn="l">
+            <a:pPr marL="432000" indent="-324000" algn="l" defTabSz="914400">
+              <a:lnSpc>
+                <a:spcPct val="90000"/>
+              </a:lnSpc>
               <a:spcBef>
                 <a:spcPts val="1060"/>
               </a:spcBef>
@@ -1668,12 +2118,24 @@
                 <a:effectLst/>
                 <a:uFillTx/>
                 <a:latin typeface="Arial"/>
+                <a:ea typeface="DejaVu Sans"/>
               </a:rPr>
               <a:t>Click to edit the outline text format</a:t>
             </a:r>
-          </a:p>
-          <a:p>
-            <a:pPr marL="864000" lvl="1" indent="-324000" algn="l">
+            <a:endParaRPr lang="en-US" sz="2400" b="0" u="none" strike="noStrike">
+              <a:solidFill>
+                <a:srgbClr val="000000"/>
+              </a:solidFill>
+              <a:effectLst/>
+              <a:uFillTx/>
+              <a:latin typeface="Arial"/>
+            </a:endParaRPr>
+          </a:p>
+          <a:p>
+            <a:pPr marL="864000" lvl="1" indent="-324000" algn="l" defTabSz="914400">
+              <a:lnSpc>
+                <a:spcPct val="90000"/>
+              </a:lnSpc>
               <a:spcBef>
                 <a:spcPts val="850"/>
               </a:spcBef>
@@ -1692,12 +2154,24 @@
                 <a:effectLst/>
                 <a:uFillTx/>
                 <a:latin typeface="Arial"/>
+                <a:ea typeface="DejaVu Sans"/>
               </a:rPr>
               <a:t>Second Outline Level</a:t>
             </a:r>
-          </a:p>
-          <a:p>
-            <a:pPr marL="1296000" lvl="2" indent="-288000" algn="l">
+            <a:endParaRPr lang="en-US" sz="2100" b="0" u="none" strike="noStrike">
+              <a:solidFill>
+                <a:srgbClr val="000000"/>
+              </a:solidFill>
+              <a:effectLst/>
+              <a:uFillTx/>
+              <a:latin typeface="Arial"/>
+            </a:endParaRPr>
+          </a:p>
+          <a:p>
+            <a:pPr marL="1296000" lvl="2" indent="-288000" algn="l" defTabSz="914400">
+              <a:lnSpc>
+                <a:spcPct val="90000"/>
+              </a:lnSpc>
               <a:spcBef>
                 <a:spcPts val="638"/>
               </a:spcBef>
@@ -1716,12 +2190,24 @@
                 <a:effectLst/>
                 <a:uFillTx/>
                 <a:latin typeface="Arial"/>
+                <a:ea typeface="DejaVu Sans"/>
               </a:rPr>
               <a:t>Third Outline Level</a:t>
             </a:r>
-          </a:p>
-          <a:p>
-            <a:pPr marL="1728000" lvl="3" indent="-216000" algn="l">
+            <a:endParaRPr lang="en-US" sz="1800" b="0" u="none" strike="noStrike">
+              <a:solidFill>
+                <a:srgbClr val="000000"/>
+              </a:solidFill>
+              <a:effectLst/>
+              <a:uFillTx/>
+              <a:latin typeface="Arial"/>
+            </a:endParaRPr>
+          </a:p>
+          <a:p>
+            <a:pPr marL="1728000" lvl="3" indent="-216000" algn="l" defTabSz="914400">
+              <a:lnSpc>
+                <a:spcPct val="90000"/>
+              </a:lnSpc>
               <a:spcBef>
                 <a:spcPts val="425"/>
               </a:spcBef>
@@ -1740,12 +2226,24 @@
                 <a:effectLst/>
                 <a:uFillTx/>
                 <a:latin typeface="Arial"/>
+                <a:ea typeface="DejaVu Sans"/>
               </a:rPr>
               <a:t>Fourth Outline Level</a:t>
             </a:r>
-          </a:p>
-          <a:p>
-            <a:pPr marL="2160000" lvl="4" indent="-216000" algn="l">
+            <a:endParaRPr lang="en-US" sz="1500" b="0" u="none" strike="noStrike">
+              <a:solidFill>
+                <a:srgbClr val="000000"/>
+              </a:solidFill>
+              <a:effectLst/>
+              <a:uFillTx/>
+              <a:latin typeface="Arial"/>
+            </a:endParaRPr>
+          </a:p>
+          <a:p>
+            <a:pPr marL="2160000" lvl="4" indent="-216000" algn="l" defTabSz="914400">
+              <a:lnSpc>
+                <a:spcPct val="90000"/>
+              </a:lnSpc>
               <a:spcBef>
                 <a:spcPts val="213"/>
               </a:spcBef>
@@ -1764,12 +2262,24 @@
                 <a:effectLst/>
                 <a:uFillTx/>
                 <a:latin typeface="Arial"/>
+                <a:ea typeface="DejaVu Sans"/>
               </a:rPr>
               <a:t>Fifth Outline Level</a:t>
             </a:r>
-          </a:p>
-          <a:p>
-            <a:pPr marL="2592000" lvl="5" indent="-216000" algn="l">
+            <a:endParaRPr lang="en-US" sz="1500" b="0" u="none" strike="noStrike">
+              <a:solidFill>
+                <a:srgbClr val="000000"/>
+              </a:solidFill>
+              <a:effectLst/>
+              <a:uFillTx/>
+              <a:latin typeface="Arial"/>
+            </a:endParaRPr>
+          </a:p>
+          <a:p>
+            <a:pPr marL="2592000" lvl="5" indent="-216000" algn="l" defTabSz="914400">
+              <a:lnSpc>
+                <a:spcPct val="90000"/>
+              </a:lnSpc>
               <a:spcBef>
                 <a:spcPts val="213"/>
               </a:spcBef>
@@ -1788,12 +2298,24 @@
                 <a:effectLst/>
                 <a:uFillTx/>
                 <a:latin typeface="Arial"/>
+                <a:ea typeface="DejaVu Sans"/>
               </a:rPr>
               <a:t>Sixth Outline Level</a:t>
             </a:r>
-          </a:p>
-          <a:p>
-            <a:pPr marL="3024000" lvl="6" indent="-216000" algn="l">
+            <a:endParaRPr lang="en-US" sz="1500" b="0" u="none" strike="noStrike">
+              <a:solidFill>
+                <a:srgbClr val="000000"/>
+              </a:solidFill>
+              <a:effectLst/>
+              <a:uFillTx/>
+              <a:latin typeface="Arial"/>
+            </a:endParaRPr>
+          </a:p>
+          <a:p>
+            <a:pPr marL="3024000" lvl="6" indent="-216000" algn="l" defTabSz="914400">
+              <a:lnSpc>
+                <a:spcPct val="90000"/>
+              </a:lnSpc>
               <a:spcBef>
                 <a:spcPts val="213"/>
               </a:spcBef>
@@ -1812,9 +2334,18 @@
                 <a:effectLst/>
                 <a:uFillTx/>
                 <a:latin typeface="Arial"/>
+                <a:ea typeface="DejaVu Sans"/>
               </a:rPr>
               <a:t>Seventh Outline Level</a:t>
             </a:r>
+            <a:endParaRPr lang="en-US" sz="1500" b="0" u="none" strike="noStrike">
+              <a:solidFill>
+                <a:srgbClr val="000000"/>
+              </a:solidFill>
+              <a:effectLst/>
+              <a:uFillTx/>
+              <a:latin typeface="Arial"/>
+            </a:endParaRPr>
           </a:p>
         </p:txBody>
       </p:sp>
@@ -1831,7 +2362,7 @@
         <p:spPr>
           <a:xfrm>
             <a:off x="504000" y="5165280"/>
-            <a:ext cx="2348280" cy="390960"/>
+            <a:ext cx="2347920" cy="390600"/>
           </a:xfrm>
           <a:prstGeom prst="rect">
             <a:avLst/>
@@ -1846,8 +2377,14 @@
             <a:noAutofit/>
           </a:bodyPr>
           <a:lstStyle>
-            <a:lvl1pPr indent="0" algn="l">
+            <a:lvl1pPr indent="0" algn="l" defTabSz="914400">
+              <a:lnSpc>
+                <a:spcPct val="100000"/>
+              </a:lnSpc>
               <a:buNone/>
+              <a:tabLst>
+                <a:tab pos="0" algn="l"/>
+              </a:tabLst>
               <a:defRPr lang="en-US" sz="1400" b="0" u="none" strike="noStrike">
                 <a:solidFill>
                   <a:srgbClr val="000000"/>
@@ -1855,12 +2392,19 @@
                 <a:effectLst/>
                 <a:uFillTx/>
                 <a:latin typeface="Arial"/>
+                <a:ea typeface="DejaVu Sans"/>
               </a:defRPr>
             </a:lvl1pPr>
           </a:lstStyle>
           <a:p>
-            <a:pPr indent="0" algn="l">
+            <a:pPr indent="0" algn="l" defTabSz="914400">
+              <a:lnSpc>
+                <a:spcPct val="100000"/>
+              </a:lnSpc>
               <a:buNone/>
+              <a:tabLst>
+                <a:tab pos="0" algn="l"/>
+              </a:tabLst>
             </a:pPr>
             <a:r>
               <a:rPr lang="en-US" sz="1400" b="0" u="none" strike="noStrike">
@@ -1870,9 +2414,18 @@
                 <a:effectLst/>
                 <a:uFillTx/>
                 <a:latin typeface="Arial"/>
+                <a:ea typeface="DejaVu Sans"/>
               </a:rPr>
               <a:t>&lt;date/time&gt;</a:t>
             </a:r>
+            <a:endParaRPr lang="en-US" sz="1400" b="0" u="none" strike="noStrike">
+              <a:solidFill>
+                <a:srgbClr val="000000"/>
+              </a:solidFill>
+              <a:effectLst/>
+              <a:uFillTx/>
+              <a:latin typeface="Times New Roman"/>
+            </a:endParaRPr>
           </a:p>
         </p:txBody>
       </p:sp>
@@ -1889,7 +2442,7 @@
         <p:spPr>
           <a:xfrm>
             <a:off x="3447360" y="5165280"/>
-            <a:ext cx="3195000" cy="390960"/>
+            <a:ext cx="3194640" cy="390600"/>
           </a:xfrm>
           <a:prstGeom prst="rect">
             <a:avLst/>
@@ -1904,8 +2457,14 @@
             <a:noAutofit/>
           </a:bodyPr>
           <a:lstStyle>
-            <a:lvl1pPr indent="0" algn="ctr">
+            <a:lvl1pPr indent="0" algn="ctr" defTabSz="914400">
+              <a:lnSpc>
+                <a:spcPct val="100000"/>
+              </a:lnSpc>
               <a:buNone/>
+              <a:tabLst>
+                <a:tab pos="0" algn="l"/>
+              </a:tabLst>
               <a:defRPr lang="en-US" sz="1400" b="0" u="none" strike="noStrike">
                 <a:solidFill>
                   <a:srgbClr val="000000"/>
@@ -1913,12 +2472,19 @@
                 <a:effectLst/>
                 <a:uFillTx/>
                 <a:latin typeface="Arial"/>
+                <a:ea typeface="DejaVu Sans"/>
               </a:defRPr>
             </a:lvl1pPr>
           </a:lstStyle>
           <a:p>
-            <a:pPr indent="0" algn="ctr">
+            <a:pPr indent="0" algn="ctr" defTabSz="914400">
+              <a:lnSpc>
+                <a:spcPct val="100000"/>
+              </a:lnSpc>
               <a:buNone/>
+              <a:tabLst>
+                <a:tab pos="0" algn="l"/>
+              </a:tabLst>
             </a:pPr>
             <a:r>
               <a:rPr lang="en-US" sz="1400" b="0" u="none" strike="noStrike">
@@ -1928,9 +2494,18 @@
                 <a:effectLst/>
                 <a:uFillTx/>
                 <a:latin typeface="Arial"/>
+                <a:ea typeface="DejaVu Sans"/>
               </a:rPr>
               <a:t>&lt;footer&gt;</a:t>
             </a:r>
+            <a:endParaRPr lang="en-US" sz="1400" b="0" u="none" strike="noStrike">
+              <a:solidFill>
+                <a:srgbClr val="000000"/>
+              </a:solidFill>
+              <a:effectLst/>
+              <a:uFillTx/>
+              <a:latin typeface="Times New Roman"/>
+            </a:endParaRPr>
           </a:p>
         </p:txBody>
       </p:sp>
@@ -1947,7 +2522,7 @@
         <p:spPr>
           <a:xfrm>
             <a:off x="7227360" y="5165280"/>
-            <a:ext cx="2348280" cy="390960"/>
+            <a:ext cx="2347920" cy="390600"/>
           </a:xfrm>
           <a:prstGeom prst="rect">
             <a:avLst/>
@@ -1962,8 +2537,14 @@
             <a:noAutofit/>
           </a:bodyPr>
           <a:lstStyle>
-            <a:lvl1pPr indent="0" algn="r">
+            <a:lvl1pPr indent="0" algn="r" defTabSz="914400">
+              <a:lnSpc>
+                <a:spcPct val="100000"/>
+              </a:lnSpc>
               <a:buNone/>
+              <a:tabLst>
+                <a:tab pos="0" algn="l"/>
+              </a:tabLst>
               <a:defRPr lang="en-US" sz="1400" b="0" u="none" strike="noStrike">
                 <a:solidFill>
                   <a:srgbClr val="000000"/>
@@ -1971,14 +2552,21 @@
                 <a:effectLst/>
                 <a:uFillTx/>
                 <a:latin typeface="Arial"/>
+                <a:ea typeface="DejaVu Sans"/>
               </a:defRPr>
             </a:lvl1pPr>
           </a:lstStyle>
           <a:p>
-            <a:pPr indent="0" algn="r">
+            <a:pPr indent="0" algn="r" defTabSz="914400">
+              <a:lnSpc>
+                <a:spcPct val="100000"/>
+              </a:lnSpc>
               <a:buNone/>
-            </a:pPr>
-            <a:fld id="{1373F045-614D-4763-9DA5-EFC179478D8F}" type="slidenum">
+              <a:tabLst>
+                <a:tab pos="0" algn="l"/>
+              </a:tabLst>
+            </a:pPr>
+            <a:fld id="{FC79E2A3-348B-4F79-AB40-BDAE33C97074}" type="slidenum">
               <a:rPr lang="en-US" sz="1400" b="0" u="none" strike="noStrike">
                 <a:solidFill>
                   <a:srgbClr val="000000"/>
@@ -1986,8 +2574,9 @@
                 <a:effectLst/>
                 <a:uFillTx/>
                 <a:latin typeface="Arial"/>
-              </a:rPr>
-              <a:t>‹#›</a:t>
+                <a:ea typeface="DejaVu Sans"/>
+              </a:rPr>
+              <a:t>&lt;number&gt;</a:t>
             </a:fld>
             <a:endParaRPr lang="en-US" sz="1400" b="0" u="none" strike="noStrike">
               <a:solidFill>
@@ -1995,27 +2584,19 @@
               </a:solidFill>
               <a:effectLst/>
               <a:uFillTx/>
-              <a:latin typeface="Arial"/>
+              <a:latin typeface="Times New Roman"/>
             </a:endParaRPr>
           </a:p>
         </p:txBody>
       </p:sp>
     </p:spTree>
   </p:cSld>
-  <p:clrMapOvr>
-    <a:masterClrMapping/>
-  </p:clrMapOvr>
 </p:sldLayout>
 </file>
 
 <file path=ppt/slideMasters/slideMaster1.xml><?xml version="1.0" encoding="utf-8"?>
-<p:sldMaster xmlns:a="http://schemas.openxmlformats.org/drawingml/2006/main" xmlns:r="http://schemas.openxmlformats.org/officeDocument/2006/relationships" xmlns:p="http://schemas.openxmlformats.org/presentationml/2006/main">
+<p:sldMaster xmlns:a="http://schemas.openxmlformats.org/drawingml/2006/main" xmlns:p="http://schemas.openxmlformats.org/presentationml/2006/main" xmlns:r="http://schemas.openxmlformats.org/officeDocument/2006/relationships" xmlns:p14="http://schemas.microsoft.com/office/powerpoint/2010/main" xmlns:p15="http://schemas.microsoft.com/office/powerpoint/2012/main" xmlns:mc="http://schemas.openxmlformats.org/markup-compatibility/2006">
   <p:cSld>
-    <p:bg>
-      <p:bgRef idx="1001">
-        <a:schemeClr val="bg1"/>
-      </p:bgRef>
-    </p:bg>
     <p:spTree>
       <p:nvGrpSpPr>
         <p:cNvPr id="1" name=""/>
@@ -2034,295 +2615,15 @@
   </p:cSld>
   <p:clrMap bg1="lt1" tx1="dk1" bg2="lt2" tx2="dk2" accent1="accent1" accent2="accent2" accent3="accent3" accent4="accent4" accent5="accent5" accent6="accent6" hlink="hlink" folHlink="folHlink"/>
   <p:sldLayoutIdLst>
-    <p:sldLayoutId id="2147483649" r:id="rId1"/>
-    <p:sldLayoutId id="2147483650" r:id="rId2"/>
-    <p:sldLayoutId id="2147483651" r:id="rId3"/>
+    <p:sldLayoutId id="2147483649" r:id="rId2"/>
+    <p:sldLayoutId id="2147483650" r:id="rId3"/>
+    <p:sldLayoutId id="2147483651" r:id="rId4"/>
   </p:sldLayoutIdLst>
-  <p:txStyles>
-    <p:titleStyle>
-      <a:lvl1pPr algn="l" defTabSz="914400" rtl="0" eaLnBrk="1" latinLnBrk="0" hangingPunct="1">
-        <a:lnSpc>
-          <a:spcPct val="90000"/>
-        </a:lnSpc>
-        <a:spcBef>
-          <a:spcPct val="0"/>
-        </a:spcBef>
-        <a:buNone/>
-        <a:defRPr sz="4400" kern="1200">
-          <a:solidFill>
-            <a:schemeClr val="tx1"/>
-          </a:solidFill>
-          <a:latin typeface="+mj-lt"/>
-          <a:ea typeface="+mj-ea"/>
-          <a:cs typeface="+mj-cs"/>
-        </a:defRPr>
-      </a:lvl1pPr>
-    </p:titleStyle>
-    <p:bodyStyle>
-      <a:lvl1pPr marL="228600" indent="-228600" algn="l" defTabSz="914400" rtl="0" eaLnBrk="1" latinLnBrk="0" hangingPunct="1">
-        <a:lnSpc>
-          <a:spcPct val="90000"/>
-        </a:lnSpc>
-        <a:spcBef>
-          <a:spcPts val="1000"/>
-        </a:spcBef>
-        <a:buFont typeface="Arial" panose="020B0604020202020204" pitchFamily="34" charset="0"/>
-        <a:buChar char="•"/>
-        <a:defRPr sz="2800" kern="1200">
-          <a:solidFill>
-            <a:schemeClr val="tx1"/>
-          </a:solidFill>
-          <a:latin typeface="+mn-lt"/>
-          <a:ea typeface="+mn-ea"/>
-          <a:cs typeface="+mn-cs"/>
-        </a:defRPr>
-      </a:lvl1pPr>
-      <a:lvl2pPr marL="685800" indent="-228600" algn="l" defTabSz="914400" rtl="0" eaLnBrk="1" latinLnBrk="0" hangingPunct="1">
-        <a:lnSpc>
-          <a:spcPct val="90000"/>
-        </a:lnSpc>
-        <a:spcBef>
-          <a:spcPts val="500"/>
-        </a:spcBef>
-        <a:buFont typeface="Arial" panose="020B0604020202020204" pitchFamily="34" charset="0"/>
-        <a:buChar char="•"/>
-        <a:defRPr sz="2400" kern="1200">
-          <a:solidFill>
-            <a:schemeClr val="tx1"/>
-          </a:solidFill>
-          <a:latin typeface="+mn-lt"/>
-          <a:ea typeface="+mn-ea"/>
-          <a:cs typeface="+mn-cs"/>
-        </a:defRPr>
-      </a:lvl2pPr>
-      <a:lvl3pPr marL="1143000" indent="-228600" algn="l" defTabSz="914400" rtl="0" eaLnBrk="1" latinLnBrk="0" hangingPunct="1">
-        <a:lnSpc>
-          <a:spcPct val="90000"/>
-        </a:lnSpc>
-        <a:spcBef>
-          <a:spcPts val="500"/>
-        </a:spcBef>
-        <a:buFont typeface="Arial" panose="020B0604020202020204" pitchFamily="34" charset="0"/>
-        <a:buChar char="•"/>
-        <a:defRPr sz="2000" kern="1200">
-          <a:solidFill>
-            <a:schemeClr val="tx1"/>
-          </a:solidFill>
-          <a:latin typeface="+mn-lt"/>
-          <a:ea typeface="+mn-ea"/>
-          <a:cs typeface="+mn-cs"/>
-        </a:defRPr>
-      </a:lvl3pPr>
-      <a:lvl4pPr marL="1600200" indent="-228600" algn="l" defTabSz="914400" rtl="0" eaLnBrk="1" latinLnBrk="0" hangingPunct="1">
-        <a:lnSpc>
-          <a:spcPct val="90000"/>
-        </a:lnSpc>
-        <a:spcBef>
-          <a:spcPts val="500"/>
-        </a:spcBef>
-        <a:buFont typeface="Arial" panose="020B0604020202020204" pitchFamily="34" charset="0"/>
-        <a:buChar char="•"/>
-        <a:defRPr sz="1800" kern="1200">
-          <a:solidFill>
-            <a:schemeClr val="tx1"/>
-          </a:solidFill>
-          <a:latin typeface="+mn-lt"/>
-          <a:ea typeface="+mn-ea"/>
-          <a:cs typeface="+mn-cs"/>
-        </a:defRPr>
-      </a:lvl4pPr>
-      <a:lvl5pPr marL="2057400" indent="-228600" algn="l" defTabSz="914400" rtl="0" eaLnBrk="1" latinLnBrk="0" hangingPunct="1">
-        <a:lnSpc>
-          <a:spcPct val="90000"/>
-        </a:lnSpc>
-        <a:spcBef>
-          <a:spcPts val="500"/>
-        </a:spcBef>
-        <a:buFont typeface="Arial" panose="020B0604020202020204" pitchFamily="34" charset="0"/>
-        <a:buChar char="•"/>
-        <a:defRPr sz="1800" kern="1200">
-          <a:solidFill>
-            <a:schemeClr val="tx1"/>
-          </a:solidFill>
-          <a:latin typeface="+mn-lt"/>
-          <a:ea typeface="+mn-ea"/>
-          <a:cs typeface="+mn-cs"/>
-        </a:defRPr>
-      </a:lvl5pPr>
-      <a:lvl6pPr marL="2514600" indent="-228600" algn="l" defTabSz="914400" rtl="0" eaLnBrk="1" latinLnBrk="0" hangingPunct="1">
-        <a:lnSpc>
-          <a:spcPct val="90000"/>
-        </a:lnSpc>
-        <a:spcBef>
-          <a:spcPts val="500"/>
-        </a:spcBef>
-        <a:buFont typeface="Arial" panose="020B0604020202020204" pitchFamily="34" charset="0"/>
-        <a:buChar char="•"/>
-        <a:defRPr sz="1800" kern="1200">
-          <a:solidFill>
-            <a:schemeClr val="tx1"/>
-          </a:solidFill>
-          <a:latin typeface="+mn-lt"/>
-          <a:ea typeface="+mn-ea"/>
-          <a:cs typeface="+mn-cs"/>
-        </a:defRPr>
-      </a:lvl6pPr>
-      <a:lvl7pPr marL="2971800" indent="-228600" algn="l" defTabSz="914400" rtl="0" eaLnBrk="1" latinLnBrk="0" hangingPunct="1">
-        <a:lnSpc>
-          <a:spcPct val="90000"/>
-        </a:lnSpc>
-        <a:spcBef>
-          <a:spcPts val="500"/>
-        </a:spcBef>
-        <a:buFont typeface="Arial" panose="020B0604020202020204" pitchFamily="34" charset="0"/>
-        <a:buChar char="•"/>
-        <a:defRPr sz="1800" kern="1200">
-          <a:solidFill>
-            <a:schemeClr val="tx1"/>
-          </a:solidFill>
-          <a:latin typeface="+mn-lt"/>
-          <a:ea typeface="+mn-ea"/>
-          <a:cs typeface="+mn-cs"/>
-        </a:defRPr>
-      </a:lvl7pPr>
-      <a:lvl8pPr marL="3429000" indent="-228600" algn="l" defTabSz="914400" rtl="0" eaLnBrk="1" latinLnBrk="0" hangingPunct="1">
-        <a:lnSpc>
-          <a:spcPct val="90000"/>
-        </a:lnSpc>
-        <a:spcBef>
-          <a:spcPts val="500"/>
-        </a:spcBef>
-        <a:buFont typeface="Arial" panose="020B0604020202020204" pitchFamily="34" charset="0"/>
-        <a:buChar char="•"/>
-        <a:defRPr sz="1800" kern="1200">
-          <a:solidFill>
-            <a:schemeClr val="tx1"/>
-          </a:solidFill>
-          <a:latin typeface="+mn-lt"/>
-          <a:ea typeface="+mn-ea"/>
-          <a:cs typeface="+mn-cs"/>
-        </a:defRPr>
-      </a:lvl8pPr>
-      <a:lvl9pPr marL="3886200" indent="-228600" algn="l" defTabSz="914400" rtl="0" eaLnBrk="1" latinLnBrk="0" hangingPunct="1">
-        <a:lnSpc>
-          <a:spcPct val="90000"/>
-        </a:lnSpc>
-        <a:spcBef>
-          <a:spcPts val="500"/>
-        </a:spcBef>
-        <a:buFont typeface="Arial" panose="020B0604020202020204" pitchFamily="34" charset="0"/>
-        <a:buChar char="•"/>
-        <a:defRPr sz="1800" kern="1200">
-          <a:solidFill>
-            <a:schemeClr val="tx1"/>
-          </a:solidFill>
-          <a:latin typeface="+mn-lt"/>
-          <a:ea typeface="+mn-ea"/>
-          <a:cs typeface="+mn-cs"/>
-        </a:defRPr>
-      </a:lvl9pPr>
-    </p:bodyStyle>
-    <p:otherStyle>
-      <a:defPPr>
-        <a:defRPr lang="en-US"/>
-      </a:defPPr>
-      <a:lvl1pPr marL="0" algn="l" defTabSz="914400" rtl="0" eaLnBrk="1" latinLnBrk="0" hangingPunct="1">
-        <a:defRPr sz="1800" kern="1200">
-          <a:solidFill>
-            <a:schemeClr val="tx1"/>
-          </a:solidFill>
-          <a:latin typeface="+mn-lt"/>
-          <a:ea typeface="+mn-ea"/>
-          <a:cs typeface="+mn-cs"/>
-        </a:defRPr>
-      </a:lvl1pPr>
-      <a:lvl2pPr marL="457200" algn="l" defTabSz="914400" rtl="0" eaLnBrk="1" latinLnBrk="0" hangingPunct="1">
-        <a:defRPr sz="1800" kern="1200">
-          <a:solidFill>
-            <a:schemeClr val="tx1"/>
-          </a:solidFill>
-          <a:latin typeface="+mn-lt"/>
-          <a:ea typeface="+mn-ea"/>
-          <a:cs typeface="+mn-cs"/>
-        </a:defRPr>
-      </a:lvl2pPr>
-      <a:lvl3pPr marL="914400" algn="l" defTabSz="914400" rtl="0" eaLnBrk="1" latinLnBrk="0" hangingPunct="1">
-        <a:defRPr sz="1800" kern="1200">
-          <a:solidFill>
-            <a:schemeClr val="tx1"/>
-          </a:solidFill>
-          <a:latin typeface="+mn-lt"/>
-          <a:ea typeface="+mn-ea"/>
-          <a:cs typeface="+mn-cs"/>
-        </a:defRPr>
-      </a:lvl3pPr>
-      <a:lvl4pPr marL="1371600" algn="l" defTabSz="914400" rtl="0" eaLnBrk="1" latinLnBrk="0" hangingPunct="1">
-        <a:defRPr sz="1800" kern="1200">
-          <a:solidFill>
-            <a:schemeClr val="tx1"/>
-          </a:solidFill>
-          <a:latin typeface="+mn-lt"/>
-          <a:ea typeface="+mn-ea"/>
-          <a:cs typeface="+mn-cs"/>
-        </a:defRPr>
-      </a:lvl4pPr>
-      <a:lvl5pPr marL="1828800" algn="l" defTabSz="914400" rtl="0" eaLnBrk="1" latinLnBrk="0" hangingPunct="1">
-        <a:defRPr sz="1800" kern="1200">
-          <a:solidFill>
-            <a:schemeClr val="tx1"/>
-          </a:solidFill>
-          <a:latin typeface="+mn-lt"/>
-          <a:ea typeface="+mn-ea"/>
-          <a:cs typeface="+mn-cs"/>
-        </a:defRPr>
-      </a:lvl5pPr>
-      <a:lvl6pPr marL="2286000" algn="l" defTabSz="914400" rtl="0" eaLnBrk="1" latinLnBrk="0" hangingPunct="1">
-        <a:defRPr sz="1800" kern="1200">
-          <a:solidFill>
-            <a:schemeClr val="tx1"/>
-          </a:solidFill>
-          <a:latin typeface="+mn-lt"/>
-          <a:ea typeface="+mn-ea"/>
-          <a:cs typeface="+mn-cs"/>
-        </a:defRPr>
-      </a:lvl6pPr>
-      <a:lvl7pPr marL="2743200" algn="l" defTabSz="914400" rtl="0" eaLnBrk="1" latinLnBrk="0" hangingPunct="1">
-        <a:defRPr sz="1800" kern="1200">
-          <a:solidFill>
-            <a:schemeClr val="tx1"/>
-          </a:solidFill>
-          <a:latin typeface="+mn-lt"/>
-          <a:ea typeface="+mn-ea"/>
-          <a:cs typeface="+mn-cs"/>
-        </a:defRPr>
-      </a:lvl7pPr>
-      <a:lvl8pPr marL="3200400" algn="l" defTabSz="914400" rtl="0" eaLnBrk="1" latinLnBrk="0" hangingPunct="1">
-        <a:defRPr sz="1800" kern="1200">
-          <a:solidFill>
-            <a:schemeClr val="tx1"/>
-          </a:solidFill>
-          <a:latin typeface="+mn-lt"/>
-          <a:ea typeface="+mn-ea"/>
-          <a:cs typeface="+mn-cs"/>
-        </a:defRPr>
-      </a:lvl8pPr>
-      <a:lvl9pPr marL="3657600" algn="l" defTabSz="914400" rtl="0" eaLnBrk="1" latinLnBrk="0" hangingPunct="1">
-        <a:defRPr sz="1800" kern="1200">
-          <a:solidFill>
-            <a:schemeClr val="tx1"/>
-          </a:solidFill>
-          <a:latin typeface="+mn-lt"/>
-          <a:ea typeface="+mn-ea"/>
-          <a:cs typeface="+mn-cs"/>
-        </a:defRPr>
-      </a:lvl9pPr>
-    </p:otherStyle>
-  </p:txStyles>
 </p:sldMaster>
 </file>
 
 <file path=ppt/slides/slide1.xml><?xml version="1.0" encoding="utf-8"?>
-<p:sld xmlns:a="http://schemas.openxmlformats.org/drawingml/2006/main" xmlns:r="http://schemas.openxmlformats.org/officeDocument/2006/relationships" xmlns:p="http://schemas.openxmlformats.org/presentationml/2006/main">
+<p:sld xmlns:a="http://schemas.openxmlformats.org/drawingml/2006/main" xmlns:p="http://schemas.openxmlformats.org/presentationml/2006/main" xmlns:r="http://schemas.openxmlformats.org/officeDocument/2006/relationships" xmlns:p14="http://schemas.microsoft.com/office/powerpoint/2010/main" xmlns:p15="http://schemas.microsoft.com/office/powerpoint/2012/main" xmlns:mc="http://schemas.openxmlformats.org/markup-compatibility/2006">
   <p:cSld>
     <p:spTree>
       <p:nvGrpSpPr>
@@ -2350,8 +2651,8 @@
         </p:nvSpPr>
         <p:spPr>
           <a:xfrm>
-            <a:off x="504000" y="810000"/>
-            <a:ext cx="9072000" cy="1296000"/>
+            <a:off x="504000" y="809640"/>
+            <a:ext cx="9071640" cy="1296360"/>
           </a:xfrm>
           <a:prstGeom prst="rect">
             <a:avLst/>
@@ -2365,10 +2666,15 @@
           <a:bodyPr lIns="0" tIns="0" rIns="0" bIns="0" anchor="ctr">
             <a:spAutoFit/>
           </a:bodyPr>
-          <a:lstStyle/>
-          <a:p>
-            <a:pPr indent="0" algn="ctr">
+          <a:p>
+            <a:pPr indent="0" algn="ctr" defTabSz="914400">
+              <a:lnSpc>
+                <a:spcPct val="90000"/>
+              </a:lnSpc>
               <a:buNone/>
+              <a:tabLst>
+                <a:tab pos="0" algn="l"/>
+              </a:tabLst>
             </a:pPr>
             <a:r>
               <a:rPr lang="en-US" sz="4400" b="0" u="none" strike="noStrike">
@@ -2378,8 +2684,45 @@
                 <a:effectLst/>
                 <a:uFillTx/>
                 <a:latin typeface="Arial"/>
-              </a:rPr>
-              <a:t>Will I Stay or Will I Go Now?</a:t>
+                <a:ea typeface="DejaVu Sans"/>
+              </a:rPr>
+              <a:t>Will I </a:t>
+            </a:r>
+            <a:r>
+              <a:rPr lang="en-US" sz="4400" b="0" u="none" strike="noStrike">
+                <a:solidFill>
+                  <a:srgbClr val="FFFFFF"/>
+                </a:solidFill>
+                <a:effectLst/>
+                <a:uFillTx/>
+                <a:latin typeface="Arial"/>
+                <a:ea typeface="DejaVu Sans"/>
+              </a:rPr>
+              <a:t>Stay or </a:t>
+            </a:r>
+            <a:r>
+              <a:rPr lang="en-US" sz="4400" b="0" u="none" strike="noStrike">
+                <a:solidFill>
+                  <a:srgbClr val="FFFFFF"/>
+                </a:solidFill>
+                <a:effectLst/>
+                <a:uFillTx/>
+                <a:latin typeface="Arial"/>
+                <a:ea typeface="DejaVu Sans"/>
+              </a:rPr>
+              <a:t>Will I Go </a:t>
+            </a:r>
+            <a:r>
+              <a:rPr lang="en-US" sz="4400" b="0" u="none" strike="noStrike">
+                <a:solidFill>
+                  <a:srgbClr val="FFFFFF"/>
+                </a:solidFill>
+                <a:effectLst/>
+                <a:uFillTx/>
+                <a:latin typeface="Arial"/>
+                <a:ea typeface="DejaVu Sans"/>
+              </a:rPr>
+              <a:t>Now?</a:t>
             </a:r>
             <a:br>
               <a:rPr sz="4400"/>
@@ -2392,9 +2735,42 @@
                 <a:effectLst/>
                 <a:uFillTx/>
                 <a:latin typeface="Arial"/>
-              </a:rPr>
-              <a:t>A report on Attrition</a:t>
-            </a:r>
+                <a:ea typeface="DejaVu Sans"/>
+              </a:rPr>
+              <a:t>A report </a:t>
+            </a:r>
+            <a:r>
+              <a:rPr lang="en-US" sz="4400" b="0" u="none" strike="noStrike">
+                <a:solidFill>
+                  <a:srgbClr val="FFFFFF"/>
+                </a:solidFill>
+                <a:effectLst/>
+                <a:uFillTx/>
+                <a:latin typeface="Arial"/>
+                <a:ea typeface="DejaVu Sans"/>
+              </a:rPr>
+              <a:t>on </a:t>
+            </a:r>
+            <a:r>
+              <a:rPr lang="en-US" sz="4400" b="0" u="none" strike="noStrike">
+                <a:solidFill>
+                  <a:srgbClr val="FFFFFF"/>
+                </a:solidFill>
+                <a:effectLst/>
+                <a:uFillTx/>
+                <a:latin typeface="Arial"/>
+                <a:ea typeface="DejaVu Sans"/>
+              </a:rPr>
+              <a:t>Attrition</a:t>
+            </a:r>
+            <a:endParaRPr lang="en-US" sz="4400" b="0" u="none" strike="noStrike">
+              <a:solidFill>
+                <a:srgbClr val="FFFFFF"/>
+              </a:solidFill>
+              <a:effectLst/>
+              <a:uFillTx/>
+              <a:latin typeface="Arial"/>
+            </a:endParaRPr>
           </a:p>
         </p:txBody>
       </p:sp>
@@ -2410,8 +2786,8 @@
         </p:nvSpPr>
         <p:spPr>
           <a:xfrm>
-            <a:off x="504000" y="2376000"/>
-            <a:ext cx="9072000" cy="2754000"/>
+            <a:off x="504000" y="2375640"/>
+            <a:ext cx="9071640" cy="2754360"/>
           </a:xfrm>
           <a:prstGeom prst="rect">
             <a:avLst/>
@@ -2425,10 +2801,18 @@
           <a:bodyPr lIns="0" tIns="0" rIns="0" bIns="0" anchor="ctr">
             <a:spAutoFit/>
           </a:bodyPr>
-          <a:lstStyle/>
-          <a:p>
-            <a:pPr indent="0" algn="ctr">
+          <a:p>
+            <a:pPr marL="228600" indent="0" algn="ctr" defTabSz="914400">
+              <a:lnSpc>
+                <a:spcPct val="90000"/>
+              </a:lnSpc>
+              <a:spcBef>
+                <a:spcPts val="1414"/>
+              </a:spcBef>
               <a:buNone/>
+              <a:tabLst>
+                <a:tab pos="0" algn="l"/>
+              </a:tabLst>
             </a:pPr>
             <a:r>
               <a:rPr lang="en-US" sz="3200" b="0" u="none" strike="noStrike">
@@ -2438,13 +2822,31 @@
                 <a:effectLst/>
                 <a:uFillTx/>
                 <a:latin typeface="Arial"/>
+                <a:ea typeface="DejaVu Sans"/>
               </a:rPr>
               <a:t>By: </a:t>
             </a:r>
-          </a:p>
-          <a:p>
-            <a:pPr indent="0" algn="ctr">
+            <a:endParaRPr lang="en-US" sz="3200" b="0" u="none" strike="noStrike">
+              <a:solidFill>
+                <a:srgbClr val="000000"/>
+              </a:solidFill>
+              <a:effectLst/>
+              <a:uFillTx/>
+              <a:latin typeface="Arial"/>
+            </a:endParaRPr>
+          </a:p>
+          <a:p>
+            <a:pPr marL="228600" indent="0" algn="ctr" defTabSz="914400">
+              <a:lnSpc>
+                <a:spcPct val="90000"/>
+              </a:lnSpc>
+              <a:spcBef>
+                <a:spcPts val="1414"/>
+              </a:spcBef>
               <a:buNone/>
+              <a:tabLst>
+                <a:tab pos="0" algn="l"/>
+              </a:tabLst>
             </a:pPr>
             <a:r>
               <a:rPr lang="en-US" sz="3200" b="0" u="none" strike="noStrike">
@@ -2454,13 +2856,31 @@
                 <a:effectLst/>
                 <a:uFillTx/>
                 <a:latin typeface="Arial"/>
+                <a:ea typeface="DejaVu Sans"/>
               </a:rPr>
               <a:t>Stacy Bowler</a:t>
             </a:r>
-          </a:p>
-          <a:p>
-            <a:pPr indent="0" algn="ctr">
+            <a:endParaRPr lang="en-US" sz="3200" b="0" u="none" strike="noStrike">
+              <a:solidFill>
+                <a:srgbClr val="000000"/>
+              </a:solidFill>
+              <a:effectLst/>
+              <a:uFillTx/>
+              <a:latin typeface="Arial"/>
+            </a:endParaRPr>
+          </a:p>
+          <a:p>
+            <a:pPr marL="228600" indent="0" algn="ctr" defTabSz="914400">
+              <a:lnSpc>
+                <a:spcPct val="90000"/>
+              </a:lnSpc>
+              <a:spcBef>
+                <a:spcPts val="1414"/>
+              </a:spcBef>
               <a:buNone/>
+              <a:tabLst>
+                <a:tab pos="0" algn="l"/>
+              </a:tabLst>
             </a:pPr>
             <a:r>
               <a:rPr lang="en-US" sz="3200" b="0" u="none" strike="noStrike">
@@ -2470,13 +2890,31 @@
                 <a:effectLst/>
                 <a:uFillTx/>
                 <a:latin typeface="Arial"/>
+                <a:ea typeface="DejaVu Sans"/>
               </a:rPr>
               <a:t>and</a:t>
             </a:r>
-          </a:p>
-          <a:p>
-            <a:pPr indent="0" algn="ctr">
+            <a:endParaRPr lang="en-US" sz="3200" b="0" u="none" strike="noStrike">
+              <a:solidFill>
+                <a:srgbClr val="000000"/>
+              </a:solidFill>
+              <a:effectLst/>
+              <a:uFillTx/>
+              <a:latin typeface="Arial"/>
+            </a:endParaRPr>
+          </a:p>
+          <a:p>
+            <a:pPr marL="228600" indent="0" algn="ctr" defTabSz="914400">
+              <a:lnSpc>
+                <a:spcPct val="90000"/>
+              </a:lnSpc>
+              <a:spcBef>
+                <a:spcPts val="1414"/>
+              </a:spcBef>
               <a:buNone/>
+              <a:tabLst>
+                <a:tab pos="0" algn="l"/>
+              </a:tabLst>
             </a:pPr>
             <a:r>
               <a:rPr lang="en-US" sz="3200" b="0" u="none" strike="noStrike">
@@ -2486,22 +2924,36 @@
                 <a:effectLst/>
                 <a:uFillTx/>
                 <a:latin typeface="Arial"/>
+                <a:ea typeface="DejaVu Sans"/>
               </a:rPr>
               <a:t>Derrik Miller</a:t>
             </a:r>
+            <a:endParaRPr lang="en-US" sz="3200" b="0" u="none" strike="noStrike">
+              <a:solidFill>
+                <a:srgbClr val="000000"/>
+              </a:solidFill>
+              <a:effectLst/>
+              <a:uFillTx/>
+              <a:latin typeface="Arial"/>
+            </a:endParaRPr>
           </a:p>
         </p:txBody>
       </p:sp>
     </p:spTree>
   </p:cSld>
-  <p:clrMapOvr>
-    <a:masterClrMapping/>
-  </p:clrMapOvr>
+  <mc:AlternateContent>
+    <mc:Choice Requires="p14">
+      <p:transition spd="slow" p14:dur="2000"/>
+    </mc:Choice>
+    <mc:Fallback>
+      <p:transition spd="slow"/>
+    </mc:Fallback>
+  </mc:AlternateContent>
 </p:sld>
 </file>
 
 <file path=ppt/slides/slide10.xml><?xml version="1.0" encoding="utf-8"?>
-<p:sld xmlns:a="http://schemas.openxmlformats.org/drawingml/2006/main" xmlns:r="http://schemas.openxmlformats.org/officeDocument/2006/relationships" xmlns:p="http://schemas.openxmlformats.org/presentationml/2006/main">
+<p:sld xmlns:a="http://schemas.openxmlformats.org/drawingml/2006/main" xmlns:p="http://schemas.openxmlformats.org/presentationml/2006/main" xmlns:r="http://schemas.openxmlformats.org/officeDocument/2006/relationships" xmlns:p14="http://schemas.microsoft.com/office/powerpoint/2010/main" xmlns:p15="http://schemas.microsoft.com/office/powerpoint/2012/main" xmlns:mc="http://schemas.openxmlformats.org/markup-compatibility/2006">
   <p:cSld>
     <p:spTree>
       <p:nvGrpSpPr>
@@ -2529,8 +2981,8 @@
         </p:nvSpPr>
         <p:spPr>
           <a:xfrm>
-            <a:off x="504000" y="225720"/>
-            <a:ext cx="9072000" cy="946800"/>
+            <a:off x="504000" y="225360"/>
+            <a:ext cx="9071640" cy="947160"/>
           </a:xfrm>
           <a:prstGeom prst="rect">
             <a:avLst/>
@@ -2544,10 +2996,15 @@
           <a:bodyPr lIns="0" tIns="0" rIns="0" bIns="0" anchor="ctr">
             <a:spAutoFit/>
           </a:bodyPr>
-          <a:lstStyle/>
-          <a:p>
-            <a:pPr indent="0" algn="ctr">
+          <a:p>
+            <a:pPr indent="0" algn="ctr" defTabSz="914400">
+              <a:lnSpc>
+                <a:spcPct val="90000"/>
+              </a:lnSpc>
               <a:buNone/>
+              <a:tabLst>
+                <a:tab pos="0" algn="l"/>
+              </a:tabLst>
             </a:pPr>
             <a:r>
               <a:rPr lang="en-US" sz="3300" b="0" u="none" strike="noStrike">
@@ -2557,9 +3014,18 @@
                 <a:effectLst/>
                 <a:uFillTx/>
                 <a:latin typeface="Arial"/>
+                <a:ea typeface="DejaVu Sans"/>
               </a:rPr>
               <a:t>Age vs Total Working Years</a:t>
             </a:r>
+            <a:endParaRPr lang="en-US" sz="3300" b="0" u="none" strike="noStrike">
+              <a:solidFill>
+                <a:srgbClr val="000000"/>
+              </a:solidFill>
+              <a:effectLst/>
+              <a:uFillTx/>
+              <a:latin typeface="Arial"/>
+            </a:endParaRPr>
           </a:p>
         </p:txBody>
       </p:sp>
@@ -2576,7 +3042,7 @@
         <p:spPr>
           <a:xfrm>
             <a:off x="504000" y="1326600"/>
-            <a:ext cx="3839400" cy="3288240"/>
+            <a:ext cx="3839040" cy="3287880"/>
           </a:xfrm>
           <a:prstGeom prst="rect">
             <a:avLst/>
@@ -2588,11 +3054,13 @@
         </p:spPr>
         <p:txBody>
           <a:bodyPr lIns="0" tIns="0" rIns="0" bIns="0" anchor="t">
-            <a:normAutofit lnSpcReduction="9999"/>
+            <a:normAutofit fontScale="92500" lnSpcReduction="9999"/>
           </a:bodyPr>
-          <a:lstStyle/>
-          <a:p>
-            <a:pPr marL="432000" indent="-324000" algn="l">
+          <a:p>
+            <a:pPr marL="432000" indent="-324000" algn="l" defTabSz="914400">
+              <a:lnSpc>
+                <a:spcPct val="100000"/>
+              </a:lnSpc>
               <a:spcBef>
                 <a:spcPts val="1060"/>
               </a:spcBef>
@@ -2604,16 +3072,25 @@
               <a:buChar char=""/>
             </a:pPr>
             <a:r>
-              <a:rPr lang="en-US" sz="2400" b="0" u="none" strike="noStrike" dirty="0">
-                <a:solidFill>
-                  <a:srgbClr val="000000"/>
-                </a:solidFill>
-                <a:effectLst/>
-                <a:uFillTx/>
-                <a:latin typeface="Arial"/>
+              <a:rPr lang="en-US" sz="2400" b="0" u="none" strike="noStrike">
+                <a:solidFill>
+                  <a:srgbClr val="000000"/>
+                </a:solidFill>
+                <a:effectLst/>
+                <a:uFillTx/>
+                <a:latin typeface="Arial"/>
+                <a:ea typeface="DejaVu Sans"/>
               </a:rPr>
               <a:t>We thought we would see a strong relationship in the data that would cause issues between employee age and total working years. It looks like there is a relationship, but the correlations is not nearly as strong as we thought.</a:t>
             </a:r>
+            <a:endParaRPr lang="en-US" sz="2400" b="0" u="none" strike="noStrike">
+              <a:solidFill>
+                <a:srgbClr val="000000"/>
+              </a:solidFill>
+              <a:effectLst/>
+              <a:uFillTx/>
+              <a:latin typeface="Arial"/>
+            </a:endParaRPr>
           </a:p>
         </p:txBody>
       </p:sp>
@@ -2624,13 +3101,13 @@
           <p:nvPr/>
         </p:nvPicPr>
         <p:blipFill>
-          <a:blip r:embed="rId2"/>
+          <a:blip r:embed="rId1"/>
           <a:stretch/>
         </p:blipFill>
         <p:spPr>
           <a:xfrm>
             <a:off x="4343400" y="1371600"/>
-            <a:ext cx="5313960" cy="3805920"/>
+            <a:ext cx="5313600" cy="3805560"/>
           </a:xfrm>
           <a:prstGeom prst="rect">
             <a:avLst/>
@@ -2643,14 +3120,19 @@
       </p:pic>
     </p:spTree>
   </p:cSld>
-  <p:clrMapOvr>
-    <a:masterClrMapping/>
-  </p:clrMapOvr>
+  <mc:AlternateContent>
+    <mc:Choice Requires="p14">
+      <p:transition spd="slow" p14:dur="2000"/>
+    </mc:Choice>
+    <mc:Fallback>
+      <p:transition spd="slow"/>
+    </mc:Fallback>
+  </mc:AlternateContent>
 </p:sld>
 </file>
 
 <file path=ppt/slides/slide11.xml><?xml version="1.0" encoding="utf-8"?>
-<p:sld xmlns:a="http://schemas.openxmlformats.org/drawingml/2006/main" xmlns:r="http://schemas.openxmlformats.org/officeDocument/2006/relationships" xmlns:p="http://schemas.openxmlformats.org/presentationml/2006/main" show="0">
+<p:sld xmlns:a="http://schemas.openxmlformats.org/drawingml/2006/main" xmlns:p="http://schemas.openxmlformats.org/presentationml/2006/main" xmlns:r="http://schemas.openxmlformats.org/officeDocument/2006/relationships" xmlns:p14="http://schemas.microsoft.com/office/powerpoint/2010/main" xmlns:p15="http://schemas.microsoft.com/office/powerpoint/2012/main" xmlns:mc="http://schemas.openxmlformats.org/markup-compatibility/2006" show="0">
   <p:cSld>
     <p:spTree>
       <p:nvGrpSpPr>
@@ -2678,8 +3160,8 @@
         </p:nvSpPr>
         <p:spPr>
           <a:xfrm>
-            <a:off x="504000" y="225720"/>
-            <a:ext cx="9072000" cy="946800"/>
+            <a:off x="504000" y="225360"/>
+            <a:ext cx="9071640" cy="947160"/>
           </a:xfrm>
           <a:prstGeom prst="rect">
             <a:avLst/>
@@ -2693,10 +3175,15 @@
           <a:bodyPr lIns="0" tIns="0" rIns="0" bIns="0" anchor="ctr">
             <a:spAutoFit/>
           </a:bodyPr>
-          <a:lstStyle/>
-          <a:p>
-            <a:pPr indent="0" algn="ctr">
+          <a:p>
+            <a:pPr indent="0" algn="ctr" defTabSz="914400">
+              <a:lnSpc>
+                <a:spcPct val="90000"/>
+              </a:lnSpc>
               <a:buNone/>
+              <a:tabLst>
+                <a:tab pos="0" algn="l"/>
+              </a:tabLst>
             </a:pPr>
             <a:r>
               <a:rPr lang="en-US" sz="3300" b="0" u="none" strike="noStrike">
@@ -2706,9 +3193,18 @@
                 <a:effectLst/>
                 <a:uFillTx/>
                 <a:latin typeface="Arial"/>
+                <a:ea typeface="DejaVu Sans"/>
               </a:rPr>
               <a:t>Years at Company vs Total Working Years</a:t>
             </a:r>
+            <a:endParaRPr lang="en-US" sz="3300" b="0" u="none" strike="noStrike">
+              <a:solidFill>
+                <a:srgbClr val="000000"/>
+              </a:solidFill>
+              <a:effectLst/>
+              <a:uFillTx/>
+              <a:latin typeface="Arial"/>
+            </a:endParaRPr>
           </a:p>
         </p:txBody>
       </p:sp>
@@ -2725,7 +3221,7 @@
         <p:spPr>
           <a:xfrm>
             <a:off x="504000" y="1326600"/>
-            <a:ext cx="3852720" cy="3288240"/>
+            <a:ext cx="3852360" cy="3287880"/>
           </a:xfrm>
           <a:prstGeom prst="rect">
             <a:avLst/>
@@ -2739,9 +3235,11 @@
           <a:bodyPr lIns="0" tIns="0" rIns="0" bIns="0" anchor="t">
             <a:normAutofit/>
           </a:bodyPr>
-          <a:lstStyle/>
-          <a:p>
-            <a:pPr marL="432000" indent="-324000" algn="l">
+          <a:p>
+            <a:pPr marL="432000" indent="-324000" algn="l" defTabSz="914400">
+              <a:lnSpc>
+                <a:spcPct val="100000"/>
+              </a:lnSpc>
               <a:spcBef>
                 <a:spcPts val="1060"/>
               </a:spcBef>
@@ -2760,9 +3258,18 @@
                 <a:effectLst/>
                 <a:uFillTx/>
                 <a:latin typeface="Arial"/>
+                <a:ea typeface="DejaVu Sans"/>
               </a:rPr>
               <a:t>It looks like there is a relationship between years at the company and working years, but not a very strong one.</a:t>
             </a:r>
+            <a:endParaRPr lang="en-US" sz="2400" b="0" u="none" strike="noStrike">
+              <a:solidFill>
+                <a:srgbClr val="000000"/>
+              </a:solidFill>
+              <a:effectLst/>
+              <a:uFillTx/>
+              <a:latin typeface="Arial"/>
+            </a:endParaRPr>
           </a:p>
         </p:txBody>
       </p:sp>
@@ -2773,13 +3280,13 @@
           <p:nvPr/>
         </p:nvPicPr>
         <p:blipFill>
-          <a:blip r:embed="rId2"/>
+          <a:blip r:embed="rId1"/>
           <a:stretch/>
         </p:blipFill>
         <p:spPr>
           <a:xfrm>
             <a:off x="4356720" y="1242360"/>
-            <a:ext cx="5244480" cy="3786840"/>
+            <a:ext cx="5244120" cy="3786480"/>
           </a:xfrm>
           <a:prstGeom prst="rect">
             <a:avLst/>
@@ -2792,14 +3299,19 @@
       </p:pic>
     </p:spTree>
   </p:cSld>
-  <p:clrMapOvr>
-    <a:masterClrMapping/>
-  </p:clrMapOvr>
+  <mc:AlternateContent>
+    <mc:Choice Requires="p14">
+      <p:transition spd="slow" p14:dur="2000"/>
+    </mc:Choice>
+    <mc:Fallback>
+      <p:transition spd="slow"/>
+    </mc:Fallback>
+  </mc:AlternateContent>
 </p:sld>
 </file>
 
 <file path=ppt/slides/slide12.xml><?xml version="1.0" encoding="utf-8"?>
-<p:sld xmlns:a="http://schemas.openxmlformats.org/drawingml/2006/main" xmlns:r="http://schemas.openxmlformats.org/officeDocument/2006/relationships" xmlns:p="http://schemas.openxmlformats.org/presentationml/2006/main" show="0">
+<p:sld xmlns:a="http://schemas.openxmlformats.org/drawingml/2006/main" xmlns:p="http://schemas.openxmlformats.org/presentationml/2006/main" xmlns:r="http://schemas.openxmlformats.org/officeDocument/2006/relationships" xmlns:p14="http://schemas.microsoft.com/office/powerpoint/2010/main" xmlns:p15="http://schemas.microsoft.com/office/powerpoint/2012/main" xmlns:mc="http://schemas.openxmlformats.org/markup-compatibility/2006" show="0">
   <p:cSld>
     <p:spTree>
       <p:nvGrpSpPr>
@@ -2827,8 +3339,8 @@
         </p:nvSpPr>
         <p:spPr>
           <a:xfrm>
-            <a:off x="504000" y="225720"/>
-            <a:ext cx="9072000" cy="946800"/>
+            <a:off x="504000" y="225360"/>
+            <a:ext cx="9071640" cy="947160"/>
           </a:xfrm>
           <a:prstGeom prst="rect">
             <a:avLst/>
@@ -2842,10 +3354,15 @@
           <a:bodyPr lIns="0" tIns="0" rIns="0" bIns="0" anchor="ctr">
             <a:spAutoFit/>
           </a:bodyPr>
-          <a:lstStyle/>
-          <a:p>
-            <a:pPr indent="0" algn="ctr">
+          <a:p>
+            <a:pPr indent="0" algn="ctr" defTabSz="914400">
+              <a:lnSpc>
+                <a:spcPct val="90000"/>
+              </a:lnSpc>
               <a:buNone/>
+              <a:tabLst>
+                <a:tab pos="0" algn="l"/>
+              </a:tabLst>
             </a:pPr>
             <a:r>
               <a:rPr lang="en-US" sz="3300" b="0" u="none" strike="noStrike">
@@ -2855,9 +3372,18 @@
                 <a:effectLst/>
                 <a:uFillTx/>
                 <a:latin typeface="Arial"/>
+                <a:ea typeface="DejaVu Sans"/>
               </a:rPr>
               <a:t>Education Field vs Job Role</a:t>
             </a:r>
+            <a:endParaRPr lang="en-US" sz="3300" b="0" u="none" strike="noStrike">
+              <a:solidFill>
+                <a:srgbClr val="000000"/>
+              </a:solidFill>
+              <a:effectLst/>
+              <a:uFillTx/>
+              <a:latin typeface="Arial"/>
+            </a:endParaRPr>
           </a:p>
         </p:txBody>
       </p:sp>
@@ -2874,7 +3400,7 @@
         <p:spPr>
           <a:xfrm>
             <a:off x="504000" y="1326600"/>
-            <a:ext cx="4504680" cy="3288240"/>
+            <a:ext cx="4504320" cy="3287880"/>
           </a:xfrm>
           <a:prstGeom prst="rect">
             <a:avLst/>
@@ -2886,11 +3412,13 @@
         </p:spPr>
         <p:txBody>
           <a:bodyPr lIns="0" tIns="0" rIns="0" bIns="0" anchor="t">
-            <a:normAutofit fontScale="85000" lnSpcReduction="9999"/>
+            <a:normAutofit fontScale="85000" lnSpcReduction="19999"/>
           </a:bodyPr>
-          <a:lstStyle/>
-          <a:p>
-            <a:pPr marL="432000" indent="-324000" algn="l">
+          <a:p>
+            <a:pPr marL="432000" indent="-324000" algn="l" defTabSz="914400">
+              <a:lnSpc>
+                <a:spcPct val="100000"/>
+              </a:lnSpc>
               <a:spcBef>
                 <a:spcPts val="1191"/>
               </a:spcBef>
@@ -2912,12 +3440,24 @@
                 <a:effectLst/>
                 <a:uFillTx/>
                 <a:latin typeface="Arial"/>
+                <a:ea typeface="DejaVu Sans"/>
               </a:rPr>
               <a:t>The heatmap reveals a strong structural relationship between education field and job role, indicating that employees are not randomly distributed across roles. Instead, specific education backgrounds concentrate within particular job families. This dependency explains multicollinearity we later observed in the initial logistic regression model.</a:t>
             </a:r>
-          </a:p>
-          <a:p>
-            <a:pPr marL="432000" indent="-324000" algn="l">
+            <a:endParaRPr lang="en-US" sz="2000" b="0" u="none" strike="noStrike">
+              <a:solidFill>
+                <a:srgbClr val="000000"/>
+              </a:solidFill>
+              <a:effectLst/>
+              <a:uFillTx/>
+              <a:latin typeface="Arial"/>
+            </a:endParaRPr>
+          </a:p>
+          <a:p>
+            <a:pPr marL="432000" indent="-324000" algn="l" defTabSz="914400">
+              <a:lnSpc>
+                <a:spcPct val="100000"/>
+              </a:lnSpc>
               <a:spcBef>
                 <a:spcPts val="1191"/>
               </a:spcBef>
@@ -2939,9 +3479,18 @@
                 <a:effectLst/>
                 <a:uFillTx/>
                 <a:latin typeface="Arial"/>
+                <a:ea typeface="DejaVu Sans"/>
               </a:rPr>
               <a:t>Attrition varies more meaningfully across job roles than across education fields, suggesting that occupational role is a stronger predictor of turnover than educational background.</a:t>
             </a:r>
+            <a:endParaRPr lang="en-US" sz="2000" b="0" u="none" strike="noStrike">
+              <a:solidFill>
+                <a:srgbClr val="000000"/>
+              </a:solidFill>
+              <a:effectLst/>
+              <a:uFillTx/>
+              <a:latin typeface="Arial"/>
+            </a:endParaRPr>
           </a:p>
         </p:txBody>
       </p:sp>
@@ -2952,13 +3501,13 @@
           <p:nvPr/>
         </p:nvPicPr>
         <p:blipFill>
-          <a:blip r:embed="rId2"/>
+          <a:blip r:embed="rId1"/>
           <a:stretch/>
         </p:blipFill>
         <p:spPr>
           <a:xfrm>
             <a:off x="5008680" y="1600200"/>
-            <a:ext cx="4821120" cy="3284640"/>
+            <a:ext cx="4820760" cy="3284280"/>
           </a:xfrm>
           <a:prstGeom prst="rect">
             <a:avLst/>
@@ -2971,14 +3520,19 @@
       </p:pic>
     </p:spTree>
   </p:cSld>
-  <p:clrMapOvr>
-    <a:masterClrMapping/>
-  </p:clrMapOvr>
+  <mc:AlternateContent>
+    <mc:Choice Requires="p14">
+      <p:transition spd="slow" p14:dur="2000"/>
+    </mc:Choice>
+    <mc:Fallback>
+      <p:transition spd="slow"/>
+    </mc:Fallback>
+  </mc:AlternateContent>
 </p:sld>
 </file>
 
 <file path=ppt/slides/slide13.xml><?xml version="1.0" encoding="utf-8"?>
-<p:sld xmlns:a="http://schemas.openxmlformats.org/drawingml/2006/main" xmlns:r="http://schemas.openxmlformats.org/officeDocument/2006/relationships" xmlns:p="http://schemas.openxmlformats.org/presentationml/2006/main">
+<p:sld xmlns:a="http://schemas.openxmlformats.org/drawingml/2006/main" xmlns:p="http://schemas.openxmlformats.org/presentationml/2006/main" xmlns:r="http://schemas.openxmlformats.org/officeDocument/2006/relationships" xmlns:p14="http://schemas.microsoft.com/office/powerpoint/2010/main" xmlns:p15="http://schemas.microsoft.com/office/powerpoint/2012/main" xmlns:mc="http://schemas.openxmlformats.org/markup-compatibility/2006">
   <p:cSld>
     <p:spTree>
       <p:nvGrpSpPr>
@@ -3006,8 +3560,8 @@
         </p:nvSpPr>
         <p:spPr>
           <a:xfrm>
-            <a:off x="504000" y="225720"/>
-            <a:ext cx="9072000" cy="946800"/>
+            <a:off x="504000" y="225360"/>
+            <a:ext cx="9071640" cy="947160"/>
           </a:xfrm>
           <a:prstGeom prst="rect">
             <a:avLst/>
@@ -3021,10 +3575,15 @@
           <a:bodyPr lIns="0" tIns="0" rIns="0" bIns="0" anchor="ctr">
             <a:spAutoFit/>
           </a:bodyPr>
-          <a:lstStyle/>
-          <a:p>
-            <a:pPr indent="0" algn="ctr">
+          <a:p>
+            <a:pPr indent="0" algn="ctr" defTabSz="914400">
+              <a:lnSpc>
+                <a:spcPct val="90000"/>
+              </a:lnSpc>
               <a:buNone/>
+              <a:tabLst>
+                <a:tab pos="0" algn="l"/>
+              </a:tabLst>
             </a:pPr>
             <a:r>
               <a:rPr lang="en-US" sz="3300" b="0" u="none" strike="noStrike">
@@ -3034,9 +3593,18 @@
                 <a:effectLst/>
                 <a:uFillTx/>
                 <a:latin typeface="Arial"/>
+                <a:ea typeface="DejaVu Sans"/>
               </a:rPr>
               <a:t>Number of Companies and Attrition</a:t>
             </a:r>
+            <a:endParaRPr lang="en-US" sz="3300" b="0" u="none" strike="noStrike">
+              <a:solidFill>
+                <a:srgbClr val="000000"/>
+              </a:solidFill>
+              <a:effectLst/>
+              <a:uFillTx/>
+              <a:latin typeface="Arial"/>
+            </a:endParaRPr>
           </a:p>
         </p:txBody>
       </p:sp>
@@ -3053,7 +3621,7 @@
         <p:spPr>
           <a:xfrm>
             <a:off x="504000" y="1326600"/>
-            <a:ext cx="5073120" cy="3288240"/>
+            <a:ext cx="5072760" cy="3287880"/>
           </a:xfrm>
           <a:prstGeom prst="rect">
             <a:avLst/>
@@ -3067,9 +3635,11 @@
           <a:bodyPr lIns="0" tIns="0" rIns="0" bIns="0" anchor="t">
             <a:normAutofit/>
           </a:bodyPr>
-          <a:lstStyle/>
-          <a:p>
-            <a:pPr marL="432000" indent="-324000" algn="l">
+          <a:p>
+            <a:pPr marL="432000" indent="-324000" algn="l" defTabSz="914400">
+              <a:lnSpc>
+                <a:spcPct val="100000"/>
+              </a:lnSpc>
               <a:spcBef>
                 <a:spcPts val="1191"/>
               </a:spcBef>
@@ -3084,16 +3654,49 @@
               <a:buChar char=""/>
             </a:pPr>
             <a:r>
-              <a:rPr lang="en-US" sz="2000" b="0" u="none" strike="noStrike" dirty="0">
-                <a:solidFill>
-                  <a:srgbClr val="000000"/>
-                </a:solidFill>
-                <a:effectLst/>
-                <a:uFillTx/>
-                <a:latin typeface="Arial"/>
-              </a:rPr>
-              <a:t>This shows that employees that have worked at more companies are more likely to leave. This could be explained by the fact that employees that have worked at more companies are more likely to be looking for new opportunities or be closer to retirement. </a:t>
-            </a:r>
+              <a:rPr lang="en-US" sz="2000" b="0" u="none" strike="noStrike">
+                <a:solidFill>
+                  <a:srgbClr val="000000"/>
+                </a:solidFill>
+                <a:effectLst/>
+                <a:uFillTx/>
+                <a:latin typeface="Arial"/>
+                <a:ea typeface="DejaVu Sans"/>
+              </a:rPr>
+              <a:t>This shows that employees that have worked at more companies are more likely to </a:t>
+            </a:r>
+            <a:r>
+              <a:rPr lang="en-US" sz="2000" b="0" u="none" strike="noStrike">
+                <a:solidFill>
+                  <a:srgbClr val="000000"/>
+                </a:solidFill>
+                <a:effectLst/>
+                <a:uFillTx/>
+                <a:latin typeface="Arial"/>
+                <a:ea typeface="DejaVu Sans"/>
+              </a:rPr>
+              <a:t>leave. This could be explained by the fact that employees that have worked at more </a:t>
+            </a:r>
+            <a:r>
+              <a:rPr lang="en-US" sz="2000" b="0" u="none" strike="noStrike">
+                <a:solidFill>
+                  <a:srgbClr val="000000"/>
+                </a:solidFill>
+                <a:effectLst/>
+                <a:uFillTx/>
+                <a:latin typeface="Arial"/>
+                <a:ea typeface="DejaVu Sans"/>
+              </a:rPr>
+              <a:t>companies are more likely to be looking for new opportunities or be closer to retirement. </a:t>
+            </a:r>
+            <a:endParaRPr lang="en-US" sz="2000" b="0" u="none" strike="noStrike">
+              <a:solidFill>
+                <a:srgbClr val="000000"/>
+              </a:solidFill>
+              <a:effectLst/>
+              <a:uFillTx/>
+              <a:latin typeface="Arial"/>
+            </a:endParaRPr>
           </a:p>
         </p:txBody>
       </p:sp>
@@ -3104,13 +3707,13 @@
           <p:nvPr/>
         </p:nvPicPr>
         <p:blipFill>
-          <a:blip r:embed="rId2"/>
+          <a:blip r:embed="rId1"/>
           <a:stretch/>
         </p:blipFill>
         <p:spPr>
           <a:xfrm>
             <a:off x="5577120" y="1349640"/>
-            <a:ext cx="4252680" cy="3222360"/>
+            <a:ext cx="4252320" cy="3222000"/>
           </a:xfrm>
           <a:prstGeom prst="rect">
             <a:avLst/>
@@ -3123,14 +3726,19 @@
       </p:pic>
     </p:spTree>
   </p:cSld>
-  <p:clrMapOvr>
-    <a:masterClrMapping/>
-  </p:clrMapOvr>
+  <mc:AlternateContent>
+    <mc:Choice Requires="p14">
+      <p:transition spd="slow" p14:dur="2000"/>
+    </mc:Choice>
+    <mc:Fallback>
+      <p:transition spd="slow"/>
+    </mc:Fallback>
+  </mc:AlternateContent>
 </p:sld>
 </file>
 
 <file path=ppt/slides/slide14.xml><?xml version="1.0" encoding="utf-8"?>
-<p:sld xmlns:a="http://schemas.openxmlformats.org/drawingml/2006/main" xmlns:r="http://schemas.openxmlformats.org/officeDocument/2006/relationships" xmlns:p="http://schemas.openxmlformats.org/presentationml/2006/main">
+<p:sld xmlns:a="http://schemas.openxmlformats.org/drawingml/2006/main" xmlns:p="http://schemas.openxmlformats.org/presentationml/2006/main" xmlns:r="http://schemas.openxmlformats.org/officeDocument/2006/relationships" xmlns:p14="http://schemas.microsoft.com/office/powerpoint/2010/main" xmlns:p15="http://schemas.microsoft.com/office/powerpoint/2012/main" xmlns:mc="http://schemas.openxmlformats.org/markup-compatibility/2006">
   <p:cSld>
     <p:spTree>
       <p:nvGrpSpPr>
@@ -3159,7 +3767,7 @@
         <p:spPr>
           <a:xfrm>
             <a:off x="504000" y="225720"/>
-            <a:ext cx="9072000" cy="946800"/>
+            <a:ext cx="9071640" cy="946440"/>
           </a:xfrm>
           <a:prstGeom prst="rect">
             <a:avLst/>
@@ -3173,10 +3781,15 @@
           <a:bodyPr lIns="0" tIns="0" rIns="0" bIns="0" anchor="ctr">
             <a:spAutoFit/>
           </a:bodyPr>
-          <a:lstStyle/>
-          <a:p>
-            <a:pPr indent="0" algn="ctr">
+          <a:p>
+            <a:pPr indent="0" algn="ctr" defTabSz="914400">
+              <a:lnSpc>
+                <a:spcPct val="90000"/>
+              </a:lnSpc>
               <a:buNone/>
+              <a:tabLst>
+                <a:tab pos="0" algn="l"/>
+              </a:tabLst>
             </a:pPr>
             <a:r>
               <a:rPr lang="en-US" sz="3300" b="0" u="none" strike="noStrike">
@@ -3187,25 +3800,33 @@
                 <a:uFillTx/>
                 <a:latin typeface="Arial"/>
               </a:rPr>
-              <a:t>Model Analysis</a:t>
-            </a:r>
+              <a:t>Top Positive Predictors</a:t>
+            </a:r>
+            <a:endParaRPr lang="en-US" sz="3300" b="0" u="none" strike="noStrike">
+              <a:solidFill>
+                <a:srgbClr val="000000"/>
+              </a:solidFill>
+              <a:effectLst/>
+              <a:uFillTx/>
+              <a:latin typeface="Arial"/>
+            </a:endParaRPr>
           </a:p>
         </p:txBody>
       </p:sp>
-      <p:sp>
-        <p:nvSpPr>
-          <p:cNvPr id="58" name="PlaceHolder 2"/>
-          <p:cNvSpPr>
-            <a:spLocks noGrp="1"/>
-          </p:cNvSpPr>
-          <p:nvPr>
-            <p:ph/>
-          </p:nvPr>
-        </p:nvSpPr>
+      <p:pic>
+        <p:nvPicPr>
+          <p:cNvPr id="58" name=""/>
+          <p:cNvPicPr/>
+          <p:nvPr/>
+        </p:nvPicPr>
+        <p:blipFill>
+          <a:blip r:embed="rId1"/>
+          <a:stretch/>
+        </p:blipFill>
         <p:spPr>
           <a:xfrm>
-            <a:off x="504000" y="1326600"/>
-            <a:ext cx="9072000" cy="3288240"/>
+            <a:off x="2392200" y="1187280"/>
+            <a:ext cx="5608800" cy="3934080"/>
           </a:xfrm>
           <a:prstGeom prst="rect">
             <a:avLst/>
@@ -3215,77 +3836,22 @@
             <a:noFill/>
           </a:ln>
         </p:spPr>
-        <p:txBody>
-          <a:bodyPr lIns="0" tIns="0" rIns="0" bIns="0" anchor="t">
-            <a:normAutofit fontScale="85000" lnSpcReduction="9999"/>
-          </a:bodyPr>
-          <a:lstStyle/>
-          <a:p>
-            <a:pPr marL="432000" indent="-324000" algn="l">
-              <a:spcBef>
-                <a:spcPts val="1191"/>
-              </a:spcBef>
-              <a:spcAft>
-                <a:spcPts val="992"/>
-              </a:spcAft>
-              <a:buClr>
-                <a:srgbClr val="000000"/>
-              </a:buClr>
-              <a:buSzPct val="45000"/>
-              <a:buFont typeface="Wingdings" charset="2"/>
-              <a:buChar char=""/>
-            </a:pPr>
-            <a:r>
-              <a:rPr lang="en-US" sz="2400" b="0" u="none" strike="noStrike" dirty="0">
-                <a:solidFill>
-                  <a:srgbClr val="000000"/>
-                </a:solidFill>
-                <a:effectLst/>
-                <a:uFillTx/>
-                <a:latin typeface="Arial"/>
-              </a:rPr>
-              <a:t>Elastic Net achieved the highest cross-validated business utility (tied with Ridge), the highest overall accuracy, and the highest precision while maintaining an AUC comparable to the other models. Although Ridge produced slightly higher recall, the difference was small. Therefore, Elastic Net was selected as the final model because it provided the best overall balance of predictive performance and business value.</a:t>
-            </a:r>
-          </a:p>
-          <a:p>
-            <a:pPr marL="432000" indent="-324000" algn="l">
-              <a:spcBef>
-                <a:spcPts val="1191"/>
-              </a:spcBef>
-              <a:spcAft>
-                <a:spcPts val="992"/>
-              </a:spcAft>
-              <a:buClr>
-                <a:srgbClr val="000000"/>
-              </a:buClr>
-              <a:buSzPct val="45000"/>
-              <a:buFont typeface="Wingdings" charset="2"/>
-              <a:buChar char=""/>
-            </a:pPr>
-            <a:r>
-              <a:rPr lang="en-US" sz="2400" b="0" u="none" strike="noStrike" dirty="0">
-                <a:solidFill>
-                  <a:srgbClr val="000000"/>
-                </a:solidFill>
-                <a:effectLst/>
-                <a:uFillTx/>
-                <a:latin typeface="Arial"/>
-              </a:rPr>
-              <a:t>The similarity in performance suggests that the employee attrition dataset contains a relatively stable set of predictors with limited multi-collinearity. Consequently, the choice of regularization method had only a modest impact on predictive performance. Our removal from the data of some predictors where we saw or predicted multicollinearity may have also contributed.</a:t>
-            </a:r>
-          </a:p>
-        </p:txBody>
-      </p:sp>
+      </p:pic>
     </p:spTree>
   </p:cSld>
-  <p:clrMapOvr>
-    <a:masterClrMapping/>
-  </p:clrMapOvr>
+  <mc:AlternateContent>
+    <mc:Choice Requires="p14">
+      <p:transition spd="slow" p14:dur="2000"/>
+    </mc:Choice>
+    <mc:Fallback>
+      <p:transition spd="slow"/>
+    </mc:Fallback>
+  </mc:AlternateContent>
 </p:sld>
 </file>
 
 <file path=ppt/slides/slide15.xml><?xml version="1.0" encoding="utf-8"?>
-<p:sld xmlns:a="http://schemas.openxmlformats.org/drawingml/2006/main" xmlns:r="http://schemas.openxmlformats.org/officeDocument/2006/relationships" xmlns:p="http://schemas.openxmlformats.org/presentationml/2006/main">
+<p:sld xmlns:a="http://schemas.openxmlformats.org/drawingml/2006/main" xmlns:p="http://schemas.openxmlformats.org/presentationml/2006/main" xmlns:r="http://schemas.openxmlformats.org/officeDocument/2006/relationships" xmlns:p14="http://schemas.microsoft.com/office/powerpoint/2010/main" xmlns:p15="http://schemas.microsoft.com/office/powerpoint/2012/main" xmlns:mc="http://schemas.openxmlformats.org/markup-compatibility/2006">
   <p:cSld>
     <p:spTree>
       <p:nvGrpSpPr>
@@ -3314,7 +3880,7 @@
         <p:spPr>
           <a:xfrm>
             <a:off x="504000" y="225720"/>
-            <a:ext cx="9072000" cy="946800"/>
+            <a:ext cx="9071640" cy="946440"/>
           </a:xfrm>
           <a:prstGeom prst="rect">
             <a:avLst/>
@@ -3328,10 +3894,15 @@
           <a:bodyPr lIns="0" tIns="0" rIns="0" bIns="0" anchor="ctr">
             <a:spAutoFit/>
           </a:bodyPr>
-          <a:lstStyle/>
-          <a:p>
-            <a:pPr indent="0" algn="ctr">
+          <a:p>
+            <a:pPr indent="0" algn="ctr" defTabSz="914400">
+              <a:lnSpc>
+                <a:spcPct val="90000"/>
+              </a:lnSpc>
               <a:buNone/>
+              <a:tabLst>
+                <a:tab pos="0" algn="l"/>
+              </a:tabLst>
             </a:pPr>
             <a:r>
               <a:rPr lang="en-US" sz="3300" b="0" u="none" strike="noStrike">
@@ -3342,25 +3913,33 @@
                 <a:uFillTx/>
                 <a:latin typeface="Arial"/>
               </a:rPr>
-              <a:t>Important Continuous Predictors</a:t>
-            </a:r>
+              <a:t>Top Negative Predictors</a:t>
+            </a:r>
+            <a:endParaRPr lang="en-US" sz="3300" b="0" u="none" strike="noStrike">
+              <a:solidFill>
+                <a:srgbClr val="000000"/>
+              </a:solidFill>
+              <a:effectLst/>
+              <a:uFillTx/>
+              <a:latin typeface="Arial"/>
+            </a:endParaRPr>
           </a:p>
         </p:txBody>
       </p:sp>
-      <p:sp>
-        <p:nvSpPr>
-          <p:cNvPr id="60" name="PlaceHolder 2"/>
-          <p:cNvSpPr>
-            <a:spLocks noGrp="1"/>
-          </p:cNvSpPr>
-          <p:nvPr>
-            <p:ph/>
-          </p:nvPr>
-        </p:nvSpPr>
+      <p:pic>
+        <p:nvPicPr>
+          <p:cNvPr id="60" name=""/>
+          <p:cNvPicPr/>
+          <p:nvPr/>
+        </p:nvPicPr>
+        <p:blipFill>
+          <a:blip r:embed="rId1"/>
+          <a:stretch/>
+        </p:blipFill>
         <p:spPr>
           <a:xfrm>
-            <a:off x="504000" y="1326600"/>
-            <a:ext cx="9072000" cy="3931200"/>
+            <a:off x="2286000" y="1143000"/>
+            <a:ext cx="5633640" cy="4038840"/>
           </a:xfrm>
           <a:prstGeom prst="rect">
             <a:avLst/>
@@ -3370,299 +3949,22 @@
             <a:noFill/>
           </a:ln>
         </p:spPr>
-        <p:txBody>
-          <a:bodyPr lIns="0" tIns="0" rIns="0" bIns="0" anchor="t">
-            <a:normAutofit fontScale="55000" lnSpcReduction="20000"/>
-          </a:bodyPr>
-          <a:lstStyle/>
-          <a:p>
-            <a:pPr marL="432000" indent="-324000" algn="l">
-              <a:spcBef>
-                <a:spcPts val="1060"/>
-              </a:spcBef>
-              <a:buClr>
-                <a:srgbClr val="000000"/>
-              </a:buClr>
-              <a:buSzPct val="45000"/>
-              <a:buFont typeface="Wingdings" charset="2"/>
-              <a:buChar char=""/>
-            </a:pPr>
-            <a:r>
-              <a:rPr lang="en-US" sz="2400" b="0" u="none" strike="noStrike" dirty="0">
-                <a:solidFill>
-                  <a:srgbClr val="000000"/>
-                </a:solidFill>
-                <a:effectLst/>
-                <a:uFillTx/>
-                <a:latin typeface="Arial"/>
-              </a:rPr>
-              <a:t>Overtime</a:t>
-            </a:r>
-          </a:p>
-          <a:p>
-            <a:pPr marL="864000" lvl="1" indent="-324000" algn="l">
-              <a:spcBef>
-                <a:spcPts val="850"/>
-              </a:spcBef>
-              <a:buClr>
-                <a:srgbClr val="000000"/>
-              </a:buClr>
-              <a:buSzPct val="75000"/>
-              <a:buFont typeface="Symbol" charset="2"/>
-              <a:buChar char=""/>
-            </a:pPr>
-            <a:r>
-              <a:rPr lang="en-US" sz="2100" b="0" u="none" strike="noStrike" dirty="0">
-                <a:solidFill>
-                  <a:srgbClr val="000000"/>
-                </a:solidFill>
-                <a:effectLst/>
-                <a:uFillTx/>
-                <a:latin typeface="Arial"/>
-              </a:rPr>
-              <a:t>Employees working overtime have roughly 8 times the odds of attrition compared with employees who do not, holding the other variables constant:</a:t>
-            </a:r>
-          </a:p>
-          <a:p>
-            <a:pPr marL="1296000" lvl="2" indent="-288000" algn="l">
-              <a:spcBef>
-                <a:spcPts val="1191"/>
-              </a:spcBef>
-              <a:spcAft>
-                <a:spcPts val="992"/>
-              </a:spcAft>
-              <a:buClr>
-                <a:srgbClr val="000000"/>
-              </a:buClr>
-              <a:buSzPct val="45000"/>
-              <a:buFont typeface="Wingdings" charset="2"/>
-              <a:buChar char=""/>
-            </a:pPr>
-            <a:r>
-              <a:rPr lang="en-US" sz="1800" b="0" u="none" strike="noStrike" dirty="0">
-                <a:solidFill>
-                  <a:srgbClr val="000000"/>
-                </a:solidFill>
-                <a:effectLst/>
-                <a:uFillTx/>
-                <a:latin typeface="Arial"/>
-              </a:rPr>
-              <a:t>E^2.07 ≈ 7.95</a:t>
-            </a:r>
-          </a:p>
-          <a:p>
-            <a:pPr marL="432000" indent="-324000" algn="l">
-              <a:spcBef>
-                <a:spcPts val="1060"/>
-              </a:spcBef>
-              <a:buClr>
-                <a:srgbClr val="000000"/>
-              </a:buClr>
-              <a:buSzPct val="45000"/>
-              <a:buFont typeface="Wingdings" charset="2"/>
-              <a:buChar char=""/>
-            </a:pPr>
-            <a:r>
-              <a:rPr lang="en-US" sz="2400" b="0" u="none" strike="noStrike" dirty="0">
-                <a:solidFill>
-                  <a:srgbClr val="000000"/>
-                </a:solidFill>
-                <a:effectLst/>
-                <a:uFillTx/>
-                <a:latin typeface="Arial"/>
-              </a:rPr>
-              <a:t>Business Travel</a:t>
-            </a:r>
-          </a:p>
-          <a:p>
-            <a:pPr marL="864000" lvl="1" indent="-324000" algn="l">
-              <a:spcBef>
-                <a:spcPts val="850"/>
-              </a:spcBef>
-              <a:buClr>
-                <a:srgbClr val="000000"/>
-              </a:buClr>
-              <a:buSzPct val="75000"/>
-              <a:buFont typeface="Symbol" charset="2"/>
-              <a:buChar char=""/>
-            </a:pPr>
-            <a:r>
-              <a:rPr lang="en-US" sz="2100" b="0" u="none" strike="noStrike" dirty="0">
-                <a:solidFill>
-                  <a:srgbClr val="000000"/>
-                </a:solidFill>
-                <a:effectLst/>
-                <a:uFillTx/>
-                <a:latin typeface="Arial"/>
-              </a:rPr>
-              <a:t>Employees traveling frequently have roughly 7.5 times the odds of attrition compared to employees who do not travel, holding the other variables constant:</a:t>
-            </a:r>
-          </a:p>
-          <a:p>
-            <a:pPr marL="1296000" lvl="2" indent="-288000" algn="l">
-              <a:spcBef>
-                <a:spcPts val="1191"/>
-              </a:spcBef>
-              <a:spcAft>
-                <a:spcPts val="992"/>
-              </a:spcAft>
-              <a:buClr>
-                <a:srgbClr val="000000"/>
-              </a:buClr>
-              <a:buSzPct val="45000"/>
-              <a:buFont typeface="Wingdings" charset="2"/>
-              <a:buChar char=""/>
-            </a:pPr>
-            <a:r>
-              <a:rPr lang="en-US" sz="1800" b="0" u="none" strike="noStrike" dirty="0">
-                <a:solidFill>
-                  <a:srgbClr val="000000"/>
-                </a:solidFill>
-                <a:effectLst/>
-                <a:uFillTx/>
-                <a:latin typeface="Arial"/>
-              </a:rPr>
-              <a:t>E^2.02 ≈ 7.5</a:t>
-            </a:r>
-          </a:p>
-          <a:p>
-            <a:pPr marL="864000" lvl="1" indent="-324000" algn="l">
-              <a:spcBef>
-                <a:spcPts val="850"/>
-              </a:spcBef>
-              <a:buClr>
-                <a:srgbClr val="000000"/>
-              </a:buClr>
-              <a:buSzPct val="75000"/>
-              <a:buFont typeface="Symbol" charset="2"/>
-              <a:buChar char=""/>
-            </a:pPr>
-            <a:r>
-              <a:rPr lang="en-US" sz="1800" b="0" u="none" strike="noStrike" dirty="0">
-                <a:solidFill>
-                  <a:srgbClr val="000000"/>
-                </a:solidFill>
-                <a:effectLst/>
-                <a:uFillTx/>
-                <a:latin typeface="Arial"/>
-              </a:rPr>
-              <a:t>Employees traveling rarely also have roughly 2.9 times the odds of attrition compared to employees who do not travel, holding the other variables constant:</a:t>
-            </a:r>
-          </a:p>
-          <a:p>
-            <a:pPr marL="1296000" lvl="2" indent="-288000" algn="l">
-              <a:spcBef>
-                <a:spcPts val="1191"/>
-              </a:spcBef>
-              <a:spcAft>
-                <a:spcPts val="992"/>
-              </a:spcAft>
-              <a:buClr>
-                <a:srgbClr val="000000"/>
-              </a:buClr>
-              <a:buSzPct val="45000"/>
-              <a:buFont typeface="Wingdings" charset="2"/>
-              <a:buChar char=""/>
-            </a:pPr>
-            <a:r>
-              <a:rPr lang="en-US" sz="1800" b="0" u="none" strike="noStrike" dirty="0">
-                <a:solidFill>
-                  <a:srgbClr val="000000"/>
-                </a:solidFill>
-                <a:effectLst/>
-                <a:uFillTx/>
-                <a:latin typeface="Arial"/>
-              </a:rPr>
-              <a:t>E^1.05 ≈ 2.9</a:t>
-            </a:r>
-          </a:p>
-          <a:p>
-            <a:pPr marL="432000" indent="-324000" algn="l">
-              <a:spcBef>
-                <a:spcPts val="1060"/>
-              </a:spcBef>
-              <a:buClr>
-                <a:srgbClr val="000000"/>
-              </a:buClr>
-              <a:buSzPct val="45000"/>
-              <a:buFont typeface="Wingdings" charset="2"/>
-              <a:buChar char=""/>
-            </a:pPr>
-            <a:r>
-              <a:rPr lang="en-US" sz="2400" b="0" u="none" strike="noStrike" dirty="0">
-                <a:solidFill>
-                  <a:srgbClr val="000000"/>
-                </a:solidFill>
-                <a:effectLst/>
-                <a:uFillTx/>
-                <a:latin typeface="Arial"/>
-              </a:rPr>
-              <a:t>Marital Status</a:t>
-            </a:r>
-          </a:p>
-          <a:p>
-            <a:pPr marL="864000" lvl="1" indent="-324000" algn="l">
-              <a:spcBef>
-                <a:spcPts val="850"/>
-              </a:spcBef>
-              <a:buClr>
-                <a:srgbClr val="000000"/>
-              </a:buClr>
-              <a:buSzPct val="75000"/>
-              <a:buFont typeface="Symbol" charset="2"/>
-              <a:buChar char=""/>
-            </a:pPr>
-            <a:r>
-              <a:rPr lang="en-US" sz="2100" b="0" u="none" strike="noStrike" dirty="0">
-                <a:solidFill>
-                  <a:srgbClr val="000000"/>
-                </a:solidFill>
-                <a:effectLst/>
-                <a:uFillTx/>
-                <a:latin typeface="Arial"/>
-              </a:rPr>
-              <a:t>Single employees have roughly 5 times the odds of attrition compared to divorced employees, holding the over variables constant:</a:t>
-            </a:r>
-          </a:p>
-          <a:p>
-            <a:pPr marL="1296000" lvl="2" indent="-288000" algn="l">
-              <a:spcBef>
-                <a:spcPts val="1191"/>
-              </a:spcBef>
-              <a:spcAft>
-                <a:spcPts val="992"/>
-              </a:spcAft>
-              <a:buClr>
-                <a:srgbClr val="000000"/>
-              </a:buClr>
-              <a:buSzPct val="45000"/>
-              <a:buFont typeface="Wingdings" charset="2"/>
-              <a:buChar char=""/>
-            </a:pPr>
-            <a:r>
-              <a:rPr lang="en-US" sz="1800" b="0" u="none" strike="noStrike" dirty="0">
-                <a:solidFill>
-                  <a:srgbClr val="000000"/>
-                </a:solidFill>
-                <a:effectLst/>
-                <a:uFillTx/>
-                <a:latin typeface="Arial"/>
-              </a:rPr>
-              <a:t>E^1.60 ≈ 5</a:t>
-            </a:r>
-          </a:p>
-        </p:txBody>
-      </p:sp>
+      </p:pic>
     </p:spTree>
   </p:cSld>
-  <p:clrMapOvr>
-    <a:masterClrMapping/>
-  </p:clrMapOvr>
+  <mc:AlternateContent>
+    <mc:Choice Requires="p14">
+      <p:transition spd="slow" p14:dur="2000"/>
+    </mc:Choice>
+    <mc:Fallback>
+      <p:transition spd="slow"/>
+    </mc:Fallback>
+  </mc:AlternateContent>
 </p:sld>
 </file>
 
 <file path=ppt/slides/slide16.xml><?xml version="1.0" encoding="utf-8"?>
-<p:sld xmlns:a="http://schemas.openxmlformats.org/drawingml/2006/main" xmlns:r="http://schemas.openxmlformats.org/officeDocument/2006/relationships" xmlns:p="http://schemas.openxmlformats.org/presentationml/2006/main">
+<p:sld xmlns:a="http://schemas.openxmlformats.org/drawingml/2006/main" xmlns:p="http://schemas.openxmlformats.org/presentationml/2006/main" xmlns:r="http://schemas.openxmlformats.org/officeDocument/2006/relationships" xmlns:p14="http://schemas.microsoft.com/office/powerpoint/2010/main" xmlns:p15="http://schemas.microsoft.com/office/powerpoint/2012/main" xmlns:mc="http://schemas.openxmlformats.org/markup-compatibility/2006">
   <p:cSld>
     <p:spTree>
       <p:nvGrpSpPr>
@@ -3690,8 +3992,8 @@
         </p:nvSpPr>
         <p:spPr>
           <a:xfrm>
-            <a:off x="504000" y="225720"/>
-            <a:ext cx="9072000" cy="946800"/>
+            <a:off x="504000" y="225360"/>
+            <a:ext cx="9071640" cy="947160"/>
           </a:xfrm>
           <a:prstGeom prst="rect">
             <a:avLst/>
@@ -3705,22 +4007,36 @@
           <a:bodyPr lIns="0" tIns="0" rIns="0" bIns="0" anchor="ctr">
             <a:spAutoFit/>
           </a:bodyPr>
-          <a:lstStyle/>
-          <a:p>
-            <a:pPr indent="0" algn="ctr">
+          <a:p>
+            <a:pPr indent="0" algn="ctr" defTabSz="914400">
+              <a:lnSpc>
+                <a:spcPct val="90000"/>
+              </a:lnSpc>
               <a:buNone/>
-            </a:pPr>
-            <a:r>
-              <a:rPr lang="en-US" sz="3300" b="0" u="none" strike="noStrike" dirty="0">
-                <a:solidFill>
-                  <a:srgbClr val="000000"/>
-                </a:solidFill>
-                <a:effectLst/>
-                <a:uFillTx/>
-                <a:latin typeface="Arial"/>
-              </a:rPr>
-              <a:t>Conclusion</a:t>
-            </a:r>
+              <a:tabLst>
+                <a:tab pos="0" algn="l"/>
+              </a:tabLst>
+            </a:pPr>
+            <a:r>
+              <a:rPr lang="en-US" sz="3300" b="0" u="none" strike="noStrike">
+                <a:solidFill>
+                  <a:srgbClr val="000000"/>
+                </a:solidFill>
+                <a:effectLst/>
+                <a:uFillTx/>
+                <a:latin typeface="Arial"/>
+                <a:ea typeface="DejaVu Sans"/>
+              </a:rPr>
+              <a:t>Model Analysis</a:t>
+            </a:r>
+            <a:endParaRPr lang="en-US" sz="3300" b="0" u="none" strike="noStrike">
+              <a:solidFill>
+                <a:srgbClr val="000000"/>
+              </a:solidFill>
+              <a:effectLst/>
+              <a:uFillTx/>
+              <a:latin typeface="Arial"/>
+            </a:endParaRPr>
           </a:p>
         </p:txBody>
       </p:sp>
@@ -3737,7 +4053,7 @@
         <p:spPr>
           <a:xfrm>
             <a:off x="504000" y="1326600"/>
-            <a:ext cx="4536000" cy="3288240"/>
+            <a:ext cx="9071640" cy="3287880"/>
           </a:xfrm>
           <a:prstGeom prst="rect">
             <a:avLst/>
@@ -3749,193 +4065,282 @@
         </p:spPr>
         <p:txBody>
           <a:bodyPr lIns="0" tIns="0" rIns="0" bIns="0" anchor="t">
-            <a:normAutofit fontScale="77500" lnSpcReduction="20000"/>
+            <a:normAutofit lnSpcReduction="9999"/>
           </a:bodyPr>
-          <a:lstStyle/>
-          <a:p>
-            <a:pPr marL="342900" indent="-342900" algn="l">
-              <a:spcBef>
-                <a:spcPts val="1060"/>
-              </a:spcBef>
-              <a:buFont typeface="Arial" panose="020B0604020202020204" pitchFamily="34" charset="0"/>
-              <a:buChar char="•"/>
-            </a:pPr>
-            <a:r>
-              <a:rPr lang="en-US" dirty="0"/>
-              <a:t>Years Since Last Promotion</a:t>
-            </a:r>
-          </a:p>
-          <a:p>
-            <a:pPr marL="342900" indent="-342900" algn="l">
-              <a:spcBef>
-                <a:spcPts val="1060"/>
-              </a:spcBef>
-              <a:buFont typeface="Arial" panose="020B0604020202020204" pitchFamily="34" charset="0"/>
-              <a:buChar char="•"/>
-            </a:pPr>
-            <a:r>
-              <a:rPr lang="en-US" dirty="0"/>
-              <a:t>Num Companies Worked</a:t>
-            </a:r>
-          </a:p>
-          <a:p>
-            <a:pPr marL="342900" indent="-342900" algn="l">
-              <a:spcBef>
-                <a:spcPts val="1060"/>
-              </a:spcBef>
-              <a:buFont typeface="Arial" panose="020B0604020202020204" pitchFamily="34" charset="0"/>
-              <a:buChar char="•"/>
-            </a:pPr>
-            <a:r>
-              <a:rPr lang="en-US" dirty="0" err="1"/>
-              <a:t>OverTime</a:t>
-            </a:r>
-            <a:endParaRPr lang="en-US" dirty="0"/>
-          </a:p>
-          <a:p>
-            <a:pPr marL="342900" indent="-342900" algn="l">
-              <a:spcBef>
-                <a:spcPts val="1060"/>
-              </a:spcBef>
-              <a:buFont typeface="Arial" panose="020B0604020202020204" pitchFamily="34" charset="0"/>
-              <a:buChar char="•"/>
-            </a:pPr>
-            <a:r>
-              <a:rPr lang="en-US" dirty="0"/>
-              <a:t>Business Travel (Frequent)</a:t>
-            </a:r>
-          </a:p>
-          <a:p>
-            <a:pPr marL="342900" indent="-342900" algn="l">
-              <a:spcBef>
-                <a:spcPts val="1060"/>
-              </a:spcBef>
-              <a:buFont typeface="Arial" panose="020B0604020202020204" pitchFamily="34" charset="0"/>
-              <a:buChar char="•"/>
-            </a:pPr>
-            <a:r>
-              <a:rPr lang="en-US" dirty="0"/>
-              <a:t>Distance From Home</a:t>
-            </a:r>
-          </a:p>
-          <a:p>
-            <a:pPr marL="342900" indent="-342900" algn="l">
-              <a:spcBef>
-                <a:spcPts val="1060"/>
-              </a:spcBef>
-              <a:buFont typeface="Arial" panose="020B0604020202020204" pitchFamily="34" charset="0"/>
-              <a:buChar char="•"/>
-            </a:pPr>
-            <a:r>
-              <a:rPr lang="en-US" dirty="0"/>
-              <a:t>Environment Satisfaction</a:t>
-            </a:r>
-          </a:p>
-          <a:p>
-            <a:pPr marL="342900" indent="-342900" algn="l">
-              <a:spcBef>
-                <a:spcPts val="1060"/>
-              </a:spcBef>
-              <a:buFont typeface="Arial" panose="020B0604020202020204" pitchFamily="34" charset="0"/>
-              <a:buChar char="•"/>
-            </a:pPr>
-            <a:r>
-              <a:rPr lang="en-US" dirty="0"/>
-              <a:t>Job Satisfaction</a:t>
-            </a:r>
-          </a:p>
-          <a:p>
-            <a:pPr marL="342900" indent="-342900" algn="l">
-              <a:spcBef>
-                <a:spcPts val="1060"/>
-              </a:spcBef>
-              <a:buFont typeface="Arial" panose="020B0604020202020204" pitchFamily="34" charset="0"/>
-              <a:buChar char="•"/>
-            </a:pPr>
-            <a:r>
-              <a:rPr lang="en-US" dirty="0"/>
-              <a:t>Total Working Years</a:t>
-            </a:r>
-          </a:p>
-          <a:p>
-            <a:pPr marL="342900" indent="-342900" algn="l">
-              <a:spcBef>
-                <a:spcPts val="1060"/>
-              </a:spcBef>
-              <a:buFont typeface="Arial" panose="020B0604020202020204" pitchFamily="34" charset="0"/>
-              <a:buChar char="•"/>
-            </a:pPr>
-            <a:endParaRPr lang="en-US" dirty="0"/>
-          </a:p>
-          <a:p>
-            <a:pPr marL="342900" indent="-342900" algn="l">
-              <a:spcBef>
-                <a:spcPts val="1060"/>
-              </a:spcBef>
-              <a:buFont typeface="Arial" panose="020B0604020202020204" pitchFamily="34" charset="0"/>
-              <a:buChar char="•"/>
-            </a:pPr>
-            <a:endParaRPr lang="en-US" dirty="0"/>
-          </a:p>
-          <a:p>
-            <a:pPr marL="342900" indent="-342900" algn="l">
-              <a:spcBef>
-                <a:spcPts val="1060"/>
-              </a:spcBef>
-              <a:buFont typeface="Arial" panose="020B0604020202020204" pitchFamily="34" charset="0"/>
-              <a:buChar char="•"/>
-            </a:pPr>
-            <a:endParaRPr lang="en-US" dirty="0"/>
-          </a:p>
-          <a:p>
-            <a:pPr marL="342900" indent="-342900" algn="l">
-              <a:spcBef>
-                <a:spcPts val="1060"/>
-              </a:spcBef>
-              <a:buFont typeface="Arial" panose="020B0604020202020204" pitchFamily="34" charset="0"/>
-              <a:buChar char="•"/>
-            </a:pPr>
-            <a:endParaRPr lang="en-US" dirty="0"/>
-          </a:p>
-          <a:p>
-            <a:pPr marL="342900" indent="-342900" algn="l">
-              <a:spcBef>
-                <a:spcPts val="1060"/>
-              </a:spcBef>
-              <a:buFont typeface="Arial" panose="020B0604020202020204" pitchFamily="34" charset="0"/>
-              <a:buChar char="•"/>
-            </a:pPr>
-            <a:endParaRPr lang="en-US" dirty="0"/>
-          </a:p>
-          <a:p>
-            <a:pPr marL="342900" indent="-342900" algn="l">
-              <a:spcBef>
-                <a:spcPts val="1060"/>
-              </a:spcBef>
-              <a:buFont typeface="Arial" panose="020B0604020202020204" pitchFamily="34" charset="0"/>
-              <a:buChar char="•"/>
-            </a:pPr>
-            <a:endParaRPr lang="en-US" dirty="0"/>
-          </a:p>
-          <a:p>
-            <a:pPr marL="342900" indent="-342900" algn="l">
-              <a:spcBef>
-                <a:spcPts val="1060"/>
-              </a:spcBef>
-              <a:buFont typeface="Arial" panose="020B0604020202020204" pitchFamily="34" charset="0"/>
-              <a:buChar char="•"/>
-            </a:pPr>
-            <a:endParaRPr lang="en-US" dirty="0"/>
-          </a:p>
-          <a:p>
-            <a:pPr marL="342900" indent="-342900" algn="l">
-              <a:spcBef>
-                <a:spcPts val="1060"/>
-              </a:spcBef>
-              <a:buFont typeface="Arial" panose="020B0604020202020204" pitchFamily="34" charset="0"/>
-              <a:buChar char="•"/>
-            </a:pPr>
-            <a:endParaRPr lang="en-US" sz="2400" b="0" u="none" strike="noStrike" dirty="0">
+          <a:p>
+            <a:pPr marL="457200" lvl="1" indent="-324000" algn="l" defTabSz="914400">
+              <a:lnSpc>
+                <a:spcPct val="90000"/>
+              </a:lnSpc>
+              <a:spcBef>
+                <a:spcPts val="850"/>
+              </a:spcBef>
+              <a:buClr>
+                <a:srgbClr val="000000"/>
+              </a:buClr>
+              <a:buSzPct val="75000"/>
+              <a:buFont typeface="Symbol" charset="2"/>
+              <a:buChar char=""/>
+            </a:pPr>
+            <a:r>
+              <a:rPr lang="en-US" sz="2400" b="0" u="none" strike="noStrike">
+                <a:solidFill>
+                  <a:srgbClr val="000000"/>
+                </a:solidFill>
+                <a:effectLst/>
+                <a:uFillTx/>
+                <a:latin typeface="Arial"/>
+                <a:ea typeface="DejaVu Sans"/>
+              </a:rPr>
+              <a:t>Elastic Net </a:t>
+            </a:r>
+            <a:r>
+              <a:rPr lang="en-US" sz="2400" b="0" u="none" strike="noStrike">
+                <a:solidFill>
+                  <a:srgbClr val="000000"/>
+                </a:solidFill>
+                <a:effectLst/>
+                <a:uFillTx/>
+                <a:latin typeface="Arial"/>
+                <a:ea typeface="DejaVu Sans"/>
+              </a:rPr>
+              <a:t>provided the best overall balance of predictive performance and business value.</a:t>
+            </a:r>
+            <a:endParaRPr lang="en-US" sz="2400" b="0" u="none" strike="noStrike">
+              <a:solidFill>
+                <a:srgbClr val="000000"/>
+              </a:solidFill>
+              <a:effectLst/>
+              <a:uFillTx/>
+              <a:latin typeface="Arial"/>
+            </a:endParaRPr>
+          </a:p>
+          <a:p>
+            <a:pPr marL="914400" lvl="2" indent="-288000" algn="l" defTabSz="914400">
+              <a:lnSpc>
+                <a:spcPct val="90000"/>
+              </a:lnSpc>
+              <a:spcBef>
+                <a:spcPts val="638"/>
+              </a:spcBef>
+              <a:buClr>
+                <a:srgbClr val="000000"/>
+              </a:buClr>
+              <a:buSzPct val="45000"/>
+              <a:buFont typeface="Wingdings" charset="2"/>
+              <a:buChar char=""/>
+            </a:pPr>
+            <a:r>
+              <a:rPr lang="en-US" sz="2400" b="0" u="none" strike="noStrike">
+                <a:solidFill>
+                  <a:srgbClr val="000000"/>
+                </a:solidFill>
+                <a:effectLst/>
+                <a:uFillTx/>
+                <a:latin typeface="Arial"/>
+                <a:ea typeface="DejaVu Sans"/>
+              </a:rPr>
+              <a:t>Highest cross-validated business utility (tied with Ridge)</a:t>
+            </a:r>
+            <a:endParaRPr lang="en-US" sz="2400" b="0" u="none" strike="noStrike">
+              <a:solidFill>
+                <a:srgbClr val="000000"/>
+              </a:solidFill>
+              <a:effectLst/>
+              <a:uFillTx/>
+              <a:latin typeface="Arial"/>
+            </a:endParaRPr>
+          </a:p>
+          <a:p>
+            <a:pPr marL="914400" lvl="2" indent="-288000" algn="l" defTabSz="914400">
+              <a:lnSpc>
+                <a:spcPct val="90000"/>
+              </a:lnSpc>
+              <a:spcBef>
+                <a:spcPts val="638"/>
+              </a:spcBef>
+              <a:buClr>
+                <a:srgbClr val="000000"/>
+              </a:buClr>
+              <a:buSzPct val="45000"/>
+              <a:buFont typeface="Wingdings" charset="2"/>
+              <a:buChar char=""/>
+            </a:pPr>
+            <a:r>
+              <a:rPr lang="en-US" sz="2400" b="0" u="none" strike="noStrike">
+                <a:solidFill>
+                  <a:srgbClr val="000000"/>
+                </a:solidFill>
+                <a:effectLst/>
+                <a:uFillTx/>
+                <a:latin typeface="Arial"/>
+                <a:ea typeface="DejaVu Sans"/>
+              </a:rPr>
+              <a:t>Highest overall accuracy</a:t>
+            </a:r>
+            <a:endParaRPr lang="en-US" sz="2400" b="0" u="none" strike="noStrike">
+              <a:solidFill>
+                <a:srgbClr val="000000"/>
+              </a:solidFill>
+              <a:effectLst/>
+              <a:uFillTx/>
+              <a:latin typeface="Arial"/>
+            </a:endParaRPr>
+          </a:p>
+          <a:p>
+            <a:pPr marL="914400" lvl="2" indent="-288000" algn="l" defTabSz="914400">
+              <a:lnSpc>
+                <a:spcPct val="90000"/>
+              </a:lnSpc>
+              <a:spcBef>
+                <a:spcPts val="638"/>
+              </a:spcBef>
+              <a:buClr>
+                <a:srgbClr val="000000"/>
+              </a:buClr>
+              <a:buSzPct val="45000"/>
+              <a:buFont typeface="Wingdings" charset="2"/>
+              <a:buChar char=""/>
+            </a:pPr>
+            <a:r>
+              <a:rPr lang="en-US" sz="2400" b="0" u="none" strike="noStrike">
+                <a:solidFill>
+                  <a:srgbClr val="000000"/>
+                </a:solidFill>
+                <a:effectLst/>
+                <a:uFillTx/>
+                <a:latin typeface="Arial"/>
+                <a:ea typeface="DejaVu Sans"/>
+              </a:rPr>
+              <a:t>Highest precision while maintaining an AUC comparable to the other models. </a:t>
+            </a:r>
+            <a:endParaRPr lang="en-US" sz="2400" b="0" u="none" strike="noStrike">
+              <a:solidFill>
+                <a:srgbClr val="000000"/>
+              </a:solidFill>
+              <a:effectLst/>
+              <a:uFillTx/>
+              <a:latin typeface="Arial"/>
+            </a:endParaRPr>
+          </a:p>
+          <a:p>
+            <a:pPr marL="457200" lvl="1" indent="-324000" algn="l" defTabSz="914400">
+              <a:lnSpc>
+                <a:spcPct val="90000"/>
+              </a:lnSpc>
+              <a:spcBef>
+                <a:spcPts val="850"/>
+              </a:spcBef>
+              <a:buClr>
+                <a:srgbClr val="000000"/>
+              </a:buClr>
+              <a:buSzPct val="75000"/>
+              <a:buFont typeface="Symbol" charset="2"/>
+              <a:buChar char=""/>
+            </a:pPr>
+            <a:r>
+              <a:rPr lang="en-US" sz="2400" b="0" u="none" strike="noStrike">
+                <a:solidFill>
+                  <a:srgbClr val="000000"/>
+                </a:solidFill>
+                <a:effectLst/>
+                <a:uFillTx/>
+                <a:latin typeface="Arial"/>
+                <a:ea typeface="DejaVu Sans"/>
+              </a:rPr>
+              <a:t>Our analysis indicated that the dataset contained a relatively stable set of predictors with limited multicollinearity. We removed some predictors where we saw or predicted multicollinearity.</a:t>
+            </a:r>
+            <a:endParaRPr lang="en-US" sz="2400" b="0" u="none" strike="noStrike">
+              <a:solidFill>
+                <a:srgbClr val="000000"/>
+              </a:solidFill>
+              <a:effectLst/>
+              <a:uFillTx/>
+              <a:latin typeface="Arial"/>
+            </a:endParaRPr>
+          </a:p>
+        </p:txBody>
+      </p:sp>
+    </p:spTree>
+  </p:cSld>
+  <mc:AlternateContent>
+    <mc:Choice Requires="p14">
+      <p:transition spd="slow" p14:dur="2000"/>
+    </mc:Choice>
+    <mc:Fallback>
+      <p:transition spd="slow"/>
+    </mc:Fallback>
+  </mc:AlternateContent>
+</p:sld>
+</file>
+
+<file path=ppt/slides/slide17.xml><?xml version="1.0" encoding="utf-8"?>
+<p:sld xmlns:a="http://schemas.openxmlformats.org/drawingml/2006/main" xmlns:p="http://schemas.openxmlformats.org/presentationml/2006/main" xmlns:r="http://schemas.openxmlformats.org/officeDocument/2006/relationships" xmlns:p14="http://schemas.microsoft.com/office/powerpoint/2010/main" xmlns:p15="http://schemas.microsoft.com/office/powerpoint/2012/main" xmlns:mc="http://schemas.openxmlformats.org/markup-compatibility/2006">
+  <p:cSld>
+    <p:spTree>
+      <p:nvGrpSpPr>
+        <p:cNvPr id="1" name=""/>
+        <p:cNvGrpSpPr/>
+        <p:nvPr/>
+      </p:nvGrpSpPr>
+      <p:grpSpPr>
+        <a:xfrm>
+          <a:off x="0" y="0"/>
+          <a:ext cx="0" cy="0"/>
+          <a:chOff x="0" y="0"/>
+          <a:chExt cx="0" cy="0"/>
+        </a:xfrm>
+      </p:grpSpPr>
+      <p:sp>
+        <p:nvSpPr>
+          <p:cNvPr id="63" name="PlaceHolder 1"/>
+          <p:cNvSpPr>
+            <a:spLocks noGrp="1"/>
+          </p:cNvSpPr>
+          <p:nvPr>
+            <p:ph type="title"/>
+          </p:nvPr>
+        </p:nvSpPr>
+        <p:spPr>
+          <a:xfrm>
+            <a:off x="504000" y="225360"/>
+            <a:ext cx="9071640" cy="947160"/>
+          </a:xfrm>
+          <a:prstGeom prst="rect">
+            <a:avLst/>
+          </a:prstGeom>
+          <a:noFill/>
+          <a:ln w="0">
+            <a:noFill/>
+          </a:ln>
+        </p:spPr>
+        <p:txBody>
+          <a:bodyPr lIns="0" tIns="0" rIns="0" bIns="0" anchor="ctr">
+            <a:spAutoFit/>
+          </a:bodyPr>
+          <a:p>
+            <a:pPr indent="0" algn="ctr" defTabSz="914400">
+              <a:lnSpc>
+                <a:spcPct val="90000"/>
+              </a:lnSpc>
+              <a:buNone/>
+              <a:tabLst>
+                <a:tab pos="0" algn="l"/>
+              </a:tabLst>
+            </a:pPr>
+            <a:r>
+              <a:rPr lang="en-US" sz="3300" b="0" u="none" strike="noStrike">
+                <a:solidFill>
+                  <a:srgbClr val="000000"/>
+                </a:solidFill>
+                <a:effectLst/>
+                <a:uFillTx/>
+                <a:latin typeface="Arial"/>
+                <a:ea typeface="DejaVu Sans"/>
+              </a:rPr>
+              <a:t>Important Continuous Predictors</a:t>
+            </a:r>
+            <a:endParaRPr lang="en-US" sz="3300" b="0" u="none" strike="noStrike">
               <a:solidFill>
                 <a:srgbClr val="000000"/>
               </a:solidFill>
@@ -3948,22 +4353,18 @@
       </p:sp>
       <p:sp>
         <p:nvSpPr>
-          <p:cNvPr id="2" name="PlaceHolder 2">
-            <a:extLst>
-              <a:ext uri="{FF2B5EF4-FFF2-40B4-BE49-F238E27FC236}">
-                <a16:creationId xmlns:a16="http://schemas.microsoft.com/office/drawing/2014/main" id="{D9304C24-5F67-2937-74D1-DF1553F93A91}"/>
-              </a:ext>
-            </a:extLst>
-          </p:cNvPr>
-          <p:cNvSpPr txBox="1">
-            <a:spLocks/>
+          <p:cNvPr id="64" name="PlaceHolder 2"/>
+          <p:cNvSpPr>
+            <a:spLocks noGrp="1"/>
           </p:cNvSpPr>
-          <p:nvPr/>
+          <p:nvPr>
+            <p:ph/>
+          </p:nvPr>
         </p:nvSpPr>
         <p:spPr>
           <a:xfrm>
-            <a:off x="5040000" y="1326600"/>
-            <a:ext cx="4536000" cy="3288240"/>
+            <a:off x="504000" y="1326600"/>
+            <a:ext cx="9071640" cy="3930840"/>
           </a:xfrm>
           <a:prstGeom prst="rect">
             <a:avLst/>
@@ -3975,202 +4376,1448 @@
         </p:spPr>
         <p:txBody>
           <a:bodyPr lIns="0" tIns="0" rIns="0" bIns="0" anchor="t">
-            <a:normAutofit fontScale="85000" lnSpcReduction="10000"/>
+            <a:normAutofit fontScale="62500" lnSpcReduction="19999"/>
           </a:bodyPr>
-          <a:lstStyle>
-            <a:lvl1pPr indent="0" algn="ctr" defTabSz="914400" rtl="0" eaLnBrk="1" latinLnBrk="0" hangingPunct="1">
-              <a:lnSpc>
-                <a:spcPct val="90000"/>
-              </a:lnSpc>
-              <a:spcBef>
-                <a:spcPct val="0"/>
-              </a:spcBef>
-              <a:buNone/>
-              <a:defRPr lang="en-US" sz="3300" b="0" u="none" strike="noStrike" kern="1200">
-                <a:solidFill>
-                  <a:srgbClr val="000000"/>
-                </a:solidFill>
-                <a:effectLst/>
-                <a:uFillTx/>
-                <a:latin typeface="Arial"/>
-                <a:ea typeface="+mj-ea"/>
-                <a:cs typeface="+mj-cs"/>
-              </a:defRPr>
-            </a:lvl1pPr>
-          </a:lstStyle>
-          <a:p>
-            <a:pPr marL="342900" indent="-342900" algn="l">
+          <a:p>
+            <a:pPr marL="432000" indent="-324000" algn="l" defTabSz="914400">
+              <a:lnSpc>
+                <a:spcPct val="100000"/>
+              </a:lnSpc>
               <a:spcBef>
                 <a:spcPts val="1060"/>
               </a:spcBef>
-              <a:buFont typeface="Arial" panose="020B0604020202020204" pitchFamily="34" charset="0"/>
-              <a:buChar char="•"/>
-            </a:pPr>
-            <a:r>
-              <a:rPr lang="en-US" dirty="0"/>
-              <a:t>Strongest positive effect</a:t>
-            </a:r>
-          </a:p>
-          <a:p>
-            <a:pPr marL="342900" indent="-342900" algn="l">
+              <a:buClr>
+                <a:srgbClr val="000000"/>
+              </a:buClr>
+              <a:buSzPct val="45000"/>
+              <a:buFont typeface="Wingdings" charset="2"/>
+              <a:buChar char=""/>
+            </a:pPr>
+            <a:r>
+              <a:rPr lang="en-US" sz="2400" b="0" u="none" strike="noStrike">
+                <a:solidFill>
+                  <a:srgbClr val="000000"/>
+                </a:solidFill>
+                <a:effectLst/>
+                <a:uFillTx/>
+                <a:latin typeface="Arial"/>
+                <a:ea typeface="DejaVu Sans"/>
+              </a:rPr>
+              <a:t>Overtime</a:t>
+            </a:r>
+            <a:endParaRPr lang="en-US" sz="2400" b="0" u="none" strike="noStrike">
+              <a:solidFill>
+                <a:srgbClr val="000000"/>
+              </a:solidFill>
+              <a:effectLst/>
+              <a:uFillTx/>
+              <a:latin typeface="Arial"/>
+            </a:endParaRPr>
+          </a:p>
+          <a:p>
+            <a:pPr marL="864000" lvl="1" indent="-324000" algn="l" defTabSz="914400">
+              <a:lnSpc>
+                <a:spcPct val="100000"/>
+              </a:lnSpc>
+              <a:spcBef>
+                <a:spcPts val="850"/>
+              </a:spcBef>
+              <a:buClr>
+                <a:srgbClr val="000000"/>
+              </a:buClr>
+              <a:buSzPct val="75000"/>
+              <a:buFont typeface="Symbol" charset="2"/>
+              <a:buChar char=""/>
+            </a:pPr>
+            <a:r>
+              <a:rPr lang="en-US" sz="2100" b="0" u="none" strike="noStrike">
+                <a:solidFill>
+                  <a:srgbClr val="000000"/>
+                </a:solidFill>
+                <a:effectLst/>
+                <a:uFillTx/>
+                <a:latin typeface="Arial"/>
+                <a:ea typeface="DejaVu Sans"/>
+              </a:rPr>
+              <a:t>Employees working overtime have roughly 8 times the odds of attrition compared with employees who do not, holding the other variables constant:</a:t>
+            </a:r>
+            <a:endParaRPr lang="en-US" sz="2100" b="0" u="none" strike="noStrike">
+              <a:solidFill>
+                <a:srgbClr val="000000"/>
+              </a:solidFill>
+              <a:effectLst/>
+              <a:uFillTx/>
+              <a:latin typeface="Arial"/>
+            </a:endParaRPr>
+          </a:p>
+          <a:p>
+            <a:pPr marL="1296000" lvl="2" indent="-288000" algn="l" defTabSz="914400">
+              <a:lnSpc>
+                <a:spcPct val="100000"/>
+              </a:lnSpc>
+              <a:spcBef>
+                <a:spcPts val="1191"/>
+              </a:spcBef>
+              <a:spcAft>
+                <a:spcPts val="992"/>
+              </a:spcAft>
+              <a:buClr>
+                <a:srgbClr val="000000"/>
+              </a:buClr>
+              <a:buSzPct val="45000"/>
+              <a:buFont typeface="Wingdings" charset="2"/>
+              <a:buChar char=""/>
+            </a:pPr>
+            <a:r>
+              <a:rPr lang="en-US" sz="1800" b="0" u="none" strike="noStrike">
+                <a:solidFill>
+                  <a:srgbClr val="000000"/>
+                </a:solidFill>
+                <a:effectLst/>
+                <a:uFillTx/>
+                <a:latin typeface="Arial"/>
+                <a:ea typeface="DejaVu Sans"/>
+              </a:rPr>
+              <a:t>E^2.07 ≈ 7.95</a:t>
+            </a:r>
+            <a:endParaRPr lang="en-US" sz="1800" b="0" u="none" strike="noStrike">
+              <a:solidFill>
+                <a:srgbClr val="000000"/>
+              </a:solidFill>
+              <a:effectLst/>
+              <a:uFillTx/>
+              <a:latin typeface="Arial"/>
+            </a:endParaRPr>
+          </a:p>
+          <a:p>
+            <a:pPr marL="432000" indent="-324000" algn="l" defTabSz="914400">
+              <a:lnSpc>
+                <a:spcPct val="100000"/>
+              </a:lnSpc>
               <a:spcBef>
                 <a:spcPts val="1060"/>
               </a:spcBef>
-              <a:buFont typeface="Arial" panose="020B0604020202020204" pitchFamily="34" charset="0"/>
-              <a:buChar char="•"/>
-            </a:pPr>
-            <a:r>
-              <a:rPr lang="en-US" dirty="0"/>
-              <a:t>Strong positive effect</a:t>
-            </a:r>
-          </a:p>
-          <a:p>
-            <a:pPr marL="342900" indent="-342900" algn="l">
+              <a:buClr>
+                <a:srgbClr val="000000"/>
+              </a:buClr>
+              <a:buSzPct val="45000"/>
+              <a:buFont typeface="Wingdings" charset="2"/>
+              <a:buChar char=""/>
+            </a:pPr>
+            <a:r>
+              <a:rPr lang="en-US" sz="2400" b="0" u="none" strike="noStrike">
+                <a:solidFill>
+                  <a:srgbClr val="000000"/>
+                </a:solidFill>
+                <a:effectLst/>
+                <a:uFillTx/>
+                <a:latin typeface="Arial"/>
+                <a:ea typeface="DejaVu Sans"/>
+              </a:rPr>
+              <a:t>Business Travel</a:t>
+            </a:r>
+            <a:endParaRPr lang="en-US" sz="2400" b="0" u="none" strike="noStrike">
+              <a:solidFill>
+                <a:srgbClr val="000000"/>
+              </a:solidFill>
+              <a:effectLst/>
+              <a:uFillTx/>
+              <a:latin typeface="Arial"/>
+            </a:endParaRPr>
+          </a:p>
+          <a:p>
+            <a:pPr marL="864000" lvl="1" indent="-324000" algn="l" defTabSz="914400">
+              <a:lnSpc>
+                <a:spcPct val="100000"/>
+              </a:lnSpc>
+              <a:spcBef>
+                <a:spcPts val="850"/>
+              </a:spcBef>
+              <a:buClr>
+                <a:srgbClr val="000000"/>
+              </a:buClr>
+              <a:buSzPct val="75000"/>
+              <a:buFont typeface="Symbol" charset="2"/>
+              <a:buChar char=""/>
+            </a:pPr>
+            <a:r>
+              <a:rPr lang="en-US" sz="2100" b="0" u="none" strike="noStrike">
+                <a:solidFill>
+                  <a:srgbClr val="000000"/>
+                </a:solidFill>
+                <a:effectLst/>
+                <a:uFillTx/>
+                <a:latin typeface="Arial"/>
+                <a:ea typeface="DejaVu Sans"/>
+              </a:rPr>
+              <a:t>Employees traveling frequently have roughly 7.5 times the odds of attrition compared to employees who do not travel, holding the other variables constant:</a:t>
+            </a:r>
+            <a:endParaRPr lang="en-US" sz="2100" b="0" u="none" strike="noStrike">
+              <a:solidFill>
+                <a:srgbClr val="000000"/>
+              </a:solidFill>
+              <a:effectLst/>
+              <a:uFillTx/>
+              <a:latin typeface="Arial"/>
+            </a:endParaRPr>
+          </a:p>
+          <a:p>
+            <a:pPr marL="1296000" lvl="2" indent="-288000" algn="l" defTabSz="914400">
+              <a:lnSpc>
+                <a:spcPct val="100000"/>
+              </a:lnSpc>
+              <a:spcBef>
+                <a:spcPts val="1191"/>
+              </a:spcBef>
+              <a:spcAft>
+                <a:spcPts val="992"/>
+              </a:spcAft>
+              <a:buClr>
+                <a:srgbClr val="000000"/>
+              </a:buClr>
+              <a:buSzPct val="45000"/>
+              <a:buFont typeface="Wingdings" charset="2"/>
+              <a:buChar char=""/>
+            </a:pPr>
+            <a:r>
+              <a:rPr lang="en-US" sz="1800" b="0" u="none" strike="noStrike">
+                <a:solidFill>
+                  <a:srgbClr val="000000"/>
+                </a:solidFill>
+                <a:effectLst/>
+                <a:uFillTx/>
+                <a:latin typeface="Arial"/>
+                <a:ea typeface="DejaVu Sans"/>
+              </a:rPr>
+              <a:t>E^2.02 ≈ 7.5</a:t>
+            </a:r>
+            <a:endParaRPr lang="en-US" sz="1800" b="0" u="none" strike="noStrike">
+              <a:solidFill>
+                <a:srgbClr val="000000"/>
+              </a:solidFill>
+              <a:effectLst/>
+              <a:uFillTx/>
+              <a:latin typeface="Arial"/>
+            </a:endParaRPr>
+          </a:p>
+          <a:p>
+            <a:pPr marL="864000" lvl="1" indent="-324000" algn="l" defTabSz="914400">
+              <a:lnSpc>
+                <a:spcPct val="100000"/>
+              </a:lnSpc>
+              <a:spcBef>
+                <a:spcPts val="850"/>
+              </a:spcBef>
+              <a:buClr>
+                <a:srgbClr val="000000"/>
+              </a:buClr>
+              <a:buSzPct val="75000"/>
+              <a:buFont typeface="Symbol" charset="2"/>
+              <a:buChar char=""/>
+            </a:pPr>
+            <a:r>
+              <a:rPr lang="en-US" sz="1800" b="0" u="none" strike="noStrike">
+                <a:solidFill>
+                  <a:srgbClr val="000000"/>
+                </a:solidFill>
+                <a:effectLst/>
+                <a:uFillTx/>
+                <a:latin typeface="Arial"/>
+                <a:ea typeface="DejaVu Sans"/>
+              </a:rPr>
+              <a:t>Employees traveling rarely also have roughly 2.9 times the odds of attrition compared to employees who do not travel, holding the other variables constant:</a:t>
+            </a:r>
+            <a:endParaRPr lang="en-US" sz="1800" b="0" u="none" strike="noStrike">
+              <a:solidFill>
+                <a:srgbClr val="000000"/>
+              </a:solidFill>
+              <a:effectLst/>
+              <a:uFillTx/>
+              <a:latin typeface="Arial"/>
+            </a:endParaRPr>
+          </a:p>
+          <a:p>
+            <a:pPr marL="1296000" lvl="2" indent="-288000" algn="l" defTabSz="914400">
+              <a:lnSpc>
+                <a:spcPct val="100000"/>
+              </a:lnSpc>
+              <a:spcBef>
+                <a:spcPts val="1191"/>
+              </a:spcBef>
+              <a:spcAft>
+                <a:spcPts val="992"/>
+              </a:spcAft>
+              <a:buClr>
+                <a:srgbClr val="000000"/>
+              </a:buClr>
+              <a:buSzPct val="45000"/>
+              <a:buFont typeface="Wingdings" charset="2"/>
+              <a:buChar char=""/>
+            </a:pPr>
+            <a:r>
+              <a:rPr lang="en-US" sz="1800" b="0" u="none" strike="noStrike">
+                <a:solidFill>
+                  <a:srgbClr val="000000"/>
+                </a:solidFill>
+                <a:effectLst/>
+                <a:uFillTx/>
+                <a:latin typeface="Arial"/>
+                <a:ea typeface="DejaVu Sans"/>
+              </a:rPr>
+              <a:t>E^1.05 ≈ 2.9</a:t>
+            </a:r>
+            <a:endParaRPr lang="en-US" sz="1800" b="0" u="none" strike="noStrike">
+              <a:solidFill>
+                <a:srgbClr val="000000"/>
+              </a:solidFill>
+              <a:effectLst/>
+              <a:uFillTx/>
+              <a:latin typeface="Arial"/>
+            </a:endParaRPr>
+          </a:p>
+          <a:p>
+            <a:pPr marL="432000" indent="-324000" algn="l" defTabSz="914400">
+              <a:lnSpc>
+                <a:spcPct val="100000"/>
+              </a:lnSpc>
               <a:spcBef>
                 <a:spcPts val="1060"/>
               </a:spcBef>
-              <a:buFont typeface="Arial" panose="020B0604020202020204" pitchFamily="34" charset="0"/>
-              <a:buChar char="•"/>
-            </a:pPr>
-            <a:r>
-              <a:rPr lang="en-US" dirty="0"/>
-              <a:t>Moderate positive effect</a:t>
-            </a:r>
-          </a:p>
-          <a:p>
-            <a:pPr marL="342900" indent="-342900" algn="l">
-              <a:spcBef>
-                <a:spcPts val="1060"/>
-              </a:spcBef>
-              <a:buFont typeface="Arial" panose="020B0604020202020204" pitchFamily="34" charset="0"/>
-              <a:buChar char="•"/>
-            </a:pPr>
-            <a:r>
-              <a:rPr lang="en-US" dirty="0"/>
-              <a:t>Moderate positive effect</a:t>
-            </a:r>
-          </a:p>
-          <a:p>
-            <a:pPr marL="342900" indent="-342900" algn="l">
-              <a:spcBef>
-                <a:spcPts val="1060"/>
-              </a:spcBef>
-              <a:buFont typeface="Arial" panose="020B0604020202020204" pitchFamily="34" charset="0"/>
-              <a:buChar char="•"/>
-            </a:pPr>
-            <a:r>
-              <a:rPr lang="en-US" dirty="0"/>
-              <a:t>strong negative effect</a:t>
-            </a:r>
-          </a:p>
-          <a:p>
-            <a:pPr marL="342900" indent="-342900" algn="l">
-              <a:spcBef>
-                <a:spcPts val="1060"/>
-              </a:spcBef>
-              <a:buFont typeface="Arial" panose="020B0604020202020204" pitchFamily="34" charset="0"/>
-              <a:buChar char="•"/>
-            </a:pPr>
-            <a:r>
-              <a:rPr lang="en-US" dirty="0"/>
-              <a:t>Negative effect</a:t>
-            </a:r>
-          </a:p>
-          <a:p>
-            <a:pPr marL="342900" indent="-342900" algn="l">
-              <a:spcBef>
-                <a:spcPts val="1060"/>
-              </a:spcBef>
-              <a:buFont typeface="Arial" panose="020B0604020202020204" pitchFamily="34" charset="0"/>
-              <a:buChar char="•"/>
-            </a:pPr>
-            <a:r>
-              <a:rPr lang="en-US" dirty="0"/>
-              <a:t>Negative effect</a:t>
-            </a:r>
-          </a:p>
-          <a:p>
-            <a:pPr marL="342900" indent="-342900" algn="l">
-              <a:spcBef>
-                <a:spcPts val="1060"/>
-              </a:spcBef>
-              <a:buFont typeface="Arial" panose="020B0604020202020204" pitchFamily="34" charset="0"/>
-              <a:buChar char="•"/>
-            </a:pPr>
-            <a:endParaRPr lang="en-US" dirty="0"/>
-          </a:p>
-          <a:p>
-            <a:pPr marL="342900" indent="-342900" algn="l">
-              <a:spcBef>
-                <a:spcPts val="1060"/>
-              </a:spcBef>
-              <a:buFont typeface="Arial" panose="020B0604020202020204" pitchFamily="34" charset="0"/>
-              <a:buChar char="•"/>
-            </a:pPr>
-            <a:endParaRPr lang="en-US" dirty="0"/>
-          </a:p>
-          <a:p>
-            <a:pPr marL="342900" indent="-342900" algn="l">
-              <a:spcBef>
-                <a:spcPts val="1060"/>
-              </a:spcBef>
-              <a:buFont typeface="Arial" panose="020B0604020202020204" pitchFamily="34" charset="0"/>
-              <a:buChar char="•"/>
-            </a:pPr>
-            <a:endParaRPr lang="en-US" dirty="0"/>
-          </a:p>
-          <a:p>
-            <a:pPr marL="342900" indent="-342900" algn="l">
-              <a:spcBef>
-                <a:spcPts val="1060"/>
-              </a:spcBef>
-              <a:buFont typeface="Arial" panose="020B0604020202020204" pitchFamily="34" charset="0"/>
-              <a:buChar char="•"/>
-            </a:pPr>
-            <a:endParaRPr lang="en-US" dirty="0"/>
-          </a:p>
-          <a:p>
-            <a:pPr marL="342900" indent="-342900" algn="l">
-              <a:spcBef>
-                <a:spcPts val="1060"/>
-              </a:spcBef>
-              <a:buFont typeface="Arial" panose="020B0604020202020204" pitchFamily="34" charset="0"/>
-              <a:buChar char="•"/>
-            </a:pPr>
-            <a:endParaRPr lang="en-US" dirty="0"/>
-          </a:p>
-          <a:p>
-            <a:pPr marL="342900" indent="-342900" algn="l">
-              <a:spcBef>
-                <a:spcPts val="1060"/>
-              </a:spcBef>
-              <a:buFont typeface="Arial" panose="020B0604020202020204" pitchFamily="34" charset="0"/>
-              <a:buChar char="•"/>
-            </a:pPr>
-            <a:endParaRPr lang="en-US" dirty="0"/>
-          </a:p>
-          <a:p>
-            <a:pPr marL="342900" indent="-342900" algn="l">
-              <a:spcBef>
-                <a:spcPts val="1060"/>
-              </a:spcBef>
-              <a:buFont typeface="Arial" panose="020B0604020202020204" pitchFamily="34" charset="0"/>
-              <a:buChar char="•"/>
-            </a:pPr>
-            <a:endParaRPr lang="en-US" sz="2400" dirty="0"/>
+              <a:buClr>
+                <a:srgbClr val="000000"/>
+              </a:buClr>
+              <a:buSzPct val="45000"/>
+              <a:buFont typeface="Wingdings" charset="2"/>
+              <a:buChar char=""/>
+            </a:pPr>
+            <a:r>
+              <a:rPr lang="en-US" sz="2400" b="0" u="none" strike="noStrike">
+                <a:solidFill>
+                  <a:srgbClr val="000000"/>
+                </a:solidFill>
+                <a:effectLst/>
+                <a:uFillTx/>
+                <a:latin typeface="Arial"/>
+                <a:ea typeface="DejaVu Sans"/>
+              </a:rPr>
+              <a:t>Marital Status</a:t>
+            </a:r>
+            <a:endParaRPr lang="en-US" sz="2400" b="0" u="none" strike="noStrike">
+              <a:solidFill>
+                <a:srgbClr val="000000"/>
+              </a:solidFill>
+              <a:effectLst/>
+              <a:uFillTx/>
+              <a:latin typeface="Arial"/>
+            </a:endParaRPr>
+          </a:p>
+          <a:p>
+            <a:pPr marL="864000" lvl="1" indent="-324000" algn="l" defTabSz="914400">
+              <a:lnSpc>
+                <a:spcPct val="100000"/>
+              </a:lnSpc>
+              <a:spcBef>
+                <a:spcPts val="850"/>
+              </a:spcBef>
+              <a:buClr>
+                <a:srgbClr val="000000"/>
+              </a:buClr>
+              <a:buSzPct val="75000"/>
+              <a:buFont typeface="Symbol" charset="2"/>
+              <a:buChar char=""/>
+            </a:pPr>
+            <a:r>
+              <a:rPr lang="en-US" sz="2100" b="0" u="none" strike="noStrike">
+                <a:solidFill>
+                  <a:srgbClr val="000000"/>
+                </a:solidFill>
+                <a:effectLst/>
+                <a:uFillTx/>
+                <a:latin typeface="Arial"/>
+                <a:ea typeface="DejaVu Sans"/>
+              </a:rPr>
+              <a:t>Single employees have roughly 5 times the odds of attrition compared to divorced employees, holding the over variables constant:</a:t>
+            </a:r>
+            <a:endParaRPr lang="en-US" sz="2100" b="0" u="none" strike="noStrike">
+              <a:solidFill>
+                <a:srgbClr val="000000"/>
+              </a:solidFill>
+              <a:effectLst/>
+              <a:uFillTx/>
+              <a:latin typeface="Arial"/>
+            </a:endParaRPr>
+          </a:p>
+          <a:p>
+            <a:pPr marL="1296000" lvl="2" indent="-288000" algn="l" defTabSz="914400">
+              <a:lnSpc>
+                <a:spcPct val="100000"/>
+              </a:lnSpc>
+              <a:spcBef>
+                <a:spcPts val="1191"/>
+              </a:spcBef>
+              <a:spcAft>
+                <a:spcPts val="992"/>
+              </a:spcAft>
+              <a:buClr>
+                <a:srgbClr val="000000"/>
+              </a:buClr>
+              <a:buSzPct val="45000"/>
+              <a:buFont typeface="Wingdings" charset="2"/>
+              <a:buChar char=""/>
+            </a:pPr>
+            <a:r>
+              <a:rPr lang="en-US" sz="1800" b="0" u="none" strike="noStrike">
+                <a:solidFill>
+                  <a:srgbClr val="000000"/>
+                </a:solidFill>
+                <a:effectLst/>
+                <a:uFillTx/>
+                <a:latin typeface="Arial"/>
+                <a:ea typeface="DejaVu Sans"/>
+              </a:rPr>
+              <a:t>E^1.60 ≈ 5</a:t>
+            </a:r>
+            <a:endParaRPr lang="en-US" sz="1800" b="0" u="none" strike="noStrike">
+              <a:solidFill>
+                <a:srgbClr val="000000"/>
+              </a:solidFill>
+              <a:effectLst/>
+              <a:uFillTx/>
+              <a:latin typeface="Arial"/>
+            </a:endParaRPr>
           </a:p>
         </p:txBody>
       </p:sp>
     </p:spTree>
   </p:cSld>
-  <p:clrMapOvr>
-    <a:masterClrMapping/>
-  </p:clrMapOvr>
+  <mc:AlternateContent>
+    <mc:Choice Requires="p14">
+      <p:transition spd="slow" p14:dur="2000"/>
+    </mc:Choice>
+    <mc:Fallback>
+      <p:transition spd="slow"/>
+    </mc:Fallback>
+  </mc:AlternateContent>
+</p:sld>
+</file>
+
+<file path=ppt/slides/slide18.xml><?xml version="1.0" encoding="utf-8"?>
+<p:sld xmlns:a="http://schemas.openxmlformats.org/drawingml/2006/main" xmlns:p="http://schemas.openxmlformats.org/presentationml/2006/main" xmlns:r="http://schemas.openxmlformats.org/officeDocument/2006/relationships" xmlns:p14="http://schemas.microsoft.com/office/powerpoint/2010/main" xmlns:p15="http://schemas.microsoft.com/office/powerpoint/2012/main" xmlns:mc="http://schemas.openxmlformats.org/markup-compatibility/2006">
+  <p:cSld>
+    <p:spTree>
+      <p:nvGrpSpPr>
+        <p:cNvPr id="1" name=""/>
+        <p:cNvGrpSpPr/>
+        <p:nvPr/>
+      </p:nvGrpSpPr>
+      <p:grpSpPr>
+        <a:xfrm>
+          <a:off x="0" y="0"/>
+          <a:ext cx="0" cy="0"/>
+          <a:chOff x="0" y="0"/>
+          <a:chExt cx="0" cy="0"/>
+        </a:xfrm>
+      </p:grpSpPr>
+      <p:sp>
+        <p:nvSpPr>
+          <p:cNvPr id="65" name="PlaceHolder 1"/>
+          <p:cNvSpPr>
+            <a:spLocks noGrp="1"/>
+          </p:cNvSpPr>
+          <p:nvPr>
+            <p:ph type="title"/>
+          </p:nvPr>
+        </p:nvSpPr>
+        <p:spPr>
+          <a:xfrm>
+            <a:off x="504000" y="225360"/>
+            <a:ext cx="9071640" cy="947160"/>
+          </a:xfrm>
+          <a:prstGeom prst="rect">
+            <a:avLst/>
+          </a:prstGeom>
+          <a:noFill/>
+          <a:ln w="0">
+            <a:noFill/>
+          </a:ln>
+        </p:spPr>
+        <p:txBody>
+          <a:bodyPr lIns="0" tIns="0" rIns="0" bIns="0" anchor="ctr">
+            <a:spAutoFit/>
+          </a:bodyPr>
+          <a:p>
+            <a:pPr indent="0" algn="ctr" defTabSz="914400">
+              <a:lnSpc>
+                <a:spcPct val="90000"/>
+              </a:lnSpc>
+              <a:buNone/>
+              <a:tabLst>
+                <a:tab pos="0" algn="l"/>
+              </a:tabLst>
+            </a:pPr>
+            <a:r>
+              <a:rPr lang="en-US" sz="3300" b="0" u="none" strike="noStrike">
+                <a:solidFill>
+                  <a:srgbClr val="000000"/>
+                </a:solidFill>
+                <a:effectLst/>
+                <a:uFillTx/>
+                <a:latin typeface="Arial"/>
+                <a:ea typeface="DejaVu Sans"/>
+              </a:rPr>
+              <a:t>Conclusion</a:t>
+            </a:r>
+            <a:endParaRPr lang="en-US" sz="3300" b="0" u="none" strike="noStrike">
+              <a:solidFill>
+                <a:srgbClr val="000000"/>
+              </a:solidFill>
+              <a:effectLst/>
+              <a:uFillTx/>
+              <a:latin typeface="Arial"/>
+            </a:endParaRPr>
+          </a:p>
+        </p:txBody>
+      </p:sp>
+      <p:graphicFrame>
+        <p:nvGraphicFramePr>
+          <p:cNvPr id="66" name=""/>
+          <p:cNvGraphicFramePr/>
+          <p:nvPr/>
+        </p:nvGraphicFramePr>
+        <p:xfrm>
+          <a:off x="1535040" y="968040"/>
+          <a:ext cx="6858000" cy="3678480"/>
+        </p:xfrm>
+        <a:graphic>
+          <a:graphicData uri="http://schemas.openxmlformats.org/drawingml/2006/table">
+            <a:tbl>
+              <a:tblPr/>
+              <a:tblGrid>
+                <a:gridCol w="3432960"/>
+                <a:gridCol w="3425040"/>
+              </a:tblGrid>
+              <a:tr h="412200">
+                <a:tc>
+                  <a:txBody>
+                    <a:bodyPr lIns="36000" tIns="36000" rIns="36000" bIns="36000" anchor="t">
+                      <a:noAutofit/>
+                    </a:bodyPr>
+                    <a:p>
+                      <a:r>
+                        <a:rPr lang="en-US" sz="1800" b="0" u="none" strike="noStrike">
+                          <a:solidFill>
+                            <a:srgbClr val="000000"/>
+                          </a:solidFill>
+                          <a:effectLst/>
+                          <a:uFillTx/>
+                          <a:latin typeface="Arial"/>
+                          <a:ea typeface="DejaVu Sans"/>
+                        </a:rPr>
+                        <a:t>Years Since Last Promotion</a:t>
+                      </a:r>
+                      <a:endParaRPr lang="en-US" sz="1800" b="0" u="none" strike="noStrike">
+                        <a:solidFill>
+                          <a:srgbClr val="000000"/>
+                        </a:solidFill>
+                        <a:effectLst/>
+                        <a:uFillTx/>
+                        <a:latin typeface="Arial"/>
+                      </a:endParaRPr>
+                    </a:p>
+                  </a:txBody>
+                  <a:tcPr anchor="t" marL="36000" marR="36000" marT="36000" marB="36000">
+                    <a:lnL w="7200">
+                      <a:solidFill>
+                        <a:srgbClr val="000000"/>
+                      </a:solidFill>
+                      <a:prstDash val="solid"/>
+                    </a:lnL>
+                    <a:lnR w="7200">
+                      <a:solidFill>
+                        <a:srgbClr val="000000"/>
+                      </a:solidFill>
+                      <a:prstDash val="solid"/>
+                    </a:lnR>
+                    <a:lnT w="7200">
+                      <a:solidFill>
+                        <a:srgbClr val="000000"/>
+                      </a:solidFill>
+                      <a:prstDash val="solid"/>
+                    </a:lnT>
+                    <a:lnB w="7200">
+                      <a:solidFill>
+                        <a:srgbClr val="000000"/>
+                      </a:solidFill>
+                      <a:prstDash val="solid"/>
+                    </a:lnB>
+                    <a:noFill/>
+                  </a:tcPr>
+                </a:tc>
+                <a:tc>
+                  <a:txBody>
+                    <a:bodyPr lIns="36000" tIns="36000" rIns="36000" bIns="36000" anchor="t">
+                      <a:noAutofit/>
+                    </a:bodyPr>
+                    <a:p>
+                      <a:r>
+                        <a:rPr lang="en-US" sz="1800" b="0" u="none" strike="noStrike">
+                          <a:solidFill>
+                            <a:srgbClr val="000000"/>
+                          </a:solidFill>
+                          <a:effectLst/>
+                          <a:uFillTx/>
+                          <a:latin typeface="Arial"/>
+                        </a:rPr>
+                        <a:t>Strongest Positive Effect</a:t>
+                      </a:r>
+                      <a:endParaRPr lang="en-US" sz="1800" b="0" u="none" strike="noStrike">
+                        <a:solidFill>
+                          <a:srgbClr val="000000"/>
+                        </a:solidFill>
+                        <a:effectLst/>
+                        <a:uFillTx/>
+                        <a:latin typeface="Arial"/>
+                      </a:endParaRPr>
+                    </a:p>
+                  </a:txBody>
+                  <a:tcPr anchor="t" marL="36000" marR="36000" marT="36000" marB="36000">
+                    <a:lnL w="7200">
+                      <a:solidFill>
+                        <a:srgbClr val="000000"/>
+                      </a:solidFill>
+                      <a:prstDash val="solid"/>
+                    </a:lnL>
+                    <a:lnR w="7200">
+                      <a:solidFill>
+                        <a:srgbClr val="000000"/>
+                      </a:solidFill>
+                      <a:prstDash val="solid"/>
+                    </a:lnR>
+                    <a:lnT w="7200">
+                      <a:solidFill>
+                        <a:srgbClr val="000000"/>
+                      </a:solidFill>
+                      <a:prstDash val="solid"/>
+                    </a:lnT>
+                    <a:lnB w="7200">
+                      <a:solidFill>
+                        <a:srgbClr val="000000"/>
+                      </a:solidFill>
+                      <a:prstDash val="solid"/>
+                    </a:lnB>
+                    <a:noFill/>
+                  </a:tcPr>
+                </a:tc>
+              </a:tr>
+              <a:tr h="408960">
+                <a:tc>
+                  <a:txBody>
+                    <a:bodyPr lIns="36000" tIns="36000" rIns="36000" bIns="36000" anchor="t">
+                      <a:noAutofit/>
+                    </a:bodyPr>
+                    <a:p>
+                      <a:pPr defTabSz="914400">
+                        <a:lnSpc>
+                          <a:spcPct val="100000"/>
+                        </a:lnSpc>
+                      </a:pPr>
+                      <a:r>
+                        <a:rPr lang="en-US" sz="1800" b="0" u="none" strike="noStrike">
+                          <a:solidFill>
+                            <a:srgbClr val="000000"/>
+                          </a:solidFill>
+                          <a:effectLst/>
+                          <a:uFillTx/>
+                          <a:latin typeface="Arial"/>
+                          <a:ea typeface="DejaVu Sans"/>
+                        </a:rPr>
+                        <a:t>Number of companies worked</a:t>
+                      </a:r>
+                      <a:endParaRPr lang="en-US" sz="1800" b="0" u="none" strike="noStrike">
+                        <a:solidFill>
+                          <a:srgbClr val="000000"/>
+                        </a:solidFill>
+                        <a:effectLst/>
+                        <a:uFillTx/>
+                        <a:latin typeface="Arial"/>
+                      </a:endParaRPr>
+                    </a:p>
+                  </a:txBody>
+                  <a:tcPr anchor="t" marL="36000" marR="36000" marT="36000" marB="36000">
+                    <a:lnL w="7200">
+                      <a:solidFill>
+                        <a:srgbClr val="000000"/>
+                      </a:solidFill>
+                      <a:prstDash val="solid"/>
+                    </a:lnL>
+                    <a:lnR w="7200">
+                      <a:solidFill>
+                        <a:srgbClr val="000000"/>
+                      </a:solidFill>
+                      <a:prstDash val="solid"/>
+                    </a:lnR>
+                    <a:lnT w="7200">
+                      <a:solidFill>
+                        <a:srgbClr val="000000"/>
+                      </a:solidFill>
+                      <a:prstDash val="solid"/>
+                    </a:lnT>
+                    <a:lnB w="7200">
+                      <a:solidFill>
+                        <a:srgbClr val="000000"/>
+                      </a:solidFill>
+                      <a:prstDash val="solid"/>
+                    </a:lnB>
+                    <a:noFill/>
+                  </a:tcPr>
+                </a:tc>
+                <a:tc>
+                  <a:txBody>
+                    <a:bodyPr lIns="36000" tIns="36000" rIns="36000" bIns="36000" anchor="t">
+                      <a:noAutofit/>
+                    </a:bodyPr>
+                    <a:p>
+                      <a:r>
+                        <a:rPr lang="en-US" sz="1800" b="0" u="none" strike="noStrike">
+                          <a:solidFill>
+                            <a:srgbClr val="000000"/>
+                          </a:solidFill>
+                          <a:effectLst/>
+                          <a:uFillTx/>
+                          <a:latin typeface="Arial"/>
+                        </a:rPr>
+                        <a:t>Strong Positive Effect</a:t>
+                      </a:r>
+                      <a:endParaRPr lang="en-US" sz="1800" b="0" u="none" strike="noStrike">
+                        <a:solidFill>
+                          <a:srgbClr val="000000"/>
+                        </a:solidFill>
+                        <a:effectLst/>
+                        <a:uFillTx/>
+                        <a:latin typeface="Arial"/>
+                      </a:endParaRPr>
+                    </a:p>
+                  </a:txBody>
+                  <a:tcPr anchor="t" marL="36000" marR="36000" marT="36000" marB="36000">
+                    <a:lnL w="7200">
+                      <a:solidFill>
+                        <a:srgbClr val="000000"/>
+                      </a:solidFill>
+                      <a:prstDash val="solid"/>
+                    </a:lnL>
+                    <a:lnR w="7200">
+                      <a:solidFill>
+                        <a:srgbClr val="000000"/>
+                      </a:solidFill>
+                      <a:prstDash val="solid"/>
+                    </a:lnR>
+                    <a:lnT w="7200">
+                      <a:solidFill>
+                        <a:srgbClr val="000000"/>
+                      </a:solidFill>
+                      <a:prstDash val="solid"/>
+                    </a:lnT>
+                    <a:lnB w="7200">
+                      <a:solidFill>
+                        <a:srgbClr val="000000"/>
+                      </a:solidFill>
+                      <a:prstDash val="solid"/>
+                    </a:lnB>
+                    <a:noFill/>
+                  </a:tcPr>
+                </a:tc>
+              </a:tr>
+              <a:tr h="402480">
+                <a:tc>
+                  <a:txBody>
+                    <a:bodyPr lIns="36000" tIns="36000" rIns="36000" bIns="36000" anchor="t">
+                      <a:noAutofit/>
+                    </a:bodyPr>
+                    <a:p>
+                      <a:r>
+                        <a:rPr lang="en-US" sz="1800" b="0" u="none" strike="noStrike">
+                          <a:solidFill>
+                            <a:srgbClr val="000000"/>
+                          </a:solidFill>
+                          <a:effectLst/>
+                          <a:uFillTx/>
+                          <a:latin typeface="Arial"/>
+                        </a:rPr>
+                        <a:t>Overtime</a:t>
+                      </a:r>
+                      <a:endParaRPr lang="en-US" sz="1800" b="0" u="none" strike="noStrike">
+                        <a:solidFill>
+                          <a:srgbClr val="000000"/>
+                        </a:solidFill>
+                        <a:effectLst/>
+                        <a:uFillTx/>
+                        <a:latin typeface="Arial"/>
+                      </a:endParaRPr>
+                    </a:p>
+                  </a:txBody>
+                  <a:tcPr anchor="t" marL="36000" marR="36000" marT="36000" marB="36000">
+                    <a:lnL w="7200">
+                      <a:solidFill>
+                        <a:srgbClr val="000000"/>
+                      </a:solidFill>
+                      <a:prstDash val="solid"/>
+                    </a:lnL>
+                    <a:lnR w="7200">
+                      <a:solidFill>
+                        <a:srgbClr val="000000"/>
+                      </a:solidFill>
+                      <a:prstDash val="solid"/>
+                    </a:lnR>
+                    <a:lnT w="7200">
+                      <a:solidFill>
+                        <a:srgbClr val="000000"/>
+                      </a:solidFill>
+                      <a:prstDash val="solid"/>
+                    </a:lnT>
+                    <a:lnB w="7200">
+                      <a:solidFill>
+                        <a:srgbClr val="000000"/>
+                      </a:solidFill>
+                      <a:prstDash val="solid"/>
+                    </a:lnB>
+                    <a:noFill/>
+                  </a:tcPr>
+                </a:tc>
+                <a:tc>
+                  <a:txBody>
+                    <a:bodyPr lIns="36000" tIns="36000" rIns="36000" bIns="36000" anchor="t">
+                      <a:noAutofit/>
+                    </a:bodyPr>
+                    <a:p>
+                      <a:r>
+                        <a:rPr lang="en-US" sz="1800" b="0" u="none" strike="noStrike">
+                          <a:solidFill>
+                            <a:srgbClr val="000000"/>
+                          </a:solidFill>
+                          <a:effectLst/>
+                          <a:uFillTx/>
+                          <a:latin typeface="Arial"/>
+                        </a:rPr>
+                        <a:t>Moderate Positive Effect</a:t>
+                      </a:r>
+                      <a:endParaRPr lang="en-US" sz="1800" b="0" u="none" strike="noStrike">
+                        <a:solidFill>
+                          <a:srgbClr val="000000"/>
+                        </a:solidFill>
+                        <a:effectLst/>
+                        <a:uFillTx/>
+                        <a:latin typeface="Arial"/>
+                      </a:endParaRPr>
+                    </a:p>
+                  </a:txBody>
+                  <a:tcPr anchor="t" marL="36000" marR="36000" marT="36000" marB="36000">
+                    <a:lnL w="7200">
+                      <a:solidFill>
+                        <a:srgbClr val="000000"/>
+                      </a:solidFill>
+                      <a:prstDash val="solid"/>
+                    </a:lnL>
+                    <a:lnR w="7200">
+                      <a:solidFill>
+                        <a:srgbClr val="000000"/>
+                      </a:solidFill>
+                      <a:prstDash val="solid"/>
+                    </a:lnR>
+                    <a:lnT w="7200">
+                      <a:solidFill>
+                        <a:srgbClr val="000000"/>
+                      </a:solidFill>
+                      <a:prstDash val="solid"/>
+                    </a:lnT>
+                    <a:lnB w="7200">
+                      <a:solidFill>
+                        <a:srgbClr val="000000"/>
+                      </a:solidFill>
+                      <a:prstDash val="solid"/>
+                    </a:lnB>
+                    <a:noFill/>
+                  </a:tcPr>
+                </a:tc>
+              </a:tr>
+              <a:tr h="490680">
+                <a:tc>
+                  <a:txBody>
+                    <a:bodyPr lIns="36000" tIns="36000" rIns="36000" bIns="36000" anchor="t">
+                      <a:noAutofit/>
+                    </a:bodyPr>
+                    <a:p>
+                      <a:r>
+                        <a:rPr lang="en-US" sz="1800" b="0" u="none" strike="noStrike">
+                          <a:solidFill>
+                            <a:srgbClr val="000000"/>
+                          </a:solidFill>
+                          <a:effectLst/>
+                          <a:uFillTx/>
+                          <a:latin typeface="Arial"/>
+                        </a:rPr>
+                        <a:t>Business Travel (Frequent)</a:t>
+                      </a:r>
+                      <a:endParaRPr lang="en-US" sz="1800" b="0" u="none" strike="noStrike">
+                        <a:solidFill>
+                          <a:srgbClr val="000000"/>
+                        </a:solidFill>
+                        <a:effectLst/>
+                        <a:uFillTx/>
+                        <a:latin typeface="Arial"/>
+                      </a:endParaRPr>
+                    </a:p>
+                  </a:txBody>
+                  <a:tcPr anchor="t" marL="36000" marR="36000" marT="36000" marB="36000">
+                    <a:lnL w="7200">
+                      <a:solidFill>
+                        <a:srgbClr val="000000"/>
+                      </a:solidFill>
+                      <a:prstDash val="solid"/>
+                    </a:lnL>
+                    <a:lnR w="7200">
+                      <a:solidFill>
+                        <a:srgbClr val="000000"/>
+                      </a:solidFill>
+                      <a:prstDash val="solid"/>
+                    </a:lnR>
+                    <a:lnT w="7200">
+                      <a:solidFill>
+                        <a:srgbClr val="000000"/>
+                      </a:solidFill>
+                      <a:prstDash val="solid"/>
+                    </a:lnT>
+                    <a:lnB w="7200">
+                      <a:solidFill>
+                        <a:srgbClr val="000000"/>
+                      </a:solidFill>
+                      <a:prstDash val="solid"/>
+                    </a:lnB>
+                    <a:noFill/>
+                  </a:tcPr>
+                </a:tc>
+                <a:tc>
+                  <a:txBody>
+                    <a:bodyPr lIns="36000" tIns="36000" rIns="36000" bIns="36000" anchor="t">
+                      <a:noAutofit/>
+                    </a:bodyPr>
+                    <a:p>
+                      <a:r>
+                        <a:rPr lang="en-US" sz="1800" b="0" u="none" strike="noStrike">
+                          <a:solidFill>
+                            <a:srgbClr val="000000"/>
+                          </a:solidFill>
+                          <a:effectLst/>
+                          <a:uFillTx/>
+                          <a:latin typeface="Arial"/>
+                        </a:rPr>
+                        <a:t>Moderate Positive Effect</a:t>
+                      </a:r>
+                      <a:endParaRPr lang="en-US" sz="1800" b="0" u="none" strike="noStrike">
+                        <a:solidFill>
+                          <a:srgbClr val="000000"/>
+                        </a:solidFill>
+                        <a:effectLst/>
+                        <a:uFillTx/>
+                        <a:latin typeface="Arial"/>
+                      </a:endParaRPr>
+                    </a:p>
+                  </a:txBody>
+                  <a:tcPr anchor="t" marL="36000" marR="36000" marT="36000" marB="36000">
+                    <a:lnL w="7200">
+                      <a:solidFill>
+                        <a:srgbClr val="000000"/>
+                      </a:solidFill>
+                      <a:prstDash val="solid"/>
+                    </a:lnL>
+                    <a:lnR w="7200">
+                      <a:solidFill>
+                        <a:srgbClr val="000000"/>
+                      </a:solidFill>
+                      <a:prstDash val="solid"/>
+                    </a:lnR>
+                    <a:lnT w="7200">
+                      <a:solidFill>
+                        <a:srgbClr val="000000"/>
+                      </a:solidFill>
+                      <a:prstDash val="solid"/>
+                    </a:lnT>
+                    <a:lnB w="7200">
+                      <a:solidFill>
+                        <a:srgbClr val="000000"/>
+                      </a:solidFill>
+                      <a:prstDash val="solid"/>
+                    </a:lnB>
+                    <a:noFill/>
+                  </a:tcPr>
+                </a:tc>
+              </a:tr>
+              <a:tr h="490680">
+                <a:tc>
+                  <a:txBody>
+                    <a:bodyPr lIns="36000" tIns="36000" rIns="36000" bIns="36000" anchor="t">
+                      <a:noAutofit/>
+                    </a:bodyPr>
+                    <a:p>
+                      <a:r>
+                        <a:rPr lang="en-US" sz="1800" b="0" u="none" strike="noStrike">
+                          <a:solidFill>
+                            <a:srgbClr val="000000"/>
+                          </a:solidFill>
+                          <a:effectLst/>
+                          <a:uFillTx/>
+                          <a:latin typeface="Arial"/>
+                        </a:rPr>
+                        <a:t>Distance From Home</a:t>
+                      </a:r>
+                      <a:endParaRPr lang="en-US" sz="1800" b="0" u="none" strike="noStrike">
+                        <a:solidFill>
+                          <a:srgbClr val="000000"/>
+                        </a:solidFill>
+                        <a:effectLst/>
+                        <a:uFillTx/>
+                        <a:latin typeface="Arial"/>
+                      </a:endParaRPr>
+                    </a:p>
+                  </a:txBody>
+                  <a:tcPr anchor="t" marL="36000" marR="36000" marT="36000" marB="36000">
+                    <a:lnL w="7200">
+                      <a:solidFill>
+                        <a:srgbClr val="000000"/>
+                      </a:solidFill>
+                      <a:prstDash val="solid"/>
+                    </a:lnL>
+                    <a:lnR w="7200">
+                      <a:solidFill>
+                        <a:srgbClr val="000000"/>
+                      </a:solidFill>
+                      <a:prstDash val="solid"/>
+                    </a:lnR>
+                    <a:lnT w="7200">
+                      <a:solidFill>
+                        <a:srgbClr val="000000"/>
+                      </a:solidFill>
+                      <a:prstDash val="solid"/>
+                    </a:lnT>
+                    <a:lnB w="7200">
+                      <a:solidFill>
+                        <a:srgbClr val="000000"/>
+                      </a:solidFill>
+                      <a:prstDash val="solid"/>
+                    </a:lnB>
+                    <a:noFill/>
+                  </a:tcPr>
+                </a:tc>
+                <a:tc>
+                  <a:txBody>
+                    <a:bodyPr lIns="36000" tIns="36000" rIns="36000" bIns="36000" anchor="t">
+                      <a:noAutofit/>
+                    </a:bodyPr>
+                    <a:p>
+                      <a:r>
+                        <a:rPr lang="en-US" sz="1800" b="0" u="none" strike="noStrike">
+                          <a:solidFill>
+                            <a:srgbClr val="000000"/>
+                          </a:solidFill>
+                          <a:effectLst/>
+                          <a:uFillTx/>
+                          <a:latin typeface="Arial"/>
+                        </a:rPr>
+                        <a:t>Negative Effect</a:t>
+                      </a:r>
+                      <a:endParaRPr lang="en-US" sz="1800" b="0" u="none" strike="noStrike">
+                        <a:solidFill>
+                          <a:srgbClr val="000000"/>
+                        </a:solidFill>
+                        <a:effectLst/>
+                        <a:uFillTx/>
+                        <a:latin typeface="Arial"/>
+                      </a:endParaRPr>
+                    </a:p>
+                  </a:txBody>
+                  <a:tcPr anchor="t" marL="36000" marR="36000" marT="36000" marB="36000">
+                    <a:lnL w="7200">
+                      <a:solidFill>
+                        <a:srgbClr val="000000"/>
+                      </a:solidFill>
+                      <a:prstDash val="solid"/>
+                    </a:lnL>
+                    <a:lnR w="7200">
+                      <a:solidFill>
+                        <a:srgbClr val="000000"/>
+                      </a:solidFill>
+                      <a:prstDash val="solid"/>
+                    </a:lnR>
+                    <a:lnT w="7200">
+                      <a:solidFill>
+                        <a:srgbClr val="000000"/>
+                      </a:solidFill>
+                      <a:prstDash val="solid"/>
+                    </a:lnT>
+                    <a:lnB w="7200">
+                      <a:solidFill>
+                        <a:srgbClr val="000000"/>
+                      </a:solidFill>
+                      <a:prstDash val="solid"/>
+                    </a:lnB>
+                    <a:noFill/>
+                  </a:tcPr>
+                </a:tc>
+              </a:tr>
+              <a:tr h="490680">
+                <a:tc>
+                  <a:txBody>
+                    <a:bodyPr lIns="36000" tIns="36000" rIns="36000" bIns="36000" anchor="t">
+                      <a:noAutofit/>
+                    </a:bodyPr>
+                    <a:p>
+                      <a:r>
+                        <a:rPr lang="en-US" sz="1800" b="0" u="none" strike="noStrike">
+                          <a:solidFill>
+                            <a:srgbClr val="000000"/>
+                          </a:solidFill>
+                          <a:effectLst/>
+                          <a:uFillTx/>
+                          <a:latin typeface="Arial"/>
+                        </a:rPr>
+                        <a:t>Environment Satisfaction</a:t>
+                      </a:r>
+                      <a:endParaRPr lang="en-US" sz="1800" b="0" u="none" strike="noStrike">
+                        <a:solidFill>
+                          <a:srgbClr val="000000"/>
+                        </a:solidFill>
+                        <a:effectLst/>
+                        <a:uFillTx/>
+                        <a:latin typeface="Arial"/>
+                      </a:endParaRPr>
+                    </a:p>
+                  </a:txBody>
+                  <a:tcPr anchor="t" marL="36000" marR="36000" marT="36000" marB="36000">
+                    <a:lnL w="7200">
+                      <a:solidFill>
+                        <a:srgbClr val="000000"/>
+                      </a:solidFill>
+                      <a:prstDash val="solid"/>
+                    </a:lnL>
+                    <a:lnR w="7200">
+                      <a:solidFill>
+                        <a:srgbClr val="000000"/>
+                      </a:solidFill>
+                      <a:prstDash val="solid"/>
+                    </a:lnR>
+                    <a:lnT w="7200">
+                      <a:solidFill>
+                        <a:srgbClr val="000000"/>
+                      </a:solidFill>
+                      <a:prstDash val="solid"/>
+                    </a:lnT>
+                    <a:lnB w="7200">
+                      <a:solidFill>
+                        <a:srgbClr val="000000"/>
+                      </a:solidFill>
+                      <a:prstDash val="solid"/>
+                    </a:lnB>
+                    <a:noFill/>
+                  </a:tcPr>
+                </a:tc>
+                <a:tc>
+                  <a:txBody>
+                    <a:bodyPr lIns="36000" tIns="36000" rIns="36000" bIns="36000" anchor="t">
+                      <a:noAutofit/>
+                    </a:bodyPr>
+                    <a:p>
+                      <a:r>
+                        <a:rPr lang="en-US" sz="1800" b="0" u="none" strike="noStrike">
+                          <a:solidFill>
+                            <a:srgbClr val="000000"/>
+                          </a:solidFill>
+                          <a:effectLst/>
+                          <a:uFillTx/>
+                          <a:latin typeface="Arial"/>
+                        </a:rPr>
+                        <a:t>Negative Effect</a:t>
+                      </a:r>
+                      <a:endParaRPr lang="en-US" sz="1800" b="0" u="none" strike="noStrike">
+                        <a:solidFill>
+                          <a:srgbClr val="000000"/>
+                        </a:solidFill>
+                        <a:effectLst/>
+                        <a:uFillTx/>
+                        <a:latin typeface="Arial"/>
+                      </a:endParaRPr>
+                    </a:p>
+                  </a:txBody>
+                  <a:tcPr anchor="t" marL="36000" marR="36000" marT="36000" marB="36000">
+                    <a:lnL w="7200">
+                      <a:solidFill>
+                        <a:srgbClr val="000000"/>
+                      </a:solidFill>
+                      <a:prstDash val="solid"/>
+                    </a:lnL>
+                    <a:lnR w="7200">
+                      <a:solidFill>
+                        <a:srgbClr val="000000"/>
+                      </a:solidFill>
+                      <a:prstDash val="solid"/>
+                    </a:lnR>
+                    <a:lnT w="7200">
+                      <a:solidFill>
+                        <a:srgbClr val="000000"/>
+                      </a:solidFill>
+                      <a:prstDash val="solid"/>
+                    </a:lnT>
+                    <a:lnB w="7200">
+                      <a:solidFill>
+                        <a:srgbClr val="000000"/>
+                      </a:solidFill>
+                      <a:prstDash val="solid"/>
+                    </a:lnB>
+                    <a:noFill/>
+                  </a:tcPr>
+                </a:tc>
+              </a:tr>
+              <a:tr h="490680">
+                <a:tc>
+                  <a:txBody>
+                    <a:bodyPr lIns="36000" tIns="36000" rIns="36000" bIns="36000" anchor="t">
+                      <a:noAutofit/>
+                    </a:bodyPr>
+                    <a:p>
+                      <a:r>
+                        <a:rPr lang="en-US" sz="1800" b="0" u="none" strike="noStrike">
+                          <a:solidFill>
+                            <a:srgbClr val="000000"/>
+                          </a:solidFill>
+                          <a:effectLst/>
+                          <a:uFillTx/>
+                          <a:latin typeface="Arial"/>
+                        </a:rPr>
+                        <a:t>Job Satisfaction</a:t>
+                      </a:r>
+                      <a:endParaRPr lang="en-US" sz="1800" b="0" u="none" strike="noStrike">
+                        <a:solidFill>
+                          <a:srgbClr val="000000"/>
+                        </a:solidFill>
+                        <a:effectLst/>
+                        <a:uFillTx/>
+                        <a:latin typeface="Arial"/>
+                      </a:endParaRPr>
+                    </a:p>
+                  </a:txBody>
+                  <a:tcPr anchor="t" marL="36000" marR="36000" marT="36000" marB="36000">
+                    <a:lnL w="7200">
+                      <a:solidFill>
+                        <a:srgbClr val="000000"/>
+                      </a:solidFill>
+                      <a:prstDash val="solid"/>
+                    </a:lnL>
+                    <a:lnR w="7200">
+                      <a:solidFill>
+                        <a:srgbClr val="000000"/>
+                      </a:solidFill>
+                      <a:prstDash val="solid"/>
+                    </a:lnR>
+                    <a:lnT w="7200">
+                      <a:solidFill>
+                        <a:srgbClr val="000000"/>
+                      </a:solidFill>
+                      <a:prstDash val="solid"/>
+                    </a:lnT>
+                    <a:lnB w="7200">
+                      <a:solidFill>
+                        <a:srgbClr val="000000"/>
+                      </a:solidFill>
+                      <a:prstDash val="solid"/>
+                    </a:lnB>
+                    <a:noFill/>
+                  </a:tcPr>
+                </a:tc>
+                <a:tc>
+                  <a:txBody>
+                    <a:bodyPr lIns="36000" tIns="36000" rIns="36000" bIns="36000" anchor="t">
+                      <a:noAutofit/>
+                    </a:bodyPr>
+                    <a:p>
+                      <a:r>
+                        <a:rPr lang="en-US" sz="1800" b="0" u="none" strike="noStrike">
+                          <a:solidFill>
+                            <a:srgbClr val="000000"/>
+                          </a:solidFill>
+                          <a:effectLst/>
+                          <a:uFillTx/>
+                          <a:latin typeface="Arial"/>
+                        </a:rPr>
+                        <a:t>Negative Effect</a:t>
+                      </a:r>
+                      <a:endParaRPr lang="en-US" sz="1800" b="0" u="none" strike="noStrike">
+                        <a:solidFill>
+                          <a:srgbClr val="000000"/>
+                        </a:solidFill>
+                        <a:effectLst/>
+                        <a:uFillTx/>
+                        <a:latin typeface="Arial"/>
+                      </a:endParaRPr>
+                    </a:p>
+                  </a:txBody>
+                  <a:tcPr anchor="t" marL="36000" marR="36000" marT="36000" marB="36000">
+                    <a:lnL w="7200">
+                      <a:solidFill>
+                        <a:srgbClr val="000000"/>
+                      </a:solidFill>
+                      <a:prstDash val="solid"/>
+                    </a:lnL>
+                    <a:lnR w="7200">
+                      <a:solidFill>
+                        <a:srgbClr val="000000"/>
+                      </a:solidFill>
+                      <a:prstDash val="solid"/>
+                    </a:lnR>
+                    <a:lnT w="7200">
+                      <a:solidFill>
+                        <a:srgbClr val="000000"/>
+                      </a:solidFill>
+                      <a:prstDash val="solid"/>
+                    </a:lnT>
+                    <a:lnB w="7200">
+                      <a:solidFill>
+                        <a:srgbClr val="000000"/>
+                      </a:solidFill>
+                      <a:prstDash val="solid"/>
+                    </a:lnB>
+                    <a:noFill/>
+                  </a:tcPr>
+                </a:tc>
+              </a:tr>
+              <a:tr h="492480">
+                <a:tc>
+                  <a:txBody>
+                    <a:bodyPr lIns="36000" tIns="36000" rIns="36000" bIns="36000" anchor="t">
+                      <a:noAutofit/>
+                    </a:bodyPr>
+                    <a:p>
+                      <a:r>
+                        <a:rPr lang="en-US" sz="1800" b="0" u="none" strike="noStrike">
+                          <a:solidFill>
+                            <a:srgbClr val="000000"/>
+                          </a:solidFill>
+                          <a:effectLst/>
+                          <a:uFillTx/>
+                          <a:latin typeface="Arial"/>
+                        </a:rPr>
+                        <a:t>Total Working Years</a:t>
+                      </a:r>
+                      <a:endParaRPr lang="en-US" sz="1800" b="0" u="none" strike="noStrike">
+                        <a:solidFill>
+                          <a:srgbClr val="000000"/>
+                        </a:solidFill>
+                        <a:effectLst/>
+                        <a:uFillTx/>
+                        <a:latin typeface="Arial"/>
+                      </a:endParaRPr>
+                    </a:p>
+                  </a:txBody>
+                  <a:tcPr anchor="t" marL="36000" marR="36000" marT="36000" marB="36000">
+                    <a:lnL w="7200">
+                      <a:solidFill>
+                        <a:srgbClr val="000000"/>
+                      </a:solidFill>
+                      <a:prstDash val="solid"/>
+                    </a:lnL>
+                    <a:lnR w="7200">
+                      <a:solidFill>
+                        <a:srgbClr val="000000"/>
+                      </a:solidFill>
+                      <a:prstDash val="solid"/>
+                    </a:lnR>
+                    <a:lnT w="7200">
+                      <a:solidFill>
+                        <a:srgbClr val="000000"/>
+                      </a:solidFill>
+                      <a:prstDash val="solid"/>
+                    </a:lnT>
+                    <a:lnB w="7200">
+                      <a:solidFill>
+                        <a:srgbClr val="000000"/>
+                      </a:solidFill>
+                      <a:prstDash val="solid"/>
+                    </a:lnB>
+                    <a:noFill/>
+                  </a:tcPr>
+                </a:tc>
+                <a:tc>
+                  <a:txBody>
+                    <a:bodyPr lIns="36000" tIns="36000" rIns="36000" bIns="36000" anchor="t">
+                      <a:noAutofit/>
+                    </a:bodyPr>
+                    <a:p>
+                      <a:r>
+                        <a:rPr lang="en-US" sz="1800" b="0" u="none" strike="noStrike">
+                          <a:solidFill>
+                            <a:srgbClr val="000000"/>
+                          </a:solidFill>
+                          <a:effectLst/>
+                          <a:uFillTx/>
+                          <a:latin typeface="Arial"/>
+                        </a:rPr>
+                        <a:t>Negative Effect</a:t>
+                      </a:r>
+                      <a:endParaRPr lang="en-US" sz="1800" b="0" u="none" strike="noStrike">
+                        <a:solidFill>
+                          <a:srgbClr val="000000"/>
+                        </a:solidFill>
+                        <a:effectLst/>
+                        <a:uFillTx/>
+                        <a:latin typeface="Arial"/>
+                      </a:endParaRPr>
+                    </a:p>
+                  </a:txBody>
+                  <a:tcPr anchor="t" marL="36000" marR="36000" marT="36000" marB="36000">
+                    <a:lnL w="7200">
+                      <a:solidFill>
+                        <a:srgbClr val="000000"/>
+                      </a:solidFill>
+                      <a:prstDash val="solid"/>
+                    </a:lnL>
+                    <a:lnR w="7200">
+                      <a:solidFill>
+                        <a:srgbClr val="000000"/>
+                      </a:solidFill>
+                      <a:prstDash val="solid"/>
+                    </a:lnR>
+                    <a:lnT w="7200">
+                      <a:solidFill>
+                        <a:srgbClr val="000000"/>
+                      </a:solidFill>
+                      <a:prstDash val="solid"/>
+                    </a:lnT>
+                    <a:lnB w="7200">
+                      <a:solidFill>
+                        <a:srgbClr val="000000"/>
+                      </a:solidFill>
+                      <a:prstDash val="solid"/>
+                    </a:lnB>
+                    <a:noFill/>
+                  </a:tcPr>
+                </a:tc>
+              </a:tr>
+            </a:tbl>
+          </a:graphicData>
+        </a:graphic>
+      </p:graphicFrame>
+    </p:spTree>
+  </p:cSld>
+  <mc:AlternateContent>
+    <mc:Choice Requires="p14">
+      <p:transition spd="slow" p14:dur="2000"/>
+    </mc:Choice>
+    <mc:Fallback>
+      <p:transition spd="slow"/>
+    </mc:Fallback>
+  </mc:AlternateContent>
 </p:sld>
 </file>
 
 <file path=ppt/slides/slide2.xml><?xml version="1.0" encoding="utf-8"?>
-<p:sld xmlns:a="http://schemas.openxmlformats.org/drawingml/2006/main" xmlns:r="http://schemas.openxmlformats.org/officeDocument/2006/relationships" xmlns:p="http://schemas.openxmlformats.org/presentationml/2006/main">
+<p:sld xmlns:a="http://schemas.openxmlformats.org/drawingml/2006/main" xmlns:p="http://schemas.openxmlformats.org/presentationml/2006/main" xmlns:r="http://schemas.openxmlformats.org/officeDocument/2006/relationships" xmlns:p14="http://schemas.microsoft.com/office/powerpoint/2010/main" xmlns:p15="http://schemas.microsoft.com/office/powerpoint/2012/main" xmlns:mc="http://schemas.openxmlformats.org/markup-compatibility/2006">
   <p:cSld>
     <p:spTree>
       <p:nvGrpSpPr>
@@ -4198,8 +5845,8 @@
         </p:nvSpPr>
         <p:spPr>
           <a:xfrm>
-            <a:off x="504000" y="225720"/>
-            <a:ext cx="9072000" cy="946800"/>
+            <a:off x="504000" y="225360"/>
+            <a:ext cx="9071640" cy="947160"/>
           </a:xfrm>
           <a:prstGeom prst="rect">
             <a:avLst/>
@@ -4213,10 +5860,15 @@
           <a:bodyPr lIns="0" tIns="0" rIns="0" bIns="0" anchor="ctr">
             <a:spAutoFit/>
           </a:bodyPr>
-          <a:lstStyle/>
-          <a:p>
-            <a:pPr indent="0" algn="ctr">
+          <a:p>
+            <a:pPr indent="0" algn="ctr" defTabSz="914400">
+              <a:lnSpc>
+                <a:spcPct val="90000"/>
+              </a:lnSpc>
               <a:buNone/>
+              <a:tabLst>
+                <a:tab pos="0" algn="l"/>
+              </a:tabLst>
             </a:pPr>
             <a:r>
               <a:rPr lang="en-US" sz="3300" b="0" u="none" strike="noStrike">
@@ -4226,9 +5878,18 @@
                 <a:effectLst/>
                 <a:uFillTx/>
                 <a:latin typeface="Arial"/>
+                <a:ea typeface="DejaVu Sans"/>
               </a:rPr>
               <a:t>Business Problem</a:t>
             </a:r>
+            <a:endParaRPr lang="en-US" sz="3300" b="0" u="none" strike="noStrike">
+              <a:solidFill>
+                <a:srgbClr val="000000"/>
+              </a:solidFill>
+              <a:effectLst/>
+              <a:uFillTx/>
+              <a:latin typeface="Arial"/>
+            </a:endParaRPr>
           </a:p>
         </p:txBody>
       </p:sp>
@@ -4245,7 +5906,7 @@
         <p:spPr>
           <a:xfrm>
             <a:off x="504000" y="1371600"/>
-            <a:ext cx="9072000" cy="3288240"/>
+            <a:ext cx="9071640" cy="3287880"/>
           </a:xfrm>
           <a:prstGeom prst="rect">
             <a:avLst/>
@@ -4259,9 +5920,11 @@
           <a:bodyPr lIns="0" tIns="0" rIns="0" bIns="0" anchor="t">
             <a:normAutofit/>
           </a:bodyPr>
-          <a:lstStyle/>
-          <a:p>
-            <a:pPr marL="432000" indent="-324000" algn="l">
+          <a:p>
+            <a:pPr marL="432000" indent="-324000" algn="l" defTabSz="914400">
+              <a:lnSpc>
+                <a:spcPct val="100000"/>
+              </a:lnSpc>
               <a:spcBef>
                 <a:spcPts val="1191"/>
               </a:spcBef>
@@ -4283,12 +5946,24 @@
                 <a:effectLst/>
                 <a:uFillTx/>
                 <a:latin typeface="Arial"/>
+                <a:ea typeface="DejaVu Sans"/>
               </a:rPr>
               <a:t>How much financial value does using this predictive model create compared with not using one?</a:t>
             </a:r>
-          </a:p>
-          <a:p>
-            <a:pPr marL="432000" indent="-324000" algn="l">
+            <a:endParaRPr lang="en-US" sz="1500" b="0" u="none" strike="noStrike">
+              <a:solidFill>
+                <a:srgbClr val="000000"/>
+              </a:solidFill>
+              <a:effectLst/>
+              <a:uFillTx/>
+              <a:latin typeface="Arial"/>
+            </a:endParaRPr>
+          </a:p>
+          <a:p>
+            <a:pPr marL="432000" indent="-324000" algn="l" defTabSz="914400">
+              <a:lnSpc>
+                <a:spcPct val="100000"/>
+              </a:lnSpc>
               <a:spcBef>
                 <a:spcPts val="1191"/>
               </a:spcBef>
@@ -4310,22 +5985,31 @@
                 <a:effectLst/>
                 <a:uFillTx/>
                 <a:latin typeface="Arial"/>
+                <a:ea typeface="DejaVu Sans"/>
               </a:rPr>
               <a:t>The primary objective is to accurately determine which employees are likely to quit before they do.</a:t>
             </a:r>
+            <a:endParaRPr lang="en-US" sz="1500" b="0" u="none" strike="noStrike">
+              <a:solidFill>
+                <a:srgbClr val="000000"/>
+              </a:solidFill>
+              <a:effectLst/>
+              <a:uFillTx/>
+              <a:latin typeface="Arial"/>
+            </a:endParaRPr>
           </a:p>
         </p:txBody>
       </p:sp>
       <p:sp>
         <p:nvSpPr>
           <p:cNvPr id="24" name="TextBox 23"/>
-          <p:cNvSpPr txBox="1"/>
+          <p:cNvSpPr/>
           <p:nvPr/>
         </p:nvSpPr>
         <p:spPr>
           <a:xfrm>
             <a:off x="2273400" y="2721240"/>
-            <a:ext cx="5559480" cy="231840"/>
+            <a:ext cx="5559120" cy="231480"/>
           </a:xfrm>
           <a:prstGeom prst="rect">
             <a:avLst/>
@@ -4335,13 +6019,21 @@
             <a:noFill/>
           </a:ln>
         </p:spPr>
+        <p:style>
+          <a:lnRef idx="0"/>
+          <a:fillRef idx="0"/>
+          <a:effectRef idx="0"/>
+          <a:fontRef idx="minor"/>
+        </p:style>
         <p:txBody>
           <a:bodyPr lIns="90000" tIns="45000" rIns="90000" bIns="45000" anchor="t">
             <a:noAutofit/>
           </a:bodyPr>
-          <a:lstStyle/>
-          <a:p>
-            <a:pPr algn="ctr">
+          <a:p>
+            <a:pPr algn="ctr" defTabSz="914400">
+              <a:lnSpc>
+                <a:spcPct val="100000"/>
+              </a:lnSpc>
               <a:spcBef>
                 <a:spcPts val="1191"/>
               </a:spcBef>
@@ -4357,22 +6049,31 @@
                 <a:effectLst/>
                 <a:uFillTx/>
                 <a:latin typeface="Arial"/>
+                <a:ea typeface="DejaVu Sans"/>
               </a:rPr>
               <a:t>How much financial value does using this predictive model create compared with not using one?</a:t>
             </a:r>
+            <a:endParaRPr lang="en-US" sz="1000" b="0" u="none" strike="noStrike">
+              <a:solidFill>
+                <a:srgbClr val="000000"/>
+              </a:solidFill>
+              <a:effectLst/>
+              <a:uFillTx/>
+              <a:latin typeface="Arial"/>
+            </a:endParaRPr>
           </a:p>
         </p:txBody>
       </p:sp>
       <p:sp>
         <p:nvSpPr>
           <p:cNvPr id="25" name="TextBox 24"/>
-          <p:cNvSpPr txBox="1"/>
+          <p:cNvSpPr/>
           <p:nvPr/>
         </p:nvSpPr>
         <p:spPr>
           <a:xfrm>
             <a:off x="2273760" y="2721240"/>
-            <a:ext cx="5559480" cy="231840"/>
+            <a:ext cx="5559120" cy="231480"/>
           </a:xfrm>
           <a:prstGeom prst="rect">
             <a:avLst/>
@@ -4382,13 +6083,21 @@
             <a:noFill/>
           </a:ln>
         </p:spPr>
+        <p:style>
+          <a:lnRef idx="0"/>
+          <a:fillRef idx="0"/>
+          <a:effectRef idx="0"/>
+          <a:fontRef idx="minor"/>
+        </p:style>
         <p:txBody>
           <a:bodyPr lIns="90000" tIns="45000" rIns="90000" bIns="45000" anchor="t">
             <a:noAutofit/>
           </a:bodyPr>
-          <a:lstStyle/>
-          <a:p>
-            <a:pPr algn="ctr">
+          <a:p>
+            <a:pPr algn="ctr" defTabSz="914400">
+              <a:lnSpc>
+                <a:spcPct val="100000"/>
+              </a:lnSpc>
               <a:spcBef>
                 <a:spcPts val="1191"/>
               </a:spcBef>
@@ -4404,22 +6113,36 @@
                 <a:effectLst/>
                 <a:uFillTx/>
                 <a:latin typeface="Arial"/>
+                <a:ea typeface="DejaVu Sans"/>
               </a:rPr>
               <a:t>How much financial value does using this predictive model create compared with not using one?</a:t>
             </a:r>
+            <a:endParaRPr lang="en-US" sz="1000" b="0" u="none" strike="noStrike">
+              <a:solidFill>
+                <a:srgbClr val="000000"/>
+              </a:solidFill>
+              <a:effectLst/>
+              <a:uFillTx/>
+              <a:latin typeface="Arial"/>
+            </a:endParaRPr>
           </a:p>
         </p:txBody>
       </p:sp>
     </p:spTree>
   </p:cSld>
-  <p:clrMapOvr>
-    <a:masterClrMapping/>
-  </p:clrMapOvr>
+  <mc:AlternateContent>
+    <mc:Choice Requires="p14">
+      <p:transition spd="slow" p14:dur="2000"/>
+    </mc:Choice>
+    <mc:Fallback>
+      <p:transition spd="slow"/>
+    </mc:Fallback>
+  </mc:AlternateContent>
 </p:sld>
 </file>
 
 <file path=ppt/slides/slide3.xml><?xml version="1.0" encoding="utf-8"?>
-<p:sld xmlns:a="http://schemas.openxmlformats.org/drawingml/2006/main" xmlns:r="http://schemas.openxmlformats.org/officeDocument/2006/relationships" xmlns:p="http://schemas.openxmlformats.org/presentationml/2006/main">
+<p:sld xmlns:a="http://schemas.openxmlformats.org/drawingml/2006/main" xmlns:p="http://schemas.openxmlformats.org/presentationml/2006/main" xmlns:r="http://schemas.openxmlformats.org/officeDocument/2006/relationships" xmlns:p14="http://schemas.microsoft.com/office/powerpoint/2010/main" xmlns:p15="http://schemas.microsoft.com/office/powerpoint/2012/main" xmlns:mc="http://schemas.openxmlformats.org/markup-compatibility/2006">
   <p:cSld>
     <p:spTree>
       <p:nvGrpSpPr>
@@ -4447,8 +6170,8 @@
         </p:nvSpPr>
         <p:spPr>
           <a:xfrm>
-            <a:off x="504000" y="225720"/>
-            <a:ext cx="9072000" cy="946800"/>
+            <a:off x="504000" y="225360"/>
+            <a:ext cx="9071640" cy="947160"/>
           </a:xfrm>
           <a:prstGeom prst="rect">
             <a:avLst/>
@@ -4462,10 +6185,15 @@
           <a:bodyPr lIns="0" tIns="0" rIns="0" bIns="0" anchor="ctr">
             <a:spAutoFit/>
           </a:bodyPr>
-          <a:lstStyle/>
-          <a:p>
-            <a:pPr indent="0" algn="ctr">
+          <a:p>
+            <a:pPr indent="0" algn="ctr" defTabSz="914400">
+              <a:lnSpc>
+                <a:spcPct val="90000"/>
+              </a:lnSpc>
               <a:buNone/>
+              <a:tabLst>
+                <a:tab pos="0" algn="l"/>
+              </a:tabLst>
             </a:pPr>
             <a:r>
               <a:rPr lang="en-US" sz="3300" b="0" u="none" strike="noStrike">
@@ -4475,9 +6203,18 @@
                 <a:effectLst/>
                 <a:uFillTx/>
                 <a:latin typeface="Arial"/>
+                <a:ea typeface="DejaVu Sans"/>
               </a:rPr>
               <a:t>Executive Summary</a:t>
             </a:r>
+            <a:endParaRPr lang="en-US" sz="3300" b="0" u="none" strike="noStrike">
+              <a:solidFill>
+                <a:srgbClr val="000000"/>
+              </a:solidFill>
+              <a:effectLst/>
+              <a:uFillTx/>
+              <a:latin typeface="Arial"/>
+            </a:endParaRPr>
           </a:p>
         </p:txBody>
       </p:sp>
@@ -4494,7 +6231,7 @@
         <p:spPr>
           <a:xfrm>
             <a:off x="504000" y="1326600"/>
-            <a:ext cx="9072000" cy="3931200"/>
+            <a:ext cx="9071640" cy="3930840"/>
           </a:xfrm>
           <a:prstGeom prst="rect">
             <a:avLst/>
@@ -4506,15 +6243,20 @@
         </p:spPr>
         <p:txBody>
           <a:bodyPr lIns="0" tIns="0" rIns="0" bIns="0" anchor="t">
-            <a:normAutofit lnSpcReduction="9999"/>
+            <a:normAutofit fontScale="92500" lnSpcReduction="9999"/>
           </a:bodyPr>
-          <a:lstStyle/>
-          <a:p>
-            <a:pPr indent="0" algn="l">
+          <a:p>
+            <a:pPr indent="0" algn="l" defTabSz="914400">
+              <a:lnSpc>
+                <a:spcPct val="100000"/>
+              </a:lnSpc>
               <a:spcBef>
                 <a:spcPts val="1060"/>
               </a:spcBef>
               <a:buNone/>
+              <a:tabLst>
+                <a:tab pos="0" algn="l"/>
+              </a:tabLst>
             </a:pPr>
             <a:endParaRPr lang="en-US" sz="2400" b="0" u="none" strike="noStrike">
               <a:solidFill>
@@ -4526,11 +6268,17 @@
             </a:endParaRPr>
           </a:p>
           <a:p>
-            <a:pPr indent="0" algn="l">
+            <a:pPr indent="0" algn="l" defTabSz="914400">
+              <a:lnSpc>
+                <a:spcPct val="100000"/>
+              </a:lnSpc>
               <a:spcBef>
                 <a:spcPts val="1060"/>
               </a:spcBef>
               <a:buNone/>
+              <a:tabLst>
+                <a:tab pos="0" algn="l"/>
+              </a:tabLst>
             </a:pPr>
             <a:endParaRPr lang="en-US" sz="2400" b="0" u="none" strike="noStrike">
               <a:solidFill>
@@ -4542,11 +6290,17 @@
             </a:endParaRPr>
           </a:p>
           <a:p>
-            <a:pPr indent="0" algn="l">
+            <a:pPr indent="0" algn="l" defTabSz="914400">
+              <a:lnSpc>
+                <a:spcPct val="100000"/>
+              </a:lnSpc>
               <a:spcBef>
                 <a:spcPts val="1060"/>
               </a:spcBef>
               <a:buNone/>
+              <a:tabLst>
+                <a:tab pos="0" algn="l"/>
+              </a:tabLst>
             </a:pPr>
             <a:endParaRPr lang="en-US" sz="2400" b="0" u="none" strike="noStrike">
               <a:solidFill>
@@ -4558,11 +6312,17 @@
             </a:endParaRPr>
           </a:p>
           <a:p>
-            <a:pPr indent="0" algn="l">
+            <a:pPr indent="0" algn="l" defTabSz="914400">
+              <a:lnSpc>
+                <a:spcPct val="100000"/>
+              </a:lnSpc>
               <a:spcBef>
                 <a:spcPts val="1060"/>
               </a:spcBef>
               <a:buNone/>
+              <a:tabLst>
+                <a:tab pos="0" algn="l"/>
+              </a:tabLst>
             </a:pPr>
             <a:endParaRPr lang="en-US" sz="2400" b="0" u="none" strike="noStrike">
               <a:solidFill>
@@ -4574,7 +6334,10 @@
             </a:endParaRPr>
           </a:p>
           <a:p>
-            <a:pPr marL="432000" indent="-324000" algn="l">
+            <a:pPr marL="432000" indent="-324000" algn="l" defTabSz="914400">
+              <a:lnSpc>
+                <a:spcPct val="100000"/>
+              </a:lnSpc>
               <a:spcBef>
                 <a:spcPts val="1191"/>
               </a:spcBef>
@@ -4587,6 +6350,9 @@
               <a:buSzPct val="45000"/>
               <a:buFont typeface="Wingdings" charset="2"/>
               <a:buChar char=""/>
+              <a:tabLst>
+                <a:tab pos="0" algn="l"/>
+              </a:tabLst>
             </a:pPr>
             <a:r>
               <a:rPr lang="en-US" sz="1400" b="0" u="none" strike="noStrike">
@@ -4596,12 +6362,24 @@
                 <a:effectLst/>
                 <a:uFillTx/>
                 <a:latin typeface="Arial"/>
+                <a:ea typeface="DejaVu Sans"/>
               </a:rPr>
               <a:t>The utility function reflects the incremental financial impact of acting on the model's recommendations. A true positive represents the expected net savings from successfully retaining an employee, while a false positive represents the cost of an unnecessary retention intervention. False negatives and true negatives are assigned zero utility because they represent the baseline outcome in which no intervention occurs.</a:t>
             </a:r>
-          </a:p>
-          <a:p>
-            <a:pPr marL="432000" indent="-324000" algn="l">
+            <a:endParaRPr lang="en-US" sz="1400" b="0" u="none" strike="noStrike">
+              <a:solidFill>
+                <a:srgbClr val="000000"/>
+              </a:solidFill>
+              <a:effectLst/>
+              <a:uFillTx/>
+              <a:latin typeface="Arial"/>
+            </a:endParaRPr>
+          </a:p>
+          <a:p>
+            <a:pPr marL="432000" indent="-324000" algn="l" defTabSz="914400">
+              <a:lnSpc>
+                <a:spcPct val="100000"/>
+              </a:lnSpc>
               <a:spcBef>
                 <a:spcPts val="1191"/>
               </a:spcBef>
@@ -4614,6 +6392,9 @@
               <a:buSzPct val="45000"/>
               <a:buFont typeface="Wingdings" charset="2"/>
               <a:buChar char=""/>
+              <a:tabLst>
+                <a:tab pos="0" algn="l"/>
+              </a:tabLst>
             </a:pPr>
             <a:r>
               <a:rPr lang="en-US" sz="1400" b="0" u="none" strike="noStrike">
@@ -4623,12 +6404,24 @@
                 <a:effectLst/>
                 <a:uFillTx/>
                 <a:latin typeface="Arial"/>
+                <a:ea typeface="DejaVu Sans"/>
               </a:rPr>
               <a:t>It is based on our assumptions:</a:t>
             </a:r>
-          </a:p>
-          <a:p>
-            <a:pPr marL="864000" lvl="1" indent="-324000" algn="l">
+            <a:endParaRPr lang="en-US" sz="1400" b="0" u="none" strike="noStrike">
+              <a:solidFill>
+                <a:srgbClr val="000000"/>
+              </a:solidFill>
+              <a:effectLst/>
+              <a:uFillTx/>
+              <a:latin typeface="Arial"/>
+            </a:endParaRPr>
+          </a:p>
+          <a:p>
+            <a:pPr marL="864000" lvl="1" indent="-324000" algn="l" defTabSz="914400">
+              <a:lnSpc>
+                <a:spcPct val="100000"/>
+              </a:lnSpc>
               <a:spcBef>
                 <a:spcPts val="850"/>
               </a:spcBef>
@@ -4638,6 +6431,9 @@
               <a:buSzPct val="75000"/>
               <a:buFont typeface="Symbol" charset="2"/>
               <a:buChar char=""/>
+              <a:tabLst>
+                <a:tab pos="0" algn="l"/>
+              </a:tabLst>
             </a:pPr>
             <a:r>
               <a:rPr lang="en-US" sz="1400" b="0" u="none" strike="noStrike">
@@ -4647,12 +6443,24 @@
                 <a:effectLst/>
                 <a:uFillTx/>
                 <a:latin typeface="Arial"/>
+                <a:ea typeface="DejaVu Sans"/>
               </a:rPr>
               <a:t>Cost of employee turnover: $40,000</a:t>
             </a:r>
-          </a:p>
-          <a:p>
-            <a:pPr marL="864000" lvl="1" indent="-324000" algn="l">
+            <a:endParaRPr lang="en-US" sz="1400" b="0" u="none" strike="noStrike">
+              <a:solidFill>
+                <a:srgbClr val="000000"/>
+              </a:solidFill>
+              <a:effectLst/>
+              <a:uFillTx/>
+              <a:latin typeface="Arial"/>
+            </a:endParaRPr>
+          </a:p>
+          <a:p>
+            <a:pPr marL="864000" lvl="1" indent="-324000" algn="l" defTabSz="914400">
+              <a:lnSpc>
+                <a:spcPct val="100000"/>
+              </a:lnSpc>
               <a:spcBef>
                 <a:spcPts val="850"/>
               </a:spcBef>
@@ -4662,6 +6470,9 @@
               <a:buSzPct val="75000"/>
               <a:buFont typeface="Symbol" charset="2"/>
               <a:buChar char=""/>
+              <a:tabLst>
+                <a:tab pos="0" algn="l"/>
+              </a:tabLst>
             </a:pPr>
             <a:r>
               <a:rPr lang="en-US" sz="1400" b="0" u="none" strike="noStrike">
@@ -4671,12 +6482,24 @@
                 <a:effectLst/>
                 <a:uFillTx/>
                 <a:latin typeface="Arial"/>
+                <a:ea typeface="DejaVu Sans"/>
               </a:rPr>
               <a:t>Cost of retention intervention: $8,000</a:t>
             </a:r>
-          </a:p>
-          <a:p>
-            <a:pPr marL="864000" lvl="1" indent="-324000" algn="l">
+            <a:endParaRPr lang="en-US" sz="1400" b="0" u="none" strike="noStrike">
+              <a:solidFill>
+                <a:srgbClr val="000000"/>
+              </a:solidFill>
+              <a:effectLst/>
+              <a:uFillTx/>
+              <a:latin typeface="Arial"/>
+            </a:endParaRPr>
+          </a:p>
+          <a:p>
+            <a:pPr marL="864000" lvl="1" indent="-324000" algn="l" defTabSz="914400">
+              <a:lnSpc>
+                <a:spcPct val="100000"/>
+              </a:lnSpc>
               <a:spcBef>
                 <a:spcPts val="850"/>
               </a:spcBef>
@@ -4686,6 +6509,9 @@
               <a:buSzPct val="75000"/>
               <a:buFont typeface="Symbol" charset="2"/>
               <a:buChar char=""/>
+              <a:tabLst>
+                <a:tab pos="0" algn="l"/>
+              </a:tabLst>
             </a:pPr>
             <a:r>
               <a:rPr lang="en-US" sz="1400" b="0" u="none" strike="noStrike">
@@ -4695,9 +6521,18 @@
                 <a:effectLst/>
                 <a:uFillTx/>
                 <a:latin typeface="Arial"/>
+                <a:ea typeface="DejaVu Sans"/>
               </a:rPr>
               <a:t>Retention intervention success rate: 60%</a:t>
             </a:r>
+            <a:endParaRPr lang="en-US" sz="1400" b="0" u="none" strike="noStrike">
+              <a:solidFill>
+                <a:srgbClr val="000000"/>
+              </a:solidFill>
+              <a:effectLst/>
+              <a:uFillTx/>
+              <a:latin typeface="Arial"/>
+            </a:endParaRPr>
           </a:p>
         </p:txBody>
       </p:sp>
@@ -4708,13 +6543,13 @@
           <p:nvPr/>
         </p:nvPicPr>
         <p:blipFill>
-          <a:blip r:embed="rId2"/>
+          <a:blip r:embed="rId1"/>
           <a:stretch/>
         </p:blipFill>
         <p:spPr>
           <a:xfrm>
             <a:off x="1143000" y="1410120"/>
-            <a:ext cx="7600680" cy="1104480"/>
+            <a:ext cx="7600320" cy="1104120"/>
           </a:xfrm>
           <a:prstGeom prst="rect">
             <a:avLst/>
@@ -4727,14 +6562,19 @@
       </p:pic>
     </p:spTree>
   </p:cSld>
-  <p:clrMapOvr>
-    <a:masterClrMapping/>
-  </p:clrMapOvr>
+  <mc:AlternateContent>
+    <mc:Choice Requires="p14">
+      <p:transition spd="slow" p14:dur="2000"/>
+    </mc:Choice>
+    <mc:Fallback>
+      <p:transition spd="slow"/>
+    </mc:Fallback>
+  </mc:AlternateContent>
 </p:sld>
 </file>
 
 <file path=ppt/slides/slide4.xml><?xml version="1.0" encoding="utf-8"?>
-<p:sld xmlns:a="http://schemas.openxmlformats.org/drawingml/2006/main" xmlns:r="http://schemas.openxmlformats.org/officeDocument/2006/relationships" xmlns:p="http://schemas.openxmlformats.org/presentationml/2006/main">
+<p:sld xmlns:a="http://schemas.openxmlformats.org/drawingml/2006/main" xmlns:p="http://schemas.openxmlformats.org/presentationml/2006/main" xmlns:r="http://schemas.openxmlformats.org/officeDocument/2006/relationships" xmlns:p14="http://schemas.microsoft.com/office/powerpoint/2010/main" xmlns:p15="http://schemas.microsoft.com/office/powerpoint/2012/main" xmlns:mc="http://schemas.openxmlformats.org/markup-compatibility/2006">
   <p:cSld>
     <p:spTree>
       <p:nvGrpSpPr>
@@ -4762,8 +6602,8 @@
         </p:nvSpPr>
         <p:spPr>
           <a:xfrm>
-            <a:off x="504000" y="225720"/>
-            <a:ext cx="9072000" cy="946800"/>
+            <a:off x="504000" y="225360"/>
+            <a:ext cx="9071640" cy="947160"/>
           </a:xfrm>
           <a:prstGeom prst="rect">
             <a:avLst/>
@@ -4777,10 +6617,15 @@
           <a:bodyPr lIns="0" tIns="0" rIns="0" bIns="0" anchor="ctr">
             <a:spAutoFit/>
           </a:bodyPr>
-          <a:lstStyle/>
-          <a:p>
-            <a:pPr indent="0" algn="ctr">
+          <a:p>
+            <a:pPr indent="0" algn="ctr" defTabSz="914400">
+              <a:lnSpc>
+                <a:spcPct val="90000"/>
+              </a:lnSpc>
               <a:buNone/>
+              <a:tabLst>
+                <a:tab pos="0" algn="l"/>
+              </a:tabLst>
             </a:pPr>
             <a:r>
               <a:rPr lang="en-US" sz="3300" b="0" u="none" strike="noStrike">
@@ -4790,9 +6635,18 @@
                 <a:effectLst/>
                 <a:uFillTx/>
                 <a:latin typeface="Arial"/>
+                <a:ea typeface="DejaVu Sans"/>
               </a:rPr>
               <a:t>Data Summary</a:t>
             </a:r>
+            <a:endParaRPr lang="en-US" sz="3300" b="0" u="none" strike="noStrike">
+              <a:solidFill>
+                <a:srgbClr val="000000"/>
+              </a:solidFill>
+              <a:effectLst/>
+              <a:uFillTx/>
+              <a:latin typeface="Arial"/>
+            </a:endParaRPr>
           </a:p>
         </p:txBody>
       </p:sp>
@@ -4809,7 +6663,7 @@
         <p:spPr>
           <a:xfrm>
             <a:off x="529200" y="1326600"/>
-            <a:ext cx="9072000" cy="3288240"/>
+            <a:ext cx="9071640" cy="3287880"/>
           </a:xfrm>
           <a:prstGeom prst="rect">
             <a:avLst/>
@@ -4823,9 +6677,11 @@
           <a:bodyPr lIns="0" tIns="0" rIns="0" bIns="0" anchor="t">
             <a:normAutofit/>
           </a:bodyPr>
-          <a:lstStyle/>
-          <a:p>
-            <a:pPr marL="432000" indent="-324000" algn="l">
+          <a:p>
+            <a:pPr marL="432000" indent="-324000" algn="l" defTabSz="914400">
+              <a:lnSpc>
+                <a:spcPct val="100000"/>
+              </a:lnSpc>
               <a:spcBef>
                 <a:spcPts val="1060"/>
               </a:spcBef>
@@ -4844,12 +6700,24 @@
                 <a:effectLst/>
                 <a:uFillTx/>
                 <a:latin typeface="Arial"/>
+                <a:ea typeface="DejaVu Sans"/>
               </a:rPr>
               <a:t>Data source: kaggle.com</a:t>
             </a:r>
-          </a:p>
-          <a:p>
-            <a:pPr marL="864000" lvl="1" indent="-324000" algn="l">
+            <a:endParaRPr lang="en-US" sz="2400" b="0" u="none" strike="noStrike">
+              <a:solidFill>
+                <a:srgbClr val="000000"/>
+              </a:solidFill>
+              <a:effectLst/>
+              <a:uFillTx/>
+              <a:latin typeface="Arial"/>
+            </a:endParaRPr>
+          </a:p>
+          <a:p>
+            <a:pPr marL="864000" lvl="1" indent="-324000" algn="l" defTabSz="914400">
+              <a:lnSpc>
+                <a:spcPct val="100000"/>
+              </a:lnSpc>
               <a:spcBef>
                 <a:spcPts val="850"/>
               </a:spcBef>
@@ -4868,12 +6736,24 @@
                 <a:effectLst/>
                 <a:uFillTx/>
                 <a:latin typeface="Arial"/>
+                <a:ea typeface="DejaVu Sans"/>
               </a:rPr>
               <a:t>The data appears to be a fictional dataset created by IBM data scientists.</a:t>
             </a:r>
-          </a:p>
-          <a:p>
-            <a:pPr marL="864000" lvl="1" indent="-324000" algn="l">
+            <a:endParaRPr lang="en-US" sz="2100" b="0" u="none" strike="noStrike">
+              <a:solidFill>
+                <a:srgbClr val="000000"/>
+              </a:solidFill>
+              <a:effectLst/>
+              <a:uFillTx/>
+              <a:latin typeface="Arial"/>
+            </a:endParaRPr>
+          </a:p>
+          <a:p>
+            <a:pPr marL="864000" lvl="1" indent="-324000" algn="l" defTabSz="914400">
+              <a:lnSpc>
+                <a:spcPct val="100000"/>
+              </a:lnSpc>
               <a:spcBef>
                 <a:spcPts val="850"/>
               </a:spcBef>
@@ -4892,22 +6772,36 @@
                 <a:effectLst/>
                 <a:uFillTx/>
                 <a:latin typeface="Arial"/>
+                <a:ea typeface="DejaVu Sans"/>
               </a:rPr>
               <a:t>The dataset contains 1470 rows of data.</a:t>
             </a:r>
+            <a:endParaRPr lang="en-US" sz="2100" b="0" u="none" strike="noStrike">
+              <a:solidFill>
+                <a:srgbClr val="000000"/>
+              </a:solidFill>
+              <a:effectLst/>
+              <a:uFillTx/>
+              <a:latin typeface="Arial"/>
+            </a:endParaRPr>
           </a:p>
         </p:txBody>
       </p:sp>
     </p:spTree>
   </p:cSld>
-  <p:clrMapOvr>
-    <a:masterClrMapping/>
-  </p:clrMapOvr>
+  <mc:AlternateContent>
+    <mc:Choice Requires="p14">
+      <p:transition spd="slow" p14:dur="2000"/>
+    </mc:Choice>
+    <mc:Fallback>
+      <p:transition spd="slow"/>
+    </mc:Fallback>
+  </mc:AlternateContent>
 </p:sld>
 </file>
 
 <file path=ppt/slides/slide5.xml><?xml version="1.0" encoding="utf-8"?>
-<p:sld xmlns:a="http://schemas.openxmlformats.org/drawingml/2006/main" xmlns:r="http://schemas.openxmlformats.org/officeDocument/2006/relationships" xmlns:p="http://schemas.openxmlformats.org/presentationml/2006/main">
+<p:sld xmlns:a="http://schemas.openxmlformats.org/drawingml/2006/main" xmlns:p="http://schemas.openxmlformats.org/presentationml/2006/main" xmlns:r="http://schemas.openxmlformats.org/officeDocument/2006/relationships" xmlns:p14="http://schemas.microsoft.com/office/powerpoint/2010/main" xmlns:p15="http://schemas.microsoft.com/office/powerpoint/2012/main" xmlns:mc="http://schemas.openxmlformats.org/markup-compatibility/2006">
   <p:cSld>
     <p:spTree>
       <p:nvGrpSpPr>
@@ -4935,8 +6829,8 @@
         </p:nvSpPr>
         <p:spPr>
           <a:xfrm>
-            <a:off x="504000" y="225720"/>
-            <a:ext cx="9072000" cy="946800"/>
+            <a:off x="504000" y="225360"/>
+            <a:ext cx="9071640" cy="947160"/>
           </a:xfrm>
           <a:prstGeom prst="rect">
             <a:avLst/>
@@ -4950,10 +6844,15 @@
           <a:bodyPr lIns="0" tIns="0" rIns="0" bIns="0" anchor="ctr">
             <a:spAutoFit/>
           </a:bodyPr>
-          <a:lstStyle/>
-          <a:p>
-            <a:pPr indent="0" algn="ctr">
+          <a:p>
+            <a:pPr indent="0" algn="ctr" defTabSz="914400">
+              <a:lnSpc>
+                <a:spcPct val="90000"/>
+              </a:lnSpc>
               <a:buNone/>
+              <a:tabLst>
+                <a:tab pos="0" algn="l"/>
+              </a:tabLst>
             </a:pPr>
             <a:r>
               <a:rPr lang="en-US" sz="3300" b="0" u="none" strike="noStrike">
@@ -4963,9 +6862,18 @@
                 <a:effectLst/>
                 <a:uFillTx/>
                 <a:latin typeface="Arial"/>
+                <a:ea typeface="DejaVu Sans"/>
               </a:rPr>
               <a:t>Data Preparation</a:t>
             </a:r>
+            <a:endParaRPr lang="en-US" sz="3300" b="0" u="none" strike="noStrike">
+              <a:solidFill>
+                <a:srgbClr val="000000"/>
+              </a:solidFill>
+              <a:effectLst/>
+              <a:uFillTx/>
+              <a:latin typeface="Arial"/>
+            </a:endParaRPr>
           </a:p>
         </p:txBody>
       </p:sp>
@@ -4982,7 +6890,7 @@
         <p:spPr>
           <a:xfrm>
             <a:off x="504000" y="1326600"/>
-            <a:ext cx="9072000" cy="3288240"/>
+            <a:ext cx="9071640" cy="3287880"/>
           </a:xfrm>
           <a:prstGeom prst="rect">
             <a:avLst/>
@@ -4996,9 +6904,11 @@
           <a:bodyPr lIns="0" tIns="0" rIns="0" bIns="0" anchor="t">
             <a:normAutofit/>
           </a:bodyPr>
-          <a:lstStyle/>
-          <a:p>
-            <a:pPr marL="432000" indent="-324000" algn="l">
+          <a:p>
+            <a:pPr marL="432000" indent="-324000" algn="l" defTabSz="914400">
+              <a:lnSpc>
+                <a:spcPct val="100000"/>
+              </a:lnSpc>
               <a:spcBef>
                 <a:spcPts val="1060"/>
               </a:spcBef>
@@ -5010,19 +6920,43 @@
               <a:buChar char=""/>
             </a:pPr>
             <a:r>
-              <a:rPr lang="en-US" sz="2400" b="0" u="none" strike="noStrike" dirty="0">
-                <a:solidFill>
-                  <a:srgbClr val="000000"/>
-                </a:solidFill>
-                <a:effectLst/>
-                <a:uFillTx/>
-                <a:latin typeface="Arial"/>
-              </a:rPr>
-              <a:t>The dataset contains 35 different points and required little cleaning.</a:t>
-            </a:r>
-          </a:p>
-          <a:p>
-            <a:pPr marL="864000" lvl="1" indent="-324000" algn="l">
+              <a:rPr lang="en-US" sz="2400" b="0" u="none" strike="noStrike">
+                <a:solidFill>
+                  <a:srgbClr val="000000"/>
+                </a:solidFill>
+                <a:effectLst/>
+                <a:uFillTx/>
+                <a:latin typeface="Arial"/>
+                <a:ea typeface="DejaVu Sans"/>
+              </a:rPr>
+              <a:t>The dataset contains 35 different </a:t>
+            </a:r>
+            <a:r>
+              <a:rPr lang="en-US" sz="2400" b="0" u="none" strike="noStrike">
+                <a:solidFill>
+                  <a:srgbClr val="000000"/>
+                </a:solidFill>
+                <a:effectLst/>
+                <a:uFillTx/>
+                <a:latin typeface="Arial"/>
+                <a:ea typeface="DejaVu Sans"/>
+              </a:rPr>
+              <a:t>points and required little cleaning.</a:t>
+            </a:r>
+            <a:endParaRPr lang="en-US" sz="2400" b="0" u="none" strike="noStrike">
+              <a:solidFill>
+                <a:srgbClr val="000000"/>
+              </a:solidFill>
+              <a:effectLst/>
+              <a:uFillTx/>
+              <a:latin typeface="Arial"/>
+            </a:endParaRPr>
+          </a:p>
+          <a:p>
+            <a:pPr marL="864000" lvl="1" indent="-324000" algn="l" defTabSz="914400">
+              <a:lnSpc>
+                <a:spcPct val="100000"/>
+              </a:lnSpc>
               <a:spcBef>
                 <a:spcPts val="850"/>
               </a:spcBef>
@@ -5034,28 +6968,55 @@
               <a:buChar char=""/>
             </a:pPr>
             <a:r>
-              <a:rPr lang="en-US" sz="2100" b="0" u="none" strike="noStrike" dirty="0">
-                <a:solidFill>
-                  <a:srgbClr val="000000"/>
-                </a:solidFill>
-                <a:effectLst/>
-                <a:uFillTx/>
-                <a:latin typeface="Arial"/>
-              </a:rPr>
-              <a:t>For this project, we converted ‘Attrition’ to a binary outcome where Yes = 1</a:t>
-            </a:r>
-            <a:r>
-              <a:rPr lang="en-US" sz="2100" dirty="0">
-                <a:solidFill>
-                  <a:srgbClr val="000000"/>
-                </a:solidFill>
-                <a:latin typeface="Arial"/>
-              </a:rPr>
-              <a:t> - meaning the employee left the company</a:t>
-            </a:r>
-          </a:p>
-          <a:p>
-            <a:pPr marL="864000" lvl="3" indent="-324000" algn="l">
+              <a:rPr lang="en-US" sz="2100" b="0" u="none" strike="noStrike">
+                <a:solidFill>
+                  <a:srgbClr val="000000"/>
+                </a:solidFill>
+                <a:effectLst/>
+                <a:uFillTx/>
+                <a:latin typeface="Arial"/>
+                <a:ea typeface="DejaVu Sans"/>
+              </a:rPr>
+              <a:t>For this project, we converted ‘Attrition’ to </a:t>
+            </a:r>
+            <a:r>
+              <a:rPr lang="en-US" sz="2100" b="0" u="none" strike="noStrike">
+                <a:solidFill>
+                  <a:srgbClr val="000000"/>
+                </a:solidFill>
+                <a:effectLst/>
+                <a:uFillTx/>
+                <a:latin typeface="Arial"/>
+                <a:ea typeface="DejaVu Sans"/>
+              </a:rPr>
+              <a:t>a binary outcome where Yes = 1 - </a:t>
+            </a:r>
+            <a:r>
+              <a:rPr lang="en-US" sz="2100" b="0" u="none" strike="noStrike">
+                <a:solidFill>
+                  <a:srgbClr val="000000"/>
+                </a:solidFill>
+                <a:effectLst/>
+                <a:uFillTx/>
+                <a:latin typeface="Arial"/>
+                <a:ea typeface="DejaVu Sans"/>
+              </a:rPr>
+              <a:t>meaning the employee left the company</a:t>
+            </a:r>
+            <a:endParaRPr lang="en-US" sz="2100" b="0" u="none" strike="noStrike">
+              <a:solidFill>
+                <a:srgbClr val="000000"/>
+              </a:solidFill>
+              <a:effectLst/>
+              <a:uFillTx/>
+              <a:latin typeface="Arial"/>
+            </a:endParaRPr>
+          </a:p>
+          <a:p>
+            <a:pPr marL="864000" lvl="3" indent="-324000" algn="l" defTabSz="914400">
+              <a:lnSpc>
+                <a:spcPct val="100000"/>
+              </a:lnSpc>
               <a:spcBef>
                 <a:spcPts val="850"/>
               </a:spcBef>
@@ -5067,19 +7028,31 @@
               <a:buChar char=""/>
             </a:pPr>
             <a:r>
-              <a:rPr lang="en-US" sz="2100" b="0" u="none" strike="noStrike" dirty="0">
-                <a:solidFill>
-                  <a:srgbClr val="000000"/>
-                </a:solidFill>
-                <a:effectLst/>
-                <a:uFillTx/>
-                <a:latin typeface="Arial"/>
+              <a:rPr lang="en-US" sz="2100" b="0" u="none" strike="noStrike">
+                <a:solidFill>
+                  <a:srgbClr val="000000"/>
+                </a:solidFill>
+                <a:effectLst/>
+                <a:uFillTx/>
+                <a:latin typeface="Arial"/>
+                <a:ea typeface="DejaVu Sans"/>
               </a:rPr>
               <a:t>Removed from data </a:t>
             </a:r>
-          </a:p>
-          <a:p>
-            <a:pPr marL="864000" lvl="8" indent="-324000" algn="l">
+            <a:endParaRPr lang="en-US" sz="2100" b="0" u="none" strike="noStrike">
+              <a:solidFill>
+                <a:srgbClr val="000000"/>
+              </a:solidFill>
+              <a:effectLst/>
+              <a:uFillTx/>
+              <a:latin typeface="Arial"/>
+            </a:endParaRPr>
+          </a:p>
+          <a:p>
+            <a:pPr marL="864000" lvl="8" indent="-324000" algn="l" defTabSz="914400">
+              <a:lnSpc>
+                <a:spcPct val="100000"/>
+              </a:lnSpc>
               <a:spcBef>
                 <a:spcPts val="850"/>
               </a:spcBef>
@@ -5091,71 +7064,97 @@
               <a:buChar char=""/>
             </a:pPr>
             <a:r>
-              <a:rPr lang="en-US" sz="2400" dirty="0"/>
-              <a:t>'Attrition’, 'Department', '</a:t>
-            </a:r>
-            <a:r>
-              <a:rPr lang="en-US" sz="2400" dirty="0" err="1"/>
-              <a:t>EmployeeNumber</a:t>
-            </a:r>
-            <a:r>
-              <a:rPr lang="en-US" sz="2400" dirty="0"/>
-              <a:t>', '</a:t>
-            </a:r>
-            <a:r>
-              <a:rPr lang="en-US" sz="2400" dirty="0" err="1"/>
-              <a:t>DailyRate</a:t>
-            </a:r>
-            <a:r>
-              <a:rPr lang="en-US" sz="2400" dirty="0"/>
-              <a:t>', '</a:t>
-            </a:r>
-            <a:r>
-              <a:rPr lang="en-US" sz="2400" dirty="0" err="1"/>
-              <a:t>MonthlyIncome</a:t>
-            </a:r>
-            <a:r>
-              <a:rPr lang="en-US" sz="2400" dirty="0"/>
-              <a:t>', '</a:t>
-            </a:r>
-            <a:r>
-              <a:rPr lang="en-US" sz="2400" dirty="0" err="1"/>
-              <a:t>EmployeeCount</a:t>
-            </a:r>
-            <a:r>
-              <a:rPr lang="en-US" sz="2400" dirty="0"/>
-              <a:t>', 'Over18', '</a:t>
-            </a:r>
-            <a:r>
-              <a:rPr lang="en-US" sz="2400" dirty="0" err="1"/>
-              <a:t>PerformanceRating</a:t>
-            </a:r>
-            <a:r>
-              <a:rPr lang="en-US" sz="2400" dirty="0"/>
-              <a:t>', '</a:t>
-            </a:r>
-            <a:r>
-              <a:rPr lang="en-US" sz="2400" dirty="0" err="1"/>
-              <a:t>StandardHours</a:t>
-            </a:r>
-            <a:r>
-              <a:rPr lang="en-US" sz="2400" dirty="0"/>
-              <a:t>'</a:t>
-            </a:r>
-          </a:p>
-          <a:p>
-            <a:pPr marL="864000" lvl="1" indent="-324000" algn="l">
+              <a:rPr lang="en-US" sz="2400" b="0" u="none" strike="noStrike">
+                <a:solidFill>
+                  <a:schemeClr val="dk1"/>
+                </a:solidFill>
+                <a:effectLst/>
+                <a:uFillTx/>
+                <a:latin typeface="Arial"/>
+                <a:ea typeface="DejaVu Sans"/>
+              </a:rPr>
+              <a:t>'Attrition’, 'Department', </a:t>
+            </a:r>
+            <a:r>
+              <a:rPr lang="en-US" sz="2400" b="0" u="none" strike="noStrike">
+                <a:solidFill>
+                  <a:schemeClr val="dk1"/>
+                </a:solidFill>
+                <a:effectLst/>
+                <a:uFillTx/>
+                <a:latin typeface="Arial"/>
+                <a:ea typeface="DejaVu Sans"/>
+              </a:rPr>
+              <a:t>'EmployeeNumber', 'DailyRate', </a:t>
+            </a:r>
+            <a:r>
+              <a:rPr lang="en-US" sz="2400" b="0" u="none" strike="noStrike">
+                <a:solidFill>
+                  <a:schemeClr val="dk1"/>
+                </a:solidFill>
+                <a:effectLst/>
+                <a:uFillTx/>
+                <a:latin typeface="Arial"/>
+                <a:ea typeface="DejaVu Sans"/>
+              </a:rPr>
+              <a:t>'MonthlyIncome', </a:t>
+            </a:r>
+            <a:r>
+              <a:rPr lang="en-US" sz="2400" b="0" u="none" strike="noStrike">
+                <a:solidFill>
+                  <a:schemeClr val="dk1"/>
+                </a:solidFill>
+                <a:effectLst/>
+                <a:uFillTx/>
+                <a:latin typeface="Arial"/>
+                <a:ea typeface="DejaVu Sans"/>
+              </a:rPr>
+              <a:t>'EmployeeCount', 'Over18', </a:t>
+            </a:r>
+            <a:r>
+              <a:rPr lang="en-US" sz="2400" b="0" u="none" strike="noStrike">
+                <a:solidFill>
+                  <a:schemeClr val="dk1"/>
+                </a:solidFill>
+                <a:effectLst/>
+                <a:uFillTx/>
+                <a:latin typeface="Arial"/>
+                <a:ea typeface="DejaVu Sans"/>
+              </a:rPr>
+              <a:t>'PerformanceRating', </a:t>
+            </a:r>
+            <a:r>
+              <a:rPr lang="en-US" sz="2400" b="0" u="none" strike="noStrike">
+                <a:solidFill>
+                  <a:schemeClr val="dk1"/>
+                </a:solidFill>
+                <a:effectLst/>
+                <a:uFillTx/>
+                <a:latin typeface="Arial"/>
+                <a:ea typeface="DejaVu Sans"/>
+              </a:rPr>
+              <a:t>'StandardHours'</a:t>
+            </a:r>
+            <a:endParaRPr lang="en-US" sz="2400" b="0" u="none" strike="noStrike">
+              <a:solidFill>
+                <a:srgbClr val="000000"/>
+              </a:solidFill>
+              <a:effectLst/>
+              <a:uFillTx/>
+              <a:latin typeface="Arial"/>
+            </a:endParaRPr>
+          </a:p>
+          <a:p>
+            <a:pPr indent="0" algn="l" defTabSz="914400">
+              <a:lnSpc>
+                <a:spcPct val="100000"/>
+              </a:lnSpc>
               <a:spcBef>
                 <a:spcPts val="850"/>
               </a:spcBef>
-              <a:buClr>
-                <a:srgbClr val="000000"/>
-              </a:buClr>
-              <a:buSzPct val="75000"/>
-              <a:buFont typeface="Symbol" charset="2"/>
-              <a:buChar char=""/>
-            </a:pPr>
-            <a:endParaRPr lang="en-US" sz="2100" b="0" u="none" strike="noStrike" dirty="0">
+              <a:buNone/>
+            </a:pPr>
+            <a:endParaRPr lang="en-US" sz="2100" b="0" u="none" strike="noStrike">
               <a:solidFill>
                 <a:srgbClr val="000000"/>
               </a:solidFill>
@@ -5168,14 +7167,19 @@
       </p:sp>
     </p:spTree>
   </p:cSld>
-  <p:clrMapOvr>
-    <a:masterClrMapping/>
-  </p:clrMapOvr>
+  <mc:AlternateContent>
+    <mc:Choice Requires="p14">
+      <p:transition spd="slow" p14:dur="2000"/>
+    </mc:Choice>
+    <mc:Fallback>
+      <p:transition spd="slow"/>
+    </mc:Fallback>
+  </mc:AlternateContent>
 </p:sld>
 </file>
 
 <file path=ppt/slides/slide6.xml><?xml version="1.0" encoding="utf-8"?>
-<p:sld xmlns:a="http://schemas.openxmlformats.org/drawingml/2006/main" xmlns:r="http://schemas.openxmlformats.org/officeDocument/2006/relationships" xmlns:p="http://schemas.openxmlformats.org/presentationml/2006/main">
+<p:sld xmlns:a="http://schemas.openxmlformats.org/drawingml/2006/main" xmlns:p="http://schemas.openxmlformats.org/presentationml/2006/main" xmlns:r="http://schemas.openxmlformats.org/officeDocument/2006/relationships" xmlns:p14="http://schemas.microsoft.com/office/powerpoint/2010/main" xmlns:p15="http://schemas.microsoft.com/office/powerpoint/2012/main" xmlns:mc="http://schemas.openxmlformats.org/markup-compatibility/2006">
   <p:cSld>
     <p:spTree>
       <p:nvGrpSpPr>
@@ -5203,8 +7207,8 @@
         </p:nvSpPr>
         <p:spPr>
           <a:xfrm>
-            <a:off x="504000" y="225720"/>
-            <a:ext cx="9072000" cy="946800"/>
+            <a:off x="504000" y="225360"/>
+            <a:ext cx="9071640" cy="947160"/>
           </a:xfrm>
           <a:prstGeom prst="rect">
             <a:avLst/>
@@ -5218,10 +7222,15 @@
           <a:bodyPr lIns="0" tIns="0" rIns="0" bIns="0" anchor="ctr">
             <a:spAutoFit/>
           </a:bodyPr>
-          <a:lstStyle/>
-          <a:p>
-            <a:pPr indent="0" algn="ctr">
+          <a:p>
+            <a:pPr indent="0" algn="ctr" defTabSz="914400">
+              <a:lnSpc>
+                <a:spcPct val="90000"/>
+              </a:lnSpc>
               <a:buNone/>
+              <a:tabLst>
+                <a:tab pos="0" algn="l"/>
+              </a:tabLst>
             </a:pPr>
             <a:r>
               <a:rPr lang="en-US" sz="3300" b="0" u="none" strike="noStrike">
@@ -5231,9 +7240,18 @@
                 <a:effectLst/>
                 <a:uFillTx/>
                 <a:latin typeface="Arial"/>
+                <a:ea typeface="DejaVu Sans"/>
               </a:rPr>
               <a:t>Overtime vs Attrition</a:t>
             </a:r>
+            <a:endParaRPr lang="en-US" sz="3300" b="0" u="none" strike="noStrike">
+              <a:solidFill>
+                <a:srgbClr val="000000"/>
+              </a:solidFill>
+              <a:effectLst/>
+              <a:uFillTx/>
+              <a:latin typeface="Arial"/>
+            </a:endParaRPr>
           </a:p>
         </p:txBody>
       </p:sp>
@@ -5250,7 +7268,7 @@
         <p:spPr>
           <a:xfrm>
             <a:off x="504000" y="1346760"/>
-            <a:ext cx="4525200" cy="3268080"/>
+            <a:ext cx="4524840" cy="3267720"/>
           </a:xfrm>
           <a:prstGeom prst="rect">
             <a:avLst/>
@@ -5264,9 +7282,11 @@
           <a:bodyPr lIns="0" tIns="0" rIns="0" bIns="0" anchor="t">
             <a:normAutofit/>
           </a:bodyPr>
-          <a:lstStyle/>
-          <a:p>
-            <a:pPr marL="432000" indent="-324000" algn="l">
+          <a:p>
+            <a:pPr marL="432000" indent="-324000" algn="l" defTabSz="914400">
+              <a:lnSpc>
+                <a:spcPct val="100000"/>
+              </a:lnSpc>
               <a:spcBef>
                 <a:spcPts val="1060"/>
               </a:spcBef>
@@ -5285,9 +7305,18 @@
                 <a:effectLst/>
                 <a:uFillTx/>
                 <a:latin typeface="Arial"/>
+                <a:ea typeface="DejaVu Sans"/>
               </a:rPr>
               <a:t>It appears as though employees who work overtime are more likely to leave.</a:t>
             </a:r>
+            <a:endParaRPr lang="en-US" sz="2400" b="0" u="none" strike="noStrike">
+              <a:solidFill>
+                <a:srgbClr val="000000"/>
+              </a:solidFill>
+              <a:effectLst/>
+              <a:uFillTx/>
+              <a:latin typeface="Arial"/>
+            </a:endParaRPr>
           </a:p>
         </p:txBody>
       </p:sp>
@@ -5298,13 +7327,13 @@
           <p:nvPr/>
         </p:nvPicPr>
         <p:blipFill>
-          <a:blip r:embed="rId2"/>
+          <a:blip r:embed="rId1"/>
           <a:stretch/>
         </p:blipFill>
         <p:spPr>
           <a:xfrm>
             <a:off x="4572000" y="957240"/>
-            <a:ext cx="5249520" cy="3657600"/>
+            <a:ext cx="5249160" cy="3657240"/>
           </a:xfrm>
           <a:prstGeom prst="rect">
             <a:avLst/>
@@ -5317,14 +7346,19 @@
       </p:pic>
     </p:spTree>
   </p:cSld>
-  <p:clrMapOvr>
-    <a:masterClrMapping/>
-  </p:clrMapOvr>
+  <mc:AlternateContent>
+    <mc:Choice Requires="p14">
+      <p:transition spd="slow" p14:dur="2000"/>
+    </mc:Choice>
+    <mc:Fallback>
+      <p:transition spd="slow"/>
+    </mc:Fallback>
+  </mc:AlternateContent>
 </p:sld>
 </file>
 
 <file path=ppt/slides/slide7.xml><?xml version="1.0" encoding="utf-8"?>
-<p:sld xmlns:a="http://schemas.openxmlformats.org/drawingml/2006/main" xmlns:r="http://schemas.openxmlformats.org/officeDocument/2006/relationships" xmlns:p="http://schemas.openxmlformats.org/presentationml/2006/main">
+<p:sld xmlns:a="http://schemas.openxmlformats.org/drawingml/2006/main" xmlns:p="http://schemas.openxmlformats.org/presentationml/2006/main" xmlns:r="http://schemas.openxmlformats.org/officeDocument/2006/relationships" xmlns:p14="http://schemas.microsoft.com/office/powerpoint/2010/main" xmlns:p15="http://schemas.microsoft.com/office/powerpoint/2012/main" xmlns:mc="http://schemas.openxmlformats.org/markup-compatibility/2006">
   <p:cSld>
     <p:spTree>
       <p:nvGrpSpPr>
@@ -5352,8 +7386,8 @@
         </p:nvSpPr>
         <p:spPr>
           <a:xfrm>
-            <a:off x="504000" y="225720"/>
-            <a:ext cx="9072000" cy="946800"/>
+            <a:off x="504000" y="225360"/>
+            <a:ext cx="9071640" cy="947160"/>
           </a:xfrm>
           <a:prstGeom prst="rect">
             <a:avLst/>
@@ -5367,10 +7401,15 @@
           <a:bodyPr lIns="0" tIns="0" rIns="0" bIns="0" anchor="ctr">
             <a:spAutoFit/>
           </a:bodyPr>
-          <a:lstStyle/>
-          <a:p>
-            <a:pPr indent="0" algn="ctr">
+          <a:p>
+            <a:pPr indent="0" algn="ctr" defTabSz="914400">
+              <a:lnSpc>
+                <a:spcPct val="90000"/>
+              </a:lnSpc>
               <a:buNone/>
+              <a:tabLst>
+                <a:tab pos="0" algn="l"/>
+              </a:tabLst>
             </a:pPr>
             <a:r>
               <a:rPr lang="en-US" sz="3300" b="0" u="none" strike="noStrike">
@@ -5380,9 +7419,18 @@
                 <a:effectLst/>
                 <a:uFillTx/>
                 <a:latin typeface="Arial"/>
+                <a:ea typeface="DejaVu Sans"/>
               </a:rPr>
               <a:t>Satisfaction vs Attrition</a:t>
             </a:r>
+            <a:endParaRPr lang="en-US" sz="3300" b="0" u="none" strike="noStrike">
+              <a:solidFill>
+                <a:srgbClr val="000000"/>
+              </a:solidFill>
+              <a:effectLst/>
+              <a:uFillTx/>
+              <a:latin typeface="Arial"/>
+            </a:endParaRPr>
           </a:p>
         </p:txBody>
       </p:sp>
@@ -5399,7 +7447,7 @@
         <p:spPr>
           <a:xfrm>
             <a:off x="504000" y="1326600"/>
-            <a:ext cx="3382200" cy="3288240"/>
+            <a:ext cx="3381840" cy="3287880"/>
           </a:xfrm>
           <a:prstGeom prst="rect">
             <a:avLst/>
@@ -5413,9 +7461,11 @@
           <a:bodyPr lIns="0" tIns="0" rIns="0" bIns="0" anchor="t">
             <a:normAutofit/>
           </a:bodyPr>
-          <a:lstStyle/>
-          <a:p>
-            <a:pPr marL="432000" indent="-324000" algn="l">
+          <a:p>
+            <a:pPr marL="432000" indent="-324000" algn="l" defTabSz="914400">
+              <a:lnSpc>
+                <a:spcPct val="100000"/>
+              </a:lnSpc>
               <a:spcBef>
                 <a:spcPts val="1060"/>
               </a:spcBef>
@@ -5434,12 +7484,24 @@
                 <a:effectLst/>
                 <a:uFillTx/>
                 <a:latin typeface="Arial"/>
+                <a:ea typeface="DejaVu Sans"/>
               </a:rPr>
               <a:t>4 = Very Satisfied, 1 = Not Satisfied.</a:t>
             </a:r>
-          </a:p>
-          <a:p>
-            <a:pPr marL="432000" indent="-324000" algn="l">
+            <a:endParaRPr lang="en-US" sz="2400" b="0" u="none" strike="noStrike">
+              <a:solidFill>
+                <a:srgbClr val="000000"/>
+              </a:solidFill>
+              <a:effectLst/>
+              <a:uFillTx/>
+              <a:latin typeface="Arial"/>
+            </a:endParaRPr>
+          </a:p>
+          <a:p>
+            <a:pPr marL="432000" indent="-324000" algn="l" defTabSz="914400">
+              <a:lnSpc>
+                <a:spcPct val="100000"/>
+              </a:lnSpc>
               <a:spcBef>
                 <a:spcPts val="1060"/>
               </a:spcBef>
@@ -5458,9 +7520,18 @@
                 <a:effectLst/>
                 <a:uFillTx/>
                 <a:latin typeface="Arial"/>
+                <a:ea typeface="DejaVu Sans"/>
               </a:rPr>
               <a:t>The more satisfied an employee was, the more likely they would be to stay.</a:t>
             </a:r>
+            <a:endParaRPr lang="en-US" sz="2400" b="0" u="none" strike="noStrike">
+              <a:solidFill>
+                <a:srgbClr val="000000"/>
+              </a:solidFill>
+              <a:effectLst/>
+              <a:uFillTx/>
+              <a:latin typeface="Arial"/>
+            </a:endParaRPr>
           </a:p>
         </p:txBody>
       </p:sp>
@@ -5471,13 +7542,13 @@
           <p:nvPr/>
         </p:nvPicPr>
         <p:blipFill>
-          <a:blip r:embed="rId2"/>
+          <a:blip r:embed="rId1"/>
           <a:stretch/>
         </p:blipFill>
         <p:spPr>
           <a:xfrm>
             <a:off x="3886200" y="939600"/>
-            <a:ext cx="6026400" cy="4318200"/>
+            <a:ext cx="6026040" cy="4317840"/>
           </a:xfrm>
           <a:prstGeom prst="rect">
             <a:avLst/>
@@ -5490,14 +7561,19 @@
       </p:pic>
     </p:spTree>
   </p:cSld>
-  <p:clrMapOvr>
-    <a:masterClrMapping/>
-  </p:clrMapOvr>
+  <mc:AlternateContent>
+    <mc:Choice Requires="p14">
+      <p:transition spd="slow" p14:dur="2000"/>
+    </mc:Choice>
+    <mc:Fallback>
+      <p:transition spd="slow"/>
+    </mc:Fallback>
+  </mc:AlternateContent>
 </p:sld>
 </file>
 
 <file path=ppt/slides/slide8.xml><?xml version="1.0" encoding="utf-8"?>
-<p:sld xmlns:a="http://schemas.openxmlformats.org/drawingml/2006/main" xmlns:r="http://schemas.openxmlformats.org/officeDocument/2006/relationships" xmlns:p="http://schemas.openxmlformats.org/presentationml/2006/main">
+<p:sld xmlns:a="http://schemas.openxmlformats.org/drawingml/2006/main" xmlns:p="http://schemas.openxmlformats.org/presentationml/2006/main" xmlns:r="http://schemas.openxmlformats.org/officeDocument/2006/relationships" xmlns:p14="http://schemas.microsoft.com/office/powerpoint/2010/main" xmlns:p15="http://schemas.microsoft.com/office/powerpoint/2012/main" xmlns:mc="http://schemas.openxmlformats.org/markup-compatibility/2006">
   <p:cSld>
     <p:spTree>
       <p:nvGrpSpPr>
@@ -5525,8 +7601,8 @@
         </p:nvSpPr>
         <p:spPr>
           <a:xfrm>
-            <a:off x="504000" y="225720"/>
-            <a:ext cx="9072000" cy="946800"/>
+            <a:off x="504000" y="225360"/>
+            <a:ext cx="9071640" cy="947160"/>
           </a:xfrm>
           <a:prstGeom prst="rect">
             <a:avLst/>
@@ -5540,22 +7616,36 @@
           <a:bodyPr lIns="0" tIns="0" rIns="0" bIns="0" anchor="ctr">
             <a:spAutoFit/>
           </a:bodyPr>
-          <a:lstStyle/>
-          <a:p>
-            <a:pPr indent="0" algn="ctr">
+          <a:p>
+            <a:pPr indent="0" algn="ctr" defTabSz="914400">
+              <a:lnSpc>
+                <a:spcPct val="90000"/>
+              </a:lnSpc>
               <a:buNone/>
-            </a:pPr>
-            <a:r>
-              <a:rPr lang="en-US" sz="3300" b="0" u="none" strike="noStrike" dirty="0">
-                <a:solidFill>
-                  <a:srgbClr val="000000"/>
-                </a:solidFill>
-                <a:effectLst/>
-                <a:uFillTx/>
-                <a:latin typeface="Arial"/>
+              <a:tabLst>
+                <a:tab pos="0" algn="l"/>
+              </a:tabLst>
+            </a:pPr>
+            <a:r>
+              <a:rPr lang="en-US" sz="3300" b="0" u="none" strike="noStrike">
+                <a:solidFill>
+                  <a:srgbClr val="000000"/>
+                </a:solidFill>
+                <a:effectLst/>
+                <a:uFillTx/>
+                <a:latin typeface="Arial"/>
+                <a:ea typeface="DejaVu Sans"/>
               </a:rPr>
               <a:t>Age vs Attrition</a:t>
             </a:r>
+            <a:endParaRPr lang="en-US" sz="3300" b="0" u="none" strike="noStrike">
+              <a:solidFill>
+                <a:srgbClr val="000000"/>
+              </a:solidFill>
+              <a:effectLst/>
+              <a:uFillTx/>
+              <a:latin typeface="Arial"/>
+            </a:endParaRPr>
           </a:p>
         </p:txBody>
       </p:sp>
@@ -5572,7 +7662,7 @@
         <p:spPr>
           <a:xfrm>
             <a:off x="504000" y="1326600"/>
-            <a:ext cx="4068000" cy="3931200"/>
+            <a:ext cx="4067640" cy="3930840"/>
           </a:xfrm>
           <a:prstGeom prst="rect">
             <a:avLst/>
@@ -5584,11 +7674,13 @@
         </p:spPr>
         <p:txBody>
           <a:bodyPr lIns="0" tIns="0" rIns="0" bIns="0" anchor="t">
-            <a:normAutofit fontScale="92500" lnSpcReduction="19999"/>
+            <a:normAutofit fontScale="85000" lnSpcReduction="9999"/>
           </a:bodyPr>
-          <a:lstStyle/>
-          <a:p>
-            <a:pPr marL="432000" indent="-324000" algn="l">
+          <a:p>
+            <a:pPr marL="432000" indent="-324000" algn="l" defTabSz="914400">
+              <a:lnSpc>
+                <a:spcPct val="100000"/>
+              </a:lnSpc>
               <a:spcBef>
                 <a:spcPts val="1060"/>
               </a:spcBef>
@@ -5600,19 +7692,31 @@
               <a:buChar char=""/>
             </a:pPr>
             <a:r>
-              <a:rPr lang="en-US" sz="2400" b="0" u="none" strike="noStrike" dirty="0">
-                <a:solidFill>
-                  <a:srgbClr val="000000"/>
-                </a:solidFill>
-                <a:effectLst/>
-                <a:uFillTx/>
-                <a:latin typeface="Arial"/>
+              <a:rPr lang="en-US" sz="2400" b="0" u="none" strike="noStrike">
+                <a:solidFill>
+                  <a:srgbClr val="000000"/>
+                </a:solidFill>
+                <a:effectLst/>
+                <a:uFillTx/>
+                <a:latin typeface="Arial"/>
+                <a:ea typeface="DejaVu Sans"/>
               </a:rPr>
               <a:t>According to the data, we see that younger employees are more likely to leave, but this starts to level off then reverse around age 45.</a:t>
             </a:r>
-          </a:p>
-          <a:p>
-            <a:pPr marL="864000" lvl="1" indent="-324000" algn="l">
+            <a:endParaRPr lang="en-US" sz="2400" b="0" u="none" strike="noStrike">
+              <a:solidFill>
+                <a:srgbClr val="000000"/>
+              </a:solidFill>
+              <a:effectLst/>
+              <a:uFillTx/>
+              <a:latin typeface="Arial"/>
+            </a:endParaRPr>
+          </a:p>
+          <a:p>
+            <a:pPr marL="864000" lvl="1" indent="-324000" algn="l" defTabSz="914400">
+              <a:lnSpc>
+                <a:spcPct val="100000"/>
+              </a:lnSpc>
               <a:spcBef>
                 <a:spcPts val="850"/>
               </a:spcBef>
@@ -5624,19 +7728,31 @@
               <a:buChar char=""/>
             </a:pPr>
             <a:r>
-              <a:rPr lang="en-US" sz="2100" b="0" u="none" strike="noStrike" dirty="0">
-                <a:solidFill>
-                  <a:srgbClr val="000000"/>
-                </a:solidFill>
-                <a:effectLst/>
-                <a:uFillTx/>
-                <a:latin typeface="Arial"/>
+              <a:rPr lang="en-US" sz="2100" b="0" u="none" strike="noStrike">
+                <a:solidFill>
+                  <a:srgbClr val="000000"/>
+                </a:solidFill>
+                <a:effectLst/>
+                <a:uFillTx/>
+                <a:latin typeface="Arial"/>
+                <a:ea typeface="DejaVu Sans"/>
               </a:rPr>
               <a:t>Younger employees are more mobile and able to accept jobs elsewhere.</a:t>
             </a:r>
-          </a:p>
-          <a:p>
-            <a:pPr marL="864000" lvl="1" indent="-324000" algn="l">
+            <a:endParaRPr lang="en-US" sz="2100" b="0" u="none" strike="noStrike">
+              <a:solidFill>
+                <a:srgbClr val="000000"/>
+              </a:solidFill>
+              <a:effectLst/>
+              <a:uFillTx/>
+              <a:latin typeface="Arial"/>
+            </a:endParaRPr>
+          </a:p>
+          <a:p>
+            <a:pPr marL="864000" lvl="1" indent="-324000" algn="l" defTabSz="914400">
+              <a:lnSpc>
+                <a:spcPct val="100000"/>
+              </a:lnSpc>
               <a:spcBef>
                 <a:spcPts val="850"/>
               </a:spcBef>
@@ -5648,19 +7764,31 @@
               <a:buChar char=""/>
             </a:pPr>
             <a:r>
-              <a:rPr lang="en-US" sz="2100" b="0" u="none" strike="noStrike" dirty="0">
-                <a:solidFill>
-                  <a:srgbClr val="000000"/>
-                </a:solidFill>
-                <a:effectLst/>
-                <a:uFillTx/>
-                <a:latin typeface="Arial"/>
+              <a:rPr lang="en-US" sz="2100" b="0" u="none" strike="noStrike">
+                <a:solidFill>
+                  <a:srgbClr val="000000"/>
+                </a:solidFill>
+                <a:effectLst/>
+                <a:uFillTx/>
+                <a:latin typeface="Arial"/>
+                <a:ea typeface="DejaVu Sans"/>
               </a:rPr>
               <a:t>Middle age workers are more likely to have families, and opt for more stable employment.</a:t>
             </a:r>
-          </a:p>
-          <a:p>
-            <a:pPr marL="864000" lvl="1" indent="-324000" algn="l">
+            <a:endParaRPr lang="en-US" sz="2100" b="0" u="none" strike="noStrike">
+              <a:solidFill>
+                <a:srgbClr val="000000"/>
+              </a:solidFill>
+              <a:effectLst/>
+              <a:uFillTx/>
+              <a:latin typeface="Arial"/>
+            </a:endParaRPr>
+          </a:p>
+          <a:p>
+            <a:pPr marL="864000" lvl="1" indent="-324000" algn="l" defTabSz="914400">
+              <a:lnSpc>
+                <a:spcPct val="100000"/>
+              </a:lnSpc>
               <a:spcBef>
                 <a:spcPts val="850"/>
               </a:spcBef>
@@ -5672,16 +7800,25 @@
               <a:buChar char=""/>
             </a:pPr>
             <a:r>
-              <a:rPr lang="en-US" sz="2100" b="0" u="none" strike="noStrike" dirty="0">
-                <a:solidFill>
-                  <a:srgbClr val="000000"/>
-                </a:solidFill>
-                <a:effectLst/>
-                <a:uFillTx/>
-                <a:latin typeface="Arial"/>
+              <a:rPr lang="en-US" sz="2100" b="0" u="none" strike="noStrike">
+                <a:solidFill>
+                  <a:srgbClr val="000000"/>
+                </a:solidFill>
+                <a:effectLst/>
+                <a:uFillTx/>
+                <a:latin typeface="Arial"/>
+                <a:ea typeface="DejaVu Sans"/>
               </a:rPr>
               <a:t>Older employees could be leaving for more senior level positions or retirement.</a:t>
             </a:r>
+            <a:endParaRPr lang="en-US" sz="2100" b="0" u="none" strike="noStrike">
+              <a:solidFill>
+                <a:srgbClr val="000000"/>
+              </a:solidFill>
+              <a:effectLst/>
+              <a:uFillTx/>
+              <a:latin typeface="Arial"/>
+            </a:endParaRPr>
           </a:p>
         </p:txBody>
       </p:sp>
@@ -5692,13 +7829,13 @@
           <p:nvPr/>
         </p:nvPicPr>
         <p:blipFill>
-          <a:blip r:embed="rId2"/>
+          <a:blip r:embed="rId1"/>
           <a:stretch/>
         </p:blipFill>
         <p:spPr>
           <a:xfrm>
-            <a:off x="4476590" y="1172520"/>
-            <a:ext cx="5510520" cy="3990600"/>
+            <a:off x="4476600" y="1172520"/>
+            <a:ext cx="5510160" cy="3990240"/>
           </a:xfrm>
           <a:prstGeom prst="rect">
             <a:avLst/>
@@ -5711,14 +7848,19 @@
       </p:pic>
     </p:spTree>
   </p:cSld>
-  <p:clrMapOvr>
-    <a:masterClrMapping/>
-  </p:clrMapOvr>
+  <mc:AlternateContent>
+    <mc:Choice Requires="p14">
+      <p:transition spd="slow" p14:dur="2000"/>
+    </mc:Choice>
+    <mc:Fallback>
+      <p:transition spd="slow"/>
+    </mc:Fallback>
+  </mc:AlternateContent>
 </p:sld>
 </file>
 
 <file path=ppt/slides/slide9.xml><?xml version="1.0" encoding="utf-8"?>
-<p:sld xmlns:a="http://schemas.openxmlformats.org/drawingml/2006/main" xmlns:r="http://schemas.openxmlformats.org/officeDocument/2006/relationships" xmlns:p="http://schemas.openxmlformats.org/presentationml/2006/main">
+<p:sld xmlns:a="http://schemas.openxmlformats.org/drawingml/2006/main" xmlns:p="http://schemas.openxmlformats.org/presentationml/2006/main" xmlns:r="http://schemas.openxmlformats.org/officeDocument/2006/relationships" xmlns:p14="http://schemas.microsoft.com/office/powerpoint/2010/main" xmlns:p15="http://schemas.microsoft.com/office/powerpoint/2012/main" xmlns:mc="http://schemas.openxmlformats.org/markup-compatibility/2006">
   <p:cSld>
     <p:spTree>
       <p:nvGrpSpPr>
@@ -5746,8 +7888,8 @@
         </p:nvSpPr>
         <p:spPr>
           <a:xfrm>
-            <a:off x="504000" y="225720"/>
-            <a:ext cx="9072000" cy="946800"/>
+            <a:off x="504000" y="225360"/>
+            <a:ext cx="9071640" cy="947160"/>
           </a:xfrm>
           <a:prstGeom prst="rect">
             <a:avLst/>
@@ -5761,10 +7903,15 @@
           <a:bodyPr lIns="0" tIns="0" rIns="0" bIns="0" anchor="ctr">
             <a:spAutoFit/>
           </a:bodyPr>
-          <a:lstStyle/>
-          <a:p>
-            <a:pPr indent="0" algn="ctr">
+          <a:p>
+            <a:pPr indent="0" algn="ctr" defTabSz="914400">
+              <a:lnSpc>
+                <a:spcPct val="90000"/>
+              </a:lnSpc>
               <a:buNone/>
+              <a:tabLst>
+                <a:tab pos="0" algn="l"/>
+              </a:tabLst>
             </a:pPr>
             <a:r>
               <a:rPr lang="en-US" sz="3300" b="0" u="none" strike="noStrike">
@@ -5774,9 +7921,18 @@
                 <a:effectLst/>
                 <a:uFillTx/>
                 <a:latin typeface="Arial"/>
+                <a:ea typeface="DejaVu Sans"/>
               </a:rPr>
               <a:t>Commute Vs Attrition</a:t>
             </a:r>
+            <a:endParaRPr lang="en-US" sz="3300" b="0" u="none" strike="noStrike">
+              <a:solidFill>
+                <a:srgbClr val="000000"/>
+              </a:solidFill>
+              <a:effectLst/>
+              <a:uFillTx/>
+              <a:latin typeface="Arial"/>
+            </a:endParaRPr>
           </a:p>
         </p:txBody>
       </p:sp>
@@ -5793,7 +7949,7 @@
         <p:spPr>
           <a:xfrm>
             <a:off x="504000" y="1326600"/>
-            <a:ext cx="4068000" cy="3288240"/>
+            <a:ext cx="4067640" cy="3287880"/>
           </a:xfrm>
           <a:prstGeom prst="rect">
             <a:avLst/>
@@ -5807,9 +7963,11 @@
           <a:bodyPr lIns="0" tIns="0" rIns="0" bIns="0" anchor="t">
             <a:normAutofit/>
           </a:bodyPr>
-          <a:lstStyle/>
-          <a:p>
-            <a:pPr marL="432000" indent="-324000" algn="l">
+          <a:p>
+            <a:pPr marL="432000" indent="-324000" algn="l" defTabSz="914400">
+              <a:lnSpc>
+                <a:spcPct val="100000"/>
+              </a:lnSpc>
               <a:spcBef>
                 <a:spcPts val="1060"/>
               </a:spcBef>
@@ -5821,16 +7979,25 @@
               <a:buChar char=""/>
             </a:pPr>
             <a:r>
-              <a:rPr lang="en-US" sz="2400" b="0" u="none" strike="noStrike" dirty="0">
-                <a:solidFill>
-                  <a:srgbClr val="000000"/>
-                </a:solidFill>
-                <a:effectLst/>
-                <a:uFillTx/>
-                <a:latin typeface="Arial"/>
+              <a:rPr lang="en-US" sz="2400" b="0" u="none" strike="noStrike">
+                <a:solidFill>
+                  <a:srgbClr val="000000"/>
+                </a:solidFill>
+                <a:effectLst/>
+                <a:uFillTx/>
+                <a:latin typeface="Arial"/>
+                <a:ea typeface="DejaVu Sans"/>
               </a:rPr>
               <a:t>It appears that commute does have an effect on Attrition, but it seems to level off between 15-20 miles in distance.</a:t>
             </a:r>
+            <a:endParaRPr lang="en-US" sz="2400" b="0" u="none" strike="noStrike">
+              <a:solidFill>
+                <a:srgbClr val="000000"/>
+              </a:solidFill>
+              <a:effectLst/>
+              <a:uFillTx/>
+              <a:latin typeface="Arial"/>
+            </a:endParaRPr>
           </a:p>
         </p:txBody>
       </p:sp>
@@ -5841,13 +8008,13 @@
           <p:nvPr/>
         </p:nvPicPr>
         <p:blipFill>
-          <a:blip r:embed="rId2"/>
+          <a:blip r:embed="rId1"/>
           <a:stretch/>
         </p:blipFill>
         <p:spPr>
           <a:xfrm>
             <a:off x="4572000" y="1371600"/>
-            <a:ext cx="5160600" cy="3696120"/>
+            <a:ext cx="5160240" cy="3695760"/>
           </a:xfrm>
           <a:prstGeom prst="rect">
             <a:avLst/>
@@ -5860,14 +8027,19 @@
       </p:pic>
     </p:spTree>
   </p:cSld>
-  <p:clrMapOvr>
-    <a:masterClrMapping/>
-  </p:clrMapOvr>
+  <mc:AlternateContent>
+    <mc:Choice Requires="p14">
+      <p:transition spd="slow" p14:dur="2000"/>
+    </mc:Choice>
+    <mc:Fallback>
+      <p:transition spd="slow"/>
+    </mc:Fallback>
+  </mc:AlternateContent>
 </p:sld>
 </file>
 
 <file path=ppt/theme/theme1.xml><?xml version="1.0" encoding="utf-8"?>
-<a:theme xmlns:a="http://schemas.openxmlformats.org/drawingml/2006/main" name="Office">
+<a:theme xmlns:a="http://schemas.openxmlformats.org/drawingml/2006/main" xmlns:r="http://schemas.openxmlformats.org/officeDocument/2006/relationships" name="Office">
   <a:themeElements>
     <a:clrScheme name="LibreOffice">
       <a:dk1>
@@ -5909,14 +8081,14 @@
     </a:clrScheme>
     <a:fontScheme name="Office">
       <a:majorFont>
-        <a:latin typeface="Arial"/>
-        <a:ea typeface="DejaVu Sans"/>
-        <a:cs typeface="DejaVu Sans"/>
+        <a:latin typeface="Arial" pitchFamily="0" charset="1"/>
+        <a:ea typeface="DejaVu Sans" pitchFamily="0" charset="1"/>
+        <a:cs typeface="DejaVu Sans" pitchFamily="0" charset="1"/>
       </a:majorFont>
       <a:minorFont>
-        <a:latin typeface="Arial"/>
-        <a:ea typeface="DejaVu Sans"/>
-        <a:cs typeface="DejaVu Sans"/>
+        <a:latin typeface="Arial" pitchFamily="0" charset="1"/>
+        <a:ea typeface="DejaVu Sans" pitchFamily="0" charset="1"/>
+        <a:cs typeface="DejaVu Sans" pitchFamily="0" charset="1"/>
       </a:minorFont>
     </a:fontScheme>
     <a:fmtScheme>
@@ -5969,7 +8141,5 @@
       </a:bgFillStyleLst>
     </a:fmtScheme>
   </a:themeElements>
-  <a:objectDefaults/>
-  <a:extraClrSchemeLst/>
 </a:theme>
 </file>
--- a/presentations/project2_presentation.pptx
+++ b/presentations/project2_presentation.pptx
@@ -1,42 +1,833 @@
 
 <file path=ppt/presentation.xml><?xml version="1.0" encoding="utf-8"?>
-<p:presentation xmlns:a="http://schemas.openxmlformats.org/drawingml/2006/main" xmlns:p="http://schemas.openxmlformats.org/presentationml/2006/main" xmlns:r="http://schemas.openxmlformats.org/officeDocument/2006/relationships" xmlns:p14="http://schemas.microsoft.com/office/powerpoint/2010/main" xmlns:p15="http://schemas.microsoft.com/office/powerpoint/2012/main" xmlns:mc="http://schemas.openxmlformats.org/markup-compatibility/2006">
+<p:presentation xmlns:a="http://schemas.openxmlformats.org/drawingml/2006/main" xmlns:r="http://schemas.openxmlformats.org/officeDocument/2006/relationships" xmlns:p="http://schemas.openxmlformats.org/presentationml/2006/main">
   <p:sldMasterIdLst>
-    <p:sldMasterId id="2147483648" r:id="rId2"/>
+    <p:sldMasterId id="2147483648" r:id="rId1"/>
   </p:sldMasterIdLst>
+  <p:notesMasterIdLst>
+    <p:notesMasterId r:id="rId19"/>
+  </p:notesMasterIdLst>
   <p:sldIdLst>
-    <p:sldId id="256" r:id="rId3"/>
-    <p:sldId id="257" r:id="rId4"/>
-    <p:sldId id="258" r:id="rId5"/>
-    <p:sldId id="259" r:id="rId6"/>
-    <p:sldId id="260" r:id="rId7"/>
-    <p:sldId id="261" r:id="rId8"/>
-    <p:sldId id="262" r:id="rId9"/>
-    <p:sldId id="263" r:id="rId10"/>
-    <p:sldId id="264" r:id="rId11"/>
-    <p:sldId id="265" r:id="rId12"/>
-    <p:sldId id="266" r:id="rId13"/>
-    <p:sldId id="267" r:id="rId14"/>
-    <p:sldId id="268" r:id="rId15"/>
-    <p:sldId id="269" r:id="rId16"/>
-    <p:sldId id="270" r:id="rId17"/>
-    <p:sldId id="271" r:id="rId18"/>
-    <p:sldId id="272" r:id="rId19"/>
-    <p:sldId id="273" r:id="rId20"/>
+    <p:sldId id="256" r:id="rId2"/>
+    <p:sldId id="257" r:id="rId3"/>
+    <p:sldId id="258" r:id="rId4"/>
+    <p:sldId id="259" r:id="rId5"/>
+    <p:sldId id="260" r:id="rId6"/>
+    <p:sldId id="261" r:id="rId7"/>
+    <p:sldId id="262" r:id="rId8"/>
+    <p:sldId id="263" r:id="rId9"/>
+    <p:sldId id="264" r:id="rId10"/>
+    <p:sldId id="265" r:id="rId11"/>
+    <p:sldId id="268" r:id="rId12"/>
+    <p:sldId id="269" r:id="rId13"/>
+    <p:sldId id="270" r:id="rId14"/>
+    <p:sldId id="271" r:id="rId15"/>
+    <p:sldId id="272" r:id="rId16"/>
+    <p:sldId id="273" r:id="rId17"/>
+    <p:sldId id="274" r:id="rId18"/>
   </p:sldIdLst>
   <p:sldSz cx="10080625" cy="5670550"/>
   <p:notesSz cx="7772400" cy="10058400"/>
+  <p:defaultTextStyle>
+    <a:defPPr>
+      <a:defRPr lang="en-US"/>
+    </a:defPPr>
+    <a:lvl1pPr marL="0" algn="l" defTabSz="914400" rtl="0" eaLnBrk="1" latinLnBrk="0" hangingPunct="1">
+      <a:defRPr sz="1800" kern="1200">
+        <a:solidFill>
+          <a:schemeClr val="tx1"/>
+        </a:solidFill>
+        <a:latin typeface="+mn-lt"/>
+        <a:ea typeface="+mn-ea"/>
+        <a:cs typeface="+mn-cs"/>
+      </a:defRPr>
+    </a:lvl1pPr>
+    <a:lvl2pPr marL="457200" algn="l" defTabSz="914400" rtl="0" eaLnBrk="1" latinLnBrk="0" hangingPunct="1">
+      <a:defRPr sz="1800" kern="1200">
+        <a:solidFill>
+          <a:schemeClr val="tx1"/>
+        </a:solidFill>
+        <a:latin typeface="+mn-lt"/>
+        <a:ea typeface="+mn-ea"/>
+        <a:cs typeface="+mn-cs"/>
+      </a:defRPr>
+    </a:lvl2pPr>
+    <a:lvl3pPr marL="914400" algn="l" defTabSz="914400" rtl="0" eaLnBrk="1" latinLnBrk="0" hangingPunct="1">
+      <a:defRPr sz="1800" kern="1200">
+        <a:solidFill>
+          <a:schemeClr val="tx1"/>
+        </a:solidFill>
+        <a:latin typeface="+mn-lt"/>
+        <a:ea typeface="+mn-ea"/>
+        <a:cs typeface="+mn-cs"/>
+      </a:defRPr>
+    </a:lvl3pPr>
+    <a:lvl4pPr marL="1371600" algn="l" defTabSz="914400" rtl="0" eaLnBrk="1" latinLnBrk="0" hangingPunct="1">
+      <a:defRPr sz="1800" kern="1200">
+        <a:solidFill>
+          <a:schemeClr val="tx1"/>
+        </a:solidFill>
+        <a:latin typeface="+mn-lt"/>
+        <a:ea typeface="+mn-ea"/>
+        <a:cs typeface="+mn-cs"/>
+      </a:defRPr>
+    </a:lvl4pPr>
+    <a:lvl5pPr marL="1828800" algn="l" defTabSz="914400" rtl="0" eaLnBrk="1" latinLnBrk="0" hangingPunct="1">
+      <a:defRPr sz="1800" kern="1200">
+        <a:solidFill>
+          <a:schemeClr val="tx1"/>
+        </a:solidFill>
+        <a:latin typeface="+mn-lt"/>
+        <a:ea typeface="+mn-ea"/>
+        <a:cs typeface="+mn-cs"/>
+      </a:defRPr>
+    </a:lvl5pPr>
+    <a:lvl6pPr marL="2286000" algn="l" defTabSz="914400" rtl="0" eaLnBrk="1" latinLnBrk="0" hangingPunct="1">
+      <a:defRPr sz="1800" kern="1200">
+        <a:solidFill>
+          <a:schemeClr val="tx1"/>
+        </a:solidFill>
+        <a:latin typeface="+mn-lt"/>
+        <a:ea typeface="+mn-ea"/>
+        <a:cs typeface="+mn-cs"/>
+      </a:defRPr>
+    </a:lvl6pPr>
+    <a:lvl7pPr marL="2743200" algn="l" defTabSz="914400" rtl="0" eaLnBrk="1" latinLnBrk="0" hangingPunct="1">
+      <a:defRPr sz="1800" kern="1200">
+        <a:solidFill>
+          <a:schemeClr val="tx1"/>
+        </a:solidFill>
+        <a:latin typeface="+mn-lt"/>
+        <a:ea typeface="+mn-ea"/>
+        <a:cs typeface="+mn-cs"/>
+      </a:defRPr>
+    </a:lvl7pPr>
+    <a:lvl8pPr marL="3200400" algn="l" defTabSz="914400" rtl="0" eaLnBrk="1" latinLnBrk="0" hangingPunct="1">
+      <a:defRPr sz="1800" kern="1200">
+        <a:solidFill>
+          <a:schemeClr val="tx1"/>
+        </a:solidFill>
+        <a:latin typeface="+mn-lt"/>
+        <a:ea typeface="+mn-ea"/>
+        <a:cs typeface="+mn-cs"/>
+      </a:defRPr>
+    </a:lvl8pPr>
+    <a:lvl9pPr marL="3657600" algn="l" defTabSz="914400" rtl="0" eaLnBrk="1" latinLnBrk="0" hangingPunct="1">
+      <a:defRPr sz="1800" kern="1200">
+        <a:solidFill>
+          <a:schemeClr val="tx1"/>
+        </a:solidFill>
+        <a:latin typeface="+mn-lt"/>
+        <a:ea typeface="+mn-ea"/>
+        <a:cs typeface="+mn-cs"/>
+      </a:defRPr>
+    </a:lvl9pPr>
+  </p:defaultTextStyle>
 </p:presentation>
 </file>
 
+<file path=ppt/notesMasters/notesMaster1.xml><?xml version="1.0" encoding="utf-8"?>
+<p:notesMaster xmlns:a="http://schemas.openxmlformats.org/drawingml/2006/main" xmlns:r="http://schemas.openxmlformats.org/officeDocument/2006/relationships" xmlns:p="http://schemas.openxmlformats.org/presentationml/2006/main">
+  <p:cSld>
+    <p:bg>
+      <p:bgRef idx="1001">
+        <a:schemeClr val="bg1"/>
+      </p:bgRef>
+    </p:bg>
+    <p:spTree>
+      <p:nvGrpSpPr>
+        <p:cNvPr id="1" name=""/>
+        <p:cNvGrpSpPr/>
+        <p:nvPr/>
+      </p:nvGrpSpPr>
+      <p:grpSpPr>
+        <a:xfrm>
+          <a:off x="0" y="0"/>
+          <a:ext cx="0" cy="0"/>
+          <a:chOff x="0" y="0"/>
+          <a:chExt cx="0" cy="0"/>
+        </a:xfrm>
+      </p:grpSpPr>
+      <p:sp>
+        <p:nvSpPr>
+          <p:cNvPr id="2" name="Header Placeholder 1"/>
+          <p:cNvSpPr>
+            <a:spLocks noGrp="1"/>
+          </p:cNvSpPr>
+          <p:nvPr>
+            <p:ph type="hdr" sz="quarter"/>
+          </p:nvPr>
+        </p:nvSpPr>
+        <p:spPr>
+          <a:xfrm>
+            <a:off x="0" y="0"/>
+            <a:ext cx="3368675" cy="504825"/>
+          </a:xfrm>
+          <a:prstGeom prst="rect">
+            <a:avLst/>
+          </a:prstGeom>
+        </p:spPr>
+        <p:txBody>
+          <a:bodyPr vert="horz" lIns="91440" tIns="45720" rIns="91440" bIns="45720" rtlCol="0"/>
+          <a:lstStyle>
+            <a:lvl1pPr algn="l">
+              <a:defRPr sz="1200"/>
+            </a:lvl1pPr>
+          </a:lstStyle>
+          <a:p>
+            <a:endParaRPr lang="en-US"/>
+          </a:p>
+        </p:txBody>
+      </p:sp>
+      <p:sp>
+        <p:nvSpPr>
+          <p:cNvPr id="3" name="Date Placeholder 2"/>
+          <p:cNvSpPr>
+            <a:spLocks noGrp="1"/>
+          </p:cNvSpPr>
+          <p:nvPr>
+            <p:ph type="dt" idx="1"/>
+          </p:nvPr>
+        </p:nvSpPr>
+        <p:spPr>
+          <a:xfrm>
+            <a:off x="4402138" y="0"/>
+            <a:ext cx="3368675" cy="504825"/>
+          </a:xfrm>
+          <a:prstGeom prst="rect">
+            <a:avLst/>
+          </a:prstGeom>
+        </p:spPr>
+        <p:txBody>
+          <a:bodyPr vert="horz" lIns="91440" tIns="45720" rIns="91440" bIns="45720" rtlCol="0"/>
+          <a:lstStyle>
+            <a:lvl1pPr algn="r">
+              <a:defRPr sz="1200"/>
+            </a:lvl1pPr>
+          </a:lstStyle>
+          <a:p>
+            <a:fld id="{55066E75-1943-4841-9BB4-67C900D60EA4}" type="datetimeFigureOut">
+              <a:rPr lang="en-US" smtClean="0"/>
+              <a:t>7/29/2026</a:t>
+            </a:fld>
+            <a:endParaRPr lang="en-US"/>
+          </a:p>
+        </p:txBody>
+      </p:sp>
+      <p:sp>
+        <p:nvSpPr>
+          <p:cNvPr id="4" name="Slide Image Placeholder 3"/>
+          <p:cNvSpPr>
+            <a:spLocks noGrp="1" noRot="1" noChangeAspect="1"/>
+          </p:cNvSpPr>
+          <p:nvPr>
+            <p:ph type="sldImg" idx="2"/>
+          </p:nvPr>
+        </p:nvSpPr>
+        <p:spPr>
+          <a:xfrm>
+            <a:off x="869950" y="1257300"/>
+            <a:ext cx="6032500" cy="3394075"/>
+          </a:xfrm>
+          <a:prstGeom prst="rect">
+            <a:avLst/>
+          </a:prstGeom>
+          <a:noFill/>
+          <a:ln w="12700">
+            <a:solidFill>
+              <a:prstClr val="black"/>
+            </a:solidFill>
+          </a:ln>
+        </p:spPr>
+        <p:txBody>
+          <a:bodyPr vert="horz" lIns="91440" tIns="45720" rIns="91440" bIns="45720" rtlCol="0" anchor="ctr"/>
+          <a:lstStyle/>
+          <a:p>
+            <a:endParaRPr lang="en-US"/>
+          </a:p>
+        </p:txBody>
+      </p:sp>
+      <p:sp>
+        <p:nvSpPr>
+          <p:cNvPr id="5" name="Notes Placeholder 4"/>
+          <p:cNvSpPr>
+            <a:spLocks noGrp="1"/>
+          </p:cNvSpPr>
+          <p:nvPr>
+            <p:ph type="body" sz="quarter" idx="3"/>
+          </p:nvPr>
+        </p:nvSpPr>
+        <p:spPr>
+          <a:xfrm>
+            <a:off x="777875" y="4840288"/>
+            <a:ext cx="6216650" cy="3960812"/>
+          </a:xfrm>
+          <a:prstGeom prst="rect">
+            <a:avLst/>
+          </a:prstGeom>
+        </p:spPr>
+        <p:txBody>
+          <a:bodyPr vert="horz" lIns="91440" tIns="45720" rIns="91440" bIns="45720" rtlCol="0"/>
+          <a:lstStyle/>
+          <a:p>
+            <a:pPr lvl="0"/>
+            <a:r>
+              <a:rPr lang="en-US"/>
+              <a:t>Click to edit Master text styles</a:t>
+            </a:r>
+          </a:p>
+          <a:p>
+            <a:pPr lvl="1"/>
+            <a:r>
+              <a:rPr lang="en-US"/>
+              <a:t>Second level</a:t>
+            </a:r>
+          </a:p>
+          <a:p>
+            <a:pPr lvl="2"/>
+            <a:r>
+              <a:rPr lang="en-US"/>
+              <a:t>Third level</a:t>
+            </a:r>
+          </a:p>
+          <a:p>
+            <a:pPr lvl="3"/>
+            <a:r>
+              <a:rPr lang="en-US"/>
+              <a:t>Fourth level</a:t>
+            </a:r>
+          </a:p>
+          <a:p>
+            <a:pPr lvl="4"/>
+            <a:r>
+              <a:rPr lang="en-US"/>
+              <a:t>Fifth level</a:t>
+            </a:r>
+          </a:p>
+        </p:txBody>
+      </p:sp>
+      <p:sp>
+        <p:nvSpPr>
+          <p:cNvPr id="6" name="Footer Placeholder 5"/>
+          <p:cNvSpPr>
+            <a:spLocks noGrp="1"/>
+          </p:cNvSpPr>
+          <p:nvPr>
+            <p:ph type="ftr" sz="quarter" idx="4"/>
+          </p:nvPr>
+        </p:nvSpPr>
+        <p:spPr>
+          <a:xfrm>
+            <a:off x="0" y="9553575"/>
+            <a:ext cx="3368675" cy="504825"/>
+          </a:xfrm>
+          <a:prstGeom prst="rect">
+            <a:avLst/>
+          </a:prstGeom>
+        </p:spPr>
+        <p:txBody>
+          <a:bodyPr vert="horz" lIns="91440" tIns="45720" rIns="91440" bIns="45720" rtlCol="0" anchor="b"/>
+          <a:lstStyle>
+            <a:lvl1pPr algn="l">
+              <a:defRPr sz="1200"/>
+            </a:lvl1pPr>
+          </a:lstStyle>
+          <a:p>
+            <a:endParaRPr lang="en-US"/>
+          </a:p>
+        </p:txBody>
+      </p:sp>
+      <p:sp>
+        <p:nvSpPr>
+          <p:cNvPr id="7" name="Slide Number Placeholder 6"/>
+          <p:cNvSpPr>
+            <a:spLocks noGrp="1"/>
+          </p:cNvSpPr>
+          <p:nvPr>
+            <p:ph type="sldNum" sz="quarter" idx="5"/>
+          </p:nvPr>
+        </p:nvSpPr>
+        <p:spPr>
+          <a:xfrm>
+            <a:off x="4402138" y="9553575"/>
+            <a:ext cx="3368675" cy="504825"/>
+          </a:xfrm>
+          <a:prstGeom prst="rect">
+            <a:avLst/>
+          </a:prstGeom>
+        </p:spPr>
+        <p:txBody>
+          <a:bodyPr vert="horz" lIns="91440" tIns="45720" rIns="91440" bIns="45720" rtlCol="0" anchor="b"/>
+          <a:lstStyle>
+            <a:lvl1pPr algn="r">
+              <a:defRPr sz="1200"/>
+            </a:lvl1pPr>
+          </a:lstStyle>
+          <a:p>
+            <a:fld id="{AA2E038D-BB64-48CA-8577-8E4F392A4085}" type="slidenum">
+              <a:rPr lang="en-US" smtClean="0"/>
+              <a:t>‹#›</a:t>
+            </a:fld>
+            <a:endParaRPr lang="en-US"/>
+          </a:p>
+        </p:txBody>
+      </p:sp>
+    </p:spTree>
+    <p:extLst>
+      <p:ext uri="{BB962C8B-B14F-4D97-AF65-F5344CB8AC3E}">
+        <p14:creationId xmlns:p14="http://schemas.microsoft.com/office/powerpoint/2010/main" val="4277262814"/>
+      </p:ext>
+    </p:extLst>
+  </p:cSld>
+  <p:clrMap bg1="lt1" tx1="dk1" bg2="lt2" tx2="dk2" accent1="accent1" accent2="accent2" accent3="accent3" accent4="accent4" accent5="accent5" accent6="accent6" hlink="hlink" folHlink="folHlink"/>
+  <p:notesStyle>
+    <a:lvl1pPr marL="0" algn="l" defTabSz="914400" rtl="0" eaLnBrk="1" latinLnBrk="0" hangingPunct="1">
+      <a:defRPr sz="1200" kern="1200">
+        <a:solidFill>
+          <a:schemeClr val="tx1"/>
+        </a:solidFill>
+        <a:latin typeface="+mn-lt"/>
+        <a:ea typeface="+mn-ea"/>
+        <a:cs typeface="+mn-cs"/>
+      </a:defRPr>
+    </a:lvl1pPr>
+    <a:lvl2pPr marL="457200" algn="l" defTabSz="914400" rtl="0" eaLnBrk="1" latinLnBrk="0" hangingPunct="1">
+      <a:defRPr sz="1200" kern="1200">
+        <a:solidFill>
+          <a:schemeClr val="tx1"/>
+        </a:solidFill>
+        <a:latin typeface="+mn-lt"/>
+        <a:ea typeface="+mn-ea"/>
+        <a:cs typeface="+mn-cs"/>
+      </a:defRPr>
+    </a:lvl2pPr>
+    <a:lvl3pPr marL="914400" algn="l" defTabSz="914400" rtl="0" eaLnBrk="1" latinLnBrk="0" hangingPunct="1">
+      <a:defRPr sz="1200" kern="1200">
+        <a:solidFill>
+          <a:schemeClr val="tx1"/>
+        </a:solidFill>
+        <a:latin typeface="+mn-lt"/>
+        <a:ea typeface="+mn-ea"/>
+        <a:cs typeface="+mn-cs"/>
+      </a:defRPr>
+    </a:lvl3pPr>
+    <a:lvl4pPr marL="1371600" algn="l" defTabSz="914400" rtl="0" eaLnBrk="1" latinLnBrk="0" hangingPunct="1">
+      <a:defRPr sz="1200" kern="1200">
+        <a:solidFill>
+          <a:schemeClr val="tx1"/>
+        </a:solidFill>
+        <a:latin typeface="+mn-lt"/>
+        <a:ea typeface="+mn-ea"/>
+        <a:cs typeface="+mn-cs"/>
+      </a:defRPr>
+    </a:lvl4pPr>
+    <a:lvl5pPr marL="1828800" algn="l" defTabSz="914400" rtl="0" eaLnBrk="1" latinLnBrk="0" hangingPunct="1">
+      <a:defRPr sz="1200" kern="1200">
+        <a:solidFill>
+          <a:schemeClr val="tx1"/>
+        </a:solidFill>
+        <a:latin typeface="+mn-lt"/>
+        <a:ea typeface="+mn-ea"/>
+        <a:cs typeface="+mn-cs"/>
+      </a:defRPr>
+    </a:lvl5pPr>
+    <a:lvl6pPr marL="2286000" algn="l" defTabSz="914400" rtl="0" eaLnBrk="1" latinLnBrk="0" hangingPunct="1">
+      <a:defRPr sz="1200" kern="1200">
+        <a:solidFill>
+          <a:schemeClr val="tx1"/>
+        </a:solidFill>
+        <a:latin typeface="+mn-lt"/>
+        <a:ea typeface="+mn-ea"/>
+        <a:cs typeface="+mn-cs"/>
+      </a:defRPr>
+    </a:lvl6pPr>
+    <a:lvl7pPr marL="2743200" algn="l" defTabSz="914400" rtl="0" eaLnBrk="1" latinLnBrk="0" hangingPunct="1">
+      <a:defRPr sz="1200" kern="1200">
+        <a:solidFill>
+          <a:schemeClr val="tx1"/>
+        </a:solidFill>
+        <a:latin typeface="+mn-lt"/>
+        <a:ea typeface="+mn-ea"/>
+        <a:cs typeface="+mn-cs"/>
+      </a:defRPr>
+    </a:lvl7pPr>
+    <a:lvl8pPr marL="3200400" algn="l" defTabSz="914400" rtl="0" eaLnBrk="1" latinLnBrk="0" hangingPunct="1">
+      <a:defRPr sz="1200" kern="1200">
+        <a:solidFill>
+          <a:schemeClr val="tx1"/>
+        </a:solidFill>
+        <a:latin typeface="+mn-lt"/>
+        <a:ea typeface="+mn-ea"/>
+        <a:cs typeface="+mn-cs"/>
+      </a:defRPr>
+    </a:lvl8pPr>
+    <a:lvl9pPr marL="3657600" algn="l" defTabSz="914400" rtl="0" eaLnBrk="1" latinLnBrk="0" hangingPunct="1">
+      <a:defRPr sz="1200" kern="1200">
+        <a:solidFill>
+          <a:schemeClr val="tx1"/>
+        </a:solidFill>
+        <a:latin typeface="+mn-lt"/>
+        <a:ea typeface="+mn-ea"/>
+        <a:cs typeface="+mn-cs"/>
+      </a:defRPr>
+    </a:lvl9pPr>
+  </p:notesStyle>
+</p:notesMaster>
+</file>
+
+<file path=ppt/notesSlides/notesSlide1.xml><?xml version="1.0" encoding="utf-8"?>
+<p:notes xmlns:a="http://schemas.openxmlformats.org/drawingml/2006/main" xmlns:r="http://schemas.openxmlformats.org/officeDocument/2006/relationships" xmlns:p="http://schemas.openxmlformats.org/presentationml/2006/main">
+  <p:cSld>
+    <p:spTree>
+      <p:nvGrpSpPr>
+        <p:cNvPr id="1" name=""/>
+        <p:cNvGrpSpPr/>
+        <p:nvPr/>
+      </p:nvGrpSpPr>
+      <p:grpSpPr>
+        <a:xfrm>
+          <a:off x="0" y="0"/>
+          <a:ext cx="0" cy="0"/>
+          <a:chOff x="0" y="0"/>
+          <a:chExt cx="0" cy="0"/>
+        </a:xfrm>
+      </p:grpSpPr>
+      <p:sp>
+        <p:nvSpPr>
+          <p:cNvPr id="2" name="Slide Image Placeholder 1"/>
+          <p:cNvSpPr>
+            <a:spLocks noGrp="1" noRot="1" noChangeAspect="1"/>
+          </p:cNvSpPr>
+          <p:nvPr>
+            <p:ph type="sldImg"/>
+          </p:nvPr>
+        </p:nvSpPr>
+        <p:spPr/>
+      </p:sp>
+      <p:sp>
+        <p:nvSpPr>
+          <p:cNvPr id="3" name="Notes Placeholder 2"/>
+          <p:cNvSpPr>
+            <a:spLocks noGrp="1"/>
+          </p:cNvSpPr>
+          <p:nvPr>
+            <p:ph type="body" idx="1"/>
+          </p:nvPr>
+        </p:nvSpPr>
+        <p:spPr/>
+        <p:txBody>
+          <a:bodyPr/>
+          <a:lstStyle/>
+          <a:p>
+            <a:pPr marL="0" marR="0" lvl="0" indent="0" algn="l" defTabSz="914400" rtl="0" eaLnBrk="1" fontAlgn="auto" latinLnBrk="0" hangingPunct="1">
+              <a:lnSpc>
+                <a:spcPct val="100000"/>
+              </a:lnSpc>
+              <a:spcBef>
+                <a:spcPts val="0"/>
+              </a:spcBef>
+              <a:spcAft>
+                <a:spcPts val="0"/>
+              </a:spcAft>
+              <a:buClrTx/>
+              <a:buSzTx/>
+              <a:buFontTx/>
+              <a:buNone/>
+              <a:tabLst/>
+              <a:defRPr/>
+            </a:pPr>
+            <a:r>
+              <a:rPr lang="en-US" sz="1200" b="0" u="none" strike="noStrike" dirty="0">
+                <a:solidFill>
+                  <a:srgbClr val="000000"/>
+                </a:solidFill>
+                <a:effectLst/>
+                <a:uFillTx/>
+                <a:latin typeface="Arial"/>
+                <a:ea typeface="DejaVu Sans"/>
+              </a:rPr>
+              <a:t>This</a:t>
+            </a:r>
+            <a:r>
+              <a:rPr lang="en-US" sz="1200" dirty="0"/>
+              <a:t> may be due to</a:t>
+            </a:r>
+            <a:r>
+              <a:rPr lang="en-US" sz="1200" b="0" u="none" strike="noStrike" dirty="0">
+                <a:solidFill>
+                  <a:srgbClr val="000000"/>
+                </a:solidFill>
+                <a:effectLst/>
+                <a:uFillTx/>
+                <a:latin typeface="Arial"/>
+                <a:ea typeface="DejaVu Sans"/>
+              </a:rPr>
+              <a:t> employees that have worked at more companies are more likely to be looking for new opportunities</a:t>
+            </a:r>
+          </a:p>
+          <a:p>
+            <a:pPr marL="0" marR="0" lvl="0" indent="0" algn="l" defTabSz="914400" rtl="0" eaLnBrk="1" fontAlgn="auto" latinLnBrk="0" hangingPunct="1">
+              <a:lnSpc>
+                <a:spcPct val="100000"/>
+              </a:lnSpc>
+              <a:spcBef>
+                <a:spcPts val="0"/>
+              </a:spcBef>
+              <a:spcAft>
+                <a:spcPts val="0"/>
+              </a:spcAft>
+              <a:buClrTx/>
+              <a:buSzTx/>
+              <a:buFontTx/>
+              <a:buNone/>
+              <a:tabLst/>
+              <a:defRPr/>
+            </a:pPr>
+            <a:r>
+              <a:rPr lang="en-US" sz="1200" b="0" u="none" strike="noStrike" dirty="0">
+                <a:solidFill>
+                  <a:srgbClr val="000000"/>
+                </a:solidFill>
+                <a:effectLst/>
+                <a:uFillTx/>
+                <a:latin typeface="Arial"/>
+                <a:ea typeface="DejaVu Sans"/>
+              </a:rPr>
+              <a:t>Could also be retirees or other senior employees</a:t>
+            </a:r>
+            <a:endParaRPr lang="en-US" sz="1200" b="0" u="none" strike="noStrike" dirty="0">
+              <a:solidFill>
+                <a:srgbClr val="000000"/>
+              </a:solidFill>
+              <a:effectLst/>
+              <a:uFillTx/>
+              <a:latin typeface="Arial"/>
+            </a:endParaRPr>
+          </a:p>
+          <a:p>
+            <a:endParaRPr lang="en-US" dirty="0"/>
+          </a:p>
+        </p:txBody>
+      </p:sp>
+      <p:sp>
+        <p:nvSpPr>
+          <p:cNvPr id="4" name="Slide Number Placeholder 3"/>
+          <p:cNvSpPr>
+            <a:spLocks noGrp="1"/>
+          </p:cNvSpPr>
+          <p:nvPr>
+            <p:ph type="sldNum" sz="quarter" idx="5"/>
+          </p:nvPr>
+        </p:nvSpPr>
+        <p:spPr/>
+        <p:txBody>
+          <a:bodyPr/>
+          <a:lstStyle/>
+          <a:p>
+            <a:fld id="{AA2E038D-BB64-48CA-8577-8E4F392A4085}" type="slidenum">
+              <a:rPr lang="en-US" smtClean="0"/>
+              <a:t>11</a:t>
+            </a:fld>
+            <a:endParaRPr lang="en-US"/>
+          </a:p>
+        </p:txBody>
+      </p:sp>
+    </p:spTree>
+    <p:extLst>
+      <p:ext uri="{BB962C8B-B14F-4D97-AF65-F5344CB8AC3E}">
+        <p14:creationId xmlns:p14="http://schemas.microsoft.com/office/powerpoint/2010/main" val="2279119277"/>
+      </p:ext>
+    </p:extLst>
+  </p:cSld>
+  <p:clrMapOvr>
+    <a:masterClrMapping/>
+  </p:clrMapOvr>
+</p:notes>
+</file>
+
+<file path=ppt/notesSlides/notesSlide2.xml><?xml version="1.0" encoding="utf-8"?>
+<p:notes xmlns:a="http://schemas.openxmlformats.org/drawingml/2006/main" xmlns:r="http://schemas.openxmlformats.org/officeDocument/2006/relationships" xmlns:p="http://schemas.openxmlformats.org/presentationml/2006/main">
+  <p:cSld>
+    <p:spTree>
+      <p:nvGrpSpPr>
+        <p:cNvPr id="1" name=""/>
+        <p:cNvGrpSpPr/>
+        <p:nvPr/>
+      </p:nvGrpSpPr>
+      <p:grpSpPr>
+        <a:xfrm>
+          <a:off x="0" y="0"/>
+          <a:ext cx="0" cy="0"/>
+          <a:chOff x="0" y="0"/>
+          <a:chExt cx="0" cy="0"/>
+        </a:xfrm>
+      </p:grpSpPr>
+      <p:sp>
+        <p:nvSpPr>
+          <p:cNvPr id="2" name="Slide Image Placeholder 1"/>
+          <p:cNvSpPr>
+            <a:spLocks noGrp="1" noRot="1" noChangeAspect="1"/>
+          </p:cNvSpPr>
+          <p:nvPr>
+            <p:ph type="sldImg"/>
+          </p:nvPr>
+        </p:nvSpPr>
+        <p:spPr/>
+      </p:sp>
+      <p:sp>
+        <p:nvSpPr>
+          <p:cNvPr id="3" name="Notes Placeholder 2"/>
+          <p:cNvSpPr>
+            <a:spLocks noGrp="1"/>
+          </p:cNvSpPr>
+          <p:nvPr>
+            <p:ph type="body" idx="1"/>
+          </p:nvPr>
+        </p:nvSpPr>
+        <p:spPr/>
+        <p:txBody>
+          <a:bodyPr/>
+          <a:lstStyle/>
+          <a:p>
+            <a:r>
+              <a:rPr lang="en-US" dirty="0"/>
+              <a:t>Positive meaning more likely to leave</a:t>
+            </a:r>
+          </a:p>
+        </p:txBody>
+      </p:sp>
+      <p:sp>
+        <p:nvSpPr>
+          <p:cNvPr id="4" name="Slide Number Placeholder 3"/>
+          <p:cNvSpPr>
+            <a:spLocks noGrp="1"/>
+          </p:cNvSpPr>
+          <p:nvPr>
+            <p:ph type="sldNum" sz="quarter" idx="5"/>
+          </p:nvPr>
+        </p:nvSpPr>
+        <p:spPr/>
+        <p:txBody>
+          <a:bodyPr/>
+          <a:lstStyle/>
+          <a:p>
+            <a:fld id="{AA2E038D-BB64-48CA-8577-8E4F392A4085}" type="slidenum">
+              <a:rPr lang="en-US" smtClean="0"/>
+              <a:t>12</a:t>
+            </a:fld>
+            <a:endParaRPr lang="en-US"/>
+          </a:p>
+        </p:txBody>
+      </p:sp>
+    </p:spTree>
+    <p:extLst>
+      <p:ext uri="{BB962C8B-B14F-4D97-AF65-F5344CB8AC3E}">
+        <p14:creationId xmlns:p14="http://schemas.microsoft.com/office/powerpoint/2010/main" val="4215998153"/>
+      </p:ext>
+    </p:extLst>
+  </p:cSld>
+  <p:clrMapOvr>
+    <a:masterClrMapping/>
+  </p:clrMapOvr>
+</p:notes>
+</file>
+
+<file path=ppt/notesSlides/notesSlide3.xml><?xml version="1.0" encoding="utf-8"?>
+<p:notes xmlns:a="http://schemas.openxmlformats.org/drawingml/2006/main" xmlns:r="http://schemas.openxmlformats.org/officeDocument/2006/relationships" xmlns:p="http://schemas.openxmlformats.org/presentationml/2006/main">
+  <p:cSld>
+    <p:spTree>
+      <p:nvGrpSpPr>
+        <p:cNvPr id="1" name=""/>
+        <p:cNvGrpSpPr/>
+        <p:nvPr/>
+      </p:nvGrpSpPr>
+      <p:grpSpPr>
+        <a:xfrm>
+          <a:off x="0" y="0"/>
+          <a:ext cx="0" cy="0"/>
+          <a:chOff x="0" y="0"/>
+          <a:chExt cx="0" cy="0"/>
+        </a:xfrm>
+      </p:grpSpPr>
+      <p:sp>
+        <p:nvSpPr>
+          <p:cNvPr id="2" name="Slide Image Placeholder 1"/>
+          <p:cNvSpPr>
+            <a:spLocks noGrp="1" noRot="1" noChangeAspect="1"/>
+          </p:cNvSpPr>
+          <p:nvPr>
+            <p:ph type="sldImg"/>
+          </p:nvPr>
+        </p:nvSpPr>
+        <p:spPr/>
+      </p:sp>
+      <p:sp>
+        <p:nvSpPr>
+          <p:cNvPr id="3" name="Notes Placeholder 2"/>
+          <p:cNvSpPr>
+            <a:spLocks noGrp="1"/>
+          </p:cNvSpPr>
+          <p:nvPr>
+            <p:ph type="body" idx="1"/>
+          </p:nvPr>
+        </p:nvSpPr>
+        <p:spPr/>
+        <p:txBody>
+          <a:bodyPr/>
+          <a:lstStyle/>
+          <a:p>
+            <a:r>
+              <a:rPr lang="en-US" dirty="0"/>
+              <a:t>Negative meaning more likely to cause employees to stay</a:t>
+            </a:r>
+          </a:p>
+        </p:txBody>
+      </p:sp>
+      <p:sp>
+        <p:nvSpPr>
+          <p:cNvPr id="4" name="Slide Number Placeholder 3"/>
+          <p:cNvSpPr>
+            <a:spLocks noGrp="1"/>
+          </p:cNvSpPr>
+          <p:nvPr>
+            <p:ph type="sldNum" sz="quarter" idx="5"/>
+          </p:nvPr>
+        </p:nvSpPr>
+        <p:spPr/>
+        <p:txBody>
+          <a:bodyPr/>
+          <a:lstStyle/>
+          <a:p>
+            <a:fld id="{AA2E038D-BB64-48CA-8577-8E4F392A4085}" type="slidenum">
+              <a:rPr lang="en-US" smtClean="0"/>
+              <a:t>13</a:t>
+            </a:fld>
+            <a:endParaRPr lang="en-US"/>
+          </a:p>
+        </p:txBody>
+      </p:sp>
+    </p:spTree>
+    <p:extLst>
+      <p:ext uri="{BB962C8B-B14F-4D97-AF65-F5344CB8AC3E}">
+        <p14:creationId xmlns:p14="http://schemas.microsoft.com/office/powerpoint/2010/main" val="2664938667"/>
+      </p:ext>
+    </p:extLst>
+  </p:cSld>
+  <p:clrMapOvr>
+    <a:masterClrMapping/>
+  </p:clrMapOvr>
+</p:notes>
+</file>
+
 <file path=ppt/slideLayouts/slideLayout1.xml><?xml version="1.0" encoding="utf-8"?>
-<p:sldLayout xmlns:a="http://schemas.openxmlformats.org/drawingml/2006/main" xmlns:p="http://schemas.openxmlformats.org/presentationml/2006/main" xmlns:r="http://schemas.openxmlformats.org/officeDocument/2006/relationships" xmlns:p14="http://schemas.microsoft.com/office/powerpoint/2010/main" xmlns:p15="http://schemas.microsoft.com/office/powerpoint/2012/main" xmlns:mc="http://schemas.openxmlformats.org/markup-compatibility/2006" type="tx" preserve="1">
+<p:sldLayout xmlns:a="http://schemas.openxmlformats.org/drawingml/2006/main" xmlns:r="http://schemas.openxmlformats.org/officeDocument/2006/relationships" xmlns:p="http://schemas.openxmlformats.org/presentationml/2006/main" type="tx" preserve="1">
   <p:cSld name="Blueprint Plans">
     <p:bg>
       <p:bgPr>
         <a:solidFill>
           <a:srgbClr val="FFFFFF"/>
         </a:solidFill>
+        <a:effectLst/>
       </p:bgPr>
     </p:bg>
     <p:spTree>
@@ -60,10 +851,10 @@
           <p:nvPr/>
         </p:nvPicPr>
         <p:blipFill>
-          <a:blip r:embed="rId2">
+          <a:blip>
             <a:extLst>
               <a:ext uri="{96DAC541-7B7A-43D3-8B79-37D633B846F1}">
-                <asvg:svgBlip xmlns:asvg="http://schemas.microsoft.com/office/drawing/2016/SVG/main" r:embed="rId3"/>
+                <asvg:svgBlip xmlns:asvg="http://schemas.microsoft.com/office/drawing/2016/SVG/main" r:embed="rId2"/>
               </a:ext>
             </a:extLst>
           </a:blip>
@@ -150,43 +941,7 @@
                 <a:latin typeface="Arial"/>
                 <a:ea typeface="DejaVu Sans"/>
               </a:rPr>
-              <a:t>Click to </a:t>
-            </a:r>
-            <a:r>
-              <a:rPr lang="en-US" sz="4400" b="0" u="none" strike="noStrike">
-                <a:solidFill>
-                  <a:srgbClr val="FFFFFF"/>
-                </a:solidFill>
-                <a:effectLst/>
-                <a:uFillTx/>
-                <a:latin typeface="Arial"/>
-                <a:ea typeface="DejaVu Sans"/>
-              </a:rPr>
-              <a:t>edit the </a:t>
-            </a:r>
-            <a:r>
-              <a:rPr lang="en-US" sz="4400" b="0" u="none" strike="noStrike">
-                <a:solidFill>
-                  <a:srgbClr val="FFFFFF"/>
-                </a:solidFill>
-                <a:effectLst/>
-                <a:uFillTx/>
-                <a:latin typeface="Arial"/>
-                <a:ea typeface="DejaVu Sans"/>
-              </a:rPr>
-              <a:t>title text </a:t>
-            </a:r>
-            <a:r>
-              <a:rPr lang="en-US" sz="4400" b="0" u="none" strike="noStrike">
-                <a:solidFill>
-                  <a:srgbClr val="FFFFFF"/>
-                </a:solidFill>
-                <a:effectLst/>
-                <a:uFillTx/>
-                <a:latin typeface="Arial"/>
-                <a:ea typeface="DejaVu Sans"/>
-              </a:rPr>
-              <a:t>format</a:t>
+              <a:t>Click to edit the title text format</a:t>
             </a:r>
             <a:endParaRPr lang="en-US" sz="4400" b="0" u="none" strike="noStrike">
               <a:solidFill>
@@ -870,7 +1625,7 @@
                 <a:latin typeface="Arial"/>
                 <a:ea typeface="DejaVu Sans"/>
               </a:rPr>
-              <a:t>&lt;number&gt;</a:t>
+              <a:t>‹#›</a:t>
             </a:fld>
             <a:endParaRPr lang="en-US" sz="1400" b="0" u="none" strike="noStrike">
               <a:solidFill>
@@ -885,17 +1640,21 @@
       </p:sp>
     </p:spTree>
   </p:cSld>
+  <p:clrMapOvr>
+    <a:masterClrMapping/>
+  </p:clrMapOvr>
 </p:sldLayout>
 </file>
 
 <file path=ppt/slideLayouts/slideLayout2.xml><?xml version="1.0" encoding="utf-8"?>
-<p:sldLayout xmlns:a="http://schemas.openxmlformats.org/drawingml/2006/main" xmlns:p="http://schemas.openxmlformats.org/presentationml/2006/main" xmlns:r="http://schemas.openxmlformats.org/officeDocument/2006/relationships" xmlns:p14="http://schemas.microsoft.com/office/powerpoint/2010/main" xmlns:p15="http://schemas.microsoft.com/office/powerpoint/2012/main" xmlns:mc="http://schemas.openxmlformats.org/markup-compatibility/2006" type="title" preserve="1">
+<p:sldLayout xmlns:a="http://schemas.openxmlformats.org/drawingml/2006/main" xmlns:r="http://schemas.openxmlformats.org/officeDocument/2006/relationships" xmlns:p="http://schemas.openxmlformats.org/presentationml/2006/main" type="title" preserve="1">
   <p:cSld name="Default">
     <p:bg>
       <p:bgPr>
         <a:solidFill>
           <a:srgbClr val="FFFFFF"/>
         </a:solidFill>
+        <a:effectLst/>
       </p:bgPr>
     </p:bg>
     <p:spTree>
@@ -919,10 +1678,10 @@
           <p:nvPr/>
         </p:nvPicPr>
         <p:blipFill>
-          <a:blip r:embed="rId2">
+          <a:blip>
             <a:extLst>
               <a:ext uri="{96DAC541-7B7A-43D3-8B79-37D633B846F1}">
-                <asvg:svgBlip xmlns:asvg="http://schemas.microsoft.com/office/drawing/2016/SVG/main" r:embed="rId3"/>
+                <asvg:svgBlip xmlns:asvg="http://schemas.microsoft.com/office/drawing/2016/SVG/main" r:embed="rId2"/>
               </a:ext>
             </a:extLst>
           </a:blip>
@@ -1009,43 +1768,7 @@
                 <a:latin typeface="Arial"/>
                 <a:ea typeface="DejaVu Sans"/>
               </a:rPr>
-              <a:t>Click to </a:t>
-            </a:r>
-            <a:r>
-              <a:rPr lang="en-US" sz="4400" b="0" u="none" strike="noStrike">
-                <a:solidFill>
-                  <a:srgbClr val="FFFFFF"/>
-                </a:solidFill>
-                <a:effectLst/>
-                <a:uFillTx/>
-                <a:latin typeface="Arial"/>
-                <a:ea typeface="DejaVu Sans"/>
-              </a:rPr>
-              <a:t>edit the </a:t>
-            </a:r>
-            <a:r>
-              <a:rPr lang="en-US" sz="4400" b="0" u="none" strike="noStrike">
-                <a:solidFill>
-                  <a:srgbClr val="FFFFFF"/>
-                </a:solidFill>
-                <a:effectLst/>
-                <a:uFillTx/>
-                <a:latin typeface="Arial"/>
-                <a:ea typeface="DejaVu Sans"/>
-              </a:rPr>
-              <a:t>title text </a:t>
-            </a:r>
-            <a:r>
-              <a:rPr lang="en-US" sz="4400" b="0" u="none" strike="noStrike">
-                <a:solidFill>
-                  <a:srgbClr val="FFFFFF"/>
-                </a:solidFill>
-                <a:effectLst/>
-                <a:uFillTx/>
-                <a:latin typeface="Arial"/>
-                <a:ea typeface="DejaVu Sans"/>
-              </a:rPr>
-              <a:t>format</a:t>
+              <a:t>Click to edit the title text format</a:t>
             </a:r>
             <a:endParaRPr lang="en-US" sz="4400" b="0" u="none" strike="noStrike">
               <a:solidFill>
@@ -1729,7 +2452,7 @@
                 <a:latin typeface="Arial"/>
                 <a:ea typeface="DejaVu Sans"/>
               </a:rPr>
-              <a:t>&lt;number&gt;</a:t>
+              <a:t>‹#›</a:t>
             </a:fld>
             <a:endParaRPr lang="en-US" sz="1400" b="0" u="none" strike="noStrike">
               <a:solidFill>
@@ -1744,17 +2467,21 @@
       </p:sp>
     </p:spTree>
   </p:cSld>
+  <p:clrMapOvr>
+    <a:masterClrMapping/>
+  </p:clrMapOvr>
 </p:sldLayout>
 </file>
 
 <file path=ppt/slideLayouts/slideLayout3.xml><?xml version="1.0" encoding="utf-8"?>
-<p:sldLayout xmlns:a="http://schemas.openxmlformats.org/drawingml/2006/main" xmlns:p="http://schemas.openxmlformats.org/presentationml/2006/main" xmlns:r="http://schemas.openxmlformats.org/officeDocument/2006/relationships" xmlns:p14="http://schemas.microsoft.com/office/powerpoint/2010/main" xmlns:p15="http://schemas.microsoft.com/office/powerpoint/2012/main" xmlns:mc="http://schemas.openxmlformats.org/markup-compatibility/2006" type="tx" preserve="1">
+<p:sldLayout xmlns:a="http://schemas.openxmlformats.org/drawingml/2006/main" xmlns:r="http://schemas.openxmlformats.org/officeDocument/2006/relationships" xmlns:p="http://schemas.openxmlformats.org/presentationml/2006/main" type="tx" preserve="1">
   <p:cSld name="Standard">
     <p:bg>
       <p:bgPr>
         <a:solidFill>
           <a:srgbClr val="FFFFFF"/>
         </a:solidFill>
+        <a:effectLst/>
       </p:bgPr>
     </p:bg>
     <p:spTree>
@@ -1778,10 +2505,10 @@
           <p:nvPr/>
         </p:nvPicPr>
         <p:blipFill>
-          <a:blip r:embed="rId2">
+          <a:blip>
             <a:extLst>
               <a:ext uri="{96DAC541-7B7A-43D3-8B79-37D633B846F1}">
-                <asvg:svgBlip xmlns:asvg="http://schemas.microsoft.com/office/drawing/2016/SVG/main" r:embed="rId3"/>
+                <asvg:svgBlip xmlns:asvg="http://schemas.microsoft.com/office/drawing/2016/SVG/main" r:embed="rId2"/>
               </a:ext>
             </a:extLst>
           </a:blip>
@@ -1868,31 +2595,7 @@
                 <a:latin typeface="Arial"/>
                 <a:ea typeface="DejaVu Sans"/>
               </a:rPr>
-              <a:t>Click to edit </a:t>
-            </a:r>
-            <a:r>
-              <a:rPr lang="en-US" sz="3300" b="0" u="none" strike="noStrike">
-                <a:solidFill>
-                  <a:srgbClr val="000000"/>
-                </a:solidFill>
-                <a:effectLst/>
-                <a:uFillTx/>
-                <a:latin typeface="Arial"/>
-                <a:ea typeface="DejaVu Sans"/>
-              </a:rPr>
-              <a:t>the title text </a:t>
-            </a:r>
-            <a:r>
-              <a:rPr lang="en-US" sz="3300" b="0" u="none" strike="noStrike">
-                <a:solidFill>
-                  <a:srgbClr val="000000"/>
-                </a:solidFill>
-                <a:effectLst/>
-                <a:uFillTx/>
-                <a:latin typeface="Arial"/>
-                <a:ea typeface="DejaVu Sans"/>
-              </a:rPr>
-              <a:t>format</a:t>
+              <a:t>Click to edit the title text format</a:t>
             </a:r>
             <a:endParaRPr lang="en-US" sz="3300" b="0" u="none" strike="noStrike">
               <a:solidFill>
@@ -2576,7 +3279,7 @@
                 <a:latin typeface="Arial"/>
                 <a:ea typeface="DejaVu Sans"/>
               </a:rPr>
-              <a:t>&lt;number&gt;</a:t>
+              <a:t>‹#›</a:t>
             </a:fld>
             <a:endParaRPr lang="en-US" sz="1400" b="0" u="none" strike="noStrike">
               <a:solidFill>
@@ -2591,12 +3294,20 @@
       </p:sp>
     </p:spTree>
   </p:cSld>
+  <p:clrMapOvr>
+    <a:masterClrMapping/>
+  </p:clrMapOvr>
 </p:sldLayout>
 </file>
 
 <file path=ppt/slideMasters/slideMaster1.xml><?xml version="1.0" encoding="utf-8"?>
-<p:sldMaster xmlns:a="http://schemas.openxmlformats.org/drawingml/2006/main" xmlns:p="http://schemas.openxmlformats.org/presentationml/2006/main" xmlns:r="http://schemas.openxmlformats.org/officeDocument/2006/relationships" xmlns:p14="http://schemas.microsoft.com/office/powerpoint/2010/main" xmlns:p15="http://schemas.microsoft.com/office/powerpoint/2012/main" xmlns:mc="http://schemas.openxmlformats.org/markup-compatibility/2006">
+<p:sldMaster xmlns:a="http://schemas.openxmlformats.org/drawingml/2006/main" xmlns:r="http://schemas.openxmlformats.org/officeDocument/2006/relationships" xmlns:p="http://schemas.openxmlformats.org/presentationml/2006/main">
   <p:cSld>
+    <p:bg>
+      <p:bgRef idx="1001">
+        <a:schemeClr val="bg1"/>
+      </p:bgRef>
+    </p:bg>
     <p:spTree>
       <p:nvGrpSpPr>
         <p:cNvPr id="1" name=""/>
@@ -2615,15 +3326,295 @@
   </p:cSld>
   <p:clrMap bg1="lt1" tx1="dk1" bg2="lt2" tx2="dk2" accent1="accent1" accent2="accent2" accent3="accent3" accent4="accent4" accent5="accent5" accent6="accent6" hlink="hlink" folHlink="folHlink"/>
   <p:sldLayoutIdLst>
-    <p:sldLayoutId id="2147483649" r:id="rId2"/>
-    <p:sldLayoutId id="2147483650" r:id="rId3"/>
-    <p:sldLayoutId id="2147483651" r:id="rId4"/>
+    <p:sldLayoutId id="2147483649" r:id="rId1"/>
+    <p:sldLayoutId id="2147483650" r:id="rId2"/>
+    <p:sldLayoutId id="2147483651" r:id="rId3"/>
   </p:sldLayoutIdLst>
+  <p:txStyles>
+    <p:titleStyle>
+      <a:lvl1pPr algn="l" defTabSz="914400" rtl="0" eaLnBrk="1" latinLnBrk="0" hangingPunct="1">
+        <a:lnSpc>
+          <a:spcPct val="90000"/>
+        </a:lnSpc>
+        <a:spcBef>
+          <a:spcPct val="0"/>
+        </a:spcBef>
+        <a:buNone/>
+        <a:defRPr sz="4400" kern="1200">
+          <a:solidFill>
+            <a:schemeClr val="tx1"/>
+          </a:solidFill>
+          <a:latin typeface="+mj-lt"/>
+          <a:ea typeface="+mj-ea"/>
+          <a:cs typeface="+mj-cs"/>
+        </a:defRPr>
+      </a:lvl1pPr>
+    </p:titleStyle>
+    <p:bodyStyle>
+      <a:lvl1pPr marL="228600" indent="-228600" algn="l" defTabSz="914400" rtl="0" eaLnBrk="1" latinLnBrk="0" hangingPunct="1">
+        <a:lnSpc>
+          <a:spcPct val="90000"/>
+        </a:lnSpc>
+        <a:spcBef>
+          <a:spcPts val="1000"/>
+        </a:spcBef>
+        <a:buFont typeface="Arial" panose="020B0604020202020204" pitchFamily="34" charset="0"/>
+        <a:buChar char="•"/>
+        <a:defRPr sz="2800" kern="1200">
+          <a:solidFill>
+            <a:schemeClr val="tx1"/>
+          </a:solidFill>
+          <a:latin typeface="+mn-lt"/>
+          <a:ea typeface="+mn-ea"/>
+          <a:cs typeface="+mn-cs"/>
+        </a:defRPr>
+      </a:lvl1pPr>
+      <a:lvl2pPr marL="685800" indent="-228600" algn="l" defTabSz="914400" rtl="0" eaLnBrk="1" latinLnBrk="0" hangingPunct="1">
+        <a:lnSpc>
+          <a:spcPct val="90000"/>
+        </a:lnSpc>
+        <a:spcBef>
+          <a:spcPts val="500"/>
+        </a:spcBef>
+        <a:buFont typeface="Arial" panose="020B0604020202020204" pitchFamily="34" charset="0"/>
+        <a:buChar char="•"/>
+        <a:defRPr sz="2400" kern="1200">
+          <a:solidFill>
+            <a:schemeClr val="tx1"/>
+          </a:solidFill>
+          <a:latin typeface="+mn-lt"/>
+          <a:ea typeface="+mn-ea"/>
+          <a:cs typeface="+mn-cs"/>
+        </a:defRPr>
+      </a:lvl2pPr>
+      <a:lvl3pPr marL="1143000" indent="-228600" algn="l" defTabSz="914400" rtl="0" eaLnBrk="1" latinLnBrk="0" hangingPunct="1">
+        <a:lnSpc>
+          <a:spcPct val="90000"/>
+        </a:lnSpc>
+        <a:spcBef>
+          <a:spcPts val="500"/>
+        </a:spcBef>
+        <a:buFont typeface="Arial" panose="020B0604020202020204" pitchFamily="34" charset="0"/>
+        <a:buChar char="•"/>
+        <a:defRPr sz="2000" kern="1200">
+          <a:solidFill>
+            <a:schemeClr val="tx1"/>
+          </a:solidFill>
+          <a:latin typeface="+mn-lt"/>
+          <a:ea typeface="+mn-ea"/>
+          <a:cs typeface="+mn-cs"/>
+        </a:defRPr>
+      </a:lvl3pPr>
+      <a:lvl4pPr marL="1600200" indent="-228600" algn="l" defTabSz="914400" rtl="0" eaLnBrk="1" latinLnBrk="0" hangingPunct="1">
+        <a:lnSpc>
+          <a:spcPct val="90000"/>
+        </a:lnSpc>
+        <a:spcBef>
+          <a:spcPts val="500"/>
+        </a:spcBef>
+        <a:buFont typeface="Arial" panose="020B0604020202020204" pitchFamily="34" charset="0"/>
+        <a:buChar char="•"/>
+        <a:defRPr sz="1800" kern="1200">
+          <a:solidFill>
+            <a:schemeClr val="tx1"/>
+          </a:solidFill>
+          <a:latin typeface="+mn-lt"/>
+          <a:ea typeface="+mn-ea"/>
+          <a:cs typeface="+mn-cs"/>
+        </a:defRPr>
+      </a:lvl4pPr>
+      <a:lvl5pPr marL="2057400" indent="-228600" algn="l" defTabSz="914400" rtl="0" eaLnBrk="1" latinLnBrk="0" hangingPunct="1">
+        <a:lnSpc>
+          <a:spcPct val="90000"/>
+        </a:lnSpc>
+        <a:spcBef>
+          <a:spcPts val="500"/>
+        </a:spcBef>
+        <a:buFont typeface="Arial" panose="020B0604020202020204" pitchFamily="34" charset="0"/>
+        <a:buChar char="•"/>
+        <a:defRPr sz="1800" kern="1200">
+          <a:solidFill>
+            <a:schemeClr val="tx1"/>
+          </a:solidFill>
+          <a:latin typeface="+mn-lt"/>
+          <a:ea typeface="+mn-ea"/>
+          <a:cs typeface="+mn-cs"/>
+        </a:defRPr>
+      </a:lvl5pPr>
+      <a:lvl6pPr marL="2514600" indent="-228600" algn="l" defTabSz="914400" rtl="0" eaLnBrk="1" latinLnBrk="0" hangingPunct="1">
+        <a:lnSpc>
+          <a:spcPct val="90000"/>
+        </a:lnSpc>
+        <a:spcBef>
+          <a:spcPts val="500"/>
+        </a:spcBef>
+        <a:buFont typeface="Arial" panose="020B0604020202020204" pitchFamily="34" charset="0"/>
+        <a:buChar char="•"/>
+        <a:defRPr sz="1800" kern="1200">
+          <a:solidFill>
+            <a:schemeClr val="tx1"/>
+          </a:solidFill>
+          <a:latin typeface="+mn-lt"/>
+          <a:ea typeface="+mn-ea"/>
+          <a:cs typeface="+mn-cs"/>
+        </a:defRPr>
+      </a:lvl6pPr>
+      <a:lvl7pPr marL="2971800" indent="-228600" algn="l" defTabSz="914400" rtl="0" eaLnBrk="1" latinLnBrk="0" hangingPunct="1">
+        <a:lnSpc>
+          <a:spcPct val="90000"/>
+        </a:lnSpc>
+        <a:spcBef>
+          <a:spcPts val="500"/>
+        </a:spcBef>
+        <a:buFont typeface="Arial" panose="020B0604020202020204" pitchFamily="34" charset="0"/>
+        <a:buChar char="•"/>
+        <a:defRPr sz="1800" kern="1200">
+          <a:solidFill>
+            <a:schemeClr val="tx1"/>
+          </a:solidFill>
+          <a:latin typeface="+mn-lt"/>
+          <a:ea typeface="+mn-ea"/>
+          <a:cs typeface="+mn-cs"/>
+        </a:defRPr>
+      </a:lvl7pPr>
+      <a:lvl8pPr marL="3429000" indent="-228600" algn="l" defTabSz="914400" rtl="0" eaLnBrk="1" latinLnBrk="0" hangingPunct="1">
+        <a:lnSpc>
+          <a:spcPct val="90000"/>
+        </a:lnSpc>
+        <a:spcBef>
+          <a:spcPts val="500"/>
+        </a:spcBef>
+        <a:buFont typeface="Arial" panose="020B0604020202020204" pitchFamily="34" charset="0"/>
+        <a:buChar char="•"/>
+        <a:defRPr sz="1800" kern="1200">
+          <a:solidFill>
+            <a:schemeClr val="tx1"/>
+          </a:solidFill>
+          <a:latin typeface="+mn-lt"/>
+          <a:ea typeface="+mn-ea"/>
+          <a:cs typeface="+mn-cs"/>
+        </a:defRPr>
+      </a:lvl8pPr>
+      <a:lvl9pPr marL="3886200" indent="-228600" algn="l" defTabSz="914400" rtl="0" eaLnBrk="1" latinLnBrk="0" hangingPunct="1">
+        <a:lnSpc>
+          <a:spcPct val="90000"/>
+        </a:lnSpc>
+        <a:spcBef>
+          <a:spcPts val="500"/>
+        </a:spcBef>
+        <a:buFont typeface="Arial" panose="020B0604020202020204" pitchFamily="34" charset="0"/>
+        <a:buChar char="•"/>
+        <a:defRPr sz="1800" kern="1200">
+          <a:solidFill>
+            <a:schemeClr val="tx1"/>
+          </a:solidFill>
+          <a:latin typeface="+mn-lt"/>
+          <a:ea typeface="+mn-ea"/>
+          <a:cs typeface="+mn-cs"/>
+        </a:defRPr>
+      </a:lvl9pPr>
+    </p:bodyStyle>
+    <p:otherStyle>
+      <a:defPPr>
+        <a:defRPr lang="en-US"/>
+      </a:defPPr>
+      <a:lvl1pPr marL="0" algn="l" defTabSz="914400" rtl="0" eaLnBrk="1" latinLnBrk="0" hangingPunct="1">
+        <a:defRPr sz="1800" kern="1200">
+          <a:solidFill>
+            <a:schemeClr val="tx1"/>
+          </a:solidFill>
+          <a:latin typeface="+mn-lt"/>
+          <a:ea typeface="+mn-ea"/>
+          <a:cs typeface="+mn-cs"/>
+        </a:defRPr>
+      </a:lvl1pPr>
+      <a:lvl2pPr marL="457200" algn="l" defTabSz="914400" rtl="0" eaLnBrk="1" latinLnBrk="0" hangingPunct="1">
+        <a:defRPr sz="1800" kern="1200">
+          <a:solidFill>
+            <a:schemeClr val="tx1"/>
+          </a:solidFill>
+          <a:latin typeface="+mn-lt"/>
+          <a:ea typeface="+mn-ea"/>
+          <a:cs typeface="+mn-cs"/>
+        </a:defRPr>
+      </a:lvl2pPr>
+      <a:lvl3pPr marL="914400" algn="l" defTabSz="914400" rtl="0" eaLnBrk="1" latinLnBrk="0" hangingPunct="1">
+        <a:defRPr sz="1800" kern="1200">
+          <a:solidFill>
+            <a:schemeClr val="tx1"/>
+          </a:solidFill>
+          <a:latin typeface="+mn-lt"/>
+          <a:ea typeface="+mn-ea"/>
+          <a:cs typeface="+mn-cs"/>
+        </a:defRPr>
+      </a:lvl3pPr>
+      <a:lvl4pPr marL="1371600" algn="l" defTabSz="914400" rtl="0" eaLnBrk="1" latinLnBrk="0" hangingPunct="1">
+        <a:defRPr sz="1800" kern="1200">
+          <a:solidFill>
+            <a:schemeClr val="tx1"/>
+          </a:solidFill>
+          <a:latin typeface="+mn-lt"/>
+          <a:ea typeface="+mn-ea"/>
+          <a:cs typeface="+mn-cs"/>
+        </a:defRPr>
+      </a:lvl4pPr>
+      <a:lvl5pPr marL="1828800" algn="l" defTabSz="914400" rtl="0" eaLnBrk="1" latinLnBrk="0" hangingPunct="1">
+        <a:defRPr sz="1800" kern="1200">
+          <a:solidFill>
+            <a:schemeClr val="tx1"/>
+          </a:solidFill>
+          <a:latin typeface="+mn-lt"/>
+          <a:ea typeface="+mn-ea"/>
+          <a:cs typeface="+mn-cs"/>
+        </a:defRPr>
+      </a:lvl5pPr>
+      <a:lvl6pPr marL="2286000" algn="l" defTabSz="914400" rtl="0" eaLnBrk="1" latinLnBrk="0" hangingPunct="1">
+        <a:defRPr sz="1800" kern="1200">
+          <a:solidFill>
+            <a:schemeClr val="tx1"/>
+          </a:solidFill>
+          <a:latin typeface="+mn-lt"/>
+          <a:ea typeface="+mn-ea"/>
+          <a:cs typeface="+mn-cs"/>
+        </a:defRPr>
+      </a:lvl6pPr>
+      <a:lvl7pPr marL="2743200" algn="l" defTabSz="914400" rtl="0" eaLnBrk="1" latinLnBrk="0" hangingPunct="1">
+        <a:defRPr sz="1800" kern="1200">
+          <a:solidFill>
+            <a:schemeClr val="tx1"/>
+          </a:solidFill>
+          <a:latin typeface="+mn-lt"/>
+          <a:ea typeface="+mn-ea"/>
+          <a:cs typeface="+mn-cs"/>
+        </a:defRPr>
+      </a:lvl7pPr>
+      <a:lvl8pPr marL="3200400" algn="l" defTabSz="914400" rtl="0" eaLnBrk="1" latinLnBrk="0" hangingPunct="1">
+        <a:defRPr sz="1800" kern="1200">
+          <a:solidFill>
+            <a:schemeClr val="tx1"/>
+          </a:solidFill>
+          <a:latin typeface="+mn-lt"/>
+          <a:ea typeface="+mn-ea"/>
+          <a:cs typeface="+mn-cs"/>
+        </a:defRPr>
+      </a:lvl8pPr>
+      <a:lvl9pPr marL="3657600" algn="l" defTabSz="914400" rtl="0" eaLnBrk="1" latinLnBrk="0" hangingPunct="1">
+        <a:defRPr sz="1800" kern="1200">
+          <a:solidFill>
+            <a:schemeClr val="tx1"/>
+          </a:solidFill>
+          <a:latin typeface="+mn-lt"/>
+          <a:ea typeface="+mn-ea"/>
+          <a:cs typeface="+mn-cs"/>
+        </a:defRPr>
+      </a:lvl9pPr>
+    </p:otherStyle>
+  </p:txStyles>
 </p:sldMaster>
 </file>
 
 <file path=ppt/slides/slide1.xml><?xml version="1.0" encoding="utf-8"?>
-<p:sld xmlns:a="http://schemas.openxmlformats.org/drawingml/2006/main" xmlns:p="http://schemas.openxmlformats.org/presentationml/2006/main" xmlns:r="http://schemas.openxmlformats.org/officeDocument/2006/relationships" xmlns:p14="http://schemas.microsoft.com/office/powerpoint/2010/main" xmlns:p15="http://schemas.microsoft.com/office/powerpoint/2012/main" xmlns:mc="http://schemas.openxmlformats.org/markup-compatibility/2006">
+<p:sld xmlns:a="http://schemas.openxmlformats.org/drawingml/2006/main" xmlns:r="http://schemas.openxmlformats.org/officeDocument/2006/relationships" xmlns:p="http://schemas.openxmlformats.org/presentationml/2006/main">
   <p:cSld>
     <p:spTree>
       <p:nvGrpSpPr>
@@ -2666,6 +3657,7 @@
           <a:bodyPr lIns="0" tIns="0" rIns="0" bIns="0" anchor="ctr">
             <a:spAutoFit/>
           </a:bodyPr>
+          <a:lstStyle/>
           <a:p>
             <a:pPr indent="0" algn="ctr" defTabSz="914400">
               <a:lnSpc>
@@ -2686,43 +3678,7 @@
                 <a:latin typeface="Arial"/>
                 <a:ea typeface="DejaVu Sans"/>
               </a:rPr>
-              <a:t>Will I </a:t>
-            </a:r>
-            <a:r>
-              <a:rPr lang="en-US" sz="4400" b="0" u="none" strike="noStrike">
-                <a:solidFill>
-                  <a:srgbClr val="FFFFFF"/>
-                </a:solidFill>
-                <a:effectLst/>
-                <a:uFillTx/>
-                <a:latin typeface="Arial"/>
-                <a:ea typeface="DejaVu Sans"/>
-              </a:rPr>
-              <a:t>Stay or </a:t>
-            </a:r>
-            <a:r>
-              <a:rPr lang="en-US" sz="4400" b="0" u="none" strike="noStrike">
-                <a:solidFill>
-                  <a:srgbClr val="FFFFFF"/>
-                </a:solidFill>
-                <a:effectLst/>
-                <a:uFillTx/>
-                <a:latin typeface="Arial"/>
-                <a:ea typeface="DejaVu Sans"/>
-              </a:rPr>
-              <a:t>Will I Go </a:t>
-            </a:r>
-            <a:r>
-              <a:rPr lang="en-US" sz="4400" b="0" u="none" strike="noStrike">
-                <a:solidFill>
-                  <a:srgbClr val="FFFFFF"/>
-                </a:solidFill>
-                <a:effectLst/>
-                <a:uFillTx/>
-                <a:latin typeface="Arial"/>
-                <a:ea typeface="DejaVu Sans"/>
-              </a:rPr>
-              <a:t>Now?</a:t>
+              <a:t>Will I Stay or Will I Go Now?</a:t>
             </a:r>
             <a:br>
               <a:rPr sz="4400"/>
@@ -2737,31 +3693,7 @@
                 <a:latin typeface="Arial"/>
                 <a:ea typeface="DejaVu Sans"/>
               </a:rPr>
-              <a:t>A report </a:t>
-            </a:r>
-            <a:r>
-              <a:rPr lang="en-US" sz="4400" b="0" u="none" strike="noStrike">
-                <a:solidFill>
-                  <a:srgbClr val="FFFFFF"/>
-                </a:solidFill>
-                <a:effectLst/>
-                <a:uFillTx/>
-                <a:latin typeface="Arial"/>
-                <a:ea typeface="DejaVu Sans"/>
-              </a:rPr>
-              <a:t>on </a:t>
-            </a:r>
-            <a:r>
-              <a:rPr lang="en-US" sz="4400" b="0" u="none" strike="noStrike">
-                <a:solidFill>
-                  <a:srgbClr val="FFFFFF"/>
-                </a:solidFill>
-                <a:effectLst/>
-                <a:uFillTx/>
-                <a:latin typeface="Arial"/>
-                <a:ea typeface="DejaVu Sans"/>
-              </a:rPr>
-              <a:t>Attrition</a:t>
+              <a:t>A report on Attrition</a:t>
             </a:r>
             <a:endParaRPr lang="en-US" sz="4400" b="0" u="none" strike="noStrike">
               <a:solidFill>
@@ -2801,6 +3733,7 @@
           <a:bodyPr lIns="0" tIns="0" rIns="0" bIns="0" anchor="ctr">
             <a:spAutoFit/>
           </a:bodyPr>
+          <a:lstStyle/>
           <a:p>
             <a:pPr marL="228600" indent="0" algn="ctr" defTabSz="914400">
               <a:lnSpc>
@@ -2941,19 +3874,14 @@
       </p:sp>
     </p:spTree>
   </p:cSld>
-  <mc:AlternateContent>
-    <mc:Choice Requires="p14">
-      <p:transition spd="slow" p14:dur="2000"/>
-    </mc:Choice>
-    <mc:Fallback>
-      <p:transition spd="slow"/>
-    </mc:Fallback>
-  </mc:AlternateContent>
+  <p:clrMapOvr>
+    <a:masterClrMapping/>
+  </p:clrMapOvr>
 </p:sld>
 </file>
 
 <file path=ppt/slides/slide10.xml><?xml version="1.0" encoding="utf-8"?>
-<p:sld xmlns:a="http://schemas.openxmlformats.org/drawingml/2006/main" xmlns:p="http://schemas.openxmlformats.org/presentationml/2006/main" xmlns:r="http://schemas.openxmlformats.org/officeDocument/2006/relationships" xmlns:p14="http://schemas.microsoft.com/office/powerpoint/2010/main" xmlns:p15="http://schemas.microsoft.com/office/powerpoint/2012/main" xmlns:mc="http://schemas.openxmlformats.org/markup-compatibility/2006">
+<p:sld xmlns:a="http://schemas.openxmlformats.org/drawingml/2006/main" xmlns:r="http://schemas.openxmlformats.org/officeDocument/2006/relationships" xmlns:p="http://schemas.openxmlformats.org/presentationml/2006/main">
   <p:cSld>
     <p:spTree>
       <p:nvGrpSpPr>
@@ -2996,6 +3924,7 @@
           <a:bodyPr lIns="0" tIns="0" rIns="0" bIns="0" anchor="ctr">
             <a:spAutoFit/>
           </a:bodyPr>
+          <a:lstStyle/>
           <a:p>
             <a:pPr indent="0" algn="ctr" defTabSz="914400">
               <a:lnSpc>
@@ -3041,8 +3970,8 @@
         </p:nvSpPr>
         <p:spPr>
           <a:xfrm>
-            <a:off x="504000" y="1326600"/>
-            <a:ext cx="3839040" cy="3287880"/>
+            <a:off x="1957115" y="4500449"/>
+            <a:ext cx="6364633" cy="697976"/>
           </a:xfrm>
           <a:prstGeom prst="rect">
             <a:avLst/>
@@ -3056,6 +3985,7 @@
           <a:bodyPr lIns="0" tIns="0" rIns="0" bIns="0" anchor="t">
             <a:normAutofit fontScale="92500" lnSpcReduction="9999"/>
           </a:bodyPr>
+          <a:lstStyle/>
           <a:p>
             <a:pPr marL="432000" indent="-324000" algn="l" defTabSz="914400">
               <a:lnSpc>
@@ -3072,7 +4002,7 @@
               <a:buChar char=""/>
             </a:pPr>
             <a:r>
-              <a:rPr lang="en-US" sz="2400" b="0" u="none" strike="noStrike">
+              <a:rPr lang="en-US" sz="2400" b="0" u="none" strike="noStrike" dirty="0">
                 <a:solidFill>
                   <a:srgbClr val="000000"/>
                 </a:solidFill>
@@ -3081,9 +4011,9 @@
                 <a:latin typeface="Arial"/>
                 <a:ea typeface="DejaVu Sans"/>
               </a:rPr>
-              <a:t>We thought we would see a strong relationship in the data that would cause issues between employee age and total working years. It looks like there is a relationship, but the correlations is not nearly as strong as we thought.</a:t>
-            </a:r>
-            <a:endParaRPr lang="en-US" sz="2400" b="0" u="none" strike="noStrike">
+              <a:t>Age is somewhat correlated with total working years, but not as much as expected.</a:t>
+            </a:r>
+            <a:endParaRPr lang="en-US" sz="2400" b="0" u="none" strike="noStrike" dirty="0">
               <a:solidFill>
                 <a:srgbClr val="000000"/>
               </a:solidFill>
@@ -3101,13 +4031,13 @@
           <p:nvPr/>
         </p:nvPicPr>
         <p:blipFill>
-          <a:blip r:embed="rId1"/>
+          <a:blip r:embed="rId2"/>
           <a:stretch/>
         </p:blipFill>
         <p:spPr>
           <a:xfrm>
-            <a:off x="4343400" y="1371600"/>
-            <a:ext cx="5313600" cy="3805560"/>
+            <a:off x="2516372" y="923072"/>
+            <a:ext cx="5180248" cy="3443365"/>
           </a:xfrm>
           <a:prstGeom prst="rect">
             <a:avLst/>
@@ -3120,419 +4050,14 @@
       </p:pic>
     </p:spTree>
   </p:cSld>
-  <mc:AlternateContent>
-    <mc:Choice Requires="p14">
-      <p:transition spd="slow" p14:dur="2000"/>
-    </mc:Choice>
-    <mc:Fallback>
-      <p:transition spd="slow"/>
-    </mc:Fallback>
-  </mc:AlternateContent>
+  <p:clrMapOvr>
+    <a:masterClrMapping/>
+  </p:clrMapOvr>
 </p:sld>
 </file>
 
 <file path=ppt/slides/slide11.xml><?xml version="1.0" encoding="utf-8"?>
-<p:sld xmlns:a="http://schemas.openxmlformats.org/drawingml/2006/main" xmlns:p="http://schemas.openxmlformats.org/presentationml/2006/main" xmlns:r="http://schemas.openxmlformats.org/officeDocument/2006/relationships" xmlns:p14="http://schemas.microsoft.com/office/powerpoint/2010/main" xmlns:p15="http://schemas.microsoft.com/office/powerpoint/2012/main" xmlns:mc="http://schemas.openxmlformats.org/markup-compatibility/2006" show="0">
-  <p:cSld>
-    <p:spTree>
-      <p:nvGrpSpPr>
-        <p:cNvPr id="1" name=""/>
-        <p:cNvGrpSpPr/>
-        <p:nvPr/>
-      </p:nvGrpSpPr>
-      <p:grpSpPr>
-        <a:xfrm>
-          <a:off x="0" y="0"/>
-          <a:ext cx="0" cy="0"/>
-          <a:chOff x="0" y="0"/>
-          <a:chExt cx="0" cy="0"/>
-        </a:xfrm>
-      </p:grpSpPr>
-      <p:sp>
-        <p:nvSpPr>
-          <p:cNvPr id="48" name="PlaceHolder 1"/>
-          <p:cNvSpPr>
-            <a:spLocks noGrp="1"/>
-          </p:cNvSpPr>
-          <p:nvPr>
-            <p:ph type="title"/>
-          </p:nvPr>
-        </p:nvSpPr>
-        <p:spPr>
-          <a:xfrm>
-            <a:off x="504000" y="225360"/>
-            <a:ext cx="9071640" cy="947160"/>
-          </a:xfrm>
-          <a:prstGeom prst="rect">
-            <a:avLst/>
-          </a:prstGeom>
-          <a:noFill/>
-          <a:ln w="0">
-            <a:noFill/>
-          </a:ln>
-        </p:spPr>
-        <p:txBody>
-          <a:bodyPr lIns="0" tIns="0" rIns="0" bIns="0" anchor="ctr">
-            <a:spAutoFit/>
-          </a:bodyPr>
-          <a:p>
-            <a:pPr indent="0" algn="ctr" defTabSz="914400">
-              <a:lnSpc>
-                <a:spcPct val="90000"/>
-              </a:lnSpc>
-              <a:buNone/>
-              <a:tabLst>
-                <a:tab pos="0" algn="l"/>
-              </a:tabLst>
-            </a:pPr>
-            <a:r>
-              <a:rPr lang="en-US" sz="3300" b="0" u="none" strike="noStrike">
-                <a:solidFill>
-                  <a:srgbClr val="000000"/>
-                </a:solidFill>
-                <a:effectLst/>
-                <a:uFillTx/>
-                <a:latin typeface="Arial"/>
-                <a:ea typeface="DejaVu Sans"/>
-              </a:rPr>
-              <a:t>Years at Company vs Total Working Years</a:t>
-            </a:r>
-            <a:endParaRPr lang="en-US" sz="3300" b="0" u="none" strike="noStrike">
-              <a:solidFill>
-                <a:srgbClr val="000000"/>
-              </a:solidFill>
-              <a:effectLst/>
-              <a:uFillTx/>
-              <a:latin typeface="Arial"/>
-            </a:endParaRPr>
-          </a:p>
-        </p:txBody>
-      </p:sp>
-      <p:sp>
-        <p:nvSpPr>
-          <p:cNvPr id="49" name="PlaceHolder 2"/>
-          <p:cNvSpPr>
-            <a:spLocks noGrp="1"/>
-          </p:cNvSpPr>
-          <p:nvPr>
-            <p:ph/>
-          </p:nvPr>
-        </p:nvSpPr>
-        <p:spPr>
-          <a:xfrm>
-            <a:off x="504000" y="1326600"/>
-            <a:ext cx="3852360" cy="3287880"/>
-          </a:xfrm>
-          <a:prstGeom prst="rect">
-            <a:avLst/>
-          </a:prstGeom>
-          <a:noFill/>
-          <a:ln w="0">
-            <a:noFill/>
-          </a:ln>
-        </p:spPr>
-        <p:txBody>
-          <a:bodyPr lIns="0" tIns="0" rIns="0" bIns="0" anchor="t">
-            <a:normAutofit/>
-          </a:bodyPr>
-          <a:p>
-            <a:pPr marL="432000" indent="-324000" algn="l" defTabSz="914400">
-              <a:lnSpc>
-                <a:spcPct val="100000"/>
-              </a:lnSpc>
-              <a:spcBef>
-                <a:spcPts val="1060"/>
-              </a:spcBef>
-              <a:buClr>
-                <a:srgbClr val="000000"/>
-              </a:buClr>
-              <a:buSzPct val="45000"/>
-              <a:buFont typeface="Wingdings" charset="2"/>
-              <a:buChar char=""/>
-            </a:pPr>
-            <a:r>
-              <a:rPr lang="en-US" sz="2400" b="0" u="none" strike="noStrike">
-                <a:solidFill>
-                  <a:srgbClr val="000000"/>
-                </a:solidFill>
-                <a:effectLst/>
-                <a:uFillTx/>
-                <a:latin typeface="Arial"/>
-                <a:ea typeface="DejaVu Sans"/>
-              </a:rPr>
-              <a:t>It looks like there is a relationship between years at the company and working years, but not a very strong one.</a:t>
-            </a:r>
-            <a:endParaRPr lang="en-US" sz="2400" b="0" u="none" strike="noStrike">
-              <a:solidFill>
-                <a:srgbClr val="000000"/>
-              </a:solidFill>
-              <a:effectLst/>
-              <a:uFillTx/>
-              <a:latin typeface="Arial"/>
-            </a:endParaRPr>
-          </a:p>
-        </p:txBody>
-      </p:sp>
-      <p:pic>
-        <p:nvPicPr>
-          <p:cNvPr id="50" name="Picture 49"/>
-          <p:cNvPicPr/>
-          <p:nvPr/>
-        </p:nvPicPr>
-        <p:blipFill>
-          <a:blip r:embed="rId1"/>
-          <a:stretch/>
-        </p:blipFill>
-        <p:spPr>
-          <a:xfrm>
-            <a:off x="4356720" y="1242360"/>
-            <a:ext cx="5244120" cy="3786480"/>
-          </a:xfrm>
-          <a:prstGeom prst="rect">
-            <a:avLst/>
-          </a:prstGeom>
-          <a:noFill/>
-          <a:ln w="18000">
-            <a:noFill/>
-          </a:ln>
-        </p:spPr>
-      </p:pic>
-    </p:spTree>
-  </p:cSld>
-  <mc:AlternateContent>
-    <mc:Choice Requires="p14">
-      <p:transition spd="slow" p14:dur="2000"/>
-    </mc:Choice>
-    <mc:Fallback>
-      <p:transition spd="slow"/>
-    </mc:Fallback>
-  </mc:AlternateContent>
-</p:sld>
-</file>
-
-<file path=ppt/slides/slide12.xml><?xml version="1.0" encoding="utf-8"?>
-<p:sld xmlns:a="http://schemas.openxmlformats.org/drawingml/2006/main" xmlns:p="http://schemas.openxmlformats.org/presentationml/2006/main" xmlns:r="http://schemas.openxmlformats.org/officeDocument/2006/relationships" xmlns:p14="http://schemas.microsoft.com/office/powerpoint/2010/main" xmlns:p15="http://schemas.microsoft.com/office/powerpoint/2012/main" xmlns:mc="http://schemas.openxmlformats.org/markup-compatibility/2006" show="0">
-  <p:cSld>
-    <p:spTree>
-      <p:nvGrpSpPr>
-        <p:cNvPr id="1" name=""/>
-        <p:cNvGrpSpPr/>
-        <p:nvPr/>
-      </p:nvGrpSpPr>
-      <p:grpSpPr>
-        <a:xfrm>
-          <a:off x="0" y="0"/>
-          <a:ext cx="0" cy="0"/>
-          <a:chOff x="0" y="0"/>
-          <a:chExt cx="0" cy="0"/>
-        </a:xfrm>
-      </p:grpSpPr>
-      <p:sp>
-        <p:nvSpPr>
-          <p:cNvPr id="51" name="PlaceHolder 1"/>
-          <p:cNvSpPr>
-            <a:spLocks noGrp="1"/>
-          </p:cNvSpPr>
-          <p:nvPr>
-            <p:ph type="title"/>
-          </p:nvPr>
-        </p:nvSpPr>
-        <p:spPr>
-          <a:xfrm>
-            <a:off x="504000" y="225360"/>
-            <a:ext cx="9071640" cy="947160"/>
-          </a:xfrm>
-          <a:prstGeom prst="rect">
-            <a:avLst/>
-          </a:prstGeom>
-          <a:noFill/>
-          <a:ln w="0">
-            <a:noFill/>
-          </a:ln>
-        </p:spPr>
-        <p:txBody>
-          <a:bodyPr lIns="0" tIns="0" rIns="0" bIns="0" anchor="ctr">
-            <a:spAutoFit/>
-          </a:bodyPr>
-          <a:p>
-            <a:pPr indent="0" algn="ctr" defTabSz="914400">
-              <a:lnSpc>
-                <a:spcPct val="90000"/>
-              </a:lnSpc>
-              <a:buNone/>
-              <a:tabLst>
-                <a:tab pos="0" algn="l"/>
-              </a:tabLst>
-            </a:pPr>
-            <a:r>
-              <a:rPr lang="en-US" sz="3300" b="0" u="none" strike="noStrike">
-                <a:solidFill>
-                  <a:srgbClr val="000000"/>
-                </a:solidFill>
-                <a:effectLst/>
-                <a:uFillTx/>
-                <a:latin typeface="Arial"/>
-                <a:ea typeface="DejaVu Sans"/>
-              </a:rPr>
-              <a:t>Education Field vs Job Role</a:t>
-            </a:r>
-            <a:endParaRPr lang="en-US" sz="3300" b="0" u="none" strike="noStrike">
-              <a:solidFill>
-                <a:srgbClr val="000000"/>
-              </a:solidFill>
-              <a:effectLst/>
-              <a:uFillTx/>
-              <a:latin typeface="Arial"/>
-            </a:endParaRPr>
-          </a:p>
-        </p:txBody>
-      </p:sp>
-      <p:sp>
-        <p:nvSpPr>
-          <p:cNvPr id="52" name="PlaceHolder 2"/>
-          <p:cNvSpPr>
-            <a:spLocks noGrp="1"/>
-          </p:cNvSpPr>
-          <p:nvPr>
-            <p:ph/>
-          </p:nvPr>
-        </p:nvSpPr>
-        <p:spPr>
-          <a:xfrm>
-            <a:off x="504000" y="1326600"/>
-            <a:ext cx="4504320" cy="3287880"/>
-          </a:xfrm>
-          <a:prstGeom prst="rect">
-            <a:avLst/>
-          </a:prstGeom>
-          <a:noFill/>
-          <a:ln w="0">
-            <a:noFill/>
-          </a:ln>
-        </p:spPr>
-        <p:txBody>
-          <a:bodyPr lIns="0" tIns="0" rIns="0" bIns="0" anchor="t">
-            <a:normAutofit fontScale="85000" lnSpcReduction="19999"/>
-          </a:bodyPr>
-          <a:p>
-            <a:pPr marL="432000" indent="-324000" algn="l" defTabSz="914400">
-              <a:lnSpc>
-                <a:spcPct val="100000"/>
-              </a:lnSpc>
-              <a:spcBef>
-                <a:spcPts val="1191"/>
-              </a:spcBef>
-              <a:spcAft>
-                <a:spcPts val="992"/>
-              </a:spcAft>
-              <a:buClr>
-                <a:srgbClr val="000000"/>
-              </a:buClr>
-              <a:buSzPct val="45000"/>
-              <a:buFont typeface="Wingdings" charset="2"/>
-              <a:buChar char=""/>
-            </a:pPr>
-            <a:r>
-              <a:rPr lang="en-US" sz="2000" b="0" u="none" strike="noStrike">
-                <a:solidFill>
-                  <a:srgbClr val="000000"/>
-                </a:solidFill>
-                <a:effectLst/>
-                <a:uFillTx/>
-                <a:latin typeface="Arial"/>
-                <a:ea typeface="DejaVu Sans"/>
-              </a:rPr>
-              <a:t>The heatmap reveals a strong structural relationship between education field and job role, indicating that employees are not randomly distributed across roles. Instead, specific education backgrounds concentrate within particular job families. This dependency explains multicollinearity we later observed in the initial logistic regression model.</a:t>
-            </a:r>
-            <a:endParaRPr lang="en-US" sz="2000" b="0" u="none" strike="noStrike">
-              <a:solidFill>
-                <a:srgbClr val="000000"/>
-              </a:solidFill>
-              <a:effectLst/>
-              <a:uFillTx/>
-              <a:latin typeface="Arial"/>
-            </a:endParaRPr>
-          </a:p>
-          <a:p>
-            <a:pPr marL="432000" indent="-324000" algn="l" defTabSz="914400">
-              <a:lnSpc>
-                <a:spcPct val="100000"/>
-              </a:lnSpc>
-              <a:spcBef>
-                <a:spcPts val="1191"/>
-              </a:spcBef>
-              <a:spcAft>
-                <a:spcPts val="992"/>
-              </a:spcAft>
-              <a:buClr>
-                <a:srgbClr val="000000"/>
-              </a:buClr>
-              <a:buSzPct val="45000"/>
-              <a:buFont typeface="Wingdings" charset="2"/>
-              <a:buChar char=""/>
-            </a:pPr>
-            <a:r>
-              <a:rPr lang="en-US" sz="2000" b="0" u="none" strike="noStrike">
-                <a:solidFill>
-                  <a:srgbClr val="000000"/>
-                </a:solidFill>
-                <a:effectLst/>
-                <a:uFillTx/>
-                <a:latin typeface="Arial"/>
-                <a:ea typeface="DejaVu Sans"/>
-              </a:rPr>
-              <a:t>Attrition varies more meaningfully across job roles than across education fields, suggesting that occupational role is a stronger predictor of turnover than educational background.</a:t>
-            </a:r>
-            <a:endParaRPr lang="en-US" sz="2000" b="0" u="none" strike="noStrike">
-              <a:solidFill>
-                <a:srgbClr val="000000"/>
-              </a:solidFill>
-              <a:effectLst/>
-              <a:uFillTx/>
-              <a:latin typeface="Arial"/>
-            </a:endParaRPr>
-          </a:p>
-        </p:txBody>
-      </p:sp>
-      <p:pic>
-        <p:nvPicPr>
-          <p:cNvPr id="53" name="Picture 52"/>
-          <p:cNvPicPr/>
-          <p:nvPr/>
-        </p:nvPicPr>
-        <p:blipFill>
-          <a:blip r:embed="rId1"/>
-          <a:stretch/>
-        </p:blipFill>
-        <p:spPr>
-          <a:xfrm>
-            <a:off x="5008680" y="1600200"/>
-            <a:ext cx="4820760" cy="3284280"/>
-          </a:xfrm>
-          <a:prstGeom prst="rect">
-            <a:avLst/>
-          </a:prstGeom>
-          <a:noFill/>
-          <a:ln w="18000">
-            <a:noFill/>
-          </a:ln>
-        </p:spPr>
-      </p:pic>
-    </p:spTree>
-  </p:cSld>
-  <mc:AlternateContent>
-    <mc:Choice Requires="p14">
-      <p:transition spd="slow" p14:dur="2000"/>
-    </mc:Choice>
-    <mc:Fallback>
-      <p:transition spd="slow"/>
-    </mc:Fallback>
-  </mc:AlternateContent>
-</p:sld>
-</file>
-
-<file path=ppt/slides/slide13.xml><?xml version="1.0" encoding="utf-8"?>
-<p:sld xmlns:a="http://schemas.openxmlformats.org/drawingml/2006/main" xmlns:p="http://schemas.openxmlformats.org/presentationml/2006/main" xmlns:r="http://schemas.openxmlformats.org/officeDocument/2006/relationships" xmlns:p14="http://schemas.microsoft.com/office/powerpoint/2010/main" xmlns:p15="http://schemas.microsoft.com/office/powerpoint/2012/main" xmlns:mc="http://schemas.openxmlformats.org/markup-compatibility/2006">
+<p:sld xmlns:a="http://schemas.openxmlformats.org/drawingml/2006/main" xmlns:r="http://schemas.openxmlformats.org/officeDocument/2006/relationships" xmlns:p="http://schemas.openxmlformats.org/presentationml/2006/main">
   <p:cSld>
     <p:spTree>
       <p:nvGrpSpPr>
@@ -3575,6 +4100,7 @@
           <a:bodyPr lIns="0" tIns="0" rIns="0" bIns="0" anchor="ctr">
             <a:spAutoFit/>
           </a:bodyPr>
+          <a:lstStyle/>
           <a:p>
             <a:pPr indent="0" algn="ctr" defTabSz="914400">
               <a:lnSpc>
@@ -3620,8 +4146,8 @@
         </p:nvSpPr>
         <p:spPr>
           <a:xfrm>
-            <a:off x="504000" y="1326600"/>
-            <a:ext cx="5072760" cy="3287880"/>
+            <a:off x="2616334" y="4316819"/>
+            <a:ext cx="5072760" cy="884972"/>
           </a:xfrm>
           <a:prstGeom prst="rect">
             <a:avLst/>
@@ -3635,6 +4161,7 @@
           <a:bodyPr lIns="0" tIns="0" rIns="0" bIns="0" anchor="t">
             <a:normAutofit/>
           </a:bodyPr>
+          <a:lstStyle/>
           <a:p>
             <a:pPr marL="432000" indent="-324000" algn="l" defTabSz="914400">
               <a:lnSpc>
@@ -3654,7 +4181,7 @@
               <a:buChar char=""/>
             </a:pPr>
             <a:r>
-              <a:rPr lang="en-US" sz="2000" b="0" u="none" strike="noStrike">
+              <a:rPr lang="en-US" sz="2000" b="0" u="none" strike="noStrike" dirty="0">
                 <a:solidFill>
                   <a:srgbClr val="000000"/>
                 </a:solidFill>
@@ -3663,40 +4190,8 @@
                 <a:latin typeface="Arial"/>
                 <a:ea typeface="DejaVu Sans"/>
               </a:rPr>
-              <a:t>This shows that employees that have worked at more companies are more likely to </a:t>
-            </a:r>
-            <a:r>
-              <a:rPr lang="en-US" sz="2000" b="0" u="none" strike="noStrike">
-                <a:solidFill>
-                  <a:srgbClr val="000000"/>
-                </a:solidFill>
-                <a:effectLst/>
-                <a:uFillTx/>
-                <a:latin typeface="Arial"/>
-                <a:ea typeface="DejaVu Sans"/>
-              </a:rPr>
-              <a:t>leave. This could be explained by the fact that employees that have worked at more </a:t>
-            </a:r>
-            <a:r>
-              <a:rPr lang="en-US" sz="2000" b="0" u="none" strike="noStrike">
-                <a:solidFill>
-                  <a:srgbClr val="000000"/>
-                </a:solidFill>
-                <a:effectLst/>
-                <a:uFillTx/>
-                <a:latin typeface="Arial"/>
-                <a:ea typeface="DejaVu Sans"/>
-              </a:rPr>
-              <a:t>companies are more likely to be looking for new opportunities or be closer to retirement. </a:t>
-            </a:r>
-            <a:endParaRPr lang="en-US" sz="2000" b="0" u="none" strike="noStrike">
-              <a:solidFill>
-                <a:srgbClr val="000000"/>
-              </a:solidFill>
-              <a:effectLst/>
-              <a:uFillTx/>
-              <a:latin typeface="Arial"/>
-            </a:endParaRPr>
+              <a:t>Employees that have worked at more companies are more likely to leave.</a:t>
+            </a:r>
           </a:p>
         </p:txBody>
       </p:sp>
@@ -3707,13 +4202,13 @@
           <p:nvPr/>
         </p:nvPicPr>
         <p:blipFill>
-          <a:blip r:embed="rId1"/>
+          <a:blip r:embed="rId3"/>
           <a:stretch/>
         </p:blipFill>
         <p:spPr>
           <a:xfrm>
-            <a:off x="5577120" y="1349640"/>
-            <a:ext cx="4252320" cy="3222000"/>
+            <a:off x="2477150" y="938515"/>
+            <a:ext cx="5126323" cy="3378304"/>
           </a:xfrm>
           <a:prstGeom prst="rect">
             <a:avLst/>
@@ -3726,19 +4221,14 @@
       </p:pic>
     </p:spTree>
   </p:cSld>
-  <mc:AlternateContent>
-    <mc:Choice Requires="p14">
-      <p:transition spd="slow" p14:dur="2000"/>
-    </mc:Choice>
-    <mc:Fallback>
-      <p:transition spd="slow"/>
-    </mc:Fallback>
-  </mc:AlternateContent>
+  <p:clrMapOvr>
+    <a:masterClrMapping/>
+  </p:clrMapOvr>
 </p:sld>
 </file>
 
-<file path=ppt/slides/slide14.xml><?xml version="1.0" encoding="utf-8"?>
-<p:sld xmlns:a="http://schemas.openxmlformats.org/drawingml/2006/main" xmlns:p="http://schemas.openxmlformats.org/presentationml/2006/main" xmlns:r="http://schemas.openxmlformats.org/officeDocument/2006/relationships" xmlns:p14="http://schemas.microsoft.com/office/powerpoint/2010/main" xmlns:p15="http://schemas.microsoft.com/office/powerpoint/2012/main" xmlns:mc="http://schemas.openxmlformats.org/markup-compatibility/2006">
+<file path=ppt/slides/slide12.xml><?xml version="1.0" encoding="utf-8"?>
+<p:sld xmlns:a="http://schemas.openxmlformats.org/drawingml/2006/main" xmlns:r="http://schemas.openxmlformats.org/officeDocument/2006/relationships" xmlns:p="http://schemas.openxmlformats.org/presentationml/2006/main">
   <p:cSld>
     <p:spTree>
       <p:nvGrpSpPr>
@@ -3781,6 +4271,7 @@
           <a:bodyPr lIns="0" tIns="0" rIns="0" bIns="0" anchor="ctr">
             <a:spAutoFit/>
           </a:bodyPr>
+          <a:lstStyle/>
           <a:p>
             <a:pPr indent="0" algn="ctr" defTabSz="914400">
               <a:lnSpc>
@@ -3802,31 +4293,23 @@
               </a:rPr>
               <a:t>Top Positive Predictors</a:t>
             </a:r>
-            <a:endParaRPr lang="en-US" sz="3300" b="0" u="none" strike="noStrike">
-              <a:solidFill>
-                <a:srgbClr val="000000"/>
-              </a:solidFill>
-              <a:effectLst/>
-              <a:uFillTx/>
-              <a:latin typeface="Arial"/>
-            </a:endParaRPr>
           </a:p>
         </p:txBody>
       </p:sp>
       <p:pic>
         <p:nvPicPr>
-          <p:cNvPr id="58" name=""/>
+          <p:cNvPr id="58" name="Picture 57"/>
           <p:cNvPicPr/>
           <p:nvPr/>
         </p:nvPicPr>
         <p:blipFill>
-          <a:blip r:embed="rId1"/>
+          <a:blip r:embed="rId3"/>
           <a:stretch/>
         </p:blipFill>
         <p:spPr>
           <a:xfrm>
-            <a:off x="2392200" y="1187280"/>
-            <a:ext cx="5608800" cy="3934080"/>
+            <a:off x="2355110" y="1304261"/>
+            <a:ext cx="5370403" cy="3851598"/>
           </a:xfrm>
           <a:prstGeom prst="rect">
             <a:avLst/>
@@ -3839,19 +4322,14 @@
       </p:pic>
     </p:spTree>
   </p:cSld>
-  <mc:AlternateContent>
-    <mc:Choice Requires="p14">
-      <p:transition spd="slow" p14:dur="2000"/>
-    </mc:Choice>
-    <mc:Fallback>
-      <p:transition spd="slow"/>
-    </mc:Fallback>
-  </mc:AlternateContent>
+  <p:clrMapOvr>
+    <a:masterClrMapping/>
+  </p:clrMapOvr>
 </p:sld>
 </file>
 
-<file path=ppt/slides/slide15.xml><?xml version="1.0" encoding="utf-8"?>
-<p:sld xmlns:a="http://schemas.openxmlformats.org/drawingml/2006/main" xmlns:p="http://schemas.openxmlformats.org/presentationml/2006/main" xmlns:r="http://schemas.openxmlformats.org/officeDocument/2006/relationships" xmlns:p14="http://schemas.microsoft.com/office/powerpoint/2010/main" xmlns:p15="http://schemas.microsoft.com/office/powerpoint/2012/main" xmlns:mc="http://schemas.openxmlformats.org/markup-compatibility/2006">
+<file path=ppt/slides/slide13.xml><?xml version="1.0" encoding="utf-8"?>
+<p:sld xmlns:a="http://schemas.openxmlformats.org/drawingml/2006/main" xmlns:r="http://schemas.openxmlformats.org/officeDocument/2006/relationships" xmlns:p="http://schemas.openxmlformats.org/presentationml/2006/main">
   <p:cSld>
     <p:spTree>
       <p:nvGrpSpPr>
@@ -3894,6 +4372,7 @@
           <a:bodyPr lIns="0" tIns="0" rIns="0" bIns="0" anchor="ctr">
             <a:spAutoFit/>
           </a:bodyPr>
+          <a:lstStyle/>
           <a:p>
             <a:pPr indent="0" algn="ctr" defTabSz="914400">
               <a:lnSpc>
@@ -3915,30 +4394,22 @@
               </a:rPr>
               <a:t>Top Negative Predictors</a:t>
             </a:r>
-            <a:endParaRPr lang="en-US" sz="3300" b="0" u="none" strike="noStrike">
-              <a:solidFill>
-                <a:srgbClr val="000000"/>
-              </a:solidFill>
-              <a:effectLst/>
-              <a:uFillTx/>
-              <a:latin typeface="Arial"/>
-            </a:endParaRPr>
           </a:p>
         </p:txBody>
       </p:sp>
       <p:pic>
         <p:nvPicPr>
-          <p:cNvPr id="60" name=""/>
+          <p:cNvPr id="60" name="Picture 59"/>
           <p:cNvPicPr/>
           <p:nvPr/>
         </p:nvPicPr>
         <p:blipFill>
-          <a:blip r:embed="rId1"/>
+          <a:blip r:embed="rId3"/>
           <a:stretch/>
         </p:blipFill>
         <p:spPr>
           <a:xfrm>
-            <a:off x="2286000" y="1143000"/>
+            <a:off x="2223000" y="1172160"/>
             <a:ext cx="5633640" cy="4038840"/>
           </a:xfrm>
           <a:prstGeom prst="rect">
@@ -3952,19 +4423,14 @@
       </p:pic>
     </p:spTree>
   </p:cSld>
-  <mc:AlternateContent>
-    <mc:Choice Requires="p14">
-      <p:transition spd="slow" p14:dur="2000"/>
-    </mc:Choice>
-    <mc:Fallback>
-      <p:transition spd="slow"/>
-    </mc:Fallback>
-  </mc:AlternateContent>
+  <p:clrMapOvr>
+    <a:masterClrMapping/>
+  </p:clrMapOvr>
 </p:sld>
 </file>
 
-<file path=ppt/slides/slide16.xml><?xml version="1.0" encoding="utf-8"?>
-<p:sld xmlns:a="http://schemas.openxmlformats.org/drawingml/2006/main" xmlns:p="http://schemas.openxmlformats.org/presentationml/2006/main" xmlns:r="http://schemas.openxmlformats.org/officeDocument/2006/relationships" xmlns:p14="http://schemas.microsoft.com/office/powerpoint/2010/main" xmlns:p15="http://schemas.microsoft.com/office/powerpoint/2012/main" xmlns:mc="http://schemas.openxmlformats.org/markup-compatibility/2006">
+<file path=ppt/slides/slide14.xml><?xml version="1.0" encoding="utf-8"?>
+<p:sld xmlns:a="http://schemas.openxmlformats.org/drawingml/2006/main" xmlns:r="http://schemas.openxmlformats.org/officeDocument/2006/relationships" xmlns:p="http://schemas.openxmlformats.org/presentationml/2006/main">
   <p:cSld>
     <p:spTree>
       <p:nvGrpSpPr>
@@ -4007,6 +4473,7 @@
           <a:bodyPr lIns="0" tIns="0" rIns="0" bIns="0" anchor="ctr">
             <a:spAutoFit/>
           </a:bodyPr>
+          <a:lstStyle/>
           <a:p>
             <a:pPr indent="0" algn="ctr" defTabSz="914400">
               <a:lnSpc>
@@ -4067,6 +4534,7 @@
           <a:bodyPr lIns="0" tIns="0" rIns="0" bIns="0" anchor="t">
             <a:normAutofit lnSpcReduction="9999"/>
           </a:bodyPr>
+          <a:lstStyle/>
           <a:p>
             <a:pPr marL="457200" lvl="1" indent="-324000" algn="l" defTabSz="914400">
               <a:lnSpc>
@@ -4083,7 +4551,7 @@
               <a:buChar char=""/>
             </a:pPr>
             <a:r>
-              <a:rPr lang="en-US" sz="2400" b="0" u="none" strike="noStrike">
+              <a:rPr lang="en-US" sz="2400" b="0" u="none" strike="noStrike" dirty="0">
                 <a:solidFill>
                   <a:srgbClr val="000000"/>
                 </a:solidFill>
@@ -4092,21 +4560,9 @@
                 <a:latin typeface="Arial"/>
                 <a:ea typeface="DejaVu Sans"/>
               </a:rPr>
-              <a:t>Elastic Net </a:t>
-            </a:r>
-            <a:r>
-              <a:rPr lang="en-US" sz="2400" b="0" u="none" strike="noStrike">
-                <a:solidFill>
-                  <a:srgbClr val="000000"/>
-                </a:solidFill>
-                <a:effectLst/>
-                <a:uFillTx/>
-                <a:latin typeface="Arial"/>
-                <a:ea typeface="DejaVu Sans"/>
-              </a:rPr>
-              <a:t>provided the best overall balance of predictive performance and business value.</a:t>
-            </a:r>
-            <a:endParaRPr lang="en-US" sz="2400" b="0" u="none" strike="noStrike">
+              <a:t>Elastic Net provided the best overall balance of predictive performance and business value.</a:t>
+            </a:r>
+            <a:endParaRPr lang="en-US" sz="2400" b="0" u="none" strike="noStrike" dirty="0">
               <a:solidFill>
                 <a:srgbClr val="000000"/>
               </a:solidFill>
@@ -4131,7 +4587,7 @@
               <a:buChar char=""/>
             </a:pPr>
             <a:r>
-              <a:rPr lang="en-US" sz="2400" b="0" u="none" strike="noStrike">
+              <a:rPr lang="en-US" sz="2400" b="0" u="none" strike="noStrike" dirty="0">
                 <a:solidFill>
                   <a:srgbClr val="000000"/>
                 </a:solidFill>
@@ -4142,7 +4598,7 @@
               </a:rPr>
               <a:t>Highest cross-validated business utility (tied with Ridge)</a:t>
             </a:r>
-            <a:endParaRPr lang="en-US" sz="2400" b="0" u="none" strike="noStrike">
+            <a:endParaRPr lang="en-US" sz="2400" b="0" u="none" strike="noStrike" dirty="0">
               <a:solidFill>
                 <a:srgbClr val="000000"/>
               </a:solidFill>
@@ -4167,7 +4623,7 @@
               <a:buChar char=""/>
             </a:pPr>
             <a:r>
-              <a:rPr lang="en-US" sz="2400" b="0" u="none" strike="noStrike">
+              <a:rPr lang="en-US" sz="2400" b="0" u="none" strike="noStrike" dirty="0">
                 <a:solidFill>
                   <a:srgbClr val="000000"/>
                 </a:solidFill>
@@ -4178,7 +4634,7 @@
               </a:rPr>
               <a:t>Highest overall accuracy</a:t>
             </a:r>
-            <a:endParaRPr lang="en-US" sz="2400" b="0" u="none" strike="noStrike">
+            <a:endParaRPr lang="en-US" sz="2400" b="0" u="none" strike="noStrike" dirty="0">
               <a:solidFill>
                 <a:srgbClr val="000000"/>
               </a:solidFill>
@@ -4203,7 +4659,7 @@
               <a:buChar char=""/>
             </a:pPr>
             <a:r>
-              <a:rPr lang="en-US" sz="2400" b="0" u="none" strike="noStrike">
+              <a:rPr lang="en-US" sz="2400" b="0" u="none" strike="noStrike" dirty="0">
                 <a:solidFill>
                   <a:srgbClr val="000000"/>
                 </a:solidFill>
@@ -4214,7 +4670,7 @@
               </a:rPr>
               <a:t>Highest precision while maintaining an AUC comparable to the other models. </a:t>
             </a:r>
-            <a:endParaRPr lang="en-US" sz="2400" b="0" u="none" strike="noStrike">
+            <a:endParaRPr lang="en-US" sz="2400" b="0" u="none" strike="noStrike" dirty="0">
               <a:solidFill>
                 <a:srgbClr val="000000"/>
               </a:solidFill>
@@ -4239,7 +4695,7 @@
               <a:buChar char=""/>
             </a:pPr>
             <a:r>
-              <a:rPr lang="en-US" sz="2400" b="0" u="none" strike="noStrike">
+              <a:rPr lang="en-US" sz="2400" b="0" u="none" strike="noStrike" dirty="0">
                 <a:solidFill>
                   <a:srgbClr val="000000"/>
                 </a:solidFill>
@@ -4248,9 +4704,9 @@
                 <a:latin typeface="Arial"/>
                 <a:ea typeface="DejaVu Sans"/>
               </a:rPr>
-              <a:t>Our analysis indicated that the dataset contained a relatively stable set of predictors with limited multicollinearity. We removed some predictors where we saw or predicted multicollinearity.</a:t>
-            </a:r>
-            <a:endParaRPr lang="en-US" sz="2400" b="0" u="none" strike="noStrike">
+              <a:t>Our analysis indicated that the dataset contained a relatively stable set of predictors with limited multicollinearity. We removed some predictors where we saw or predicted multicollinearity or identical values in for all observations.</a:t>
+            </a:r>
+            <a:endParaRPr lang="en-US" sz="2400" b="0" u="none" strike="noStrike" dirty="0">
               <a:solidFill>
                 <a:srgbClr val="000000"/>
               </a:solidFill>
@@ -4263,19 +4719,14 @@
       </p:sp>
     </p:spTree>
   </p:cSld>
-  <mc:AlternateContent>
-    <mc:Choice Requires="p14">
-      <p:transition spd="slow" p14:dur="2000"/>
-    </mc:Choice>
-    <mc:Fallback>
-      <p:transition spd="slow"/>
-    </mc:Fallback>
-  </mc:AlternateContent>
+  <p:clrMapOvr>
+    <a:masterClrMapping/>
+  </p:clrMapOvr>
 </p:sld>
 </file>
 
-<file path=ppt/slides/slide17.xml><?xml version="1.0" encoding="utf-8"?>
-<p:sld xmlns:a="http://schemas.openxmlformats.org/drawingml/2006/main" xmlns:p="http://schemas.openxmlformats.org/presentationml/2006/main" xmlns:r="http://schemas.openxmlformats.org/officeDocument/2006/relationships" xmlns:p14="http://schemas.microsoft.com/office/powerpoint/2010/main" xmlns:p15="http://schemas.microsoft.com/office/powerpoint/2012/main" xmlns:mc="http://schemas.openxmlformats.org/markup-compatibility/2006">
+<file path=ppt/slides/slide15.xml><?xml version="1.0" encoding="utf-8"?>
+<p:sld xmlns:a="http://schemas.openxmlformats.org/drawingml/2006/main" xmlns:r="http://schemas.openxmlformats.org/officeDocument/2006/relationships" xmlns:p="http://schemas.openxmlformats.org/presentationml/2006/main">
   <p:cSld>
     <p:spTree>
       <p:nvGrpSpPr>
@@ -4318,6 +4769,7 @@
           <a:bodyPr lIns="0" tIns="0" rIns="0" bIns="0" anchor="ctr">
             <a:spAutoFit/>
           </a:bodyPr>
+          <a:lstStyle/>
           <a:p>
             <a:pPr indent="0" algn="ctr" defTabSz="914400">
               <a:lnSpc>
@@ -4376,8 +4828,9 @@
         </p:spPr>
         <p:txBody>
           <a:bodyPr lIns="0" tIns="0" rIns="0" bIns="0" anchor="t">
-            <a:normAutofit fontScale="62500" lnSpcReduction="19999"/>
+            <a:normAutofit fontScale="55000" lnSpcReduction="20000"/>
           </a:bodyPr>
+          <a:lstStyle/>
           <a:p>
             <a:pPr marL="432000" indent="-324000" algn="l" defTabSz="914400">
               <a:lnSpc>
@@ -4790,19 +5243,14 @@
       </p:sp>
     </p:spTree>
   </p:cSld>
-  <mc:AlternateContent>
-    <mc:Choice Requires="p14">
-      <p:transition spd="slow" p14:dur="2000"/>
-    </mc:Choice>
-    <mc:Fallback>
-      <p:transition spd="slow"/>
-    </mc:Fallback>
-  </mc:AlternateContent>
+  <p:clrMapOvr>
+    <a:masterClrMapping/>
+  </p:clrMapOvr>
 </p:sld>
 </file>
 
-<file path=ppt/slides/slide18.xml><?xml version="1.0" encoding="utf-8"?>
-<p:sld xmlns:a="http://schemas.openxmlformats.org/drawingml/2006/main" xmlns:p="http://schemas.openxmlformats.org/presentationml/2006/main" xmlns:r="http://schemas.openxmlformats.org/officeDocument/2006/relationships" xmlns:p14="http://schemas.microsoft.com/office/powerpoint/2010/main" xmlns:p15="http://schemas.microsoft.com/office/powerpoint/2012/main" xmlns:mc="http://schemas.openxmlformats.org/markup-compatibility/2006">
+<file path=ppt/slides/slide16.xml><?xml version="1.0" encoding="utf-8"?>
+<p:sld xmlns:a="http://schemas.openxmlformats.org/drawingml/2006/main" xmlns:r="http://schemas.openxmlformats.org/officeDocument/2006/relationships" xmlns:p="http://schemas.openxmlformats.org/presentationml/2006/main">
   <p:cSld>
     <p:spTree>
       <p:nvGrpSpPr>
@@ -4830,8 +5278,8 @@
         </p:nvSpPr>
         <p:spPr>
           <a:xfrm>
-            <a:off x="504000" y="225360"/>
-            <a:ext cx="9071640" cy="947160"/>
+            <a:off x="504000" y="470416"/>
+            <a:ext cx="9071640" cy="457048"/>
           </a:xfrm>
           <a:prstGeom prst="rect">
             <a:avLst/>
@@ -4845,6 +5293,7 @@
           <a:bodyPr lIns="0" tIns="0" rIns="0" bIns="0" anchor="ctr">
             <a:spAutoFit/>
           </a:bodyPr>
+          <a:lstStyle/>
           <a:p>
             <a:pPr indent="0" algn="ctr" defTabSz="914400">
               <a:lnSpc>
@@ -4856,7 +5305,7 @@
               </a:tabLst>
             </a:pPr>
             <a:r>
-              <a:rPr lang="en-US" sz="3300" b="0" u="none" strike="noStrike">
+              <a:rPr lang="en-US" sz="3300" b="0" u="none" strike="noStrike" dirty="0">
                 <a:solidFill>
                   <a:srgbClr val="000000"/>
                 </a:solidFill>
@@ -4865,9 +5314,9 @@
                 <a:latin typeface="Arial"/>
                 <a:ea typeface="DejaVu Sans"/>
               </a:rPr>
-              <a:t>Conclusion</a:t>
-            </a:r>
-            <a:endParaRPr lang="en-US" sz="3300" b="0" u="none" strike="noStrike">
+              <a:t>Top Predictors</a:t>
+            </a:r>
+            <a:endParaRPr lang="en-US" sz="3300" b="0" u="none" strike="noStrike" dirty="0">
               <a:solidFill>
                 <a:srgbClr val="000000"/>
               </a:solidFill>
@@ -4880,31 +5329,42 @@
       </p:sp>
       <p:graphicFrame>
         <p:nvGraphicFramePr>
-          <p:cNvPr id="66" name=""/>
+          <p:cNvPr id="66" name="Table 65"/>
           <p:cNvGraphicFramePr/>
           <p:nvPr/>
         </p:nvGraphicFramePr>
         <p:xfrm>
           <a:off x="1535040" y="968040"/>
-          <a:ext cx="6858000" cy="3678480"/>
+          <a:ext cx="6858000" cy="3678840"/>
         </p:xfrm>
         <a:graphic>
           <a:graphicData uri="http://schemas.openxmlformats.org/drawingml/2006/table">
             <a:tbl>
               <a:tblPr/>
               <a:tblGrid>
-                <a:gridCol w="3432960"/>
-                <a:gridCol w="3425040"/>
+                <a:gridCol w="3432960">
+                  <a:extLst>
+                    <a:ext uri="{9D8B030D-6E8A-4147-A177-3AD203B41FA5}">
+                      <a16:colId xmlns:a16="http://schemas.microsoft.com/office/drawing/2014/main" val="20000"/>
+                    </a:ext>
+                  </a:extLst>
+                </a:gridCol>
+                <a:gridCol w="3425040">
+                  <a:extLst>
+                    <a:ext uri="{9D8B030D-6E8A-4147-A177-3AD203B41FA5}">
+                      <a16:colId xmlns:a16="http://schemas.microsoft.com/office/drawing/2014/main" val="20001"/>
+                    </a:ext>
+                  </a:extLst>
+                </a:gridCol>
               </a:tblGrid>
               <a:tr h="412200">
                 <a:tc>
                   <a:txBody>
-                    <a:bodyPr lIns="36000" tIns="36000" rIns="36000" bIns="36000" anchor="t">
-                      <a:noAutofit/>
-                    </a:bodyPr>
+                    <a:bodyPr/>
+                    <a:lstStyle/>
                     <a:p>
                       <a:r>
-                        <a:rPr lang="en-US" sz="1800" b="0" u="none" strike="noStrike">
+                        <a:rPr lang="en-US" sz="1800" b="0" u="none" strike="noStrike" dirty="0">
                           <a:solidFill>
                             <a:srgbClr val="000000"/>
                           </a:solidFill>
@@ -4915,7 +5375,7 @@
                         </a:rPr>
                         <a:t>Years Since Last Promotion</a:t>
                       </a:r>
-                      <a:endParaRPr lang="en-US" sz="1800" b="0" u="none" strike="noStrike">
+                      <a:endParaRPr lang="en-US" sz="1800" b="0" u="none" strike="noStrike" dirty="0">
                         <a:solidFill>
                           <a:srgbClr val="000000"/>
                         </a:solidFill>
@@ -4925,7 +5385,7 @@
                       </a:endParaRPr>
                     </a:p>
                   </a:txBody>
-                  <a:tcPr anchor="t" marL="36000" marR="36000" marT="36000" marB="36000">
+                  <a:tcPr marL="36000" marR="36000" marT="36000" marB="36000">
                     <a:lnL w="7200">
                       <a:solidFill>
                         <a:srgbClr val="000000"/>
@@ -4955,9 +5415,8 @@
                 </a:tc>
                 <a:tc>
                   <a:txBody>
-                    <a:bodyPr lIns="36000" tIns="36000" rIns="36000" bIns="36000" anchor="t">
-                      <a:noAutofit/>
-                    </a:bodyPr>
+                    <a:bodyPr/>
+                    <a:lstStyle/>
                     <a:p>
                       <a:r>
                         <a:rPr lang="en-US" sz="1800" b="0" u="none" strike="noStrike">
@@ -4970,17 +5429,9 @@
                         </a:rPr>
                         <a:t>Strongest Positive Effect</a:t>
                       </a:r>
-                      <a:endParaRPr lang="en-US" sz="1800" b="0" u="none" strike="noStrike">
-                        <a:solidFill>
-                          <a:srgbClr val="000000"/>
-                        </a:solidFill>
-                        <a:effectLst/>
-                        <a:uFillTx/>
-                        <a:latin typeface="Arial"/>
-                      </a:endParaRPr>
                     </a:p>
                   </a:txBody>
-                  <a:tcPr anchor="t" marL="36000" marR="36000" marT="36000" marB="36000">
+                  <a:tcPr marL="36000" marR="36000" marT="36000" marB="36000">
                     <a:lnL w="7200">
                       <a:solidFill>
                         <a:srgbClr val="000000"/>
@@ -5008,13 +5459,17 @@
                     <a:noFill/>
                   </a:tcPr>
                 </a:tc>
+                <a:extLst>
+                  <a:ext uri="{0D108BD9-81ED-4DB2-BD59-A6C34878D82A}">
+                    <a16:rowId xmlns:a16="http://schemas.microsoft.com/office/drawing/2014/main" val="10000"/>
+                  </a:ext>
+                </a:extLst>
               </a:tr>
               <a:tr h="408960">
                 <a:tc>
                   <a:txBody>
-                    <a:bodyPr lIns="36000" tIns="36000" rIns="36000" bIns="36000" anchor="t">
-                      <a:noAutofit/>
-                    </a:bodyPr>
+                    <a:bodyPr/>
+                    <a:lstStyle/>
                     <a:p>
                       <a:pPr defTabSz="914400">
                         <a:lnSpc>
@@ -5043,7 +5498,7 @@
                       </a:endParaRPr>
                     </a:p>
                   </a:txBody>
-                  <a:tcPr anchor="t" marL="36000" marR="36000" marT="36000" marB="36000">
+                  <a:tcPr marL="36000" marR="36000" marT="36000" marB="36000">
                     <a:lnL w="7200">
                       <a:solidFill>
                         <a:srgbClr val="000000"/>
@@ -5073,9 +5528,8 @@
                 </a:tc>
                 <a:tc>
                   <a:txBody>
-                    <a:bodyPr lIns="36000" tIns="36000" rIns="36000" bIns="36000" anchor="t">
-                      <a:noAutofit/>
-                    </a:bodyPr>
+                    <a:bodyPr/>
+                    <a:lstStyle/>
                     <a:p>
                       <a:r>
                         <a:rPr lang="en-US" sz="1800" b="0" u="none" strike="noStrike">
@@ -5088,17 +5542,9 @@
                         </a:rPr>
                         <a:t>Strong Positive Effect</a:t>
                       </a:r>
-                      <a:endParaRPr lang="en-US" sz="1800" b="0" u="none" strike="noStrike">
-                        <a:solidFill>
-                          <a:srgbClr val="000000"/>
-                        </a:solidFill>
-                        <a:effectLst/>
-                        <a:uFillTx/>
-                        <a:latin typeface="Arial"/>
-                      </a:endParaRPr>
                     </a:p>
                   </a:txBody>
-                  <a:tcPr anchor="t" marL="36000" marR="36000" marT="36000" marB="36000">
+                  <a:tcPr marL="36000" marR="36000" marT="36000" marB="36000">
                     <a:lnL w="7200">
                       <a:solidFill>
                         <a:srgbClr val="000000"/>
@@ -5126,13 +5572,17 @@
                     <a:noFill/>
                   </a:tcPr>
                 </a:tc>
+                <a:extLst>
+                  <a:ext uri="{0D108BD9-81ED-4DB2-BD59-A6C34878D82A}">
+                    <a16:rowId xmlns:a16="http://schemas.microsoft.com/office/drawing/2014/main" val="10001"/>
+                  </a:ext>
+                </a:extLst>
               </a:tr>
               <a:tr h="402480">
                 <a:tc>
                   <a:txBody>
-                    <a:bodyPr lIns="36000" tIns="36000" rIns="36000" bIns="36000" anchor="t">
-                      <a:noAutofit/>
-                    </a:bodyPr>
+                    <a:bodyPr/>
+                    <a:lstStyle/>
                     <a:p>
                       <a:r>
                         <a:rPr lang="en-US" sz="1800" b="0" u="none" strike="noStrike">
@@ -5145,17 +5595,9 @@
                         </a:rPr>
                         <a:t>Overtime</a:t>
                       </a:r>
-                      <a:endParaRPr lang="en-US" sz="1800" b="0" u="none" strike="noStrike">
-                        <a:solidFill>
-                          <a:srgbClr val="000000"/>
-                        </a:solidFill>
-                        <a:effectLst/>
-                        <a:uFillTx/>
-                        <a:latin typeface="Arial"/>
-                      </a:endParaRPr>
                     </a:p>
                   </a:txBody>
-                  <a:tcPr anchor="t" marL="36000" marR="36000" marT="36000" marB="36000">
+                  <a:tcPr marL="36000" marR="36000" marT="36000" marB="36000">
                     <a:lnL w="7200">
                       <a:solidFill>
                         <a:srgbClr val="000000"/>
@@ -5185,9 +5627,8 @@
                 </a:tc>
                 <a:tc>
                   <a:txBody>
-                    <a:bodyPr lIns="36000" tIns="36000" rIns="36000" bIns="36000" anchor="t">
-                      <a:noAutofit/>
-                    </a:bodyPr>
+                    <a:bodyPr/>
+                    <a:lstStyle/>
                     <a:p>
                       <a:r>
                         <a:rPr lang="en-US" sz="1800" b="0" u="none" strike="noStrike">
@@ -5200,17 +5641,9 @@
                         </a:rPr>
                         <a:t>Moderate Positive Effect</a:t>
                       </a:r>
-                      <a:endParaRPr lang="en-US" sz="1800" b="0" u="none" strike="noStrike">
-                        <a:solidFill>
-                          <a:srgbClr val="000000"/>
-                        </a:solidFill>
-                        <a:effectLst/>
-                        <a:uFillTx/>
-                        <a:latin typeface="Arial"/>
-                      </a:endParaRPr>
                     </a:p>
                   </a:txBody>
-                  <a:tcPr anchor="t" marL="36000" marR="36000" marT="36000" marB="36000">
+                  <a:tcPr marL="36000" marR="36000" marT="36000" marB="36000">
                     <a:lnL w="7200">
                       <a:solidFill>
                         <a:srgbClr val="000000"/>
@@ -5238,13 +5671,17 @@
                     <a:noFill/>
                   </a:tcPr>
                 </a:tc>
+                <a:extLst>
+                  <a:ext uri="{0D108BD9-81ED-4DB2-BD59-A6C34878D82A}">
+                    <a16:rowId xmlns:a16="http://schemas.microsoft.com/office/drawing/2014/main" val="10002"/>
+                  </a:ext>
+                </a:extLst>
               </a:tr>
               <a:tr h="490680">
                 <a:tc>
                   <a:txBody>
-                    <a:bodyPr lIns="36000" tIns="36000" rIns="36000" bIns="36000" anchor="t">
-                      <a:noAutofit/>
-                    </a:bodyPr>
+                    <a:bodyPr/>
+                    <a:lstStyle/>
                     <a:p>
                       <a:r>
                         <a:rPr lang="en-US" sz="1800" b="0" u="none" strike="noStrike">
@@ -5257,17 +5694,9 @@
                         </a:rPr>
                         <a:t>Business Travel (Frequent)</a:t>
                       </a:r>
-                      <a:endParaRPr lang="en-US" sz="1800" b="0" u="none" strike="noStrike">
-                        <a:solidFill>
-                          <a:srgbClr val="000000"/>
-                        </a:solidFill>
-                        <a:effectLst/>
-                        <a:uFillTx/>
-                        <a:latin typeface="Arial"/>
-                      </a:endParaRPr>
                     </a:p>
                   </a:txBody>
-                  <a:tcPr anchor="t" marL="36000" marR="36000" marT="36000" marB="36000">
+                  <a:tcPr marL="36000" marR="36000" marT="36000" marB="36000">
                     <a:lnL w="7200">
                       <a:solidFill>
                         <a:srgbClr val="000000"/>
@@ -5297,9 +5726,8 @@
                 </a:tc>
                 <a:tc>
                   <a:txBody>
-                    <a:bodyPr lIns="36000" tIns="36000" rIns="36000" bIns="36000" anchor="t">
-                      <a:noAutofit/>
-                    </a:bodyPr>
+                    <a:bodyPr/>
+                    <a:lstStyle/>
                     <a:p>
                       <a:r>
                         <a:rPr lang="en-US" sz="1800" b="0" u="none" strike="noStrike">
@@ -5312,17 +5740,9 @@
                         </a:rPr>
                         <a:t>Moderate Positive Effect</a:t>
                       </a:r>
-                      <a:endParaRPr lang="en-US" sz="1800" b="0" u="none" strike="noStrike">
-                        <a:solidFill>
-                          <a:srgbClr val="000000"/>
-                        </a:solidFill>
-                        <a:effectLst/>
-                        <a:uFillTx/>
-                        <a:latin typeface="Arial"/>
-                      </a:endParaRPr>
                     </a:p>
                   </a:txBody>
-                  <a:tcPr anchor="t" marL="36000" marR="36000" marT="36000" marB="36000">
+                  <a:tcPr marL="36000" marR="36000" marT="36000" marB="36000">
                     <a:lnL w="7200">
                       <a:solidFill>
                         <a:srgbClr val="000000"/>
@@ -5350,16 +5770,20 @@
                     <a:noFill/>
                   </a:tcPr>
                 </a:tc>
+                <a:extLst>
+                  <a:ext uri="{0D108BD9-81ED-4DB2-BD59-A6C34878D82A}">
+                    <a16:rowId xmlns:a16="http://schemas.microsoft.com/office/drawing/2014/main" val="10003"/>
+                  </a:ext>
+                </a:extLst>
               </a:tr>
               <a:tr h="490680">
                 <a:tc>
                   <a:txBody>
-                    <a:bodyPr lIns="36000" tIns="36000" rIns="36000" bIns="36000" anchor="t">
-                      <a:noAutofit/>
-                    </a:bodyPr>
+                    <a:bodyPr/>
+                    <a:lstStyle/>
                     <a:p>
                       <a:r>
-                        <a:rPr lang="en-US" sz="1800" b="0" u="none" strike="noStrike">
+                        <a:rPr lang="en-US" sz="1800" b="0" u="none" strike="noStrike" dirty="0">
                           <a:solidFill>
                             <a:srgbClr val="000000"/>
                           </a:solidFill>
@@ -5369,17 +5793,9 @@
                         </a:rPr>
                         <a:t>Distance From Home</a:t>
                       </a:r>
-                      <a:endParaRPr lang="en-US" sz="1800" b="0" u="none" strike="noStrike">
-                        <a:solidFill>
-                          <a:srgbClr val="000000"/>
-                        </a:solidFill>
-                        <a:effectLst/>
-                        <a:uFillTx/>
-                        <a:latin typeface="Arial"/>
-                      </a:endParaRPr>
                     </a:p>
                   </a:txBody>
-                  <a:tcPr anchor="t" marL="36000" marR="36000" marT="36000" marB="36000">
+                  <a:tcPr marL="36000" marR="36000" marT="36000" marB="36000">
                     <a:lnL w="7200">
                       <a:solidFill>
                         <a:srgbClr val="000000"/>
@@ -5409,9 +5825,8 @@
                 </a:tc>
                 <a:tc>
                   <a:txBody>
-                    <a:bodyPr lIns="36000" tIns="36000" rIns="36000" bIns="36000" anchor="t">
-                      <a:noAutofit/>
-                    </a:bodyPr>
+                    <a:bodyPr/>
+                    <a:lstStyle/>
                     <a:p>
                       <a:r>
                         <a:rPr lang="en-US" sz="1800" b="0" u="none" strike="noStrike">
@@ -5424,17 +5839,9 @@
                         </a:rPr>
                         <a:t>Negative Effect</a:t>
                       </a:r>
-                      <a:endParaRPr lang="en-US" sz="1800" b="0" u="none" strike="noStrike">
-                        <a:solidFill>
-                          <a:srgbClr val="000000"/>
-                        </a:solidFill>
-                        <a:effectLst/>
-                        <a:uFillTx/>
-                        <a:latin typeface="Arial"/>
-                      </a:endParaRPr>
                     </a:p>
                   </a:txBody>
-                  <a:tcPr anchor="t" marL="36000" marR="36000" marT="36000" marB="36000">
+                  <a:tcPr marL="36000" marR="36000" marT="36000" marB="36000">
                     <a:lnL w="7200">
                       <a:solidFill>
                         <a:srgbClr val="000000"/>
@@ -5462,13 +5869,17 @@
                     <a:noFill/>
                   </a:tcPr>
                 </a:tc>
+                <a:extLst>
+                  <a:ext uri="{0D108BD9-81ED-4DB2-BD59-A6C34878D82A}">
+                    <a16:rowId xmlns:a16="http://schemas.microsoft.com/office/drawing/2014/main" val="10004"/>
+                  </a:ext>
+                </a:extLst>
               </a:tr>
               <a:tr h="490680">
                 <a:tc>
                   <a:txBody>
-                    <a:bodyPr lIns="36000" tIns="36000" rIns="36000" bIns="36000" anchor="t">
-                      <a:noAutofit/>
-                    </a:bodyPr>
+                    <a:bodyPr/>
+                    <a:lstStyle/>
                     <a:p>
                       <a:r>
                         <a:rPr lang="en-US" sz="1800" b="0" u="none" strike="noStrike">
@@ -5481,17 +5892,9 @@
                         </a:rPr>
                         <a:t>Environment Satisfaction</a:t>
                       </a:r>
-                      <a:endParaRPr lang="en-US" sz="1800" b="0" u="none" strike="noStrike">
-                        <a:solidFill>
-                          <a:srgbClr val="000000"/>
-                        </a:solidFill>
-                        <a:effectLst/>
-                        <a:uFillTx/>
-                        <a:latin typeface="Arial"/>
-                      </a:endParaRPr>
                     </a:p>
                   </a:txBody>
-                  <a:tcPr anchor="t" marL="36000" marR="36000" marT="36000" marB="36000">
+                  <a:tcPr marL="36000" marR="36000" marT="36000" marB="36000">
                     <a:lnL w="7200">
                       <a:solidFill>
                         <a:srgbClr val="000000"/>
@@ -5521,9 +5924,8 @@
                 </a:tc>
                 <a:tc>
                   <a:txBody>
-                    <a:bodyPr lIns="36000" tIns="36000" rIns="36000" bIns="36000" anchor="t">
-                      <a:noAutofit/>
-                    </a:bodyPr>
+                    <a:bodyPr/>
+                    <a:lstStyle/>
                     <a:p>
                       <a:r>
                         <a:rPr lang="en-US" sz="1800" b="0" u="none" strike="noStrike">
@@ -5536,17 +5938,9 @@
                         </a:rPr>
                         <a:t>Negative Effect</a:t>
                       </a:r>
-                      <a:endParaRPr lang="en-US" sz="1800" b="0" u="none" strike="noStrike">
-                        <a:solidFill>
-                          <a:srgbClr val="000000"/>
-                        </a:solidFill>
-                        <a:effectLst/>
-                        <a:uFillTx/>
-                        <a:latin typeface="Arial"/>
-                      </a:endParaRPr>
                     </a:p>
                   </a:txBody>
-                  <a:tcPr anchor="t" marL="36000" marR="36000" marT="36000" marB="36000">
+                  <a:tcPr marL="36000" marR="36000" marT="36000" marB="36000">
                     <a:lnL w="7200">
                       <a:solidFill>
                         <a:srgbClr val="000000"/>
@@ -5574,13 +5968,17 @@
                     <a:noFill/>
                   </a:tcPr>
                 </a:tc>
+                <a:extLst>
+                  <a:ext uri="{0D108BD9-81ED-4DB2-BD59-A6C34878D82A}">
+                    <a16:rowId xmlns:a16="http://schemas.microsoft.com/office/drawing/2014/main" val="10005"/>
+                  </a:ext>
+                </a:extLst>
               </a:tr>
               <a:tr h="490680">
                 <a:tc>
                   <a:txBody>
-                    <a:bodyPr lIns="36000" tIns="36000" rIns="36000" bIns="36000" anchor="t">
-                      <a:noAutofit/>
-                    </a:bodyPr>
+                    <a:bodyPr/>
+                    <a:lstStyle/>
                     <a:p>
                       <a:r>
                         <a:rPr lang="en-US" sz="1800" b="0" u="none" strike="noStrike">
@@ -5593,17 +5991,9 @@
                         </a:rPr>
                         <a:t>Job Satisfaction</a:t>
                       </a:r>
-                      <a:endParaRPr lang="en-US" sz="1800" b="0" u="none" strike="noStrike">
-                        <a:solidFill>
-                          <a:srgbClr val="000000"/>
-                        </a:solidFill>
-                        <a:effectLst/>
-                        <a:uFillTx/>
-                        <a:latin typeface="Arial"/>
-                      </a:endParaRPr>
                     </a:p>
                   </a:txBody>
-                  <a:tcPr anchor="t" marL="36000" marR="36000" marT="36000" marB="36000">
+                  <a:tcPr marL="36000" marR="36000" marT="36000" marB="36000">
                     <a:lnL w="7200">
                       <a:solidFill>
                         <a:srgbClr val="000000"/>
@@ -5633,9 +6023,8 @@
                 </a:tc>
                 <a:tc>
                   <a:txBody>
-                    <a:bodyPr lIns="36000" tIns="36000" rIns="36000" bIns="36000" anchor="t">
-                      <a:noAutofit/>
-                    </a:bodyPr>
+                    <a:bodyPr/>
+                    <a:lstStyle/>
                     <a:p>
                       <a:r>
                         <a:rPr lang="en-US" sz="1800" b="0" u="none" strike="noStrike">
@@ -5648,17 +6037,9 @@
                         </a:rPr>
                         <a:t>Negative Effect</a:t>
                       </a:r>
-                      <a:endParaRPr lang="en-US" sz="1800" b="0" u="none" strike="noStrike">
-                        <a:solidFill>
-                          <a:srgbClr val="000000"/>
-                        </a:solidFill>
-                        <a:effectLst/>
-                        <a:uFillTx/>
-                        <a:latin typeface="Arial"/>
-                      </a:endParaRPr>
                     </a:p>
                   </a:txBody>
-                  <a:tcPr anchor="t" marL="36000" marR="36000" marT="36000" marB="36000">
+                  <a:tcPr marL="36000" marR="36000" marT="36000" marB="36000">
                     <a:lnL w="7200">
                       <a:solidFill>
                         <a:srgbClr val="000000"/>
@@ -5686,13 +6067,17 @@
                     <a:noFill/>
                   </a:tcPr>
                 </a:tc>
+                <a:extLst>
+                  <a:ext uri="{0D108BD9-81ED-4DB2-BD59-A6C34878D82A}">
+                    <a16:rowId xmlns:a16="http://schemas.microsoft.com/office/drawing/2014/main" val="10006"/>
+                  </a:ext>
+                </a:extLst>
               </a:tr>
               <a:tr h="492480">
                 <a:tc>
                   <a:txBody>
-                    <a:bodyPr lIns="36000" tIns="36000" rIns="36000" bIns="36000" anchor="t">
-                      <a:noAutofit/>
-                    </a:bodyPr>
+                    <a:bodyPr/>
+                    <a:lstStyle/>
                     <a:p>
                       <a:r>
                         <a:rPr lang="en-US" sz="1800" b="0" u="none" strike="noStrike">
@@ -5705,17 +6090,9 @@
                         </a:rPr>
                         <a:t>Total Working Years</a:t>
                       </a:r>
-                      <a:endParaRPr lang="en-US" sz="1800" b="0" u="none" strike="noStrike">
-                        <a:solidFill>
-                          <a:srgbClr val="000000"/>
-                        </a:solidFill>
-                        <a:effectLst/>
-                        <a:uFillTx/>
-                        <a:latin typeface="Arial"/>
-                      </a:endParaRPr>
                     </a:p>
                   </a:txBody>
-                  <a:tcPr anchor="t" marL="36000" marR="36000" marT="36000" marB="36000">
+                  <a:tcPr marL="36000" marR="36000" marT="36000" marB="36000">
                     <a:lnL w="7200">
                       <a:solidFill>
                         <a:srgbClr val="000000"/>
@@ -5745,12 +6122,11 @@
                 </a:tc>
                 <a:tc>
                   <a:txBody>
-                    <a:bodyPr lIns="36000" tIns="36000" rIns="36000" bIns="36000" anchor="t">
-                      <a:noAutofit/>
-                    </a:bodyPr>
+                    <a:bodyPr/>
+                    <a:lstStyle/>
                     <a:p>
                       <a:r>
-                        <a:rPr lang="en-US" sz="1800" b="0" u="none" strike="noStrike">
+                        <a:rPr lang="en-US" sz="1800" b="0" u="none" strike="noStrike" dirty="0">
                           <a:solidFill>
                             <a:srgbClr val="000000"/>
                           </a:solidFill>
@@ -5760,17 +6136,9 @@
                         </a:rPr>
                         <a:t>Negative Effect</a:t>
                       </a:r>
-                      <a:endParaRPr lang="en-US" sz="1800" b="0" u="none" strike="noStrike">
-                        <a:solidFill>
-                          <a:srgbClr val="000000"/>
-                        </a:solidFill>
-                        <a:effectLst/>
-                        <a:uFillTx/>
-                        <a:latin typeface="Arial"/>
-                      </a:endParaRPr>
                     </a:p>
                   </a:txBody>
-                  <a:tcPr anchor="t" marL="36000" marR="36000" marT="36000" marB="36000">
+                  <a:tcPr marL="36000" marR="36000" marT="36000" marB="36000">
                     <a:lnL w="7200">
                       <a:solidFill>
                         <a:srgbClr val="000000"/>
@@ -5798,6 +6166,11 @@
                     <a:noFill/>
                   </a:tcPr>
                 </a:tc>
+                <a:extLst>
+                  <a:ext uri="{0D108BD9-81ED-4DB2-BD59-A6C34878D82A}">
+                    <a16:rowId xmlns:a16="http://schemas.microsoft.com/office/drawing/2014/main" val="10007"/>
+                  </a:ext>
+                </a:extLst>
               </a:tr>
             </a:tbl>
           </a:graphicData>
@@ -5805,19 +6178,199 @@
       </p:graphicFrame>
     </p:spTree>
   </p:cSld>
-  <mc:AlternateContent>
-    <mc:Choice Requires="p14">
-      <p:transition spd="slow" p14:dur="2000"/>
-    </mc:Choice>
-    <mc:Fallback>
-      <p:transition spd="slow"/>
-    </mc:Fallback>
-  </mc:AlternateContent>
+  <p:clrMapOvr>
+    <a:masterClrMapping/>
+  </p:clrMapOvr>
+</p:sld>
+</file>
+
+<file path=ppt/slides/slide17.xml><?xml version="1.0" encoding="utf-8"?>
+<p:sld xmlns:a="http://schemas.openxmlformats.org/drawingml/2006/main" xmlns:r="http://schemas.openxmlformats.org/officeDocument/2006/relationships" xmlns:p="http://schemas.openxmlformats.org/presentationml/2006/main">
+  <p:cSld>
+    <p:spTree>
+      <p:nvGrpSpPr>
+        <p:cNvPr id="1" name=""/>
+        <p:cNvGrpSpPr/>
+        <p:nvPr/>
+      </p:nvGrpSpPr>
+      <p:grpSpPr>
+        <a:xfrm>
+          <a:off x="0" y="0"/>
+          <a:ext cx="0" cy="0"/>
+          <a:chOff x="0" y="0"/>
+          <a:chExt cx="0" cy="0"/>
+        </a:xfrm>
+      </p:grpSpPr>
+      <p:sp>
+        <p:nvSpPr>
+          <p:cNvPr id="2" name="Title 1">
+            <a:extLst>
+              <a:ext uri="{FF2B5EF4-FFF2-40B4-BE49-F238E27FC236}">
+                <a16:creationId xmlns:a16="http://schemas.microsoft.com/office/drawing/2014/main" id="{D71693F3-1E18-7247-D480-E6BCB4530FFD}"/>
+              </a:ext>
+            </a:extLst>
+          </p:cNvPr>
+          <p:cNvSpPr>
+            <a:spLocks noGrp="1"/>
+          </p:cNvSpPr>
+          <p:nvPr>
+            <p:ph type="title"/>
+          </p:nvPr>
+        </p:nvSpPr>
+        <p:spPr/>
+        <p:txBody>
+          <a:bodyPr/>
+          <a:lstStyle/>
+          <a:p>
+            <a:r>
+              <a:rPr lang="en-US" dirty="0"/>
+              <a:t>Conclusion</a:t>
+            </a:r>
+          </a:p>
+        </p:txBody>
+      </p:sp>
+      <p:sp>
+        <p:nvSpPr>
+          <p:cNvPr id="4" name="PlaceHolder 2">
+            <a:extLst>
+              <a:ext uri="{FF2B5EF4-FFF2-40B4-BE49-F238E27FC236}">
+                <a16:creationId xmlns:a16="http://schemas.microsoft.com/office/drawing/2014/main" id="{7BC89BA4-7366-26DA-7CF4-E89BDD986E81}"/>
+              </a:ext>
+            </a:extLst>
+          </p:cNvPr>
+          <p:cNvSpPr txBox="1">
+            <a:spLocks/>
+          </p:cNvSpPr>
+          <p:nvPr/>
+        </p:nvSpPr>
+        <p:spPr>
+          <a:xfrm>
+            <a:off x="504000" y="1433903"/>
+            <a:ext cx="9071640" cy="3287880"/>
+          </a:xfrm>
+          <a:prstGeom prst="rect">
+            <a:avLst/>
+          </a:prstGeom>
+          <a:noFill/>
+          <a:ln w="0">
+            <a:noFill/>
+          </a:ln>
+        </p:spPr>
+        <p:txBody>
+          <a:bodyPr lIns="0" tIns="0" rIns="0" bIns="0" anchor="t">
+            <a:normAutofit/>
+          </a:bodyPr>
+          <a:lstStyle>
+            <a:lvl1pPr indent="0" algn="ctr" defTabSz="914400" rtl="0" eaLnBrk="1" latinLnBrk="0" hangingPunct="1">
+              <a:lnSpc>
+                <a:spcPct val="90000"/>
+              </a:lnSpc>
+              <a:spcBef>
+                <a:spcPct val="0"/>
+              </a:spcBef>
+              <a:buNone/>
+              <a:tabLst>
+                <a:tab pos="0" algn="l"/>
+              </a:tabLst>
+              <a:defRPr lang="en-US" sz="3300" b="0" u="none" strike="noStrike" kern="1200">
+                <a:solidFill>
+                  <a:srgbClr val="000000"/>
+                </a:solidFill>
+                <a:effectLst/>
+                <a:uFillTx/>
+                <a:latin typeface="Arial"/>
+                <a:ea typeface="DejaVu Sans"/>
+                <a:cs typeface="+mj-cs"/>
+              </a:defRPr>
+            </a:lvl1pPr>
+          </a:lstStyle>
+          <a:p>
+            <a:pPr marL="432000" indent="-324000" algn="l">
+              <a:lnSpc>
+                <a:spcPct val="100000"/>
+              </a:lnSpc>
+              <a:spcBef>
+                <a:spcPts val="1060"/>
+              </a:spcBef>
+              <a:buClr>
+                <a:srgbClr val="000000"/>
+              </a:buClr>
+              <a:buSzPct val="45000"/>
+              <a:buFont typeface="Wingdings" charset="2"/>
+              <a:buChar char=""/>
+            </a:pPr>
+            <a:r>
+              <a:rPr lang="en-US" sz="2400" dirty="0"/>
+              <a:t>Based on our assumptions and the data available, a retention program is well worth the investment as it results in significant cost savings from having to replace an employee.</a:t>
+            </a:r>
+          </a:p>
+          <a:p>
+            <a:pPr marL="432000" indent="-324000" algn="l">
+              <a:lnSpc>
+                <a:spcPct val="100000"/>
+              </a:lnSpc>
+              <a:spcBef>
+                <a:spcPts val="1060"/>
+              </a:spcBef>
+              <a:buClr>
+                <a:srgbClr val="000000"/>
+              </a:buClr>
+              <a:buSzPct val="45000"/>
+              <a:buFont typeface="Wingdings" charset="2"/>
+              <a:buChar char=""/>
+            </a:pPr>
+            <a:r>
+              <a:rPr lang="en-US" sz="2100" kern="0" dirty="0">
+                <a:solidFill>
+                  <a:srgbClr val="000000"/>
+                </a:solidFill>
+                <a:latin typeface="Arial"/>
+              </a:rPr>
+              <a:t>Money invested into employees as false positives is still likely to improve moral, productivity, and possible other benefits.</a:t>
+            </a:r>
+          </a:p>
+          <a:p>
+            <a:pPr marL="432000" indent="-324000" algn="l">
+              <a:lnSpc>
+                <a:spcPct val="100000"/>
+              </a:lnSpc>
+              <a:spcBef>
+                <a:spcPts val="1060"/>
+              </a:spcBef>
+              <a:buClr>
+                <a:srgbClr val="000000"/>
+              </a:buClr>
+              <a:buSzPct val="45000"/>
+              <a:buFont typeface="Wingdings" charset="2"/>
+              <a:buChar char=""/>
+            </a:pPr>
+            <a:r>
+              <a:rPr lang="en-US" sz="2100" kern="0" dirty="0">
+                <a:solidFill>
+                  <a:srgbClr val="000000"/>
+                </a:solidFill>
+                <a:latin typeface="Arial"/>
+              </a:rPr>
+              <a:t>Over time and with more data, the model may be improved resulting in even more savings.</a:t>
+            </a:r>
+          </a:p>
+        </p:txBody>
+      </p:sp>
+    </p:spTree>
+    <p:extLst>
+      <p:ext uri="{BB962C8B-B14F-4D97-AF65-F5344CB8AC3E}">
+        <p14:creationId xmlns:p14="http://schemas.microsoft.com/office/powerpoint/2010/main" val="1243515646"/>
+      </p:ext>
+    </p:extLst>
+  </p:cSld>
+  <p:clrMapOvr>
+    <a:masterClrMapping/>
+  </p:clrMapOvr>
 </p:sld>
 </file>
 
 <file path=ppt/slides/slide2.xml><?xml version="1.0" encoding="utf-8"?>
-<p:sld xmlns:a="http://schemas.openxmlformats.org/drawingml/2006/main" xmlns:p="http://schemas.openxmlformats.org/presentationml/2006/main" xmlns:r="http://schemas.openxmlformats.org/officeDocument/2006/relationships" xmlns:p14="http://schemas.microsoft.com/office/powerpoint/2010/main" xmlns:p15="http://schemas.microsoft.com/office/powerpoint/2012/main" xmlns:mc="http://schemas.openxmlformats.org/markup-compatibility/2006">
+<p:sld xmlns:a="http://schemas.openxmlformats.org/drawingml/2006/main" xmlns:r="http://schemas.openxmlformats.org/officeDocument/2006/relationships" xmlns:p="http://schemas.openxmlformats.org/presentationml/2006/main">
   <p:cSld>
     <p:spTree>
       <p:nvGrpSpPr>
@@ -5860,6 +6413,7 @@
           <a:bodyPr lIns="0" tIns="0" rIns="0" bIns="0" anchor="ctr">
             <a:spAutoFit/>
           </a:bodyPr>
+          <a:lstStyle/>
           <a:p>
             <a:pPr indent="0" algn="ctr" defTabSz="914400">
               <a:lnSpc>
@@ -5920,8 +6474,9 @@
           <a:bodyPr lIns="0" tIns="0" rIns="0" bIns="0" anchor="t">
             <a:normAutofit/>
           </a:bodyPr>
-          <a:p>
-            <a:pPr marL="432000" indent="-324000" algn="l" defTabSz="914400">
+          <a:lstStyle/>
+          <a:p>
+            <a:pPr marL="432000" indent="-324000" algn="l">
               <a:lnSpc>
                 <a:spcPct val="100000"/>
               </a:lnSpc>
@@ -5939,7 +6494,11 @@
               <a:buChar char=""/>
             </a:pPr>
             <a:r>
-              <a:rPr lang="en-US" sz="1500" b="0" u="none" strike="noStrike">
+              <a:rPr lang="en-US" sz="1500" dirty="0"/>
+              <a:t>Should we adopt a retention program using </a:t>
+            </a:r>
+            <a:r>
+              <a:rPr lang="en-US" sz="1500" b="0" u="none" strike="noStrike" dirty="0">
                 <a:solidFill>
                   <a:srgbClr val="000000"/>
                 </a:solidFill>
@@ -5948,9 +6507,25 @@
                 <a:latin typeface="Arial"/>
                 <a:ea typeface="DejaVu Sans"/>
               </a:rPr>
-              <a:t>How much financial value does using this predictive model create compared with not using one?</a:t>
-            </a:r>
-            <a:endParaRPr lang="en-US" sz="1500" b="0" u="none" strike="noStrike">
+              <a:t>this predictive model </a:t>
+            </a:r>
+            <a:r>
+              <a:rPr lang="en-US" sz="1500" dirty="0"/>
+              <a:t>and how much financial value does it </a:t>
+            </a:r>
+            <a:r>
+              <a:rPr lang="en-US" sz="1500" b="0" u="none" strike="noStrike" dirty="0">
+                <a:solidFill>
+                  <a:srgbClr val="000000"/>
+                </a:solidFill>
+                <a:effectLst/>
+                <a:uFillTx/>
+                <a:latin typeface="Arial"/>
+                <a:ea typeface="DejaVu Sans"/>
+              </a:rPr>
+              <a:t>create?</a:t>
+            </a:r>
+            <a:endParaRPr lang="en-US" sz="1500" b="0" u="none" strike="noStrike" dirty="0">
               <a:solidFill>
                 <a:srgbClr val="000000"/>
               </a:solidFill>
@@ -5978,7 +6553,7 @@
               <a:buChar char=""/>
             </a:pPr>
             <a:r>
-              <a:rPr lang="en-US" sz="1500" b="0" u="none" strike="noStrike">
+              <a:rPr lang="en-US" sz="1500" b="0" u="none" strike="noStrike" dirty="0">
                 <a:solidFill>
                   <a:srgbClr val="000000"/>
                 </a:solidFill>
@@ -5989,7 +6564,7 @@
               </a:rPr>
               <a:t>The primary objective is to accurately determine which employees are likely to quit before they do.</a:t>
             </a:r>
-            <a:endParaRPr lang="en-US" sz="1500" b="0" u="none" strike="noStrike">
+            <a:endParaRPr lang="en-US" sz="1500" b="0" u="none" strike="noStrike" dirty="0">
               <a:solidFill>
                 <a:srgbClr val="000000"/>
               </a:solidFill>
@@ -6020,15 +6595,22 @@
           </a:ln>
         </p:spPr>
         <p:style>
-          <a:lnRef idx="0"/>
-          <a:fillRef idx="0"/>
-          <a:effectRef idx="0"/>
+          <a:lnRef idx="0">
+            <a:scrgbClr r="0" g="0" b="0"/>
+          </a:lnRef>
+          <a:fillRef idx="0">
+            <a:scrgbClr r="0" g="0" b="0"/>
+          </a:fillRef>
+          <a:effectRef idx="0">
+            <a:scrgbClr r="0" g="0" b="0"/>
+          </a:effectRef>
           <a:fontRef idx="minor"/>
         </p:style>
         <p:txBody>
           <a:bodyPr lIns="90000" tIns="45000" rIns="90000" bIns="45000" anchor="t">
             <a:noAutofit/>
           </a:bodyPr>
+          <a:lstStyle/>
           <a:p>
             <a:pPr algn="ctr" defTabSz="914400">
               <a:lnSpc>
@@ -6084,15 +6666,22 @@
           </a:ln>
         </p:spPr>
         <p:style>
-          <a:lnRef idx="0"/>
-          <a:fillRef idx="0"/>
-          <a:effectRef idx="0"/>
+          <a:lnRef idx="0">
+            <a:scrgbClr r="0" g="0" b="0"/>
+          </a:lnRef>
+          <a:fillRef idx="0">
+            <a:scrgbClr r="0" g="0" b="0"/>
+          </a:fillRef>
+          <a:effectRef idx="0">
+            <a:scrgbClr r="0" g="0" b="0"/>
+          </a:effectRef>
           <a:fontRef idx="minor"/>
         </p:style>
         <p:txBody>
           <a:bodyPr lIns="90000" tIns="45000" rIns="90000" bIns="45000" anchor="t">
             <a:noAutofit/>
           </a:bodyPr>
+          <a:lstStyle/>
           <a:p>
             <a:pPr algn="ctr" defTabSz="914400">
               <a:lnSpc>
@@ -6130,19 +6719,14 @@
       </p:sp>
     </p:spTree>
   </p:cSld>
-  <mc:AlternateContent>
-    <mc:Choice Requires="p14">
-      <p:transition spd="slow" p14:dur="2000"/>
-    </mc:Choice>
-    <mc:Fallback>
-      <p:transition spd="slow"/>
-    </mc:Fallback>
-  </mc:AlternateContent>
+  <p:clrMapOvr>
+    <a:masterClrMapping/>
+  </p:clrMapOvr>
 </p:sld>
 </file>
 
 <file path=ppt/slides/slide3.xml><?xml version="1.0" encoding="utf-8"?>
-<p:sld xmlns:a="http://schemas.openxmlformats.org/drawingml/2006/main" xmlns:p="http://schemas.openxmlformats.org/presentationml/2006/main" xmlns:r="http://schemas.openxmlformats.org/officeDocument/2006/relationships" xmlns:p14="http://schemas.microsoft.com/office/powerpoint/2010/main" xmlns:p15="http://schemas.microsoft.com/office/powerpoint/2012/main" xmlns:mc="http://schemas.openxmlformats.org/markup-compatibility/2006">
+<p:sld xmlns:a="http://schemas.openxmlformats.org/drawingml/2006/main" xmlns:r="http://schemas.openxmlformats.org/officeDocument/2006/relationships" xmlns:p="http://schemas.openxmlformats.org/presentationml/2006/main">
   <p:cSld>
     <p:spTree>
       <p:nvGrpSpPr>
@@ -6185,6 +6769,7 @@
           <a:bodyPr lIns="0" tIns="0" rIns="0" bIns="0" anchor="ctr">
             <a:spAutoFit/>
           </a:bodyPr>
+          <a:lstStyle/>
           <a:p>
             <a:pPr indent="0" algn="ctr" defTabSz="914400">
               <a:lnSpc>
@@ -6243,22 +6828,63 @@
         </p:spPr>
         <p:txBody>
           <a:bodyPr lIns="0" tIns="0" rIns="0" bIns="0" anchor="t">
-            <a:normAutofit fontScale="92500" lnSpcReduction="9999"/>
+            <a:normAutofit fontScale="92500" lnSpcReduction="19999"/>
           </a:bodyPr>
-          <a:p>
-            <a:pPr indent="0" algn="l" defTabSz="914400">
+          <a:lstStyle/>
+          <a:p>
+            <a:pPr marL="432000" indent="-324000" algn="l">
               <a:lnSpc>
                 <a:spcPct val="100000"/>
               </a:lnSpc>
               <a:spcBef>
-                <a:spcPts val="1060"/>
-              </a:spcBef>
-              <a:buNone/>
+                <a:spcPts val="1191"/>
+              </a:spcBef>
+              <a:spcAft>
+                <a:spcPts val="992"/>
+              </a:spcAft>
+              <a:buClr>
+                <a:srgbClr val="000000"/>
+              </a:buClr>
+              <a:buSzPct val="45000"/>
+              <a:buFont typeface="Wingdings" charset="2"/>
+              <a:buChar char=""/>
+            </a:pPr>
+            <a:r>
+              <a:rPr lang="en-US" sz="1400" dirty="0"/>
+              <a:t>Based on the assumptions:</a:t>
+            </a:r>
+          </a:p>
+          <a:p>
+            <a:pPr marL="864000" lvl="1" indent="-324000" algn="l" defTabSz="914400">
+              <a:lnSpc>
+                <a:spcPct val="100000"/>
+              </a:lnSpc>
+              <a:spcBef>
+                <a:spcPts val="850"/>
+              </a:spcBef>
+              <a:buClr>
+                <a:srgbClr val="000000"/>
+              </a:buClr>
+              <a:buSzPct val="75000"/>
+              <a:buFont typeface="Symbol" charset="2"/>
+              <a:buChar char=""/>
               <a:tabLst>
                 <a:tab pos="0" algn="l"/>
               </a:tabLst>
             </a:pPr>
-            <a:endParaRPr lang="en-US" sz="2400" b="0" u="none" strike="noStrike">
+            <a:r>
+              <a:rPr lang="en-US" sz="1400" b="0" u="none" strike="noStrike" dirty="0">
+                <a:solidFill>
+                  <a:srgbClr val="000000"/>
+                </a:solidFill>
+                <a:effectLst/>
+                <a:uFillTx/>
+                <a:latin typeface="Arial"/>
+                <a:ea typeface="DejaVu Sans"/>
+              </a:rPr>
+              <a:t>Cost of employee turnover: $40,000</a:t>
+            </a:r>
+            <a:endParaRPr lang="en-US" sz="1400" b="0" u="none" strike="noStrike" dirty="0">
               <a:solidFill>
                 <a:srgbClr val="000000"/>
               </a:solidFill>
@@ -6268,19 +6894,36 @@
             </a:endParaRPr>
           </a:p>
           <a:p>
-            <a:pPr indent="0" algn="l" defTabSz="914400">
+            <a:pPr marL="864000" lvl="1" indent="-324000" algn="l" defTabSz="914400">
               <a:lnSpc>
                 <a:spcPct val="100000"/>
               </a:lnSpc>
               <a:spcBef>
-                <a:spcPts val="1060"/>
-              </a:spcBef>
-              <a:buNone/>
+                <a:spcPts val="850"/>
+              </a:spcBef>
+              <a:buClr>
+                <a:srgbClr val="000000"/>
+              </a:buClr>
+              <a:buSzPct val="75000"/>
+              <a:buFont typeface="Symbol" charset="2"/>
+              <a:buChar char=""/>
               <a:tabLst>
                 <a:tab pos="0" algn="l"/>
               </a:tabLst>
             </a:pPr>
-            <a:endParaRPr lang="en-US" sz="2400" b="0" u="none" strike="noStrike">
+            <a:r>
+              <a:rPr lang="en-US" sz="1400" b="0" u="none" strike="noStrike" dirty="0">
+                <a:solidFill>
+                  <a:srgbClr val="000000"/>
+                </a:solidFill>
+                <a:effectLst/>
+                <a:uFillTx/>
+                <a:latin typeface="Arial"/>
+                <a:ea typeface="DejaVu Sans"/>
+              </a:rPr>
+              <a:t>Cost of retention intervention: $8,000</a:t>
+            </a:r>
+            <a:endParaRPr lang="en-US" sz="1400" b="0" u="none" strike="noStrike" dirty="0">
               <a:solidFill>
                 <a:srgbClr val="000000"/>
               </a:solidFill>
@@ -6290,48 +6933,35 @@
             </a:endParaRPr>
           </a:p>
           <a:p>
-            <a:pPr indent="0" algn="l" defTabSz="914400">
+            <a:pPr marL="864000" lvl="1" indent="-324000" algn="l" defTabSz="914400">
               <a:lnSpc>
                 <a:spcPct val="100000"/>
               </a:lnSpc>
               <a:spcBef>
-                <a:spcPts val="1060"/>
-              </a:spcBef>
-              <a:buNone/>
+                <a:spcPts val="850"/>
+              </a:spcBef>
+              <a:buClr>
+                <a:srgbClr val="000000"/>
+              </a:buClr>
+              <a:buSzPct val="75000"/>
+              <a:buFont typeface="Symbol" charset="2"/>
+              <a:buChar char=""/>
               <a:tabLst>
                 <a:tab pos="0" algn="l"/>
               </a:tabLst>
             </a:pPr>
-            <a:endParaRPr lang="en-US" sz="2400" b="0" u="none" strike="noStrike">
-              <a:solidFill>
-                <a:srgbClr val="000000"/>
-              </a:solidFill>
-              <a:effectLst/>
-              <a:uFillTx/>
-              <a:latin typeface="Arial"/>
-            </a:endParaRPr>
-          </a:p>
-          <a:p>
-            <a:pPr indent="0" algn="l" defTabSz="914400">
-              <a:lnSpc>
-                <a:spcPct val="100000"/>
-              </a:lnSpc>
-              <a:spcBef>
-                <a:spcPts val="1060"/>
-              </a:spcBef>
-              <a:buNone/>
-              <a:tabLst>
-                <a:tab pos="0" algn="l"/>
-              </a:tabLst>
-            </a:pPr>
-            <a:endParaRPr lang="en-US" sz="2400" b="0" u="none" strike="noStrike">
-              <a:solidFill>
-                <a:srgbClr val="000000"/>
-              </a:solidFill>
-              <a:effectLst/>
-              <a:uFillTx/>
-              <a:latin typeface="Arial"/>
-            </a:endParaRPr>
+            <a:r>
+              <a:rPr lang="en-US" sz="1400" b="0" u="none" strike="noStrike" dirty="0">
+                <a:solidFill>
+                  <a:srgbClr val="000000"/>
+                </a:solidFill>
+                <a:effectLst/>
+                <a:uFillTx/>
+                <a:latin typeface="Arial"/>
+                <a:ea typeface="DejaVu Sans"/>
+              </a:rPr>
+              <a:t>Retention intervention success rate: 60%</a:t>
+            </a:r>
           </a:p>
           <a:p>
             <a:pPr marL="432000" indent="-324000" algn="l" defTabSz="914400">
@@ -6355,7 +6985,7 @@
               </a:tabLst>
             </a:pPr>
             <a:r>
-              <a:rPr lang="en-US" sz="1400" b="0" u="none" strike="noStrike">
+              <a:rPr lang="en-US" sz="1400" b="0" u="none" strike="noStrike" dirty="0">
                 <a:solidFill>
                   <a:srgbClr val="000000"/>
                 </a:solidFill>
@@ -6364,16 +6994,8 @@
                 <a:latin typeface="Arial"/>
                 <a:ea typeface="DejaVu Sans"/>
               </a:rPr>
-              <a:t>The utility function reflects the incremental financial impact of acting on the model's recommendations. A true positive represents the expected net savings from successfully retaining an employee, while a false positive represents the cost of an unnecessary retention intervention. False negatives and true negatives are assigned zero utility because they represent the baseline outcome in which no intervention occurs.</a:t>
-            </a:r>
-            <a:endParaRPr lang="en-US" sz="1400" b="0" u="none" strike="noStrike">
-              <a:solidFill>
-                <a:srgbClr val="000000"/>
-              </a:solidFill>
-              <a:effectLst/>
-              <a:uFillTx/>
-              <a:latin typeface="Arial"/>
-            </a:endParaRPr>
+              <a:t>Using this model to intervene would save $260,800 in expected costs so it is worth having a retention program.</a:t>
+            </a:r>
           </a:p>
           <a:p>
             <a:pPr marL="432000" indent="-324000" algn="l" defTabSz="914400">
@@ -6397,18 +7019,36 @@
               </a:tabLst>
             </a:pPr>
             <a:r>
-              <a:rPr lang="en-US" sz="1400" b="0" u="none" strike="noStrike">
-                <a:solidFill>
-                  <a:srgbClr val="000000"/>
-                </a:solidFill>
-                <a:effectLst/>
-                <a:uFillTx/>
-                <a:latin typeface="Arial"/>
-                <a:ea typeface="DejaVu Sans"/>
-              </a:rPr>
-              <a:t>It is based on our assumptions:</a:t>
-            </a:r>
-            <a:endParaRPr lang="en-US" sz="1400" b="0" u="none" strike="noStrike">
+              <a:rPr lang="en-US" sz="1400" dirty="0"/>
+              <a:t>The program would cost $272,000 invested into 34 total employees, 13 of which were false positives</a:t>
+            </a:r>
+          </a:p>
+          <a:p>
+            <a:pPr marL="432000" indent="-324000" algn="l" defTabSz="914400">
+              <a:lnSpc>
+                <a:spcPct val="100000"/>
+              </a:lnSpc>
+              <a:spcBef>
+                <a:spcPts val="1191"/>
+              </a:spcBef>
+              <a:spcAft>
+                <a:spcPts val="992"/>
+              </a:spcAft>
+              <a:buClr>
+                <a:srgbClr val="000000"/>
+              </a:buClr>
+              <a:buSzPct val="45000"/>
+              <a:buFont typeface="Wingdings" charset="2"/>
+              <a:buChar char=""/>
+              <a:tabLst>
+                <a:tab pos="0" algn="l"/>
+              </a:tabLst>
+            </a:pPr>
+            <a:r>
+              <a:rPr lang="en-US" sz="1400" dirty="0"/>
+              <a:t>Resulted in ~ 13/21 employees being retained for a savings of $520,000</a:t>
+            </a:r>
+            <a:endParaRPr lang="en-US" sz="1400" b="0" u="none" strike="noStrike" dirty="0">
               <a:solidFill>
                 <a:srgbClr val="000000"/>
               </a:solidFill>
@@ -6417,164 +7057,18 @@
               <a:latin typeface="Arial"/>
             </a:endParaRPr>
           </a:p>
-          <a:p>
-            <a:pPr marL="864000" lvl="1" indent="-324000" algn="l" defTabSz="914400">
-              <a:lnSpc>
-                <a:spcPct val="100000"/>
-              </a:lnSpc>
-              <a:spcBef>
-                <a:spcPts val="850"/>
-              </a:spcBef>
-              <a:buClr>
-                <a:srgbClr val="000000"/>
-              </a:buClr>
-              <a:buSzPct val="75000"/>
-              <a:buFont typeface="Symbol" charset="2"/>
-              <a:buChar char=""/>
-              <a:tabLst>
-                <a:tab pos="0" algn="l"/>
-              </a:tabLst>
-            </a:pPr>
-            <a:r>
-              <a:rPr lang="en-US" sz="1400" b="0" u="none" strike="noStrike">
-                <a:solidFill>
-                  <a:srgbClr val="000000"/>
-                </a:solidFill>
-                <a:effectLst/>
-                <a:uFillTx/>
-                <a:latin typeface="Arial"/>
-                <a:ea typeface="DejaVu Sans"/>
-              </a:rPr>
-              <a:t>Cost of employee turnover: $40,000</a:t>
-            </a:r>
-            <a:endParaRPr lang="en-US" sz="1400" b="0" u="none" strike="noStrike">
-              <a:solidFill>
-                <a:srgbClr val="000000"/>
-              </a:solidFill>
-              <a:effectLst/>
-              <a:uFillTx/>
-              <a:latin typeface="Arial"/>
-            </a:endParaRPr>
-          </a:p>
-          <a:p>
-            <a:pPr marL="864000" lvl="1" indent="-324000" algn="l" defTabSz="914400">
-              <a:lnSpc>
-                <a:spcPct val="100000"/>
-              </a:lnSpc>
-              <a:spcBef>
-                <a:spcPts val="850"/>
-              </a:spcBef>
-              <a:buClr>
-                <a:srgbClr val="000000"/>
-              </a:buClr>
-              <a:buSzPct val="75000"/>
-              <a:buFont typeface="Symbol" charset="2"/>
-              <a:buChar char=""/>
-              <a:tabLst>
-                <a:tab pos="0" algn="l"/>
-              </a:tabLst>
-            </a:pPr>
-            <a:r>
-              <a:rPr lang="en-US" sz="1400" b="0" u="none" strike="noStrike">
-                <a:solidFill>
-                  <a:srgbClr val="000000"/>
-                </a:solidFill>
-                <a:effectLst/>
-                <a:uFillTx/>
-                <a:latin typeface="Arial"/>
-                <a:ea typeface="DejaVu Sans"/>
-              </a:rPr>
-              <a:t>Cost of retention intervention: $8,000</a:t>
-            </a:r>
-            <a:endParaRPr lang="en-US" sz="1400" b="0" u="none" strike="noStrike">
-              <a:solidFill>
-                <a:srgbClr val="000000"/>
-              </a:solidFill>
-              <a:effectLst/>
-              <a:uFillTx/>
-              <a:latin typeface="Arial"/>
-            </a:endParaRPr>
-          </a:p>
-          <a:p>
-            <a:pPr marL="864000" lvl="1" indent="-324000" algn="l" defTabSz="914400">
-              <a:lnSpc>
-                <a:spcPct val="100000"/>
-              </a:lnSpc>
-              <a:spcBef>
-                <a:spcPts val="850"/>
-              </a:spcBef>
-              <a:buClr>
-                <a:srgbClr val="000000"/>
-              </a:buClr>
-              <a:buSzPct val="75000"/>
-              <a:buFont typeface="Symbol" charset="2"/>
-              <a:buChar char=""/>
-              <a:tabLst>
-                <a:tab pos="0" algn="l"/>
-              </a:tabLst>
-            </a:pPr>
-            <a:r>
-              <a:rPr lang="en-US" sz="1400" b="0" u="none" strike="noStrike">
-                <a:solidFill>
-                  <a:srgbClr val="000000"/>
-                </a:solidFill>
-                <a:effectLst/>
-                <a:uFillTx/>
-                <a:latin typeface="Arial"/>
-                <a:ea typeface="DejaVu Sans"/>
-              </a:rPr>
-              <a:t>Retention intervention success rate: 60%</a:t>
-            </a:r>
-            <a:endParaRPr lang="en-US" sz="1400" b="0" u="none" strike="noStrike">
-              <a:solidFill>
-                <a:srgbClr val="000000"/>
-              </a:solidFill>
-              <a:effectLst/>
-              <a:uFillTx/>
-              <a:latin typeface="Arial"/>
-            </a:endParaRPr>
-          </a:p>
         </p:txBody>
       </p:sp>
-      <p:pic>
-        <p:nvPicPr>
-          <p:cNvPr id="28" name="Picture 27"/>
-          <p:cNvPicPr/>
-          <p:nvPr/>
-        </p:nvPicPr>
-        <p:blipFill>
-          <a:blip r:embed="rId1"/>
-          <a:stretch/>
-        </p:blipFill>
-        <p:spPr>
-          <a:xfrm>
-            <a:off x="1143000" y="1410120"/>
-            <a:ext cx="7600320" cy="1104120"/>
-          </a:xfrm>
-          <a:prstGeom prst="rect">
-            <a:avLst/>
-          </a:prstGeom>
-          <a:noFill/>
-          <a:ln w="18000">
-            <a:noFill/>
-          </a:ln>
-        </p:spPr>
-      </p:pic>
     </p:spTree>
   </p:cSld>
-  <mc:AlternateContent>
-    <mc:Choice Requires="p14">
-      <p:transition spd="slow" p14:dur="2000"/>
-    </mc:Choice>
-    <mc:Fallback>
-      <p:transition spd="slow"/>
-    </mc:Fallback>
-  </mc:AlternateContent>
+  <p:clrMapOvr>
+    <a:masterClrMapping/>
+  </p:clrMapOvr>
 </p:sld>
 </file>
 
 <file path=ppt/slides/slide4.xml><?xml version="1.0" encoding="utf-8"?>
-<p:sld xmlns:a="http://schemas.openxmlformats.org/drawingml/2006/main" xmlns:p="http://schemas.openxmlformats.org/presentationml/2006/main" xmlns:r="http://schemas.openxmlformats.org/officeDocument/2006/relationships" xmlns:p14="http://schemas.microsoft.com/office/powerpoint/2010/main" xmlns:p15="http://schemas.microsoft.com/office/powerpoint/2012/main" xmlns:mc="http://schemas.openxmlformats.org/markup-compatibility/2006">
+<p:sld xmlns:a="http://schemas.openxmlformats.org/drawingml/2006/main" xmlns:r="http://schemas.openxmlformats.org/officeDocument/2006/relationships" xmlns:p="http://schemas.openxmlformats.org/presentationml/2006/main">
   <p:cSld>
     <p:spTree>
       <p:nvGrpSpPr>
@@ -6617,6 +7111,7 @@
           <a:bodyPr lIns="0" tIns="0" rIns="0" bIns="0" anchor="ctr">
             <a:spAutoFit/>
           </a:bodyPr>
+          <a:lstStyle/>
           <a:p>
             <a:pPr indent="0" algn="ctr" defTabSz="914400">
               <a:lnSpc>
@@ -6677,6 +7172,7 @@
           <a:bodyPr lIns="0" tIns="0" rIns="0" bIns="0" anchor="t">
             <a:normAutofit/>
           </a:bodyPr>
+          <a:lstStyle/>
           <a:p>
             <a:pPr marL="432000" indent="-324000" algn="l" defTabSz="914400">
               <a:lnSpc>
@@ -6693,7 +7189,7 @@
               <a:buChar char=""/>
             </a:pPr>
             <a:r>
-              <a:rPr lang="en-US" sz="2400" b="0" u="none" strike="noStrike">
+              <a:rPr lang="en-US" sz="2400" b="0" u="none" strike="noStrike" dirty="0">
                 <a:solidFill>
                   <a:srgbClr val="000000"/>
                 </a:solidFill>
@@ -6704,7 +7200,7 @@
               </a:rPr>
               <a:t>Data source: kaggle.com</a:t>
             </a:r>
-            <a:endParaRPr lang="en-US" sz="2400" b="0" u="none" strike="noStrike">
+            <a:endParaRPr lang="en-US" sz="2400" b="0" u="none" strike="noStrike" dirty="0">
               <a:solidFill>
                 <a:srgbClr val="000000"/>
               </a:solidFill>
@@ -6729,7 +7225,7 @@
               <a:buChar char=""/>
             </a:pPr>
             <a:r>
-              <a:rPr lang="en-US" sz="2100" b="0" u="none" strike="noStrike">
+              <a:rPr lang="en-US" sz="2100" b="0" u="none" strike="noStrike" dirty="0">
                 <a:solidFill>
                   <a:srgbClr val="000000"/>
                 </a:solidFill>
@@ -6738,9 +7234,9 @@
                 <a:latin typeface="Arial"/>
                 <a:ea typeface="DejaVu Sans"/>
               </a:rPr>
-              <a:t>The data appears to be a fictional dataset created by IBM data scientists.</a:t>
-            </a:r>
-            <a:endParaRPr lang="en-US" sz="2100" b="0" u="none" strike="noStrike">
+              <a:t>The data is a fictional dataset created by IBM data scientists.</a:t>
+            </a:r>
+            <a:endParaRPr lang="en-US" sz="2100" b="0" u="none" strike="noStrike" dirty="0">
               <a:solidFill>
                 <a:srgbClr val="000000"/>
               </a:solidFill>
@@ -6765,7 +7261,7 @@
               <a:buChar char=""/>
             </a:pPr>
             <a:r>
-              <a:rPr lang="en-US" sz="2100" b="0" u="none" strike="noStrike">
+              <a:rPr lang="en-US" sz="2100" b="0" u="none" strike="noStrike" dirty="0">
                 <a:solidFill>
                   <a:srgbClr val="000000"/>
                 </a:solidFill>
@@ -6776,7 +7272,7 @@
               </a:rPr>
               <a:t>The dataset contains 1470 rows of data.</a:t>
             </a:r>
-            <a:endParaRPr lang="en-US" sz="2100" b="0" u="none" strike="noStrike">
+            <a:endParaRPr lang="en-US" sz="2100" b="0" u="none" strike="noStrike" dirty="0">
               <a:solidFill>
                 <a:srgbClr val="000000"/>
               </a:solidFill>
@@ -6789,19 +7285,14 @@
       </p:sp>
     </p:spTree>
   </p:cSld>
-  <mc:AlternateContent>
-    <mc:Choice Requires="p14">
-      <p:transition spd="slow" p14:dur="2000"/>
-    </mc:Choice>
-    <mc:Fallback>
-      <p:transition spd="slow"/>
-    </mc:Fallback>
-  </mc:AlternateContent>
+  <p:clrMapOvr>
+    <a:masterClrMapping/>
+  </p:clrMapOvr>
 </p:sld>
 </file>
 
 <file path=ppt/slides/slide5.xml><?xml version="1.0" encoding="utf-8"?>
-<p:sld xmlns:a="http://schemas.openxmlformats.org/drawingml/2006/main" xmlns:p="http://schemas.openxmlformats.org/presentationml/2006/main" xmlns:r="http://schemas.openxmlformats.org/officeDocument/2006/relationships" xmlns:p14="http://schemas.microsoft.com/office/powerpoint/2010/main" xmlns:p15="http://schemas.microsoft.com/office/powerpoint/2012/main" xmlns:mc="http://schemas.openxmlformats.org/markup-compatibility/2006">
+<p:sld xmlns:a="http://schemas.openxmlformats.org/drawingml/2006/main" xmlns:r="http://schemas.openxmlformats.org/officeDocument/2006/relationships" xmlns:p="http://schemas.openxmlformats.org/presentationml/2006/main">
   <p:cSld>
     <p:spTree>
       <p:nvGrpSpPr>
@@ -6844,6 +7335,7 @@
           <a:bodyPr lIns="0" tIns="0" rIns="0" bIns="0" anchor="ctr">
             <a:spAutoFit/>
           </a:bodyPr>
+          <a:lstStyle/>
           <a:p>
             <a:pPr indent="0" algn="ctr" defTabSz="914400">
               <a:lnSpc>
@@ -6904,6 +7396,7 @@
           <a:bodyPr lIns="0" tIns="0" rIns="0" bIns="0" anchor="t">
             <a:normAutofit/>
           </a:bodyPr>
+          <a:lstStyle/>
           <a:p>
             <a:pPr marL="432000" indent="-324000" algn="l" defTabSz="914400">
               <a:lnSpc>
@@ -6920,7 +7413,7 @@
               <a:buChar char=""/>
             </a:pPr>
             <a:r>
-              <a:rPr lang="en-US" sz="2400" b="0" u="none" strike="noStrike">
+              <a:rPr lang="en-US" sz="2400" b="0" u="none" strike="noStrike" dirty="0">
                 <a:solidFill>
                   <a:srgbClr val="000000"/>
                 </a:solidFill>
@@ -6929,21 +7422,9 @@
                 <a:latin typeface="Arial"/>
                 <a:ea typeface="DejaVu Sans"/>
               </a:rPr>
-              <a:t>The dataset contains 35 different </a:t>
-            </a:r>
-            <a:r>
-              <a:rPr lang="en-US" sz="2400" b="0" u="none" strike="noStrike">
-                <a:solidFill>
-                  <a:srgbClr val="000000"/>
-                </a:solidFill>
-                <a:effectLst/>
-                <a:uFillTx/>
-                <a:latin typeface="Arial"/>
-                <a:ea typeface="DejaVu Sans"/>
-              </a:rPr>
-              <a:t>points and required little cleaning.</a:t>
-            </a:r>
-            <a:endParaRPr lang="en-US" sz="2400" b="0" u="none" strike="noStrike">
+              <a:t>The dataset contains 35 different points and required little cleaning.</a:t>
+            </a:r>
+            <a:endParaRPr lang="en-US" sz="2400" b="0" u="none" strike="noStrike" dirty="0">
               <a:solidFill>
                 <a:srgbClr val="000000"/>
               </a:solidFill>
@@ -6968,7 +7449,7 @@
               <a:buChar char=""/>
             </a:pPr>
             <a:r>
-              <a:rPr lang="en-US" sz="2100" b="0" u="none" strike="noStrike">
+              <a:rPr lang="en-US" sz="2100" b="0" u="none" strike="noStrike" dirty="0">
                 <a:solidFill>
                   <a:srgbClr val="000000"/>
                 </a:solidFill>
@@ -6977,33 +7458,9 @@
                 <a:latin typeface="Arial"/>
                 <a:ea typeface="DejaVu Sans"/>
               </a:rPr>
-              <a:t>For this project, we converted ‘Attrition’ to </a:t>
-            </a:r>
-            <a:r>
-              <a:rPr lang="en-US" sz="2100" b="0" u="none" strike="noStrike">
-                <a:solidFill>
-                  <a:srgbClr val="000000"/>
-                </a:solidFill>
-                <a:effectLst/>
-                <a:uFillTx/>
-                <a:latin typeface="Arial"/>
-                <a:ea typeface="DejaVu Sans"/>
-              </a:rPr>
-              <a:t>a binary outcome where Yes = 1 - </a:t>
-            </a:r>
-            <a:r>
-              <a:rPr lang="en-US" sz="2100" b="0" u="none" strike="noStrike">
-                <a:solidFill>
-                  <a:srgbClr val="000000"/>
-                </a:solidFill>
-                <a:effectLst/>
-                <a:uFillTx/>
-                <a:latin typeface="Arial"/>
-                <a:ea typeface="DejaVu Sans"/>
-              </a:rPr>
-              <a:t>meaning the employee left the company</a:t>
-            </a:r>
-            <a:endParaRPr lang="en-US" sz="2100" b="0" u="none" strike="noStrike">
+              <a:t>For this project, we converted ‘Attrition’ to a binary outcome where Yes = 1 - meaning the employee left the company</a:t>
+            </a:r>
+            <a:endParaRPr lang="en-US" sz="2100" b="0" u="none" strike="noStrike" dirty="0">
               <a:solidFill>
                 <a:srgbClr val="000000"/>
               </a:solidFill>
@@ -7028,7 +7485,7 @@
               <a:buChar char=""/>
             </a:pPr>
             <a:r>
-              <a:rPr lang="en-US" sz="2100" b="0" u="none" strike="noStrike">
+              <a:rPr lang="en-US" sz="2100" b="0" u="none" strike="noStrike" dirty="0">
                 <a:solidFill>
                   <a:srgbClr val="000000"/>
                 </a:solidFill>
@@ -7037,9 +7494,165 @@
                 <a:latin typeface="Arial"/>
                 <a:ea typeface="DejaVu Sans"/>
               </a:rPr>
-              <a:t>Removed from data </a:t>
-            </a:r>
-            <a:endParaRPr lang="en-US" sz="2100" b="0" u="none" strike="noStrike">
+              <a:t>Removed from data: </a:t>
+            </a:r>
+            <a:r>
+              <a:rPr lang="en-US" sz="2000" b="0" u="none" strike="noStrike" dirty="0">
+                <a:solidFill>
+                  <a:schemeClr val="dk1"/>
+                </a:solidFill>
+                <a:effectLst/>
+                <a:uFillTx/>
+                <a:latin typeface="Arial"/>
+                <a:ea typeface="DejaVu Sans"/>
+              </a:rPr>
+              <a:t>'Attrition’, 'Department', '</a:t>
+            </a:r>
+            <a:r>
+              <a:rPr lang="en-US" sz="2000" b="0" u="none" strike="noStrike" dirty="0" err="1">
+                <a:solidFill>
+                  <a:schemeClr val="dk1"/>
+                </a:solidFill>
+                <a:effectLst/>
+                <a:uFillTx/>
+                <a:latin typeface="Arial"/>
+                <a:ea typeface="DejaVu Sans"/>
+              </a:rPr>
+              <a:t>EmployeeNumber</a:t>
+            </a:r>
+            <a:r>
+              <a:rPr lang="en-US" sz="2000" b="0" u="none" strike="noStrike" dirty="0">
+                <a:solidFill>
+                  <a:schemeClr val="dk1"/>
+                </a:solidFill>
+                <a:effectLst/>
+                <a:uFillTx/>
+                <a:latin typeface="Arial"/>
+                <a:ea typeface="DejaVu Sans"/>
+              </a:rPr>
+              <a:t>', '</a:t>
+            </a:r>
+            <a:r>
+              <a:rPr lang="en-US" sz="2000" b="0" u="none" strike="noStrike" dirty="0" err="1">
+                <a:solidFill>
+                  <a:schemeClr val="dk1"/>
+                </a:solidFill>
+                <a:effectLst/>
+                <a:uFillTx/>
+                <a:latin typeface="Arial"/>
+                <a:ea typeface="DejaVu Sans"/>
+              </a:rPr>
+              <a:t>DailyRate</a:t>
+            </a:r>
+            <a:r>
+              <a:rPr lang="en-US" sz="2000" b="0" u="none" strike="noStrike" dirty="0">
+                <a:solidFill>
+                  <a:schemeClr val="dk1"/>
+                </a:solidFill>
+                <a:effectLst/>
+                <a:uFillTx/>
+                <a:latin typeface="Arial"/>
+                <a:ea typeface="DejaVu Sans"/>
+              </a:rPr>
+              <a:t>', '</a:t>
+            </a:r>
+            <a:r>
+              <a:rPr lang="en-US" sz="2000" b="0" u="none" strike="noStrike" dirty="0" err="1">
+                <a:solidFill>
+                  <a:schemeClr val="dk1"/>
+                </a:solidFill>
+                <a:effectLst/>
+                <a:uFillTx/>
+                <a:latin typeface="Arial"/>
+                <a:ea typeface="DejaVu Sans"/>
+              </a:rPr>
+              <a:t>MonthlyIncome</a:t>
+            </a:r>
+            <a:r>
+              <a:rPr lang="en-US" sz="2000" b="0" u="none" strike="noStrike" dirty="0">
+                <a:solidFill>
+                  <a:schemeClr val="dk1"/>
+                </a:solidFill>
+                <a:effectLst/>
+                <a:uFillTx/>
+                <a:latin typeface="Arial"/>
+                <a:ea typeface="DejaVu Sans"/>
+              </a:rPr>
+              <a:t>', '</a:t>
+            </a:r>
+            <a:r>
+              <a:rPr lang="en-US" sz="2000" b="0" u="none" strike="noStrike" dirty="0" err="1">
+                <a:solidFill>
+                  <a:schemeClr val="dk1"/>
+                </a:solidFill>
+                <a:effectLst/>
+                <a:uFillTx/>
+                <a:latin typeface="Arial"/>
+                <a:ea typeface="DejaVu Sans"/>
+              </a:rPr>
+              <a:t>EmployeeCount</a:t>
+            </a:r>
+            <a:r>
+              <a:rPr lang="en-US" sz="2000" b="0" u="none" strike="noStrike" dirty="0">
+                <a:solidFill>
+                  <a:schemeClr val="dk1"/>
+                </a:solidFill>
+                <a:effectLst/>
+                <a:uFillTx/>
+                <a:latin typeface="Arial"/>
+                <a:ea typeface="DejaVu Sans"/>
+              </a:rPr>
+              <a:t>', 'Over18', '</a:t>
+            </a:r>
+            <a:r>
+              <a:rPr lang="en-US" sz="2000" b="0" u="none" strike="noStrike" dirty="0" err="1">
+                <a:solidFill>
+                  <a:schemeClr val="dk1"/>
+                </a:solidFill>
+                <a:effectLst/>
+                <a:uFillTx/>
+                <a:latin typeface="Arial"/>
+                <a:ea typeface="DejaVu Sans"/>
+              </a:rPr>
+              <a:t>PerformanceRating</a:t>
+            </a:r>
+            <a:r>
+              <a:rPr lang="en-US" sz="2000" b="0" u="none" strike="noStrike" dirty="0">
+                <a:solidFill>
+                  <a:schemeClr val="dk1"/>
+                </a:solidFill>
+                <a:effectLst/>
+                <a:uFillTx/>
+                <a:latin typeface="Arial"/>
+                <a:ea typeface="DejaVu Sans"/>
+              </a:rPr>
+              <a:t>', '</a:t>
+            </a:r>
+            <a:r>
+              <a:rPr lang="en-US" sz="2000" b="0" u="none" strike="noStrike" dirty="0" err="1">
+                <a:solidFill>
+                  <a:schemeClr val="dk1"/>
+                </a:solidFill>
+                <a:effectLst/>
+                <a:uFillTx/>
+                <a:latin typeface="Arial"/>
+                <a:ea typeface="DejaVu Sans"/>
+              </a:rPr>
+              <a:t>StandardHours</a:t>
+            </a:r>
+            <a:r>
+              <a:rPr lang="en-US" sz="2000" b="0" u="none" strike="noStrike" dirty="0">
+                <a:solidFill>
+                  <a:schemeClr val="dk1"/>
+                </a:solidFill>
+                <a:effectLst/>
+                <a:uFillTx/>
+                <a:latin typeface="Arial"/>
+                <a:ea typeface="DejaVu Sans"/>
+              </a:rPr>
+              <a:t>'</a:t>
+            </a:r>
+            <a:endParaRPr lang="en-US" sz="2000" b="0" u="none" strike="noStrike" dirty="0">
               <a:solidFill>
                 <a:srgbClr val="000000"/>
               </a:solidFill>
@@ -7049,93 +7662,16 @@
             </a:endParaRPr>
           </a:p>
           <a:p>
-            <a:pPr marL="864000" lvl="8" indent="-324000" algn="l" defTabSz="914400">
+            <a:pPr indent="0" algn="l" defTabSz="914400">
               <a:lnSpc>
                 <a:spcPct val="100000"/>
               </a:lnSpc>
               <a:spcBef>
                 <a:spcPts val="850"/>
               </a:spcBef>
-              <a:buClr>
-                <a:srgbClr val="000000"/>
-              </a:buClr>
-              <a:buSzPct val="75000"/>
-              <a:buFont typeface="Symbol" charset="2"/>
-              <a:buChar char=""/>
-            </a:pPr>
-            <a:r>
-              <a:rPr lang="en-US" sz="2400" b="0" u="none" strike="noStrike">
-                <a:solidFill>
-                  <a:schemeClr val="dk1"/>
-                </a:solidFill>
-                <a:effectLst/>
-                <a:uFillTx/>
-                <a:latin typeface="Arial"/>
-                <a:ea typeface="DejaVu Sans"/>
-              </a:rPr>
-              <a:t>'Attrition’, 'Department', </a:t>
-            </a:r>
-            <a:r>
-              <a:rPr lang="en-US" sz="2400" b="0" u="none" strike="noStrike">
-                <a:solidFill>
-                  <a:schemeClr val="dk1"/>
-                </a:solidFill>
-                <a:effectLst/>
-                <a:uFillTx/>
-                <a:latin typeface="Arial"/>
-                <a:ea typeface="DejaVu Sans"/>
-              </a:rPr>
-              <a:t>'EmployeeNumber', 'DailyRate', </a:t>
-            </a:r>
-            <a:r>
-              <a:rPr lang="en-US" sz="2400" b="0" u="none" strike="noStrike">
-                <a:solidFill>
-                  <a:schemeClr val="dk1"/>
-                </a:solidFill>
-                <a:effectLst/>
-                <a:uFillTx/>
-                <a:latin typeface="Arial"/>
-                <a:ea typeface="DejaVu Sans"/>
-              </a:rPr>
-              <a:t>'MonthlyIncome', </a:t>
-            </a:r>
-            <a:r>
-              <a:rPr lang="en-US" sz="2400" b="0" u="none" strike="noStrike">
-                <a:solidFill>
-                  <a:schemeClr val="dk1"/>
-                </a:solidFill>
-                <a:effectLst/>
-                <a:uFillTx/>
-                <a:latin typeface="Arial"/>
-                <a:ea typeface="DejaVu Sans"/>
-              </a:rPr>
-              <a:t>'EmployeeCount', 'Over18', </a:t>
-            </a:r>
-            <a:r>
-              <a:rPr lang="en-US" sz="2400" b="0" u="none" strike="noStrike">
-                <a:solidFill>
-                  <a:schemeClr val="dk1"/>
-                </a:solidFill>
-                <a:effectLst/>
-                <a:uFillTx/>
-                <a:latin typeface="Arial"/>
-                <a:ea typeface="DejaVu Sans"/>
-              </a:rPr>
-              <a:t>'PerformanceRating', </a:t>
-            </a:r>
-            <a:r>
-              <a:rPr lang="en-US" sz="2400" b="0" u="none" strike="noStrike">
-                <a:solidFill>
-                  <a:schemeClr val="dk1"/>
-                </a:solidFill>
-                <a:effectLst/>
-                <a:uFillTx/>
-                <a:latin typeface="Arial"/>
-                <a:ea typeface="DejaVu Sans"/>
-              </a:rPr>
-              <a:t>'StandardHours'</a:t>
-            </a:r>
-            <a:endParaRPr lang="en-US" sz="2400" b="0" u="none" strike="noStrike">
+              <a:buNone/>
+            </a:pPr>
+            <a:endParaRPr lang="en-US" sz="2100" b="0" u="none" strike="noStrike" dirty="0">
               <a:solidFill>
                 <a:srgbClr val="000000"/>
               </a:solidFill>
@@ -7144,42 +7680,18 @@
               <a:latin typeface="Arial"/>
             </a:endParaRPr>
           </a:p>
-          <a:p>
-            <a:pPr indent="0" algn="l" defTabSz="914400">
-              <a:lnSpc>
-                <a:spcPct val="100000"/>
-              </a:lnSpc>
-              <a:spcBef>
-                <a:spcPts val="850"/>
-              </a:spcBef>
-              <a:buNone/>
-            </a:pPr>
-            <a:endParaRPr lang="en-US" sz="2100" b="0" u="none" strike="noStrike">
-              <a:solidFill>
-                <a:srgbClr val="000000"/>
-              </a:solidFill>
-              <a:effectLst/>
-              <a:uFillTx/>
-              <a:latin typeface="Arial"/>
-            </a:endParaRPr>
-          </a:p>
         </p:txBody>
       </p:sp>
     </p:spTree>
   </p:cSld>
-  <mc:AlternateContent>
-    <mc:Choice Requires="p14">
-      <p:transition spd="slow" p14:dur="2000"/>
-    </mc:Choice>
-    <mc:Fallback>
-      <p:transition spd="slow"/>
-    </mc:Fallback>
-  </mc:AlternateContent>
+  <p:clrMapOvr>
+    <a:masterClrMapping/>
+  </p:clrMapOvr>
 </p:sld>
 </file>
 
 <file path=ppt/slides/slide6.xml><?xml version="1.0" encoding="utf-8"?>
-<p:sld xmlns:a="http://schemas.openxmlformats.org/drawingml/2006/main" xmlns:p="http://schemas.openxmlformats.org/presentationml/2006/main" xmlns:r="http://schemas.openxmlformats.org/officeDocument/2006/relationships" xmlns:p14="http://schemas.microsoft.com/office/powerpoint/2010/main" xmlns:p15="http://schemas.microsoft.com/office/powerpoint/2012/main" xmlns:mc="http://schemas.openxmlformats.org/markup-compatibility/2006">
+<p:sld xmlns:a="http://schemas.openxmlformats.org/drawingml/2006/main" xmlns:r="http://schemas.openxmlformats.org/officeDocument/2006/relationships" xmlns:p="http://schemas.openxmlformats.org/presentationml/2006/main">
   <p:cSld>
     <p:spTree>
       <p:nvGrpSpPr>
@@ -7222,6 +7734,7 @@
           <a:bodyPr lIns="0" tIns="0" rIns="0" bIns="0" anchor="ctr">
             <a:spAutoFit/>
           </a:bodyPr>
+          <a:lstStyle/>
           <a:p>
             <a:pPr indent="0" algn="ctr" defTabSz="914400">
               <a:lnSpc>
@@ -7267,8 +7780,8 @@
         </p:nvSpPr>
         <p:spPr>
           <a:xfrm>
-            <a:off x="504000" y="1346760"/>
-            <a:ext cx="4524840" cy="3267720"/>
+            <a:off x="620583" y="4658350"/>
+            <a:ext cx="8838474" cy="786840"/>
           </a:xfrm>
           <a:prstGeom prst="rect">
             <a:avLst/>
@@ -7282,6 +7795,7 @@
           <a:bodyPr lIns="0" tIns="0" rIns="0" bIns="0" anchor="t">
             <a:normAutofit/>
           </a:bodyPr>
+          <a:lstStyle/>
           <a:p>
             <a:pPr marL="432000" indent="-324000" algn="l" defTabSz="914400">
               <a:lnSpc>
@@ -7298,7 +7812,7 @@
               <a:buChar char=""/>
             </a:pPr>
             <a:r>
-              <a:rPr lang="en-US" sz="2400" b="0" u="none" strike="noStrike">
+              <a:rPr lang="en-US" sz="2400" b="0" u="none" strike="noStrike" dirty="0">
                 <a:solidFill>
                   <a:srgbClr val="000000"/>
                 </a:solidFill>
@@ -7307,9 +7821,9 @@
                 <a:latin typeface="Arial"/>
                 <a:ea typeface="DejaVu Sans"/>
               </a:rPr>
-              <a:t>It appears as though employees who work overtime are more likely to leave.</a:t>
-            </a:r>
-            <a:endParaRPr lang="en-US" sz="2400" b="0" u="none" strike="noStrike">
+              <a:t>Employees who work overtime are much more likely to leave.</a:t>
+            </a:r>
+            <a:endParaRPr lang="en-US" sz="2400" b="0" u="none" strike="noStrike" dirty="0">
               <a:solidFill>
                 <a:srgbClr val="000000"/>
               </a:solidFill>
@@ -7327,12 +7841,12 @@
           <p:nvPr/>
         </p:nvPicPr>
         <p:blipFill>
-          <a:blip r:embed="rId1"/>
+          <a:blip r:embed="rId2"/>
           <a:stretch/>
         </p:blipFill>
         <p:spPr>
           <a:xfrm>
-            <a:off x="4572000" y="957240"/>
+            <a:off x="2415240" y="965594"/>
             <a:ext cx="5249160" cy="3657240"/>
           </a:xfrm>
           <a:prstGeom prst="rect">
@@ -7346,19 +7860,14 @@
       </p:pic>
     </p:spTree>
   </p:cSld>
-  <mc:AlternateContent>
-    <mc:Choice Requires="p14">
-      <p:transition spd="slow" p14:dur="2000"/>
-    </mc:Choice>
-    <mc:Fallback>
-      <p:transition spd="slow"/>
-    </mc:Fallback>
-  </mc:AlternateContent>
+  <p:clrMapOvr>
+    <a:masterClrMapping/>
+  </p:clrMapOvr>
 </p:sld>
 </file>
 
 <file path=ppt/slides/slide7.xml><?xml version="1.0" encoding="utf-8"?>
-<p:sld xmlns:a="http://schemas.openxmlformats.org/drawingml/2006/main" xmlns:p="http://schemas.openxmlformats.org/presentationml/2006/main" xmlns:r="http://schemas.openxmlformats.org/officeDocument/2006/relationships" xmlns:p14="http://schemas.microsoft.com/office/powerpoint/2010/main" xmlns:p15="http://schemas.microsoft.com/office/powerpoint/2012/main" xmlns:mc="http://schemas.openxmlformats.org/markup-compatibility/2006">
+<p:sld xmlns:a="http://schemas.openxmlformats.org/drawingml/2006/main" xmlns:r="http://schemas.openxmlformats.org/officeDocument/2006/relationships" xmlns:p="http://schemas.openxmlformats.org/presentationml/2006/main">
   <p:cSld>
     <p:spTree>
       <p:nvGrpSpPr>
@@ -7401,6 +7910,7 @@
           <a:bodyPr lIns="0" tIns="0" rIns="0" bIns="0" anchor="ctr">
             <a:spAutoFit/>
           </a:bodyPr>
+          <a:lstStyle/>
           <a:p>
             <a:pPr indent="0" algn="ctr" defTabSz="914400">
               <a:lnSpc>
@@ -7412,7 +7922,7 @@
               </a:tabLst>
             </a:pPr>
             <a:r>
-              <a:rPr lang="en-US" sz="3300" b="0" u="none" strike="noStrike">
+              <a:rPr lang="en-US" sz="3300" b="0" u="none" strike="noStrike" dirty="0">
                 <a:solidFill>
                   <a:srgbClr val="000000"/>
                 </a:solidFill>
@@ -7423,7 +7933,7 @@
               </a:rPr>
               <a:t>Satisfaction vs Attrition</a:t>
             </a:r>
-            <a:endParaRPr lang="en-US" sz="3300" b="0" u="none" strike="noStrike">
+            <a:endParaRPr lang="en-US" sz="3300" b="0" u="none" strike="noStrike" dirty="0">
               <a:solidFill>
                 <a:srgbClr val="000000"/>
               </a:solidFill>
@@ -7461,6 +7971,7 @@
           <a:bodyPr lIns="0" tIns="0" rIns="0" bIns="0" anchor="t">
             <a:normAutofit/>
           </a:bodyPr>
+          <a:lstStyle/>
           <a:p>
             <a:pPr marL="432000" indent="-324000" algn="l" defTabSz="914400">
               <a:lnSpc>
@@ -7477,7 +7988,7 @@
               <a:buChar char=""/>
             </a:pPr>
             <a:r>
-              <a:rPr lang="en-US" sz="2400" b="0" u="none" strike="noStrike">
+              <a:rPr lang="en-US" sz="2400" b="0" u="none" strike="noStrike" dirty="0">
                 <a:solidFill>
                   <a:srgbClr val="000000"/>
                 </a:solidFill>
@@ -7486,9 +7997,9 @@
                 <a:latin typeface="Arial"/>
                 <a:ea typeface="DejaVu Sans"/>
               </a:rPr>
-              <a:t>4 = Very Satisfied, 1 = Not Satisfied.</a:t>
-            </a:r>
-            <a:endParaRPr lang="en-US" sz="2400" b="0" u="none" strike="noStrike">
+              <a:t>4 = Very Satisfied,    1 = Not Satisfied.</a:t>
+            </a:r>
+            <a:endParaRPr lang="en-US" sz="2400" b="0" u="none" strike="noStrike" dirty="0">
               <a:solidFill>
                 <a:srgbClr val="000000"/>
               </a:solidFill>
@@ -7513,7 +8024,7 @@
               <a:buChar char=""/>
             </a:pPr>
             <a:r>
-              <a:rPr lang="en-US" sz="2400" b="0" u="none" strike="noStrike">
+              <a:rPr lang="en-US" sz="2400" b="0" u="none" strike="noStrike" dirty="0">
                 <a:solidFill>
                   <a:srgbClr val="000000"/>
                 </a:solidFill>
@@ -7522,9 +8033,9 @@
                 <a:latin typeface="Arial"/>
                 <a:ea typeface="DejaVu Sans"/>
               </a:rPr>
-              <a:t>The more satisfied an employee was, the more likely they would be to stay.</a:t>
-            </a:r>
-            <a:endParaRPr lang="en-US" sz="2400" b="0" u="none" strike="noStrike">
+              <a:t>More satisfied employees are more likely to stay.</a:t>
+            </a:r>
+            <a:endParaRPr lang="en-US" sz="2400" b="0" u="none" strike="noStrike" dirty="0">
               <a:solidFill>
                 <a:srgbClr val="000000"/>
               </a:solidFill>
@@ -7542,7 +8053,7 @@
           <p:nvPr/>
         </p:nvPicPr>
         <p:blipFill>
-          <a:blip r:embed="rId1"/>
+          <a:blip r:embed="rId2"/>
           <a:stretch/>
         </p:blipFill>
         <p:spPr>
@@ -7561,19 +8072,14 @@
       </p:pic>
     </p:spTree>
   </p:cSld>
-  <mc:AlternateContent>
-    <mc:Choice Requires="p14">
-      <p:transition spd="slow" p14:dur="2000"/>
-    </mc:Choice>
-    <mc:Fallback>
-      <p:transition spd="slow"/>
-    </mc:Fallback>
-  </mc:AlternateContent>
+  <p:clrMapOvr>
+    <a:masterClrMapping/>
+  </p:clrMapOvr>
 </p:sld>
 </file>
 
 <file path=ppt/slides/slide8.xml><?xml version="1.0" encoding="utf-8"?>
-<p:sld xmlns:a="http://schemas.openxmlformats.org/drawingml/2006/main" xmlns:p="http://schemas.openxmlformats.org/presentationml/2006/main" xmlns:r="http://schemas.openxmlformats.org/officeDocument/2006/relationships" xmlns:p14="http://schemas.microsoft.com/office/powerpoint/2010/main" xmlns:p15="http://schemas.microsoft.com/office/powerpoint/2012/main" xmlns:mc="http://schemas.openxmlformats.org/markup-compatibility/2006">
+<p:sld xmlns:a="http://schemas.openxmlformats.org/drawingml/2006/main" xmlns:r="http://schemas.openxmlformats.org/officeDocument/2006/relationships" xmlns:p="http://schemas.openxmlformats.org/presentationml/2006/main">
   <p:cSld>
     <p:spTree>
       <p:nvGrpSpPr>
@@ -7616,6 +8122,7 @@
           <a:bodyPr lIns="0" tIns="0" rIns="0" bIns="0" anchor="ctr">
             <a:spAutoFit/>
           </a:bodyPr>
+          <a:lstStyle/>
           <a:p>
             <a:pPr indent="0" algn="ctr" defTabSz="914400">
               <a:lnSpc>
@@ -7627,7 +8134,7 @@
               </a:tabLst>
             </a:pPr>
             <a:r>
-              <a:rPr lang="en-US" sz="3300" b="0" u="none" strike="noStrike">
+              <a:rPr lang="en-US" sz="3300" b="0" u="none" strike="noStrike" dirty="0">
                 <a:solidFill>
                   <a:srgbClr val="000000"/>
                 </a:solidFill>
@@ -7638,7 +8145,7 @@
               </a:rPr>
               <a:t>Age vs Attrition</a:t>
             </a:r>
-            <a:endParaRPr lang="en-US" sz="3300" b="0" u="none" strike="noStrike">
+            <a:endParaRPr lang="en-US" sz="3300" b="0" u="none" strike="noStrike" dirty="0">
               <a:solidFill>
                 <a:srgbClr val="000000"/>
               </a:solidFill>
@@ -7661,7 +8168,7 @@
         </p:nvSpPr>
         <p:spPr>
           <a:xfrm>
-            <a:off x="504000" y="1326600"/>
+            <a:off x="456480" y="1231920"/>
             <a:ext cx="4067640" cy="3930840"/>
           </a:xfrm>
           <a:prstGeom prst="rect">
@@ -7674,8 +8181,9 @@
         </p:spPr>
         <p:txBody>
           <a:bodyPr lIns="0" tIns="0" rIns="0" bIns="0" anchor="t">
-            <a:normAutofit fontScale="85000" lnSpcReduction="9999"/>
+            <a:normAutofit fontScale="92500" lnSpcReduction="19999"/>
           </a:bodyPr>
+          <a:lstStyle/>
           <a:p>
             <a:pPr marL="432000" indent="-324000" algn="l" defTabSz="914400">
               <a:lnSpc>
@@ -7692,7 +8200,7 @@
               <a:buChar char=""/>
             </a:pPr>
             <a:r>
-              <a:rPr lang="en-US" sz="2400" b="0" u="none" strike="noStrike">
+              <a:rPr lang="en-US" sz="2400" b="0" u="none" strike="noStrike" dirty="0">
                 <a:solidFill>
                   <a:srgbClr val="000000"/>
                 </a:solidFill>
@@ -7701,9 +8209,9 @@
                 <a:latin typeface="Arial"/>
                 <a:ea typeface="DejaVu Sans"/>
               </a:rPr>
-              <a:t>According to the data, we see that younger employees are more likely to leave, but this starts to level off then reverse around age 45.</a:t>
-            </a:r>
-            <a:endParaRPr lang="en-US" sz="2400" b="0" u="none" strike="noStrike">
+              <a:t>Younger employees are more likely to leave, but levels off, then reverses around age 45.</a:t>
+            </a:r>
+            <a:endParaRPr lang="en-US" sz="2400" b="0" u="none" strike="noStrike" dirty="0">
               <a:solidFill>
                 <a:srgbClr val="000000"/>
               </a:solidFill>
@@ -7728,7 +8236,7 @@
               <a:buChar char=""/>
             </a:pPr>
             <a:r>
-              <a:rPr lang="en-US" sz="2100" b="0" u="none" strike="noStrike">
+              <a:rPr lang="en-US" sz="2100" b="0" u="none" strike="noStrike" dirty="0">
                 <a:solidFill>
                   <a:srgbClr val="000000"/>
                 </a:solidFill>
@@ -7737,9 +8245,31 @@
                 <a:latin typeface="Arial"/>
                 <a:ea typeface="DejaVu Sans"/>
               </a:rPr>
-              <a:t>Younger employees are more mobile and able to accept jobs elsewhere.</a:t>
-            </a:r>
-            <a:endParaRPr lang="en-US" sz="2100" b="0" u="none" strike="noStrike">
+              <a:t>Younger employees </a:t>
+            </a:r>
+            <a:r>
+              <a:rPr lang="en-US" sz="2100" dirty="0">
+                <a:solidFill>
+                  <a:srgbClr val="000000"/>
+                </a:solidFill>
+                <a:latin typeface="Arial"/>
+                <a:ea typeface="DejaVu Sans"/>
+              </a:rPr>
+              <a:t>may be</a:t>
+            </a:r>
+            <a:r>
+              <a:rPr lang="en-US" sz="2100" b="0" u="none" strike="noStrike" dirty="0">
+                <a:solidFill>
+                  <a:srgbClr val="000000"/>
+                </a:solidFill>
+                <a:effectLst/>
+                <a:uFillTx/>
+                <a:latin typeface="Arial"/>
+                <a:ea typeface="DejaVu Sans"/>
+              </a:rPr>
+              <a:t> more mobile and able to accept jobs elsewhere.</a:t>
+            </a:r>
+            <a:endParaRPr lang="en-US" sz="2100" b="0" u="none" strike="noStrike" dirty="0">
               <a:solidFill>
                 <a:srgbClr val="000000"/>
               </a:solidFill>
@@ -7764,7 +8294,7 @@
               <a:buChar char=""/>
             </a:pPr>
             <a:r>
-              <a:rPr lang="en-US" sz="2100" b="0" u="none" strike="noStrike">
+              <a:rPr lang="en-US" sz="2100" b="0" u="none" strike="noStrike" dirty="0">
                 <a:solidFill>
                   <a:srgbClr val="000000"/>
                 </a:solidFill>
@@ -7773,9 +8303,9 @@
                 <a:latin typeface="Arial"/>
                 <a:ea typeface="DejaVu Sans"/>
               </a:rPr>
-              <a:t>Middle age workers are more likely to have families, and opt for more stable employment.</a:t>
-            </a:r>
-            <a:endParaRPr lang="en-US" sz="2100" b="0" u="none" strike="noStrike">
+              <a:t>Middle-age workers are more likely to have families, and opt for more stable employment.</a:t>
+            </a:r>
+            <a:endParaRPr lang="en-US" sz="2100" b="0" u="none" strike="noStrike" dirty="0">
               <a:solidFill>
                 <a:srgbClr val="000000"/>
               </a:solidFill>
@@ -7800,7 +8330,7 @@
               <a:buChar char=""/>
             </a:pPr>
             <a:r>
-              <a:rPr lang="en-US" sz="2100" b="0" u="none" strike="noStrike">
+              <a:rPr lang="en-US" sz="2100" b="0" u="none" strike="noStrike" dirty="0">
                 <a:solidFill>
                   <a:srgbClr val="000000"/>
                 </a:solidFill>
@@ -7811,7 +8341,7 @@
               </a:rPr>
               <a:t>Older employees could be leaving for more senior level positions or retirement.</a:t>
             </a:r>
-            <a:endParaRPr lang="en-US" sz="2100" b="0" u="none" strike="noStrike">
+            <a:endParaRPr lang="en-US" sz="2100" b="0" u="none" strike="noStrike" dirty="0">
               <a:solidFill>
                 <a:srgbClr val="000000"/>
               </a:solidFill>
@@ -7829,13 +8359,13 @@
           <p:nvPr/>
         </p:nvPicPr>
         <p:blipFill>
-          <a:blip r:embed="rId1"/>
+          <a:blip r:embed="rId2"/>
           <a:stretch/>
         </p:blipFill>
         <p:spPr>
           <a:xfrm>
-            <a:off x="4476600" y="1172520"/>
-            <a:ext cx="5510160" cy="3990240"/>
+            <a:off x="4524120" y="1172520"/>
+            <a:ext cx="5236568" cy="3990240"/>
           </a:xfrm>
           <a:prstGeom prst="rect">
             <a:avLst/>
@@ -7848,19 +8378,14 @@
       </p:pic>
     </p:spTree>
   </p:cSld>
-  <mc:AlternateContent>
-    <mc:Choice Requires="p14">
-      <p:transition spd="slow" p14:dur="2000"/>
-    </mc:Choice>
-    <mc:Fallback>
-      <p:transition spd="slow"/>
-    </mc:Fallback>
-  </mc:AlternateContent>
+  <p:clrMapOvr>
+    <a:masterClrMapping/>
+  </p:clrMapOvr>
 </p:sld>
 </file>
 
 <file path=ppt/slides/slide9.xml><?xml version="1.0" encoding="utf-8"?>
-<p:sld xmlns:a="http://schemas.openxmlformats.org/drawingml/2006/main" xmlns:p="http://schemas.openxmlformats.org/presentationml/2006/main" xmlns:r="http://schemas.openxmlformats.org/officeDocument/2006/relationships" xmlns:p14="http://schemas.microsoft.com/office/powerpoint/2010/main" xmlns:p15="http://schemas.microsoft.com/office/powerpoint/2012/main" xmlns:mc="http://schemas.openxmlformats.org/markup-compatibility/2006">
+<p:sld xmlns:a="http://schemas.openxmlformats.org/drawingml/2006/main" xmlns:r="http://schemas.openxmlformats.org/officeDocument/2006/relationships" xmlns:p="http://schemas.openxmlformats.org/presentationml/2006/main">
   <p:cSld>
     <p:spTree>
       <p:nvGrpSpPr>
@@ -7903,6 +8428,7 @@
           <a:bodyPr lIns="0" tIns="0" rIns="0" bIns="0" anchor="ctr">
             <a:spAutoFit/>
           </a:bodyPr>
+          <a:lstStyle/>
           <a:p>
             <a:pPr indent="0" algn="ctr" defTabSz="914400">
               <a:lnSpc>
@@ -7948,8 +8474,8 @@
         </p:nvSpPr>
         <p:spPr>
           <a:xfrm>
-            <a:off x="504000" y="1326600"/>
-            <a:ext cx="4067640" cy="3287880"/>
+            <a:off x="1340065" y="4384011"/>
+            <a:ext cx="7569656" cy="947160"/>
           </a:xfrm>
           <a:prstGeom prst="rect">
             <a:avLst/>
@@ -7963,6 +8489,7 @@
           <a:bodyPr lIns="0" tIns="0" rIns="0" bIns="0" anchor="t">
             <a:normAutofit/>
           </a:bodyPr>
+          <a:lstStyle/>
           <a:p>
             <a:pPr marL="432000" indent="-324000" algn="l" defTabSz="914400">
               <a:lnSpc>
@@ -7979,7 +8506,7 @@
               <a:buChar char=""/>
             </a:pPr>
             <a:r>
-              <a:rPr lang="en-US" sz="2400" b="0" u="none" strike="noStrike">
+              <a:rPr lang="en-US" sz="2400" b="0" u="none" strike="noStrike" dirty="0">
                 <a:solidFill>
                   <a:srgbClr val="000000"/>
                 </a:solidFill>
@@ -7988,9 +8515,25 @@
                 <a:latin typeface="Arial"/>
                 <a:ea typeface="DejaVu Sans"/>
               </a:rPr>
-              <a:t>It appears that commute does have an effect on Attrition, but it seems to level off between 15-20 miles in distance.</a:t>
-            </a:r>
-            <a:endParaRPr lang="en-US" sz="2400" b="0" u="none" strike="noStrike">
+              <a:t>Commute distance impacts attrition, but </a:t>
+            </a:r>
+            <a:r>
+              <a:rPr lang="en-US" sz="2400" dirty="0"/>
+              <a:t>the affect wanes around 15-20 miles</a:t>
+            </a:r>
+            <a:r>
+              <a:rPr lang="en-US" sz="2400" b="0" u="none" strike="noStrike" dirty="0">
+                <a:solidFill>
+                  <a:srgbClr val="000000"/>
+                </a:solidFill>
+                <a:effectLst/>
+                <a:uFillTx/>
+                <a:latin typeface="Arial"/>
+                <a:ea typeface="DejaVu Sans"/>
+              </a:rPr>
+              <a:t>.</a:t>
+            </a:r>
+            <a:endParaRPr lang="en-US" sz="2400" b="0" u="none" strike="noStrike" dirty="0">
               <a:solidFill>
                 <a:srgbClr val="000000"/>
               </a:solidFill>
@@ -8008,13 +8551,13 @@
           <p:nvPr/>
         </p:nvPicPr>
         <p:blipFill>
-          <a:blip r:embed="rId1"/>
+          <a:blip r:embed="rId2"/>
           <a:stretch/>
         </p:blipFill>
         <p:spPr>
           <a:xfrm>
-            <a:off x="4572000" y="1371600"/>
-            <a:ext cx="5160240" cy="3695760"/>
+            <a:off x="2615609" y="887855"/>
+            <a:ext cx="5004331" cy="3428964"/>
           </a:xfrm>
           <a:prstGeom prst="rect">
             <a:avLst/>
@@ -8027,19 +8570,14 @@
       </p:pic>
     </p:spTree>
   </p:cSld>
-  <mc:AlternateContent>
-    <mc:Choice Requires="p14">
-      <p:transition spd="slow" p14:dur="2000"/>
-    </mc:Choice>
-    <mc:Fallback>
-      <p:transition spd="slow"/>
-    </mc:Fallback>
-  </mc:AlternateContent>
+  <p:clrMapOvr>
+    <a:masterClrMapping/>
+  </p:clrMapOvr>
 </p:sld>
 </file>
 
 <file path=ppt/theme/theme1.xml><?xml version="1.0" encoding="utf-8"?>
-<a:theme xmlns:a="http://schemas.openxmlformats.org/drawingml/2006/main" xmlns:r="http://schemas.openxmlformats.org/officeDocument/2006/relationships" name="Office">
+<a:theme xmlns:a="http://schemas.openxmlformats.org/drawingml/2006/main" name="Office">
   <a:themeElements>
     <a:clrScheme name="LibreOffice">
       <a:dk1>
@@ -8081,14 +8619,14 @@
     </a:clrScheme>
     <a:fontScheme name="Office">
       <a:majorFont>
-        <a:latin typeface="Arial" pitchFamily="0" charset="1"/>
-        <a:ea typeface="DejaVu Sans" pitchFamily="0" charset="1"/>
-        <a:cs typeface="DejaVu Sans" pitchFamily="0" charset="1"/>
+        <a:latin typeface="Arial"/>
+        <a:ea typeface="DejaVu Sans"/>
+        <a:cs typeface="DejaVu Sans"/>
       </a:majorFont>
       <a:minorFont>
-        <a:latin typeface="Arial" pitchFamily="0" charset="1"/>
-        <a:ea typeface="DejaVu Sans" pitchFamily="0" charset="1"/>
-        <a:cs typeface="DejaVu Sans" pitchFamily="0" charset="1"/>
+        <a:latin typeface="Arial"/>
+        <a:ea typeface="DejaVu Sans"/>
+        <a:cs typeface="DejaVu Sans"/>
       </a:minorFont>
     </a:fontScheme>
     <a:fmtScheme>
@@ -8141,5 +8679,322 @@
       </a:bgFillStyleLst>
     </a:fmtScheme>
   </a:themeElements>
+  <a:objectDefaults/>
+  <a:extraClrSchemeLst/>
+</a:theme>
+</file>
+
+<file path=ppt/theme/theme2.xml><?xml version="1.0" encoding="utf-8"?>
+<a:theme xmlns:a="http://schemas.openxmlformats.org/drawingml/2006/main" name="Office Theme">
+  <a:themeElements>
+    <a:clrScheme name="Office">
+      <a:dk1>
+        <a:sysClr val="windowText" lastClr="000000"/>
+      </a:dk1>
+      <a:lt1>
+        <a:sysClr val="window" lastClr="FFFFFF"/>
+      </a:lt1>
+      <a:dk2>
+        <a:srgbClr val="0E2841"/>
+      </a:dk2>
+      <a:lt2>
+        <a:srgbClr val="E8E8E8"/>
+      </a:lt2>
+      <a:accent1>
+        <a:srgbClr val="156082"/>
+      </a:accent1>
+      <a:accent2>
+        <a:srgbClr val="E97132"/>
+      </a:accent2>
+      <a:accent3>
+        <a:srgbClr val="196B24"/>
+      </a:accent3>
+      <a:accent4>
+        <a:srgbClr val="0F9ED5"/>
+      </a:accent4>
+      <a:accent5>
+        <a:srgbClr val="A02B93"/>
+      </a:accent5>
+      <a:accent6>
+        <a:srgbClr val="4EA72E"/>
+      </a:accent6>
+      <a:hlink>
+        <a:srgbClr val="467886"/>
+      </a:hlink>
+      <a:folHlink>
+        <a:srgbClr val="96607D"/>
+      </a:folHlink>
+    </a:clrScheme>
+    <a:fontScheme name="Office">
+      <a:majorFont>
+        <a:latin typeface="Aptos Display" panose="02110004020202020204"/>
+        <a:ea typeface=""/>
+        <a:cs typeface=""/>
+        <a:font script="Jpan" typeface="游ゴシック Light"/>
+        <a:font script="Hang" typeface="맑은 고딕"/>
+        <a:font script="Hans" typeface="等线 Light"/>
+        <a:font script="Hant" typeface="新細明體"/>
+        <a:font script="Arab" typeface="Times New Roman"/>
+        <a:font script="Hebr" typeface="Times New Roman"/>
+        <a:font script="Thai" typeface="Angsana New"/>
+        <a:font script="Ethi" typeface="Nyala"/>
+        <a:font script="Beng" typeface="Vrinda"/>
+        <a:font script="Gujr" typeface="Shruti"/>
+        <a:font script="Khmr" typeface="MoolBoran"/>
+        <a:font script="Knda" typeface="Tunga"/>
+        <a:font script="Guru" typeface="Raavi"/>
+        <a:font script="Cans" typeface="Euphemia"/>
+        <a:font script="Cher" typeface="Plantagenet Cherokee"/>
+        <a:font script="Yiii" typeface="Microsoft Yi Baiti"/>
+        <a:font script="Tibt" typeface="Microsoft Himalaya"/>
+        <a:font script="Thaa" typeface="MV Boli"/>
+        <a:font script="Deva" typeface="Mangal"/>
+        <a:font script="Telu" typeface="Gautami"/>
+        <a:font script="Taml" typeface="Latha"/>
+        <a:font script="Syrc" typeface="Estrangelo Edessa"/>
+        <a:font script="Orya" typeface="Kalinga"/>
+        <a:font script="Mlym" typeface="Kartika"/>
+        <a:font script="Laoo" typeface="DokChampa"/>
+        <a:font script="Sinh" typeface="Iskoola Pota"/>
+        <a:font script="Mong" typeface="Mongolian Baiti"/>
+        <a:font script="Viet" typeface="Times New Roman"/>
+        <a:font script="Uigh" typeface="Microsoft Uighur"/>
+        <a:font script="Geor" typeface="Sylfaen"/>
+        <a:font script="Armn" typeface="Arial"/>
+        <a:font script="Bugi" typeface="Leelawadee UI"/>
+        <a:font script="Bopo" typeface="Microsoft JhengHei"/>
+        <a:font script="Java" typeface="Javanese Text"/>
+        <a:font script="Lisu" typeface="Segoe UI"/>
+        <a:font script="Mymr" typeface="Myanmar Text"/>
+        <a:font script="Nkoo" typeface="Ebrima"/>
+        <a:font script="Olck" typeface="Nirmala UI"/>
+        <a:font script="Osma" typeface="Ebrima"/>
+        <a:font script="Phag" typeface="Phagspa"/>
+        <a:font script="Syrn" typeface="Estrangelo Edessa"/>
+        <a:font script="Syrj" typeface="Estrangelo Edessa"/>
+        <a:font script="Syre" typeface="Estrangelo Edessa"/>
+        <a:font script="Sora" typeface="Nirmala UI"/>
+        <a:font script="Tale" typeface="Microsoft Tai Le"/>
+        <a:font script="Talu" typeface="Microsoft New Tai Lue"/>
+        <a:font script="Tfng" typeface="Ebrima"/>
+      </a:majorFont>
+      <a:minorFont>
+        <a:latin typeface="Aptos" panose="02110004020202020204"/>
+        <a:ea typeface=""/>
+        <a:cs typeface=""/>
+        <a:font script="Jpan" typeface="游ゴシック"/>
+        <a:font script="Hang" typeface="맑은 고딕"/>
+        <a:font script="Hans" typeface="等线"/>
+        <a:font script="Hant" typeface="新細明體"/>
+        <a:font script="Arab" typeface="Arial"/>
+        <a:font script="Hebr" typeface="Arial"/>
+        <a:font script="Thai" typeface="Cordia New"/>
+        <a:font script="Ethi" typeface="Nyala"/>
+        <a:font script="Beng" typeface="Vrinda"/>
+        <a:font script="Gujr" typeface="Shruti"/>
+        <a:font script="Khmr" typeface="DaunPenh"/>
+        <a:font script="Knda" typeface="Tunga"/>
+        <a:font script="Guru" typeface="Raavi"/>
+        <a:font script="Cans" typeface="Euphemia"/>
+        <a:font script="Cher" typeface="Plantagenet Cherokee"/>
+        <a:font script="Yiii" typeface="Microsoft Yi Baiti"/>
+        <a:font script="Tibt" typeface="Microsoft Himalaya"/>
+        <a:font script="Thaa" typeface="MV Boli"/>
+        <a:font script="Deva" typeface="Mangal"/>
+        <a:font script="Telu" typeface="Gautami"/>
+        <a:font script="Taml" typeface="Latha"/>
+        <a:font script="Syrc" typeface="Estrangelo Edessa"/>
+        <a:font script="Orya" typeface="Kalinga"/>
+        <a:font script="Mlym" typeface="Kartika"/>
+        <a:font script="Laoo" typeface="DokChampa"/>
+        <a:font script="Sinh" typeface="Iskoola Pota"/>
+        <a:font script="Mong" typeface="Mongolian Baiti"/>
+        <a:font script="Viet" typeface="Arial"/>
+        <a:font script="Uigh" typeface="Microsoft Uighur"/>
+        <a:font script="Geor" typeface="Sylfaen"/>
+        <a:font script="Armn" typeface="Arial"/>
+        <a:font script="Bugi" typeface="Leelawadee UI"/>
+        <a:font script="Bopo" typeface="Microsoft JhengHei"/>
+        <a:font script="Java" typeface="Javanese Text"/>
+        <a:font script="Lisu" typeface="Segoe UI"/>
+        <a:font script="Mymr" typeface="Myanmar Text"/>
+        <a:font script="Nkoo" typeface="Ebrima"/>
+        <a:font script="Olck" typeface="Nirmala UI"/>
+        <a:font script="Osma" typeface="Ebrima"/>
+        <a:font script="Phag" typeface="Phagspa"/>
+        <a:font script="Syrn" typeface="Estrangelo Edessa"/>
+        <a:font script="Syrj" typeface="Estrangelo Edessa"/>
+        <a:font script="Syre" typeface="Estrangelo Edessa"/>
+        <a:font script="Sora" typeface="Nirmala UI"/>
+        <a:font script="Tale" typeface="Microsoft Tai Le"/>
+        <a:font script="Talu" typeface="Microsoft New Tai Lue"/>
+        <a:font script="Tfng" typeface="Ebrima"/>
+      </a:minorFont>
+    </a:fontScheme>
+    <a:fmtScheme name="Office">
+      <a:fillStyleLst>
+        <a:solidFill>
+          <a:schemeClr val="phClr"/>
+        </a:solidFill>
+        <a:gradFill rotWithShape="1">
+          <a:gsLst>
+            <a:gs pos="0">
+              <a:schemeClr val="phClr">
+                <a:lumMod val="110000"/>
+                <a:satMod val="105000"/>
+                <a:tint val="67000"/>
+              </a:schemeClr>
+            </a:gs>
+            <a:gs pos="50000">
+              <a:schemeClr val="phClr">
+                <a:lumMod val="105000"/>
+                <a:satMod val="103000"/>
+                <a:tint val="73000"/>
+              </a:schemeClr>
+            </a:gs>
+            <a:gs pos="100000">
+              <a:schemeClr val="phClr">
+                <a:lumMod val="105000"/>
+                <a:satMod val="109000"/>
+                <a:tint val="81000"/>
+              </a:schemeClr>
+            </a:gs>
+          </a:gsLst>
+          <a:lin ang="5400000" scaled="0"/>
+        </a:gradFill>
+        <a:gradFill rotWithShape="1">
+          <a:gsLst>
+            <a:gs pos="0">
+              <a:schemeClr val="phClr">
+                <a:satMod val="103000"/>
+                <a:lumMod val="102000"/>
+                <a:tint val="94000"/>
+              </a:schemeClr>
+            </a:gs>
+            <a:gs pos="50000">
+              <a:schemeClr val="phClr">
+                <a:satMod val="110000"/>
+                <a:lumMod val="100000"/>
+                <a:shade val="100000"/>
+              </a:schemeClr>
+            </a:gs>
+            <a:gs pos="100000">
+              <a:schemeClr val="phClr">
+                <a:lumMod val="99000"/>
+                <a:satMod val="120000"/>
+                <a:shade val="78000"/>
+              </a:schemeClr>
+            </a:gs>
+          </a:gsLst>
+          <a:lin ang="5400000" scaled="0"/>
+        </a:gradFill>
+      </a:fillStyleLst>
+      <a:lnStyleLst>
+        <a:ln w="12700" cap="flat" cmpd="sng" algn="ctr">
+          <a:solidFill>
+            <a:schemeClr val="phClr"/>
+          </a:solidFill>
+          <a:prstDash val="solid"/>
+          <a:miter lim="800000"/>
+        </a:ln>
+        <a:ln w="19050" cap="flat" cmpd="sng" algn="ctr">
+          <a:solidFill>
+            <a:schemeClr val="phClr"/>
+          </a:solidFill>
+          <a:prstDash val="solid"/>
+          <a:miter lim="800000"/>
+        </a:ln>
+        <a:ln w="25400" cap="flat" cmpd="sng" algn="ctr">
+          <a:solidFill>
+            <a:schemeClr val="phClr"/>
+          </a:solidFill>
+          <a:prstDash val="solid"/>
+          <a:miter lim="800000"/>
+        </a:ln>
+      </a:lnStyleLst>
+      <a:effectStyleLst>
+        <a:effectStyle>
+          <a:effectLst/>
+        </a:effectStyle>
+        <a:effectStyle>
+          <a:effectLst/>
+        </a:effectStyle>
+        <a:effectStyle>
+          <a:effectLst>
+            <a:outerShdw blurRad="57150" dist="19050" dir="5400000" algn="ctr" rotWithShape="0">
+              <a:srgbClr val="000000">
+                <a:alpha val="63000"/>
+              </a:srgbClr>
+            </a:outerShdw>
+          </a:effectLst>
+        </a:effectStyle>
+      </a:effectStyleLst>
+      <a:bgFillStyleLst>
+        <a:solidFill>
+          <a:schemeClr val="phClr"/>
+        </a:solidFill>
+        <a:solidFill>
+          <a:schemeClr val="phClr">
+            <a:tint val="95000"/>
+            <a:satMod val="170000"/>
+          </a:schemeClr>
+        </a:solidFill>
+        <a:gradFill rotWithShape="1">
+          <a:gsLst>
+            <a:gs pos="0">
+              <a:schemeClr val="phClr">
+                <a:tint val="93000"/>
+                <a:satMod val="150000"/>
+                <a:shade val="98000"/>
+                <a:lumMod val="102000"/>
+              </a:schemeClr>
+            </a:gs>
+            <a:gs pos="50000">
+              <a:schemeClr val="phClr">
+                <a:tint val="98000"/>
+                <a:satMod val="130000"/>
+                <a:shade val="90000"/>
+                <a:lumMod val="103000"/>
+              </a:schemeClr>
+            </a:gs>
+            <a:gs pos="100000">
+              <a:schemeClr val="phClr">
+                <a:shade val="63000"/>
+                <a:satMod val="120000"/>
+              </a:schemeClr>
+            </a:gs>
+          </a:gsLst>
+          <a:lin ang="5400000" scaled="0"/>
+        </a:gradFill>
+      </a:bgFillStyleLst>
+    </a:fmtScheme>
+  </a:themeElements>
+  <a:objectDefaults>
+    <a:lnDef>
+      <a:spPr/>
+      <a:bodyPr/>
+      <a:lstStyle/>
+      <a:style>
+        <a:lnRef idx="2">
+          <a:schemeClr val="accent1"/>
+        </a:lnRef>
+        <a:fillRef idx="0">
+          <a:schemeClr val="accent1"/>
+        </a:fillRef>
+        <a:effectRef idx="1">
+          <a:schemeClr val="accent1"/>
+        </a:effectRef>
+        <a:fontRef idx="minor">
+          <a:schemeClr val="tx1"/>
+        </a:fontRef>
+      </a:style>
+    </a:lnDef>
+  </a:objectDefaults>
+  <a:extraClrSchemeLst/>
+  <a:extLst>
+    <a:ext uri="{05A4C25C-085E-4340-85A3-A5531E510DB2}">
+      <thm15:themeFamily xmlns:thm15="http://schemas.microsoft.com/office/thememl/2012/main" name="Office Theme" id="{2E142A2C-CD16-42D6-873A-C26D2A0506FA}" vid="{1BDDFF52-6CD6-40A5-AB3C-68EB2F1E4D0A}"/>
+    </a:ext>
+  </a:extLst>
 </a:theme>
 </file>
--- a/presentations/project2_presentation.pptx
+++ b/presentations/project2_presentation.pptx
@@ -1,44 +1,147 @@
 
 <file path=ppt/presentation.xml><?xml version="1.0" encoding="utf-8"?>
-<p:presentation xmlns:a="http://schemas.openxmlformats.org/drawingml/2006/main" xmlns:p="http://schemas.openxmlformats.org/presentationml/2006/main" xmlns:r="http://schemas.openxmlformats.org/officeDocument/2006/relationships" xmlns:p14="http://schemas.microsoft.com/office/powerpoint/2010/main" xmlns:p15="http://schemas.microsoft.com/office/powerpoint/2012/main" xmlns:mc="http://schemas.openxmlformats.org/markup-compatibility/2006">
+<p:presentation xmlns:a="http://schemas.openxmlformats.org/drawingml/2006/main" xmlns:r="http://schemas.openxmlformats.org/officeDocument/2006/relationships" xmlns:p="http://schemas.openxmlformats.org/presentationml/2006/main">
   <p:sldMasterIdLst>
-    <p:sldMasterId id="2147483648" r:id="rId2"/>
+    <p:sldMasterId id="2147483648" r:id="rId1"/>
   </p:sldMasterIdLst>
   <p:notesMasterIdLst>
-    <p:notesMasterId r:id="rId3"/>
+    <p:notesMasterId r:id="rId22"/>
   </p:notesMasterIdLst>
   <p:sldIdLst>
-    <p:sldId id="256" r:id="rId4"/>
-    <p:sldId id="257" r:id="rId5"/>
-    <p:sldId id="258" r:id="rId6"/>
-    <p:sldId id="259" r:id="rId7"/>
-    <p:sldId id="260" r:id="rId8"/>
-    <p:sldId id="261" r:id="rId9"/>
-    <p:sldId id="262" r:id="rId10"/>
-    <p:sldId id="263" r:id="rId11"/>
-    <p:sldId id="264" r:id="rId12"/>
-    <p:sldId id="265" r:id="rId13"/>
-    <p:sldId id="266" r:id="rId14"/>
-    <p:sldId id="267" r:id="rId15"/>
-    <p:sldId id="268" r:id="rId16"/>
-    <p:sldId id="269" r:id="rId17"/>
-    <p:sldId id="270" r:id="rId18"/>
-    <p:sldId id="271" r:id="rId19"/>
-    <p:sldId id="272" r:id="rId20"/>
-    <p:sldId id="273" r:id="rId21"/>
-    <p:sldId id="274" r:id="rId22"/>
-    <p:sldId id="275" r:id="rId23"/>
-    <p:sldId id="276" r:id="rId24"/>
-    <p:sldId id="277" r:id="rId25"/>
+    <p:sldId id="256" r:id="rId2"/>
+    <p:sldId id="257" r:id="rId3"/>
+    <p:sldId id="258" r:id="rId4"/>
+    <p:sldId id="259" r:id="rId5"/>
+    <p:sldId id="260" r:id="rId6"/>
+    <p:sldId id="261" r:id="rId7"/>
+    <p:sldId id="262" r:id="rId8"/>
+    <p:sldId id="263" r:id="rId9"/>
+    <p:sldId id="264" r:id="rId10"/>
+    <p:sldId id="265" r:id="rId11"/>
+    <p:sldId id="266" r:id="rId12"/>
+    <p:sldId id="267" r:id="rId13"/>
+    <p:sldId id="269" r:id="rId14"/>
+    <p:sldId id="270" r:id="rId15"/>
+    <p:sldId id="271" r:id="rId16"/>
+    <p:sldId id="272" r:id="rId17"/>
+    <p:sldId id="274" r:id="rId18"/>
+    <p:sldId id="275" r:id="rId19"/>
+    <p:sldId id="276" r:id="rId20"/>
+    <p:sldId id="277" r:id="rId21"/>
   </p:sldIdLst>
   <p:sldSz cx="10080625" cy="5670550"/>
   <p:notesSz cx="7772400" cy="10058400"/>
+  <p:defaultTextStyle>
+    <a:defPPr>
+      <a:defRPr lang="en-US"/>
+    </a:defPPr>
+    <a:lvl1pPr marL="0" algn="l" defTabSz="914400" rtl="0" eaLnBrk="1" latinLnBrk="0" hangingPunct="1">
+      <a:defRPr sz="1800" kern="1200">
+        <a:solidFill>
+          <a:schemeClr val="tx1"/>
+        </a:solidFill>
+        <a:latin typeface="+mn-lt"/>
+        <a:ea typeface="+mn-ea"/>
+        <a:cs typeface="+mn-cs"/>
+      </a:defRPr>
+    </a:lvl1pPr>
+    <a:lvl2pPr marL="457200" algn="l" defTabSz="914400" rtl="0" eaLnBrk="1" latinLnBrk="0" hangingPunct="1">
+      <a:defRPr sz="1800" kern="1200">
+        <a:solidFill>
+          <a:schemeClr val="tx1"/>
+        </a:solidFill>
+        <a:latin typeface="+mn-lt"/>
+        <a:ea typeface="+mn-ea"/>
+        <a:cs typeface="+mn-cs"/>
+      </a:defRPr>
+    </a:lvl2pPr>
+    <a:lvl3pPr marL="914400" algn="l" defTabSz="914400" rtl="0" eaLnBrk="1" latinLnBrk="0" hangingPunct="1">
+      <a:defRPr sz="1800" kern="1200">
+        <a:solidFill>
+          <a:schemeClr val="tx1"/>
+        </a:solidFill>
+        <a:latin typeface="+mn-lt"/>
+        <a:ea typeface="+mn-ea"/>
+        <a:cs typeface="+mn-cs"/>
+      </a:defRPr>
+    </a:lvl3pPr>
+    <a:lvl4pPr marL="1371600" algn="l" defTabSz="914400" rtl="0" eaLnBrk="1" latinLnBrk="0" hangingPunct="1">
+      <a:defRPr sz="1800" kern="1200">
+        <a:solidFill>
+          <a:schemeClr val="tx1"/>
+        </a:solidFill>
+        <a:latin typeface="+mn-lt"/>
+        <a:ea typeface="+mn-ea"/>
+        <a:cs typeface="+mn-cs"/>
+      </a:defRPr>
+    </a:lvl4pPr>
+    <a:lvl5pPr marL="1828800" algn="l" defTabSz="914400" rtl="0" eaLnBrk="1" latinLnBrk="0" hangingPunct="1">
+      <a:defRPr sz="1800" kern="1200">
+        <a:solidFill>
+          <a:schemeClr val="tx1"/>
+        </a:solidFill>
+        <a:latin typeface="+mn-lt"/>
+        <a:ea typeface="+mn-ea"/>
+        <a:cs typeface="+mn-cs"/>
+      </a:defRPr>
+    </a:lvl5pPr>
+    <a:lvl6pPr marL="2286000" algn="l" defTabSz="914400" rtl="0" eaLnBrk="1" latinLnBrk="0" hangingPunct="1">
+      <a:defRPr sz="1800" kern="1200">
+        <a:solidFill>
+          <a:schemeClr val="tx1"/>
+        </a:solidFill>
+        <a:latin typeface="+mn-lt"/>
+        <a:ea typeface="+mn-ea"/>
+        <a:cs typeface="+mn-cs"/>
+      </a:defRPr>
+    </a:lvl6pPr>
+    <a:lvl7pPr marL="2743200" algn="l" defTabSz="914400" rtl="0" eaLnBrk="1" latinLnBrk="0" hangingPunct="1">
+      <a:defRPr sz="1800" kern="1200">
+        <a:solidFill>
+          <a:schemeClr val="tx1"/>
+        </a:solidFill>
+        <a:latin typeface="+mn-lt"/>
+        <a:ea typeface="+mn-ea"/>
+        <a:cs typeface="+mn-cs"/>
+      </a:defRPr>
+    </a:lvl7pPr>
+    <a:lvl8pPr marL="3200400" algn="l" defTabSz="914400" rtl="0" eaLnBrk="1" latinLnBrk="0" hangingPunct="1">
+      <a:defRPr sz="1800" kern="1200">
+        <a:solidFill>
+          <a:schemeClr val="tx1"/>
+        </a:solidFill>
+        <a:latin typeface="+mn-lt"/>
+        <a:ea typeface="+mn-ea"/>
+        <a:cs typeface="+mn-cs"/>
+      </a:defRPr>
+    </a:lvl8pPr>
+    <a:lvl9pPr marL="3657600" algn="l" defTabSz="914400" rtl="0" eaLnBrk="1" latinLnBrk="0" hangingPunct="1">
+      <a:defRPr sz="1800" kern="1200">
+        <a:solidFill>
+          <a:schemeClr val="tx1"/>
+        </a:solidFill>
+        <a:latin typeface="+mn-lt"/>
+        <a:ea typeface="+mn-ea"/>
+        <a:cs typeface="+mn-cs"/>
+      </a:defRPr>
+    </a:lvl9pPr>
+  </p:defaultTextStyle>
+  <p:extLst>
+    <p:ext uri="{EFAFB233-063F-42B5-8137-9DF3F51BA10A}">
+      <p15:sldGuideLst xmlns:p15="http://schemas.microsoft.com/office/powerpoint/2012/main"/>
+    </p:ext>
+  </p:extLst>
 </p:presentation>
 </file>
 
 <file path=ppt/notesMasters/notesMaster1.xml><?xml version="1.0" encoding="utf-8"?>
-<p:notesMaster xmlns:a="http://schemas.openxmlformats.org/drawingml/2006/main" xmlns:p="http://schemas.openxmlformats.org/presentationml/2006/main" xmlns:r="http://schemas.openxmlformats.org/officeDocument/2006/relationships" xmlns:p14="http://schemas.microsoft.com/office/powerpoint/2010/main" xmlns:p15="http://schemas.microsoft.com/office/powerpoint/2012/main" xmlns:mc="http://schemas.openxmlformats.org/markup-compatibility/2006">
+<p:notesMaster xmlns:a="http://schemas.openxmlformats.org/drawingml/2006/main" xmlns:r="http://schemas.openxmlformats.org/officeDocument/2006/relationships" xmlns:p="http://schemas.openxmlformats.org/presentationml/2006/main">
   <p:cSld>
+    <p:bg>
+      <p:bgRef idx="1001">
+        <a:schemeClr val="bg1"/>
+      </p:bgRef>
+    </p:bg>
     <p:spTree>
       <p:nvGrpSpPr>
         <p:cNvPr id="1" name=""/>
@@ -57,7 +160,7 @@
         <p:nvSpPr>
           <p:cNvPr id="20" name="PlaceHolder 1"/>
           <p:cNvSpPr>
-            <a:spLocks noGrp="1"/>
+            <a:spLocks noGrp="1" noRot="1" noChangeAspect="1"/>
           </p:cNvSpPr>
           <p:nvPr>
             <p:ph type="sldImg"/>
@@ -80,6 +183,7 @@
           <a:bodyPr lIns="0" tIns="0" rIns="0" bIns="0" anchor="ctr">
             <a:noAutofit/>
           </a:bodyPr>
+          <a:lstStyle/>
           <a:p>
             <a:pPr algn="ctr" defTabSz="914400">
               <a:lnSpc>
@@ -100,14 +204,6 @@
               </a:rPr>
               <a:t>Click to move the slide</a:t>
             </a:r>
-            <a:endParaRPr lang="en-US" sz="4400" b="0" u="none" strike="noStrike">
-              <a:solidFill>
-                <a:srgbClr val="FFFFFF"/>
-              </a:solidFill>
-              <a:effectLst/>
-              <a:uFillTx/>
-              <a:latin typeface="Arial"/>
-            </a:endParaRPr>
           </a:p>
         </p:txBody>
       </p:sp>
@@ -138,6 +234,7 @@
           <a:bodyPr lIns="0" tIns="0" rIns="0" bIns="0" anchor="t">
             <a:noAutofit/>
           </a:bodyPr>
+          <a:lstStyle/>
           <a:p>
             <a:pPr indent="0" algn="l">
               <a:buNone/>
@@ -153,14 +250,6 @@
               </a:rPr>
               <a:t>Click to edit the notes format</a:t>
             </a:r>
-            <a:endParaRPr lang="en-US" sz="2000" b="0" u="none" strike="noStrike">
-              <a:solidFill>
-                <a:srgbClr val="000000"/>
-              </a:solidFill>
-              <a:effectLst/>
-              <a:uFillTx/>
-              <a:latin typeface="Arial"/>
-            </a:endParaRPr>
           </a:p>
         </p:txBody>
       </p:sp>
@@ -191,6 +280,7 @@
           <a:bodyPr lIns="0" tIns="0" rIns="0" bIns="0" anchor="t">
             <a:noAutofit/>
           </a:bodyPr>
+          <a:lstStyle/>
           <a:p>
             <a:pPr indent="0" algn="l">
               <a:buNone/>
@@ -206,14 +296,6 @@
               </a:rPr>
               <a:t>&lt;header&gt;</a:t>
             </a:r>
-            <a:endParaRPr lang="en-US" sz="1400" b="0" u="none" strike="noStrike">
-              <a:solidFill>
-                <a:srgbClr val="000000"/>
-              </a:solidFill>
-              <a:effectLst/>
-              <a:uFillTx/>
-              <a:latin typeface="Times New Roman"/>
-            </a:endParaRPr>
           </a:p>
         </p:txBody>
       </p:sp>
@@ -272,14 +354,6 @@
               </a:rPr>
               <a:t>&lt;date/time&gt;</a:t>
             </a:r>
-            <a:endParaRPr lang="en-US" sz="1400" b="0" u="none" strike="noStrike">
-              <a:solidFill>
-                <a:srgbClr val="000000"/>
-              </a:solidFill>
-              <a:effectLst/>
-              <a:uFillTx/>
-              <a:latin typeface="Times New Roman"/>
-            </a:endParaRPr>
           </a:p>
         </p:txBody>
       </p:sp>
@@ -338,14 +412,6 @@
               </a:rPr>
               <a:t>&lt;footer&gt;</a:t>
             </a:r>
-            <a:endParaRPr lang="en-US" sz="1400" b="0" u="none" strike="noStrike">
-              <a:solidFill>
-                <a:srgbClr val="000000"/>
-              </a:solidFill>
-              <a:effectLst/>
-              <a:uFillTx/>
-              <a:latin typeface="Times New Roman"/>
-            </a:endParaRPr>
           </a:p>
         </p:txBody>
       </p:sp>
@@ -402,7 +468,7 @@
                 <a:uFillTx/>
                 <a:latin typeface="Times New Roman"/>
               </a:rPr>
-              <a:t>&lt;number&gt;</a:t>
+              <a:t>‹#›</a:t>
             </a:fld>
             <a:endParaRPr lang="en-US" sz="1400" b="0" u="none" strike="noStrike">
               <a:solidFill>
@@ -417,12 +483,104 @@
       </p:sp>
     </p:spTree>
   </p:cSld>
-  <p:clrMap bg1="lt1" bg2="lt2" tx1="dk1" tx2="dk2" accent1="accent1" accent2="accent2" accent3="accent3" accent4="accent4" accent5="accent5" accent6="accent6" hlink="hlink" folHlink="folHlink"/>
+  <p:clrMap bg1="lt1" tx1="dk1" bg2="lt2" tx2="dk2" accent1="accent1" accent2="accent2" accent3="accent3" accent4="accent4" accent5="accent5" accent6="accent6" hlink="hlink" folHlink="folHlink"/>
+  <p:notesStyle>
+    <a:lvl1pPr marL="0" algn="l" defTabSz="914400" rtl="0" eaLnBrk="1" latinLnBrk="0" hangingPunct="1">
+      <a:defRPr sz="1200" kern="1200">
+        <a:solidFill>
+          <a:schemeClr val="tx1"/>
+        </a:solidFill>
+        <a:latin typeface="+mn-lt"/>
+        <a:ea typeface="+mn-ea"/>
+        <a:cs typeface="+mn-cs"/>
+      </a:defRPr>
+    </a:lvl1pPr>
+    <a:lvl2pPr marL="457200" algn="l" defTabSz="914400" rtl="0" eaLnBrk="1" latinLnBrk="0" hangingPunct="1">
+      <a:defRPr sz="1200" kern="1200">
+        <a:solidFill>
+          <a:schemeClr val="tx1"/>
+        </a:solidFill>
+        <a:latin typeface="+mn-lt"/>
+        <a:ea typeface="+mn-ea"/>
+        <a:cs typeface="+mn-cs"/>
+      </a:defRPr>
+    </a:lvl2pPr>
+    <a:lvl3pPr marL="914400" algn="l" defTabSz="914400" rtl="0" eaLnBrk="1" latinLnBrk="0" hangingPunct="1">
+      <a:defRPr sz="1200" kern="1200">
+        <a:solidFill>
+          <a:schemeClr val="tx1"/>
+        </a:solidFill>
+        <a:latin typeface="+mn-lt"/>
+        <a:ea typeface="+mn-ea"/>
+        <a:cs typeface="+mn-cs"/>
+      </a:defRPr>
+    </a:lvl3pPr>
+    <a:lvl4pPr marL="1371600" algn="l" defTabSz="914400" rtl="0" eaLnBrk="1" latinLnBrk="0" hangingPunct="1">
+      <a:defRPr sz="1200" kern="1200">
+        <a:solidFill>
+          <a:schemeClr val="tx1"/>
+        </a:solidFill>
+        <a:latin typeface="+mn-lt"/>
+        <a:ea typeface="+mn-ea"/>
+        <a:cs typeface="+mn-cs"/>
+      </a:defRPr>
+    </a:lvl4pPr>
+    <a:lvl5pPr marL="1828800" algn="l" defTabSz="914400" rtl="0" eaLnBrk="1" latinLnBrk="0" hangingPunct="1">
+      <a:defRPr sz="1200" kern="1200">
+        <a:solidFill>
+          <a:schemeClr val="tx1"/>
+        </a:solidFill>
+        <a:latin typeface="+mn-lt"/>
+        <a:ea typeface="+mn-ea"/>
+        <a:cs typeface="+mn-cs"/>
+      </a:defRPr>
+    </a:lvl5pPr>
+    <a:lvl6pPr marL="2286000" algn="l" defTabSz="914400" rtl="0" eaLnBrk="1" latinLnBrk="0" hangingPunct="1">
+      <a:defRPr sz="1200" kern="1200">
+        <a:solidFill>
+          <a:schemeClr val="tx1"/>
+        </a:solidFill>
+        <a:latin typeface="+mn-lt"/>
+        <a:ea typeface="+mn-ea"/>
+        <a:cs typeface="+mn-cs"/>
+      </a:defRPr>
+    </a:lvl6pPr>
+    <a:lvl7pPr marL="2743200" algn="l" defTabSz="914400" rtl="0" eaLnBrk="1" latinLnBrk="0" hangingPunct="1">
+      <a:defRPr sz="1200" kern="1200">
+        <a:solidFill>
+          <a:schemeClr val="tx1"/>
+        </a:solidFill>
+        <a:latin typeface="+mn-lt"/>
+        <a:ea typeface="+mn-ea"/>
+        <a:cs typeface="+mn-cs"/>
+      </a:defRPr>
+    </a:lvl7pPr>
+    <a:lvl8pPr marL="3200400" algn="l" defTabSz="914400" rtl="0" eaLnBrk="1" latinLnBrk="0" hangingPunct="1">
+      <a:defRPr sz="1200" kern="1200">
+        <a:solidFill>
+          <a:schemeClr val="tx1"/>
+        </a:solidFill>
+        <a:latin typeface="+mn-lt"/>
+        <a:ea typeface="+mn-ea"/>
+        <a:cs typeface="+mn-cs"/>
+      </a:defRPr>
+    </a:lvl8pPr>
+    <a:lvl9pPr marL="3657600" algn="l" defTabSz="914400" rtl="0" eaLnBrk="1" latinLnBrk="0" hangingPunct="1">
+      <a:defRPr sz="1200" kern="1200">
+        <a:solidFill>
+          <a:schemeClr val="tx1"/>
+        </a:solidFill>
+        <a:latin typeface="+mn-lt"/>
+        <a:ea typeface="+mn-ea"/>
+        <a:cs typeface="+mn-cs"/>
+      </a:defRPr>
+    </a:lvl9pPr>
+  </p:notesStyle>
 </p:notesMaster>
 </file>
 
-<file path=ppt/notesSlides/notesSlide11.xml><?xml version="1.0" encoding="utf-8"?>
-<p:notes xmlns:a="http://schemas.openxmlformats.org/drawingml/2006/main" xmlns:p="http://schemas.openxmlformats.org/presentationml/2006/main" xmlns:r="http://schemas.openxmlformats.org/officeDocument/2006/relationships" xmlns:p14="http://schemas.microsoft.com/office/powerpoint/2010/main" xmlns:p15="http://schemas.microsoft.com/office/powerpoint/2012/main" xmlns:mc="http://schemas.openxmlformats.org/markup-compatibility/2006">
+<file path=ppt/notesSlides/notesSlide1.xml><?xml version="1.0" encoding="utf-8"?>
+<p:notes xmlns:a="http://schemas.openxmlformats.org/drawingml/2006/main" xmlns:r="http://schemas.openxmlformats.org/officeDocument/2006/relationships" xmlns:p="http://schemas.openxmlformats.org/presentationml/2006/main">
   <p:cSld>
     <p:spTree>
       <p:nvGrpSpPr>
@@ -442,7 +600,7 @@
         <p:nvSpPr>
           <p:cNvPr id="78" name="PlaceHolder 1"/>
           <p:cNvSpPr>
-            <a:spLocks noGrp="1"/>
+            <a:spLocks noGrp="1" noRot="1" noChangeAspect="1"/>
           </p:cNvSpPr>
           <p:nvPr>
             <p:ph type="sldImg"/>
@@ -488,6 +646,7 @@
           <a:bodyPr lIns="91440" tIns="45720" rIns="91440" bIns="45720" anchor="t">
             <a:noAutofit/>
           </a:bodyPr>
+          <a:lstStyle/>
           <a:p>
             <a:pPr indent="0" algn="l" defTabSz="914400">
               <a:lnSpc>
@@ -508,31 +667,7 @@
                 <a:latin typeface="Arial"/>
                 <a:ea typeface="DejaVu Sans"/>
               </a:rPr>
-              <a:t>This</a:t>
-            </a:r>
-            <a:r>
-              <a:rPr lang="en-US" sz="1200" b="0" u="none" strike="noStrike">
-                <a:solidFill>
-                  <a:srgbClr val="000000"/>
-                </a:solidFill>
-                <a:effectLst/>
-                <a:uFillTx/>
-                <a:latin typeface="Arial"/>
-                <a:ea typeface="DejaVu Sans"/>
-              </a:rPr>
-              <a:t> may be due to</a:t>
-            </a:r>
-            <a:r>
-              <a:rPr lang="en-US" sz="1200" b="0" u="none" strike="noStrike">
-                <a:solidFill>
-                  <a:srgbClr val="000000"/>
-                </a:solidFill>
-                <a:effectLst/>
-                <a:uFillTx/>
-                <a:latin typeface="Arial"/>
-                <a:ea typeface="DejaVu Sans"/>
-              </a:rPr>
-              <a:t> employees that have worked at more companies are more likely to be looking for new opportunities</a:t>
+              <a:t>This may be due to employees that have worked at more companies are more likely to be looking for new opportunities</a:t>
             </a:r>
             <a:endParaRPr lang="en-US" sz="1200" b="0" u="none" strike="noStrike">
               <a:solidFill>
@@ -654,7 +789,7 @@
                 <a:uFillTx/>
                 <a:latin typeface="Times New Roman"/>
               </a:rPr>
-              <a:t>22</a:t>
+              <a:t>11</a:t>
             </a:fld>
             <a:endParaRPr lang="en-US" sz="1200" b="0" u="none" strike="noStrike">
               <a:solidFill>
@@ -669,11 +804,14 @@
       </p:sp>
     </p:spTree>
   </p:cSld>
+  <p:clrMapOvr>
+    <a:masterClrMapping/>
+  </p:clrMapOvr>
 </p:notes>
 </file>
 
-<file path=ppt/notesSlides/notesSlide14.xml><?xml version="1.0" encoding="utf-8"?>
-<p:notes xmlns:a="http://schemas.openxmlformats.org/drawingml/2006/main" xmlns:p="http://schemas.openxmlformats.org/presentationml/2006/main" xmlns:r="http://schemas.openxmlformats.org/officeDocument/2006/relationships" xmlns:p14="http://schemas.microsoft.com/office/powerpoint/2010/main" xmlns:p15="http://schemas.microsoft.com/office/powerpoint/2012/main" xmlns:mc="http://schemas.openxmlformats.org/markup-compatibility/2006">
+<file path=ppt/notesSlides/notesSlide2.xml><?xml version="1.0" encoding="utf-8"?>
+<p:notes xmlns:a="http://schemas.openxmlformats.org/drawingml/2006/main" xmlns:r="http://schemas.openxmlformats.org/officeDocument/2006/relationships" xmlns:p="http://schemas.openxmlformats.org/presentationml/2006/main">
   <p:cSld>
     <p:spTree>
       <p:nvGrpSpPr>
@@ -693,7 +831,7 @@
         <p:nvSpPr>
           <p:cNvPr id="81" name="PlaceHolder 1"/>
           <p:cNvSpPr>
-            <a:spLocks noGrp="1"/>
+            <a:spLocks noGrp="1" noRot="1" noChangeAspect="1"/>
           </p:cNvSpPr>
           <p:nvPr>
             <p:ph type="sldImg"/>
@@ -739,6 +877,7 @@
           <a:bodyPr lIns="91440" tIns="45720" rIns="91440" bIns="45720" anchor="t">
             <a:noAutofit/>
           </a:bodyPr>
+          <a:lstStyle/>
           <a:p>
             <a:pPr indent="0" algn="l">
               <a:lnSpc>
@@ -757,14 +896,6 @@
               </a:rPr>
               <a:t>Positive meaning more likely to leave</a:t>
             </a:r>
-            <a:endParaRPr lang="en-US" sz="2000" b="0" u="none" strike="noStrike">
-              <a:solidFill>
-                <a:srgbClr val="000000"/>
-              </a:solidFill>
-              <a:effectLst/>
-              <a:uFillTx/>
-              <a:latin typeface="Arial"/>
-            </a:endParaRPr>
           </a:p>
         </p:txBody>
       </p:sp>
@@ -827,7 +958,7 @@
                 <a:uFillTx/>
                 <a:latin typeface="Times New Roman"/>
               </a:rPr>
-              <a:t>&lt;number&gt;</a:t>
+              <a:t>13</a:t>
             </a:fld>
             <a:endParaRPr lang="en-US" sz="1200" b="0" u="none" strike="noStrike">
               <a:solidFill>
@@ -842,11 +973,14 @@
       </p:sp>
     </p:spTree>
   </p:cSld>
+  <p:clrMapOvr>
+    <a:masterClrMapping/>
+  </p:clrMapOvr>
 </p:notes>
 </file>
 
-<file path=ppt/notesSlides/notesSlide15.xml><?xml version="1.0" encoding="utf-8"?>
-<p:notes xmlns:a="http://schemas.openxmlformats.org/drawingml/2006/main" xmlns:p="http://schemas.openxmlformats.org/presentationml/2006/main" xmlns:r="http://schemas.openxmlformats.org/officeDocument/2006/relationships" xmlns:p14="http://schemas.microsoft.com/office/powerpoint/2010/main" xmlns:p15="http://schemas.microsoft.com/office/powerpoint/2012/main" xmlns:mc="http://schemas.openxmlformats.org/markup-compatibility/2006">
+<file path=ppt/notesSlides/notesSlide3.xml><?xml version="1.0" encoding="utf-8"?>
+<p:notes xmlns:a="http://schemas.openxmlformats.org/drawingml/2006/main" xmlns:r="http://schemas.openxmlformats.org/officeDocument/2006/relationships" xmlns:p="http://schemas.openxmlformats.org/presentationml/2006/main">
   <p:cSld>
     <p:spTree>
       <p:nvGrpSpPr>
@@ -866,7 +1000,7 @@
         <p:nvSpPr>
           <p:cNvPr id="84" name="PlaceHolder 1"/>
           <p:cNvSpPr>
-            <a:spLocks noGrp="1"/>
+            <a:spLocks noGrp="1" noRot="1" noChangeAspect="1"/>
           </p:cNvSpPr>
           <p:nvPr>
             <p:ph type="sldImg"/>
@@ -912,6 +1046,7 @@
           <a:bodyPr lIns="91440" tIns="45720" rIns="91440" bIns="45720" anchor="t">
             <a:noAutofit/>
           </a:bodyPr>
+          <a:lstStyle/>
           <a:p>
             <a:pPr indent="0" algn="l">
               <a:lnSpc>
@@ -930,14 +1065,6 @@
               </a:rPr>
               <a:t>Negative meaning more likely to cause employees to stay</a:t>
             </a:r>
-            <a:endParaRPr lang="en-US" sz="2000" b="0" u="none" strike="noStrike">
-              <a:solidFill>
-                <a:srgbClr val="000000"/>
-              </a:solidFill>
-              <a:effectLst/>
-              <a:uFillTx/>
-              <a:latin typeface="Arial"/>
-            </a:endParaRPr>
           </a:p>
         </p:txBody>
       </p:sp>
@@ -1000,7 +1127,7 @@
                 <a:uFillTx/>
                 <a:latin typeface="Times New Roman"/>
               </a:rPr>
-              <a:t>&lt;number&gt;</a:t>
+              <a:t>14</a:t>
             </a:fld>
             <a:endParaRPr lang="en-US" sz="1200" b="0" u="none" strike="noStrike">
               <a:solidFill>
@@ -1015,17 +1142,21 @@
       </p:sp>
     </p:spTree>
   </p:cSld>
+  <p:clrMapOvr>
+    <a:masterClrMapping/>
+  </p:clrMapOvr>
 </p:notes>
 </file>
 
 <file path=ppt/slideLayouts/slideLayout1.xml><?xml version="1.0" encoding="utf-8"?>
-<p:sldLayout xmlns:a="http://schemas.openxmlformats.org/drawingml/2006/main" xmlns:p="http://schemas.openxmlformats.org/presentationml/2006/main" xmlns:r="http://schemas.openxmlformats.org/officeDocument/2006/relationships" xmlns:p14="http://schemas.microsoft.com/office/powerpoint/2010/main" xmlns:p15="http://schemas.microsoft.com/office/powerpoint/2012/main" xmlns:mc="http://schemas.openxmlformats.org/markup-compatibility/2006" type="tx" preserve="1">
+<p:sldLayout xmlns:a="http://schemas.openxmlformats.org/drawingml/2006/main" xmlns:r="http://schemas.openxmlformats.org/officeDocument/2006/relationships" xmlns:p="http://schemas.openxmlformats.org/presentationml/2006/main" type="tx" preserve="1">
   <p:cSld name="Blueprint Plans">
     <p:bg>
       <p:bgPr>
         <a:solidFill>
           <a:srgbClr val="FFFFFF"/>
         </a:solidFill>
+        <a:effectLst/>
       </p:bgPr>
     </p:bg>
     <p:spTree>
@@ -1049,10 +1180,10 @@
           <p:nvPr/>
         </p:nvPicPr>
         <p:blipFill>
-          <a:blip r:embed="rId2">
+          <a:blip>
             <a:extLst>
               <a:ext uri="{96DAC541-7B7A-43D3-8B79-37D633B846F1}">
-                <asvg:svgBlip xmlns:asvg="http://schemas.microsoft.com/office/drawing/2016/SVG/main" r:embed="rId3"/>
+                <asvg:svgBlip xmlns:asvg="http://schemas.microsoft.com/office/drawing/2016/SVG/main" r:embed="rId2"/>
               </a:ext>
             </a:extLst>
           </a:blip>
@@ -1823,7 +1954,7 @@
                 <a:latin typeface="Arial"/>
                 <a:ea typeface="DejaVu Sans"/>
               </a:rPr>
-              <a:t>&lt;number&gt;</a:t>
+              <a:t>‹#›</a:t>
             </a:fld>
             <a:endParaRPr lang="en-US" sz="1400" b="0" u="none" strike="noStrike">
               <a:solidFill>
@@ -1838,17 +1969,21 @@
       </p:sp>
     </p:spTree>
   </p:cSld>
+  <p:clrMapOvr>
+    <a:masterClrMapping/>
+  </p:clrMapOvr>
 </p:sldLayout>
 </file>
 
 <file path=ppt/slideLayouts/slideLayout2.xml><?xml version="1.0" encoding="utf-8"?>
-<p:sldLayout xmlns:a="http://schemas.openxmlformats.org/drawingml/2006/main" xmlns:p="http://schemas.openxmlformats.org/presentationml/2006/main" xmlns:r="http://schemas.openxmlformats.org/officeDocument/2006/relationships" xmlns:p14="http://schemas.microsoft.com/office/powerpoint/2010/main" xmlns:p15="http://schemas.microsoft.com/office/powerpoint/2012/main" xmlns:mc="http://schemas.openxmlformats.org/markup-compatibility/2006" type="title" preserve="1">
+<p:sldLayout xmlns:a="http://schemas.openxmlformats.org/drawingml/2006/main" xmlns:r="http://schemas.openxmlformats.org/officeDocument/2006/relationships" xmlns:p="http://schemas.openxmlformats.org/presentationml/2006/main" type="title" preserve="1">
   <p:cSld name="Default">
     <p:bg>
       <p:bgPr>
         <a:solidFill>
           <a:srgbClr val="FFFFFF"/>
         </a:solidFill>
+        <a:effectLst/>
       </p:bgPr>
     </p:bg>
     <p:spTree>
@@ -1872,10 +2007,10 @@
           <p:nvPr/>
         </p:nvPicPr>
         <p:blipFill>
-          <a:blip r:embed="rId2">
+          <a:blip>
             <a:extLst>
               <a:ext uri="{96DAC541-7B7A-43D3-8B79-37D633B846F1}">
-                <asvg:svgBlip xmlns:asvg="http://schemas.microsoft.com/office/drawing/2016/SVG/main" r:embed="rId3"/>
+                <asvg:svgBlip xmlns:asvg="http://schemas.microsoft.com/office/drawing/2016/SVG/main" r:embed="rId2"/>
               </a:ext>
             </a:extLst>
           </a:blip>
@@ -1962,31 +2097,7 @@
                 <a:latin typeface="Arial"/>
                 <a:ea typeface="DejaVu Sans"/>
               </a:rPr>
-              <a:t>Click to edit </a:t>
-            </a:r>
-            <a:r>
-              <a:rPr lang="en-US" sz="4400" b="0" u="none" strike="noStrike">
-                <a:solidFill>
-                  <a:srgbClr val="FFFFFF"/>
-                </a:solidFill>
-                <a:effectLst/>
-                <a:uFillTx/>
-                <a:latin typeface="Arial"/>
-                <a:ea typeface="DejaVu Sans"/>
-              </a:rPr>
-              <a:t>the title text </a:t>
-            </a:r>
-            <a:r>
-              <a:rPr lang="en-US" sz="4400" b="0" u="none" strike="noStrike">
-                <a:solidFill>
-                  <a:srgbClr val="FFFFFF"/>
-                </a:solidFill>
-                <a:effectLst/>
-                <a:uFillTx/>
-                <a:latin typeface="Arial"/>
-                <a:ea typeface="DejaVu Sans"/>
-              </a:rPr>
-              <a:t>format</a:t>
+              <a:t>Click to edit the title text format</a:t>
             </a:r>
             <a:endParaRPr lang="en-US" sz="4400" b="0" u="none" strike="noStrike">
               <a:solidFill>
@@ -2670,7 +2781,7 @@
                 <a:latin typeface="Arial"/>
                 <a:ea typeface="DejaVu Sans"/>
               </a:rPr>
-              <a:t>&lt;number&gt;</a:t>
+              <a:t>‹#›</a:t>
             </a:fld>
             <a:endParaRPr lang="en-US" sz="1400" b="0" u="none" strike="noStrike">
               <a:solidFill>
@@ -2685,17 +2796,21 @@
       </p:sp>
     </p:spTree>
   </p:cSld>
+  <p:clrMapOvr>
+    <a:masterClrMapping/>
+  </p:clrMapOvr>
 </p:sldLayout>
 </file>
 
 <file path=ppt/slideLayouts/slideLayout3.xml><?xml version="1.0" encoding="utf-8"?>
-<p:sldLayout xmlns:a="http://schemas.openxmlformats.org/drawingml/2006/main" xmlns:p="http://schemas.openxmlformats.org/presentationml/2006/main" xmlns:r="http://schemas.openxmlformats.org/officeDocument/2006/relationships" xmlns:p14="http://schemas.microsoft.com/office/powerpoint/2010/main" xmlns:p15="http://schemas.microsoft.com/office/powerpoint/2012/main" xmlns:mc="http://schemas.openxmlformats.org/markup-compatibility/2006" type="tx" preserve="1">
+<p:sldLayout xmlns:a="http://schemas.openxmlformats.org/drawingml/2006/main" xmlns:r="http://schemas.openxmlformats.org/officeDocument/2006/relationships" xmlns:p="http://schemas.openxmlformats.org/presentationml/2006/main" type="tx" preserve="1">
   <p:cSld name="Standard">
     <p:bg>
       <p:bgPr>
         <a:solidFill>
           <a:srgbClr val="FFFFFF"/>
         </a:solidFill>
+        <a:effectLst/>
       </p:bgPr>
     </p:bg>
     <p:spTree>
@@ -2719,10 +2834,10 @@
           <p:nvPr/>
         </p:nvPicPr>
         <p:blipFill>
-          <a:blip r:embed="rId2">
+          <a:blip>
             <a:extLst>
               <a:ext uri="{96DAC541-7B7A-43D3-8B79-37D633B846F1}">
-                <asvg:svgBlip xmlns:asvg="http://schemas.microsoft.com/office/drawing/2016/SVG/main" r:embed="rId3"/>
+                <asvg:svgBlip xmlns:asvg="http://schemas.microsoft.com/office/drawing/2016/SVG/main" r:embed="rId2"/>
               </a:ext>
             </a:extLst>
           </a:blip>
@@ -2809,19 +2924,7 @@
                 <a:latin typeface="Arial"/>
                 <a:ea typeface="DejaVu Sans"/>
               </a:rPr>
-              <a:t>Click to edit the </a:t>
-            </a:r>
-            <a:r>
-              <a:rPr lang="en-US" sz="3300" b="0" u="none" strike="noStrike">
-                <a:solidFill>
-                  <a:srgbClr val="000000"/>
-                </a:solidFill>
-                <a:effectLst/>
-                <a:uFillTx/>
-                <a:latin typeface="Arial"/>
-                <a:ea typeface="DejaVu Sans"/>
-              </a:rPr>
-              <a:t>title text format</a:t>
+              <a:t>Click to edit the title text format</a:t>
             </a:r>
             <a:endParaRPr lang="en-US" sz="3300" b="0" u="none" strike="noStrike">
               <a:solidFill>
@@ -3505,7 +3608,7 @@
                 <a:latin typeface="Arial"/>
                 <a:ea typeface="DejaVu Sans"/>
               </a:rPr>
-              <a:t>&lt;number&gt;</a:t>
+              <a:t>‹#›</a:t>
             </a:fld>
             <a:endParaRPr lang="en-US" sz="1400" b="0" u="none" strike="noStrike">
               <a:solidFill>
@@ -3520,12 +3623,20 @@
       </p:sp>
     </p:spTree>
   </p:cSld>
+  <p:clrMapOvr>
+    <a:masterClrMapping/>
+  </p:clrMapOvr>
 </p:sldLayout>
 </file>
 
 <file path=ppt/slideMasters/slideMaster1.xml><?xml version="1.0" encoding="utf-8"?>
-<p:sldMaster xmlns:a="http://schemas.openxmlformats.org/drawingml/2006/main" xmlns:p="http://schemas.openxmlformats.org/presentationml/2006/main" xmlns:r="http://schemas.openxmlformats.org/officeDocument/2006/relationships" xmlns:p14="http://schemas.microsoft.com/office/powerpoint/2010/main" xmlns:p15="http://schemas.microsoft.com/office/powerpoint/2012/main" xmlns:mc="http://schemas.openxmlformats.org/markup-compatibility/2006">
+<p:sldMaster xmlns:a="http://schemas.openxmlformats.org/drawingml/2006/main" xmlns:r="http://schemas.openxmlformats.org/officeDocument/2006/relationships" xmlns:p="http://schemas.openxmlformats.org/presentationml/2006/main">
   <p:cSld>
+    <p:bg>
+      <p:bgRef idx="1001">
+        <a:schemeClr val="bg1"/>
+      </p:bgRef>
+    </p:bg>
     <p:spTree>
       <p:nvGrpSpPr>
         <p:cNvPr id="1" name=""/>
@@ -3544,15 +3655,295 @@
   </p:cSld>
   <p:clrMap bg1="lt1" tx1="dk1" bg2="lt2" tx2="dk2" accent1="accent1" accent2="accent2" accent3="accent3" accent4="accent4" accent5="accent5" accent6="accent6" hlink="hlink" folHlink="folHlink"/>
   <p:sldLayoutIdLst>
-    <p:sldLayoutId id="2147483649" r:id="rId2"/>
-    <p:sldLayoutId id="2147483650" r:id="rId3"/>
-    <p:sldLayoutId id="2147483651" r:id="rId4"/>
+    <p:sldLayoutId id="2147483649" r:id="rId1"/>
+    <p:sldLayoutId id="2147483650" r:id="rId2"/>
+    <p:sldLayoutId id="2147483651" r:id="rId3"/>
   </p:sldLayoutIdLst>
+  <p:txStyles>
+    <p:titleStyle>
+      <a:lvl1pPr algn="l" defTabSz="914400" rtl="0" eaLnBrk="1" latinLnBrk="0" hangingPunct="1">
+        <a:lnSpc>
+          <a:spcPct val="90000"/>
+        </a:lnSpc>
+        <a:spcBef>
+          <a:spcPct val="0"/>
+        </a:spcBef>
+        <a:buNone/>
+        <a:defRPr sz="4400" kern="1200">
+          <a:solidFill>
+            <a:schemeClr val="tx1"/>
+          </a:solidFill>
+          <a:latin typeface="+mj-lt"/>
+          <a:ea typeface="+mj-ea"/>
+          <a:cs typeface="+mj-cs"/>
+        </a:defRPr>
+      </a:lvl1pPr>
+    </p:titleStyle>
+    <p:bodyStyle>
+      <a:lvl1pPr marL="228600" indent="-228600" algn="l" defTabSz="914400" rtl="0" eaLnBrk="1" latinLnBrk="0" hangingPunct="1">
+        <a:lnSpc>
+          <a:spcPct val="90000"/>
+        </a:lnSpc>
+        <a:spcBef>
+          <a:spcPts val="1000"/>
+        </a:spcBef>
+        <a:buFont typeface="Arial" panose="020B0604020202020204" pitchFamily="34" charset="0"/>
+        <a:buChar char="•"/>
+        <a:defRPr sz="2800" kern="1200">
+          <a:solidFill>
+            <a:schemeClr val="tx1"/>
+          </a:solidFill>
+          <a:latin typeface="+mn-lt"/>
+          <a:ea typeface="+mn-ea"/>
+          <a:cs typeface="+mn-cs"/>
+        </a:defRPr>
+      </a:lvl1pPr>
+      <a:lvl2pPr marL="685800" indent="-228600" algn="l" defTabSz="914400" rtl="0" eaLnBrk="1" latinLnBrk="0" hangingPunct="1">
+        <a:lnSpc>
+          <a:spcPct val="90000"/>
+        </a:lnSpc>
+        <a:spcBef>
+          <a:spcPts val="500"/>
+        </a:spcBef>
+        <a:buFont typeface="Arial" panose="020B0604020202020204" pitchFamily="34" charset="0"/>
+        <a:buChar char="•"/>
+        <a:defRPr sz="2400" kern="1200">
+          <a:solidFill>
+            <a:schemeClr val="tx1"/>
+          </a:solidFill>
+          <a:latin typeface="+mn-lt"/>
+          <a:ea typeface="+mn-ea"/>
+          <a:cs typeface="+mn-cs"/>
+        </a:defRPr>
+      </a:lvl2pPr>
+      <a:lvl3pPr marL="1143000" indent="-228600" algn="l" defTabSz="914400" rtl="0" eaLnBrk="1" latinLnBrk="0" hangingPunct="1">
+        <a:lnSpc>
+          <a:spcPct val="90000"/>
+        </a:lnSpc>
+        <a:spcBef>
+          <a:spcPts val="500"/>
+        </a:spcBef>
+        <a:buFont typeface="Arial" panose="020B0604020202020204" pitchFamily="34" charset="0"/>
+        <a:buChar char="•"/>
+        <a:defRPr sz="2000" kern="1200">
+          <a:solidFill>
+            <a:schemeClr val="tx1"/>
+          </a:solidFill>
+          <a:latin typeface="+mn-lt"/>
+          <a:ea typeface="+mn-ea"/>
+          <a:cs typeface="+mn-cs"/>
+        </a:defRPr>
+      </a:lvl3pPr>
+      <a:lvl4pPr marL="1600200" indent="-228600" algn="l" defTabSz="914400" rtl="0" eaLnBrk="1" latinLnBrk="0" hangingPunct="1">
+        <a:lnSpc>
+          <a:spcPct val="90000"/>
+        </a:lnSpc>
+        <a:spcBef>
+          <a:spcPts val="500"/>
+        </a:spcBef>
+        <a:buFont typeface="Arial" panose="020B0604020202020204" pitchFamily="34" charset="0"/>
+        <a:buChar char="•"/>
+        <a:defRPr sz="1800" kern="1200">
+          <a:solidFill>
+            <a:schemeClr val="tx1"/>
+          </a:solidFill>
+          <a:latin typeface="+mn-lt"/>
+          <a:ea typeface="+mn-ea"/>
+          <a:cs typeface="+mn-cs"/>
+        </a:defRPr>
+      </a:lvl4pPr>
+      <a:lvl5pPr marL="2057400" indent="-228600" algn="l" defTabSz="914400" rtl="0" eaLnBrk="1" latinLnBrk="0" hangingPunct="1">
+        <a:lnSpc>
+          <a:spcPct val="90000"/>
+        </a:lnSpc>
+        <a:spcBef>
+          <a:spcPts val="500"/>
+        </a:spcBef>
+        <a:buFont typeface="Arial" panose="020B0604020202020204" pitchFamily="34" charset="0"/>
+        <a:buChar char="•"/>
+        <a:defRPr sz="1800" kern="1200">
+          <a:solidFill>
+            <a:schemeClr val="tx1"/>
+          </a:solidFill>
+          <a:latin typeface="+mn-lt"/>
+          <a:ea typeface="+mn-ea"/>
+          <a:cs typeface="+mn-cs"/>
+        </a:defRPr>
+      </a:lvl5pPr>
+      <a:lvl6pPr marL="2514600" indent="-228600" algn="l" defTabSz="914400" rtl="0" eaLnBrk="1" latinLnBrk="0" hangingPunct="1">
+        <a:lnSpc>
+          <a:spcPct val="90000"/>
+        </a:lnSpc>
+        <a:spcBef>
+          <a:spcPts val="500"/>
+        </a:spcBef>
+        <a:buFont typeface="Arial" panose="020B0604020202020204" pitchFamily="34" charset="0"/>
+        <a:buChar char="•"/>
+        <a:defRPr sz="1800" kern="1200">
+          <a:solidFill>
+            <a:schemeClr val="tx1"/>
+          </a:solidFill>
+          <a:latin typeface="+mn-lt"/>
+          <a:ea typeface="+mn-ea"/>
+          <a:cs typeface="+mn-cs"/>
+        </a:defRPr>
+      </a:lvl6pPr>
+      <a:lvl7pPr marL="2971800" indent="-228600" algn="l" defTabSz="914400" rtl="0" eaLnBrk="1" latinLnBrk="0" hangingPunct="1">
+        <a:lnSpc>
+          <a:spcPct val="90000"/>
+        </a:lnSpc>
+        <a:spcBef>
+          <a:spcPts val="500"/>
+        </a:spcBef>
+        <a:buFont typeface="Arial" panose="020B0604020202020204" pitchFamily="34" charset="0"/>
+        <a:buChar char="•"/>
+        <a:defRPr sz="1800" kern="1200">
+          <a:solidFill>
+            <a:schemeClr val="tx1"/>
+          </a:solidFill>
+          <a:latin typeface="+mn-lt"/>
+          <a:ea typeface="+mn-ea"/>
+          <a:cs typeface="+mn-cs"/>
+        </a:defRPr>
+      </a:lvl7pPr>
+      <a:lvl8pPr marL="3429000" indent="-228600" algn="l" defTabSz="914400" rtl="0" eaLnBrk="1" latinLnBrk="0" hangingPunct="1">
+        <a:lnSpc>
+          <a:spcPct val="90000"/>
+        </a:lnSpc>
+        <a:spcBef>
+          <a:spcPts val="500"/>
+        </a:spcBef>
+        <a:buFont typeface="Arial" panose="020B0604020202020204" pitchFamily="34" charset="0"/>
+        <a:buChar char="•"/>
+        <a:defRPr sz="1800" kern="1200">
+          <a:solidFill>
+            <a:schemeClr val="tx1"/>
+          </a:solidFill>
+          <a:latin typeface="+mn-lt"/>
+          <a:ea typeface="+mn-ea"/>
+          <a:cs typeface="+mn-cs"/>
+        </a:defRPr>
+      </a:lvl8pPr>
+      <a:lvl9pPr marL="3886200" indent="-228600" algn="l" defTabSz="914400" rtl="0" eaLnBrk="1" latinLnBrk="0" hangingPunct="1">
+        <a:lnSpc>
+          <a:spcPct val="90000"/>
+        </a:lnSpc>
+        <a:spcBef>
+          <a:spcPts val="500"/>
+        </a:spcBef>
+        <a:buFont typeface="Arial" panose="020B0604020202020204" pitchFamily="34" charset="0"/>
+        <a:buChar char="•"/>
+        <a:defRPr sz="1800" kern="1200">
+          <a:solidFill>
+            <a:schemeClr val="tx1"/>
+          </a:solidFill>
+          <a:latin typeface="+mn-lt"/>
+          <a:ea typeface="+mn-ea"/>
+          <a:cs typeface="+mn-cs"/>
+        </a:defRPr>
+      </a:lvl9pPr>
+    </p:bodyStyle>
+    <p:otherStyle>
+      <a:defPPr>
+        <a:defRPr lang="en-US"/>
+      </a:defPPr>
+      <a:lvl1pPr marL="0" algn="l" defTabSz="914400" rtl="0" eaLnBrk="1" latinLnBrk="0" hangingPunct="1">
+        <a:defRPr sz="1800" kern="1200">
+          <a:solidFill>
+            <a:schemeClr val="tx1"/>
+          </a:solidFill>
+          <a:latin typeface="+mn-lt"/>
+          <a:ea typeface="+mn-ea"/>
+          <a:cs typeface="+mn-cs"/>
+        </a:defRPr>
+      </a:lvl1pPr>
+      <a:lvl2pPr marL="457200" algn="l" defTabSz="914400" rtl="0" eaLnBrk="1" latinLnBrk="0" hangingPunct="1">
+        <a:defRPr sz="1800" kern="1200">
+          <a:solidFill>
+            <a:schemeClr val="tx1"/>
+          </a:solidFill>
+          <a:latin typeface="+mn-lt"/>
+          <a:ea typeface="+mn-ea"/>
+          <a:cs typeface="+mn-cs"/>
+        </a:defRPr>
+      </a:lvl2pPr>
+      <a:lvl3pPr marL="914400" algn="l" defTabSz="914400" rtl="0" eaLnBrk="1" latinLnBrk="0" hangingPunct="1">
+        <a:defRPr sz="1800" kern="1200">
+          <a:solidFill>
+            <a:schemeClr val="tx1"/>
+          </a:solidFill>
+          <a:latin typeface="+mn-lt"/>
+          <a:ea typeface="+mn-ea"/>
+          <a:cs typeface="+mn-cs"/>
+        </a:defRPr>
+      </a:lvl3pPr>
+      <a:lvl4pPr marL="1371600" algn="l" defTabSz="914400" rtl="0" eaLnBrk="1" latinLnBrk="0" hangingPunct="1">
+        <a:defRPr sz="1800" kern="1200">
+          <a:solidFill>
+            <a:schemeClr val="tx1"/>
+          </a:solidFill>
+          <a:latin typeface="+mn-lt"/>
+          <a:ea typeface="+mn-ea"/>
+          <a:cs typeface="+mn-cs"/>
+        </a:defRPr>
+      </a:lvl4pPr>
+      <a:lvl5pPr marL="1828800" algn="l" defTabSz="914400" rtl="0" eaLnBrk="1" latinLnBrk="0" hangingPunct="1">
+        <a:defRPr sz="1800" kern="1200">
+          <a:solidFill>
+            <a:schemeClr val="tx1"/>
+          </a:solidFill>
+          <a:latin typeface="+mn-lt"/>
+          <a:ea typeface="+mn-ea"/>
+          <a:cs typeface="+mn-cs"/>
+        </a:defRPr>
+      </a:lvl5pPr>
+      <a:lvl6pPr marL="2286000" algn="l" defTabSz="914400" rtl="0" eaLnBrk="1" latinLnBrk="0" hangingPunct="1">
+        <a:defRPr sz="1800" kern="1200">
+          <a:solidFill>
+            <a:schemeClr val="tx1"/>
+          </a:solidFill>
+          <a:latin typeface="+mn-lt"/>
+          <a:ea typeface="+mn-ea"/>
+          <a:cs typeface="+mn-cs"/>
+        </a:defRPr>
+      </a:lvl6pPr>
+      <a:lvl7pPr marL="2743200" algn="l" defTabSz="914400" rtl="0" eaLnBrk="1" latinLnBrk="0" hangingPunct="1">
+        <a:defRPr sz="1800" kern="1200">
+          <a:solidFill>
+            <a:schemeClr val="tx1"/>
+          </a:solidFill>
+          <a:latin typeface="+mn-lt"/>
+          <a:ea typeface="+mn-ea"/>
+          <a:cs typeface="+mn-cs"/>
+        </a:defRPr>
+      </a:lvl7pPr>
+      <a:lvl8pPr marL="3200400" algn="l" defTabSz="914400" rtl="0" eaLnBrk="1" latinLnBrk="0" hangingPunct="1">
+        <a:defRPr sz="1800" kern="1200">
+          <a:solidFill>
+            <a:schemeClr val="tx1"/>
+          </a:solidFill>
+          <a:latin typeface="+mn-lt"/>
+          <a:ea typeface="+mn-ea"/>
+          <a:cs typeface="+mn-cs"/>
+        </a:defRPr>
+      </a:lvl8pPr>
+      <a:lvl9pPr marL="3657600" algn="l" defTabSz="914400" rtl="0" eaLnBrk="1" latinLnBrk="0" hangingPunct="1">
+        <a:defRPr sz="1800" kern="1200">
+          <a:solidFill>
+            <a:schemeClr val="tx1"/>
+          </a:solidFill>
+          <a:latin typeface="+mn-lt"/>
+          <a:ea typeface="+mn-ea"/>
+          <a:cs typeface="+mn-cs"/>
+        </a:defRPr>
+      </a:lvl9pPr>
+    </p:otherStyle>
+  </p:txStyles>
 </p:sldMaster>
 </file>
 
 <file path=ppt/slides/slide1.xml><?xml version="1.0" encoding="utf-8"?>
-<p:sld xmlns:a="http://schemas.openxmlformats.org/drawingml/2006/main" xmlns:p="http://schemas.openxmlformats.org/presentationml/2006/main" xmlns:r="http://schemas.openxmlformats.org/officeDocument/2006/relationships" xmlns:p14="http://schemas.microsoft.com/office/powerpoint/2010/main" xmlns:p15="http://schemas.microsoft.com/office/powerpoint/2012/main" xmlns:mc="http://schemas.openxmlformats.org/markup-compatibility/2006">
+<p:sld xmlns:a="http://schemas.openxmlformats.org/drawingml/2006/main" xmlns:r="http://schemas.openxmlformats.org/officeDocument/2006/relationships" xmlns:p="http://schemas.openxmlformats.org/presentationml/2006/main">
   <p:cSld>
     <p:spTree>
       <p:nvGrpSpPr>
@@ -3595,6 +3986,7 @@
           <a:bodyPr lIns="0" tIns="0" rIns="0" bIns="0" anchor="ctr">
             <a:spAutoFit/>
           </a:bodyPr>
+          <a:lstStyle/>
           <a:p>
             <a:pPr indent="0" algn="ctr" defTabSz="914400">
               <a:lnSpc>
@@ -3670,6 +4062,7 @@
           <a:bodyPr lIns="0" tIns="0" rIns="0" bIns="0" anchor="ctr">
             <a:spAutoFit/>
           </a:bodyPr>
+          <a:lstStyle/>
           <a:p>
             <a:pPr marL="228600" indent="0" algn="ctr" defTabSz="914400">
               <a:lnSpc>
@@ -3810,19 +4203,14 @@
       </p:sp>
     </p:spTree>
   </p:cSld>
-  <mc:AlternateContent>
-    <mc:Choice Requires="p14">
-      <p:transition spd="slow" p14:dur="2000"/>
-    </mc:Choice>
-    <mc:Fallback>
-      <p:transition spd="slow"/>
-    </mc:Fallback>
-  </mc:AlternateContent>
+  <p:clrMapOvr>
+    <a:masterClrMapping/>
+  </p:clrMapOvr>
 </p:sld>
 </file>
 
 <file path=ppt/slides/slide10.xml><?xml version="1.0" encoding="utf-8"?>
-<p:sld xmlns:a="http://schemas.openxmlformats.org/drawingml/2006/main" xmlns:p="http://schemas.openxmlformats.org/presentationml/2006/main" xmlns:r="http://schemas.openxmlformats.org/officeDocument/2006/relationships" xmlns:p14="http://schemas.microsoft.com/office/powerpoint/2010/main" xmlns:p15="http://schemas.microsoft.com/office/powerpoint/2012/main" xmlns:mc="http://schemas.openxmlformats.org/markup-compatibility/2006">
+<p:sld xmlns:a="http://schemas.openxmlformats.org/drawingml/2006/main" xmlns:r="http://schemas.openxmlformats.org/officeDocument/2006/relationships" xmlns:p="http://schemas.openxmlformats.org/presentationml/2006/main">
   <p:cSld>
     <p:spTree>
       <p:nvGrpSpPr>
@@ -3865,6 +4253,7 @@
           <a:bodyPr lIns="0" tIns="0" rIns="0" bIns="0" anchor="ctr">
             <a:spAutoFit/>
           </a:bodyPr>
+          <a:lstStyle/>
           <a:p>
             <a:pPr indent="0" algn="ctr" defTabSz="914400">
               <a:lnSpc>
@@ -3925,6 +4314,7 @@
           <a:bodyPr lIns="0" tIns="0" rIns="0" bIns="0" anchor="t">
             <a:normAutofit fontScale="92500" lnSpcReduction="9999"/>
           </a:bodyPr>
+          <a:lstStyle/>
           <a:p>
             <a:pPr marL="432000" indent="-324000" algn="l" defTabSz="914400">
               <a:lnSpc>
@@ -3950,19 +4340,7 @@
                 <a:latin typeface="Arial"/>
                 <a:ea typeface="DejaVu Sans"/>
               </a:rPr>
-              <a:t>Age is somewhat correlated with total working years, but not as much </a:t>
-            </a:r>
-            <a:r>
-              <a:rPr lang="en-US" sz="2400" b="0" u="none" strike="noStrike">
-                <a:solidFill>
-                  <a:srgbClr val="000000"/>
-                </a:solidFill>
-                <a:effectLst/>
-                <a:uFillTx/>
-                <a:latin typeface="Arial"/>
-                <a:ea typeface="DejaVu Sans"/>
-              </a:rPr>
-              <a:t>as expected.</a:t>
+              <a:t>Age is somewhat correlated with total working years, but not as much as expected.</a:t>
             </a:r>
             <a:endParaRPr lang="en-US" sz="2400" b="0" u="none" strike="noStrike">
               <a:solidFill>
@@ -3982,7 +4360,7 @@
           <p:nvPr/>
         </p:nvPicPr>
         <p:blipFill>
-          <a:blip r:embed="rId1"/>
+          <a:blip r:embed="rId2"/>
           <a:stretch/>
         </p:blipFill>
         <p:spPr>
@@ -4001,19 +4379,14 @@
       </p:pic>
     </p:spTree>
   </p:cSld>
-  <mc:AlternateContent>
-    <mc:Choice Requires="p14">
-      <p:transition spd="slow" p14:dur="2000"/>
-    </mc:Choice>
-    <mc:Fallback>
-      <p:transition spd="slow"/>
-    </mc:Fallback>
-  </mc:AlternateContent>
+  <p:clrMapOvr>
+    <a:masterClrMapping/>
+  </p:clrMapOvr>
 </p:sld>
 </file>
 
 <file path=ppt/slides/slide11.xml><?xml version="1.0" encoding="utf-8"?>
-<p:sld xmlns:a="http://schemas.openxmlformats.org/drawingml/2006/main" xmlns:p="http://schemas.openxmlformats.org/presentationml/2006/main" xmlns:r="http://schemas.openxmlformats.org/officeDocument/2006/relationships" xmlns:p14="http://schemas.microsoft.com/office/powerpoint/2010/main" xmlns:p15="http://schemas.microsoft.com/office/powerpoint/2012/main" xmlns:mc="http://schemas.openxmlformats.org/markup-compatibility/2006">
+<p:sld xmlns:a="http://schemas.openxmlformats.org/drawingml/2006/main" xmlns:r="http://schemas.openxmlformats.org/officeDocument/2006/relationships" xmlns:p="http://schemas.openxmlformats.org/presentationml/2006/main">
   <p:cSld>
     <p:spTree>
       <p:nvGrpSpPr>
@@ -4056,6 +4429,7 @@
           <a:bodyPr lIns="0" tIns="0" rIns="0" bIns="0" anchor="ctr">
             <a:spAutoFit/>
           </a:bodyPr>
+          <a:lstStyle/>
           <a:p>
             <a:pPr indent="0" algn="ctr" defTabSz="914400">
               <a:lnSpc>
@@ -4116,6 +4490,7 @@
           <a:bodyPr lIns="0" tIns="0" rIns="0" bIns="0" anchor="t">
             <a:normAutofit/>
           </a:bodyPr>
+          <a:lstStyle/>
           <a:p>
             <a:pPr marL="432000" indent="-324000" algn="l" defTabSz="914400">
               <a:lnSpc>
@@ -4164,7 +4539,7 @@
           <p:nvPr/>
         </p:nvPicPr>
         <p:blipFill>
-          <a:blip r:embed="rId1"/>
+          <a:blip r:embed="rId3"/>
           <a:stretch/>
         </p:blipFill>
         <p:spPr>
@@ -4183,19 +4558,14 @@
       </p:pic>
     </p:spTree>
   </p:cSld>
-  <mc:AlternateContent>
-    <mc:Choice Requires="p14">
-      <p:transition spd="slow" p14:dur="2000"/>
-    </mc:Choice>
-    <mc:Fallback>
-      <p:transition spd="slow"/>
-    </mc:Fallback>
-  </mc:AlternateContent>
+  <p:clrMapOvr>
+    <a:masterClrMapping/>
+  </p:clrMapOvr>
 </p:sld>
 </file>
 
 <file path=ppt/slides/slide12.xml><?xml version="1.0" encoding="utf-8"?>
-<p:sld xmlns:a="http://schemas.openxmlformats.org/drawingml/2006/main" xmlns:p="http://schemas.openxmlformats.org/presentationml/2006/main" xmlns:r="http://schemas.openxmlformats.org/officeDocument/2006/relationships" xmlns:p14="http://schemas.microsoft.com/office/powerpoint/2010/main" xmlns:p15="http://schemas.microsoft.com/office/powerpoint/2012/main" xmlns:mc="http://schemas.openxmlformats.org/markup-compatibility/2006">
+<p:sld xmlns:a="http://schemas.openxmlformats.org/drawingml/2006/main" xmlns:r="http://schemas.openxmlformats.org/officeDocument/2006/relationships" xmlns:p="http://schemas.openxmlformats.org/presentationml/2006/main">
   <p:cSld>
     <p:spTree>
       <p:nvGrpSpPr>
@@ -4238,6 +4608,7 @@
           <a:bodyPr lIns="0" tIns="0" rIns="0" bIns="0" anchor="ctr">
             <a:spAutoFit/>
           </a:bodyPr>
+          <a:lstStyle/>
           <a:p>
             <a:pPr indent="0" algn="ctr" defTabSz="914400">
               <a:lnSpc>
@@ -4259,14 +4630,6 @@
               </a:rPr>
               <a:t>Model Introduction</a:t>
             </a:r>
-            <a:endParaRPr lang="en-US" sz="3300" b="0" u="none" strike="noStrike">
-              <a:solidFill>
-                <a:srgbClr val="000000"/>
-              </a:solidFill>
-              <a:effectLst/>
-              <a:uFillTx/>
-              <a:latin typeface="Arial"/>
-            </a:endParaRPr>
           </a:p>
         </p:txBody>
       </p:sp>
@@ -4297,6 +4660,7 @@
           <a:bodyPr lIns="0" tIns="0" rIns="0" bIns="0" anchor="t">
             <a:normAutofit/>
           </a:bodyPr>
+          <a:lstStyle/>
           <a:p>
             <a:pPr marL="228600" indent="-228600" algn="l" defTabSz="914400">
               <a:lnSpc>
@@ -4313,24 +4677,31 @@
               <a:buChar char=""/>
             </a:pPr>
             <a:r>
-              <a:rPr lang="en-US" sz="2400" b="0" u="none" strike="noStrike">
-                <a:solidFill>
-                  <a:srgbClr val="000000"/>
-                </a:solidFill>
-                <a:effectLst/>
-                <a:uFillTx/>
-                <a:latin typeface="Arial"/>
-              </a:rPr>
-              <a:t>We decided to go with an Elastic Net model.</a:t>
-            </a:r>
-            <a:endParaRPr lang="en-US" sz="2400" b="0" u="none" strike="noStrike">
-              <a:solidFill>
-                <a:srgbClr val="000000"/>
-              </a:solidFill>
-              <a:effectLst/>
-              <a:uFillTx/>
-              <a:latin typeface="Arial"/>
-            </a:endParaRPr>
+              <a:rPr lang="en-US" sz="2400" b="0" u="none" strike="noStrike" dirty="0">
+                <a:solidFill>
+                  <a:srgbClr val="000000"/>
+                </a:solidFill>
+                <a:effectLst/>
+                <a:uFillTx/>
+                <a:latin typeface="Arial"/>
+              </a:rPr>
+              <a:t>Elastic Net was chosen </a:t>
+            </a:r>
+            <a:r>
+              <a:rPr lang="en-US" sz="2400" dirty="0"/>
+              <a:t>for the final </a:t>
+            </a:r>
+            <a:r>
+              <a:rPr lang="en-US" sz="2400" b="0" u="none" strike="noStrike" dirty="0">
+                <a:solidFill>
+                  <a:srgbClr val="000000"/>
+                </a:solidFill>
+                <a:effectLst/>
+                <a:uFillTx/>
+                <a:latin typeface="Arial"/>
+              </a:rPr>
+              <a:t>model.</a:t>
+            </a:r>
           </a:p>
           <a:p>
             <a:pPr marL="864000" lvl="1" indent="-324000" algn="l" defTabSz="914400">
@@ -4348,24 +4719,16 @@
               <a:buChar char=""/>
             </a:pPr>
             <a:r>
-              <a:rPr lang="en-US" sz="2100" b="0" u="none" strike="noStrike">
-                <a:solidFill>
-                  <a:srgbClr val="000000"/>
-                </a:solidFill>
-                <a:effectLst/>
-                <a:uFillTx/>
-                <a:latin typeface="Arial"/>
-              </a:rPr>
-              <a:t>We tried running the data set against an Elastic Net, Ridge, and LASSO models. We also considered interactions, but ultimately the added complexity didn’t provide any additional value.</a:t>
-            </a:r>
-            <a:endParaRPr lang="en-US" sz="2100" b="0" u="none" strike="noStrike">
-              <a:solidFill>
-                <a:srgbClr val="000000"/>
-              </a:solidFill>
-              <a:effectLst/>
-              <a:uFillTx/>
-              <a:latin typeface="Arial"/>
-            </a:endParaRPr>
+              <a:rPr lang="en-US" sz="2100" b="0" u="none" strike="noStrike" dirty="0">
+                <a:solidFill>
+                  <a:srgbClr val="000000"/>
+                </a:solidFill>
+                <a:effectLst/>
+                <a:uFillTx/>
+                <a:latin typeface="Arial"/>
+              </a:rPr>
+              <a:t>We ran the dataset against an Elastic Net, Ridge, and LASSO models. We also considered interactions, but ultimately the added complexity didn’t provide any additional value.</a:t>
+            </a:r>
           </a:p>
           <a:p>
             <a:pPr marL="864000" lvl="1" indent="-324000" algn="l" defTabSz="914400">
@@ -4383,7 +4746,7 @@
               <a:buChar char=""/>
             </a:pPr>
             <a:r>
-              <a:rPr lang="en-US" sz="2100" b="0" u="none" strike="noStrike">
+              <a:rPr lang="en-US" sz="2100" b="0" u="none" strike="noStrike" dirty="0">
                 <a:solidFill>
                   <a:srgbClr val="000000"/>
                 </a:solidFill>
@@ -4393,14 +4756,6 @@
               </a:rPr>
               <a:t>Elastic Net was selected because it achieved comparable utility to the other models while providing better accuracy and precision.</a:t>
             </a:r>
-            <a:endParaRPr lang="en-US" sz="2100" b="0" u="none" strike="noStrike">
-              <a:solidFill>
-                <a:srgbClr val="000000"/>
-              </a:solidFill>
-              <a:effectLst/>
-              <a:uFillTx/>
-              <a:latin typeface="Arial"/>
-            </a:endParaRPr>
           </a:p>
           <a:p>
             <a:pPr marL="1296000" lvl="2" indent="-288000" algn="l" defTabSz="914400">
@@ -4418,7 +4773,7 @@
               <a:buChar char=""/>
             </a:pPr>
             <a:r>
-              <a:rPr lang="en-US" sz="1800" b="0" u="none" strike="noStrike">
+              <a:rPr lang="en-US" sz="1800" b="0" u="none" strike="noStrike" dirty="0">
                 <a:solidFill>
                   <a:srgbClr val="000000"/>
                 </a:solidFill>
@@ -4428,398 +4783,19 @@
               </a:rPr>
               <a:t>Precision was important, because each false positive costs the company $8,000.</a:t>
             </a:r>
-            <a:endParaRPr lang="en-US" sz="1800" b="0" u="none" strike="noStrike">
-              <a:solidFill>
-                <a:srgbClr val="000000"/>
-              </a:solidFill>
-              <a:effectLst/>
-              <a:uFillTx/>
-              <a:latin typeface="Arial"/>
-            </a:endParaRPr>
           </a:p>
         </p:txBody>
       </p:sp>
     </p:spTree>
   </p:cSld>
-  <mc:AlternateContent>
-    <mc:Choice Requires="p14">
-      <p:transition spd="slow" p14:dur="2000"/>
-    </mc:Choice>
-    <mc:Fallback>
-      <p:transition spd="slow"/>
-    </mc:Fallback>
-  </mc:AlternateContent>
+  <p:clrMapOvr>
+    <a:masterClrMapping/>
+  </p:clrMapOvr>
 </p:sld>
 </file>
 
 <file path=ppt/slides/slide13.xml><?xml version="1.0" encoding="utf-8"?>
-<p:sld xmlns:a="http://schemas.openxmlformats.org/drawingml/2006/main" xmlns:p="http://schemas.openxmlformats.org/presentationml/2006/main" xmlns:r="http://schemas.openxmlformats.org/officeDocument/2006/relationships" xmlns:p14="http://schemas.microsoft.com/office/powerpoint/2010/main" xmlns:p15="http://schemas.microsoft.com/office/powerpoint/2012/main" xmlns:mc="http://schemas.openxmlformats.org/markup-compatibility/2006">
-  <p:cSld>
-    <p:spTree>
-      <p:nvGrpSpPr>
-        <p:cNvPr id="1" name=""/>
-        <p:cNvGrpSpPr/>
-        <p:nvPr/>
-      </p:nvGrpSpPr>
-      <p:grpSpPr>
-        <a:xfrm>
-          <a:off x="0" y="0"/>
-          <a:ext cx="0" cy="0"/>
-          <a:chOff x="0" y="0"/>
-          <a:chExt cx="0" cy="0"/>
-        </a:xfrm>
-      </p:grpSpPr>
-      <p:sp>
-        <p:nvSpPr>
-          <p:cNvPr id="58" name="PlaceHolder 1"/>
-          <p:cNvSpPr>
-            <a:spLocks noGrp="1"/>
-          </p:cNvSpPr>
-          <p:nvPr>
-            <p:ph type="title"/>
-          </p:nvPr>
-        </p:nvSpPr>
-        <p:spPr>
-          <a:xfrm>
-            <a:off x="504000" y="225000"/>
-            <a:ext cx="9071280" cy="947520"/>
-          </a:xfrm>
-          <a:prstGeom prst="rect">
-            <a:avLst/>
-          </a:prstGeom>
-          <a:noFill/>
-          <a:ln w="0">
-            <a:noFill/>
-          </a:ln>
-        </p:spPr>
-        <p:txBody>
-          <a:bodyPr lIns="0" tIns="0" rIns="0" bIns="0" anchor="ctr">
-            <a:spAutoFit/>
-          </a:bodyPr>
-          <a:p>
-            <a:pPr indent="0" algn="ctr" defTabSz="914400">
-              <a:lnSpc>
-                <a:spcPct val="90000"/>
-              </a:lnSpc>
-              <a:buNone/>
-              <a:tabLst>
-                <a:tab pos="0" algn="l"/>
-              </a:tabLst>
-            </a:pPr>
-            <a:r>
-              <a:rPr lang="en-US" sz="3300" b="0" u="none" strike="noStrike">
-                <a:solidFill>
-                  <a:srgbClr val="000000"/>
-                </a:solidFill>
-                <a:effectLst/>
-                <a:uFillTx/>
-                <a:latin typeface="Arial"/>
-                <a:ea typeface="DejaVu Sans"/>
-              </a:rPr>
-              <a:t>Model Analysis</a:t>
-            </a:r>
-            <a:endParaRPr lang="en-US" sz="3300" b="0" u="none" strike="noStrike">
-              <a:solidFill>
-                <a:srgbClr val="000000"/>
-              </a:solidFill>
-              <a:effectLst/>
-              <a:uFillTx/>
-              <a:latin typeface="Arial"/>
-            </a:endParaRPr>
-          </a:p>
-        </p:txBody>
-      </p:sp>
-      <p:sp>
-        <p:nvSpPr>
-          <p:cNvPr id="59" name="PlaceHolder 2"/>
-          <p:cNvSpPr>
-            <a:spLocks noGrp="1"/>
-          </p:cNvSpPr>
-          <p:nvPr>
-            <p:ph/>
-          </p:nvPr>
-        </p:nvSpPr>
-        <p:spPr>
-          <a:xfrm>
-            <a:off x="504000" y="1326600"/>
-            <a:ext cx="9071280" cy="3287520"/>
-          </a:xfrm>
-          <a:prstGeom prst="rect">
-            <a:avLst/>
-          </a:prstGeom>
-          <a:noFill/>
-          <a:ln w="0">
-            <a:noFill/>
-          </a:ln>
-        </p:spPr>
-        <p:txBody>
-          <a:bodyPr lIns="0" tIns="0" rIns="0" bIns="0" anchor="t">
-            <a:normAutofit lnSpcReduction="9999"/>
-          </a:bodyPr>
-          <a:p>
-            <a:pPr indent="-228600" algn="l" defTabSz="914400">
-              <a:lnSpc>
-                <a:spcPct val="90000"/>
-              </a:lnSpc>
-              <a:spcBef>
-                <a:spcPts val="1060"/>
-              </a:spcBef>
-              <a:buClr>
-                <a:srgbClr val="000000"/>
-              </a:buClr>
-              <a:buSzPct val="45000"/>
-              <a:buFont typeface="Wingdings" charset="2"/>
-              <a:buChar char=""/>
-            </a:pPr>
-            <a:r>
-              <a:rPr lang="en-US" sz="2400" b="0" u="none" strike="noStrike">
-                <a:solidFill>
-                  <a:srgbClr val="000000"/>
-                </a:solidFill>
-                <a:effectLst/>
-                <a:uFillTx/>
-                <a:latin typeface="Arial"/>
-                <a:ea typeface="DejaVu Sans"/>
-              </a:rPr>
-              <a:t> We tried running the data set against an Elastic Net, Ridge, and </a:t>
-            </a:r>
-            <a:r>
-              <a:rPr lang="en-US" sz="2400" b="0" u="none" strike="noStrike">
-                <a:solidFill>
-                  <a:srgbClr val="000000"/>
-                </a:solidFill>
-                <a:effectLst/>
-                <a:uFillTx/>
-                <a:latin typeface="Arial"/>
-                <a:ea typeface="DejaVu Sans"/>
-              </a:rPr>
-              <a:t>LASSO models. We also considered interactions, but ultimately the </a:t>
-            </a:r>
-            <a:r>
-              <a:rPr lang="en-US" sz="2400" b="0" u="none" strike="noStrike">
-                <a:solidFill>
-                  <a:srgbClr val="000000"/>
-                </a:solidFill>
-                <a:effectLst/>
-                <a:uFillTx/>
-                <a:latin typeface="Arial"/>
-                <a:ea typeface="DejaVu Sans"/>
-              </a:rPr>
-              <a:t>added complexity didn’t provide any additional value.</a:t>
-            </a:r>
-            <a:endParaRPr lang="en-US" sz="2400" b="0" u="none" strike="noStrike">
-              <a:solidFill>
-                <a:srgbClr val="000000"/>
-              </a:solidFill>
-              <a:effectLst/>
-              <a:uFillTx/>
-              <a:latin typeface="Arial"/>
-            </a:endParaRPr>
-          </a:p>
-          <a:p>
-            <a:pPr indent="-228600" algn="l" defTabSz="914400">
-              <a:lnSpc>
-                <a:spcPct val="90000"/>
-              </a:lnSpc>
-              <a:spcBef>
-                <a:spcPts val="1060"/>
-              </a:spcBef>
-              <a:buClr>
-                <a:srgbClr val="000000"/>
-              </a:buClr>
-              <a:buSzPct val="45000"/>
-              <a:buFont typeface="Wingdings" charset="2"/>
-              <a:buChar char=""/>
-            </a:pPr>
-            <a:r>
-              <a:rPr lang="en-US" sz="2400" b="0" u="none" strike="noStrike">
-                <a:solidFill>
-                  <a:srgbClr val="000000"/>
-                </a:solidFill>
-                <a:effectLst/>
-                <a:uFillTx/>
-                <a:latin typeface="Arial"/>
-                <a:ea typeface="DejaVu Sans"/>
-              </a:rPr>
-              <a:t> Elastic Net provided the best overall balance of predictive </a:t>
-            </a:r>
-            <a:r>
-              <a:rPr lang="en-US" sz="2400" b="0" u="none" strike="noStrike">
-                <a:solidFill>
-                  <a:srgbClr val="000000"/>
-                </a:solidFill>
-                <a:effectLst/>
-                <a:uFillTx/>
-                <a:latin typeface="Arial"/>
-                <a:ea typeface="DejaVu Sans"/>
-              </a:rPr>
-              <a:t>performance and business value.</a:t>
-            </a:r>
-            <a:endParaRPr lang="en-US" sz="2400" b="0" u="none" strike="noStrike">
-              <a:solidFill>
-                <a:srgbClr val="000000"/>
-              </a:solidFill>
-              <a:effectLst/>
-              <a:uFillTx/>
-              <a:latin typeface="Arial"/>
-            </a:endParaRPr>
-          </a:p>
-          <a:p>
-            <a:pPr marL="457200" lvl="1" indent="-324000" algn="l" defTabSz="914400">
-              <a:lnSpc>
-                <a:spcPct val="90000"/>
-              </a:lnSpc>
-              <a:spcBef>
-                <a:spcPts val="850"/>
-              </a:spcBef>
-              <a:buClr>
-                <a:srgbClr val="000000"/>
-              </a:buClr>
-              <a:buSzPct val="75000"/>
-              <a:buFont typeface="Symbol" charset="2"/>
-              <a:buChar char=""/>
-            </a:pPr>
-            <a:r>
-              <a:rPr lang="en-US" sz="2400" b="0" u="none" strike="noStrike">
-                <a:solidFill>
-                  <a:srgbClr val="000000"/>
-                </a:solidFill>
-                <a:effectLst/>
-                <a:uFillTx/>
-                <a:latin typeface="Arial"/>
-                <a:ea typeface="DejaVu Sans"/>
-              </a:rPr>
-              <a:t>Highest cross-validated business utility (tied with Ridge)</a:t>
-            </a:r>
-            <a:endParaRPr lang="en-US" sz="2400" b="0" u="none" strike="noStrike">
-              <a:solidFill>
-                <a:srgbClr val="000000"/>
-              </a:solidFill>
-              <a:effectLst/>
-              <a:uFillTx/>
-              <a:latin typeface="Arial"/>
-            </a:endParaRPr>
-          </a:p>
-          <a:p>
-            <a:pPr marL="457200" lvl="1" indent="-324000" algn="l" defTabSz="914400">
-              <a:lnSpc>
-                <a:spcPct val="90000"/>
-              </a:lnSpc>
-              <a:spcBef>
-                <a:spcPts val="850"/>
-              </a:spcBef>
-              <a:buClr>
-                <a:srgbClr val="000000"/>
-              </a:buClr>
-              <a:buSzPct val="75000"/>
-              <a:buFont typeface="Symbol" charset="2"/>
-              <a:buChar char=""/>
-            </a:pPr>
-            <a:r>
-              <a:rPr lang="en-US" sz="2400" b="0" u="none" strike="noStrike">
-                <a:solidFill>
-                  <a:srgbClr val="000000"/>
-                </a:solidFill>
-                <a:effectLst/>
-                <a:uFillTx/>
-                <a:latin typeface="Arial"/>
-                <a:ea typeface="DejaVu Sans"/>
-              </a:rPr>
-              <a:t>Highest overall accuracy</a:t>
-            </a:r>
-            <a:endParaRPr lang="en-US" sz="2400" b="0" u="none" strike="noStrike">
-              <a:solidFill>
-                <a:srgbClr val="000000"/>
-              </a:solidFill>
-              <a:effectLst/>
-              <a:uFillTx/>
-              <a:latin typeface="Arial"/>
-            </a:endParaRPr>
-          </a:p>
-          <a:p>
-            <a:pPr marL="457200" lvl="1" indent="-324000" algn="l" defTabSz="914400">
-              <a:lnSpc>
-                <a:spcPct val="90000"/>
-              </a:lnSpc>
-              <a:spcBef>
-                <a:spcPts val="850"/>
-              </a:spcBef>
-              <a:buClr>
-                <a:srgbClr val="000000"/>
-              </a:buClr>
-              <a:buSzPct val="75000"/>
-              <a:buFont typeface="Symbol" charset="2"/>
-              <a:buChar char=""/>
-            </a:pPr>
-            <a:r>
-              <a:rPr lang="en-US" sz="2400" b="0" u="none" strike="noStrike">
-                <a:solidFill>
-                  <a:srgbClr val="000000"/>
-                </a:solidFill>
-                <a:effectLst/>
-                <a:uFillTx/>
-                <a:latin typeface="Arial"/>
-                <a:ea typeface="DejaVu Sans"/>
-              </a:rPr>
-              <a:t>Highest precision while maintaining an AUC comparable to the </a:t>
-            </a:r>
-            <a:r>
-              <a:rPr lang="en-US" sz="2400" b="0" u="none" strike="noStrike">
-                <a:solidFill>
-                  <a:srgbClr val="000000"/>
-                </a:solidFill>
-                <a:effectLst/>
-                <a:uFillTx/>
-                <a:latin typeface="Arial"/>
-                <a:ea typeface="DejaVu Sans"/>
-              </a:rPr>
-              <a:t>other models. </a:t>
-            </a:r>
-            <a:endParaRPr lang="en-US" sz="2400" b="0" u="none" strike="noStrike">
-              <a:solidFill>
-                <a:srgbClr val="000000"/>
-              </a:solidFill>
-              <a:effectLst/>
-              <a:uFillTx/>
-              <a:latin typeface="Arial"/>
-            </a:endParaRPr>
-          </a:p>
-          <a:p>
-            <a:pPr indent="0" algn="l" defTabSz="914400">
-              <a:lnSpc>
-                <a:spcPct val="90000"/>
-              </a:lnSpc>
-              <a:spcBef>
-                <a:spcPts val="1060"/>
-              </a:spcBef>
-              <a:buNone/>
-            </a:pPr>
-            <a:endParaRPr lang="en-US" sz="2400" b="0" u="none" strike="noStrike">
-              <a:solidFill>
-                <a:srgbClr val="000000"/>
-              </a:solidFill>
-              <a:effectLst/>
-              <a:uFillTx/>
-              <a:latin typeface="Arial"/>
-            </a:endParaRPr>
-          </a:p>
-        </p:txBody>
-      </p:sp>
-    </p:spTree>
-  </p:cSld>
-  <mc:AlternateContent>
-    <mc:Choice Requires="p14">
-      <p:transition spd="slow" p14:dur="2000"/>
-    </mc:Choice>
-    <mc:Fallback>
-      <p:transition spd="slow"/>
-    </mc:Fallback>
-  </mc:AlternateContent>
-</p:sld>
-</file>
-
-<file path=ppt/slides/slide14.xml><?xml version="1.0" encoding="utf-8"?>
-<p:sld xmlns:a="http://schemas.openxmlformats.org/drawingml/2006/main" xmlns:p="http://schemas.openxmlformats.org/presentationml/2006/main" xmlns:r="http://schemas.openxmlformats.org/officeDocument/2006/relationships" xmlns:p14="http://schemas.microsoft.com/office/powerpoint/2010/main" xmlns:p15="http://schemas.microsoft.com/office/powerpoint/2012/main" xmlns:mc="http://schemas.openxmlformats.org/markup-compatibility/2006">
+<p:sld xmlns:a="http://schemas.openxmlformats.org/drawingml/2006/main" xmlns:r="http://schemas.openxmlformats.org/officeDocument/2006/relationships" xmlns:p="http://schemas.openxmlformats.org/presentationml/2006/main">
   <p:cSld>
     <p:spTree>
       <p:nvGrpSpPr>
@@ -4862,6 +4838,7 @@
           <a:bodyPr lIns="0" tIns="0" rIns="0" bIns="0" anchor="ctr">
             <a:spAutoFit/>
           </a:bodyPr>
+          <a:lstStyle/>
           <a:p>
             <a:pPr indent="0" algn="ctr" defTabSz="914400">
               <a:lnSpc>
@@ -4902,7 +4879,7 @@
           <p:nvPr/>
         </p:nvPicPr>
         <p:blipFill>
-          <a:blip r:embed="rId1"/>
+          <a:blip r:embed="rId3"/>
           <a:stretch/>
         </p:blipFill>
         <p:spPr>
@@ -4921,19 +4898,14 @@
       </p:pic>
     </p:spTree>
   </p:cSld>
-  <mc:AlternateContent>
-    <mc:Choice Requires="p14">
-      <p:transition spd="slow" p14:dur="2000"/>
-    </mc:Choice>
-    <mc:Fallback>
-      <p:transition spd="slow"/>
-    </mc:Fallback>
-  </mc:AlternateContent>
+  <p:clrMapOvr>
+    <a:masterClrMapping/>
+  </p:clrMapOvr>
 </p:sld>
 </file>
 
-<file path=ppt/slides/slide15.xml><?xml version="1.0" encoding="utf-8"?>
-<p:sld xmlns:a="http://schemas.openxmlformats.org/drawingml/2006/main" xmlns:p="http://schemas.openxmlformats.org/presentationml/2006/main" xmlns:r="http://schemas.openxmlformats.org/officeDocument/2006/relationships" xmlns:p14="http://schemas.microsoft.com/office/powerpoint/2010/main" xmlns:p15="http://schemas.microsoft.com/office/powerpoint/2012/main" xmlns:mc="http://schemas.openxmlformats.org/markup-compatibility/2006">
+<file path=ppt/slides/slide14.xml><?xml version="1.0" encoding="utf-8"?>
+<p:sld xmlns:a="http://schemas.openxmlformats.org/drawingml/2006/main" xmlns:r="http://schemas.openxmlformats.org/officeDocument/2006/relationships" xmlns:p="http://schemas.openxmlformats.org/presentationml/2006/main">
   <p:cSld>
     <p:spTree>
       <p:nvGrpSpPr>
@@ -4976,6 +4948,7 @@
           <a:bodyPr lIns="0" tIns="0" rIns="0" bIns="0" anchor="ctr">
             <a:spAutoFit/>
           </a:bodyPr>
+          <a:lstStyle/>
           <a:p>
             <a:pPr indent="0" algn="ctr" defTabSz="914400">
               <a:lnSpc>
@@ -5016,7 +4989,7 @@
           <p:nvPr/>
         </p:nvPicPr>
         <p:blipFill>
-          <a:blip r:embed="rId1"/>
+          <a:blip r:embed="rId3"/>
           <a:stretch/>
         </p:blipFill>
         <p:spPr>
@@ -5035,19 +5008,14 @@
       </p:pic>
     </p:spTree>
   </p:cSld>
-  <mc:AlternateContent>
-    <mc:Choice Requires="p14">
-      <p:transition spd="slow" p14:dur="2000"/>
-    </mc:Choice>
-    <mc:Fallback>
-      <p:transition spd="slow"/>
-    </mc:Fallback>
-  </mc:AlternateContent>
+  <p:clrMapOvr>
+    <a:masterClrMapping/>
+  </p:clrMapOvr>
 </p:sld>
 </file>
 
-<file path=ppt/slides/slide16.xml><?xml version="1.0" encoding="utf-8"?>
-<p:sld xmlns:a="http://schemas.openxmlformats.org/drawingml/2006/main" xmlns:p="http://schemas.openxmlformats.org/presentationml/2006/main" xmlns:r="http://schemas.openxmlformats.org/officeDocument/2006/relationships" xmlns:p14="http://schemas.microsoft.com/office/powerpoint/2010/main" xmlns:p15="http://schemas.microsoft.com/office/powerpoint/2012/main" xmlns:mc="http://schemas.openxmlformats.org/markup-compatibility/2006">
+<file path=ppt/slides/slide15.xml><?xml version="1.0" encoding="utf-8"?>
+<p:sld xmlns:a="http://schemas.openxmlformats.org/drawingml/2006/main" xmlns:r="http://schemas.openxmlformats.org/officeDocument/2006/relationships" xmlns:p="http://schemas.openxmlformats.org/presentationml/2006/main">
   <p:cSld>
     <p:spTree>
       <p:nvGrpSpPr>
@@ -5090,6 +5058,7 @@
           <a:bodyPr lIns="0" tIns="0" rIns="0" bIns="0" anchor="ctr">
             <a:spAutoFit/>
           </a:bodyPr>
+          <a:lstStyle/>
           <a:p>
             <a:pPr indent="0" algn="ctr" defTabSz="914400">
               <a:lnSpc>
@@ -5150,6 +5119,7 @@
           <a:bodyPr lIns="0" tIns="0" rIns="0" bIns="0" anchor="t">
             <a:normAutofit lnSpcReduction="9999"/>
           </a:bodyPr>
+          <a:lstStyle/>
           <a:p>
             <a:pPr marL="432000" indent="-324000" algn="l" defTabSz="914400">
               <a:lnSpc>
@@ -5166,7 +5136,7 @@
               <a:buChar char=""/>
             </a:pPr>
             <a:r>
-              <a:rPr lang="en-US" sz="2400" b="0" u="none" strike="noStrike">
+              <a:rPr lang="en-US" sz="2400" b="0" u="none" strike="noStrike" dirty="0">
                 <a:solidFill>
                   <a:srgbClr val="000000"/>
                 </a:solidFill>
@@ -5177,7 +5147,7 @@
               </a:rPr>
               <a:t>Overtime</a:t>
             </a:r>
-            <a:endParaRPr lang="en-US" sz="2400" b="0" u="none" strike="noStrike">
+            <a:endParaRPr lang="en-US" sz="2400" b="0" u="none" strike="noStrike" dirty="0">
               <a:solidFill>
                 <a:srgbClr val="000000"/>
               </a:solidFill>
@@ -5202,7 +5172,7 @@
               <a:buChar char=""/>
             </a:pPr>
             <a:r>
-              <a:rPr lang="en-US" sz="2100" b="0" u="none" strike="noStrike">
+              <a:rPr lang="en-US" sz="2100" b="0" u="none" strike="noStrike" dirty="0">
                 <a:solidFill>
                   <a:srgbClr val="000000"/>
                 </a:solidFill>
@@ -5213,7 +5183,7 @@
               </a:rPr>
               <a:t>Employees working overtime have roughly 8 times the odds of attrition compared with employees who do not, holding the other variables constant:</a:t>
             </a:r>
-            <a:endParaRPr lang="en-US" sz="2100" b="0" u="none" strike="noStrike">
+            <a:endParaRPr lang="en-US" sz="2100" b="0" u="none" strike="noStrike" dirty="0">
               <a:solidFill>
                 <a:srgbClr val="000000"/>
               </a:solidFill>
@@ -5241,7 +5211,7 @@
               <a:buChar char=""/>
             </a:pPr>
             <a:r>
-              <a:rPr lang="en-US" sz="1800" b="0" u="none" strike="noStrike">
+              <a:rPr lang="en-US" sz="1800" b="0" u="none" strike="noStrike" dirty="0">
                 <a:solidFill>
                   <a:srgbClr val="000000"/>
                 </a:solidFill>
@@ -5252,7 +5222,7 @@
               </a:rPr>
               <a:t>E^2.07 ≈ 7.95</a:t>
             </a:r>
-            <a:endParaRPr lang="en-US" sz="1800" b="0" u="none" strike="noStrike">
+            <a:endParaRPr lang="en-US" sz="1800" b="0" u="none" strike="noStrike" dirty="0">
               <a:solidFill>
                 <a:srgbClr val="000000"/>
               </a:solidFill>
@@ -5277,7 +5247,7 @@
               <a:buChar char=""/>
             </a:pPr>
             <a:r>
-              <a:rPr lang="en-US" sz="2400" b="0" u="none" strike="noStrike">
+              <a:rPr lang="en-US" sz="2400" b="0" u="none" strike="noStrike" dirty="0">
                 <a:solidFill>
                   <a:srgbClr val="000000"/>
                 </a:solidFill>
@@ -5288,7 +5258,7 @@
               </a:rPr>
               <a:t>Marital Status</a:t>
             </a:r>
-            <a:endParaRPr lang="en-US" sz="2400" b="0" u="none" strike="noStrike">
+            <a:endParaRPr lang="en-US" sz="2400" b="0" u="none" strike="noStrike" dirty="0">
               <a:solidFill>
                 <a:srgbClr val="000000"/>
               </a:solidFill>
@@ -5313,7 +5283,7 @@
               <a:buChar char=""/>
             </a:pPr>
             <a:r>
-              <a:rPr lang="en-US" sz="2100" b="0" u="none" strike="noStrike">
+              <a:rPr lang="en-US" sz="2100" b="0" u="none" strike="noStrike" dirty="0">
                 <a:solidFill>
                   <a:srgbClr val="000000"/>
                 </a:solidFill>
@@ -5324,7 +5294,7 @@
               </a:rPr>
               <a:t>Single employees have roughly 5 times the odds of attrition compared to divorced employees, holding the over variables constant:</a:t>
             </a:r>
-            <a:endParaRPr lang="en-US" sz="2100" b="0" u="none" strike="noStrike">
+            <a:endParaRPr lang="en-US" sz="2100" b="0" u="none" strike="noStrike" dirty="0">
               <a:solidFill>
                 <a:srgbClr val="000000"/>
               </a:solidFill>
@@ -5352,7 +5322,7 @@
               <a:buChar char=""/>
             </a:pPr>
             <a:r>
-              <a:rPr lang="en-US" sz="1800" b="0" u="none" strike="noStrike">
+              <a:rPr lang="en-US" sz="1800" b="0" u="none" strike="noStrike" dirty="0">
                 <a:solidFill>
                   <a:srgbClr val="000000"/>
                 </a:solidFill>
@@ -5363,7 +5333,7 @@
               </a:rPr>
               <a:t>E^1.60 ≈ 5</a:t>
             </a:r>
-            <a:endParaRPr lang="en-US" sz="1800" b="0" u="none" strike="noStrike">
+            <a:endParaRPr lang="en-US" sz="1800" b="0" u="none" strike="noStrike" dirty="0">
               <a:solidFill>
                 <a:srgbClr val="000000"/>
               </a:solidFill>
@@ -5376,19 +5346,14 @@
       </p:sp>
     </p:spTree>
   </p:cSld>
-  <mc:AlternateContent>
-    <mc:Choice Requires="p14">
-      <p:transition spd="slow" p14:dur="2000"/>
-    </mc:Choice>
-    <mc:Fallback>
-      <p:transition spd="slow"/>
-    </mc:Fallback>
-  </mc:AlternateContent>
+  <p:clrMapOvr>
+    <a:masterClrMapping/>
+  </p:clrMapOvr>
 </p:sld>
 </file>
 
-<file path=ppt/slides/slide17.xml><?xml version="1.0" encoding="utf-8"?>
-<p:sld xmlns:a="http://schemas.openxmlformats.org/drawingml/2006/main" xmlns:p="http://schemas.openxmlformats.org/presentationml/2006/main" xmlns:r="http://schemas.openxmlformats.org/officeDocument/2006/relationships" xmlns:p14="http://schemas.microsoft.com/office/powerpoint/2010/main" xmlns:p15="http://schemas.microsoft.com/office/powerpoint/2012/main" xmlns:mc="http://schemas.openxmlformats.org/markup-compatibility/2006">
+<file path=ppt/slides/slide16.xml><?xml version="1.0" encoding="utf-8"?>
+<p:sld xmlns:a="http://schemas.openxmlformats.org/drawingml/2006/main" xmlns:r="http://schemas.openxmlformats.org/officeDocument/2006/relationships" xmlns:p="http://schemas.openxmlformats.org/presentationml/2006/main">
   <p:cSld>
     <p:spTree>
       <p:nvGrpSpPr>
@@ -5431,6 +5396,7 @@
           <a:bodyPr lIns="0" tIns="0" rIns="0" bIns="0" anchor="ctr">
             <a:spAutoFit/>
           </a:bodyPr>
+          <a:lstStyle/>
           <a:p>
             <a:pPr indent="0" algn="ctr" defTabSz="914400">
               <a:lnSpc>
@@ -5452,14 +5418,6 @@
               </a:rPr>
               <a:t>Important Continuous Predictors (continued)</a:t>
             </a:r>
-            <a:endParaRPr lang="en-US" sz="3300" b="0" u="none" strike="noStrike">
-              <a:solidFill>
-                <a:srgbClr val="000000"/>
-              </a:solidFill>
-              <a:effectLst/>
-              <a:uFillTx/>
-              <a:latin typeface="Arial"/>
-            </a:endParaRPr>
           </a:p>
         </p:txBody>
       </p:sp>
@@ -5490,6 +5448,7 @@
           <a:bodyPr lIns="0" tIns="0" rIns="0" bIns="0" anchor="t">
             <a:normAutofit/>
           </a:bodyPr>
+          <a:lstStyle/>
           <a:p>
             <a:pPr marL="432000" indent="-324000" algn="l" defTabSz="914400">
               <a:lnSpc>
@@ -5506,7 +5465,7 @@
               <a:buChar char=""/>
             </a:pPr>
             <a:r>
-              <a:rPr lang="en-US" sz="2400" b="0" u="none" strike="noStrike">
+              <a:rPr lang="en-US" sz="2400" b="0" u="none" strike="noStrike" dirty="0">
                 <a:solidFill>
                   <a:srgbClr val="000000"/>
                 </a:solidFill>
@@ -5517,7 +5476,7 @@
               </a:rPr>
               <a:t>Business Travel</a:t>
             </a:r>
-            <a:endParaRPr lang="en-US" sz="2400" b="0" u="none" strike="noStrike">
+            <a:endParaRPr lang="en-US" sz="2400" b="0" u="none" strike="noStrike" dirty="0">
               <a:solidFill>
                 <a:srgbClr val="000000"/>
               </a:solidFill>
@@ -5542,7 +5501,7 @@
               <a:buChar char=""/>
             </a:pPr>
             <a:r>
-              <a:rPr lang="en-US" sz="2100" b="0" u="none" strike="noStrike">
+              <a:rPr lang="en-US" sz="2100" b="0" u="none" strike="noStrike" dirty="0">
                 <a:solidFill>
                   <a:srgbClr val="000000"/>
                 </a:solidFill>
@@ -5553,7 +5512,7 @@
               </a:rPr>
               <a:t>Employees traveling frequently have roughly 7.5 times the odds of attrition compared to employees who do not travel, holding the other variables constant:</a:t>
             </a:r>
-            <a:endParaRPr lang="en-US" sz="2100" b="0" u="none" strike="noStrike">
+            <a:endParaRPr lang="en-US" sz="2100" b="0" u="none" strike="noStrike" dirty="0">
               <a:solidFill>
                 <a:srgbClr val="000000"/>
               </a:solidFill>
@@ -5578,7 +5537,7 @@
               <a:buChar char=""/>
             </a:pPr>
             <a:r>
-              <a:rPr lang="en-US" sz="1800" b="0" u="none" strike="noStrike">
+              <a:rPr lang="en-US" sz="1800" b="0" u="none" strike="noStrike" dirty="0">
                 <a:solidFill>
                   <a:srgbClr val="000000"/>
                 </a:solidFill>
@@ -5589,7 +5548,7 @@
               </a:rPr>
               <a:t>E^2.02 ≈ 7.5</a:t>
             </a:r>
-            <a:endParaRPr lang="en-US" sz="1800" b="0" u="none" strike="noStrike">
+            <a:endParaRPr lang="en-US" sz="1800" b="0" u="none" strike="noStrike" dirty="0">
               <a:solidFill>
                 <a:srgbClr val="000000"/>
               </a:solidFill>
@@ -5614,7 +5573,7 @@
               <a:buChar char=""/>
             </a:pPr>
             <a:r>
-              <a:rPr lang="en-US" sz="2100" b="0" u="none" strike="noStrike">
+              <a:rPr lang="en-US" sz="2100" b="0" u="none" strike="noStrike" dirty="0">
                 <a:solidFill>
                   <a:srgbClr val="000000"/>
                 </a:solidFill>
@@ -5625,7 +5584,7 @@
               </a:rPr>
               <a:t>Employees traveling rarely also have roughly 2.9 times the odds of attrition compared to employees who do not travel, holding the other variables constant:</a:t>
             </a:r>
-            <a:endParaRPr lang="en-US" sz="2100" b="0" u="none" strike="noStrike">
+            <a:endParaRPr lang="en-US" sz="2100" b="0" u="none" strike="noStrike" dirty="0">
               <a:solidFill>
                 <a:srgbClr val="000000"/>
               </a:solidFill>
@@ -5650,7 +5609,7 @@
               <a:buChar char=""/>
             </a:pPr>
             <a:r>
-              <a:rPr lang="en-US" sz="1800" b="0" u="none" strike="noStrike">
+              <a:rPr lang="en-US" sz="1800" b="0" u="none" strike="noStrike" dirty="0">
                 <a:solidFill>
                   <a:srgbClr val="000000"/>
                 </a:solidFill>
@@ -5661,7 +5620,7 @@
               </a:rPr>
               <a:t>E^1.05 ≈ 2.9</a:t>
             </a:r>
-            <a:endParaRPr lang="en-US" sz="1800" b="0" u="none" strike="noStrike">
+            <a:endParaRPr lang="en-US" sz="1800" b="0" u="none" strike="noStrike" dirty="0">
               <a:solidFill>
                 <a:srgbClr val="000000"/>
               </a:solidFill>
@@ -5674,1235 +5633,14 @@
       </p:sp>
     </p:spTree>
   </p:cSld>
-  <mc:AlternateContent>
-    <mc:Choice Requires="p14">
-      <p:transition spd="slow" p14:dur="2000"/>
-    </mc:Choice>
-    <mc:Fallback>
-      <p:transition spd="slow"/>
-    </mc:Fallback>
-  </mc:AlternateContent>
+  <p:clrMapOvr>
+    <a:masterClrMapping/>
+  </p:clrMapOvr>
 </p:sld>
 </file>
 
-<file path=ppt/slides/slide18.xml><?xml version="1.0" encoding="utf-8"?>
-<p:sld xmlns:a="http://schemas.openxmlformats.org/drawingml/2006/main" xmlns:p="http://schemas.openxmlformats.org/presentationml/2006/main" xmlns:r="http://schemas.openxmlformats.org/officeDocument/2006/relationships" xmlns:p14="http://schemas.microsoft.com/office/powerpoint/2010/main" xmlns:p15="http://schemas.microsoft.com/office/powerpoint/2012/main" xmlns:mc="http://schemas.openxmlformats.org/markup-compatibility/2006">
-  <p:cSld>
-    <p:spTree>
-      <p:nvGrpSpPr>
-        <p:cNvPr id="1" name=""/>
-        <p:cNvGrpSpPr/>
-        <p:nvPr/>
-      </p:nvGrpSpPr>
-      <p:grpSpPr>
-        <a:xfrm>
-          <a:off x="0" y="0"/>
-          <a:ext cx="0" cy="0"/>
-          <a:chOff x="0" y="0"/>
-          <a:chExt cx="0" cy="0"/>
-        </a:xfrm>
-      </p:grpSpPr>
-      <p:sp>
-        <p:nvSpPr>
-          <p:cNvPr id="68" name="PlaceHolder 1"/>
-          <p:cNvSpPr>
-            <a:spLocks noGrp="1"/>
-          </p:cNvSpPr>
-          <p:nvPr>
-            <p:ph type="title"/>
-          </p:nvPr>
-        </p:nvSpPr>
-        <p:spPr>
-          <a:xfrm>
-            <a:off x="504000" y="470520"/>
-            <a:ext cx="9071280" cy="457200"/>
-          </a:xfrm>
-          <a:prstGeom prst="rect">
-            <a:avLst/>
-          </a:prstGeom>
-          <a:noFill/>
-          <a:ln w="0">
-            <a:noFill/>
-          </a:ln>
-        </p:spPr>
-        <p:txBody>
-          <a:bodyPr lIns="0" tIns="0" rIns="0" bIns="0" anchor="ctr">
-            <a:spAutoFit/>
-          </a:bodyPr>
-          <a:p>
-            <a:pPr indent="0" algn="ctr" defTabSz="914400">
-              <a:lnSpc>
-                <a:spcPct val="90000"/>
-              </a:lnSpc>
-              <a:buNone/>
-              <a:tabLst>
-                <a:tab pos="0" algn="l"/>
-              </a:tabLst>
-            </a:pPr>
-            <a:r>
-              <a:rPr lang="en-US" sz="3300" b="0" u="none" strike="noStrike">
-                <a:solidFill>
-                  <a:srgbClr val="000000"/>
-                </a:solidFill>
-                <a:effectLst/>
-                <a:uFillTx/>
-                <a:latin typeface="Arial"/>
-                <a:ea typeface="DejaVu Sans"/>
-              </a:rPr>
-              <a:t>Top Predictors</a:t>
-            </a:r>
-            <a:endParaRPr lang="en-US" sz="3300" b="0" u="none" strike="noStrike">
-              <a:solidFill>
-                <a:srgbClr val="000000"/>
-              </a:solidFill>
-              <a:effectLst/>
-              <a:uFillTx/>
-              <a:latin typeface="Arial"/>
-            </a:endParaRPr>
-          </a:p>
-        </p:txBody>
-      </p:sp>
-      <p:graphicFrame>
-        <p:nvGraphicFramePr>
-          <p:cNvPr id="69" name="Table 65"/>
-          <p:cNvGraphicFramePr/>
-          <p:nvPr/>
-        </p:nvGraphicFramePr>
-        <p:xfrm>
-          <a:off x="1644840" y="1181880"/>
-          <a:ext cx="6857640" cy="3657240"/>
-        </p:xfrm>
-        <a:graphic>
-          <a:graphicData uri="http://schemas.openxmlformats.org/drawingml/2006/table">
-            <a:tbl>
-              <a:tblPr/>
-              <a:tblGrid>
-                <a:gridCol w="3432960"/>
-                <a:gridCol w="3425040"/>
-              </a:tblGrid>
-              <a:tr h="0">
-                <a:tc>
-                  <a:txBody>
-                    <a:bodyPr lIns="36000" tIns="36000" rIns="36000" bIns="36000" anchor="t">
-                      <a:noAutofit/>
-                    </a:bodyPr>
-                    <a:p>
-                      <a:pPr algn="ctr"/>
-                      <a:r>
-                        <a:rPr lang="en-US" sz="1800" b="1" u="none" strike="noStrike">
-                          <a:solidFill>
-                            <a:srgbClr val="000000"/>
-                          </a:solidFill>
-                          <a:effectLst/>
-                          <a:uFillTx/>
-                          <a:latin typeface="Arial"/>
-                        </a:rPr>
-                        <a:t>Predictor</a:t>
-                      </a:r>
-                      <a:endParaRPr lang="en-US" sz="1800" b="0" u="none" strike="noStrike">
-                        <a:solidFill>
-                          <a:srgbClr val="000000"/>
-                        </a:solidFill>
-                        <a:effectLst/>
-                        <a:uFillTx/>
-                        <a:latin typeface="Arial"/>
-                      </a:endParaRPr>
-                    </a:p>
-                  </a:txBody>
-                  <a:tcPr anchor="t" marL="36000" marR="36000" marT="36000" marB="36000">
-                    <a:lnL w="7200">
-                      <a:solidFill>
-                        <a:srgbClr val="000000"/>
-                      </a:solidFill>
-                      <a:prstDash val="solid"/>
-                    </a:lnL>
-                    <a:lnR w="7200">
-                      <a:solidFill>
-                        <a:srgbClr val="000000"/>
-                      </a:solidFill>
-                      <a:prstDash val="solid"/>
-                    </a:lnR>
-                    <a:lnT w="7200">
-                      <a:solidFill>
-                        <a:srgbClr val="000000"/>
-                      </a:solidFill>
-                      <a:prstDash val="solid"/>
-                    </a:lnT>
-                    <a:lnB w="7200">
-                      <a:solidFill>
-                        <a:srgbClr val="000000"/>
-                      </a:solidFill>
-                      <a:prstDash val="solid"/>
-                    </a:lnB>
-                    <a:solidFill>
-                      <a:srgbClr val="DEDCE6"/>
-                    </a:solidFill>
-                  </a:tcPr>
-                </a:tc>
-                <a:tc>
-                  <a:txBody>
-                    <a:bodyPr lIns="36000" tIns="36000" rIns="36000" bIns="36000" anchor="t">
-                      <a:noAutofit/>
-                    </a:bodyPr>
-                    <a:p>
-                      <a:pPr algn="ctr"/>
-                      <a:r>
-                        <a:rPr lang="en-US" sz="1800" b="1" u="none" strike="noStrike">
-                          <a:solidFill>
-                            <a:srgbClr val="000000"/>
-                          </a:solidFill>
-                          <a:effectLst/>
-                          <a:uFillTx/>
-                          <a:latin typeface="Arial"/>
-                        </a:rPr>
-                        <a:t>Effect</a:t>
-                      </a:r>
-                      <a:endParaRPr lang="en-US" sz="1800" b="0" u="none" strike="noStrike">
-                        <a:solidFill>
-                          <a:srgbClr val="000000"/>
-                        </a:solidFill>
-                        <a:effectLst/>
-                        <a:uFillTx/>
-                        <a:latin typeface="Arial"/>
-                      </a:endParaRPr>
-                    </a:p>
-                  </a:txBody>
-                  <a:tcPr anchor="t" marL="36000" marR="36000" marT="36000" marB="36000">
-                    <a:lnL w="7200">
-                      <a:solidFill>
-                        <a:srgbClr val="000000"/>
-                      </a:solidFill>
-                      <a:prstDash val="solid"/>
-                    </a:lnL>
-                    <a:lnR w="7200">
-                      <a:solidFill>
-                        <a:srgbClr val="000000"/>
-                      </a:solidFill>
-                      <a:prstDash val="solid"/>
-                    </a:lnR>
-                    <a:lnT w="7200">
-                      <a:solidFill>
-                        <a:srgbClr val="000000"/>
-                      </a:solidFill>
-                      <a:prstDash val="solid"/>
-                    </a:lnT>
-                    <a:lnB w="7200">
-                      <a:solidFill>
-                        <a:srgbClr val="000000"/>
-                      </a:solidFill>
-                      <a:prstDash val="solid"/>
-                    </a:lnB>
-                    <a:solidFill>
-                      <a:srgbClr val="DEDCE6"/>
-                    </a:solidFill>
-                  </a:tcPr>
-                </a:tc>
-              </a:tr>
-              <a:tr h="0">
-                <a:tc>
-                  <a:txBody>
-                    <a:bodyPr lIns="36000" tIns="36000" rIns="36000" bIns="36000" anchor="t">
-                      <a:noAutofit/>
-                    </a:bodyPr>
-                    <a:p>
-                      <a:pPr defTabSz="914400">
-                        <a:lnSpc>
-                          <a:spcPct val="100000"/>
-                        </a:lnSpc>
-                      </a:pPr>
-                      <a:r>
-                        <a:rPr lang="en-US" sz="1800" b="0" u="none" strike="noStrike">
-                          <a:solidFill>
-                            <a:srgbClr val="000000"/>
-                          </a:solidFill>
-                          <a:effectLst/>
-                          <a:uFillTx/>
-                          <a:latin typeface="Arial"/>
-                          <a:ea typeface="DejaVu Sans"/>
-                        </a:rPr>
-                        <a:t>Years Since Last Promotion</a:t>
-                      </a:r>
-                      <a:endParaRPr lang="en-US" sz="1800" b="0" u="none" strike="noStrike">
-                        <a:solidFill>
-                          <a:srgbClr val="000000"/>
-                        </a:solidFill>
-                        <a:effectLst/>
-                        <a:uFillTx/>
-                        <a:latin typeface="Arial"/>
-                      </a:endParaRPr>
-                    </a:p>
-                  </a:txBody>
-                  <a:tcPr anchor="t" marL="36000" marR="36000" marT="36000" marB="36000">
-                    <a:lnL w="7200">
-                      <a:solidFill>
-                        <a:srgbClr val="000000"/>
-                      </a:solidFill>
-                      <a:prstDash val="solid"/>
-                    </a:lnL>
-                    <a:lnR w="7200">
-                      <a:solidFill>
-                        <a:srgbClr val="000000"/>
-                      </a:solidFill>
-                      <a:prstDash val="solid"/>
-                    </a:lnR>
-                    <a:lnT>
-                      <a:noFill/>
-                    </a:lnT>
-                    <a:lnB w="7200">
-                      <a:solidFill>
-                        <a:srgbClr val="000000"/>
-                      </a:solidFill>
-                      <a:prstDash val="solid"/>
-                    </a:lnB>
-                    <a:noFill/>
-                  </a:tcPr>
-                </a:tc>
-                <a:tc>
-                  <a:txBody>
-                    <a:bodyPr lIns="36000" tIns="36000" rIns="36000" bIns="36000" anchor="t">
-                      <a:noAutofit/>
-                    </a:bodyPr>
-                    <a:p>
-                      <a:pPr defTabSz="914400">
-                        <a:lnSpc>
-                          <a:spcPct val="100000"/>
-                        </a:lnSpc>
-                      </a:pPr>
-                      <a:r>
-                        <a:rPr lang="en-US" sz="1800" b="0" u="none" strike="noStrike">
-                          <a:solidFill>
-                            <a:srgbClr val="000000"/>
-                          </a:solidFill>
-                          <a:effectLst/>
-                          <a:uFillTx/>
-                          <a:latin typeface="Arial"/>
-                          <a:ea typeface="DejaVu Sans"/>
-                        </a:rPr>
-                        <a:t>Strongest Positive Effect</a:t>
-                      </a:r>
-                      <a:endParaRPr lang="en-US" sz="1800" b="0" u="none" strike="noStrike">
-                        <a:solidFill>
-                          <a:srgbClr val="000000"/>
-                        </a:solidFill>
-                        <a:effectLst/>
-                        <a:uFillTx/>
-                        <a:latin typeface="Arial"/>
-                      </a:endParaRPr>
-                    </a:p>
-                  </a:txBody>
-                  <a:tcPr anchor="t" marL="36000" marR="36000" marT="36000" marB="36000">
-                    <a:lnL w="7200">
-                      <a:solidFill>
-                        <a:srgbClr val="000000"/>
-                      </a:solidFill>
-                      <a:prstDash val="solid"/>
-                    </a:lnL>
-                    <a:lnR w="7200">
-                      <a:solidFill>
-                        <a:srgbClr val="000000"/>
-                      </a:solidFill>
-                      <a:prstDash val="solid"/>
-                    </a:lnR>
-                    <a:lnT>
-                      <a:noFill/>
-                    </a:lnT>
-                    <a:lnB w="7200">
-                      <a:solidFill>
-                        <a:srgbClr val="000000"/>
-                      </a:solidFill>
-                      <a:prstDash val="solid"/>
-                    </a:lnB>
-                    <a:noFill/>
-                  </a:tcPr>
-                </a:tc>
-              </a:tr>
-              <a:tr h="406440">
-                <a:tc>
-                  <a:txBody>
-                    <a:bodyPr lIns="36000" tIns="36000" rIns="36000" bIns="36000" anchor="t">
-                      <a:noAutofit/>
-                    </a:bodyPr>
-                    <a:p>
-                      <a:pPr defTabSz="914400">
-                        <a:lnSpc>
-                          <a:spcPct val="100000"/>
-                        </a:lnSpc>
-                      </a:pPr>
-                      <a:r>
-                        <a:rPr lang="en-US" sz="1800" b="0" u="none" strike="noStrike">
-                          <a:solidFill>
-                            <a:srgbClr val="000000"/>
-                          </a:solidFill>
-                          <a:effectLst/>
-                          <a:uFillTx/>
-                          <a:latin typeface="Arial"/>
-                          <a:ea typeface="DejaVu Sans"/>
-                        </a:rPr>
-                        <a:t>Number of companies worked</a:t>
-                      </a:r>
-                      <a:endParaRPr lang="en-US" sz="1800" b="0" u="none" strike="noStrike">
-                        <a:solidFill>
-                          <a:srgbClr val="000000"/>
-                        </a:solidFill>
-                        <a:effectLst/>
-                        <a:uFillTx/>
-                        <a:latin typeface="Arial"/>
-                      </a:endParaRPr>
-                    </a:p>
-                  </a:txBody>
-                  <a:tcPr anchor="t" marL="36000" marR="36000" marT="36000" marB="36000">
-                    <a:lnL w="7200">
-                      <a:solidFill>
-                        <a:srgbClr val="000000"/>
-                      </a:solidFill>
-                      <a:prstDash val="solid"/>
-                    </a:lnL>
-                    <a:lnR w="7200">
-                      <a:solidFill>
-                        <a:srgbClr val="000000"/>
-                      </a:solidFill>
-                      <a:prstDash val="solid"/>
-                    </a:lnR>
-                    <a:lnT w="7200">
-                      <a:solidFill>
-                        <a:srgbClr val="000000"/>
-                      </a:solidFill>
-                      <a:prstDash val="solid"/>
-                    </a:lnT>
-                    <a:lnB w="7200">
-                      <a:solidFill>
-                        <a:srgbClr val="000000"/>
-                      </a:solidFill>
-                      <a:prstDash val="solid"/>
-                    </a:lnB>
-                    <a:noFill/>
-                  </a:tcPr>
-                </a:tc>
-                <a:tc>
-                  <a:txBody>
-                    <a:bodyPr lIns="36000" tIns="36000" rIns="36000" bIns="36000" anchor="t">
-                      <a:noAutofit/>
-                    </a:bodyPr>
-                    <a:p>
-                      <a:pPr defTabSz="914400">
-                        <a:lnSpc>
-                          <a:spcPct val="100000"/>
-                        </a:lnSpc>
-                      </a:pPr>
-                      <a:r>
-                        <a:rPr lang="en-US" sz="1800" b="0" u="none" strike="noStrike">
-                          <a:solidFill>
-                            <a:srgbClr val="000000"/>
-                          </a:solidFill>
-                          <a:effectLst/>
-                          <a:uFillTx/>
-                          <a:latin typeface="Arial"/>
-                          <a:ea typeface="DejaVu Sans"/>
-                        </a:rPr>
-                        <a:t>Strong Positive Effect</a:t>
-                      </a:r>
-                      <a:endParaRPr lang="en-US" sz="1800" b="0" u="none" strike="noStrike">
-                        <a:solidFill>
-                          <a:srgbClr val="000000"/>
-                        </a:solidFill>
-                        <a:effectLst/>
-                        <a:uFillTx/>
-                        <a:latin typeface="Arial"/>
-                      </a:endParaRPr>
-                    </a:p>
-                  </a:txBody>
-                  <a:tcPr anchor="t" marL="36000" marR="36000" marT="36000" marB="36000">
-                    <a:lnL w="7200">
-                      <a:solidFill>
-                        <a:srgbClr val="000000"/>
-                      </a:solidFill>
-                      <a:prstDash val="solid"/>
-                    </a:lnL>
-                    <a:lnR w="7200">
-                      <a:solidFill>
-                        <a:srgbClr val="000000"/>
-                      </a:solidFill>
-                      <a:prstDash val="solid"/>
-                    </a:lnR>
-                    <a:lnT w="7200">
-                      <a:solidFill>
-                        <a:srgbClr val="000000"/>
-                      </a:solidFill>
-                      <a:prstDash val="solid"/>
-                    </a:lnT>
-                    <a:lnB w="7200">
-                      <a:solidFill>
-                        <a:srgbClr val="000000"/>
-                      </a:solidFill>
-                      <a:prstDash val="solid"/>
-                    </a:lnB>
-                    <a:noFill/>
-                  </a:tcPr>
-                </a:tc>
-              </a:tr>
-              <a:tr h="399960">
-                <a:tc>
-                  <a:txBody>
-                    <a:bodyPr lIns="36000" tIns="36000" rIns="36000" bIns="36000" anchor="t">
-                      <a:noAutofit/>
-                    </a:bodyPr>
-                    <a:p>
-                      <a:pPr defTabSz="914400">
-                        <a:lnSpc>
-                          <a:spcPct val="100000"/>
-                        </a:lnSpc>
-                      </a:pPr>
-                      <a:r>
-                        <a:rPr lang="en-US" sz="1800" b="0" u="none" strike="noStrike">
-                          <a:solidFill>
-                            <a:srgbClr val="000000"/>
-                          </a:solidFill>
-                          <a:effectLst/>
-                          <a:uFillTx/>
-                          <a:latin typeface="Arial"/>
-                          <a:ea typeface="DejaVu Sans"/>
-                        </a:rPr>
-                        <a:t>Overtime</a:t>
-                      </a:r>
-                      <a:endParaRPr lang="en-US" sz="1800" b="0" u="none" strike="noStrike">
-                        <a:solidFill>
-                          <a:srgbClr val="000000"/>
-                        </a:solidFill>
-                        <a:effectLst/>
-                        <a:uFillTx/>
-                        <a:latin typeface="Arial"/>
-                      </a:endParaRPr>
-                    </a:p>
-                  </a:txBody>
-                  <a:tcPr anchor="t" marL="36000" marR="36000" marT="36000" marB="36000">
-                    <a:lnL w="7200">
-                      <a:solidFill>
-                        <a:srgbClr val="000000"/>
-                      </a:solidFill>
-                      <a:prstDash val="solid"/>
-                    </a:lnL>
-                    <a:lnR w="7200">
-                      <a:solidFill>
-                        <a:srgbClr val="000000"/>
-                      </a:solidFill>
-                      <a:prstDash val="solid"/>
-                    </a:lnR>
-                    <a:lnT w="7200">
-                      <a:solidFill>
-                        <a:srgbClr val="000000"/>
-                      </a:solidFill>
-                      <a:prstDash val="solid"/>
-                    </a:lnT>
-                    <a:lnB w="7200">
-                      <a:solidFill>
-                        <a:srgbClr val="000000"/>
-                      </a:solidFill>
-                      <a:prstDash val="solid"/>
-                    </a:lnB>
-                    <a:noFill/>
-                  </a:tcPr>
-                </a:tc>
-                <a:tc>
-                  <a:txBody>
-                    <a:bodyPr lIns="36000" tIns="36000" rIns="36000" bIns="36000" anchor="t">
-                      <a:noAutofit/>
-                    </a:bodyPr>
-                    <a:p>
-                      <a:pPr defTabSz="914400">
-                        <a:lnSpc>
-                          <a:spcPct val="100000"/>
-                        </a:lnSpc>
-                      </a:pPr>
-                      <a:r>
-                        <a:rPr lang="en-US" sz="1800" b="0" u="none" strike="noStrike">
-                          <a:solidFill>
-                            <a:srgbClr val="000000"/>
-                          </a:solidFill>
-                          <a:effectLst/>
-                          <a:uFillTx/>
-                          <a:latin typeface="Arial"/>
-                          <a:ea typeface="DejaVu Sans"/>
-                        </a:rPr>
-                        <a:t>Strong Positive Effect</a:t>
-                      </a:r>
-                      <a:endParaRPr lang="en-US" sz="1800" b="0" u="none" strike="noStrike">
-                        <a:solidFill>
-                          <a:srgbClr val="000000"/>
-                        </a:solidFill>
-                        <a:effectLst/>
-                        <a:uFillTx/>
-                        <a:latin typeface="Arial"/>
-                      </a:endParaRPr>
-                    </a:p>
-                  </a:txBody>
-                  <a:tcPr anchor="t" marL="36000" marR="36000" marT="36000" marB="36000">
-                    <a:lnL w="7200">
-                      <a:solidFill>
-                        <a:srgbClr val="000000"/>
-                      </a:solidFill>
-                      <a:prstDash val="solid"/>
-                    </a:lnL>
-                    <a:lnR w="7200">
-                      <a:solidFill>
-                        <a:srgbClr val="000000"/>
-                      </a:solidFill>
-                      <a:prstDash val="solid"/>
-                    </a:lnR>
-                    <a:lnT w="7200">
-                      <a:solidFill>
-                        <a:srgbClr val="000000"/>
-                      </a:solidFill>
-                      <a:prstDash val="solid"/>
-                    </a:lnT>
-                    <a:lnB w="7200">
-                      <a:solidFill>
-                        <a:srgbClr val="000000"/>
-                      </a:solidFill>
-                      <a:prstDash val="solid"/>
-                    </a:lnB>
-                    <a:noFill/>
-                  </a:tcPr>
-                </a:tc>
-              </a:tr>
-              <a:tr h="487800">
-                <a:tc>
-                  <a:txBody>
-                    <a:bodyPr lIns="36000" tIns="36000" rIns="36000" bIns="36000" anchor="t">
-                      <a:noAutofit/>
-                    </a:bodyPr>
-                    <a:p>
-                      <a:pPr defTabSz="914400">
-                        <a:lnSpc>
-                          <a:spcPct val="100000"/>
-                        </a:lnSpc>
-                      </a:pPr>
-                      <a:r>
-                        <a:rPr lang="en-US" sz="1800" b="0" u="none" strike="noStrike">
-                          <a:solidFill>
-                            <a:srgbClr val="000000"/>
-                          </a:solidFill>
-                          <a:effectLst/>
-                          <a:uFillTx/>
-                          <a:latin typeface="Arial"/>
-                          <a:ea typeface="DejaVu Sans"/>
-                        </a:rPr>
-                        <a:t>Business Travel (Frequent)</a:t>
-                      </a:r>
-                      <a:endParaRPr lang="en-US" sz="1800" b="0" u="none" strike="noStrike">
-                        <a:solidFill>
-                          <a:srgbClr val="000000"/>
-                        </a:solidFill>
-                        <a:effectLst/>
-                        <a:uFillTx/>
-                        <a:latin typeface="Arial"/>
-                      </a:endParaRPr>
-                    </a:p>
-                  </a:txBody>
-                  <a:tcPr anchor="t" marL="36000" marR="36000" marT="36000" marB="36000">
-                    <a:lnL w="7200">
-                      <a:solidFill>
-                        <a:srgbClr val="000000"/>
-                      </a:solidFill>
-                      <a:prstDash val="solid"/>
-                    </a:lnL>
-                    <a:lnR w="7200">
-                      <a:solidFill>
-                        <a:srgbClr val="000000"/>
-                      </a:solidFill>
-                      <a:prstDash val="solid"/>
-                    </a:lnR>
-                    <a:lnT w="7200">
-                      <a:solidFill>
-                        <a:srgbClr val="000000"/>
-                      </a:solidFill>
-                      <a:prstDash val="solid"/>
-                    </a:lnT>
-                    <a:lnB w="7200">
-                      <a:solidFill>
-                        <a:srgbClr val="000000"/>
-                      </a:solidFill>
-                      <a:prstDash val="solid"/>
-                    </a:lnB>
-                    <a:noFill/>
-                  </a:tcPr>
-                </a:tc>
-                <a:tc>
-                  <a:txBody>
-                    <a:bodyPr lIns="36000" tIns="36000" rIns="36000" bIns="36000" anchor="t">
-                      <a:noAutofit/>
-                    </a:bodyPr>
-                    <a:p>
-                      <a:pPr defTabSz="914400">
-                        <a:lnSpc>
-                          <a:spcPct val="100000"/>
-                        </a:lnSpc>
-                      </a:pPr>
-                      <a:r>
-                        <a:rPr lang="en-US" sz="1800" b="0" u="none" strike="noStrike">
-                          <a:solidFill>
-                            <a:srgbClr val="000000"/>
-                          </a:solidFill>
-                          <a:effectLst/>
-                          <a:uFillTx/>
-                          <a:latin typeface="Arial"/>
-                          <a:ea typeface="DejaVu Sans"/>
-                        </a:rPr>
-                        <a:t>Moderate Positive Effect</a:t>
-                      </a:r>
-                      <a:endParaRPr lang="en-US" sz="1800" b="0" u="none" strike="noStrike">
-                        <a:solidFill>
-                          <a:srgbClr val="000000"/>
-                        </a:solidFill>
-                        <a:effectLst/>
-                        <a:uFillTx/>
-                        <a:latin typeface="Arial"/>
-                      </a:endParaRPr>
-                    </a:p>
-                  </a:txBody>
-                  <a:tcPr anchor="t" marL="36000" marR="36000" marT="36000" marB="36000">
-                    <a:lnL w="7200">
-                      <a:solidFill>
-                        <a:srgbClr val="000000"/>
-                      </a:solidFill>
-                      <a:prstDash val="solid"/>
-                    </a:lnL>
-                    <a:lnR w="7200">
-                      <a:solidFill>
-                        <a:srgbClr val="000000"/>
-                      </a:solidFill>
-                      <a:prstDash val="solid"/>
-                    </a:lnR>
-                    <a:lnT w="7200">
-                      <a:solidFill>
-                        <a:srgbClr val="000000"/>
-                      </a:solidFill>
-                      <a:prstDash val="solid"/>
-                    </a:lnT>
-                    <a:lnB w="7200">
-                      <a:solidFill>
-                        <a:srgbClr val="000000"/>
-                      </a:solidFill>
-                      <a:prstDash val="solid"/>
-                    </a:lnB>
-                    <a:noFill/>
-                  </a:tcPr>
-                </a:tc>
-              </a:tr>
-              <a:tr h="487800">
-                <a:tc>
-                  <a:txBody>
-                    <a:bodyPr lIns="36000" tIns="36000" rIns="36000" bIns="36000" anchor="t">
-                      <a:noAutofit/>
-                    </a:bodyPr>
-                    <a:p>
-                      <a:pPr defTabSz="914400">
-                        <a:lnSpc>
-                          <a:spcPct val="100000"/>
-                        </a:lnSpc>
-                      </a:pPr>
-                      <a:r>
-                        <a:rPr lang="en-US" sz="1800" b="0" u="none" strike="noStrike">
-                          <a:solidFill>
-                            <a:srgbClr val="000000"/>
-                          </a:solidFill>
-                          <a:effectLst/>
-                          <a:uFillTx/>
-                          <a:latin typeface="Arial"/>
-                          <a:ea typeface="DejaVu Sans"/>
-                        </a:rPr>
-                        <a:t>Distance From Home</a:t>
-                      </a:r>
-                      <a:endParaRPr lang="en-US" sz="1800" b="0" u="none" strike="noStrike">
-                        <a:solidFill>
-                          <a:srgbClr val="000000"/>
-                        </a:solidFill>
-                        <a:effectLst/>
-                        <a:uFillTx/>
-                        <a:latin typeface="Arial"/>
-                      </a:endParaRPr>
-                    </a:p>
-                  </a:txBody>
-                  <a:tcPr anchor="t" marL="36000" marR="36000" marT="36000" marB="36000">
-                    <a:lnL w="7200">
-                      <a:solidFill>
-                        <a:srgbClr val="000000"/>
-                      </a:solidFill>
-                      <a:prstDash val="solid"/>
-                    </a:lnL>
-                    <a:lnR w="7200">
-                      <a:solidFill>
-                        <a:srgbClr val="000000"/>
-                      </a:solidFill>
-                      <a:prstDash val="solid"/>
-                    </a:lnR>
-                    <a:lnT w="7200">
-                      <a:solidFill>
-                        <a:srgbClr val="000000"/>
-                      </a:solidFill>
-                      <a:prstDash val="solid"/>
-                    </a:lnT>
-                    <a:lnB w="7200">
-                      <a:solidFill>
-                        <a:srgbClr val="000000"/>
-                      </a:solidFill>
-                      <a:prstDash val="solid"/>
-                    </a:lnB>
-                    <a:noFill/>
-                  </a:tcPr>
-                </a:tc>
-                <a:tc>
-                  <a:txBody>
-                    <a:bodyPr lIns="36000" tIns="36000" rIns="36000" bIns="36000" anchor="t">
-                      <a:noAutofit/>
-                    </a:bodyPr>
-                    <a:p>
-                      <a:pPr defTabSz="914400">
-                        <a:lnSpc>
-                          <a:spcPct val="100000"/>
-                        </a:lnSpc>
-                      </a:pPr>
-                      <a:r>
-                        <a:rPr lang="en-US" sz="1800" b="0" u="none" strike="noStrike">
-                          <a:solidFill>
-                            <a:srgbClr val="000000"/>
-                          </a:solidFill>
-                          <a:effectLst/>
-                          <a:uFillTx/>
-                          <a:latin typeface="Arial"/>
-                          <a:ea typeface="DejaVu Sans"/>
-                        </a:rPr>
-                        <a:t>Moderate Positive Effect</a:t>
-                      </a:r>
-                      <a:endParaRPr lang="en-US" sz="1800" b="0" u="none" strike="noStrike">
-                        <a:solidFill>
-                          <a:srgbClr val="000000"/>
-                        </a:solidFill>
-                        <a:effectLst/>
-                        <a:uFillTx/>
-                        <a:latin typeface="Arial"/>
-                      </a:endParaRPr>
-                    </a:p>
-                  </a:txBody>
-                  <a:tcPr anchor="t" marL="36000" marR="36000" marT="36000" marB="36000">
-                    <a:lnL w="7200">
-                      <a:solidFill>
-                        <a:srgbClr val="000000"/>
-                      </a:solidFill>
-                      <a:prstDash val="solid"/>
-                    </a:lnL>
-                    <a:lnR w="7200">
-                      <a:solidFill>
-                        <a:srgbClr val="000000"/>
-                      </a:solidFill>
-                      <a:prstDash val="solid"/>
-                    </a:lnR>
-                    <a:lnT w="7200">
-                      <a:solidFill>
-                        <a:srgbClr val="000000"/>
-                      </a:solidFill>
-                      <a:prstDash val="solid"/>
-                    </a:lnT>
-                    <a:lnB w="7200">
-                      <a:solidFill>
-                        <a:srgbClr val="000000"/>
-                      </a:solidFill>
-                      <a:prstDash val="solid"/>
-                    </a:lnB>
-                    <a:noFill/>
-                  </a:tcPr>
-                </a:tc>
-              </a:tr>
-              <a:tr h="487800">
-                <a:tc>
-                  <a:txBody>
-                    <a:bodyPr lIns="36000" tIns="36000" rIns="36000" bIns="36000" anchor="t">
-                      <a:noAutofit/>
-                    </a:bodyPr>
-                    <a:p>
-                      <a:pPr defTabSz="914400">
-                        <a:lnSpc>
-                          <a:spcPct val="100000"/>
-                        </a:lnSpc>
-                      </a:pPr>
-                      <a:r>
-                        <a:rPr lang="en-US" sz="1800" b="0" u="none" strike="noStrike">
-                          <a:solidFill>
-                            <a:srgbClr val="000000"/>
-                          </a:solidFill>
-                          <a:effectLst/>
-                          <a:uFillTx/>
-                          <a:latin typeface="Arial"/>
-                          <a:ea typeface="DejaVu Sans"/>
-                        </a:rPr>
-                        <a:t>Environment Satisfaction</a:t>
-                      </a:r>
-                      <a:endParaRPr lang="en-US" sz="1800" b="0" u="none" strike="noStrike">
-                        <a:solidFill>
-                          <a:srgbClr val="000000"/>
-                        </a:solidFill>
-                        <a:effectLst/>
-                        <a:uFillTx/>
-                        <a:latin typeface="Arial"/>
-                      </a:endParaRPr>
-                    </a:p>
-                  </a:txBody>
-                  <a:tcPr anchor="t" marL="36000" marR="36000" marT="36000" marB="36000">
-                    <a:lnL w="7200">
-                      <a:solidFill>
-                        <a:srgbClr val="000000"/>
-                      </a:solidFill>
-                      <a:prstDash val="solid"/>
-                    </a:lnL>
-                    <a:lnR w="7200">
-                      <a:solidFill>
-                        <a:srgbClr val="000000"/>
-                      </a:solidFill>
-                      <a:prstDash val="solid"/>
-                    </a:lnR>
-                    <a:lnT w="7200">
-                      <a:solidFill>
-                        <a:srgbClr val="000000"/>
-                      </a:solidFill>
-                      <a:prstDash val="solid"/>
-                    </a:lnT>
-                    <a:lnB w="7200">
-                      <a:solidFill>
-                        <a:srgbClr val="000000"/>
-                      </a:solidFill>
-                      <a:prstDash val="solid"/>
-                    </a:lnB>
-                    <a:noFill/>
-                  </a:tcPr>
-                </a:tc>
-                <a:tc>
-                  <a:txBody>
-                    <a:bodyPr lIns="36000" tIns="36000" rIns="36000" bIns="36000" anchor="t">
-                      <a:noAutofit/>
-                    </a:bodyPr>
-                    <a:p>
-                      <a:pPr defTabSz="914400">
-                        <a:lnSpc>
-                          <a:spcPct val="100000"/>
-                        </a:lnSpc>
-                      </a:pPr>
-                      <a:r>
-                        <a:rPr lang="en-US" sz="1800" b="0" u="none" strike="noStrike">
-                          <a:solidFill>
-                            <a:srgbClr val="000000"/>
-                          </a:solidFill>
-                          <a:effectLst/>
-                          <a:uFillTx/>
-                          <a:latin typeface="Arial"/>
-                          <a:ea typeface="DejaVu Sans"/>
-                        </a:rPr>
-                        <a:t>Strong Negative Effect</a:t>
-                      </a:r>
-                      <a:endParaRPr lang="en-US" sz="1800" b="0" u="none" strike="noStrike">
-                        <a:solidFill>
-                          <a:srgbClr val="000000"/>
-                        </a:solidFill>
-                        <a:effectLst/>
-                        <a:uFillTx/>
-                        <a:latin typeface="Arial"/>
-                      </a:endParaRPr>
-                    </a:p>
-                  </a:txBody>
-                  <a:tcPr anchor="t" marL="36000" marR="36000" marT="36000" marB="36000">
-                    <a:lnL w="7200">
-                      <a:solidFill>
-                        <a:srgbClr val="000000"/>
-                      </a:solidFill>
-                      <a:prstDash val="solid"/>
-                    </a:lnL>
-                    <a:lnR w="7200">
-                      <a:solidFill>
-                        <a:srgbClr val="000000"/>
-                      </a:solidFill>
-                      <a:prstDash val="solid"/>
-                    </a:lnR>
-                    <a:lnT w="7200">
-                      <a:solidFill>
-                        <a:srgbClr val="000000"/>
-                      </a:solidFill>
-                      <a:prstDash val="solid"/>
-                    </a:lnT>
-                    <a:lnB w="7200">
-                      <a:solidFill>
-                        <a:srgbClr val="000000"/>
-                      </a:solidFill>
-                      <a:prstDash val="solid"/>
-                    </a:lnB>
-                    <a:noFill/>
-                  </a:tcPr>
-                </a:tc>
-              </a:tr>
-              <a:tr h="487800">
-                <a:tc>
-                  <a:txBody>
-                    <a:bodyPr lIns="36000" tIns="36000" rIns="36000" bIns="36000" anchor="t">
-                      <a:noAutofit/>
-                    </a:bodyPr>
-                    <a:p>
-                      <a:pPr defTabSz="914400">
-                        <a:lnSpc>
-                          <a:spcPct val="100000"/>
-                        </a:lnSpc>
-                      </a:pPr>
-                      <a:r>
-                        <a:rPr lang="en-US" sz="1800" b="0" u="none" strike="noStrike">
-                          <a:solidFill>
-                            <a:srgbClr val="000000"/>
-                          </a:solidFill>
-                          <a:effectLst/>
-                          <a:uFillTx/>
-                          <a:latin typeface="Arial"/>
-                          <a:ea typeface="DejaVu Sans"/>
-                        </a:rPr>
-                        <a:t>Job Satisfaction</a:t>
-                      </a:r>
-                      <a:endParaRPr lang="en-US" sz="1800" b="0" u="none" strike="noStrike">
-                        <a:solidFill>
-                          <a:srgbClr val="000000"/>
-                        </a:solidFill>
-                        <a:effectLst/>
-                        <a:uFillTx/>
-                        <a:latin typeface="Arial"/>
-                      </a:endParaRPr>
-                    </a:p>
-                  </a:txBody>
-                  <a:tcPr anchor="t" marL="36000" marR="36000" marT="36000" marB="36000">
-                    <a:lnL w="7200">
-                      <a:solidFill>
-                        <a:srgbClr val="000000"/>
-                      </a:solidFill>
-                      <a:prstDash val="solid"/>
-                    </a:lnL>
-                    <a:lnR w="7200">
-                      <a:solidFill>
-                        <a:srgbClr val="000000"/>
-                      </a:solidFill>
-                      <a:prstDash val="solid"/>
-                    </a:lnR>
-                    <a:lnT w="7200">
-                      <a:solidFill>
-                        <a:srgbClr val="000000"/>
-                      </a:solidFill>
-                      <a:prstDash val="solid"/>
-                    </a:lnT>
-                    <a:lnB w="7200">
-                      <a:solidFill>
-                        <a:srgbClr val="000000"/>
-                      </a:solidFill>
-                      <a:prstDash val="solid"/>
-                    </a:lnB>
-                    <a:noFill/>
-                  </a:tcPr>
-                </a:tc>
-                <a:tc>
-                  <a:txBody>
-                    <a:bodyPr lIns="36000" tIns="36000" rIns="36000" bIns="36000" anchor="t">
-                      <a:noAutofit/>
-                    </a:bodyPr>
-                    <a:p>
-                      <a:pPr defTabSz="914400">
-                        <a:lnSpc>
-                          <a:spcPct val="100000"/>
-                        </a:lnSpc>
-                      </a:pPr>
-                      <a:r>
-                        <a:rPr lang="en-US" sz="1800" b="0" u="none" strike="noStrike">
-                          <a:solidFill>
-                            <a:srgbClr val="000000"/>
-                          </a:solidFill>
-                          <a:effectLst/>
-                          <a:uFillTx/>
-                          <a:latin typeface="Arial"/>
-                          <a:ea typeface="DejaVu Sans"/>
-                        </a:rPr>
-                        <a:t>Negative Effect</a:t>
-                      </a:r>
-                      <a:endParaRPr lang="en-US" sz="1800" b="0" u="none" strike="noStrike">
-                        <a:solidFill>
-                          <a:srgbClr val="000000"/>
-                        </a:solidFill>
-                        <a:effectLst/>
-                        <a:uFillTx/>
-                        <a:latin typeface="Arial"/>
-                      </a:endParaRPr>
-                    </a:p>
-                  </a:txBody>
-                  <a:tcPr anchor="t" marL="36000" marR="36000" marT="36000" marB="36000">
-                    <a:lnL w="7200">
-                      <a:solidFill>
-                        <a:srgbClr val="000000"/>
-                      </a:solidFill>
-                      <a:prstDash val="solid"/>
-                    </a:lnL>
-                    <a:lnR w="7200">
-                      <a:solidFill>
-                        <a:srgbClr val="000000"/>
-                      </a:solidFill>
-                      <a:prstDash val="solid"/>
-                    </a:lnR>
-                    <a:lnT w="7200">
-                      <a:solidFill>
-                        <a:srgbClr val="000000"/>
-                      </a:solidFill>
-                      <a:prstDash val="solid"/>
-                    </a:lnT>
-                    <a:lnB w="7200">
-                      <a:solidFill>
-                        <a:srgbClr val="000000"/>
-                      </a:solidFill>
-                      <a:prstDash val="solid"/>
-                    </a:lnB>
-                    <a:noFill/>
-                  </a:tcPr>
-                </a:tc>
-              </a:tr>
-              <a:tr h="489600">
-                <a:tc>
-                  <a:txBody>
-                    <a:bodyPr lIns="36000" tIns="36000" rIns="36000" bIns="36000" anchor="t">
-                      <a:noAutofit/>
-                    </a:bodyPr>
-                    <a:p>
-                      <a:pPr defTabSz="914400">
-                        <a:lnSpc>
-                          <a:spcPct val="100000"/>
-                        </a:lnSpc>
-                      </a:pPr>
-                      <a:r>
-                        <a:rPr lang="en-US" sz="1800" b="0" u="none" strike="noStrike">
-                          <a:solidFill>
-                            <a:srgbClr val="000000"/>
-                          </a:solidFill>
-                          <a:effectLst/>
-                          <a:uFillTx/>
-                          <a:latin typeface="Arial"/>
-                          <a:ea typeface="DejaVu Sans"/>
-                        </a:rPr>
-                        <a:t>Total Working Years</a:t>
-                      </a:r>
-                      <a:endParaRPr lang="en-US" sz="1800" b="0" u="none" strike="noStrike">
-                        <a:solidFill>
-                          <a:srgbClr val="000000"/>
-                        </a:solidFill>
-                        <a:effectLst/>
-                        <a:uFillTx/>
-                        <a:latin typeface="Arial"/>
-                      </a:endParaRPr>
-                    </a:p>
-                  </a:txBody>
-                  <a:tcPr anchor="t" marL="36000" marR="36000" marT="36000" marB="36000">
-                    <a:lnL w="7200">
-                      <a:solidFill>
-                        <a:srgbClr val="000000"/>
-                      </a:solidFill>
-                      <a:prstDash val="solid"/>
-                    </a:lnL>
-                    <a:lnR w="7200">
-                      <a:solidFill>
-                        <a:srgbClr val="000000"/>
-                      </a:solidFill>
-                      <a:prstDash val="solid"/>
-                    </a:lnR>
-                    <a:lnT w="7200">
-                      <a:solidFill>
-                        <a:srgbClr val="000000"/>
-                      </a:solidFill>
-                      <a:prstDash val="solid"/>
-                    </a:lnT>
-                    <a:lnB w="7200">
-                      <a:solidFill>
-                        <a:srgbClr val="000000"/>
-                      </a:solidFill>
-                      <a:prstDash val="solid"/>
-                    </a:lnB>
-                    <a:noFill/>
-                  </a:tcPr>
-                </a:tc>
-                <a:tc>
-                  <a:txBody>
-                    <a:bodyPr lIns="36000" tIns="36000" rIns="36000" bIns="36000" anchor="t">
-                      <a:noAutofit/>
-                    </a:bodyPr>
-                    <a:p>
-                      <a:pPr defTabSz="914400">
-                        <a:lnSpc>
-                          <a:spcPct val="100000"/>
-                        </a:lnSpc>
-                      </a:pPr>
-                      <a:r>
-                        <a:rPr lang="en-US" sz="1800" b="0" u="none" strike="noStrike">
-                          <a:solidFill>
-                            <a:srgbClr val="000000"/>
-                          </a:solidFill>
-                          <a:effectLst/>
-                          <a:uFillTx/>
-                          <a:latin typeface="Arial"/>
-                          <a:ea typeface="DejaVu Sans"/>
-                        </a:rPr>
-                        <a:t>Negative Effect</a:t>
-                      </a:r>
-                      <a:endParaRPr lang="en-US" sz="1800" b="0" u="none" strike="noStrike">
-                        <a:solidFill>
-                          <a:srgbClr val="000000"/>
-                        </a:solidFill>
-                        <a:effectLst/>
-                        <a:uFillTx/>
-                        <a:latin typeface="Arial"/>
-                      </a:endParaRPr>
-                    </a:p>
-                  </a:txBody>
-                  <a:tcPr anchor="t" marL="36000" marR="36000" marT="36000" marB="36000">
-                    <a:lnL w="7200">
-                      <a:solidFill>
-                        <a:srgbClr val="000000"/>
-                      </a:solidFill>
-                      <a:prstDash val="solid"/>
-                    </a:lnL>
-                    <a:lnR w="7200">
-                      <a:solidFill>
-                        <a:srgbClr val="000000"/>
-                      </a:solidFill>
-                      <a:prstDash val="solid"/>
-                    </a:lnR>
-                    <a:lnT w="7200">
-                      <a:solidFill>
-                        <a:srgbClr val="000000"/>
-                      </a:solidFill>
-                      <a:prstDash val="solid"/>
-                    </a:lnT>
-                    <a:lnB w="7200">
-                      <a:solidFill>
-                        <a:srgbClr val="000000"/>
-                      </a:solidFill>
-                      <a:prstDash val="solid"/>
-                    </a:lnB>
-                    <a:noFill/>
-                  </a:tcPr>
-                </a:tc>
-              </a:tr>
-            </a:tbl>
-          </a:graphicData>
-        </a:graphic>
-      </p:graphicFrame>
-    </p:spTree>
-  </p:cSld>
-  <mc:AlternateContent>
-    <mc:Choice Requires="p14">
-      <p:transition spd="slow" p14:dur="2000"/>
-    </mc:Choice>
-    <mc:Fallback>
-      <p:transition spd="slow"/>
-    </mc:Fallback>
-  </mc:AlternateContent>
-</p:sld>
-</file>
-
-<file path=ppt/slides/slide19.xml><?xml version="1.0" encoding="utf-8"?>
-<p:sld xmlns:a="http://schemas.openxmlformats.org/drawingml/2006/main" xmlns:p="http://schemas.openxmlformats.org/presentationml/2006/main" xmlns:r="http://schemas.openxmlformats.org/officeDocument/2006/relationships" xmlns:p14="http://schemas.microsoft.com/office/powerpoint/2010/main" xmlns:p15="http://schemas.microsoft.com/office/powerpoint/2012/main" xmlns:mc="http://schemas.openxmlformats.org/markup-compatibility/2006">
+<file path=ppt/slides/slide17.xml><?xml version="1.0" encoding="utf-8"?>
+<p:sld xmlns:a="http://schemas.openxmlformats.org/drawingml/2006/main" xmlns:r="http://schemas.openxmlformats.org/officeDocument/2006/relationships" xmlns:p="http://schemas.openxmlformats.org/presentationml/2006/main">
   <p:cSld>
     <p:spTree>
       <p:nvGrpSpPr>
@@ -6945,6 +5683,7 @@
           <a:bodyPr lIns="0" tIns="0" rIns="0" bIns="0" anchor="ctr">
             <a:spAutoFit/>
           </a:bodyPr>
+          <a:lstStyle/>
           <a:p>
             <a:pPr indent="0" algn="ctr" defTabSz="914400">
               <a:lnSpc>
@@ -6966,14 +5705,6 @@
               </a:rPr>
               <a:t>Recommendations</a:t>
             </a:r>
-            <a:endParaRPr lang="en-US" sz="3300" b="0" u="none" strike="noStrike">
-              <a:solidFill>
-                <a:srgbClr val="000000"/>
-              </a:solidFill>
-              <a:effectLst/>
-              <a:uFillTx/>
-              <a:latin typeface="Arial"/>
-            </a:endParaRPr>
           </a:p>
         </p:txBody>
       </p:sp>
@@ -7004,6 +5735,7 @@
           <a:bodyPr lIns="0" tIns="0" rIns="0" bIns="0" anchor="t">
             <a:normAutofit/>
           </a:bodyPr>
+          <a:lstStyle/>
           <a:p>
             <a:pPr marL="228600" indent="-228600" algn="l" defTabSz="914400">
               <a:lnSpc>
@@ -7020,7 +5752,7 @@
               <a:buChar char=""/>
             </a:pPr>
             <a:r>
-              <a:rPr lang="en-US" sz="2400" b="0" u="none" strike="noStrike">
+              <a:rPr lang="en-US" sz="2400" b="0" u="none" strike="noStrike" dirty="0">
                 <a:solidFill>
                   <a:srgbClr val="000000"/>
                 </a:solidFill>
@@ -7030,14 +5762,6 @@
               </a:rPr>
               <a:t>Monitor employees with sustained overtime requirements.</a:t>
             </a:r>
-            <a:endParaRPr lang="en-US" sz="2400" b="0" u="none" strike="noStrike">
-              <a:solidFill>
-                <a:srgbClr val="000000"/>
-              </a:solidFill>
-              <a:effectLst/>
-              <a:uFillTx/>
-              <a:latin typeface="Arial"/>
-            </a:endParaRPr>
           </a:p>
           <a:p>
             <a:pPr marL="228600" indent="-228600" algn="l" defTabSz="914400">
@@ -7055,7 +5779,7 @@
               <a:buChar char=""/>
             </a:pPr>
             <a:r>
-              <a:rPr lang="en-US" sz="2400" b="0" u="none" strike="noStrike">
+              <a:rPr lang="en-US" sz="2400" b="0" u="none" strike="noStrike" dirty="0">
                 <a:solidFill>
                   <a:srgbClr val="000000"/>
                 </a:solidFill>
@@ -7065,14 +5789,6 @@
               </a:rPr>
               <a:t>Reviewing workload and travel expectations for frequently traveling employees.</a:t>
             </a:r>
-            <a:endParaRPr lang="en-US" sz="2400" b="0" u="none" strike="noStrike">
-              <a:solidFill>
-                <a:srgbClr val="000000"/>
-              </a:solidFill>
-              <a:effectLst/>
-              <a:uFillTx/>
-              <a:latin typeface="Arial"/>
-            </a:endParaRPr>
           </a:p>
           <a:p>
             <a:pPr marL="228600" indent="-228600" algn="l" defTabSz="914400">
@@ -7090,7 +5806,7 @@
               <a:buChar char=""/>
             </a:pPr>
             <a:r>
-              <a:rPr lang="en-US" sz="2400" b="0" u="none" strike="noStrike">
+              <a:rPr lang="en-US" sz="2400" b="0" u="none" strike="noStrike" dirty="0">
                 <a:solidFill>
                   <a:srgbClr val="000000"/>
                 </a:solidFill>
@@ -7100,14 +5816,6 @@
               </a:rPr>
               <a:t>Provide career development opportunities for employees experiencing perceived stalled progression.</a:t>
             </a:r>
-            <a:endParaRPr lang="en-US" sz="2400" b="0" u="none" strike="noStrike">
-              <a:solidFill>
-                <a:srgbClr val="000000"/>
-              </a:solidFill>
-              <a:effectLst/>
-              <a:uFillTx/>
-              <a:latin typeface="Arial"/>
-            </a:endParaRPr>
           </a:p>
           <a:p>
             <a:pPr marL="228600" indent="-228600" algn="l" defTabSz="914400">
@@ -7125,7 +5833,7 @@
               <a:buChar char=""/>
             </a:pPr>
             <a:r>
-              <a:rPr lang="en-US" sz="2400" b="0" u="none" strike="noStrike">
+              <a:rPr lang="en-US" sz="2400" b="0" u="none" strike="noStrike" dirty="0">
                 <a:solidFill>
                   <a:srgbClr val="000000"/>
                 </a:solidFill>
@@ -7135,32 +5843,716 @@
               </a:rPr>
               <a:t>Use satisfaction measures as early indicators of disengagement. </a:t>
             </a:r>
-            <a:endParaRPr lang="en-US" sz="2400" b="0" u="none" strike="noStrike">
-              <a:solidFill>
-                <a:srgbClr val="000000"/>
-              </a:solidFill>
-              <a:effectLst/>
-              <a:uFillTx/>
-              <a:latin typeface="Arial"/>
-            </a:endParaRPr>
           </a:p>
         </p:txBody>
       </p:sp>
     </p:spTree>
   </p:cSld>
-  <mc:AlternateContent>
-    <mc:Choice Requires="p14">
-      <p:transition spd="slow" p14:dur="2000"/>
-    </mc:Choice>
-    <mc:Fallback>
-      <p:transition spd="slow"/>
-    </mc:Fallback>
-  </mc:AlternateContent>
+  <p:clrMapOvr>
+    <a:masterClrMapping/>
+  </p:clrMapOvr>
+</p:sld>
+</file>
+
+<file path=ppt/slides/slide18.xml><?xml version="1.0" encoding="utf-8"?>
+<p:sld xmlns:a="http://schemas.openxmlformats.org/drawingml/2006/main" xmlns:r="http://schemas.openxmlformats.org/officeDocument/2006/relationships" xmlns:p="http://schemas.openxmlformats.org/presentationml/2006/main">
+  <p:cSld>
+    <p:spTree>
+      <p:nvGrpSpPr>
+        <p:cNvPr id="1" name=""/>
+        <p:cNvGrpSpPr/>
+        <p:nvPr/>
+      </p:nvGrpSpPr>
+      <p:grpSpPr>
+        <a:xfrm>
+          <a:off x="0" y="0"/>
+          <a:ext cx="0" cy="0"/>
+          <a:chOff x="0" y="0"/>
+          <a:chExt cx="0" cy="0"/>
+        </a:xfrm>
+      </p:grpSpPr>
+      <p:sp>
+        <p:nvSpPr>
+          <p:cNvPr id="72" name="PlaceHolder 1"/>
+          <p:cNvSpPr>
+            <a:spLocks noGrp="1"/>
+          </p:cNvSpPr>
+          <p:nvPr>
+            <p:ph type="title"/>
+          </p:nvPr>
+        </p:nvSpPr>
+        <p:spPr>
+          <a:xfrm>
+            <a:off x="504000" y="225720"/>
+            <a:ext cx="9071280" cy="946080"/>
+          </a:xfrm>
+          <a:prstGeom prst="rect">
+            <a:avLst/>
+          </a:prstGeom>
+          <a:noFill/>
+          <a:ln w="0">
+            <a:noFill/>
+          </a:ln>
+        </p:spPr>
+        <p:txBody>
+          <a:bodyPr lIns="0" tIns="0" rIns="0" bIns="0" anchor="ctr">
+            <a:noAutofit/>
+          </a:bodyPr>
+          <a:lstStyle/>
+          <a:p>
+            <a:pPr indent="0" algn="ctr" defTabSz="914400">
+              <a:lnSpc>
+                <a:spcPct val="90000"/>
+              </a:lnSpc>
+              <a:buNone/>
+              <a:tabLst>
+                <a:tab pos="0" algn="l"/>
+              </a:tabLst>
+            </a:pPr>
+            <a:r>
+              <a:rPr lang="en-US" sz="3300" b="0" u="none" strike="noStrike">
+                <a:solidFill>
+                  <a:srgbClr val="000000"/>
+                </a:solidFill>
+                <a:effectLst/>
+                <a:uFillTx/>
+                <a:latin typeface="Arial"/>
+                <a:ea typeface="DejaVu Sans"/>
+              </a:rPr>
+              <a:t>Conclusion</a:t>
+            </a:r>
+            <a:endParaRPr lang="en-US" sz="3300" b="0" u="none" strike="noStrike">
+              <a:solidFill>
+                <a:srgbClr val="000000"/>
+              </a:solidFill>
+              <a:effectLst/>
+              <a:uFillTx/>
+              <a:latin typeface="Arial"/>
+            </a:endParaRPr>
+          </a:p>
+        </p:txBody>
+      </p:sp>
+      <p:sp>
+        <p:nvSpPr>
+          <p:cNvPr id="73" name="PlaceHolder 2"/>
+          <p:cNvSpPr/>
+          <p:nvPr/>
+        </p:nvSpPr>
+        <p:spPr>
+          <a:xfrm>
+            <a:off x="504000" y="1433880"/>
+            <a:ext cx="9071280" cy="3287520"/>
+          </a:xfrm>
+          <a:prstGeom prst="rect">
+            <a:avLst/>
+          </a:prstGeom>
+          <a:noFill/>
+          <a:ln w="0">
+            <a:noFill/>
+          </a:ln>
+        </p:spPr>
+        <p:style>
+          <a:lnRef idx="0">
+            <a:scrgbClr r="0" g="0" b="0"/>
+          </a:lnRef>
+          <a:fillRef idx="0">
+            <a:scrgbClr r="0" g="0" b="0"/>
+          </a:fillRef>
+          <a:effectRef idx="0">
+            <a:scrgbClr r="0" g="0" b="0"/>
+          </a:effectRef>
+          <a:fontRef idx="minor"/>
+        </p:style>
+        <p:txBody>
+          <a:bodyPr lIns="0" tIns="0" rIns="0" bIns="0" anchor="t">
+            <a:normAutofit fontScale="92500" lnSpcReduction="19999"/>
+          </a:bodyPr>
+          <a:lstStyle/>
+          <a:p>
+            <a:pPr marL="432000" indent="-324000" defTabSz="914400">
+              <a:lnSpc>
+                <a:spcPct val="100000"/>
+              </a:lnSpc>
+              <a:spcBef>
+                <a:spcPts val="1060"/>
+              </a:spcBef>
+              <a:buClr>
+                <a:srgbClr val="000000"/>
+              </a:buClr>
+              <a:buSzPct val="45000"/>
+              <a:buFont typeface="Wingdings" charset="2"/>
+              <a:buChar char=""/>
+              <a:tabLst>
+                <a:tab pos="0" algn="l"/>
+              </a:tabLst>
+            </a:pPr>
+            <a:r>
+              <a:rPr lang="en-US" sz="2400" b="0" u="none" strike="noStrike" dirty="0">
+                <a:solidFill>
+                  <a:srgbClr val="000000"/>
+                </a:solidFill>
+                <a:effectLst/>
+                <a:uFillTx/>
+                <a:latin typeface="Arial"/>
+                <a:ea typeface="DejaVu Sans"/>
+              </a:rPr>
+              <a:t>Based on our assumptions and the data available, a retention program is well worth the investment as it results in significant cost savings from having to replace an employee.</a:t>
+            </a:r>
+            <a:endParaRPr lang="en-US" sz="2400" b="0" u="none" strike="noStrike" dirty="0">
+              <a:solidFill>
+                <a:srgbClr val="000000"/>
+              </a:solidFill>
+              <a:effectLst/>
+              <a:uFillTx/>
+              <a:latin typeface="Arial"/>
+            </a:endParaRPr>
+          </a:p>
+          <a:p>
+            <a:pPr marL="914400" lvl="2" indent="-216000" defTabSz="914400">
+              <a:lnSpc>
+                <a:spcPct val="100000"/>
+              </a:lnSpc>
+              <a:spcBef>
+                <a:spcPts val="1060"/>
+              </a:spcBef>
+              <a:buClr>
+                <a:srgbClr val="000000"/>
+              </a:buClr>
+              <a:buSzPct val="45000"/>
+              <a:buFont typeface="Symbol" charset="2"/>
+              <a:buChar char=""/>
+              <a:tabLst>
+                <a:tab pos="0" algn="l"/>
+              </a:tabLst>
+            </a:pPr>
+            <a:r>
+              <a:rPr lang="en-US" sz="2400" b="0" u="none" strike="noStrike" dirty="0">
+                <a:solidFill>
+                  <a:srgbClr val="000000"/>
+                </a:solidFill>
+                <a:effectLst/>
+                <a:uFillTx/>
+                <a:latin typeface="Arial"/>
+                <a:ea typeface="DejaVu Sans"/>
+              </a:rPr>
+              <a:t>Monetary benefits can be one-time installments, a more permanent yearly raise, or an investment into career growth opportunities.</a:t>
+            </a:r>
+            <a:endParaRPr lang="en-US" sz="2400" b="0" u="none" strike="noStrike" dirty="0">
+              <a:solidFill>
+                <a:srgbClr val="000000"/>
+              </a:solidFill>
+              <a:effectLst/>
+              <a:uFillTx/>
+              <a:latin typeface="Arial"/>
+            </a:endParaRPr>
+          </a:p>
+          <a:p>
+            <a:pPr marL="432000" indent="-324000" defTabSz="914400">
+              <a:lnSpc>
+                <a:spcPct val="100000"/>
+              </a:lnSpc>
+              <a:spcBef>
+                <a:spcPts val="1060"/>
+              </a:spcBef>
+              <a:buClr>
+                <a:srgbClr val="000000"/>
+              </a:buClr>
+              <a:buSzPct val="45000"/>
+              <a:buFont typeface="Wingdings" charset="2"/>
+              <a:buChar char=""/>
+              <a:tabLst>
+                <a:tab pos="0" algn="l"/>
+              </a:tabLst>
+            </a:pPr>
+            <a:r>
+              <a:rPr lang="en-US" sz="2400" b="0" u="none" strike="noStrike" dirty="0">
+                <a:solidFill>
+                  <a:srgbClr val="000000"/>
+                </a:solidFill>
+                <a:effectLst/>
+                <a:uFillTx/>
+                <a:latin typeface="Arial"/>
+                <a:ea typeface="DejaVu Sans"/>
+              </a:rPr>
+              <a:t>Money invested into employees as false positives is still likely to improve moral, productivity, and possibly other benefits.</a:t>
+            </a:r>
+            <a:endParaRPr lang="en-US" sz="2400" b="0" u="none" strike="noStrike" dirty="0">
+              <a:solidFill>
+                <a:srgbClr val="000000"/>
+              </a:solidFill>
+              <a:effectLst/>
+              <a:uFillTx/>
+              <a:latin typeface="Arial"/>
+            </a:endParaRPr>
+          </a:p>
+          <a:p>
+            <a:pPr marL="432000" indent="-324000" defTabSz="914400">
+              <a:lnSpc>
+                <a:spcPct val="100000"/>
+              </a:lnSpc>
+              <a:spcBef>
+                <a:spcPts val="1060"/>
+              </a:spcBef>
+              <a:buClr>
+                <a:srgbClr val="000000"/>
+              </a:buClr>
+              <a:buSzPct val="45000"/>
+              <a:buFont typeface="Wingdings" charset="2"/>
+              <a:buChar char=""/>
+              <a:tabLst>
+                <a:tab pos="0" algn="l"/>
+              </a:tabLst>
+            </a:pPr>
+            <a:r>
+              <a:rPr lang="en-US" sz="2400" b="0" u="none" strike="noStrike" dirty="0">
+                <a:solidFill>
+                  <a:srgbClr val="000000"/>
+                </a:solidFill>
+                <a:effectLst/>
+                <a:uFillTx/>
+                <a:latin typeface="Arial"/>
+                <a:ea typeface="DejaVu Sans"/>
+              </a:rPr>
+              <a:t>Over time and with more data, the model may be improved resulting in even more savings.</a:t>
+            </a:r>
+            <a:endParaRPr lang="en-US" sz="2400" b="0" u="none" strike="noStrike" dirty="0">
+              <a:solidFill>
+                <a:srgbClr val="000000"/>
+              </a:solidFill>
+              <a:effectLst/>
+              <a:uFillTx/>
+              <a:latin typeface="Arial"/>
+            </a:endParaRPr>
+          </a:p>
+        </p:txBody>
+      </p:sp>
+    </p:spTree>
+  </p:cSld>
+  <p:clrMapOvr>
+    <a:masterClrMapping/>
+  </p:clrMapOvr>
+</p:sld>
+</file>
+
+<file path=ppt/slides/slide19.xml><?xml version="1.0" encoding="utf-8"?>
+<p:sld xmlns:a="http://schemas.openxmlformats.org/drawingml/2006/main" xmlns:r="http://schemas.openxmlformats.org/officeDocument/2006/relationships" xmlns:p="http://schemas.openxmlformats.org/presentationml/2006/main">
+  <p:cSld>
+    <p:spTree>
+      <p:nvGrpSpPr>
+        <p:cNvPr id="1" name=""/>
+        <p:cNvGrpSpPr/>
+        <p:nvPr/>
+      </p:nvGrpSpPr>
+      <p:grpSpPr>
+        <a:xfrm>
+          <a:off x="0" y="0"/>
+          <a:ext cx="0" cy="0"/>
+          <a:chOff x="0" y="0"/>
+          <a:chExt cx="0" cy="0"/>
+        </a:xfrm>
+      </p:grpSpPr>
+      <p:sp>
+        <p:nvSpPr>
+          <p:cNvPr id="74" name="PlaceHolder 1"/>
+          <p:cNvSpPr>
+            <a:spLocks noGrp="1"/>
+          </p:cNvSpPr>
+          <p:nvPr>
+            <p:ph type="title"/>
+          </p:nvPr>
+        </p:nvSpPr>
+        <p:spPr>
+          <a:xfrm>
+            <a:off x="504000" y="225720"/>
+            <a:ext cx="9071280" cy="946080"/>
+          </a:xfrm>
+          <a:prstGeom prst="rect">
+            <a:avLst/>
+          </a:prstGeom>
+          <a:noFill/>
+          <a:ln w="0">
+            <a:noFill/>
+          </a:ln>
+        </p:spPr>
+        <p:txBody>
+          <a:bodyPr lIns="0" tIns="0" rIns="0" bIns="0" anchor="ctr">
+            <a:spAutoFit/>
+          </a:bodyPr>
+          <a:lstStyle/>
+          <a:p>
+            <a:pPr indent="0" algn="ctr" defTabSz="914400">
+              <a:lnSpc>
+                <a:spcPct val="90000"/>
+              </a:lnSpc>
+              <a:buNone/>
+              <a:tabLst>
+                <a:tab pos="0" algn="l"/>
+              </a:tabLst>
+            </a:pPr>
+            <a:r>
+              <a:rPr lang="en-US" sz="3300" b="0" u="none" strike="noStrike">
+                <a:solidFill>
+                  <a:srgbClr val="000000"/>
+                </a:solidFill>
+                <a:effectLst/>
+                <a:uFillTx/>
+                <a:latin typeface="Arial"/>
+              </a:rPr>
+              <a:t>Closing Thoughts</a:t>
+            </a:r>
+          </a:p>
+        </p:txBody>
+      </p:sp>
+      <p:sp>
+        <p:nvSpPr>
+          <p:cNvPr id="75" name="PlaceHolder 2"/>
+          <p:cNvSpPr>
+            <a:spLocks noGrp="1"/>
+          </p:cNvSpPr>
+          <p:nvPr>
+            <p:ph/>
+          </p:nvPr>
+        </p:nvSpPr>
+        <p:spPr>
+          <a:xfrm>
+            <a:off x="504000" y="1326600"/>
+            <a:ext cx="9071280" cy="3287520"/>
+          </a:xfrm>
+          <a:prstGeom prst="rect">
+            <a:avLst/>
+          </a:prstGeom>
+          <a:noFill/>
+          <a:ln w="0">
+            <a:noFill/>
+          </a:ln>
+        </p:spPr>
+        <p:txBody>
+          <a:bodyPr lIns="0" tIns="0" rIns="0" bIns="0" anchor="t">
+            <a:normAutofit lnSpcReduction="10000"/>
+          </a:bodyPr>
+          <a:lstStyle/>
+          <a:p>
+            <a:pPr marL="228600" indent="-228600" algn="l" defTabSz="914400">
+              <a:lnSpc>
+                <a:spcPct val="90000"/>
+              </a:lnSpc>
+              <a:spcBef>
+                <a:spcPts val="1060"/>
+              </a:spcBef>
+              <a:buClr>
+                <a:srgbClr val="000000"/>
+              </a:buClr>
+              <a:buSzPct val="45000"/>
+              <a:buFont typeface="Wingdings" charset="2"/>
+              <a:buChar char=""/>
+            </a:pPr>
+            <a:r>
+              <a:rPr lang="en-US" sz="2400" b="0" u="none" strike="noStrike" dirty="0">
+                <a:solidFill>
+                  <a:srgbClr val="000000"/>
+                </a:solidFill>
+                <a:effectLst/>
+                <a:uFillTx/>
+                <a:latin typeface="Arial"/>
+              </a:rPr>
+              <a:t>In this example:</a:t>
+            </a:r>
+          </a:p>
+          <a:p>
+            <a:pPr marL="864000" lvl="1" indent="-324000" algn="l" defTabSz="914400">
+              <a:lnSpc>
+                <a:spcPct val="90000"/>
+              </a:lnSpc>
+              <a:spcBef>
+                <a:spcPts val="850"/>
+              </a:spcBef>
+              <a:buClr>
+                <a:srgbClr val="000000"/>
+              </a:buClr>
+              <a:buSzPct val="75000"/>
+              <a:buFont typeface="Symbol" charset="2"/>
+              <a:buChar char=""/>
+            </a:pPr>
+            <a:r>
+              <a:rPr lang="en-US" sz="2100" b="0" u="none" strike="noStrike" dirty="0">
+                <a:solidFill>
+                  <a:srgbClr val="000000"/>
+                </a:solidFill>
+                <a:effectLst/>
+                <a:uFillTx/>
+                <a:latin typeface="Arial"/>
+              </a:rPr>
+              <a:t>Targeted 194 high-risk employees with an $8,000 intervention (</a:t>
+            </a:r>
+            <a:r>
+              <a:rPr lang="en-US" sz="2100" b="1" u="none" strike="noStrike" dirty="0">
+                <a:solidFill>
+                  <a:srgbClr val="000000"/>
+                </a:solidFill>
+                <a:effectLst/>
+                <a:uFillTx/>
+                <a:latin typeface="Arial"/>
+              </a:rPr>
+              <a:t>$1,552,000 total investment</a:t>
+            </a:r>
+            <a:r>
+              <a:rPr lang="en-US" sz="2100" b="0" u="none" strike="noStrike" dirty="0">
+                <a:solidFill>
+                  <a:srgbClr val="000000"/>
+                </a:solidFill>
+                <a:effectLst/>
+                <a:uFillTx/>
+                <a:latin typeface="Arial"/>
+              </a:rPr>
+              <a:t>) </a:t>
+            </a:r>
+          </a:p>
+          <a:p>
+            <a:pPr marL="1296000" lvl="2" indent="-288000" algn="l" defTabSz="914400">
+              <a:lnSpc>
+                <a:spcPct val="90000"/>
+              </a:lnSpc>
+              <a:spcBef>
+                <a:spcPts val="638"/>
+              </a:spcBef>
+              <a:buClr>
+                <a:srgbClr val="000000"/>
+              </a:buClr>
+              <a:buSzPct val="45000"/>
+              <a:buFont typeface="Wingdings" charset="2"/>
+              <a:buChar char=""/>
+            </a:pPr>
+            <a:r>
+              <a:rPr lang="en-US" sz="1800" b="0" u="none" strike="noStrike" dirty="0">
+                <a:solidFill>
+                  <a:srgbClr val="000000"/>
+                </a:solidFill>
+                <a:effectLst/>
+                <a:uFillTx/>
+                <a:latin typeface="Arial"/>
+              </a:rPr>
+              <a:t>Successfully retains 79 employees who otherwise would have left. </a:t>
+            </a:r>
+          </a:p>
+          <a:p>
+            <a:pPr marL="1296000" lvl="2" indent="-288000" algn="l" defTabSz="914400">
+              <a:lnSpc>
+                <a:spcPct val="90000"/>
+              </a:lnSpc>
+              <a:spcBef>
+                <a:spcPts val="638"/>
+              </a:spcBef>
+              <a:buClr>
+                <a:srgbClr val="000000"/>
+              </a:buClr>
+              <a:buSzPct val="45000"/>
+              <a:buFont typeface="Wingdings" charset="2"/>
+              <a:buChar char=""/>
+            </a:pPr>
+            <a:r>
+              <a:rPr lang="en-US" dirty="0">
+                <a:solidFill>
+                  <a:srgbClr val="000000"/>
+                </a:solidFill>
+                <a:latin typeface="Arial"/>
+              </a:rPr>
+              <a:t>6</a:t>
+            </a:r>
+            <a:r>
+              <a:rPr lang="en-US" sz="1800" b="0" u="none" strike="noStrike" dirty="0">
+                <a:solidFill>
+                  <a:srgbClr val="000000"/>
+                </a:solidFill>
+                <a:effectLst/>
+                <a:uFillTx/>
+                <a:latin typeface="Arial"/>
+              </a:rPr>
+              <a:t>3 employees were false positives</a:t>
+            </a:r>
+          </a:p>
+          <a:p>
+            <a:pPr marL="1296000" lvl="2" indent="-288000" algn="l" defTabSz="914400">
+              <a:lnSpc>
+                <a:spcPct val="90000"/>
+              </a:lnSpc>
+              <a:spcBef>
+                <a:spcPts val="638"/>
+              </a:spcBef>
+              <a:buClr>
+                <a:srgbClr val="000000"/>
+              </a:buClr>
+              <a:buSzPct val="45000"/>
+              <a:buFont typeface="Wingdings" charset="2"/>
+              <a:buChar char=""/>
+            </a:pPr>
+            <a:r>
+              <a:rPr lang="en-US" dirty="0">
+                <a:solidFill>
+                  <a:srgbClr val="000000"/>
+                </a:solidFill>
+                <a:latin typeface="Arial"/>
+              </a:rPr>
+              <a:t>52</a:t>
+            </a:r>
+            <a:r>
+              <a:rPr lang="en-US" sz="1800" b="0" u="none" strike="noStrike" dirty="0">
+                <a:solidFill>
+                  <a:srgbClr val="000000"/>
+                </a:solidFill>
+                <a:effectLst/>
+                <a:uFillTx/>
+                <a:latin typeface="Arial"/>
+              </a:rPr>
+              <a:t> employees left the company even after the intervention attempt.</a:t>
+            </a:r>
+          </a:p>
+          <a:p>
+            <a:pPr marL="864000" lvl="1" indent="-324000" algn="l" defTabSz="914400">
+              <a:lnSpc>
+                <a:spcPct val="90000"/>
+              </a:lnSpc>
+              <a:spcBef>
+                <a:spcPts val="850"/>
+              </a:spcBef>
+              <a:buClr>
+                <a:srgbClr val="000000"/>
+              </a:buClr>
+              <a:buSzPct val="75000"/>
+              <a:buFont typeface="Symbol" charset="2"/>
+              <a:buChar char=""/>
+            </a:pPr>
+            <a:r>
+              <a:rPr lang="en-US" sz="2100" b="0" u="none" strike="noStrike" dirty="0">
+                <a:solidFill>
+                  <a:srgbClr val="000000"/>
+                </a:solidFill>
+                <a:effectLst/>
+                <a:uFillTx/>
+                <a:latin typeface="Arial"/>
+              </a:rPr>
+              <a:t>At $40,000 saved per retained employee (</a:t>
+            </a:r>
+            <a:r>
+              <a:rPr lang="en-US" sz="2100" b="1" u="none" strike="noStrike" dirty="0">
+                <a:solidFill>
+                  <a:srgbClr val="000000"/>
+                </a:solidFill>
+                <a:effectLst/>
+                <a:uFillTx/>
+                <a:latin typeface="Arial"/>
+              </a:rPr>
+              <a:t>$3,</a:t>
+            </a:r>
+            <a:r>
+              <a:rPr lang="en-US" sz="2100" b="1" dirty="0">
+                <a:solidFill>
+                  <a:srgbClr val="000000"/>
+                </a:solidFill>
+                <a:latin typeface="Arial"/>
+              </a:rPr>
+              <a:t>16</a:t>
+            </a:r>
+            <a:r>
+              <a:rPr lang="en-US" sz="2100" b="1" u="none" strike="noStrike" dirty="0">
+                <a:solidFill>
+                  <a:srgbClr val="000000"/>
+                </a:solidFill>
+                <a:effectLst/>
+                <a:uFillTx/>
+                <a:latin typeface="Arial"/>
+              </a:rPr>
+              <a:t>0,000 gross savings</a:t>
+            </a:r>
+            <a:r>
+              <a:rPr lang="en-US" sz="2100" b="0" u="none" strike="noStrike" dirty="0">
+                <a:solidFill>
+                  <a:srgbClr val="000000"/>
+                </a:solidFill>
+                <a:effectLst/>
+                <a:uFillTx/>
+                <a:latin typeface="Arial"/>
+              </a:rPr>
+              <a:t>), the program yields a </a:t>
+            </a:r>
+            <a:r>
+              <a:rPr lang="en-US" sz="2100" b="1" u="none" strike="noStrike" dirty="0">
+                <a:solidFill>
+                  <a:srgbClr val="000000"/>
+                </a:solidFill>
+                <a:effectLst/>
+                <a:uFillTx/>
+                <a:latin typeface="Arial"/>
+              </a:rPr>
+              <a:t>net ROI of </a:t>
+            </a:r>
+            <a:r>
+              <a:rPr lang="en-US" sz="2100" b="1" u="none" strike="noStrike" dirty="0">
+                <a:solidFill>
+                  <a:srgbClr val="00A933"/>
+                </a:solidFill>
+                <a:effectLst/>
+                <a:uFillTx/>
+                <a:latin typeface="Arial"/>
+              </a:rPr>
+              <a:t>$1,608,000</a:t>
+            </a:r>
+            <a:r>
+              <a:rPr lang="en-US" sz="2100" b="0" u="none" strike="noStrike" dirty="0">
+                <a:solidFill>
+                  <a:srgbClr val="000000"/>
+                </a:solidFill>
+                <a:effectLst/>
+                <a:uFillTx/>
+                <a:latin typeface="Arial"/>
+              </a:rPr>
+              <a:t>.</a:t>
+            </a:r>
+          </a:p>
+          <a:p>
+            <a:pPr marL="864000" lvl="1" indent="-324000" algn="l" defTabSz="914400">
+              <a:lnSpc>
+                <a:spcPct val="90000"/>
+              </a:lnSpc>
+              <a:spcBef>
+                <a:spcPts val="850"/>
+              </a:spcBef>
+              <a:buClr>
+                <a:srgbClr val="000000"/>
+              </a:buClr>
+              <a:buSzPct val="75000"/>
+              <a:buFont typeface="Symbol" charset="2"/>
+              <a:buChar char=""/>
+            </a:pPr>
+            <a:r>
+              <a:rPr lang="en-US" sz="2100" dirty="0">
+                <a:solidFill>
+                  <a:srgbClr val="000000"/>
+                </a:solidFill>
+                <a:latin typeface="Arial"/>
+              </a:rPr>
+              <a:t>In other words, for every $1 invested, $2.04 in turnover costs are avoided.</a:t>
+            </a:r>
+            <a:endParaRPr lang="en-US" sz="2100" b="0" u="none" strike="noStrike" dirty="0">
+              <a:solidFill>
+                <a:srgbClr val="000000"/>
+              </a:solidFill>
+              <a:effectLst/>
+              <a:uFillTx/>
+              <a:latin typeface="Arial"/>
+            </a:endParaRPr>
+          </a:p>
+        </p:txBody>
+      </p:sp>
+    </p:spTree>
+  </p:cSld>
+  <p:clrMapOvr>
+    <a:masterClrMapping/>
+  </p:clrMapOvr>
 </p:sld>
 </file>
 
 <file path=ppt/slides/slide2.xml><?xml version="1.0" encoding="utf-8"?>
-<p:sld xmlns:a="http://schemas.openxmlformats.org/drawingml/2006/main" xmlns:p="http://schemas.openxmlformats.org/presentationml/2006/main" xmlns:r="http://schemas.openxmlformats.org/officeDocument/2006/relationships" xmlns:p14="http://schemas.microsoft.com/office/powerpoint/2010/main" xmlns:p15="http://schemas.microsoft.com/office/powerpoint/2012/main" xmlns:mc="http://schemas.openxmlformats.org/markup-compatibility/2006">
+<p:sld xmlns:a="http://schemas.openxmlformats.org/drawingml/2006/main" xmlns:r="http://schemas.openxmlformats.org/officeDocument/2006/relationships" xmlns:p="http://schemas.openxmlformats.org/presentationml/2006/main">
   <p:cSld>
     <p:spTree>
       <p:nvGrpSpPr>
@@ -7203,6 +6595,7 @@
           <a:bodyPr lIns="0" tIns="0" rIns="0" bIns="0" anchor="ctr">
             <a:spAutoFit/>
           </a:bodyPr>
+          <a:lstStyle/>
           <a:p>
             <a:pPr indent="0" algn="ctr" defTabSz="914400">
               <a:lnSpc>
@@ -7263,6 +6656,7 @@
           <a:bodyPr lIns="0" tIns="0" rIns="0" bIns="0" anchor="t">
             <a:normAutofit lnSpcReduction="9999"/>
           </a:bodyPr>
+          <a:lstStyle/>
           <a:p>
             <a:pPr marL="432000" indent="-324000" algn="l" defTabSz="914400">
               <a:lnSpc>
@@ -7282,7 +6676,7 @@
               <a:buChar char=""/>
             </a:pPr>
             <a:r>
-              <a:rPr lang="en-US" sz="2400" b="0" u="none" strike="noStrike">
+              <a:rPr lang="en-US" sz="2400" b="0" u="none" strike="noStrike" dirty="0">
                 <a:solidFill>
                   <a:srgbClr val="000000"/>
                 </a:solidFill>
@@ -7293,7 +6687,7 @@
               </a:rPr>
               <a:t>Employee turnover is an expensive problem for a company.</a:t>
             </a:r>
-            <a:endParaRPr lang="en-US" sz="2400" b="0" u="none" strike="noStrike">
+            <a:endParaRPr lang="en-US" sz="2400" b="0" u="none" strike="noStrike" dirty="0">
               <a:solidFill>
                 <a:srgbClr val="000000"/>
               </a:solidFill>
@@ -7318,18 +6712,28 @@
               <a:buChar char="-"/>
             </a:pPr>
             <a:r>
-              <a:rPr lang="en-US" sz="2400" b="0" u="none" strike="noStrike">
-                <a:solidFill>
-                  <a:srgbClr val="000000"/>
-                </a:solidFill>
-                <a:effectLst/>
-                <a:uFillTx/>
-                <a:latin typeface="Arial"/>
-                <a:ea typeface="DejaVu Sans"/>
-              </a:rPr>
-              <a:t>Let’s assume that the business looses $40,000 every time an employee leaves due to lost productivity as well as time spent to find, hire, and train a new employee.</a:t>
-            </a:r>
-            <a:endParaRPr lang="en-US" sz="2400" b="0" u="none" strike="noStrike">
+              <a:rPr lang="en-US" sz="2000" dirty="0">
+                <a:solidFill>
+                  <a:srgbClr val="000000"/>
+                </a:solidFill>
+                <a:latin typeface="Arial"/>
+                <a:ea typeface="DejaVu Sans"/>
+              </a:rPr>
+              <a:t>We</a:t>
+            </a:r>
+            <a:r>
+              <a:rPr lang="en-US" sz="2000" b="0" u="none" strike="noStrike" dirty="0">
+                <a:solidFill>
+                  <a:srgbClr val="000000"/>
+                </a:solidFill>
+                <a:effectLst/>
+                <a:uFillTx/>
+                <a:latin typeface="Arial"/>
+                <a:ea typeface="DejaVu Sans"/>
+              </a:rPr>
+              <a:t> assume there’s a cost incurred of $40,000 every time an employee leaves due to lost productivity as well as time spent to find, hire, and train a new employee.</a:t>
+            </a:r>
+            <a:endParaRPr lang="en-US" sz="2000" b="0" u="none" strike="noStrike" dirty="0">
               <a:solidFill>
                 <a:srgbClr val="000000"/>
               </a:solidFill>
@@ -7357,7 +6761,7 @@
               <a:buChar char=""/>
             </a:pPr>
             <a:r>
-              <a:rPr lang="en-US" sz="2400" b="0" u="none" strike="noStrike">
+              <a:rPr lang="en-US" sz="2400" b="0" u="none" strike="noStrike" dirty="0">
                 <a:solidFill>
                   <a:srgbClr val="000000"/>
                 </a:solidFill>
@@ -7368,7 +6772,7 @@
               </a:rPr>
               <a:t>With that in mind, should we adopt a retention program using this predictive model and how much financial value does it create?</a:t>
             </a:r>
-            <a:endParaRPr lang="en-US" sz="2400" b="0" u="none" strike="noStrike">
+            <a:endParaRPr lang="en-US" sz="2400" b="0" u="none" strike="noStrike" dirty="0">
               <a:solidFill>
                 <a:srgbClr val="000000"/>
               </a:solidFill>
@@ -7396,7 +6800,7 @@
               <a:buChar char=""/>
             </a:pPr>
             <a:r>
-              <a:rPr lang="en-US" sz="2400" b="0" u="none" strike="noStrike">
+              <a:rPr lang="en-US" sz="2400" b="0" u="none" strike="noStrike" dirty="0">
                 <a:solidFill>
                   <a:srgbClr val="000000"/>
                 </a:solidFill>
@@ -7407,135 +6811,7 @@
               </a:rPr>
               <a:t>The primary objective is to accurately determine which employees are likely to quit before they do.</a:t>
             </a:r>
-            <a:endParaRPr lang="en-US" sz="2400" b="0" u="none" strike="noStrike">
-              <a:solidFill>
-                <a:srgbClr val="000000"/>
-              </a:solidFill>
-              <a:effectLst/>
-              <a:uFillTx/>
-              <a:latin typeface="Arial"/>
-            </a:endParaRPr>
-          </a:p>
-        </p:txBody>
-      </p:sp>
-      <p:sp>
-        <p:nvSpPr>
-          <p:cNvPr id="30" name="TextBox 23"/>
-          <p:cNvSpPr/>
-          <p:nvPr/>
-        </p:nvSpPr>
-        <p:spPr>
-          <a:xfrm>
-            <a:off x="2273400" y="2721240"/>
-            <a:ext cx="5558760" cy="231120"/>
-          </a:xfrm>
-          <a:prstGeom prst="rect">
-            <a:avLst/>
-          </a:prstGeom>
-          <a:noFill/>
-          <a:ln w="18000">
-            <a:noFill/>
-          </a:ln>
-        </p:spPr>
-        <p:style>
-          <a:lnRef idx="0"/>
-          <a:fillRef idx="0"/>
-          <a:effectRef idx="0"/>
-          <a:fontRef idx="minor"/>
-        </p:style>
-        <p:txBody>
-          <a:bodyPr lIns="90000" tIns="45000" rIns="90000" bIns="45000" anchor="t">
-            <a:noAutofit/>
-          </a:bodyPr>
-          <a:p>
-            <a:pPr algn="ctr" defTabSz="914400">
-              <a:lnSpc>
-                <a:spcPct val="100000"/>
-              </a:lnSpc>
-              <a:spcBef>
-                <a:spcPts val="1191"/>
-              </a:spcBef>
-              <a:spcAft>
-                <a:spcPts val="992"/>
-              </a:spcAft>
-            </a:pPr>
-            <a:r>
-              <a:rPr lang="en-US" sz="1000" b="0" u="none" strike="noStrike">
-                <a:solidFill>
-                  <a:srgbClr val="FFFFFF"/>
-                </a:solidFill>
-                <a:effectLst/>
-                <a:uFillTx/>
-                <a:latin typeface="Arial"/>
-                <a:ea typeface="DejaVu Sans"/>
-              </a:rPr>
-              <a:t>How much financial value does using this predictive model create compared with not using one?</a:t>
-            </a:r>
-            <a:endParaRPr lang="en-US" sz="1000" b="0" u="none" strike="noStrike">
-              <a:solidFill>
-                <a:srgbClr val="000000"/>
-              </a:solidFill>
-              <a:effectLst/>
-              <a:uFillTx/>
-              <a:latin typeface="Arial"/>
-            </a:endParaRPr>
-          </a:p>
-        </p:txBody>
-      </p:sp>
-      <p:sp>
-        <p:nvSpPr>
-          <p:cNvPr id="31" name="TextBox 24"/>
-          <p:cNvSpPr/>
-          <p:nvPr/>
-        </p:nvSpPr>
-        <p:spPr>
-          <a:xfrm>
-            <a:off x="2273760" y="2721240"/>
-            <a:ext cx="5558760" cy="231120"/>
-          </a:xfrm>
-          <a:prstGeom prst="rect">
-            <a:avLst/>
-          </a:prstGeom>
-          <a:noFill/>
-          <a:ln w="18000">
-            <a:noFill/>
-          </a:ln>
-        </p:spPr>
-        <p:style>
-          <a:lnRef idx="0"/>
-          <a:fillRef idx="0"/>
-          <a:effectRef idx="0"/>
-          <a:fontRef idx="minor"/>
-        </p:style>
-        <p:txBody>
-          <a:bodyPr lIns="90000" tIns="45000" rIns="90000" bIns="45000" anchor="t">
-            <a:noAutofit/>
-          </a:bodyPr>
-          <a:p>
-            <a:pPr algn="ctr" defTabSz="914400">
-              <a:lnSpc>
-                <a:spcPct val="100000"/>
-              </a:lnSpc>
-              <a:spcBef>
-                <a:spcPts val="1191"/>
-              </a:spcBef>
-              <a:spcAft>
-                <a:spcPts val="992"/>
-              </a:spcAft>
-            </a:pPr>
-            <a:r>
-              <a:rPr lang="en-US" sz="1000" b="0" u="none" strike="noStrike">
-                <a:solidFill>
-                  <a:srgbClr val="FFFFFF"/>
-                </a:solidFill>
-                <a:effectLst/>
-                <a:uFillTx/>
-                <a:latin typeface="Arial"/>
-                <a:ea typeface="DejaVu Sans"/>
-              </a:rPr>
-              <a:t>How much financial value does using this predictive model create compared with not using one?</a:t>
-            </a:r>
-            <a:endParaRPr lang="en-US" sz="1000" b="0" u="none" strike="noStrike">
+            <a:endParaRPr lang="en-US" sz="2400" b="0" u="none" strike="noStrike" dirty="0">
               <a:solidFill>
                 <a:srgbClr val="000000"/>
               </a:solidFill>
@@ -7548,701 +6824,14 @@
       </p:sp>
     </p:spTree>
   </p:cSld>
-  <mc:AlternateContent>
-    <mc:Choice Requires="p14">
-      <p:transition spd="slow" p14:dur="2000"/>
-    </mc:Choice>
-    <mc:Fallback>
-      <p:transition spd="slow"/>
-    </mc:Fallback>
-  </mc:AlternateContent>
+  <p:clrMapOvr>
+    <a:masterClrMapping/>
+  </p:clrMapOvr>
 </p:sld>
 </file>
 
 <file path=ppt/slides/slide20.xml><?xml version="1.0" encoding="utf-8"?>
-<p:sld xmlns:a="http://schemas.openxmlformats.org/drawingml/2006/main" xmlns:p="http://schemas.openxmlformats.org/presentationml/2006/main" xmlns:r="http://schemas.openxmlformats.org/officeDocument/2006/relationships" xmlns:p14="http://schemas.microsoft.com/office/powerpoint/2010/main" xmlns:p15="http://schemas.microsoft.com/office/powerpoint/2012/main" xmlns:mc="http://schemas.openxmlformats.org/markup-compatibility/2006">
-  <p:cSld>
-    <p:spTree>
-      <p:nvGrpSpPr>
-        <p:cNvPr id="1" name=""/>
-        <p:cNvGrpSpPr/>
-        <p:nvPr/>
-      </p:nvGrpSpPr>
-      <p:grpSpPr>
-        <a:xfrm>
-          <a:off x="0" y="0"/>
-          <a:ext cx="0" cy="0"/>
-          <a:chOff x="0" y="0"/>
-          <a:chExt cx="0" cy="0"/>
-        </a:xfrm>
-      </p:grpSpPr>
-      <p:sp>
-        <p:nvSpPr>
-          <p:cNvPr id="72" name="PlaceHolder 1"/>
-          <p:cNvSpPr>
-            <a:spLocks noGrp="1"/>
-          </p:cNvSpPr>
-          <p:nvPr>
-            <p:ph type="title"/>
-          </p:nvPr>
-        </p:nvSpPr>
-        <p:spPr>
-          <a:xfrm>
-            <a:off x="504000" y="225720"/>
-            <a:ext cx="9071280" cy="946080"/>
-          </a:xfrm>
-          <a:prstGeom prst="rect">
-            <a:avLst/>
-          </a:prstGeom>
-          <a:noFill/>
-          <a:ln w="0">
-            <a:noFill/>
-          </a:ln>
-        </p:spPr>
-        <p:txBody>
-          <a:bodyPr lIns="0" tIns="0" rIns="0" bIns="0" anchor="ctr">
-            <a:noAutofit/>
-          </a:bodyPr>
-          <a:p>
-            <a:pPr indent="0" algn="ctr" defTabSz="914400">
-              <a:lnSpc>
-                <a:spcPct val="90000"/>
-              </a:lnSpc>
-              <a:buNone/>
-              <a:tabLst>
-                <a:tab pos="0" algn="l"/>
-              </a:tabLst>
-            </a:pPr>
-            <a:r>
-              <a:rPr lang="en-US" sz="3300" b="0" u="none" strike="noStrike">
-                <a:solidFill>
-                  <a:srgbClr val="000000"/>
-                </a:solidFill>
-                <a:effectLst/>
-                <a:uFillTx/>
-                <a:latin typeface="Arial"/>
-                <a:ea typeface="DejaVu Sans"/>
-              </a:rPr>
-              <a:t>Conclusion</a:t>
-            </a:r>
-            <a:endParaRPr lang="en-US" sz="3300" b="0" u="none" strike="noStrike">
-              <a:solidFill>
-                <a:srgbClr val="000000"/>
-              </a:solidFill>
-              <a:effectLst/>
-              <a:uFillTx/>
-              <a:latin typeface="Arial"/>
-            </a:endParaRPr>
-          </a:p>
-        </p:txBody>
-      </p:sp>
-      <p:sp>
-        <p:nvSpPr>
-          <p:cNvPr id="73" name="PlaceHolder 2"/>
-          <p:cNvSpPr/>
-          <p:nvPr/>
-        </p:nvSpPr>
-        <p:spPr>
-          <a:xfrm>
-            <a:off x="504000" y="1433880"/>
-            <a:ext cx="9071280" cy="3287520"/>
-          </a:xfrm>
-          <a:prstGeom prst="rect">
-            <a:avLst/>
-          </a:prstGeom>
-          <a:noFill/>
-          <a:ln w="0">
-            <a:noFill/>
-          </a:ln>
-        </p:spPr>
-        <p:style>
-          <a:lnRef idx="0"/>
-          <a:fillRef idx="0"/>
-          <a:effectRef idx="0"/>
-          <a:fontRef idx="minor"/>
-        </p:style>
-        <p:txBody>
-          <a:bodyPr lIns="0" tIns="0" rIns="0" bIns="0" anchor="t">
-            <a:normAutofit fontScale="85000" lnSpcReduction="9999"/>
-          </a:bodyPr>
-          <a:p>
-            <a:pPr marL="432000" indent="-324000" defTabSz="914400">
-              <a:lnSpc>
-                <a:spcPct val="100000"/>
-              </a:lnSpc>
-              <a:spcBef>
-                <a:spcPts val="1060"/>
-              </a:spcBef>
-              <a:buClr>
-                <a:srgbClr val="000000"/>
-              </a:buClr>
-              <a:buSzPct val="45000"/>
-              <a:buFont typeface="Wingdings" charset="2"/>
-              <a:buChar char=""/>
-              <a:tabLst>
-                <a:tab pos="0" algn="l"/>
-              </a:tabLst>
-            </a:pPr>
-            <a:r>
-              <a:rPr lang="en-US" sz="2400" b="0" u="none" strike="noStrike">
-                <a:solidFill>
-                  <a:srgbClr val="000000"/>
-                </a:solidFill>
-                <a:effectLst/>
-                <a:uFillTx/>
-                <a:latin typeface="Arial"/>
-                <a:ea typeface="DejaVu Sans"/>
-              </a:rPr>
-              <a:t>Based on our assumptions and the data available, a retention program is well worth the investment as it results in significant cost savings from having to replace an employee.</a:t>
-            </a:r>
-            <a:endParaRPr lang="en-US" sz="2400" b="0" u="none" strike="noStrike">
-              <a:solidFill>
-                <a:srgbClr val="000000"/>
-              </a:solidFill>
-              <a:effectLst/>
-              <a:uFillTx/>
-              <a:latin typeface="Arial"/>
-            </a:endParaRPr>
-          </a:p>
-          <a:p>
-            <a:pPr marL="914400" lvl="2" indent="-216000" defTabSz="914400">
-              <a:lnSpc>
-                <a:spcPct val="100000"/>
-              </a:lnSpc>
-              <a:spcBef>
-                <a:spcPts val="1060"/>
-              </a:spcBef>
-              <a:buClr>
-                <a:srgbClr val="000000"/>
-              </a:buClr>
-              <a:buSzPct val="45000"/>
-              <a:buFont typeface="Symbol" charset="2"/>
-              <a:buChar char=""/>
-              <a:tabLst>
-                <a:tab pos="0" algn="l"/>
-              </a:tabLst>
-            </a:pPr>
-            <a:r>
-              <a:rPr lang="en-US" sz="2400" b="0" u="none" strike="noStrike">
-                <a:solidFill>
-                  <a:srgbClr val="000000"/>
-                </a:solidFill>
-                <a:effectLst/>
-                <a:uFillTx/>
-                <a:latin typeface="Arial"/>
-                <a:ea typeface="DejaVu Sans"/>
-              </a:rPr>
-              <a:t>Monetary benefits can be one time installments, a more permanent yearly raise, or an investment into career growth opportunities.</a:t>
-            </a:r>
-            <a:endParaRPr lang="en-US" sz="2400" b="0" u="none" strike="noStrike">
-              <a:solidFill>
-                <a:srgbClr val="000000"/>
-              </a:solidFill>
-              <a:effectLst/>
-              <a:uFillTx/>
-              <a:latin typeface="Arial"/>
-            </a:endParaRPr>
-          </a:p>
-          <a:p>
-            <a:pPr marL="432000" indent="-324000" defTabSz="914400">
-              <a:lnSpc>
-                <a:spcPct val="100000"/>
-              </a:lnSpc>
-              <a:spcBef>
-                <a:spcPts val="1060"/>
-              </a:spcBef>
-              <a:buClr>
-                <a:srgbClr val="000000"/>
-              </a:buClr>
-              <a:buSzPct val="45000"/>
-              <a:buFont typeface="Wingdings" charset="2"/>
-              <a:buChar char=""/>
-              <a:tabLst>
-                <a:tab pos="0" algn="l"/>
-              </a:tabLst>
-            </a:pPr>
-            <a:r>
-              <a:rPr lang="en-US" sz="2400" b="0" u="none" strike="noStrike">
-                <a:solidFill>
-                  <a:srgbClr val="000000"/>
-                </a:solidFill>
-                <a:effectLst/>
-                <a:uFillTx/>
-                <a:latin typeface="Arial"/>
-                <a:ea typeface="DejaVu Sans"/>
-              </a:rPr>
-              <a:t>Money invested into employees as false positives is still likely to improve moral, productivity, and possible other benefits.</a:t>
-            </a:r>
-            <a:endParaRPr lang="en-US" sz="2400" b="0" u="none" strike="noStrike">
-              <a:solidFill>
-                <a:srgbClr val="000000"/>
-              </a:solidFill>
-              <a:effectLst/>
-              <a:uFillTx/>
-              <a:latin typeface="Arial"/>
-            </a:endParaRPr>
-          </a:p>
-          <a:p>
-            <a:pPr marL="432000" indent="-324000" defTabSz="914400">
-              <a:lnSpc>
-                <a:spcPct val="100000"/>
-              </a:lnSpc>
-              <a:spcBef>
-                <a:spcPts val="1060"/>
-              </a:spcBef>
-              <a:buClr>
-                <a:srgbClr val="000000"/>
-              </a:buClr>
-              <a:buSzPct val="45000"/>
-              <a:buFont typeface="Wingdings" charset="2"/>
-              <a:buChar char=""/>
-              <a:tabLst>
-                <a:tab pos="0" algn="l"/>
-              </a:tabLst>
-            </a:pPr>
-            <a:r>
-              <a:rPr lang="en-US" sz="2400" b="0" u="none" strike="noStrike">
-                <a:solidFill>
-                  <a:srgbClr val="000000"/>
-                </a:solidFill>
-                <a:effectLst/>
-                <a:uFillTx/>
-                <a:latin typeface="Arial"/>
-                <a:ea typeface="DejaVu Sans"/>
-              </a:rPr>
-              <a:t>Over time and with more data, the model may be improved resulting in even more savings.</a:t>
-            </a:r>
-            <a:endParaRPr lang="en-US" sz="2400" b="0" u="none" strike="noStrike">
-              <a:solidFill>
-                <a:srgbClr val="000000"/>
-              </a:solidFill>
-              <a:effectLst/>
-              <a:uFillTx/>
-              <a:latin typeface="Arial"/>
-            </a:endParaRPr>
-          </a:p>
-        </p:txBody>
-      </p:sp>
-    </p:spTree>
-  </p:cSld>
-  <mc:AlternateContent>
-    <mc:Choice Requires="p14">
-      <p:transition spd="slow" p14:dur="2000"/>
-    </mc:Choice>
-    <mc:Fallback>
-      <p:transition spd="slow"/>
-    </mc:Fallback>
-  </mc:AlternateContent>
-</p:sld>
-</file>
-
-<file path=ppt/slides/slide21.xml><?xml version="1.0" encoding="utf-8"?>
-<p:sld xmlns:a="http://schemas.openxmlformats.org/drawingml/2006/main" xmlns:p="http://schemas.openxmlformats.org/presentationml/2006/main" xmlns:r="http://schemas.openxmlformats.org/officeDocument/2006/relationships" xmlns:p14="http://schemas.microsoft.com/office/powerpoint/2010/main" xmlns:p15="http://schemas.microsoft.com/office/powerpoint/2012/main" xmlns:mc="http://schemas.openxmlformats.org/markup-compatibility/2006">
-  <p:cSld>
-    <p:spTree>
-      <p:nvGrpSpPr>
-        <p:cNvPr id="1" name=""/>
-        <p:cNvGrpSpPr/>
-        <p:nvPr/>
-      </p:nvGrpSpPr>
-      <p:grpSpPr>
-        <a:xfrm>
-          <a:off x="0" y="0"/>
-          <a:ext cx="0" cy="0"/>
-          <a:chOff x="0" y="0"/>
-          <a:chExt cx="0" cy="0"/>
-        </a:xfrm>
-      </p:grpSpPr>
-      <p:sp>
-        <p:nvSpPr>
-          <p:cNvPr id="74" name="PlaceHolder 1"/>
-          <p:cNvSpPr>
-            <a:spLocks noGrp="1"/>
-          </p:cNvSpPr>
-          <p:nvPr>
-            <p:ph type="title"/>
-          </p:nvPr>
-        </p:nvSpPr>
-        <p:spPr>
-          <a:xfrm>
-            <a:off x="504000" y="225720"/>
-            <a:ext cx="9071280" cy="946080"/>
-          </a:xfrm>
-          <a:prstGeom prst="rect">
-            <a:avLst/>
-          </a:prstGeom>
-          <a:noFill/>
-          <a:ln w="0">
-            <a:noFill/>
-          </a:ln>
-        </p:spPr>
-        <p:txBody>
-          <a:bodyPr lIns="0" tIns="0" rIns="0" bIns="0" anchor="ctr">
-            <a:spAutoFit/>
-          </a:bodyPr>
-          <a:p>
-            <a:pPr indent="0" algn="ctr" defTabSz="914400">
-              <a:lnSpc>
-                <a:spcPct val="90000"/>
-              </a:lnSpc>
-              <a:buNone/>
-              <a:tabLst>
-                <a:tab pos="0" algn="l"/>
-              </a:tabLst>
-            </a:pPr>
-            <a:r>
-              <a:rPr lang="en-US" sz="3300" b="0" u="none" strike="noStrike">
-                <a:solidFill>
-                  <a:srgbClr val="000000"/>
-                </a:solidFill>
-                <a:effectLst/>
-                <a:uFillTx/>
-                <a:latin typeface="Arial"/>
-              </a:rPr>
-              <a:t>Closing Thoughts</a:t>
-            </a:r>
-            <a:endParaRPr lang="en-US" sz="3300" b="0" u="none" strike="noStrike">
-              <a:solidFill>
-                <a:srgbClr val="000000"/>
-              </a:solidFill>
-              <a:effectLst/>
-              <a:uFillTx/>
-              <a:latin typeface="Arial"/>
-            </a:endParaRPr>
-          </a:p>
-        </p:txBody>
-      </p:sp>
-      <p:sp>
-        <p:nvSpPr>
-          <p:cNvPr id="75" name="PlaceHolder 2"/>
-          <p:cNvSpPr>
-            <a:spLocks noGrp="1"/>
-          </p:cNvSpPr>
-          <p:nvPr>
-            <p:ph/>
-          </p:nvPr>
-        </p:nvSpPr>
-        <p:spPr>
-          <a:xfrm>
-            <a:off x="504000" y="1326600"/>
-            <a:ext cx="9071280" cy="3287520"/>
-          </a:xfrm>
-          <a:prstGeom prst="rect">
-            <a:avLst/>
-          </a:prstGeom>
-          <a:noFill/>
-          <a:ln w="0">
-            <a:noFill/>
-          </a:ln>
-        </p:spPr>
-        <p:txBody>
-          <a:bodyPr lIns="0" tIns="0" rIns="0" bIns="0" anchor="t">
-            <a:normAutofit/>
-          </a:bodyPr>
-          <a:p>
-            <a:pPr marL="228600" indent="-228600" algn="l" defTabSz="914400">
-              <a:lnSpc>
-                <a:spcPct val="90000"/>
-              </a:lnSpc>
-              <a:spcBef>
-                <a:spcPts val="1060"/>
-              </a:spcBef>
-              <a:buClr>
-                <a:srgbClr val="000000"/>
-              </a:buClr>
-              <a:buSzPct val="45000"/>
-              <a:buFont typeface="Wingdings" charset="2"/>
-              <a:buChar char=""/>
-            </a:pPr>
-            <a:r>
-              <a:rPr lang="en-US" sz="2400" b="0" u="none" strike="noStrike">
-                <a:solidFill>
-                  <a:srgbClr val="000000"/>
-                </a:solidFill>
-                <a:effectLst/>
-                <a:uFillTx/>
-                <a:latin typeface="Arial"/>
-              </a:rPr>
-              <a:t>In this example:</a:t>
-            </a:r>
-            <a:endParaRPr lang="en-US" sz="2400" b="0" u="none" strike="noStrike">
-              <a:solidFill>
-                <a:srgbClr val="000000"/>
-              </a:solidFill>
-              <a:effectLst/>
-              <a:uFillTx/>
-              <a:latin typeface="Arial"/>
-            </a:endParaRPr>
-          </a:p>
-          <a:p>
-            <a:pPr marL="864000" lvl="1" indent="-324000" algn="l" defTabSz="914400">
-              <a:lnSpc>
-                <a:spcPct val="90000"/>
-              </a:lnSpc>
-              <a:spcBef>
-                <a:spcPts val="850"/>
-              </a:spcBef>
-              <a:buClr>
-                <a:srgbClr val="000000"/>
-              </a:buClr>
-              <a:buSzPct val="75000"/>
-              <a:buFont typeface="Symbol" charset="2"/>
-              <a:buChar char=""/>
-            </a:pPr>
-            <a:r>
-              <a:rPr lang="en-US" sz="2100" b="0" u="none" strike="noStrike">
-                <a:solidFill>
-                  <a:srgbClr val="000000"/>
-                </a:solidFill>
-                <a:effectLst/>
-                <a:uFillTx/>
-                <a:latin typeface="Arial"/>
-              </a:rPr>
-              <a:t>Targeted 34 high-risk employees with an $8,000 intervention (</a:t>
-            </a:r>
-            <a:r>
-              <a:rPr lang="en-US" sz="2100" b="1" u="none" strike="noStrike">
-                <a:solidFill>
-                  <a:srgbClr val="000000"/>
-                </a:solidFill>
-                <a:effectLst/>
-                <a:uFillTx/>
-                <a:latin typeface="Arial"/>
-              </a:rPr>
-              <a:t>$272,000 total investment</a:t>
-            </a:r>
-            <a:r>
-              <a:rPr lang="en-US" sz="2100" b="0" u="none" strike="noStrike">
-                <a:solidFill>
-                  <a:srgbClr val="000000"/>
-                </a:solidFill>
-                <a:effectLst/>
-                <a:uFillTx/>
-                <a:latin typeface="Arial"/>
-              </a:rPr>
-              <a:t>) </a:t>
-            </a:r>
-            <a:endParaRPr lang="en-US" sz="2100" b="0" u="none" strike="noStrike">
-              <a:solidFill>
-                <a:srgbClr val="000000"/>
-              </a:solidFill>
-              <a:effectLst/>
-              <a:uFillTx/>
-              <a:latin typeface="Arial"/>
-            </a:endParaRPr>
-          </a:p>
-          <a:p>
-            <a:pPr marL="1296000" lvl="2" indent="-288000" algn="l" defTabSz="914400">
-              <a:lnSpc>
-                <a:spcPct val="90000"/>
-              </a:lnSpc>
-              <a:spcBef>
-                <a:spcPts val="638"/>
-              </a:spcBef>
-              <a:buClr>
-                <a:srgbClr val="000000"/>
-              </a:buClr>
-              <a:buSzPct val="45000"/>
-              <a:buFont typeface="Wingdings" charset="2"/>
-              <a:buChar char=""/>
-            </a:pPr>
-            <a:r>
-              <a:rPr lang="en-US" sz="1800" b="0" u="none" strike="noStrike">
-                <a:solidFill>
-                  <a:srgbClr val="000000"/>
-                </a:solidFill>
-                <a:effectLst/>
-                <a:uFillTx/>
-                <a:latin typeface="Arial"/>
-              </a:rPr>
-              <a:t>Successfully retains 13 employees who otherwise would have left. </a:t>
-            </a:r>
-            <a:endParaRPr lang="en-US" sz="1800" b="0" u="none" strike="noStrike">
-              <a:solidFill>
-                <a:srgbClr val="000000"/>
-              </a:solidFill>
-              <a:effectLst/>
-              <a:uFillTx/>
-              <a:latin typeface="Arial"/>
-            </a:endParaRPr>
-          </a:p>
-          <a:p>
-            <a:pPr marL="1296000" lvl="2" indent="-288000" algn="l" defTabSz="914400">
-              <a:lnSpc>
-                <a:spcPct val="90000"/>
-              </a:lnSpc>
-              <a:spcBef>
-                <a:spcPts val="638"/>
-              </a:spcBef>
-              <a:buClr>
-                <a:srgbClr val="000000"/>
-              </a:buClr>
-              <a:buSzPct val="45000"/>
-              <a:buFont typeface="Wingdings" charset="2"/>
-              <a:buChar char=""/>
-            </a:pPr>
-            <a:r>
-              <a:rPr lang="en-US" sz="1800" b="0" u="none" strike="noStrike">
-                <a:solidFill>
-                  <a:srgbClr val="000000"/>
-                </a:solidFill>
-                <a:effectLst/>
-                <a:uFillTx/>
-                <a:latin typeface="Arial"/>
-              </a:rPr>
-              <a:t>13 employees were false positives</a:t>
-            </a:r>
-            <a:endParaRPr lang="en-US" sz="1800" b="0" u="none" strike="noStrike">
-              <a:solidFill>
-                <a:srgbClr val="000000"/>
-              </a:solidFill>
-              <a:effectLst/>
-              <a:uFillTx/>
-              <a:latin typeface="Arial"/>
-            </a:endParaRPr>
-          </a:p>
-          <a:p>
-            <a:pPr marL="1296000" lvl="2" indent="-288000" algn="l" defTabSz="914400">
-              <a:lnSpc>
-                <a:spcPct val="90000"/>
-              </a:lnSpc>
-              <a:spcBef>
-                <a:spcPts val="638"/>
-              </a:spcBef>
-              <a:buClr>
-                <a:srgbClr val="000000"/>
-              </a:buClr>
-              <a:buSzPct val="45000"/>
-              <a:buFont typeface="Wingdings" charset="2"/>
-              <a:buChar char=""/>
-            </a:pPr>
-            <a:r>
-              <a:rPr lang="en-US" sz="1800" b="0" u="none" strike="noStrike">
-                <a:solidFill>
-                  <a:srgbClr val="000000"/>
-                </a:solidFill>
-                <a:effectLst/>
-                <a:uFillTx/>
-                <a:latin typeface="Arial"/>
-              </a:rPr>
-              <a:t>8 employees left the company even after the intervention attempt.</a:t>
-            </a:r>
-            <a:endParaRPr lang="en-US" sz="1800" b="0" u="none" strike="noStrike">
-              <a:solidFill>
-                <a:srgbClr val="000000"/>
-              </a:solidFill>
-              <a:effectLst/>
-              <a:uFillTx/>
-              <a:latin typeface="Arial"/>
-            </a:endParaRPr>
-          </a:p>
-          <a:p>
-            <a:pPr marL="864000" lvl="1" indent="-324000" algn="l" defTabSz="914400">
-              <a:lnSpc>
-                <a:spcPct val="90000"/>
-              </a:lnSpc>
-              <a:spcBef>
-                <a:spcPts val="850"/>
-              </a:spcBef>
-              <a:buClr>
-                <a:srgbClr val="000000"/>
-              </a:buClr>
-              <a:buSzPct val="75000"/>
-              <a:buFont typeface="Symbol" charset="2"/>
-              <a:buChar char=""/>
-            </a:pPr>
-            <a:r>
-              <a:rPr lang="en-US" sz="2100" b="0" u="none" strike="noStrike">
-                <a:solidFill>
-                  <a:srgbClr val="000000"/>
-                </a:solidFill>
-                <a:effectLst/>
-                <a:uFillTx/>
-                <a:latin typeface="Arial"/>
-              </a:rPr>
-              <a:t>At $40,000 saved per retained employee (</a:t>
-            </a:r>
-            <a:r>
-              <a:rPr lang="en-US" sz="2100" b="1" u="none" strike="noStrike">
-                <a:solidFill>
-                  <a:srgbClr val="000000"/>
-                </a:solidFill>
-                <a:effectLst/>
-                <a:uFillTx/>
-                <a:latin typeface="Arial"/>
-              </a:rPr>
-              <a:t>$520,000 gross savings</a:t>
-            </a:r>
-            <a:r>
-              <a:rPr lang="en-US" sz="2100" b="0" u="none" strike="noStrike">
-                <a:solidFill>
-                  <a:srgbClr val="000000"/>
-                </a:solidFill>
-                <a:effectLst/>
-                <a:uFillTx/>
-                <a:latin typeface="Arial"/>
-              </a:rPr>
-              <a:t>), the program yields a </a:t>
-            </a:r>
-            <a:r>
-              <a:rPr lang="en-US" sz="2100" b="1" u="none" strike="noStrike">
-                <a:solidFill>
-                  <a:srgbClr val="000000"/>
-                </a:solidFill>
-                <a:effectLst/>
-                <a:uFillTx/>
-                <a:latin typeface="Arial"/>
-              </a:rPr>
-              <a:t>net ROI of </a:t>
-            </a:r>
-            <a:r>
-              <a:rPr lang="en-US" sz="2100" b="1" u="none" strike="noStrike">
-                <a:solidFill>
-                  <a:srgbClr val="00A933"/>
-                </a:solidFill>
-                <a:effectLst/>
-                <a:uFillTx/>
-                <a:latin typeface="Arial"/>
-              </a:rPr>
-              <a:t>$248,000</a:t>
-            </a:r>
-            <a:r>
-              <a:rPr lang="en-US" sz="2100" b="0" u="none" strike="noStrike">
-                <a:solidFill>
-                  <a:srgbClr val="000000"/>
-                </a:solidFill>
-                <a:effectLst/>
-                <a:uFillTx/>
-                <a:latin typeface="Arial"/>
-              </a:rPr>
-              <a:t>.</a:t>
-            </a:r>
-            <a:endParaRPr lang="en-US" sz="2100" b="0" u="none" strike="noStrike">
-              <a:solidFill>
-                <a:srgbClr val="000000"/>
-              </a:solidFill>
-              <a:effectLst/>
-              <a:uFillTx/>
-              <a:latin typeface="Arial"/>
-            </a:endParaRPr>
-          </a:p>
-        </p:txBody>
-      </p:sp>
-    </p:spTree>
-  </p:cSld>
-  <mc:AlternateContent>
-    <mc:Choice Requires="p14">
-      <p:transition spd="slow" p14:dur="2000"/>
-    </mc:Choice>
-    <mc:Fallback>
-      <p:transition spd="slow"/>
-    </mc:Fallback>
-  </mc:AlternateContent>
-</p:sld>
-</file>
-
-<file path=ppt/slides/slide22.xml><?xml version="1.0" encoding="utf-8"?>
-<p:sld xmlns:a="http://schemas.openxmlformats.org/drawingml/2006/main" xmlns:p="http://schemas.openxmlformats.org/presentationml/2006/main" xmlns:r="http://schemas.openxmlformats.org/officeDocument/2006/relationships" xmlns:p14="http://schemas.microsoft.com/office/powerpoint/2010/main" xmlns:p15="http://schemas.microsoft.com/office/powerpoint/2012/main" xmlns:mc="http://schemas.openxmlformats.org/markup-compatibility/2006">
+<p:sld xmlns:a="http://schemas.openxmlformats.org/drawingml/2006/main" xmlns:r="http://schemas.openxmlformats.org/officeDocument/2006/relationships" xmlns:p="http://schemas.openxmlformats.org/presentationml/2006/main">
   <p:cSld>
     <p:spTree>
       <p:nvGrpSpPr>
@@ -8285,6 +6874,7 @@
           <a:bodyPr lIns="0" tIns="0" rIns="0" bIns="0" anchor="ctr">
             <a:spAutoFit/>
           </a:bodyPr>
+          <a:lstStyle/>
           <a:p>
             <a:pPr indent="0" algn="ctr" defTabSz="914400">
               <a:lnSpc>
@@ -8306,14 +6896,6 @@
               </a:rPr>
               <a:t>What’s Next?</a:t>
             </a:r>
-            <a:endParaRPr lang="en-US" sz="3300" b="0" u="none" strike="noStrike">
-              <a:solidFill>
-                <a:srgbClr val="000000"/>
-              </a:solidFill>
-              <a:effectLst/>
-              <a:uFillTx/>
-              <a:latin typeface="Arial"/>
-            </a:endParaRPr>
           </a:p>
         </p:txBody>
       </p:sp>
@@ -8344,6 +6926,7 @@
           <a:bodyPr lIns="0" tIns="0" rIns="0" bIns="0" anchor="t">
             <a:normAutofit/>
           </a:bodyPr>
+          <a:lstStyle/>
           <a:p>
             <a:pPr marL="228600" indent="-228600" algn="l" defTabSz="914400">
               <a:lnSpc>
@@ -8360,7 +6943,7 @@
               <a:buChar char=""/>
             </a:pPr>
             <a:r>
-              <a:rPr lang="en-US" sz="2400" b="0" u="none" strike="noStrike">
+              <a:rPr lang="en-US" sz="2400" b="0" u="none" strike="noStrike" dirty="0">
                 <a:solidFill>
                   <a:srgbClr val="000000"/>
                 </a:solidFill>
@@ -8370,14 +6953,6 @@
               </a:rPr>
               <a:t>Identify ideal data.</a:t>
             </a:r>
-            <a:endParaRPr lang="en-US" sz="2400" b="0" u="none" strike="noStrike">
-              <a:solidFill>
-                <a:srgbClr val="000000"/>
-              </a:solidFill>
-              <a:effectLst/>
-              <a:uFillTx/>
-              <a:latin typeface="Arial"/>
-            </a:endParaRPr>
           </a:p>
           <a:p>
             <a:pPr marL="864000" lvl="1" indent="-324000" algn="l" defTabSz="914400">
@@ -8395,7 +6970,7 @@
               <a:buChar char=""/>
             </a:pPr>
             <a:r>
-              <a:rPr lang="en-US" sz="2100" b="0" u="none" strike="noStrike">
+              <a:rPr lang="en-US" sz="2100" b="0" u="none" strike="noStrike" dirty="0">
                 <a:solidFill>
                   <a:srgbClr val="000000"/>
                 </a:solidFill>
@@ -8405,14 +6980,6 @@
               </a:rPr>
               <a:t>Since this data was simulated, it’s possible we could build a stronger model if we had real data.</a:t>
             </a:r>
-            <a:endParaRPr lang="en-US" sz="2100" b="0" u="none" strike="noStrike">
-              <a:solidFill>
-                <a:srgbClr val="000000"/>
-              </a:solidFill>
-              <a:effectLst/>
-              <a:uFillTx/>
-              <a:latin typeface="Arial"/>
-            </a:endParaRPr>
           </a:p>
           <a:p>
             <a:pPr marL="228600" indent="-228600" algn="l" defTabSz="914400">
@@ -8430,24 +6997,16 @@
               <a:buChar char=""/>
             </a:pPr>
             <a:r>
-              <a:rPr lang="en-US" sz="2400" b="0" u="none" strike="noStrike">
-                <a:solidFill>
-                  <a:srgbClr val="000000"/>
-                </a:solidFill>
-                <a:effectLst/>
-                <a:uFillTx/>
-                <a:latin typeface="Arial"/>
-              </a:rPr>
-              <a:t>Add additional employee engagement and compensation variables.</a:t>
-            </a:r>
-            <a:endParaRPr lang="en-US" sz="2400" b="0" u="none" strike="noStrike">
-              <a:solidFill>
-                <a:srgbClr val="000000"/>
-              </a:solidFill>
-              <a:effectLst/>
-              <a:uFillTx/>
-              <a:latin typeface="Arial"/>
-            </a:endParaRPr>
+              <a:rPr lang="en-US" sz="2400" b="0" u="none" strike="noStrike" dirty="0">
+                <a:solidFill>
+                  <a:srgbClr val="000000"/>
+                </a:solidFill>
+                <a:effectLst/>
+                <a:uFillTx/>
+                <a:latin typeface="Arial"/>
+              </a:rPr>
+              <a:t>Track and add employee hiring cost to the data.</a:t>
+            </a:r>
           </a:p>
           <a:p>
             <a:pPr marL="228600" indent="-228600" algn="l" defTabSz="914400">
@@ -8465,7 +7024,34 @@
               <a:buChar char=""/>
             </a:pPr>
             <a:r>
-              <a:rPr lang="en-US" sz="2400" b="0" u="none" strike="noStrike">
+              <a:rPr lang="en-US" sz="2400" b="0" u="none" strike="noStrike" dirty="0">
+                <a:solidFill>
+                  <a:srgbClr val="000000"/>
+                </a:solidFill>
+                <a:effectLst/>
+                <a:uFillTx/>
+                <a:latin typeface="Arial"/>
+              </a:rPr>
+              <a:t>Add additional employee engagement and compensation variables.</a:t>
+            </a:r>
+          </a:p>
+          <a:p>
+            <a:pPr marL="228600" indent="-228600" algn="l" defTabSz="914400">
+              <a:lnSpc>
+                <a:spcPct val="90000"/>
+              </a:lnSpc>
+              <a:spcBef>
+                <a:spcPts val="1060"/>
+              </a:spcBef>
+              <a:buClr>
+                <a:srgbClr val="000000"/>
+              </a:buClr>
+              <a:buSzPct val="45000"/>
+              <a:buFont typeface="Wingdings" charset="2"/>
+              <a:buChar char=""/>
+            </a:pPr>
+            <a:r>
+              <a:rPr lang="en-US" sz="2400" b="0" u="none" strike="noStrike" dirty="0">
                 <a:solidFill>
                   <a:srgbClr val="000000"/>
                 </a:solidFill>
@@ -8475,32 +7061,19 @@
               </a:rPr>
               <a:t>Try to measure whether targeted interventions actually reduce attrition after identification over the long term.</a:t>
             </a:r>
-            <a:endParaRPr lang="en-US" sz="2400" b="0" u="none" strike="noStrike">
-              <a:solidFill>
-                <a:srgbClr val="000000"/>
-              </a:solidFill>
-              <a:effectLst/>
-              <a:uFillTx/>
-              <a:latin typeface="Arial"/>
-            </a:endParaRPr>
           </a:p>
         </p:txBody>
       </p:sp>
     </p:spTree>
   </p:cSld>
-  <mc:AlternateContent>
-    <mc:Choice Requires="p14">
-      <p:transition spd="slow" p14:dur="2000"/>
-    </mc:Choice>
-    <mc:Fallback>
-      <p:transition spd="slow"/>
-    </mc:Fallback>
-  </mc:AlternateContent>
+  <p:clrMapOvr>
+    <a:masterClrMapping/>
+  </p:clrMapOvr>
 </p:sld>
 </file>
 
 <file path=ppt/slides/slide3.xml><?xml version="1.0" encoding="utf-8"?>
-<p:sld xmlns:a="http://schemas.openxmlformats.org/drawingml/2006/main" xmlns:p="http://schemas.openxmlformats.org/presentationml/2006/main" xmlns:r="http://schemas.openxmlformats.org/officeDocument/2006/relationships" xmlns:p14="http://schemas.microsoft.com/office/powerpoint/2010/main" xmlns:p15="http://schemas.microsoft.com/office/powerpoint/2012/main" xmlns:mc="http://schemas.openxmlformats.org/markup-compatibility/2006">
+<p:sld xmlns:a="http://schemas.openxmlformats.org/drawingml/2006/main" xmlns:r="http://schemas.openxmlformats.org/officeDocument/2006/relationships" xmlns:p="http://schemas.openxmlformats.org/presentationml/2006/main">
   <p:cSld>
     <p:spTree>
       <p:nvGrpSpPr>
@@ -8543,6 +7116,7 @@
           <a:bodyPr lIns="0" tIns="0" rIns="0" bIns="0" anchor="ctr">
             <a:spAutoFit/>
           </a:bodyPr>
+          <a:lstStyle/>
           <a:p>
             <a:pPr indent="0" algn="ctr" defTabSz="914400">
               <a:lnSpc>
@@ -8601,8 +7175,9 @@
         </p:spPr>
         <p:txBody>
           <a:bodyPr lIns="0" tIns="0" rIns="0" bIns="0" anchor="t">
-            <a:normAutofit fontScale="92500" lnSpcReduction="9999"/>
+            <a:normAutofit fontScale="92500" lnSpcReduction="19999"/>
           </a:bodyPr>
+          <a:lstStyle/>
           <a:p>
             <a:pPr marL="432000" indent="-324000" algn="l" defTabSz="914400">
               <a:lnSpc>
@@ -8622,7 +7197,7 @@
               <a:buChar char=""/>
             </a:pPr>
             <a:r>
-              <a:rPr lang="en-US" sz="2400" b="0" u="none" strike="noStrike">
+              <a:rPr lang="en-US" sz="2400" b="0" u="none" strike="noStrike" dirty="0">
                 <a:solidFill>
                   <a:srgbClr val="000000"/>
                 </a:solidFill>
@@ -8633,7 +7208,7 @@
               </a:rPr>
               <a:t>Based on the assumptions:</a:t>
             </a:r>
-            <a:endParaRPr lang="en-US" sz="2400" b="0" u="none" strike="noStrike">
+            <a:endParaRPr lang="en-US" sz="2400" b="0" u="none" strike="noStrike" dirty="0">
               <a:solidFill>
                 <a:srgbClr val="000000"/>
               </a:solidFill>
@@ -8657,7 +7232,7 @@
               <a:buChar char="-"/>
             </a:pPr>
             <a:r>
-              <a:rPr lang="en-US" sz="2100" b="0" u="none" strike="noStrike">
+              <a:rPr lang="en-US" sz="2100" b="0" u="none" strike="noStrike" dirty="0">
                 <a:solidFill>
                   <a:srgbClr val="000000"/>
                 </a:solidFill>
@@ -8668,7 +7243,7 @@
               </a:rPr>
               <a:t>Cost of employee turnover: $40,000</a:t>
             </a:r>
-            <a:endParaRPr lang="en-US" sz="2100" b="0" u="none" strike="noStrike">
+            <a:endParaRPr lang="en-US" sz="2100" b="0" u="none" strike="noStrike" dirty="0">
               <a:solidFill>
                 <a:srgbClr val="000000"/>
               </a:solidFill>
@@ -8692,7 +7267,7 @@
               <a:buChar char="-"/>
             </a:pPr>
             <a:r>
-              <a:rPr lang="en-US" sz="2100" b="0" u="none" strike="noStrike">
+              <a:rPr lang="en-US" sz="2100" b="0" u="none" strike="noStrike" dirty="0">
                 <a:solidFill>
                   <a:srgbClr val="000000"/>
                 </a:solidFill>
@@ -8703,7 +7278,7 @@
               </a:rPr>
               <a:t>Cost of retention intervention: $8,000</a:t>
             </a:r>
-            <a:endParaRPr lang="en-US" sz="2100" b="0" u="none" strike="noStrike">
+            <a:endParaRPr lang="en-US" sz="2100" b="0" u="none" strike="noStrike" dirty="0">
               <a:solidFill>
                 <a:srgbClr val="000000"/>
               </a:solidFill>
@@ -8727,18 +7302,18 @@
               <a:buChar char="-"/>
             </a:pPr>
             <a:r>
-              <a:rPr lang="en-US" sz="1600" b="0" u="none" strike="noStrike">
-                <a:solidFill>
-                  <a:srgbClr val="000000"/>
-                </a:solidFill>
-                <a:effectLst/>
-                <a:uFillTx/>
-                <a:latin typeface="Arial"/>
-                <a:ea typeface="DejaVu Sans"/>
-              </a:rPr>
-              <a:t>This could be given as one time bonuses, annual pay increases, or other career growth opportunities. Depending on the needs of the employee.</a:t>
-            </a:r>
-            <a:endParaRPr lang="en-US" sz="1600" b="0" u="none" strike="noStrike">
+              <a:rPr lang="en-US" sz="1600" b="0" u="none" strike="noStrike" dirty="0">
+                <a:solidFill>
+                  <a:srgbClr val="000000"/>
+                </a:solidFill>
+                <a:effectLst/>
+                <a:uFillTx/>
+                <a:latin typeface="Arial"/>
+                <a:ea typeface="DejaVu Sans"/>
+              </a:rPr>
+              <a:t>This could be given as one-time bonuses, annual pay increases, or other career growth opportunities; depending on the needs of the employee.</a:t>
+            </a:r>
+            <a:endParaRPr lang="en-US" sz="1600" b="0" u="none" strike="noStrike" dirty="0">
               <a:solidFill>
                 <a:srgbClr val="000000"/>
               </a:solidFill>
@@ -8762,7 +7337,7 @@
               <a:buChar char="-"/>
             </a:pPr>
             <a:r>
-              <a:rPr lang="en-US" sz="2100" b="0" u="none" strike="noStrike">
+              <a:rPr lang="en-US" sz="2100" b="0" u="none" strike="noStrike" dirty="0">
                 <a:solidFill>
                   <a:srgbClr val="000000"/>
                 </a:solidFill>
@@ -8773,7 +7348,7 @@
               </a:rPr>
               <a:t>Retention intervention success rate: 60%</a:t>
             </a:r>
-            <a:endParaRPr lang="en-US" sz="2100" b="0" u="none" strike="noStrike">
+            <a:endParaRPr lang="en-US" sz="2100" b="0" u="none" strike="noStrike" dirty="0">
               <a:solidFill>
                 <a:srgbClr val="000000"/>
               </a:solidFill>
@@ -8804,18 +7379,18 @@
               </a:tabLst>
             </a:pPr>
             <a:r>
-              <a:rPr lang="en-US" sz="2400" b="0" u="none" strike="noStrike">
-                <a:solidFill>
-                  <a:srgbClr val="000000"/>
-                </a:solidFill>
-                <a:effectLst/>
-                <a:uFillTx/>
-                <a:latin typeface="Arial"/>
-                <a:ea typeface="DejaVu Sans"/>
-              </a:rPr>
-              <a:t>Using this model to intervene would save the company $260,800 in expected costs. It is worth having a retention program.</a:t>
-            </a:r>
-            <a:endParaRPr lang="en-US" sz="2400" b="0" u="none" strike="noStrike">
+              <a:rPr lang="en-US" sz="2400" b="0" u="none" strike="noStrike" dirty="0">
+                <a:solidFill>
+                  <a:srgbClr val="000000"/>
+                </a:solidFill>
+                <a:effectLst/>
+                <a:uFillTx/>
+                <a:latin typeface="Arial"/>
+                <a:ea typeface="DejaVu Sans"/>
+              </a:rPr>
+              <a:t>Using this model to intervene would save the company $1,592,000 in expected costs. It is worth having a retention program.</a:t>
+            </a:r>
+            <a:endParaRPr lang="en-US" sz="2400" b="0" u="none" strike="noStrike" dirty="0">
               <a:solidFill>
                 <a:srgbClr val="000000"/>
               </a:solidFill>
@@ -8840,18 +7415,40 @@
               <a:buChar char=""/>
             </a:pPr>
             <a:r>
-              <a:rPr lang="en-US" sz="2100" b="0" u="none" strike="noStrike">
-                <a:solidFill>
-                  <a:srgbClr val="000000"/>
-                </a:solidFill>
-                <a:effectLst/>
-                <a:uFillTx/>
-                <a:latin typeface="Arial"/>
-                <a:ea typeface="DejaVu Sans"/>
-              </a:rPr>
-              <a:t>The program would cost $272,000 invested into 34 total employees, 13 of which were false positives.</a:t>
-            </a:r>
-            <a:endParaRPr lang="en-US" sz="2100" b="0" u="none" strike="noStrike">
+              <a:rPr lang="en-US" sz="2100" b="0" u="none" strike="noStrike" dirty="0">
+                <a:solidFill>
+                  <a:srgbClr val="000000"/>
+                </a:solidFill>
+                <a:effectLst/>
+                <a:uFillTx/>
+                <a:latin typeface="Arial"/>
+                <a:ea typeface="DejaVu Sans"/>
+              </a:rPr>
+              <a:t>For a company of 1470 employees, the program would cost $1,552,000, having invested $8k into </a:t>
+            </a:r>
+            <a:r>
+              <a:rPr lang="en-US" sz="2100" dirty="0">
+                <a:solidFill>
+                  <a:srgbClr val="000000"/>
+                </a:solidFill>
+                <a:latin typeface="Arial"/>
+                <a:ea typeface="DejaVu Sans"/>
+              </a:rPr>
+              <a:t>194</a:t>
+            </a:r>
+            <a:r>
+              <a:rPr lang="en-US" sz="2100" b="0" u="none" strike="noStrike" dirty="0">
+                <a:solidFill>
+                  <a:srgbClr val="000000"/>
+                </a:solidFill>
+                <a:effectLst/>
+                <a:uFillTx/>
+                <a:latin typeface="Arial"/>
+                <a:ea typeface="DejaVu Sans"/>
+              </a:rPr>
+              <a:t> total employees.</a:t>
+            </a:r>
+            <a:endParaRPr lang="en-US" sz="2100" b="0" u="none" strike="noStrike" dirty="0">
               <a:solidFill>
                 <a:srgbClr val="000000"/>
               </a:solidFill>
@@ -8876,18 +7473,40 @@
               <a:buChar char=""/>
             </a:pPr>
             <a:r>
-              <a:rPr lang="en-US" sz="2100" b="0" u="none" strike="noStrike">
-                <a:solidFill>
-                  <a:srgbClr val="000000"/>
-                </a:solidFill>
-                <a:effectLst/>
-                <a:uFillTx/>
-                <a:latin typeface="Arial"/>
-                <a:ea typeface="DejaVu Sans"/>
-              </a:rPr>
-              <a:t>This resulted in ~ 13/21 employees being retained for a total savings of $520,000.</a:t>
-            </a:r>
-            <a:endParaRPr lang="en-US" sz="2100" b="0" u="none" strike="noStrike">
+              <a:rPr lang="en-US" sz="2100" b="0" u="none" strike="noStrike" dirty="0">
+                <a:solidFill>
+                  <a:srgbClr val="000000"/>
+                </a:solidFill>
+                <a:effectLst/>
+                <a:uFillTx/>
+                <a:latin typeface="Arial"/>
+                <a:ea typeface="DejaVu Sans"/>
+              </a:rPr>
+              <a:t>This resulted in ~ </a:t>
+            </a:r>
+            <a:r>
+              <a:rPr lang="en-US" sz="2100" dirty="0">
+                <a:solidFill>
+                  <a:srgbClr val="000000"/>
+                </a:solidFill>
+                <a:latin typeface="Arial"/>
+                <a:ea typeface="DejaVu Sans"/>
+              </a:rPr>
+              <a:t>79</a:t>
+            </a:r>
+            <a:r>
+              <a:rPr lang="en-US" sz="2100" b="0" u="none" strike="noStrike" dirty="0">
+                <a:solidFill>
+                  <a:srgbClr val="000000"/>
+                </a:solidFill>
+                <a:effectLst/>
+                <a:uFillTx/>
+                <a:latin typeface="Arial"/>
+                <a:ea typeface="DejaVu Sans"/>
+              </a:rPr>
+              <a:t> employees being retained for a total savings of $3,160,000.</a:t>
+            </a:r>
+            <a:endParaRPr lang="en-US" sz="2100" b="0" u="none" strike="noStrike" dirty="0">
               <a:solidFill>
                 <a:srgbClr val="000000"/>
               </a:solidFill>
@@ -8900,19 +7519,14 @@
       </p:sp>
     </p:spTree>
   </p:cSld>
-  <mc:AlternateContent>
-    <mc:Choice Requires="p14">
-      <p:transition spd="slow" p14:dur="2000"/>
-    </mc:Choice>
-    <mc:Fallback>
-      <p:transition spd="slow"/>
-    </mc:Fallback>
-  </mc:AlternateContent>
+  <p:clrMapOvr>
+    <a:masterClrMapping/>
+  </p:clrMapOvr>
 </p:sld>
 </file>
 
 <file path=ppt/slides/slide4.xml><?xml version="1.0" encoding="utf-8"?>
-<p:sld xmlns:a="http://schemas.openxmlformats.org/drawingml/2006/main" xmlns:p="http://schemas.openxmlformats.org/presentationml/2006/main" xmlns:r="http://schemas.openxmlformats.org/officeDocument/2006/relationships" xmlns:p14="http://schemas.microsoft.com/office/powerpoint/2010/main" xmlns:p15="http://schemas.microsoft.com/office/powerpoint/2012/main" xmlns:mc="http://schemas.openxmlformats.org/markup-compatibility/2006">
+<p:sld xmlns:a="http://schemas.openxmlformats.org/drawingml/2006/main" xmlns:r="http://schemas.openxmlformats.org/officeDocument/2006/relationships" xmlns:p="http://schemas.openxmlformats.org/presentationml/2006/main">
   <p:cSld>
     <p:spTree>
       <p:nvGrpSpPr>
@@ -8955,6 +7569,7 @@
           <a:bodyPr lIns="0" tIns="0" rIns="0" bIns="0" anchor="ctr">
             <a:spAutoFit/>
           </a:bodyPr>
+          <a:lstStyle/>
           <a:p>
             <a:pPr indent="0" algn="ctr" defTabSz="914400">
               <a:lnSpc>
@@ -9001,7 +7616,7 @@
         <p:spPr>
           <a:xfrm>
             <a:off x="529200" y="1326600"/>
-            <a:ext cx="9071280" cy="3287520"/>
+            <a:ext cx="4511112" cy="3287520"/>
           </a:xfrm>
           <a:prstGeom prst="rect">
             <a:avLst/>
@@ -9015,6 +7630,7 @@
           <a:bodyPr lIns="0" tIns="0" rIns="0" bIns="0" anchor="t">
             <a:normAutofit/>
           </a:bodyPr>
+          <a:lstStyle/>
           <a:p>
             <a:pPr marL="432000" indent="-324000" algn="l" defTabSz="914400">
               <a:lnSpc>
@@ -9031,7 +7647,7 @@
               <a:buChar char=""/>
             </a:pPr>
             <a:r>
-              <a:rPr lang="en-US" sz="2400" b="0" u="none" strike="noStrike">
+              <a:rPr lang="en-US" sz="2400" b="0" u="none" strike="noStrike" dirty="0">
                 <a:solidFill>
                   <a:srgbClr val="000000"/>
                 </a:solidFill>
@@ -9042,7 +7658,7 @@
               </a:rPr>
               <a:t>Data source: kaggle.com</a:t>
             </a:r>
-            <a:endParaRPr lang="en-US" sz="2400" b="0" u="none" strike="noStrike">
+            <a:endParaRPr lang="en-US" sz="2400" b="0" u="none" strike="noStrike" dirty="0">
               <a:solidFill>
                 <a:srgbClr val="000000"/>
               </a:solidFill>
@@ -9067,7 +7683,7 @@
               <a:buChar char=""/>
             </a:pPr>
             <a:r>
-              <a:rPr lang="en-US" sz="2100" b="0" u="none" strike="noStrike">
+              <a:rPr lang="en-US" sz="2100" b="0" u="none" strike="noStrike" dirty="0">
                 <a:solidFill>
                   <a:srgbClr val="000000"/>
                 </a:solidFill>
@@ -9078,7 +7694,7 @@
               </a:rPr>
               <a:t>The data is a fictional dataset created by IBM data scientists.</a:t>
             </a:r>
-            <a:endParaRPr lang="en-US" sz="2100" b="0" u="none" strike="noStrike">
+            <a:endParaRPr lang="en-US" sz="2100" b="0" u="none" strike="noStrike" dirty="0">
               <a:solidFill>
                 <a:srgbClr val="000000"/>
               </a:solidFill>
@@ -9103,43 +7719,319 @@
               <a:buChar char=""/>
             </a:pPr>
             <a:r>
-              <a:rPr lang="en-US" sz="2100" b="0" u="none" strike="noStrike">
-                <a:solidFill>
-                  <a:srgbClr val="000000"/>
-                </a:solidFill>
-                <a:effectLst/>
-                <a:uFillTx/>
-                <a:latin typeface="Arial"/>
-                <a:ea typeface="DejaVu Sans"/>
-              </a:rPr>
-              <a:t>The dataset contains 1470 rows of data.</a:t>
-            </a:r>
-            <a:endParaRPr lang="en-US" sz="2100" b="0" u="none" strike="noStrike">
+              <a:rPr lang="en-US" sz="2100" b="0" u="none" strike="noStrike" dirty="0">
+                <a:solidFill>
+                  <a:srgbClr val="000000"/>
+                </a:solidFill>
+                <a:effectLst/>
+                <a:uFillTx/>
+                <a:latin typeface="Arial"/>
+                <a:ea typeface="DejaVu Sans"/>
+              </a:rPr>
+              <a:t>The dataset contains 1470 rows of data with 35 columns each.</a:t>
+            </a:r>
+          </a:p>
+          <a:p>
+            <a:pPr marL="864000" lvl="1" indent="-324000" algn="l" defTabSz="914400">
+              <a:lnSpc>
+                <a:spcPct val="100000"/>
+              </a:lnSpc>
+              <a:spcBef>
+                <a:spcPts val="850"/>
+              </a:spcBef>
+              <a:buClr>
+                <a:srgbClr val="000000"/>
+              </a:buClr>
+              <a:buSzPct val="75000"/>
+              <a:buFont typeface="Symbol" charset="2"/>
+              <a:buChar char=""/>
+            </a:pPr>
+            <a:r>
+              <a:rPr lang="en-US" sz="2100" dirty="0">
+                <a:solidFill>
+                  <a:srgbClr val="000000"/>
+                </a:solidFill>
+                <a:latin typeface="Arial"/>
+                <a:ea typeface="DejaVu Sans"/>
+              </a:rPr>
+              <a:t>All identified ideal data was in dataset.</a:t>
+            </a:r>
+            <a:endParaRPr lang="en-US" sz="2100" b="0" u="none" strike="noStrike" dirty="0">
               <a:solidFill>
                 <a:srgbClr val="000000"/>
               </a:solidFill>
               <a:effectLst/>
               <a:uFillTx/>
               <a:latin typeface="Arial"/>
-            </a:endParaRPr>
+              <a:ea typeface="DejaVu Sans"/>
+            </a:endParaRPr>
+          </a:p>
+        </p:txBody>
+      </p:sp>
+      <p:sp>
+        <p:nvSpPr>
+          <p:cNvPr id="3" name="PlaceHolder 2">
+            <a:extLst>
+              <a:ext uri="{FF2B5EF4-FFF2-40B4-BE49-F238E27FC236}">
+                <a16:creationId xmlns:a16="http://schemas.microsoft.com/office/drawing/2014/main" id="{989868BF-F7D4-2097-0242-D04E7EA1127C}"/>
+              </a:ext>
+            </a:extLst>
+          </p:cNvPr>
+          <p:cNvSpPr txBox="1">
+            <a:spLocks/>
+          </p:cNvSpPr>
+          <p:nvPr/>
+        </p:nvSpPr>
+        <p:spPr>
+          <a:xfrm>
+            <a:off x="5039640" y="1326600"/>
+            <a:ext cx="4633352" cy="4118950"/>
+          </a:xfrm>
+          <a:prstGeom prst="rect">
+            <a:avLst/>
+          </a:prstGeom>
+          <a:noFill/>
+          <a:ln w="0">
+            <a:noFill/>
+          </a:ln>
+        </p:spPr>
+        <p:txBody>
+          <a:bodyPr lIns="0" tIns="0" rIns="0" bIns="0" anchor="t">
+            <a:normAutofit/>
+          </a:bodyPr>
+          <a:lstStyle>
+            <a:lvl1pPr indent="0" algn="ctr" defTabSz="914400" rtl="0" eaLnBrk="1" latinLnBrk="0" hangingPunct="1">
+              <a:lnSpc>
+                <a:spcPct val="90000"/>
+              </a:lnSpc>
+              <a:spcBef>
+                <a:spcPct val="0"/>
+              </a:spcBef>
+              <a:buNone/>
+              <a:tabLst>
+                <a:tab pos="0" algn="l"/>
+              </a:tabLst>
+              <a:defRPr lang="en-US" sz="3300" b="0" u="none" strike="noStrike" kern="1200">
+                <a:solidFill>
+                  <a:srgbClr val="000000"/>
+                </a:solidFill>
+                <a:effectLst/>
+                <a:uFillTx/>
+                <a:latin typeface="Arial"/>
+                <a:ea typeface="DejaVu Sans"/>
+                <a:cs typeface="+mj-cs"/>
+              </a:defRPr>
+            </a:lvl1pPr>
+          </a:lstStyle>
+          <a:p>
+            <a:pPr marL="432000" indent="-324000" algn="l">
+              <a:lnSpc>
+                <a:spcPct val="100000"/>
+              </a:lnSpc>
+              <a:spcBef>
+                <a:spcPts val="1060"/>
+              </a:spcBef>
+              <a:buClr>
+                <a:srgbClr val="000000"/>
+              </a:buClr>
+              <a:buSzPct val="45000"/>
+              <a:buFont typeface="Wingdings" charset="2"/>
+              <a:buChar char=""/>
+            </a:pPr>
+            <a:r>
+              <a:rPr lang="en-US" sz="2400" dirty="0"/>
+              <a:t>Main Columns</a:t>
+            </a:r>
+          </a:p>
+          <a:p>
+            <a:pPr marL="864000" lvl="1" indent="-324000" algn="l">
+              <a:spcBef>
+                <a:spcPts val="850"/>
+              </a:spcBef>
+              <a:buClr>
+                <a:srgbClr val="000000"/>
+              </a:buClr>
+              <a:buSzPct val="75000"/>
+              <a:buFont typeface="Symbol" charset="2"/>
+              <a:buChar char=""/>
+            </a:pPr>
+            <a:r>
+              <a:rPr lang="en-US" sz="2100" kern="0" dirty="0">
+                <a:solidFill>
+                  <a:srgbClr val="000000"/>
+                </a:solidFill>
+                <a:latin typeface="Arial"/>
+                <a:ea typeface="DejaVu Sans"/>
+              </a:rPr>
+              <a:t>Age</a:t>
+            </a:r>
+          </a:p>
+          <a:p>
+            <a:pPr marL="864000" lvl="1" indent="-324000" algn="l">
+              <a:spcBef>
+                <a:spcPts val="850"/>
+              </a:spcBef>
+              <a:buClr>
+                <a:srgbClr val="000000"/>
+              </a:buClr>
+              <a:buSzPct val="75000"/>
+              <a:buFont typeface="Symbol" charset="2"/>
+              <a:buChar char=""/>
+            </a:pPr>
+            <a:r>
+              <a:rPr lang="en-US" sz="2100" kern="0" dirty="0">
+                <a:solidFill>
+                  <a:srgbClr val="000000"/>
+                </a:solidFill>
+                <a:latin typeface="Arial"/>
+              </a:rPr>
+              <a:t>Attrition</a:t>
+            </a:r>
+          </a:p>
+          <a:p>
+            <a:pPr marL="864000" lvl="1" indent="-324000" algn="l">
+              <a:spcBef>
+                <a:spcPts val="850"/>
+              </a:spcBef>
+              <a:buClr>
+                <a:srgbClr val="000000"/>
+              </a:buClr>
+              <a:buSzPct val="75000"/>
+              <a:buFont typeface="Symbol" charset="2"/>
+              <a:buChar char=""/>
+            </a:pPr>
+            <a:r>
+              <a:rPr lang="en-US" sz="2100" kern="0" dirty="0">
+                <a:solidFill>
+                  <a:srgbClr val="000000"/>
+                </a:solidFill>
+                <a:latin typeface="Arial"/>
+              </a:rPr>
+              <a:t>Job Role</a:t>
+            </a:r>
+          </a:p>
+          <a:p>
+            <a:pPr marL="864000" lvl="1" indent="-324000" algn="l">
+              <a:spcBef>
+                <a:spcPts val="850"/>
+              </a:spcBef>
+              <a:buClr>
+                <a:srgbClr val="000000"/>
+              </a:buClr>
+              <a:buSzPct val="75000"/>
+              <a:buFont typeface="Symbol" charset="2"/>
+              <a:buChar char=""/>
+            </a:pPr>
+            <a:r>
+              <a:rPr lang="en-US" sz="2100" kern="0" dirty="0">
+                <a:solidFill>
+                  <a:srgbClr val="000000"/>
+                </a:solidFill>
+                <a:latin typeface="Arial"/>
+              </a:rPr>
+              <a:t>Job Satisfaction</a:t>
+            </a:r>
+          </a:p>
+          <a:p>
+            <a:pPr marL="864000" lvl="1" indent="-324000" algn="l">
+              <a:spcBef>
+                <a:spcPts val="850"/>
+              </a:spcBef>
+              <a:buClr>
+                <a:srgbClr val="000000"/>
+              </a:buClr>
+              <a:buSzPct val="75000"/>
+              <a:buFont typeface="Symbol" charset="2"/>
+              <a:buChar char=""/>
+            </a:pPr>
+            <a:r>
+              <a:rPr lang="en-US" sz="2100" kern="0" dirty="0">
+                <a:solidFill>
+                  <a:srgbClr val="000000"/>
+                </a:solidFill>
+                <a:latin typeface="Arial"/>
+              </a:rPr>
+              <a:t>Marital Status</a:t>
+            </a:r>
+          </a:p>
+          <a:p>
+            <a:pPr marL="864000" lvl="1" indent="-324000" algn="l">
+              <a:spcBef>
+                <a:spcPts val="850"/>
+              </a:spcBef>
+              <a:buClr>
+                <a:srgbClr val="000000"/>
+              </a:buClr>
+              <a:buSzPct val="75000"/>
+              <a:buFont typeface="Symbol" charset="2"/>
+              <a:buChar char=""/>
+            </a:pPr>
+            <a:r>
+              <a:rPr lang="en-US" sz="2100" kern="0" dirty="0">
+                <a:solidFill>
+                  <a:srgbClr val="000000"/>
+                </a:solidFill>
+                <a:latin typeface="Arial"/>
+              </a:rPr>
+              <a:t>Monthly Income</a:t>
+            </a:r>
+          </a:p>
+          <a:p>
+            <a:pPr marL="864000" lvl="1" indent="-324000" algn="l">
+              <a:spcBef>
+                <a:spcPts val="850"/>
+              </a:spcBef>
+              <a:buClr>
+                <a:srgbClr val="000000"/>
+              </a:buClr>
+              <a:buSzPct val="75000"/>
+              <a:buFont typeface="Symbol" charset="2"/>
+              <a:buChar char=""/>
+            </a:pPr>
+            <a:r>
+              <a:rPr lang="en-US" sz="2100" kern="0" dirty="0">
+                <a:solidFill>
+                  <a:srgbClr val="000000"/>
+                </a:solidFill>
+                <a:latin typeface="Arial"/>
+              </a:rPr>
+              <a:t>Number of Companies Worked</a:t>
+            </a:r>
+          </a:p>
+          <a:p>
+            <a:pPr marL="864000" lvl="1" indent="-324000" algn="l">
+              <a:spcBef>
+                <a:spcPts val="850"/>
+              </a:spcBef>
+              <a:buClr>
+                <a:srgbClr val="000000"/>
+              </a:buClr>
+              <a:buSzPct val="75000"/>
+              <a:buFont typeface="Symbol" charset="2"/>
+              <a:buChar char=""/>
+            </a:pPr>
+            <a:r>
+              <a:rPr lang="en-US" sz="2100" kern="0" dirty="0">
+                <a:solidFill>
+                  <a:srgbClr val="000000"/>
+                </a:solidFill>
+                <a:latin typeface="Arial"/>
+              </a:rPr>
+              <a:t>Overtime</a:t>
+            </a:r>
           </a:p>
         </p:txBody>
       </p:sp>
     </p:spTree>
   </p:cSld>
-  <mc:AlternateContent>
-    <mc:Choice Requires="p14">
-      <p:transition spd="slow" p14:dur="2000"/>
-    </mc:Choice>
-    <mc:Fallback>
-      <p:transition spd="slow"/>
-    </mc:Fallback>
-  </mc:AlternateContent>
+  <p:clrMapOvr>
+    <a:masterClrMapping/>
+  </p:clrMapOvr>
 </p:sld>
 </file>
 
 <file path=ppt/slides/slide5.xml><?xml version="1.0" encoding="utf-8"?>
-<p:sld xmlns:a="http://schemas.openxmlformats.org/drawingml/2006/main" xmlns:p="http://schemas.openxmlformats.org/presentationml/2006/main" xmlns:r="http://schemas.openxmlformats.org/officeDocument/2006/relationships" xmlns:p14="http://schemas.microsoft.com/office/powerpoint/2010/main" xmlns:p15="http://schemas.microsoft.com/office/powerpoint/2012/main" xmlns:mc="http://schemas.openxmlformats.org/markup-compatibility/2006">
+<p:sld xmlns:a="http://schemas.openxmlformats.org/drawingml/2006/main" xmlns:r="http://schemas.openxmlformats.org/officeDocument/2006/relationships" xmlns:p="http://schemas.openxmlformats.org/presentationml/2006/main">
   <p:cSld>
     <p:spTree>
       <p:nvGrpSpPr>
@@ -9182,6 +8074,7 @@
           <a:bodyPr lIns="0" tIns="0" rIns="0" bIns="0" anchor="ctr">
             <a:spAutoFit/>
           </a:bodyPr>
+          <a:lstStyle/>
           <a:p>
             <a:pPr indent="0" algn="ctr" defTabSz="914400">
               <a:lnSpc>
@@ -9193,7 +8086,7 @@
               </a:tabLst>
             </a:pPr>
             <a:r>
-              <a:rPr lang="en-US" sz="3300" b="0" u="none" strike="noStrike">
+              <a:rPr lang="en-US" sz="3300" b="0" u="none" strike="noStrike" dirty="0">
                 <a:solidFill>
                   <a:srgbClr val="000000"/>
                 </a:solidFill>
@@ -9204,7 +8097,7 @@
               </a:rPr>
               <a:t>Data Preparation</a:t>
             </a:r>
-            <a:endParaRPr lang="en-US" sz="3300" b="0" u="none" strike="noStrike">
+            <a:endParaRPr lang="en-US" sz="3300" b="0" u="none" strike="noStrike" dirty="0">
               <a:solidFill>
                 <a:srgbClr val="000000"/>
               </a:solidFill>
@@ -9242,6 +8135,7 @@
           <a:bodyPr lIns="0" tIns="0" rIns="0" bIns="0" anchor="t">
             <a:normAutofit/>
           </a:bodyPr>
+          <a:lstStyle/>
           <a:p>
             <a:pPr marL="432000" indent="-324000" algn="l" defTabSz="914400">
               <a:lnSpc>
@@ -9258,30 +8152,18 @@
               <a:buChar char=""/>
             </a:pPr>
             <a:r>
-              <a:rPr lang="en-US" sz="2400" b="0" u="none" strike="noStrike">
-                <a:solidFill>
-                  <a:srgbClr val="000000"/>
-                </a:solidFill>
-                <a:effectLst/>
-                <a:uFillTx/>
-                <a:latin typeface="Arial"/>
-                <a:ea typeface="DejaVu Sans"/>
-              </a:rPr>
-              <a:t>The dataset contains 35 different points and required little </a:t>
-            </a:r>
-            <a:r>
-              <a:rPr lang="en-US" sz="2400" b="0" u="none" strike="noStrike">
-                <a:solidFill>
-                  <a:srgbClr val="000000"/>
-                </a:solidFill>
-                <a:effectLst/>
-                <a:uFillTx/>
-                <a:latin typeface="Arial"/>
-                <a:ea typeface="DejaVu Sans"/>
-              </a:rPr>
-              <a:t>cleaning.</a:t>
-            </a:r>
-            <a:endParaRPr lang="en-US" sz="2400" b="0" u="none" strike="noStrike">
+              <a:rPr lang="en-US" sz="2400" b="0" u="none" strike="noStrike" dirty="0">
+                <a:solidFill>
+                  <a:srgbClr val="000000"/>
+                </a:solidFill>
+                <a:effectLst/>
+                <a:uFillTx/>
+                <a:latin typeface="Arial"/>
+                <a:ea typeface="DejaVu Sans"/>
+              </a:rPr>
+              <a:t>The dataset required little cleaning.</a:t>
+            </a:r>
+            <a:endParaRPr lang="en-US" sz="2400" b="0" u="none" strike="noStrike" dirty="0">
               <a:solidFill>
                 <a:srgbClr val="000000"/>
               </a:solidFill>
@@ -9306,30 +8188,18 @@
               <a:buChar char=""/>
             </a:pPr>
             <a:r>
-              <a:rPr lang="en-US" sz="2100" b="0" u="none" strike="noStrike">
-                <a:solidFill>
-                  <a:srgbClr val="000000"/>
-                </a:solidFill>
-                <a:effectLst/>
-                <a:uFillTx/>
-                <a:latin typeface="Arial"/>
-                <a:ea typeface="DejaVu Sans"/>
-              </a:rPr>
-              <a:t>For this project, we converted ‘Attrition’ to a binary outcome where </a:t>
-            </a:r>
-            <a:r>
-              <a:rPr lang="en-US" sz="2100" b="0" u="none" strike="noStrike">
-                <a:solidFill>
-                  <a:srgbClr val="000000"/>
-                </a:solidFill>
-                <a:effectLst/>
-                <a:uFillTx/>
-                <a:latin typeface="Arial"/>
-                <a:ea typeface="DejaVu Sans"/>
-              </a:rPr>
-              <a:t>Yes = 1 - meaning the employee left the company</a:t>
-            </a:r>
-            <a:endParaRPr lang="en-US" sz="2100" b="0" u="none" strike="noStrike">
+              <a:rPr lang="en-US" sz="2100" b="0" u="none" strike="noStrike" dirty="0">
+                <a:solidFill>
+                  <a:srgbClr val="000000"/>
+                </a:solidFill>
+                <a:effectLst/>
+                <a:uFillTx/>
+                <a:latin typeface="Arial"/>
+                <a:ea typeface="DejaVu Sans"/>
+              </a:rPr>
+              <a:t>For this project, we converted ‘Attrition’ to a binary outcome where Yes = 1 - meaning the employee left the company</a:t>
+            </a:r>
+            <a:endParaRPr lang="en-US" sz="2100" b="0" u="none" strike="noStrike" dirty="0">
               <a:solidFill>
                 <a:srgbClr val="000000"/>
               </a:solidFill>
@@ -9354,7 +8224,7 @@
               <a:buChar char=""/>
             </a:pPr>
             <a:r>
-              <a:rPr lang="en-US" sz="2100" b="0" u="none" strike="noStrike">
+              <a:rPr lang="en-US" sz="2100" b="0" u="none" strike="noStrike" dirty="0">
                 <a:solidFill>
                   <a:srgbClr val="000000"/>
                 </a:solidFill>
@@ -9366,7 +8236,7 @@
               <a:t>Removed from data: </a:t>
             </a:r>
             <a:r>
-              <a:rPr lang="en-US" sz="2000" b="0" u="none" strike="noStrike">
+              <a:rPr lang="en-US" sz="2000" b="0" u="none" strike="noStrike" dirty="0">
                 <a:solidFill>
                   <a:schemeClr val="dk1"/>
                 </a:solidFill>
@@ -9375,10 +8245,10 @@
                 <a:latin typeface="Arial"/>
                 <a:ea typeface="DejaVu Sans"/>
               </a:rPr>
-              <a:t>'Attrition’, 'Department', 'EmployeeNumber', </a:t>
-            </a:r>
-            <a:r>
-              <a:rPr lang="en-US" sz="2000" b="0" u="none" strike="noStrike">
+              <a:t>Attrition, Department, </a:t>
+            </a:r>
+            <a:r>
+              <a:rPr lang="en-US" sz="2000" b="0" u="none" strike="noStrike" dirty="0" err="1">
                 <a:solidFill>
                   <a:schemeClr val="dk1"/>
                 </a:solidFill>
@@ -9387,10 +8257,10 @@
                 <a:latin typeface="Arial"/>
                 <a:ea typeface="DejaVu Sans"/>
               </a:rPr>
-              <a:t>'DailyRate', 'MonthlyIncome', 'EmployeeCount', 'Over18', </a:t>
-            </a:r>
-            <a:r>
-              <a:rPr lang="en-US" sz="2000" b="0" u="none" strike="noStrike">
+              <a:t>EmployeeNumber</a:t>
+            </a:r>
+            <a:r>
+              <a:rPr lang="en-US" sz="2000" b="0" u="none" strike="noStrike" dirty="0">
                 <a:solidFill>
                   <a:schemeClr val="dk1"/>
                 </a:solidFill>
@@ -9399,9 +8269,117 @@
                 <a:latin typeface="Arial"/>
                 <a:ea typeface="DejaVu Sans"/>
               </a:rPr>
-              <a:t>'PerformanceRating', 'StandardHours’</a:t>
-            </a:r>
-            <a:endParaRPr lang="en-US" sz="2000" b="0" u="none" strike="noStrike">
+              <a:t>, </a:t>
+            </a:r>
+            <a:r>
+              <a:rPr lang="en-US" sz="2000" b="0" u="none" strike="noStrike" dirty="0" err="1">
+                <a:solidFill>
+                  <a:schemeClr val="dk1"/>
+                </a:solidFill>
+                <a:effectLst/>
+                <a:uFillTx/>
+                <a:latin typeface="Arial"/>
+                <a:ea typeface="DejaVu Sans"/>
+              </a:rPr>
+              <a:t>DailyRate</a:t>
+            </a:r>
+            <a:r>
+              <a:rPr lang="en-US" sz="2000" b="0" u="none" strike="noStrike" dirty="0">
+                <a:solidFill>
+                  <a:schemeClr val="dk1"/>
+                </a:solidFill>
+                <a:effectLst/>
+                <a:uFillTx/>
+                <a:latin typeface="Arial"/>
+                <a:ea typeface="DejaVu Sans"/>
+              </a:rPr>
+              <a:t>, </a:t>
+            </a:r>
+            <a:r>
+              <a:rPr lang="en-US" sz="2000" b="0" u="none" strike="noStrike" dirty="0" err="1">
+                <a:solidFill>
+                  <a:schemeClr val="dk1"/>
+                </a:solidFill>
+                <a:effectLst/>
+                <a:uFillTx/>
+                <a:latin typeface="Arial"/>
+                <a:ea typeface="DejaVu Sans"/>
+              </a:rPr>
+              <a:t>MonthlyIncome</a:t>
+            </a:r>
+            <a:r>
+              <a:rPr lang="en-US" sz="2000" b="0" u="none" strike="noStrike" dirty="0">
+                <a:solidFill>
+                  <a:schemeClr val="dk1"/>
+                </a:solidFill>
+                <a:effectLst/>
+                <a:uFillTx/>
+                <a:latin typeface="Arial"/>
+                <a:ea typeface="DejaVu Sans"/>
+              </a:rPr>
+              <a:t>, </a:t>
+            </a:r>
+            <a:r>
+              <a:rPr lang="en-US" sz="2000" b="0" u="none" strike="noStrike" dirty="0" err="1">
+                <a:solidFill>
+                  <a:schemeClr val="dk1"/>
+                </a:solidFill>
+                <a:effectLst/>
+                <a:uFillTx/>
+                <a:latin typeface="Arial"/>
+                <a:ea typeface="DejaVu Sans"/>
+              </a:rPr>
+              <a:t>EmployeeCount</a:t>
+            </a:r>
+            <a:r>
+              <a:rPr lang="en-US" sz="2000" b="0" u="none" strike="noStrike" dirty="0">
+                <a:solidFill>
+                  <a:schemeClr val="dk1"/>
+                </a:solidFill>
+                <a:effectLst/>
+                <a:uFillTx/>
+                <a:latin typeface="Arial"/>
+                <a:ea typeface="DejaVu Sans"/>
+              </a:rPr>
+              <a:t>, Over18, </a:t>
+            </a:r>
+            <a:r>
+              <a:rPr lang="en-US" sz="2000" b="0" u="none" strike="noStrike" dirty="0" err="1">
+                <a:solidFill>
+                  <a:schemeClr val="dk1"/>
+                </a:solidFill>
+                <a:effectLst/>
+                <a:uFillTx/>
+                <a:latin typeface="Arial"/>
+                <a:ea typeface="DejaVu Sans"/>
+              </a:rPr>
+              <a:t>PerformanceRating</a:t>
+            </a:r>
+            <a:r>
+              <a:rPr lang="en-US" sz="2000" b="0" u="none" strike="noStrike" dirty="0">
+                <a:solidFill>
+                  <a:schemeClr val="dk1"/>
+                </a:solidFill>
+                <a:effectLst/>
+                <a:uFillTx/>
+                <a:latin typeface="Arial"/>
+                <a:ea typeface="DejaVu Sans"/>
+              </a:rPr>
+              <a:t>, </a:t>
+            </a:r>
+            <a:r>
+              <a:rPr lang="en-US" sz="2000" b="0" u="none" strike="noStrike" dirty="0" err="1">
+                <a:solidFill>
+                  <a:schemeClr val="dk1"/>
+                </a:solidFill>
+                <a:effectLst/>
+                <a:uFillTx/>
+                <a:latin typeface="Arial"/>
+                <a:ea typeface="DejaVu Sans"/>
+              </a:rPr>
+              <a:t>StandardHours</a:t>
+            </a:r>
+            <a:endParaRPr lang="en-US" sz="2000" b="0" u="none" strike="noStrike" dirty="0">
               <a:solidFill>
                 <a:srgbClr val="000000"/>
               </a:solidFill>
@@ -9426,7 +8404,7 @@
               <a:buChar char=""/>
             </a:pPr>
             <a:r>
-              <a:rPr lang="en-US" sz="2000" b="0" u="none" strike="noStrike">
+              <a:rPr lang="en-US" sz="2000" b="0" u="none" strike="noStrike" dirty="0">
                 <a:solidFill>
                   <a:schemeClr val="dk1"/>
                 </a:solidFill>
@@ -9435,21 +8413,9 @@
                 <a:latin typeface="Arial"/>
                 <a:ea typeface="DejaVu Sans"/>
               </a:rPr>
-              <a:t>These were removed due to the similarities shared with other </a:t>
-            </a:r>
-            <a:r>
-              <a:rPr lang="en-US" sz="2000" b="0" u="none" strike="noStrike">
-                <a:solidFill>
-                  <a:schemeClr val="dk1"/>
-                </a:solidFill>
-                <a:effectLst/>
-                <a:uFillTx/>
-                <a:latin typeface="Arial"/>
-                <a:ea typeface="DejaVu Sans"/>
-              </a:rPr>
-              <a:t>predictors, and thus they were just adding more noise.</a:t>
-            </a:r>
-            <a:endParaRPr lang="en-US" sz="2000" b="0" u="none" strike="noStrike">
+              <a:t>Removed due to the similarities shared with other predictors, and thus they were just adding more noise.</a:t>
+            </a:r>
+            <a:endParaRPr lang="en-US" sz="2000" b="0" u="none" strike="noStrike" dirty="0">
               <a:solidFill>
                 <a:srgbClr val="000000"/>
               </a:solidFill>
@@ -9471,7 +8437,7 @@
                 <a:tab pos="0" algn="l"/>
               </a:tabLst>
             </a:pPr>
-            <a:endParaRPr lang="en-US" sz="2100" b="0" u="none" strike="noStrike">
+            <a:endParaRPr lang="en-US" sz="2100" b="0" u="none" strike="noStrike" dirty="0">
               <a:solidFill>
                 <a:srgbClr val="000000"/>
               </a:solidFill>
@@ -9484,19 +8450,14 @@
       </p:sp>
     </p:spTree>
   </p:cSld>
-  <mc:AlternateContent>
-    <mc:Choice Requires="p14">
-      <p:transition spd="slow" p14:dur="2000"/>
-    </mc:Choice>
-    <mc:Fallback>
-      <p:transition spd="slow"/>
-    </mc:Fallback>
-  </mc:AlternateContent>
+  <p:clrMapOvr>
+    <a:masterClrMapping/>
+  </p:clrMapOvr>
 </p:sld>
 </file>
 
 <file path=ppt/slides/slide6.xml><?xml version="1.0" encoding="utf-8"?>
-<p:sld xmlns:a="http://schemas.openxmlformats.org/drawingml/2006/main" xmlns:p="http://schemas.openxmlformats.org/presentationml/2006/main" xmlns:r="http://schemas.openxmlformats.org/officeDocument/2006/relationships" xmlns:p14="http://schemas.microsoft.com/office/powerpoint/2010/main" xmlns:p15="http://schemas.microsoft.com/office/powerpoint/2012/main" xmlns:mc="http://schemas.openxmlformats.org/markup-compatibility/2006">
+<p:sld xmlns:a="http://schemas.openxmlformats.org/drawingml/2006/main" xmlns:r="http://schemas.openxmlformats.org/officeDocument/2006/relationships" xmlns:p="http://schemas.openxmlformats.org/presentationml/2006/main">
   <p:cSld>
     <p:spTree>
       <p:nvGrpSpPr>
@@ -9539,6 +8500,7 @@
           <a:bodyPr lIns="0" tIns="0" rIns="0" bIns="0" anchor="ctr">
             <a:spAutoFit/>
           </a:bodyPr>
+          <a:lstStyle/>
           <a:p>
             <a:pPr indent="0" algn="ctr" defTabSz="914400">
               <a:lnSpc>
@@ -9599,6 +8561,7 @@
           <a:bodyPr lIns="0" tIns="0" rIns="0" bIns="0" anchor="t">
             <a:normAutofit/>
           </a:bodyPr>
+          <a:lstStyle/>
           <a:p>
             <a:pPr marL="432000" indent="-324000" algn="l" defTabSz="914400">
               <a:lnSpc>
@@ -9644,7 +8607,7 @@
           <p:nvPr/>
         </p:nvPicPr>
         <p:blipFill>
-          <a:blip r:embed="rId1"/>
+          <a:blip r:embed="rId2"/>
           <a:stretch/>
         </p:blipFill>
         <p:spPr>
@@ -9663,19 +8626,14 @@
       </p:pic>
     </p:spTree>
   </p:cSld>
-  <mc:AlternateContent>
-    <mc:Choice Requires="p14">
-      <p:transition spd="slow" p14:dur="2000"/>
-    </mc:Choice>
-    <mc:Fallback>
-      <p:transition spd="slow"/>
-    </mc:Fallback>
-  </mc:AlternateContent>
+  <p:clrMapOvr>
+    <a:masterClrMapping/>
+  </p:clrMapOvr>
 </p:sld>
 </file>
 
 <file path=ppt/slides/slide7.xml><?xml version="1.0" encoding="utf-8"?>
-<p:sld xmlns:a="http://schemas.openxmlformats.org/drawingml/2006/main" xmlns:p="http://schemas.openxmlformats.org/presentationml/2006/main" xmlns:r="http://schemas.openxmlformats.org/officeDocument/2006/relationships" xmlns:p14="http://schemas.microsoft.com/office/powerpoint/2010/main" xmlns:p15="http://schemas.microsoft.com/office/powerpoint/2012/main" xmlns:mc="http://schemas.openxmlformats.org/markup-compatibility/2006">
+<p:sld xmlns:a="http://schemas.openxmlformats.org/drawingml/2006/main" xmlns:r="http://schemas.openxmlformats.org/officeDocument/2006/relationships" xmlns:p="http://schemas.openxmlformats.org/presentationml/2006/main">
   <p:cSld>
     <p:spTree>
       <p:nvGrpSpPr>
@@ -9718,6 +8676,7 @@
           <a:bodyPr lIns="0" tIns="0" rIns="0" bIns="0" anchor="ctr">
             <a:spAutoFit/>
           </a:bodyPr>
+          <a:lstStyle/>
           <a:p>
             <a:pPr indent="0" algn="ctr" defTabSz="914400">
               <a:lnSpc>
@@ -9738,19 +8697,7 @@
                 <a:latin typeface="Arial"/>
                 <a:ea typeface="DejaVu Sans"/>
               </a:rPr>
-              <a:t>Satisfaction vs </a:t>
-            </a:r>
-            <a:r>
-              <a:rPr lang="en-US" sz="3300" b="0" u="none" strike="noStrike">
-                <a:solidFill>
-                  <a:srgbClr val="000000"/>
-                </a:solidFill>
-                <a:effectLst/>
-                <a:uFillTx/>
-                <a:latin typeface="Arial"/>
-                <a:ea typeface="DejaVu Sans"/>
-              </a:rPr>
-              <a:t>Attrition</a:t>
+              <a:t>Satisfaction vs Attrition</a:t>
             </a:r>
             <a:endParaRPr lang="en-US" sz="3300" b="0" u="none" strike="noStrike">
               <a:solidFill>
@@ -9790,6 +8737,7 @@
           <a:bodyPr lIns="0" tIns="0" rIns="0" bIns="0" anchor="t">
             <a:normAutofit/>
           </a:bodyPr>
+          <a:lstStyle/>
           <a:p>
             <a:pPr marL="432000" indent="-324000" algn="l" defTabSz="914400">
               <a:lnSpc>
@@ -9871,7 +8819,7 @@
           <p:nvPr/>
         </p:nvPicPr>
         <p:blipFill>
-          <a:blip r:embed="rId1"/>
+          <a:blip r:embed="rId2"/>
           <a:stretch/>
         </p:blipFill>
         <p:spPr>
@@ -9890,19 +8838,14 @@
       </p:pic>
     </p:spTree>
   </p:cSld>
-  <mc:AlternateContent>
-    <mc:Choice Requires="p14">
-      <p:transition spd="slow" p14:dur="2000"/>
-    </mc:Choice>
-    <mc:Fallback>
-      <p:transition spd="slow"/>
-    </mc:Fallback>
-  </mc:AlternateContent>
+  <p:clrMapOvr>
+    <a:masterClrMapping/>
+  </p:clrMapOvr>
 </p:sld>
 </file>
 
 <file path=ppt/slides/slide8.xml><?xml version="1.0" encoding="utf-8"?>
-<p:sld xmlns:a="http://schemas.openxmlformats.org/drawingml/2006/main" xmlns:p="http://schemas.openxmlformats.org/presentationml/2006/main" xmlns:r="http://schemas.openxmlformats.org/officeDocument/2006/relationships" xmlns:p14="http://schemas.microsoft.com/office/powerpoint/2010/main" xmlns:p15="http://schemas.microsoft.com/office/powerpoint/2012/main" xmlns:mc="http://schemas.openxmlformats.org/markup-compatibility/2006">
+<p:sld xmlns:a="http://schemas.openxmlformats.org/drawingml/2006/main" xmlns:r="http://schemas.openxmlformats.org/officeDocument/2006/relationships" xmlns:p="http://schemas.openxmlformats.org/presentationml/2006/main">
   <p:cSld>
     <p:spTree>
       <p:nvGrpSpPr>
@@ -9945,6 +8888,7 @@
           <a:bodyPr lIns="0" tIns="0" rIns="0" bIns="0" anchor="ctr">
             <a:spAutoFit/>
           </a:bodyPr>
+          <a:lstStyle/>
           <a:p>
             <a:pPr indent="0" algn="ctr" defTabSz="914400">
               <a:lnSpc>
@@ -9956,7 +8900,7 @@
               </a:tabLst>
             </a:pPr>
             <a:r>
-              <a:rPr lang="en-US" sz="3300" b="0" u="none" strike="noStrike">
+              <a:rPr lang="en-US" sz="3300" b="0" u="none" strike="noStrike" dirty="0">
                 <a:solidFill>
                   <a:srgbClr val="000000"/>
                 </a:solidFill>
@@ -9967,7 +8911,7 @@
               </a:rPr>
               <a:t>Age vs Attrition</a:t>
             </a:r>
-            <a:endParaRPr lang="en-US" sz="3300" b="0" u="none" strike="noStrike">
+            <a:endParaRPr lang="en-US" sz="3300" b="0" u="none" strike="noStrike" dirty="0">
               <a:solidFill>
                 <a:srgbClr val="000000"/>
               </a:solidFill>
@@ -10005,6 +8949,7 @@
           <a:bodyPr lIns="0" tIns="0" rIns="0" bIns="0" anchor="t">
             <a:normAutofit fontScale="92500" lnSpcReduction="9999"/>
           </a:bodyPr>
+          <a:lstStyle/>
           <a:p>
             <a:pPr marL="432000" indent="-324000" algn="l" defTabSz="914400">
               <a:lnSpc>
@@ -10021,7 +8966,7 @@
               <a:buChar char=""/>
             </a:pPr>
             <a:r>
-              <a:rPr lang="en-US" sz="2400" b="0" u="none" strike="noStrike">
+              <a:rPr lang="en-US" sz="2400" b="0" u="none" strike="noStrike" dirty="0">
                 <a:solidFill>
                   <a:srgbClr val="000000"/>
                 </a:solidFill>
@@ -10032,7 +8977,7 @@
               </a:rPr>
               <a:t>Younger employees are more likely to leave, but levels off, then reverses around age 45.</a:t>
             </a:r>
-            <a:endParaRPr lang="en-US" sz="2400" b="0" u="none" strike="noStrike">
+            <a:endParaRPr lang="en-US" sz="2400" b="0" u="none" strike="noStrike" dirty="0">
               <a:solidFill>
                 <a:srgbClr val="000000"/>
               </a:solidFill>
@@ -10057,7 +9002,7 @@
               <a:buChar char=""/>
             </a:pPr>
             <a:r>
-              <a:rPr lang="en-US" sz="2100" b="0" u="none" strike="noStrike">
+              <a:rPr lang="en-US" sz="2100" b="0" u="none" strike="noStrike" dirty="0">
                 <a:solidFill>
                   <a:srgbClr val="000000"/>
                 </a:solidFill>
@@ -10068,7 +9013,7 @@
               </a:rPr>
               <a:t>Younger employees may be more mobile and able to accept jobs elsewhere.</a:t>
             </a:r>
-            <a:endParaRPr lang="en-US" sz="2100" b="0" u="none" strike="noStrike">
+            <a:endParaRPr lang="en-US" sz="2100" b="0" u="none" strike="noStrike" dirty="0">
               <a:solidFill>
                 <a:srgbClr val="000000"/>
               </a:solidFill>
@@ -10093,18 +9038,18 @@
               <a:buChar char=""/>
             </a:pPr>
             <a:r>
-              <a:rPr lang="en-US" sz="2100" b="0" u="none" strike="noStrike">
-                <a:solidFill>
-                  <a:srgbClr val="000000"/>
-                </a:solidFill>
-                <a:effectLst/>
-                <a:uFillTx/>
-                <a:latin typeface="Arial"/>
-                <a:ea typeface="DejaVu Sans"/>
-              </a:rPr>
-              <a:t>Middle-age workers are more likely to have families, and opt for more stable employment.</a:t>
-            </a:r>
-            <a:endParaRPr lang="en-US" sz="2100" b="0" u="none" strike="noStrike">
+              <a:rPr lang="en-US" sz="2100" b="0" u="none" strike="noStrike" dirty="0">
+                <a:solidFill>
+                  <a:srgbClr val="000000"/>
+                </a:solidFill>
+                <a:effectLst/>
+                <a:uFillTx/>
+                <a:latin typeface="Arial"/>
+                <a:ea typeface="DejaVu Sans"/>
+              </a:rPr>
+              <a:t>Middle-aged workers are more likely to have families and opt for more stable employment.</a:t>
+            </a:r>
+            <a:endParaRPr lang="en-US" sz="2100" b="0" u="none" strike="noStrike" dirty="0">
               <a:solidFill>
                 <a:srgbClr val="000000"/>
               </a:solidFill>
@@ -10129,7 +9074,7 @@
               <a:buChar char=""/>
             </a:pPr>
             <a:r>
-              <a:rPr lang="en-US" sz="2100" b="0" u="none" strike="noStrike">
+              <a:rPr lang="en-US" sz="2100" b="0" u="none" strike="noStrike" dirty="0">
                 <a:solidFill>
                   <a:srgbClr val="000000"/>
                 </a:solidFill>
@@ -10140,7 +9085,7 @@
               </a:rPr>
               <a:t>Older employees could be leaving for more senior level positions or retirement.</a:t>
             </a:r>
-            <a:endParaRPr lang="en-US" sz="2100" b="0" u="none" strike="noStrike">
+            <a:endParaRPr lang="en-US" sz="2100" b="0" u="none" strike="noStrike" dirty="0">
               <a:solidFill>
                 <a:srgbClr val="000000"/>
               </a:solidFill>
@@ -10158,7 +9103,7 @@
           <p:nvPr/>
         </p:nvPicPr>
         <p:blipFill>
-          <a:blip r:embed="rId1"/>
+          <a:blip r:embed="rId2"/>
           <a:stretch/>
         </p:blipFill>
         <p:spPr>
@@ -10177,19 +9122,14 @@
       </p:pic>
     </p:spTree>
   </p:cSld>
-  <mc:AlternateContent>
-    <mc:Choice Requires="p14">
-      <p:transition spd="slow" p14:dur="2000"/>
-    </mc:Choice>
-    <mc:Fallback>
-      <p:transition spd="slow"/>
-    </mc:Fallback>
-  </mc:AlternateContent>
+  <p:clrMapOvr>
+    <a:masterClrMapping/>
+  </p:clrMapOvr>
 </p:sld>
 </file>
 
 <file path=ppt/slides/slide9.xml><?xml version="1.0" encoding="utf-8"?>
-<p:sld xmlns:a="http://schemas.openxmlformats.org/drawingml/2006/main" xmlns:p="http://schemas.openxmlformats.org/presentationml/2006/main" xmlns:r="http://schemas.openxmlformats.org/officeDocument/2006/relationships" xmlns:p14="http://schemas.microsoft.com/office/powerpoint/2010/main" xmlns:p15="http://schemas.microsoft.com/office/powerpoint/2012/main" xmlns:mc="http://schemas.openxmlformats.org/markup-compatibility/2006">
+<p:sld xmlns:a="http://schemas.openxmlformats.org/drawingml/2006/main" xmlns:r="http://schemas.openxmlformats.org/officeDocument/2006/relationships" xmlns:p="http://schemas.openxmlformats.org/presentationml/2006/main">
   <p:cSld>
     <p:spTree>
       <p:nvGrpSpPr>
@@ -10232,6 +9172,7 @@
           <a:bodyPr lIns="0" tIns="0" rIns="0" bIns="0" anchor="ctr">
             <a:spAutoFit/>
           </a:bodyPr>
+          <a:lstStyle/>
           <a:p>
             <a:pPr indent="0" algn="ctr" defTabSz="914400">
               <a:lnSpc>
@@ -10292,6 +9233,7 @@
           <a:bodyPr lIns="0" tIns="0" rIns="0" bIns="0" anchor="t">
             <a:normAutofit/>
           </a:bodyPr>
+          <a:lstStyle/>
           <a:p>
             <a:pPr marL="432000" indent="-324000" algn="l" defTabSz="914400">
               <a:lnSpc>
@@ -10308,18 +9250,18 @@
               <a:buChar char=""/>
             </a:pPr>
             <a:r>
-              <a:rPr lang="en-US" sz="2400" b="0" u="none" strike="noStrike">
-                <a:solidFill>
-                  <a:srgbClr val="000000"/>
-                </a:solidFill>
-                <a:effectLst/>
-                <a:uFillTx/>
-                <a:latin typeface="Arial"/>
-                <a:ea typeface="DejaVu Sans"/>
-              </a:rPr>
-              <a:t>Commute distance impacts attrition, but the affect wanes around 15-20 miles.</a:t>
-            </a:r>
-            <a:endParaRPr lang="en-US" sz="2400" b="0" u="none" strike="noStrike">
+              <a:rPr lang="en-US" sz="2400" b="0" u="none" strike="noStrike" dirty="0">
+                <a:solidFill>
+                  <a:srgbClr val="000000"/>
+                </a:solidFill>
+                <a:effectLst/>
+                <a:uFillTx/>
+                <a:latin typeface="Arial"/>
+                <a:ea typeface="DejaVu Sans"/>
+              </a:rPr>
+              <a:t>Commute distance impacts attrition, but the effect wanes around 15-20 miles.</a:t>
+            </a:r>
+            <a:endParaRPr lang="en-US" sz="2400" b="0" u="none" strike="noStrike" dirty="0">
               <a:solidFill>
                 <a:srgbClr val="000000"/>
               </a:solidFill>
@@ -10337,7 +9279,7 @@
           <p:nvPr/>
         </p:nvPicPr>
         <p:blipFill>
-          <a:blip r:embed="rId1"/>
+          <a:blip r:embed="rId2"/>
           <a:stretch/>
         </p:blipFill>
         <p:spPr>
@@ -10356,19 +9298,14 @@
       </p:pic>
     </p:spTree>
   </p:cSld>
-  <mc:AlternateContent>
-    <mc:Choice Requires="p14">
-      <p:transition spd="slow" p14:dur="2000"/>
-    </mc:Choice>
-    <mc:Fallback>
-      <p:transition spd="slow"/>
-    </mc:Fallback>
-  </mc:AlternateContent>
+  <p:clrMapOvr>
+    <a:masterClrMapping/>
+  </p:clrMapOvr>
 </p:sld>
 </file>
 
 <file path=ppt/theme/theme1.xml><?xml version="1.0" encoding="utf-8"?>
-<a:theme xmlns:a="http://schemas.openxmlformats.org/drawingml/2006/main" xmlns:r="http://schemas.openxmlformats.org/officeDocument/2006/relationships" name="Office">
+<a:theme xmlns:a="http://schemas.openxmlformats.org/drawingml/2006/main" name="Office">
   <a:themeElements>
     <a:clrScheme name="LibreOffice">
       <a:dk1>
@@ -10410,14 +9347,14 @@
     </a:clrScheme>
     <a:fontScheme name="Office">
       <a:majorFont>
-        <a:latin typeface="Arial" pitchFamily="0" charset="1"/>
-        <a:ea typeface="DejaVu Sans" pitchFamily="0" charset="1"/>
-        <a:cs typeface="DejaVu Sans" pitchFamily="0" charset="1"/>
+        <a:latin typeface="Arial"/>
+        <a:ea typeface="DejaVu Sans"/>
+        <a:cs typeface="DejaVu Sans"/>
       </a:majorFont>
       <a:minorFont>
-        <a:latin typeface="Arial" pitchFamily="0" charset="1"/>
-        <a:ea typeface="DejaVu Sans" pitchFamily="0" charset="1"/>
-        <a:cs typeface="DejaVu Sans" pitchFamily="0" charset="1"/>
+        <a:latin typeface="Arial"/>
+        <a:ea typeface="DejaVu Sans"/>
+        <a:cs typeface="DejaVu Sans"/>
       </a:minorFont>
     </a:fontScheme>
     <a:fmtScheme>
@@ -10470,11 +9407,13 @@
       </a:bgFillStyleLst>
     </a:fmtScheme>
   </a:themeElements>
+  <a:objectDefaults/>
+  <a:extraClrSchemeLst/>
 </a:theme>
 </file>
 
-<file path=ppt/theme/theme4.xml><?xml version="1.0" encoding="utf-8"?>
-<a:theme xmlns:a="http://schemas.openxmlformats.org/drawingml/2006/main" xmlns:r="http://schemas.openxmlformats.org/officeDocument/2006/relationships" name="Office Theme">
+<file path=ppt/theme/theme2.xml><?xml version="1.0" encoding="utf-8"?>
+<a:theme xmlns:a="http://schemas.openxmlformats.org/drawingml/2006/main" name="Office Theme">
   <a:themeElements>
     <a:clrScheme name="LibreOffice">
       <a:dk1>
@@ -10516,14 +9455,14 @@
     </a:clrScheme>
     <a:fontScheme name="Office">
       <a:majorFont>
-        <a:latin typeface="Arial" pitchFamily="0" charset="1"/>
-        <a:ea typeface="DejaVu Sans" pitchFamily="0" charset="1"/>
-        <a:cs typeface="DejaVu Sans" pitchFamily="0" charset="1"/>
+        <a:latin typeface="Arial"/>
+        <a:ea typeface="DejaVu Sans"/>
+        <a:cs typeface="DejaVu Sans"/>
       </a:majorFont>
       <a:minorFont>
-        <a:latin typeface="Arial" pitchFamily="0" charset="1"/>
-        <a:ea typeface="DejaVu Sans" pitchFamily="0" charset="1"/>
-        <a:cs typeface="DejaVu Sans" pitchFamily="0" charset="1"/>
+        <a:latin typeface="Arial"/>
+        <a:ea typeface="DejaVu Sans"/>
+        <a:cs typeface="DejaVu Sans"/>
       </a:minorFont>
     </a:fontScheme>
     <a:fmtScheme>
@@ -10576,5 +9515,7 @@
       </a:bgFillStyleLst>
     </a:fmtScheme>
   </a:themeElements>
+  <a:objectDefaults/>
+  <a:extraClrSchemeLst/>
 </a:theme>
 </file>
--- a/presentations/project2_presentation.pptx
+++ b/presentations/project2_presentation.pptx
@@ -5,7 +5,7 @@
     <p:sldMasterId id="2147483648" r:id="rId1"/>
   </p:sldMasterIdLst>
   <p:notesMasterIdLst>
-    <p:notesMasterId r:id="rId22"/>
+    <p:notesMasterId r:id="rId23"/>
   </p:notesMasterIdLst>
   <p:sldIdLst>
     <p:sldId id="256" r:id="rId2"/>
@@ -28,6 +28,7 @@
     <p:sldId id="275" r:id="rId19"/>
     <p:sldId id="276" r:id="rId20"/>
     <p:sldId id="277" r:id="rId21"/>
+    <p:sldId id="278" r:id="rId22"/>
   </p:sldIdLst>
   <p:sldSz cx="10080625" cy="5670550"/>
   <p:notesSz cx="7772400" cy="10058400"/>
@@ -7072,6 +7073,69 @@
 </p:sld>
 </file>
 
+<file path=ppt/slides/slide21.xml><?xml version="1.0" encoding="utf-8"?>
+<p:sld xmlns:a="http://schemas.openxmlformats.org/drawingml/2006/main" xmlns:r="http://schemas.openxmlformats.org/officeDocument/2006/relationships" xmlns:p="http://schemas.openxmlformats.org/presentationml/2006/main">
+  <p:cSld>
+    <p:spTree>
+      <p:nvGrpSpPr>
+        <p:cNvPr id="1" name=""/>
+        <p:cNvGrpSpPr/>
+        <p:nvPr/>
+      </p:nvGrpSpPr>
+      <p:grpSpPr>
+        <a:xfrm>
+          <a:off x="0" y="0"/>
+          <a:ext cx="0" cy="0"/>
+          <a:chOff x="0" y="0"/>
+          <a:chExt cx="0" cy="0"/>
+        </a:xfrm>
+      </p:grpSpPr>
+      <p:sp>
+        <p:nvSpPr>
+          <p:cNvPr id="2" name="Title 1">
+            <a:extLst>
+              <a:ext uri="{FF2B5EF4-FFF2-40B4-BE49-F238E27FC236}">
+                <a16:creationId xmlns:a16="http://schemas.microsoft.com/office/drawing/2014/main" id="{3E56F261-5BFA-857E-2C40-70D219EDFB55}"/>
+              </a:ext>
+            </a:extLst>
+          </p:cNvPr>
+          <p:cNvSpPr>
+            <a:spLocks noGrp="1"/>
+          </p:cNvSpPr>
+          <p:nvPr>
+            <p:ph type="title"/>
+          </p:nvPr>
+        </p:nvSpPr>
+        <p:spPr>
+          <a:xfrm>
+            <a:off x="504672" y="1957244"/>
+            <a:ext cx="9071280" cy="946080"/>
+          </a:xfrm>
+        </p:spPr>
+        <p:txBody>
+          <a:bodyPr/>
+          <a:lstStyle/>
+          <a:p>
+            <a:r>
+              <a:rPr lang="en-US" dirty="0"/>
+              <a:t>Questions?</a:t>
+            </a:r>
+          </a:p>
+        </p:txBody>
+      </p:sp>
+    </p:spTree>
+    <p:extLst>
+      <p:ext uri="{BB962C8B-B14F-4D97-AF65-F5344CB8AC3E}">
+        <p14:creationId xmlns:p14="http://schemas.microsoft.com/office/powerpoint/2010/main" val="2479411555"/>
+      </p:ext>
+    </p:extLst>
+  </p:cSld>
+  <p:clrMapOvr>
+    <a:masterClrMapping/>
+  </p:clrMapOvr>
+</p:sld>
+</file>
+
 <file path=ppt/slides/slide3.xml><?xml version="1.0" encoding="utf-8"?>
 <p:sld xmlns:a="http://schemas.openxmlformats.org/drawingml/2006/main" xmlns:r="http://schemas.openxmlformats.org/officeDocument/2006/relationships" xmlns:p="http://schemas.openxmlformats.org/presentationml/2006/main">
   <p:cSld>
